--- a/Pregrado/Creatividad y pensamiento innovador/Clases/Sesion 01 - Presentación del curso · docente · estudiantes · ACAs/Presentacion.pptx
+++ b/Pregrado/Creatividad y pensamiento innovador/Clases/Sesion 01 - Presentación del curso · docente · estudiantes · ACAs/Presentacion.pptx
@@ -13,6 +13,19 @@
     <p:sldId id="261" r:id="rId12"/>
     <p:sldId id="262" r:id="rId13"/>
     <p:sldId id="263" r:id="rId14"/>
+    <p:sldId id="264" r:id="rId15"/>
+    <p:sldId id="265" r:id="rId16"/>
+    <p:sldId id="266" r:id="rId17"/>
+    <p:sldId id="267" r:id="rId18"/>
+    <p:sldId id="268" r:id="rId19"/>
+    <p:sldId id="269" r:id="rId20"/>
+    <p:sldId id="270" r:id="rId21"/>
+    <p:sldId id="271" r:id="rId22"/>
+    <p:sldId id="272" r:id="rId23"/>
+    <p:sldId id="273" r:id="rId24"/>
+    <p:sldId id="274" r:id="rId25"/>
+    <p:sldId id="275" r:id="rId26"/>
+    <p:sldId id="276" r:id="rId27"/>
   </p:sldIdLst>
   <p:sldSz cx="12191695" cy="6858000" type="screen4x3"/>
   <p:notesSz cx="6858000" cy="9144000"/>
@@ -3407,6 +3420,6024 @@
 </p:sld>
 </file>
 
+<file path=ppt/slides/slide10.xml><?xml version="1.0" encoding="utf-8"?>
+<p:sld xmlns:a="http://schemas.openxmlformats.org/drawingml/2006/main" xmlns:p="http://schemas.openxmlformats.org/presentationml/2006/main" xmlns:r="http://schemas.openxmlformats.org/officeDocument/2006/relationships">
+  <p:cSld>
+    <p:bg>
+      <p:bgPr>
+        <a:solidFill>
+          <a:srgbClr val="FFFFFF"/>
+        </a:solidFill>
+        <a:effectLst/>
+      </p:bgPr>
+    </p:bg>
+    <p:spTree>
+      <p:nvGrpSpPr>
+        <p:cNvPr id="1" name=""/>
+        <p:cNvGrpSpPr/>
+        <p:nvPr/>
+      </p:nvGrpSpPr>
+      <p:grpSpPr/>
+      <p:sp>
+        <p:nvSpPr>
+          <p:cNvPr id="2" name="Rectangle 1"/>
+          <p:cNvSpPr/>
+          <p:nvPr/>
+        </p:nvSpPr>
+        <p:spPr>
+          <a:xfrm>
+            <a:off x="0" y="0"/>
+            <a:ext cx="12191695" cy="1188720"/>
+          </a:xfrm>
+          <a:prstGeom prst="rect">
+            <a:avLst/>
+          </a:prstGeom>
+          <a:solidFill>
+            <a:srgbClr val="0C2340"/>
+          </a:solidFill>
+          <a:ln>
+            <a:noFill/>
+          </a:ln>
+          <a:effectLst/>
+        </p:spPr>
+        <p:style>
+          <a:lnRef idx="1">
+            <a:schemeClr val="accent1"/>
+          </a:lnRef>
+          <a:fillRef idx="3">
+            <a:schemeClr val="accent1"/>
+          </a:fillRef>
+          <a:effectRef idx="2">
+            <a:schemeClr val="accent1"/>
+          </a:effectRef>
+          <a:fontRef idx="minor">
+            <a:schemeClr val="lt1"/>
+          </a:fontRef>
+        </p:style>
+        <p:txBody>
+          <a:bodyPr rtlCol="0" anchor="ctr"/>
+          <a:lstStyle/>
+          <a:p>
+            <a:pPr algn="ctr"/>
+          </a:p>
+        </p:txBody>
+      </p:sp>
+      <p:sp>
+        <p:nvSpPr>
+          <p:cNvPr id="3" name="TextBox 2"/>
+          <p:cNvSpPr txBox="1"/>
+          <p:nvPr/>
+        </p:nvSpPr>
+        <p:spPr>
+          <a:xfrm>
+            <a:off x="640080" y="0"/>
+            <a:ext cx="9082735" cy="1188720"/>
+          </a:xfrm>
+          <a:prstGeom prst="rect">
+            <a:avLst/>
+          </a:prstGeom>
+          <a:noFill/>
+        </p:spPr>
+        <p:txBody>
+          <a:bodyPr wrap="square" anchor="ctr" lIns="0" rIns="0" tIns="0" bIns="0">
+            <a:spAutoFit/>
+          </a:bodyPr>
+          <a:lstStyle/>
+          <a:p>
+            <a:pPr algn="ctr"/>
+            <a:r>
+              <a:rPr sz="2600" b="1" i="0">
+                <a:solidFill>
+                  <a:srgbClr val="FFFFFF"/>
+                </a:solidFill>
+                <a:latin typeface="Calibri"/>
+              </a:rPr>
+              <a:t>Qué separa un entregable fuerte de uno flojo</a:t>
+            </a:r>
+          </a:p>
+        </p:txBody>
+      </p:sp>
+      <p:graphicFrame>
+        <p:nvGraphicFramePr>
+          <p:cNvPr id="4" name="Table 3"/>
+          <p:cNvGraphicFramePr>
+            <a:graphicFrameLocks noGrp="1"/>
+          </p:cNvGraphicFramePr>
+          <p:nvPr/>
+        </p:nvGraphicFramePr>
+        <p:xfrm>
+          <a:off x="640080" y="1691639"/>
+          <a:ext cx="10911534" cy="3520440"/>
+        </p:xfrm>
+        <a:graphic>
+          <a:graphicData uri="http://schemas.openxmlformats.org/drawingml/2006/table">
+            <a:tbl>
+              <a:tblPr>
+                <a:tableStyleId>{2D5ABB26-0587-4C30-8999-92F81FD0307C}</a:tableStyleId>
+              </a:tblPr>
+              <a:tblGrid>
+                <a:gridCol w="1650484"/>
+                <a:gridCol w="4492985"/>
+                <a:gridCol w="4768065"/>
+              </a:tblGrid>
+              <a:tr h="502920">
+                <a:tc>
+                  <a:txBody>
+                    <a:bodyPr/>
+                    <a:lstStyle/>
+                    <a:p>
+                      <a:pPr algn="l"/>
+                      <a:r>
+                        <a:rPr sz="1300" b="1" i="0">
+                          <a:solidFill>
+                            <a:srgbClr val="FFFFFF"/>
+                          </a:solidFill>
+                          <a:latin typeface="Calibri"/>
+                        </a:rPr>
+                        <a:t>Aspecto</a:t>
+                      </a:r>
+                    </a:p>
+                  </a:txBody>
+                  <a:tcPr anchor="ctr" marL="109728" marR="91440" marT="36576" marB="36576">
+                    <a:solidFill>
+                      <a:srgbClr val="0C2340"/>
+                    </a:solidFill>
+                  </a:tcPr>
+                </a:tc>
+                <a:tc>
+                  <a:txBody>
+                    <a:bodyPr/>
+                    <a:lstStyle/>
+                    <a:p>
+                      <a:pPr algn="l"/>
+                      <a:r>
+                        <a:rPr sz="1300" b="1" i="0">
+                          <a:solidFill>
+                            <a:srgbClr val="FFFFFF"/>
+                          </a:solidFill>
+                          <a:latin typeface="Calibri"/>
+                        </a:rPr>
+                        <a:t>Entregable flojo</a:t>
+                      </a:r>
+                    </a:p>
+                  </a:txBody>
+                  <a:tcPr anchor="ctr" marL="109728" marR="91440" marT="36576" marB="36576">
+                    <a:solidFill>
+                      <a:srgbClr val="0C2340"/>
+                    </a:solidFill>
+                  </a:tcPr>
+                </a:tc>
+                <a:tc>
+                  <a:txBody>
+                    <a:bodyPr/>
+                    <a:lstStyle/>
+                    <a:p>
+                      <a:pPr algn="l"/>
+                      <a:r>
+                        <a:rPr sz="1300" b="1" i="0">
+                          <a:solidFill>
+                            <a:srgbClr val="FFFFFF"/>
+                          </a:solidFill>
+                          <a:latin typeface="Calibri"/>
+                        </a:rPr>
+                        <a:t>Entregable fuerte</a:t>
+                      </a:r>
+                    </a:p>
+                  </a:txBody>
+                  <a:tcPr anchor="ctr" marL="109728" marR="91440" marT="36576" marB="36576">
+                    <a:solidFill>
+                      <a:srgbClr val="0C2340"/>
+                    </a:solidFill>
+                  </a:tcPr>
+                </a:tc>
+              </a:tr>
+              <a:tr h="502920">
+                <a:tc>
+                  <a:txBody>
+                    <a:bodyPr/>
+                    <a:lstStyle/>
+                    <a:p>
+                      <a:pPr algn="l"/>
+                      <a:r>
+                        <a:rPr sz="1200" b="0" i="0">
+                          <a:solidFill>
+                            <a:srgbClr val="2B2B2B"/>
+                          </a:solidFill>
+                          <a:latin typeface="Calibri"/>
+                        </a:rPr>
+                        <a:t>Usuario</a:t>
+                      </a:r>
+                    </a:p>
+                  </a:txBody>
+                  <a:tcPr anchor="ctr" marL="109728" marR="91440" marT="36576" marB="36576">
+                    <a:solidFill>
+                      <a:srgbClr val="FFFFFF"/>
+                    </a:solidFill>
+                  </a:tcPr>
+                </a:tc>
+                <a:tc>
+                  <a:txBody>
+                    <a:bodyPr/>
+                    <a:lstStyle/>
+                    <a:p>
+                      <a:pPr algn="l"/>
+                      <a:r>
+                        <a:rPr sz="1200" b="0" i="0">
+                          <a:solidFill>
+                            <a:srgbClr val="2B2B2B"/>
+                          </a:solidFill>
+                          <a:latin typeface="Calibri"/>
+                        </a:rPr>
+                        <a:t>“la sociedad”, “las empresas”, “los usuarios”</a:t>
+                      </a:r>
+                    </a:p>
+                  </a:txBody>
+                  <a:tcPr anchor="ctr" marL="109728" marR="91440" marT="36576" marB="36576">
+                    <a:solidFill>
+                      <a:srgbClr val="FFFFFF"/>
+                    </a:solidFill>
+                  </a:tcPr>
+                </a:tc>
+                <a:tc>
+                  <a:txBody>
+                    <a:bodyPr/>
+                    <a:lstStyle/>
+                    <a:p>
+                      <a:pPr algn="l"/>
+                      <a:r>
+                        <a:rPr sz="1200" b="0" i="0">
+                          <a:solidFill>
+                            <a:srgbClr val="2B2B2B"/>
+                          </a:solidFill>
+                          <a:latin typeface="Calibri"/>
+                        </a:rPr>
+                        <a:t>Una persona concreta, en un contexto concreto</a:t>
+                      </a:r>
+                    </a:p>
+                  </a:txBody>
+                  <a:tcPr anchor="ctr" marL="109728" marR="91440" marT="36576" marB="36576">
+                    <a:solidFill>
+                      <a:srgbClr val="FFFFFF"/>
+                    </a:solidFill>
+                  </a:tcPr>
+                </a:tc>
+              </a:tr>
+              <a:tr h="502920">
+                <a:tc>
+                  <a:txBody>
+                    <a:bodyPr/>
+                    <a:lstStyle/>
+                    <a:p>
+                      <a:pPr algn="l"/>
+                      <a:r>
+                        <a:rPr sz="1200" b="0" i="0">
+                          <a:solidFill>
+                            <a:srgbClr val="2B2B2B"/>
+                          </a:solidFill>
+                          <a:latin typeface="Calibri"/>
+                        </a:rPr>
+                        <a:t>Problema</a:t>
+                      </a:r>
+                    </a:p>
+                  </a:txBody>
+                  <a:tcPr anchor="ctr" marL="109728" marR="91440" marT="36576" marB="36576">
+                    <a:solidFill>
+                      <a:srgbClr val="F2F2F2"/>
+                    </a:solidFill>
+                  </a:tcPr>
+                </a:tc>
+                <a:tc>
+                  <a:txBody>
+                    <a:bodyPr/>
+                    <a:lstStyle/>
+                    <a:p>
+                      <a:pPr algn="l"/>
+                      <a:r>
+                        <a:rPr sz="1200" b="0" i="0">
+                          <a:solidFill>
+                            <a:srgbClr val="2B2B2B"/>
+                          </a:solidFill>
+                          <a:latin typeface="Calibri"/>
+                        </a:rPr>
+                        <a:t>Se deduce de la solución que ya había elegido</a:t>
+                      </a:r>
+                    </a:p>
+                  </a:txBody>
+                  <a:tcPr anchor="ctr" marL="109728" marR="91440" marT="36576" marB="36576">
+                    <a:solidFill>
+                      <a:srgbClr val="F2F2F2"/>
+                    </a:solidFill>
+                  </a:tcPr>
+                </a:tc>
+                <a:tc>
+                  <a:txBody>
+                    <a:bodyPr/>
+                    <a:lstStyle/>
+                    <a:p>
+                      <a:pPr algn="l"/>
+                      <a:r>
+                        <a:rPr sz="1200" b="0" i="0">
+                          <a:solidFill>
+                            <a:srgbClr val="2B2B2B"/>
+                          </a:solidFill>
+                          <a:latin typeface="Calibri"/>
+                        </a:rPr>
+                        <a:t>Se describe con un síntoma que se puede observar</a:t>
+                      </a:r>
+                    </a:p>
+                  </a:txBody>
+                  <a:tcPr anchor="ctr" marL="109728" marR="91440" marT="36576" marB="36576">
+                    <a:solidFill>
+                      <a:srgbClr val="F2F2F2"/>
+                    </a:solidFill>
+                  </a:tcPr>
+                </a:tc>
+              </a:tr>
+              <a:tr h="502920">
+                <a:tc>
+                  <a:txBody>
+                    <a:bodyPr/>
+                    <a:lstStyle/>
+                    <a:p>
+                      <a:pPr algn="l"/>
+                      <a:r>
+                        <a:rPr sz="1200" b="0" i="0">
+                          <a:solidFill>
+                            <a:srgbClr val="2B2B2B"/>
+                          </a:solidFill>
+                          <a:latin typeface="Calibri"/>
+                        </a:rPr>
+                        <a:t>Evidencia</a:t>
+                      </a:r>
+                    </a:p>
+                  </a:txBody>
+                  <a:tcPr anchor="ctr" marL="109728" marR="91440" marT="36576" marB="36576">
+                    <a:solidFill>
+                      <a:srgbClr val="FFFFFF"/>
+                    </a:solidFill>
+                  </a:tcPr>
+                </a:tc>
+                <a:tc>
+                  <a:txBody>
+                    <a:bodyPr/>
+                    <a:lstStyle/>
+                    <a:p>
+                      <a:pPr algn="l"/>
+                      <a:r>
+                        <a:rPr sz="1200" b="0" i="0">
+                          <a:solidFill>
+                            <a:srgbClr val="2B2B2B"/>
+                          </a:solidFill>
+                          <a:latin typeface="Calibri"/>
+                        </a:rPr>
+                        <a:t>“todo el mundo sabe que…”</a:t>
+                      </a:r>
+                    </a:p>
+                  </a:txBody>
+                  <a:tcPr anchor="ctr" marL="109728" marR="91440" marT="36576" marB="36576">
+                    <a:solidFill>
+                      <a:srgbClr val="FFFFFF"/>
+                    </a:solidFill>
+                  </a:tcPr>
+                </a:tc>
+                <a:tc>
+                  <a:txBody>
+                    <a:bodyPr/>
+                    <a:lstStyle/>
+                    <a:p>
+                      <a:pPr algn="l"/>
+                      <a:r>
+                        <a:rPr sz="1200" b="0" i="0">
+                          <a:solidFill>
+                            <a:srgbClr val="2B2B2B"/>
+                          </a:solidFill>
+                          <a:latin typeface="Calibri"/>
+                        </a:rPr>
+                        <a:t>Un dato, una observación o una frase del usuario</a:t>
+                      </a:r>
+                    </a:p>
+                  </a:txBody>
+                  <a:tcPr anchor="ctr" marL="109728" marR="91440" marT="36576" marB="36576">
+                    <a:solidFill>
+                      <a:srgbClr val="FFFFFF"/>
+                    </a:solidFill>
+                  </a:tcPr>
+                </a:tc>
+              </a:tr>
+              <a:tr h="502920">
+                <a:tc>
+                  <a:txBody>
+                    <a:bodyPr/>
+                    <a:lstStyle/>
+                    <a:p>
+                      <a:pPr algn="l"/>
+                      <a:r>
+                        <a:rPr sz="1200" b="0" i="0">
+                          <a:solidFill>
+                            <a:srgbClr val="2B2B2B"/>
+                          </a:solidFill>
+                          <a:latin typeface="Calibri"/>
+                        </a:rPr>
+                        <a:t>Fuentes</a:t>
+                      </a:r>
+                    </a:p>
+                  </a:txBody>
+                  <a:tcPr anchor="ctr" marL="109728" marR="91440" marT="36576" marB="36576">
+                    <a:solidFill>
+                      <a:srgbClr val="F2F2F2"/>
+                    </a:solidFill>
+                  </a:tcPr>
+                </a:tc>
+                <a:tc>
+                  <a:txBody>
+                    <a:bodyPr/>
+                    <a:lstStyle/>
+                    <a:p>
+                      <a:pPr algn="l"/>
+                      <a:r>
+                        <a:rPr sz="1200" b="0" i="0">
+                          <a:solidFill>
+                            <a:srgbClr val="2B2B2B"/>
+                          </a:solidFill>
+                          <a:latin typeface="Calibri"/>
+                        </a:rPr>
+                        <a:t>Copiadas de un blog sin autor ni fecha</a:t>
+                      </a:r>
+                    </a:p>
+                  </a:txBody>
+                  <a:tcPr anchor="ctr" marL="109728" marR="91440" marT="36576" marB="36576">
+                    <a:solidFill>
+                      <a:srgbClr val="F2F2F2"/>
+                    </a:solidFill>
+                  </a:tcPr>
+                </a:tc>
+                <a:tc>
+                  <a:txBody>
+                    <a:bodyPr/>
+                    <a:lstStyle/>
+                    <a:p>
+                      <a:pPr algn="l"/>
+                      <a:r>
+                        <a:rPr sz="1200" b="0" i="0">
+                          <a:solidFill>
+                            <a:srgbClr val="2B2B2B"/>
+                          </a:solidFill>
+                          <a:latin typeface="Calibri"/>
+                        </a:rPr>
+                        <a:t>Citadas en </a:t>
+                      </a:r>
+                      <a:r>
+                        <a:rPr sz="1200" b="1" i="0">
+                          <a:solidFill>
+                            <a:srgbClr val="2B2B2B"/>
+                          </a:solidFill>
+                          <a:latin typeface="Calibri"/>
+                        </a:rPr>
+                        <a:t>APA 7</a:t>
+                      </a:r>
+                      <a:r>
+                        <a:rPr sz="1200" b="0" i="0">
+                          <a:solidFill>
+                            <a:srgbClr val="2B2B2B"/>
+                          </a:solidFill>
+                          <a:latin typeface="Calibri"/>
+                        </a:rPr>
+                        <a:t> y verificables</a:t>
+                      </a:r>
+                    </a:p>
+                  </a:txBody>
+                  <a:tcPr anchor="ctr" marL="109728" marR="91440" marT="36576" marB="36576">
+                    <a:solidFill>
+                      <a:srgbClr val="F2F2F2"/>
+                    </a:solidFill>
+                  </a:tcPr>
+                </a:tc>
+              </a:tr>
+              <a:tr h="502920">
+                <a:tc>
+                  <a:txBody>
+                    <a:bodyPr/>
+                    <a:lstStyle/>
+                    <a:p>
+                      <a:pPr algn="l"/>
+                      <a:r>
+                        <a:rPr sz="1200" b="0" i="0">
+                          <a:solidFill>
+                            <a:srgbClr val="2B2B2B"/>
+                          </a:solidFill>
+                          <a:latin typeface="Calibri"/>
+                        </a:rPr>
+                        <a:t>Avance</a:t>
+                      </a:r>
+                    </a:p>
+                  </a:txBody>
+                  <a:tcPr anchor="ctr" marL="109728" marR="91440" marT="36576" marB="36576">
+                    <a:solidFill>
+                      <a:srgbClr val="FFFFFF"/>
+                    </a:solidFill>
+                  </a:tcPr>
+                </a:tc>
+                <a:tc>
+                  <a:txBody>
+                    <a:bodyPr/>
+                    <a:lstStyle/>
+                    <a:p>
+                      <a:pPr algn="l"/>
+                      <a:r>
+                        <a:rPr sz="1200" b="0" i="0">
+                          <a:solidFill>
+                            <a:srgbClr val="2B2B2B"/>
+                          </a:solidFill>
+                          <a:latin typeface="Calibri"/>
+                        </a:rPr>
+                        <a:t>Escrito la noche anterior, de una sola pieza</a:t>
+                      </a:r>
+                    </a:p>
+                  </a:txBody>
+                  <a:tcPr anchor="ctr" marL="109728" marR="91440" marT="36576" marB="36576">
+                    <a:solidFill>
+                      <a:srgbClr val="FFFFFF"/>
+                    </a:solidFill>
+                  </a:tcPr>
+                </a:tc>
+                <a:tc>
+                  <a:txBody>
+                    <a:bodyPr/>
+                    <a:lstStyle/>
+                    <a:p>
+                      <a:pPr algn="l"/>
+                      <a:r>
+                        <a:rPr sz="1200" b="0" i="0">
+                          <a:solidFill>
+                            <a:srgbClr val="2B2B2B"/>
+                          </a:solidFill>
+                          <a:latin typeface="Calibri"/>
+                        </a:rPr>
+                        <a:t>Se nota el hilo de varias sesiones encima</a:t>
+                      </a:r>
+                    </a:p>
+                  </a:txBody>
+                  <a:tcPr anchor="ctr" marL="109728" marR="91440" marT="36576" marB="36576">
+                    <a:solidFill>
+                      <a:srgbClr val="FFFFFF"/>
+                    </a:solidFill>
+                  </a:tcPr>
+                </a:tc>
+              </a:tr>
+              <a:tr h="502920">
+                <a:tc>
+                  <a:txBody>
+                    <a:bodyPr/>
+                    <a:lstStyle/>
+                    <a:p>
+                      <a:pPr algn="l"/>
+                      <a:r>
+                        <a:rPr sz="1200" b="0" i="0">
+                          <a:solidFill>
+                            <a:srgbClr val="2B2B2B"/>
+                          </a:solidFill>
+                          <a:latin typeface="Calibri"/>
+                        </a:rPr>
+                        <a:t>Presentación</a:t>
+                      </a:r>
+                    </a:p>
+                  </a:txBody>
+                  <a:tcPr anchor="ctr" marL="109728" marR="91440" marT="36576" marB="36576">
+                    <a:solidFill>
+                      <a:srgbClr val="F2F2F2"/>
+                    </a:solidFill>
+                  </a:tcPr>
+                </a:tc>
+                <a:tc>
+                  <a:txBody>
+                    <a:bodyPr/>
+                    <a:lstStyle/>
+                    <a:p>
+                      <a:pPr algn="l"/>
+                      <a:r>
+                        <a:rPr sz="1200" b="0" i="0">
+                          <a:solidFill>
+                            <a:srgbClr val="2B2B2B"/>
+                          </a:solidFill>
+                          <a:latin typeface="Calibri"/>
+                        </a:rPr>
+                        <a:t>Sin formato, sin títulos, sin numerar</a:t>
+                      </a:r>
+                    </a:p>
+                  </a:txBody>
+                  <a:tcPr anchor="ctr" marL="109728" marR="91440" marT="36576" marB="36576">
+                    <a:solidFill>
+                      <a:srgbClr val="F2F2F2"/>
+                    </a:solidFill>
+                  </a:tcPr>
+                </a:tc>
+                <a:tc>
+                  <a:txBody>
+                    <a:bodyPr/>
+                    <a:lstStyle/>
+                    <a:p>
+                      <a:pPr algn="l"/>
+                      <a:r>
+                        <a:rPr sz="1200" b="0" i="0">
+                          <a:solidFill>
+                            <a:srgbClr val="2B2B2B"/>
+                          </a:solidFill>
+                          <a:latin typeface="Calibri"/>
+                        </a:rPr>
+                        <a:t>Plantilla APA CUN, ordenado y legible</a:t>
+                      </a:r>
+                    </a:p>
+                  </a:txBody>
+                  <a:tcPr anchor="ctr" marL="109728" marR="91440" marT="36576" marB="36576">
+                    <a:solidFill>
+                      <a:srgbClr val="F2F2F2"/>
+                    </a:solidFill>
+                  </a:tcPr>
+                </a:tc>
+              </a:tr>
+            </a:tbl>
+          </a:graphicData>
+        </a:graphic>
+      </p:graphicFrame>
+      <p:sp>
+        <p:nvSpPr>
+          <p:cNvPr id="5" name="TextBox 4"/>
+          <p:cNvSpPr txBox="1"/>
+          <p:nvPr/>
+        </p:nvSpPr>
+        <p:spPr>
+          <a:xfrm>
+            <a:off x="640080" y="5349240"/>
+            <a:ext cx="10911535" cy="548640"/>
+          </a:xfrm>
+          <a:prstGeom prst="rect">
+            <a:avLst/>
+          </a:prstGeom>
+          <a:noFill/>
+        </p:spPr>
+        <p:txBody>
+          <a:bodyPr wrap="square" anchor="t" lIns="0" rIns="0" tIns="0" bIns="0">
+            <a:spAutoFit/>
+          </a:bodyPr>
+          <a:lstStyle/>
+          <a:p>
+            <a:r>
+              <a:rPr sz="1200" b="0" i="1">
+                <a:solidFill>
+                  <a:srgbClr val="2B2B2B"/>
+                </a:solidFill>
+                <a:latin typeface="Calibri"/>
+              </a:rPr>
+              <a:t>El Docente no evalúa </a:t>
+            </a:r>
+            <a:r>
+              <a:rPr sz="1200" b="1" i="1">
+                <a:solidFill>
+                  <a:srgbClr val="2B2B2B"/>
+                </a:solidFill>
+                <a:latin typeface="Calibri"/>
+              </a:rPr>
+              <a:t>cuánto</a:t>
+            </a:r>
+            <a:r>
+              <a:rPr sz="1200" b="0" i="1">
+                <a:solidFill>
+                  <a:srgbClr val="2B2B2B"/>
+                </a:solidFill>
+                <a:latin typeface="Calibri"/>
+              </a:rPr>
+              <a:t> escribió: evalúa si </a:t>
+            </a:r>
+            <a:r>
+              <a:rPr sz="1200" b="1" i="1">
+                <a:solidFill>
+                  <a:srgbClr val="2B2B2B"/>
+                </a:solidFill>
+                <a:latin typeface="Calibri"/>
+              </a:rPr>
+              <a:t>se entiende, se sostiene y avanzó</a:t>
+            </a:r>
+            <a:r>
+              <a:rPr sz="1200" b="0" i="1">
+                <a:solidFill>
+                  <a:srgbClr val="2B2B2B"/>
+                </a:solidFill>
+                <a:latin typeface="Calibri"/>
+              </a:rPr>
+              <a:t> respecto al corte anterior.</a:t>
+            </a:r>
+          </a:p>
+        </p:txBody>
+      </p:sp>
+      <p:sp>
+        <p:nvSpPr>
+          <p:cNvPr id="6" name="TextBox 5"/>
+          <p:cNvSpPr txBox="1"/>
+          <p:nvPr/>
+        </p:nvSpPr>
+        <p:spPr>
+          <a:xfrm>
+            <a:off x="2194560" y="6446520"/>
+            <a:ext cx="5943600" cy="274320"/>
+          </a:xfrm>
+          <a:prstGeom prst="rect">
+            <a:avLst/>
+          </a:prstGeom>
+          <a:noFill/>
+        </p:spPr>
+        <p:txBody>
+          <a:bodyPr wrap="square" anchor="t" lIns="0" rIns="0" tIns="0" bIns="0">
+            <a:spAutoFit/>
+          </a:bodyPr>
+          <a:lstStyle/>
+          <a:p>
+            <a:pPr algn="l"/>
+            <a:r>
+              <a:rPr sz="1000" b="1" i="0">
+                <a:solidFill>
+                  <a:srgbClr val="8F989D"/>
+                </a:solidFill>
+                <a:latin typeface="Calibri"/>
+              </a:rPr>
+              <a:t>Inicio 5:10 pm</a:t>
+            </a:r>
+          </a:p>
+        </p:txBody>
+      </p:sp>
+      <p:sp>
+        <p:nvSpPr>
+          <p:cNvPr id="7" name="TextBox 6"/>
+          <p:cNvSpPr txBox="1"/>
+          <p:nvPr/>
+        </p:nvSpPr>
+        <p:spPr>
+          <a:xfrm>
+            <a:off x="11094415" y="6446520"/>
+            <a:ext cx="548640" cy="274320"/>
+          </a:xfrm>
+          <a:prstGeom prst="rect">
+            <a:avLst/>
+          </a:prstGeom>
+          <a:noFill/>
+        </p:spPr>
+        <p:txBody>
+          <a:bodyPr wrap="square" anchor="t" lIns="0" rIns="0" tIns="0" bIns="0">
+            <a:spAutoFit/>
+          </a:bodyPr>
+          <a:lstStyle/>
+          <a:p>
+            <a:pPr algn="r"/>
+            <a:r>
+              <a:rPr sz="1000" b="1" i="0">
+                <a:solidFill>
+                  <a:srgbClr val="8F989D"/>
+                </a:solidFill>
+                <a:latin typeface="Calibri"/>
+              </a:rPr>
+              <a:t>10</a:t>
+            </a:r>
+          </a:p>
+        </p:txBody>
+      </p:sp>
+    </p:spTree>
+  </p:cSld>
+  <p:clrMapOvr>
+    <a:masterClrMapping/>
+  </p:clrMapOvr>
+</p:sld>
+</file>
+
+<file path=ppt/slides/slide11.xml><?xml version="1.0" encoding="utf-8"?>
+<p:sld xmlns:a="http://schemas.openxmlformats.org/drawingml/2006/main" xmlns:p="http://schemas.openxmlformats.org/presentationml/2006/main" xmlns:r="http://schemas.openxmlformats.org/officeDocument/2006/relationships">
+  <p:cSld>
+    <p:bg>
+      <p:bgPr>
+        <a:solidFill>
+          <a:srgbClr val="FFFFFF"/>
+        </a:solidFill>
+        <a:effectLst/>
+      </p:bgPr>
+    </p:bg>
+    <p:spTree>
+      <p:nvGrpSpPr>
+        <p:cNvPr id="1" name=""/>
+        <p:cNvGrpSpPr/>
+        <p:nvPr/>
+      </p:nvGrpSpPr>
+      <p:grpSpPr/>
+      <p:sp>
+        <p:nvSpPr>
+          <p:cNvPr id="2" name="Rectangle 1"/>
+          <p:cNvSpPr/>
+          <p:nvPr/>
+        </p:nvSpPr>
+        <p:spPr>
+          <a:xfrm>
+            <a:off x="0" y="0"/>
+            <a:ext cx="12191695" cy="1188720"/>
+          </a:xfrm>
+          <a:prstGeom prst="rect">
+            <a:avLst/>
+          </a:prstGeom>
+          <a:solidFill>
+            <a:srgbClr val="0C2340"/>
+          </a:solidFill>
+          <a:ln>
+            <a:noFill/>
+          </a:ln>
+          <a:effectLst/>
+        </p:spPr>
+        <p:style>
+          <a:lnRef idx="1">
+            <a:schemeClr val="accent1"/>
+          </a:lnRef>
+          <a:fillRef idx="3">
+            <a:schemeClr val="accent1"/>
+          </a:fillRef>
+          <a:effectRef idx="2">
+            <a:schemeClr val="accent1"/>
+          </a:effectRef>
+          <a:fontRef idx="minor">
+            <a:schemeClr val="lt1"/>
+          </a:fontRef>
+        </p:style>
+        <p:txBody>
+          <a:bodyPr rtlCol="0" anchor="ctr"/>
+          <a:lstStyle/>
+          <a:p>
+            <a:pPr algn="ctr"/>
+          </a:p>
+        </p:txBody>
+      </p:sp>
+      <p:sp>
+        <p:nvSpPr>
+          <p:cNvPr id="3" name="TextBox 2"/>
+          <p:cNvSpPr txBox="1"/>
+          <p:nvPr/>
+        </p:nvSpPr>
+        <p:spPr>
+          <a:xfrm>
+            <a:off x="640080" y="0"/>
+            <a:ext cx="9082735" cy="1188720"/>
+          </a:xfrm>
+          <a:prstGeom prst="rect">
+            <a:avLst/>
+          </a:prstGeom>
+          <a:noFill/>
+        </p:spPr>
+        <p:txBody>
+          <a:bodyPr wrap="square" anchor="ctr" lIns="0" rIns="0" tIns="0" bIns="0">
+            <a:spAutoFit/>
+          </a:bodyPr>
+          <a:lstStyle/>
+          <a:p>
+            <a:pPr algn="ctr"/>
+            <a:r>
+              <a:rPr sz="2600" b="1" i="0">
+                <a:solidFill>
+                  <a:srgbClr val="FFFFFF"/>
+                </a:solidFill>
+                <a:latin typeface="Calibri"/>
+              </a:rPr>
+              <a:t>Cómo se entrega: paso a paso en CDigital</a:t>
+            </a:r>
+          </a:p>
+        </p:txBody>
+      </p:sp>
+      <p:sp>
+        <p:nvSpPr>
+          <p:cNvPr id="4" name="TextBox 3"/>
+          <p:cNvSpPr txBox="1"/>
+          <p:nvPr/>
+        </p:nvSpPr>
+        <p:spPr>
+          <a:xfrm>
+            <a:off x="640080" y="1691639"/>
+            <a:ext cx="10911535" cy="4617720"/>
+          </a:xfrm>
+          <a:prstGeom prst="rect">
+            <a:avLst/>
+          </a:prstGeom>
+          <a:noFill/>
+        </p:spPr>
+        <p:txBody>
+          <a:bodyPr wrap="square" anchor="t" lIns="0" rIns="0" tIns="0" bIns="0">
+            <a:spAutoFit/>
+          </a:bodyPr>
+          <a:lstStyle/>
+          <a:p>
+            <a:pPr>
+              <a:spcAft>
+                <a:spcPts val="1000"/>
+              </a:spcAft>
+            </a:pPr>
+            <a:r>
+              <a:rPr sz="1600" b="0" i="0">
+                <a:solidFill>
+                  <a:srgbClr val="2B2B2B"/>
+                </a:solidFill>
+                <a:latin typeface="Calibri"/>
+              </a:rPr>
+              <a:t>–   </a:t>
+            </a:r>
+            <a:r>
+              <a:rPr sz="1600" b="1" i="0">
+                <a:solidFill>
+                  <a:srgbClr val="2B2B2B"/>
+                </a:solidFill>
+                <a:latin typeface="Calibri"/>
+              </a:rPr>
+              <a:t>1.</a:t>
+            </a:r>
+            <a:r>
+              <a:rPr sz="1600" b="0" i="0">
+                <a:solidFill>
+                  <a:srgbClr val="2B2B2B"/>
+                </a:solidFill>
+                <a:latin typeface="Calibri"/>
+              </a:rPr>
+              <a:t> Escriba en la </a:t>
+            </a:r>
+            <a:r>
+              <a:rPr sz="1600" b="1" i="0">
+                <a:solidFill>
+                  <a:srgbClr val="2B2B2B"/>
+                </a:solidFill>
+                <a:latin typeface="Calibri"/>
+              </a:rPr>
+              <a:t>plantilla APA CUN</a:t>
+            </a:r>
+            <a:r>
+              <a:rPr sz="1600" b="0" i="0">
+                <a:solidFill>
+                  <a:srgbClr val="2B2B2B"/>
+                </a:solidFill>
+                <a:latin typeface="Calibri"/>
+              </a:rPr>
+              <a:t> (`Clases/Recursos/`): ábrala en </a:t>
+            </a:r>
+            <a:r>
+              <a:rPr sz="1600" b="1" i="0">
+                <a:solidFill>
+                  <a:srgbClr val="2B2B2B"/>
+                </a:solidFill>
+                <a:latin typeface="Calibri"/>
+              </a:rPr>
+              <a:t>Google Docs</a:t>
+            </a:r>
+            <a:r>
+              <a:rPr sz="1600" b="0" i="0">
+                <a:solidFill>
+                  <a:srgbClr val="2B2B2B"/>
+                </a:solidFill>
+                <a:latin typeface="Calibri"/>
+              </a:rPr>
+              <a:t> y trabaje ahí. No necesita Office instalado.</a:t>
+            </a:r>
+          </a:p>
+          <a:p>
+            <a:pPr>
+              <a:spcAft>
+                <a:spcPts val="1000"/>
+              </a:spcAft>
+            </a:pPr>
+            <a:r>
+              <a:rPr sz="1600" b="0" i="0">
+                <a:solidFill>
+                  <a:srgbClr val="2B2B2B"/>
+                </a:solidFill>
+                <a:latin typeface="Calibri"/>
+              </a:rPr>
+              <a:t>–   </a:t>
+            </a:r>
+            <a:r>
+              <a:rPr sz="1600" b="1" i="0">
+                <a:solidFill>
+                  <a:srgbClr val="2B2B2B"/>
+                </a:solidFill>
+                <a:latin typeface="Calibri"/>
+              </a:rPr>
+              <a:t>2.</a:t>
+            </a:r>
+            <a:r>
+              <a:rPr sz="1600" b="0" i="0">
+                <a:solidFill>
+                  <a:srgbClr val="2B2B2B"/>
+                </a:solidFill>
+                <a:latin typeface="Calibri"/>
+              </a:rPr>
+              <a:t> Abra el enunciado del ACA en `Clases/Recursos/ACAs/` y marque su </a:t>
+            </a:r>
+            <a:r>
+              <a:rPr sz="1600" b="1" i="0">
+                <a:solidFill>
+                  <a:srgbClr val="2B2B2B"/>
+                </a:solidFill>
+                <a:latin typeface="Calibri"/>
+              </a:rPr>
+              <a:t>checklist de criterios</a:t>
+            </a:r>
+            <a:r>
+              <a:rPr sz="1600" b="0" i="0">
+                <a:solidFill>
+                  <a:srgbClr val="2B2B2B"/>
+                </a:solidFill>
+                <a:latin typeface="Calibri"/>
+              </a:rPr>
+              <a:t> antes de dar por cerrado el texto.</a:t>
+            </a:r>
+          </a:p>
+          <a:p>
+            <a:pPr>
+              <a:spcAft>
+                <a:spcPts val="1000"/>
+              </a:spcAft>
+            </a:pPr>
+            <a:r>
+              <a:rPr sz="1600" b="0" i="0">
+                <a:solidFill>
+                  <a:srgbClr val="2B2B2B"/>
+                </a:solidFill>
+                <a:latin typeface="Calibri"/>
+              </a:rPr>
+              <a:t>–   </a:t>
+            </a:r>
+            <a:r>
+              <a:rPr sz="1600" b="1" i="0">
+                <a:solidFill>
+                  <a:srgbClr val="2B2B2B"/>
+                </a:solidFill>
+                <a:latin typeface="Calibri"/>
+              </a:rPr>
+              <a:t>3.</a:t>
+            </a:r>
+            <a:r>
+              <a:rPr sz="1600" b="0" i="0">
+                <a:solidFill>
+                  <a:srgbClr val="2B2B2B"/>
+                </a:solidFill>
+                <a:latin typeface="Calibri"/>
+              </a:rPr>
+              <a:t> Exporte a </a:t>
+            </a:r>
+            <a:r>
+              <a:rPr sz="1600" b="1" i="0">
+                <a:solidFill>
+                  <a:srgbClr val="2B2B2B"/>
+                </a:solidFill>
+                <a:latin typeface="Calibri"/>
+              </a:rPr>
+              <a:t>PDF</a:t>
+            </a:r>
+            <a:r>
+              <a:rPr sz="1600" b="0" i="0">
+                <a:solidFill>
+                  <a:srgbClr val="2B2B2B"/>
+                </a:solidFill>
+                <a:latin typeface="Calibri"/>
+              </a:rPr>
+              <a:t>, salvo que el enunciado pida otro formato.</a:t>
+            </a:r>
+          </a:p>
+          <a:p>
+            <a:pPr>
+              <a:spcAft>
+                <a:spcPts val="1000"/>
+              </a:spcAft>
+            </a:pPr>
+            <a:r>
+              <a:rPr sz="1600" b="0" i="0">
+                <a:solidFill>
+                  <a:srgbClr val="2B2B2B"/>
+                </a:solidFill>
+                <a:latin typeface="Calibri"/>
+              </a:rPr>
+              <a:t>–   </a:t>
+            </a:r>
+            <a:r>
+              <a:rPr sz="1600" b="1" i="0">
+                <a:solidFill>
+                  <a:srgbClr val="2B2B2B"/>
+                </a:solidFill>
+                <a:latin typeface="Calibri"/>
+              </a:rPr>
+              <a:t>4.</a:t>
+            </a:r>
+            <a:r>
+              <a:rPr sz="1600" b="0" i="0">
+                <a:solidFill>
+                  <a:srgbClr val="2B2B2B"/>
+                </a:solidFill>
+                <a:latin typeface="Calibri"/>
+              </a:rPr>
+              <a:t> Nombre el archivo así: </a:t>
+            </a:r>
+            <a:r>
+              <a:rPr sz="1600" b="1" i="0">
+                <a:solidFill>
+                  <a:srgbClr val="2B2B2B"/>
+                </a:solidFill>
+                <a:latin typeface="Calibri"/>
+              </a:rPr>
+              <a:t>CRE_ACA1_Apellido</a:t>
+            </a:r>
+            <a:r>
+              <a:rPr sz="1600" b="0" i="0">
+                <a:solidFill>
+                  <a:srgbClr val="2B2B2B"/>
+                </a:solidFill>
+                <a:latin typeface="Calibri"/>
+              </a:rPr>
+              <a:t> (cambie el número del ACA y su apellido).</a:t>
+            </a:r>
+          </a:p>
+          <a:p>
+            <a:pPr>
+              <a:spcAft>
+                <a:spcPts val="1000"/>
+              </a:spcAft>
+            </a:pPr>
+            <a:r>
+              <a:rPr sz="1600" b="0" i="0">
+                <a:solidFill>
+                  <a:srgbClr val="2B2B2B"/>
+                </a:solidFill>
+                <a:latin typeface="Calibri"/>
+              </a:rPr>
+              <a:t>–   </a:t>
+            </a:r>
+            <a:r>
+              <a:rPr sz="1600" b="1" i="0">
+                <a:solidFill>
+                  <a:srgbClr val="2B2B2B"/>
+                </a:solidFill>
+                <a:latin typeface="Calibri"/>
+              </a:rPr>
+              <a:t>5.</a:t>
+            </a:r>
+            <a:r>
+              <a:rPr sz="1600" b="0" i="0">
+                <a:solidFill>
+                  <a:srgbClr val="2B2B2B"/>
+                </a:solidFill>
+                <a:latin typeface="Calibri"/>
+              </a:rPr>
+              <a:t> Suba el archivo al </a:t>
+            </a:r>
+            <a:r>
+              <a:rPr sz="1600" b="1" i="0">
+                <a:solidFill>
+                  <a:srgbClr val="2B2B2B"/>
+                </a:solidFill>
+                <a:latin typeface="Calibri"/>
+              </a:rPr>
+              <a:t>espacio de entrega del corte en CDigital</a:t>
+            </a:r>
+            <a:r>
+              <a:rPr sz="1600" b="0" i="0">
+                <a:solidFill>
+                  <a:srgbClr val="2B2B2B"/>
+                </a:solidFill>
+                <a:latin typeface="Calibri"/>
+              </a:rPr>
+              <a:t>, no al foro y no al chat del encuentro.</a:t>
+            </a:r>
+          </a:p>
+          <a:p>
+            <a:pPr>
+              <a:spcAft>
+                <a:spcPts val="1000"/>
+              </a:spcAft>
+            </a:pPr>
+            <a:r>
+              <a:rPr sz="1600" b="0" i="0">
+                <a:solidFill>
+                  <a:srgbClr val="2B2B2B"/>
+                </a:solidFill>
+                <a:latin typeface="Calibri"/>
+              </a:rPr>
+              <a:t>–   </a:t>
+            </a:r>
+            <a:r>
+              <a:rPr sz="1600" b="1" i="0">
+                <a:solidFill>
+                  <a:srgbClr val="2B2B2B"/>
+                </a:solidFill>
+                <a:latin typeface="Calibri"/>
+              </a:rPr>
+              <a:t>6.</a:t>
+            </a:r>
+            <a:r>
+              <a:rPr sz="1600" b="0" i="0">
+                <a:solidFill>
+                  <a:srgbClr val="2B2B2B"/>
+                </a:solidFill>
+                <a:latin typeface="Calibri"/>
+              </a:rPr>
+              <a:t> Verifique que quedó cargado y </a:t>
+            </a:r>
+            <a:r>
+              <a:rPr sz="1600" b="1" i="0">
+                <a:solidFill>
+                  <a:srgbClr val="2B2B2B"/>
+                </a:solidFill>
+                <a:latin typeface="Calibri"/>
+              </a:rPr>
+              <a:t>ábralo desde la plataforma</a:t>
+            </a:r>
+            <a:r>
+              <a:rPr sz="1600" b="0" i="0">
+                <a:solidFill>
+                  <a:srgbClr val="2B2B2B"/>
+                </a:solidFill>
+                <a:latin typeface="Calibri"/>
+              </a:rPr>
+              <a:t>: un archivo vacío o corrupto cuenta como no entregado.</a:t>
+            </a:r>
+          </a:p>
+          <a:p>
+            <a:pPr>
+              <a:spcAft>
+                <a:spcPts val="1000"/>
+              </a:spcAft>
+            </a:pPr>
+            <a:r>
+              <a:rPr sz="1600" b="0" i="0">
+                <a:solidFill>
+                  <a:srgbClr val="2B2B2B"/>
+                </a:solidFill>
+                <a:latin typeface="Calibri"/>
+              </a:rPr>
+              <a:t>–   </a:t>
+            </a:r>
+            <a:r>
+              <a:rPr sz="1600" b="1" i="0">
+                <a:solidFill>
+                  <a:srgbClr val="2B2B2B"/>
+                </a:solidFill>
+                <a:latin typeface="Calibri"/>
+              </a:rPr>
+              <a:t>Entrega oficial = CDigital.</a:t>
+            </a:r>
+            <a:r>
+              <a:rPr sz="1600" b="0" i="0">
+                <a:solidFill>
+                  <a:srgbClr val="2B2B2B"/>
+                </a:solidFill>
+                <a:latin typeface="Calibri"/>
+              </a:rPr>
+              <a:t> No se reciben trabajos por correo, por WhatsApp ni por mensaje privado.</a:t>
+            </a:r>
+          </a:p>
+          <a:p>
+            <a:pPr lvl="1">
+              <a:spcAft>
+                <a:spcPts val="600"/>
+              </a:spcAft>
+            </a:pPr>
+            <a:r>
+              <a:rPr sz="1500" b="0" i="0">
+                <a:solidFill>
+                  <a:srgbClr val="2B2B2B"/>
+                </a:solidFill>
+                <a:latin typeface="Calibri"/>
+              </a:rPr>
+              <a:t>●   ¿Se le complicó la fecha? Se habla con el Docente </a:t>
+            </a:r>
+            <a:r>
+              <a:rPr sz="1500" b="1" i="0">
+                <a:solidFill>
+                  <a:srgbClr val="2B2B2B"/>
+                </a:solidFill>
+                <a:latin typeface="Calibri"/>
+              </a:rPr>
+              <a:t>antes</a:t>
+            </a:r>
+            <a:r>
+              <a:rPr sz="1500" b="0" i="0">
+                <a:solidFill>
+                  <a:srgbClr val="2B2B2B"/>
+                </a:solidFill>
+                <a:latin typeface="Calibri"/>
+              </a:rPr>
+              <a:t> del cierre del espacio, nunca después. Cerrado el espacio, la nota es la que hay.</a:t>
+            </a:r>
+          </a:p>
+        </p:txBody>
+      </p:sp>
+      <p:sp>
+        <p:nvSpPr>
+          <p:cNvPr id="5" name="TextBox 4"/>
+          <p:cNvSpPr txBox="1"/>
+          <p:nvPr/>
+        </p:nvSpPr>
+        <p:spPr>
+          <a:xfrm>
+            <a:off x="2194560" y="6446520"/>
+            <a:ext cx="5943600" cy="274320"/>
+          </a:xfrm>
+          <a:prstGeom prst="rect">
+            <a:avLst/>
+          </a:prstGeom>
+          <a:noFill/>
+        </p:spPr>
+        <p:txBody>
+          <a:bodyPr wrap="square" anchor="t" lIns="0" rIns="0" tIns="0" bIns="0">
+            <a:spAutoFit/>
+          </a:bodyPr>
+          <a:lstStyle/>
+          <a:p>
+            <a:pPr algn="l"/>
+            <a:r>
+              <a:rPr sz="1000" b="1" i="0">
+                <a:solidFill>
+                  <a:srgbClr val="8F989D"/>
+                </a:solidFill>
+                <a:latin typeface="Calibri"/>
+              </a:rPr>
+              <a:t>Inicio 5:10 pm</a:t>
+            </a:r>
+          </a:p>
+        </p:txBody>
+      </p:sp>
+      <p:sp>
+        <p:nvSpPr>
+          <p:cNvPr id="6" name="TextBox 5"/>
+          <p:cNvSpPr txBox="1"/>
+          <p:nvPr/>
+        </p:nvSpPr>
+        <p:spPr>
+          <a:xfrm>
+            <a:off x="11094415" y="6446520"/>
+            <a:ext cx="548640" cy="274320"/>
+          </a:xfrm>
+          <a:prstGeom prst="rect">
+            <a:avLst/>
+          </a:prstGeom>
+          <a:noFill/>
+        </p:spPr>
+        <p:txBody>
+          <a:bodyPr wrap="square" anchor="t" lIns="0" rIns="0" tIns="0" bIns="0">
+            <a:spAutoFit/>
+          </a:bodyPr>
+          <a:lstStyle/>
+          <a:p>
+            <a:pPr algn="r"/>
+            <a:r>
+              <a:rPr sz="1000" b="1" i="0">
+                <a:solidFill>
+                  <a:srgbClr val="8F989D"/>
+                </a:solidFill>
+                <a:latin typeface="Calibri"/>
+              </a:rPr>
+              <a:t>11</a:t>
+            </a:r>
+          </a:p>
+        </p:txBody>
+      </p:sp>
+      <p:sp>
+        <p:nvSpPr>
+          <p:cNvPr id="7" name="TextBox 6"/>
+          <p:cNvSpPr txBox="1"/>
+          <p:nvPr/>
+        </p:nvSpPr>
+        <p:spPr>
+          <a:xfrm>
+            <a:off x="640080" y="5943600"/>
+            <a:ext cx="9997135" cy="457200"/>
+          </a:xfrm>
+          <a:prstGeom prst="rect">
+            <a:avLst/>
+          </a:prstGeom>
+          <a:noFill/>
+        </p:spPr>
+        <p:txBody>
+          <a:bodyPr wrap="square" anchor="t" lIns="0" rIns="0" tIns="0" bIns="0">
+            <a:spAutoFit/>
+          </a:bodyPr>
+          <a:lstStyle/>
+          <a:p>
+            <a:r>
+              <a:rPr sz="1200" b="0" i="1">
+                <a:solidFill>
+                  <a:srgbClr val="2B2B2B"/>
+                </a:solidFill>
+                <a:latin typeface="Calibri"/>
+              </a:rPr>
+              <a:t>Lo que no esté en CDigital </a:t>
+            </a:r>
+            <a:r>
+              <a:rPr sz="1200" b="1" i="1">
+                <a:solidFill>
+                  <a:srgbClr val="2B2B2B"/>
+                </a:solidFill>
+                <a:latin typeface="Calibri"/>
+              </a:rPr>
+              <a:t>no está entregado</a:t>
+            </a:r>
+            <a:r>
+              <a:rPr sz="1200" b="0" i="1">
+                <a:solidFill>
+                  <a:srgbClr val="2B2B2B"/>
+                </a:solidFill>
+                <a:latin typeface="Calibri"/>
+              </a:rPr>
+              <a:t>, por más que exista en su computador.</a:t>
+            </a:r>
+          </a:p>
+        </p:txBody>
+      </p:sp>
+    </p:spTree>
+  </p:cSld>
+  <p:clrMapOvr>
+    <a:masterClrMapping/>
+  </p:clrMapOvr>
+</p:sld>
+</file>
+
+<file path=ppt/slides/slide12.xml><?xml version="1.0" encoding="utf-8"?>
+<p:sld xmlns:a="http://schemas.openxmlformats.org/drawingml/2006/main" xmlns:p="http://schemas.openxmlformats.org/presentationml/2006/main" xmlns:r="http://schemas.openxmlformats.org/officeDocument/2006/relationships">
+  <p:cSld>
+    <p:bg>
+      <p:bgPr>
+        <a:solidFill>
+          <a:srgbClr val="FFFFFF"/>
+        </a:solidFill>
+        <a:effectLst/>
+      </p:bgPr>
+    </p:bg>
+    <p:spTree>
+      <p:nvGrpSpPr>
+        <p:cNvPr id="1" name=""/>
+        <p:cNvGrpSpPr/>
+        <p:nvPr/>
+      </p:nvGrpSpPr>
+      <p:grpSpPr/>
+      <p:sp>
+        <p:nvSpPr>
+          <p:cNvPr id="2" name="Rectangle 1"/>
+          <p:cNvSpPr/>
+          <p:nvPr/>
+        </p:nvSpPr>
+        <p:spPr>
+          <a:xfrm>
+            <a:off x="0" y="0"/>
+            <a:ext cx="12191695" cy="1188720"/>
+          </a:xfrm>
+          <a:prstGeom prst="rect">
+            <a:avLst/>
+          </a:prstGeom>
+          <a:solidFill>
+            <a:srgbClr val="0C2340"/>
+          </a:solidFill>
+          <a:ln>
+            <a:noFill/>
+          </a:ln>
+          <a:effectLst/>
+        </p:spPr>
+        <p:style>
+          <a:lnRef idx="1">
+            <a:schemeClr val="accent1"/>
+          </a:lnRef>
+          <a:fillRef idx="3">
+            <a:schemeClr val="accent1"/>
+          </a:fillRef>
+          <a:effectRef idx="2">
+            <a:schemeClr val="accent1"/>
+          </a:effectRef>
+          <a:fontRef idx="minor">
+            <a:schemeClr val="lt1"/>
+          </a:fontRef>
+        </p:style>
+        <p:txBody>
+          <a:bodyPr rtlCol="0" anchor="ctr"/>
+          <a:lstStyle/>
+          <a:p>
+            <a:pPr algn="ctr"/>
+          </a:p>
+        </p:txBody>
+      </p:sp>
+      <p:sp>
+        <p:nvSpPr>
+          <p:cNvPr id="3" name="TextBox 2"/>
+          <p:cNvSpPr txBox="1"/>
+          <p:nvPr/>
+        </p:nvSpPr>
+        <p:spPr>
+          <a:xfrm>
+            <a:off x="640080" y="0"/>
+            <a:ext cx="9082735" cy="1188720"/>
+          </a:xfrm>
+          <a:prstGeom prst="rect">
+            <a:avLst/>
+          </a:prstGeom>
+          <a:noFill/>
+        </p:spPr>
+        <p:txBody>
+          <a:bodyPr wrap="square" anchor="ctr" lIns="0" rIns="0" tIns="0" bIns="0">
+            <a:spAutoFit/>
+          </a:bodyPr>
+          <a:lstStyle/>
+          <a:p>
+            <a:pPr algn="ctr"/>
+            <a:r>
+              <a:rPr sz="2600" b="1" i="0">
+                <a:solidFill>
+                  <a:srgbClr val="FFFFFF"/>
+                </a:solidFill>
+                <a:latin typeface="Calibri"/>
+              </a:rPr>
+              <a:t>Integridad académica: la línea que no se cruza</a:t>
+            </a:r>
+          </a:p>
+        </p:txBody>
+      </p:sp>
+      <p:sp>
+        <p:nvSpPr>
+          <p:cNvPr id="4" name="Rounded Rectangle 3"/>
+          <p:cNvSpPr/>
+          <p:nvPr/>
+        </p:nvSpPr>
+        <p:spPr>
+          <a:xfrm>
+            <a:off x="640080" y="1737360"/>
+            <a:ext cx="10911535" cy="969264"/>
+          </a:xfrm>
+          <a:prstGeom prst="roundRect">
+            <a:avLst/>
+          </a:prstGeom>
+          <a:solidFill>
+            <a:srgbClr val="E8F5EC"/>
+          </a:solidFill>
+          <a:ln>
+            <a:noFill/>
+          </a:ln>
+          <a:effectLst/>
+        </p:spPr>
+        <p:style>
+          <a:lnRef idx="1">
+            <a:schemeClr val="accent1"/>
+          </a:lnRef>
+          <a:fillRef idx="3">
+            <a:schemeClr val="accent1"/>
+          </a:fillRef>
+          <a:effectRef idx="2">
+            <a:schemeClr val="accent1"/>
+          </a:effectRef>
+          <a:fontRef idx="minor">
+            <a:schemeClr val="lt1"/>
+          </a:fontRef>
+        </p:style>
+        <p:txBody>
+          <a:bodyPr rtlCol="0" anchor="ctr"/>
+          <a:lstStyle/>
+          <a:p>
+            <a:pPr algn="ctr"/>
+          </a:p>
+        </p:txBody>
+      </p:sp>
+      <p:sp>
+        <p:nvSpPr>
+          <p:cNvPr id="5" name="TextBox 4"/>
+          <p:cNvSpPr txBox="1"/>
+          <p:nvPr/>
+        </p:nvSpPr>
+        <p:spPr>
+          <a:xfrm>
+            <a:off x="868680" y="1847088"/>
+            <a:ext cx="10454335" cy="749808"/>
+          </a:xfrm>
+          <a:prstGeom prst="rect">
+            <a:avLst/>
+          </a:prstGeom>
+          <a:noFill/>
+        </p:spPr>
+        <p:txBody>
+          <a:bodyPr wrap="square" anchor="t" lIns="0" rIns="0" tIns="0" bIns="0">
+            <a:spAutoFit/>
+          </a:bodyPr>
+          <a:lstStyle/>
+          <a:p>
+            <a:r>
+              <a:rPr sz="1300" b="1" i="0">
+                <a:solidFill>
+                  <a:srgbClr val="0C2340"/>
+                </a:solidFill>
+                <a:latin typeface="Calibri"/>
+              </a:rPr>
+              <a:t>ℹ️ Nota institucional</a:t>
+            </a:r>
+          </a:p>
+          <a:p>
+            <a:pPr>
+              <a:spcBef>
+                <a:spcPts val="400"/>
+              </a:spcBef>
+            </a:pPr>
+            <a:r>
+              <a:rPr sz="1300" b="0" i="0">
+                <a:solidFill>
+                  <a:srgbClr val="2B2B2B"/>
+                </a:solidFill>
+                <a:latin typeface="Calibri"/>
+              </a:rPr>
+              <a:t>Todo lo que no sea suyo </a:t>
+            </a:r>
+            <a:r>
+              <a:rPr sz="1300" b="1" i="0">
+                <a:solidFill>
+                  <a:srgbClr val="2B2B2B"/>
+                </a:solidFill>
+                <a:latin typeface="Calibri"/>
+              </a:rPr>
+              <a:t>se cita en APA 7</a:t>
+            </a:r>
+            <a:r>
+              <a:rPr sz="1300" b="0" i="0">
+                <a:solidFill>
+                  <a:srgbClr val="2B2B2B"/>
+                </a:solidFill>
+                <a:latin typeface="Calibri"/>
+              </a:rPr>
+              <a:t>: texto, datos, imágenes, código y también las ideas que resumió con sus palabras. Citar no le resta mérito: demuestra que leyó.</a:t>
+            </a:r>
+          </a:p>
+        </p:txBody>
+      </p:sp>
+      <p:sp>
+        <p:nvSpPr>
+          <p:cNvPr id="6" name="Rounded Rectangle 5"/>
+          <p:cNvSpPr/>
+          <p:nvPr/>
+        </p:nvSpPr>
+        <p:spPr>
+          <a:xfrm>
+            <a:off x="640080" y="2935224"/>
+            <a:ext cx="10911535" cy="1225296"/>
+          </a:xfrm>
+          <a:prstGeom prst="roundRect">
+            <a:avLst/>
+          </a:prstGeom>
+          <a:solidFill>
+            <a:srgbClr val="FBE4E4"/>
+          </a:solidFill>
+          <a:ln>
+            <a:noFill/>
+          </a:ln>
+          <a:effectLst/>
+        </p:spPr>
+        <p:style>
+          <a:lnRef idx="1">
+            <a:schemeClr val="accent1"/>
+          </a:lnRef>
+          <a:fillRef idx="3">
+            <a:schemeClr val="accent1"/>
+          </a:fillRef>
+          <a:effectRef idx="2">
+            <a:schemeClr val="accent1"/>
+          </a:effectRef>
+          <a:fontRef idx="minor">
+            <a:schemeClr val="lt1"/>
+          </a:fontRef>
+        </p:style>
+        <p:txBody>
+          <a:bodyPr rtlCol="0" anchor="ctr"/>
+          <a:lstStyle/>
+          <a:p>
+            <a:pPr algn="ctr"/>
+          </a:p>
+        </p:txBody>
+      </p:sp>
+      <p:sp>
+        <p:nvSpPr>
+          <p:cNvPr id="7" name="TextBox 6"/>
+          <p:cNvSpPr txBox="1"/>
+          <p:nvPr/>
+        </p:nvSpPr>
+        <p:spPr>
+          <a:xfrm>
+            <a:off x="868680" y="3044952"/>
+            <a:ext cx="10454335" cy="1005840"/>
+          </a:xfrm>
+          <a:prstGeom prst="rect">
+            <a:avLst/>
+          </a:prstGeom>
+          <a:noFill/>
+        </p:spPr>
+        <p:txBody>
+          <a:bodyPr wrap="square" anchor="t" lIns="0" rIns="0" tIns="0" bIns="0">
+            <a:spAutoFit/>
+          </a:bodyPr>
+          <a:lstStyle/>
+          <a:p>
+            <a:r>
+              <a:rPr sz="1300" b="1" i="0">
+                <a:solidFill>
+                  <a:srgbClr val="0C2340"/>
+                </a:solidFill>
+                <a:latin typeface="Calibri"/>
+              </a:rPr>
+              <a:t>⚠️ Importante</a:t>
+            </a:r>
+          </a:p>
+          <a:p>
+            <a:pPr>
+              <a:spcBef>
+                <a:spcPts val="400"/>
+              </a:spcBef>
+            </a:pPr>
+            <a:r>
+              <a:rPr sz="1300" b="0" i="0">
+                <a:solidFill>
+                  <a:srgbClr val="2B2B2B"/>
+                </a:solidFill>
+                <a:latin typeface="Calibri"/>
+              </a:rPr>
+              <a:t>Cuenta como </a:t>
+            </a:r>
+            <a:r>
+              <a:rPr sz="1300" b="1" i="0">
+                <a:solidFill>
+                  <a:srgbClr val="2B2B2B"/>
+                </a:solidFill>
+                <a:latin typeface="Calibri"/>
+              </a:rPr>
+              <a:t>plagio</a:t>
+            </a:r>
+            <a:r>
+              <a:rPr sz="1300" b="0" i="0">
+                <a:solidFill>
+                  <a:srgbClr val="2B2B2B"/>
+                </a:solidFill>
+                <a:latin typeface="Calibri"/>
+              </a:rPr>
+              <a:t> copiar y pegar sin comillas ni fuente, parafrasear sin citar, traducir un texto ajeno y presentarlo como propio, o entregar un trabajo comprado o hecho por otra persona.</a:t>
+            </a:r>
+          </a:p>
+        </p:txBody>
+      </p:sp>
+      <p:sp>
+        <p:nvSpPr>
+          <p:cNvPr id="8" name="Rounded Rectangle 7"/>
+          <p:cNvSpPr/>
+          <p:nvPr/>
+        </p:nvSpPr>
+        <p:spPr>
+          <a:xfrm>
+            <a:off x="640080" y="4389120"/>
+            <a:ext cx="10911535" cy="1225296"/>
+          </a:xfrm>
+          <a:prstGeom prst="roundRect">
+            <a:avLst/>
+          </a:prstGeom>
+          <a:solidFill>
+            <a:srgbClr val="FDECD8"/>
+          </a:solidFill>
+          <a:ln>
+            <a:noFill/>
+          </a:ln>
+          <a:effectLst/>
+        </p:spPr>
+        <p:style>
+          <a:lnRef idx="1">
+            <a:schemeClr val="accent1"/>
+          </a:lnRef>
+          <a:fillRef idx="3">
+            <a:schemeClr val="accent1"/>
+          </a:fillRef>
+          <a:effectRef idx="2">
+            <a:schemeClr val="accent1"/>
+          </a:effectRef>
+          <a:fontRef idx="minor">
+            <a:schemeClr val="lt1"/>
+          </a:fontRef>
+        </p:style>
+        <p:txBody>
+          <a:bodyPr rtlCol="0" anchor="ctr"/>
+          <a:lstStyle/>
+          <a:p>
+            <a:pPr algn="ctr"/>
+          </a:p>
+        </p:txBody>
+      </p:sp>
+      <p:sp>
+        <p:nvSpPr>
+          <p:cNvPr id="9" name="TextBox 8"/>
+          <p:cNvSpPr txBox="1"/>
+          <p:nvPr/>
+        </p:nvSpPr>
+        <p:spPr>
+          <a:xfrm>
+            <a:off x="868680" y="4498848"/>
+            <a:ext cx="10454335" cy="1005840"/>
+          </a:xfrm>
+          <a:prstGeom prst="rect">
+            <a:avLst/>
+          </a:prstGeom>
+          <a:noFill/>
+        </p:spPr>
+        <p:txBody>
+          <a:bodyPr wrap="square" anchor="t" lIns="0" rIns="0" tIns="0" bIns="0">
+            <a:spAutoFit/>
+          </a:bodyPr>
+          <a:lstStyle/>
+          <a:p>
+            <a:r>
+              <a:rPr sz="1300" b="1" i="0">
+                <a:solidFill>
+                  <a:srgbClr val="0C2340"/>
+                </a:solidFill>
+                <a:latin typeface="Calibri"/>
+              </a:rPr>
+              <a:t>💡 Aclaración</a:t>
+            </a:r>
+          </a:p>
+          <a:p>
+            <a:pPr>
+              <a:spcBef>
+                <a:spcPts val="400"/>
+              </a:spcBef>
+            </a:pPr>
+            <a:r>
+              <a:rPr sz="1300" b="0" i="0">
+                <a:solidFill>
+                  <a:srgbClr val="2B2B2B"/>
+                </a:solidFill>
+                <a:latin typeface="Calibri"/>
+              </a:rPr>
+              <a:t>Si aparece plagio, el caso </a:t>
+            </a:r>
+            <a:r>
+              <a:rPr sz="1300" b="1" i="0">
+                <a:solidFill>
+                  <a:srgbClr val="2B2B2B"/>
+                </a:solidFill>
+                <a:latin typeface="Calibri"/>
+              </a:rPr>
+              <a:t>no se arregla entre usted y el Docente</a:t>
+            </a:r>
+            <a:r>
+              <a:rPr sz="1300" b="0" i="0">
+                <a:solidFill>
+                  <a:srgbClr val="2B2B2B"/>
+                </a:solidFill>
+                <a:latin typeface="Calibri"/>
+              </a:rPr>
+              <a:t>: sigue el conducto que fija el Reglamento Estudiantil de la CUN. Por eso conviene preguntar antes, no explicar después.</a:t>
+            </a:r>
+          </a:p>
+        </p:txBody>
+      </p:sp>
+      <p:sp>
+        <p:nvSpPr>
+          <p:cNvPr id="10" name="TextBox 9"/>
+          <p:cNvSpPr txBox="1"/>
+          <p:nvPr/>
+        </p:nvSpPr>
+        <p:spPr>
+          <a:xfrm>
+            <a:off x="2194560" y="6446520"/>
+            <a:ext cx="5943600" cy="274320"/>
+          </a:xfrm>
+          <a:prstGeom prst="rect">
+            <a:avLst/>
+          </a:prstGeom>
+          <a:noFill/>
+        </p:spPr>
+        <p:txBody>
+          <a:bodyPr wrap="square" anchor="t" lIns="0" rIns="0" tIns="0" bIns="0">
+            <a:spAutoFit/>
+          </a:bodyPr>
+          <a:lstStyle/>
+          <a:p>
+            <a:pPr algn="l"/>
+            <a:r>
+              <a:rPr sz="1000" b="1" i="0">
+                <a:solidFill>
+                  <a:srgbClr val="8F989D"/>
+                </a:solidFill>
+                <a:latin typeface="Calibri"/>
+              </a:rPr>
+              <a:t>Inicio 5:10 pm</a:t>
+            </a:r>
+          </a:p>
+        </p:txBody>
+      </p:sp>
+      <p:sp>
+        <p:nvSpPr>
+          <p:cNvPr id="11" name="TextBox 10"/>
+          <p:cNvSpPr txBox="1"/>
+          <p:nvPr/>
+        </p:nvSpPr>
+        <p:spPr>
+          <a:xfrm>
+            <a:off x="11094415" y="6446520"/>
+            <a:ext cx="548640" cy="274320"/>
+          </a:xfrm>
+          <a:prstGeom prst="rect">
+            <a:avLst/>
+          </a:prstGeom>
+          <a:noFill/>
+        </p:spPr>
+        <p:txBody>
+          <a:bodyPr wrap="square" anchor="t" lIns="0" rIns="0" tIns="0" bIns="0">
+            <a:spAutoFit/>
+          </a:bodyPr>
+          <a:lstStyle/>
+          <a:p>
+            <a:pPr algn="r"/>
+            <a:r>
+              <a:rPr sz="1000" b="1" i="0">
+                <a:solidFill>
+                  <a:srgbClr val="8F989D"/>
+                </a:solidFill>
+                <a:latin typeface="Calibri"/>
+              </a:rPr>
+              <a:t>12</a:t>
+            </a:r>
+          </a:p>
+        </p:txBody>
+      </p:sp>
+    </p:spTree>
+  </p:cSld>
+  <p:clrMapOvr>
+    <a:masterClrMapping/>
+  </p:clrMapOvr>
+</p:sld>
+</file>
+
+<file path=ppt/slides/slide13.xml><?xml version="1.0" encoding="utf-8"?>
+<p:sld xmlns:a="http://schemas.openxmlformats.org/drawingml/2006/main" xmlns:p="http://schemas.openxmlformats.org/presentationml/2006/main" xmlns:r="http://schemas.openxmlformats.org/officeDocument/2006/relationships">
+  <p:cSld>
+    <p:bg>
+      <p:bgPr>
+        <a:solidFill>
+          <a:srgbClr val="FFFFFF"/>
+        </a:solidFill>
+        <a:effectLst/>
+      </p:bgPr>
+    </p:bg>
+    <p:spTree>
+      <p:nvGrpSpPr>
+        <p:cNvPr id="1" name=""/>
+        <p:cNvGrpSpPr/>
+        <p:nvPr/>
+      </p:nvGrpSpPr>
+      <p:grpSpPr/>
+      <p:sp>
+        <p:nvSpPr>
+          <p:cNvPr id="2" name="Rectangle 1"/>
+          <p:cNvSpPr/>
+          <p:nvPr/>
+        </p:nvSpPr>
+        <p:spPr>
+          <a:xfrm>
+            <a:off x="0" y="0"/>
+            <a:ext cx="12191695" cy="1188720"/>
+          </a:xfrm>
+          <a:prstGeom prst="rect">
+            <a:avLst/>
+          </a:prstGeom>
+          <a:solidFill>
+            <a:srgbClr val="0C2340"/>
+          </a:solidFill>
+          <a:ln>
+            <a:noFill/>
+          </a:ln>
+          <a:effectLst/>
+        </p:spPr>
+        <p:style>
+          <a:lnRef idx="1">
+            <a:schemeClr val="accent1"/>
+          </a:lnRef>
+          <a:fillRef idx="3">
+            <a:schemeClr val="accent1"/>
+          </a:fillRef>
+          <a:effectRef idx="2">
+            <a:schemeClr val="accent1"/>
+          </a:effectRef>
+          <a:fontRef idx="minor">
+            <a:schemeClr val="lt1"/>
+          </a:fontRef>
+        </p:style>
+        <p:txBody>
+          <a:bodyPr rtlCol="0" anchor="ctr"/>
+          <a:lstStyle/>
+          <a:p>
+            <a:pPr algn="ctr"/>
+          </a:p>
+        </p:txBody>
+      </p:sp>
+      <p:sp>
+        <p:nvSpPr>
+          <p:cNvPr id="3" name="TextBox 2"/>
+          <p:cNvSpPr txBox="1"/>
+          <p:nvPr/>
+        </p:nvSpPr>
+        <p:spPr>
+          <a:xfrm>
+            <a:off x="640080" y="0"/>
+            <a:ext cx="9082735" cy="1188720"/>
+          </a:xfrm>
+          <a:prstGeom prst="rect">
+            <a:avLst/>
+          </a:prstGeom>
+          <a:noFill/>
+        </p:spPr>
+        <p:txBody>
+          <a:bodyPr wrap="square" anchor="ctr" lIns="0" rIns="0" tIns="0" bIns="0">
+            <a:spAutoFit/>
+          </a:bodyPr>
+          <a:lstStyle/>
+          <a:p>
+            <a:pPr algn="ctr"/>
+            <a:r>
+              <a:rPr sz="2600" b="1" i="0">
+                <a:solidFill>
+                  <a:srgbClr val="FFFFFF"/>
+                </a:solidFill>
+                <a:latin typeface="Calibri"/>
+              </a:rPr>
+              <a:t>IA generativa: se usa, se declara y se verifica</a:t>
+            </a:r>
+          </a:p>
+        </p:txBody>
+      </p:sp>
+      <p:sp>
+        <p:nvSpPr>
+          <p:cNvPr id="4" name="TextBox 3"/>
+          <p:cNvSpPr txBox="1"/>
+          <p:nvPr/>
+        </p:nvSpPr>
+        <p:spPr>
+          <a:xfrm>
+            <a:off x="640080" y="1691639"/>
+            <a:ext cx="10911535" cy="4617720"/>
+          </a:xfrm>
+          <a:prstGeom prst="rect">
+            <a:avLst/>
+          </a:prstGeom>
+          <a:noFill/>
+        </p:spPr>
+        <p:txBody>
+          <a:bodyPr wrap="square" anchor="t" lIns="0" rIns="0" tIns="0" bIns="0">
+            <a:spAutoFit/>
+          </a:bodyPr>
+          <a:lstStyle/>
+          <a:p>
+            <a:pPr>
+              <a:spcAft>
+                <a:spcPts val="1000"/>
+              </a:spcAft>
+            </a:pPr>
+            <a:r>
+              <a:rPr sz="1600" b="0" i="0">
+                <a:solidFill>
+                  <a:srgbClr val="2B2B2B"/>
+                </a:solidFill>
+                <a:latin typeface="Calibri"/>
+              </a:rPr>
+              <a:t>–   La IA generativa </a:t>
+            </a:r>
+            <a:r>
+              <a:rPr sz="1600" b="1" i="0">
+                <a:solidFill>
+                  <a:srgbClr val="2B2B2B"/>
+                </a:solidFill>
+                <a:latin typeface="Calibri"/>
+              </a:rPr>
+              <a:t>no está prohibida</a:t>
+            </a:r>
+            <a:r>
+              <a:rPr sz="1600" b="0" i="0">
+                <a:solidFill>
+                  <a:srgbClr val="2B2B2B"/>
+                </a:solidFill>
+                <a:latin typeface="Calibri"/>
+              </a:rPr>
+              <a:t> en este curso: está </a:t>
+            </a:r>
+            <a:r>
+              <a:rPr sz="1600" b="1" i="0">
+                <a:solidFill>
+                  <a:srgbClr val="2B2B2B"/>
+                </a:solidFill>
+                <a:latin typeface="Calibri"/>
+              </a:rPr>
+              <a:t>regulada</a:t>
+            </a:r>
+            <a:r>
+              <a:rPr sz="1600" b="0" i="0">
+                <a:solidFill>
+                  <a:srgbClr val="2B2B2B"/>
+                </a:solidFill>
+                <a:latin typeface="Calibri"/>
+              </a:rPr>
+              <a:t>. Es una herramienta más, como el buscador.</a:t>
+            </a:r>
+          </a:p>
+          <a:p>
+            <a:pPr>
+              <a:spcAft>
+                <a:spcPts val="1000"/>
+              </a:spcAft>
+            </a:pPr>
+            <a:r>
+              <a:rPr sz="1600" b="0" i="0">
+                <a:solidFill>
+                  <a:srgbClr val="2B2B2B"/>
+                </a:solidFill>
+                <a:latin typeface="Calibri"/>
+              </a:rPr>
+              <a:t>–   </a:t>
+            </a:r>
+            <a:r>
+              <a:rPr sz="1600" b="1" i="0">
+                <a:solidFill>
+                  <a:srgbClr val="2B2B2B"/>
+                </a:solidFill>
+                <a:latin typeface="Calibri"/>
+              </a:rPr>
+              <a:t>Declárela.</a:t>
+            </a:r>
+            <a:r>
+              <a:rPr sz="1600" b="0" i="0">
+                <a:solidFill>
+                  <a:srgbClr val="2B2B2B"/>
+                </a:solidFill>
+                <a:latin typeface="Calibri"/>
+              </a:rPr>
+              <a:t> Al final del documento, una nota corta: qué herramienta usó, para qué y qué hizo usted con la salida.</a:t>
+            </a:r>
+          </a:p>
+          <a:p>
+            <a:pPr lvl="1">
+              <a:spcAft>
+                <a:spcPts val="600"/>
+              </a:spcAft>
+            </a:pPr>
+            <a:r>
+              <a:rPr sz="1500" b="0" i="0">
+                <a:solidFill>
+                  <a:srgbClr val="2B2B2B"/>
+                </a:solidFill>
+                <a:latin typeface="Calibri"/>
+              </a:rPr>
+              <a:t>●   Declararlo </a:t>
+            </a:r>
+            <a:r>
+              <a:rPr sz="1500" b="1" i="0">
+                <a:solidFill>
+                  <a:srgbClr val="2B2B2B"/>
+                </a:solidFill>
+                <a:latin typeface="Calibri"/>
+              </a:rPr>
+              <a:t>no baja la nota</a:t>
+            </a:r>
+            <a:r>
+              <a:rPr sz="1500" b="0" i="0">
+                <a:solidFill>
+                  <a:srgbClr val="2B2B2B"/>
+                </a:solidFill>
+                <a:latin typeface="Calibri"/>
+              </a:rPr>
+              <a:t>. Ocultarlo sí es una falta de integridad académica.</a:t>
+            </a:r>
+          </a:p>
+          <a:p>
+            <a:pPr>
+              <a:spcAft>
+                <a:spcPts val="1000"/>
+              </a:spcAft>
+            </a:pPr>
+            <a:r>
+              <a:rPr sz="1600" b="0" i="0">
+                <a:solidFill>
+                  <a:srgbClr val="2B2B2B"/>
+                </a:solidFill>
+                <a:latin typeface="Calibri"/>
+              </a:rPr>
+              <a:t>–   </a:t>
+            </a:r>
+            <a:r>
+              <a:rPr sz="1600" b="1" i="0">
+                <a:solidFill>
+                  <a:srgbClr val="2B2B2B"/>
+                </a:solidFill>
+                <a:latin typeface="Calibri"/>
+              </a:rPr>
+              <a:t>Verifique toda cita que le entregue la IA.</a:t>
+            </a:r>
+            <a:r>
+              <a:rPr sz="1600" b="0" i="0">
+                <a:solidFill>
+                  <a:srgbClr val="2B2B2B"/>
+                </a:solidFill>
+                <a:latin typeface="Calibri"/>
+              </a:rPr>
+              <a:t> El error número uno son las </a:t>
+            </a:r>
+            <a:r>
+              <a:rPr sz="1600" b="1" i="0">
+                <a:solidFill>
+                  <a:srgbClr val="2B2B2B"/>
+                </a:solidFill>
+                <a:latin typeface="Calibri"/>
+              </a:rPr>
+              <a:t>referencias inventadas</a:t>
+            </a:r>
+            <a:r>
+              <a:rPr sz="1600" b="0" i="0">
+                <a:solidFill>
+                  <a:srgbClr val="2B2B2B"/>
+                </a:solidFill>
+                <a:latin typeface="Calibri"/>
+              </a:rPr>
+              <a:t>: autor y año que suenan bien y no existen.</a:t>
+            </a:r>
+          </a:p>
+          <a:p>
+            <a:pPr lvl="1">
+              <a:spcAft>
+                <a:spcPts val="600"/>
+              </a:spcAft>
+            </a:pPr>
+            <a:r>
+              <a:rPr sz="1500" b="0" i="0">
+                <a:solidFill>
+                  <a:srgbClr val="2B2B2B"/>
+                </a:solidFill>
+                <a:latin typeface="Calibri"/>
+              </a:rPr>
+              <a:t>●   Si no logró abrir el documento original en Scholar, SciELO o Redalyc, esa fuente </a:t>
+            </a:r>
+            <a:r>
+              <a:rPr sz="1500" b="1" i="0">
+                <a:solidFill>
+                  <a:srgbClr val="2B2B2B"/>
+                </a:solidFill>
+                <a:latin typeface="Calibri"/>
+              </a:rPr>
+              <a:t>no entra</a:t>
+            </a:r>
+            <a:r>
+              <a:rPr sz="1500" b="0" i="0">
+                <a:solidFill>
+                  <a:srgbClr val="2B2B2B"/>
+                </a:solidFill>
+                <a:latin typeface="Calibri"/>
+              </a:rPr>
+              <a:t> en su entregable.</a:t>
+            </a:r>
+          </a:p>
+          <a:p>
+            <a:pPr>
+              <a:spcAft>
+                <a:spcPts val="1000"/>
+              </a:spcAft>
+            </a:pPr>
+            <a:r>
+              <a:rPr sz="1600" b="0" i="0">
+                <a:solidFill>
+                  <a:srgbClr val="2B2B2B"/>
+                </a:solidFill>
+                <a:latin typeface="Calibri"/>
+              </a:rPr>
+              <a:t>–   La IA </a:t>
+            </a:r>
+            <a:r>
+              <a:rPr sz="1600" b="1" i="0">
+                <a:solidFill>
+                  <a:srgbClr val="2B2B2B"/>
+                </a:solidFill>
+                <a:latin typeface="Calibri"/>
+              </a:rPr>
+              <a:t>no puede hacer</a:t>
+            </a:r>
+            <a:r>
+              <a:rPr sz="1600" b="0" i="0">
+                <a:solidFill>
+                  <a:srgbClr val="2B2B2B"/>
+                </a:solidFill>
+                <a:latin typeface="Calibri"/>
+              </a:rPr>
+              <a:t> lo que este curso evalúa: observar a un usuario real, elegir un problema y defender un criterio propio.</a:t>
+            </a:r>
+          </a:p>
+          <a:p>
+            <a:pPr lvl="1">
+              <a:spcAft>
+                <a:spcPts val="600"/>
+              </a:spcAft>
+            </a:pPr>
+            <a:r>
+              <a:rPr sz="1500" b="0" i="0">
+                <a:solidFill>
+                  <a:srgbClr val="2B2B2B"/>
+                </a:solidFill>
+                <a:latin typeface="Calibri"/>
+              </a:rPr>
+              <a:t>●   Un texto impecable sobre un problema que usted nunca miró se cae en la primera pregunta del Docente.</a:t>
+            </a:r>
+          </a:p>
+          <a:p>
+            <a:pPr>
+              <a:spcAft>
+                <a:spcPts val="1000"/>
+              </a:spcAft>
+            </a:pPr>
+            <a:r>
+              <a:rPr sz="1600" b="0" i="0">
+                <a:solidFill>
+                  <a:srgbClr val="2B2B2B"/>
+                </a:solidFill>
+                <a:latin typeface="Calibri"/>
+              </a:rPr>
+              <a:t>–   Usted firma el entregable: </a:t>
+            </a:r>
+            <a:r>
+              <a:rPr sz="1600" b="1" i="0">
+                <a:solidFill>
+                  <a:srgbClr val="2B2B2B"/>
+                </a:solidFill>
+                <a:latin typeface="Calibri"/>
+              </a:rPr>
+              <a:t>responde por cada frase</a:t>
+            </a:r>
+            <a:r>
+              <a:rPr sz="1600" b="0" i="0">
+                <a:solidFill>
+                  <a:srgbClr val="2B2B2B"/>
+                </a:solidFill>
+                <a:latin typeface="Calibri"/>
+              </a:rPr>
+              <a:t>, la haya escrito usted o una herramienta.</a:t>
+            </a:r>
+          </a:p>
+        </p:txBody>
+      </p:sp>
+      <p:sp>
+        <p:nvSpPr>
+          <p:cNvPr id="5" name="TextBox 4"/>
+          <p:cNvSpPr txBox="1"/>
+          <p:nvPr/>
+        </p:nvSpPr>
+        <p:spPr>
+          <a:xfrm>
+            <a:off x="2194560" y="6446520"/>
+            <a:ext cx="5943600" cy="274320"/>
+          </a:xfrm>
+          <a:prstGeom prst="rect">
+            <a:avLst/>
+          </a:prstGeom>
+          <a:noFill/>
+        </p:spPr>
+        <p:txBody>
+          <a:bodyPr wrap="square" anchor="t" lIns="0" rIns="0" tIns="0" bIns="0">
+            <a:spAutoFit/>
+          </a:bodyPr>
+          <a:lstStyle/>
+          <a:p>
+            <a:pPr algn="l"/>
+            <a:r>
+              <a:rPr sz="1000" b="1" i="0">
+                <a:solidFill>
+                  <a:srgbClr val="8F989D"/>
+                </a:solidFill>
+                <a:latin typeface="Calibri"/>
+              </a:rPr>
+              <a:t>Inicio 5:10 pm</a:t>
+            </a:r>
+          </a:p>
+        </p:txBody>
+      </p:sp>
+      <p:sp>
+        <p:nvSpPr>
+          <p:cNvPr id="6" name="TextBox 5"/>
+          <p:cNvSpPr txBox="1"/>
+          <p:nvPr/>
+        </p:nvSpPr>
+        <p:spPr>
+          <a:xfrm>
+            <a:off x="11094415" y="6446520"/>
+            <a:ext cx="548640" cy="274320"/>
+          </a:xfrm>
+          <a:prstGeom prst="rect">
+            <a:avLst/>
+          </a:prstGeom>
+          <a:noFill/>
+        </p:spPr>
+        <p:txBody>
+          <a:bodyPr wrap="square" anchor="t" lIns="0" rIns="0" tIns="0" bIns="0">
+            <a:spAutoFit/>
+          </a:bodyPr>
+          <a:lstStyle/>
+          <a:p>
+            <a:pPr algn="r"/>
+            <a:r>
+              <a:rPr sz="1000" b="1" i="0">
+                <a:solidFill>
+                  <a:srgbClr val="8F989D"/>
+                </a:solidFill>
+                <a:latin typeface="Calibri"/>
+              </a:rPr>
+              <a:t>13</a:t>
+            </a:r>
+          </a:p>
+        </p:txBody>
+      </p:sp>
+      <p:sp>
+        <p:nvSpPr>
+          <p:cNvPr id="7" name="TextBox 6"/>
+          <p:cNvSpPr txBox="1"/>
+          <p:nvPr/>
+        </p:nvSpPr>
+        <p:spPr>
+          <a:xfrm>
+            <a:off x="640080" y="5943600"/>
+            <a:ext cx="9997135" cy="457200"/>
+          </a:xfrm>
+          <a:prstGeom prst="rect">
+            <a:avLst/>
+          </a:prstGeom>
+          <a:noFill/>
+        </p:spPr>
+        <p:txBody>
+          <a:bodyPr wrap="square" anchor="t" lIns="0" rIns="0" tIns="0" bIns="0">
+            <a:spAutoFit/>
+          </a:bodyPr>
+          <a:lstStyle/>
+          <a:p>
+            <a:r>
+              <a:rPr sz="1200" b="0" i="1">
+                <a:solidFill>
+                  <a:srgbClr val="2B2B2B"/>
+                </a:solidFill>
+                <a:latin typeface="Calibri"/>
+              </a:rPr>
+              <a:t>Buen uso: pedirle que le discuta el problema o le ordene ideas. Mal uso: pedirle el entregable y copiarlo sin leer.</a:t>
+            </a:r>
+          </a:p>
+        </p:txBody>
+      </p:sp>
+    </p:spTree>
+  </p:cSld>
+  <p:clrMapOvr>
+    <a:masterClrMapping/>
+  </p:clrMapOvr>
+</p:sld>
+</file>
+
+<file path=ppt/slides/slide14.xml><?xml version="1.0" encoding="utf-8"?>
+<p:sld xmlns:a="http://schemas.openxmlformats.org/drawingml/2006/main" xmlns:p="http://schemas.openxmlformats.org/presentationml/2006/main" xmlns:r="http://schemas.openxmlformats.org/officeDocument/2006/relationships">
+  <p:cSld>
+    <p:bg>
+      <p:bgPr>
+        <a:solidFill>
+          <a:srgbClr val="FFFFFF"/>
+        </a:solidFill>
+        <a:effectLst/>
+      </p:bgPr>
+    </p:bg>
+    <p:spTree>
+      <p:nvGrpSpPr>
+        <p:cNvPr id="1" name=""/>
+        <p:cNvGrpSpPr/>
+        <p:nvPr/>
+      </p:nvGrpSpPr>
+      <p:grpSpPr/>
+      <p:sp>
+        <p:nvSpPr>
+          <p:cNvPr id="2" name="Rectangle 1"/>
+          <p:cNvSpPr/>
+          <p:nvPr/>
+        </p:nvSpPr>
+        <p:spPr>
+          <a:xfrm>
+            <a:off x="0" y="0"/>
+            <a:ext cx="12191695" cy="1188720"/>
+          </a:xfrm>
+          <a:prstGeom prst="rect">
+            <a:avLst/>
+          </a:prstGeom>
+          <a:solidFill>
+            <a:srgbClr val="0C2340"/>
+          </a:solidFill>
+          <a:ln>
+            <a:noFill/>
+          </a:ln>
+          <a:effectLst/>
+        </p:spPr>
+        <p:style>
+          <a:lnRef idx="1">
+            <a:schemeClr val="accent1"/>
+          </a:lnRef>
+          <a:fillRef idx="3">
+            <a:schemeClr val="accent1"/>
+          </a:fillRef>
+          <a:effectRef idx="2">
+            <a:schemeClr val="accent1"/>
+          </a:effectRef>
+          <a:fontRef idx="minor">
+            <a:schemeClr val="lt1"/>
+          </a:fontRef>
+        </p:style>
+        <p:txBody>
+          <a:bodyPr rtlCol="0" anchor="ctr"/>
+          <a:lstStyle/>
+          <a:p>
+            <a:pPr algn="ctr"/>
+          </a:p>
+        </p:txBody>
+      </p:sp>
+      <p:sp>
+        <p:nvSpPr>
+          <p:cNvPr id="3" name="TextBox 2"/>
+          <p:cNvSpPr txBox="1"/>
+          <p:nvPr/>
+        </p:nvSpPr>
+        <p:spPr>
+          <a:xfrm>
+            <a:off x="640080" y="0"/>
+            <a:ext cx="9082735" cy="1188720"/>
+          </a:xfrm>
+          <a:prstGeom prst="rect">
+            <a:avLst/>
+          </a:prstGeom>
+          <a:noFill/>
+        </p:spPr>
+        <p:txBody>
+          <a:bodyPr wrap="square" anchor="ctr" lIns="0" rIns="0" tIns="0" bIns="0">
+            <a:spAutoFit/>
+          </a:bodyPr>
+          <a:lstStyle/>
+          <a:p>
+            <a:pPr algn="ctr"/>
+            <a:r>
+              <a:rPr sz="2600" b="1" i="0">
+                <a:solidFill>
+                  <a:srgbClr val="FFFFFF"/>
+                </a:solidFill>
+                <a:latin typeface="Calibri"/>
+              </a:rPr>
+              <a:t>Herramientas del curso: gratis y desde el navegador</a:t>
+            </a:r>
+          </a:p>
+        </p:txBody>
+      </p:sp>
+      <p:graphicFrame>
+        <p:nvGraphicFramePr>
+          <p:cNvPr id="4" name="Table 3"/>
+          <p:cNvGraphicFramePr>
+            <a:graphicFrameLocks noGrp="1"/>
+          </p:cNvGraphicFramePr>
+          <p:nvPr/>
+        </p:nvGraphicFramePr>
+        <p:xfrm>
+          <a:off x="640080" y="1691639"/>
+          <a:ext cx="10911534" cy="4526280"/>
+        </p:xfrm>
+        <a:graphic>
+          <a:graphicData uri="http://schemas.openxmlformats.org/drawingml/2006/table">
+            <a:tbl>
+              <a:tblPr>
+                <a:tableStyleId>{2D5ABB26-0587-4C30-8999-92F81FD0307C}</a:tableStyleId>
+              </a:tblPr>
+              <a:tblGrid>
+                <a:gridCol w="2842500"/>
+                <a:gridCol w="4859759"/>
+                <a:gridCol w="3209275"/>
+              </a:tblGrid>
+              <a:tr h="502920">
+                <a:tc>
+                  <a:txBody>
+                    <a:bodyPr/>
+                    <a:lstStyle/>
+                    <a:p>
+                      <a:pPr algn="l"/>
+                      <a:r>
+                        <a:rPr sz="1300" b="1" i="0">
+                          <a:solidFill>
+                            <a:srgbClr val="FFFFFF"/>
+                          </a:solidFill>
+                          <a:latin typeface="Calibri"/>
+                        </a:rPr>
+                        <a:t>Herramienta</a:t>
+                      </a:r>
+                    </a:p>
+                  </a:txBody>
+                  <a:tcPr anchor="ctr" marL="109728" marR="91440" marT="36576" marB="36576">
+                    <a:solidFill>
+                      <a:srgbClr val="0C2340"/>
+                    </a:solidFill>
+                  </a:tcPr>
+                </a:tc>
+                <a:tc>
+                  <a:txBody>
+                    <a:bodyPr/>
+                    <a:lstStyle/>
+                    <a:p>
+                      <a:pPr algn="l"/>
+                      <a:r>
+                        <a:rPr sz="1300" b="1" i="0">
+                          <a:solidFill>
+                            <a:srgbClr val="FFFFFF"/>
+                          </a:solidFill>
+                          <a:latin typeface="Calibri"/>
+                        </a:rPr>
+                        <a:t>Para qué la usamos</a:t>
+                      </a:r>
+                    </a:p>
+                  </a:txBody>
+                  <a:tcPr anchor="ctr" marL="109728" marR="91440" marT="36576" marB="36576">
+                    <a:solidFill>
+                      <a:srgbClr val="0C2340"/>
+                    </a:solidFill>
+                  </a:tcPr>
+                </a:tc>
+                <a:tc>
+                  <a:txBody>
+                    <a:bodyPr/>
+                    <a:lstStyle/>
+                    <a:p>
+                      <a:pPr algn="l"/>
+                      <a:r>
+                        <a:rPr sz="1300" b="1" i="0">
+                          <a:solidFill>
+                            <a:srgbClr val="FFFFFF"/>
+                          </a:solidFill>
+                          <a:latin typeface="Calibri"/>
+                        </a:rPr>
+                        <a:t>Cuenta / acceso</a:t>
+                      </a:r>
+                    </a:p>
+                  </a:txBody>
+                  <a:tcPr anchor="ctr" marL="109728" marR="91440" marT="36576" marB="36576">
+                    <a:solidFill>
+                      <a:srgbClr val="0C2340"/>
+                    </a:solidFill>
+                  </a:tcPr>
+                </a:tc>
+              </a:tr>
+              <a:tr h="502920">
+                <a:tc>
+                  <a:txBody>
+                    <a:bodyPr/>
+                    <a:lstStyle/>
+                    <a:p>
+                      <a:pPr algn="l"/>
+                      <a:r>
+                        <a:rPr sz="1100" b="1" i="0">
+                          <a:solidFill>
+                            <a:srgbClr val="2B2B2B"/>
+                          </a:solidFill>
+                          <a:latin typeface="Calibri"/>
+                        </a:rPr>
+                        <a:t>CDigital</a:t>
+                      </a:r>
+                    </a:p>
+                  </a:txBody>
+                  <a:tcPr anchor="ctr" marL="109728" marR="91440" marT="36576" marB="36576">
+                    <a:solidFill>
+                      <a:srgbClr val="FFFFFF"/>
+                    </a:solidFill>
+                  </a:tcPr>
+                </a:tc>
+                <a:tc>
+                  <a:txBody>
+                    <a:bodyPr/>
+                    <a:lstStyle/>
+                    <a:p>
+                      <a:pPr algn="l"/>
+                      <a:r>
+                        <a:rPr sz="1100" b="0" i="0">
+                          <a:solidFill>
+                            <a:srgbClr val="2B2B2B"/>
+                          </a:solidFill>
+                          <a:latin typeface="Calibri"/>
+                        </a:rPr>
+                        <a:t>Material, anuncios, foro y </a:t>
+                      </a:r>
+                      <a:r>
+                        <a:rPr sz="1100" b="1" i="0">
+                          <a:solidFill>
+                            <a:srgbClr val="2B2B2B"/>
+                          </a:solidFill>
+                          <a:latin typeface="Calibri"/>
+                        </a:rPr>
+                        <a:t>entrega oficial</a:t>
+                      </a:r>
+                      <a:r>
+                        <a:rPr sz="1100" b="0" i="0">
+                          <a:solidFill>
+                            <a:srgbClr val="2B2B2B"/>
+                          </a:solidFill>
+                          <a:latin typeface="Calibri"/>
+                        </a:rPr>
+                        <a:t> de las ACAs</a:t>
+                      </a:r>
+                    </a:p>
+                  </a:txBody>
+                  <a:tcPr anchor="ctr" marL="109728" marR="91440" marT="36576" marB="36576">
+                    <a:solidFill>
+                      <a:srgbClr val="FFFFFF"/>
+                    </a:solidFill>
+                  </a:tcPr>
+                </a:tc>
+                <a:tc>
+                  <a:txBody>
+                    <a:bodyPr/>
+                    <a:lstStyle/>
+                    <a:p>
+                      <a:pPr algn="l"/>
+                      <a:r>
+                        <a:rPr sz="1100" b="0" i="0">
+                          <a:solidFill>
+                            <a:srgbClr val="2B2B2B"/>
+                          </a:solidFill>
+                          <a:latin typeface="Calibri"/>
+                        </a:rPr>
+                        <a:t>Login institucional CUN</a:t>
+                      </a:r>
+                    </a:p>
+                  </a:txBody>
+                  <a:tcPr anchor="ctr" marL="109728" marR="91440" marT="36576" marB="36576">
+                    <a:solidFill>
+                      <a:srgbClr val="FFFFFF"/>
+                    </a:solidFill>
+                  </a:tcPr>
+                </a:tc>
+              </a:tr>
+              <a:tr h="502920">
+                <a:tc>
+                  <a:txBody>
+                    <a:bodyPr/>
+                    <a:lstStyle/>
+                    <a:p>
+                      <a:pPr algn="l"/>
+                      <a:r>
+                        <a:rPr sz="1100" b="1" i="0">
+                          <a:solidFill>
+                            <a:srgbClr val="2B2B2B"/>
+                          </a:solidFill>
+                          <a:latin typeface="Calibri"/>
+                        </a:rPr>
+                        <a:t>Google Docs / Slides</a:t>
+                      </a:r>
+                    </a:p>
+                  </a:txBody>
+                  <a:tcPr anchor="ctr" marL="109728" marR="91440" marT="36576" marB="36576">
+                    <a:solidFill>
+                      <a:srgbClr val="F2F2F2"/>
+                    </a:solidFill>
+                  </a:tcPr>
+                </a:tc>
+                <a:tc>
+                  <a:txBody>
+                    <a:bodyPr/>
+                    <a:lstStyle/>
+                    <a:p>
+                      <a:pPr algn="l"/>
+                      <a:r>
+                        <a:rPr sz="1100" b="0" i="0">
+                          <a:solidFill>
+                            <a:srgbClr val="2B2B2B"/>
+                          </a:solidFill>
+                          <a:latin typeface="Calibri"/>
+                        </a:rPr>
+                        <a:t>Escribir la propuesta y armar el pitch (plantilla APA CUN)</a:t>
+                      </a:r>
+                    </a:p>
+                  </a:txBody>
+                  <a:tcPr anchor="ctr" marL="109728" marR="91440" marT="36576" marB="36576">
+                    <a:solidFill>
+                      <a:srgbClr val="F2F2F2"/>
+                    </a:solidFill>
+                  </a:tcPr>
+                </a:tc>
+                <a:tc>
+                  <a:txBody>
+                    <a:bodyPr/>
+                    <a:lstStyle/>
+                    <a:p>
+                      <a:pPr algn="l"/>
+                      <a:r>
+                        <a:rPr sz="1100" b="0" i="0">
+                          <a:solidFill>
+                            <a:srgbClr val="2B2B2B"/>
+                          </a:solidFill>
+                          <a:latin typeface="Calibri"/>
+                        </a:rPr>
+                        <a:t>Cuenta CUN o Gmail</a:t>
+                      </a:r>
+                    </a:p>
+                  </a:txBody>
+                  <a:tcPr anchor="ctr" marL="109728" marR="91440" marT="36576" marB="36576">
+                    <a:solidFill>
+                      <a:srgbClr val="F2F2F2"/>
+                    </a:solidFill>
+                  </a:tcPr>
+                </a:tc>
+              </a:tr>
+              <a:tr h="502920">
+                <a:tc>
+                  <a:txBody>
+                    <a:bodyPr/>
+                    <a:lstStyle/>
+                    <a:p>
+                      <a:pPr algn="l"/>
+                      <a:r>
+                        <a:rPr sz="1100" b="1" i="0">
+                          <a:solidFill>
+                            <a:srgbClr val="2B2B2B"/>
+                          </a:solidFill>
+                          <a:latin typeface="Calibri"/>
+                        </a:rPr>
+                        <a:t>Padlet</a:t>
+                      </a:r>
+                    </a:p>
+                  </a:txBody>
+                  <a:tcPr anchor="ctr" marL="109728" marR="91440" marT="36576" marB="36576">
+                    <a:solidFill>
+                      <a:srgbClr val="FFFFFF"/>
+                    </a:solidFill>
+                  </a:tcPr>
+                </a:tc>
+                <a:tc>
+                  <a:txBody>
+                    <a:bodyPr/>
+                    <a:lstStyle/>
+                    <a:p>
+                      <a:pPr algn="l"/>
+                      <a:r>
+                        <a:rPr sz="1100" b="0" i="0">
+                          <a:solidFill>
+                            <a:srgbClr val="2B2B2B"/>
+                          </a:solidFill>
+                          <a:latin typeface="Calibri"/>
+                        </a:rPr>
+                        <a:t>Tablero de presentación y lluvias de ideas rápidas</a:t>
+                      </a:r>
+                    </a:p>
+                  </a:txBody>
+                  <a:tcPr anchor="ctr" marL="109728" marR="91440" marT="36576" marB="36576">
+                    <a:solidFill>
+                      <a:srgbClr val="FFFFFF"/>
+                    </a:solidFill>
+                  </a:tcPr>
+                </a:tc>
+                <a:tc>
+                  <a:txBody>
+                    <a:bodyPr/>
+                    <a:lstStyle/>
+                    <a:p>
+                      <a:pPr algn="l"/>
+                      <a:r>
+                        <a:rPr sz="1100" b="0" i="0">
+                          <a:solidFill>
+                            <a:srgbClr val="2B2B2B"/>
+                          </a:solidFill>
+                          <a:latin typeface="Calibri"/>
+                        </a:rPr>
+                        <a:t>Sin cuenta, entra por el enlace</a:t>
+                      </a:r>
+                    </a:p>
+                  </a:txBody>
+                  <a:tcPr anchor="ctr" marL="109728" marR="91440" marT="36576" marB="36576">
+                    <a:solidFill>
+                      <a:srgbClr val="FFFFFF"/>
+                    </a:solidFill>
+                  </a:tcPr>
+                </a:tc>
+              </a:tr>
+              <a:tr h="502920">
+                <a:tc>
+                  <a:txBody>
+                    <a:bodyPr/>
+                    <a:lstStyle/>
+                    <a:p>
+                      <a:pPr algn="l"/>
+                      <a:r>
+                        <a:rPr sz="1100" b="1" i="0">
+                          <a:solidFill>
+                            <a:srgbClr val="2B2B2B"/>
+                          </a:solidFill>
+                          <a:latin typeface="Calibri"/>
+                        </a:rPr>
+                        <a:t>Excalidraw</a:t>
+                      </a:r>
+                      <a:r>
+                        <a:rPr sz="1100" b="0" i="0">
+                          <a:solidFill>
+                            <a:srgbClr val="2B2B2B"/>
+                          </a:solidFill>
+                          <a:latin typeface="Calibri"/>
+                        </a:rPr>
+                        <a:t> (excalidraw.com)</a:t>
+                      </a:r>
+                    </a:p>
+                  </a:txBody>
+                  <a:tcPr anchor="ctr" marL="109728" marR="91440" marT="36576" marB="36576">
+                    <a:solidFill>
+                      <a:srgbClr val="F2F2F2"/>
+                    </a:solidFill>
+                  </a:tcPr>
+                </a:tc>
+                <a:tc>
+                  <a:txBody>
+                    <a:bodyPr/>
+                    <a:lstStyle/>
+                    <a:p>
+                      <a:pPr algn="l"/>
+                      <a:r>
+                        <a:rPr sz="1100" b="0" i="0">
+                          <a:solidFill>
+                            <a:srgbClr val="2B2B2B"/>
+                          </a:solidFill>
+                          <a:latin typeface="Calibri"/>
+                        </a:rPr>
+                        <a:t>Bocetos, mapas y diagramas: feos pero claros</a:t>
+                      </a:r>
+                    </a:p>
+                  </a:txBody>
+                  <a:tcPr anchor="ctr" marL="109728" marR="91440" marT="36576" marB="36576">
+                    <a:solidFill>
+                      <a:srgbClr val="F2F2F2"/>
+                    </a:solidFill>
+                  </a:tcPr>
+                </a:tc>
+                <a:tc>
+                  <a:txBody>
+                    <a:bodyPr/>
+                    <a:lstStyle/>
+                    <a:p>
+                      <a:pPr algn="l"/>
+                      <a:r>
+                        <a:rPr sz="1100" b="0" i="0">
+                          <a:solidFill>
+                            <a:srgbClr val="2B2B2B"/>
+                          </a:solidFill>
+                          <a:latin typeface="Calibri"/>
+                        </a:rPr>
+                        <a:t>Sin cuenta</a:t>
+                      </a:r>
+                    </a:p>
+                  </a:txBody>
+                  <a:tcPr anchor="ctr" marL="109728" marR="91440" marT="36576" marB="36576">
+                    <a:solidFill>
+                      <a:srgbClr val="F2F2F2"/>
+                    </a:solidFill>
+                  </a:tcPr>
+                </a:tc>
+              </a:tr>
+              <a:tr h="502920">
+                <a:tc>
+                  <a:txBody>
+                    <a:bodyPr/>
+                    <a:lstStyle/>
+                    <a:p>
+                      <a:pPr algn="l"/>
+                      <a:r>
+                        <a:rPr sz="1100" b="1" i="0">
+                          <a:solidFill>
+                            <a:srgbClr val="2B2B2B"/>
+                          </a:solidFill>
+                          <a:latin typeface="Calibri"/>
+                        </a:rPr>
+                        <a:t>Canvanizer</a:t>
+                      </a:r>
+                    </a:p>
+                  </a:txBody>
+                  <a:tcPr anchor="ctr" marL="109728" marR="91440" marT="36576" marB="36576">
+                    <a:solidFill>
+                      <a:srgbClr val="FFFFFF"/>
+                    </a:solidFill>
+                  </a:tcPr>
+                </a:tc>
+                <a:tc>
+                  <a:txBody>
+                    <a:bodyPr/>
+                    <a:lstStyle/>
+                    <a:p>
+                      <a:pPr algn="l"/>
+                      <a:r>
+                        <a:rPr sz="1100" b="0" i="0">
+                          <a:solidFill>
+                            <a:srgbClr val="2B2B2B"/>
+                          </a:solidFill>
+                          <a:latin typeface="Calibri"/>
+                        </a:rPr>
+                        <a:t>Business Model Canvas de su propuesta (Corte 2)</a:t>
+                      </a:r>
+                    </a:p>
+                  </a:txBody>
+                  <a:tcPr anchor="ctr" marL="109728" marR="91440" marT="36576" marB="36576">
+                    <a:solidFill>
+                      <a:srgbClr val="FFFFFF"/>
+                    </a:solidFill>
+                  </a:tcPr>
+                </a:tc>
+                <a:tc>
+                  <a:txBody>
+                    <a:bodyPr/>
+                    <a:lstStyle/>
+                    <a:p>
+                      <a:pPr algn="l"/>
+                      <a:r>
+                        <a:rPr sz="1100" b="0" i="0">
+                          <a:solidFill>
+                            <a:srgbClr val="2B2B2B"/>
+                          </a:solidFill>
+                          <a:latin typeface="Calibri"/>
+                        </a:rPr>
+                        <a:t>Gratis en el navegador</a:t>
+                      </a:r>
+                    </a:p>
+                  </a:txBody>
+                  <a:tcPr anchor="ctr" marL="109728" marR="91440" marT="36576" marB="36576">
+                    <a:solidFill>
+                      <a:srgbClr val="FFFFFF"/>
+                    </a:solidFill>
+                  </a:tcPr>
+                </a:tc>
+              </a:tr>
+              <a:tr h="502920">
+                <a:tc>
+                  <a:txBody>
+                    <a:bodyPr/>
+                    <a:lstStyle/>
+                    <a:p>
+                      <a:pPr algn="l"/>
+                      <a:r>
+                        <a:rPr sz="1100" b="1" i="0">
+                          <a:solidFill>
+                            <a:srgbClr val="2B2B2B"/>
+                          </a:solidFill>
+                          <a:latin typeface="Calibri"/>
+                        </a:rPr>
+                        <a:t>Scholar · SciELO · Redalyc</a:t>
+                      </a:r>
+                    </a:p>
+                  </a:txBody>
+                  <a:tcPr anchor="ctr" marL="109728" marR="91440" marT="36576" marB="36576">
+                    <a:solidFill>
+                      <a:srgbClr val="F2F2F2"/>
+                    </a:solidFill>
+                  </a:tcPr>
+                </a:tc>
+                <a:tc>
+                  <a:txBody>
+                    <a:bodyPr/>
+                    <a:lstStyle/>
+                    <a:p>
+                      <a:pPr algn="l"/>
+                      <a:r>
+                        <a:rPr sz="1100" b="0" i="0">
+                          <a:solidFill>
+                            <a:srgbClr val="2B2B2B"/>
+                          </a:solidFill>
+                          <a:latin typeface="Calibri"/>
+                        </a:rPr>
+                        <a:t>Buscar fuentes serias, antecedentes y referentes</a:t>
+                      </a:r>
+                    </a:p>
+                  </a:txBody>
+                  <a:tcPr anchor="ctr" marL="109728" marR="91440" marT="36576" marB="36576">
+                    <a:solidFill>
+                      <a:srgbClr val="F2F2F2"/>
+                    </a:solidFill>
+                  </a:tcPr>
+                </a:tc>
+                <a:tc>
+                  <a:txBody>
+                    <a:bodyPr/>
+                    <a:lstStyle/>
+                    <a:p>
+                      <a:pPr algn="l"/>
+                      <a:r>
+                        <a:rPr sz="1100" b="0" i="0">
+                          <a:solidFill>
+                            <a:srgbClr val="2B2B2B"/>
+                          </a:solidFill>
+                          <a:latin typeface="Calibri"/>
+                        </a:rPr>
+                        <a:t>Sin cuenta</a:t>
+                      </a:r>
+                    </a:p>
+                  </a:txBody>
+                  <a:tcPr anchor="ctr" marL="109728" marR="91440" marT="36576" marB="36576">
+                    <a:solidFill>
+                      <a:srgbClr val="F2F2F2"/>
+                    </a:solidFill>
+                  </a:tcPr>
+                </a:tc>
+              </a:tr>
+              <a:tr h="502920">
+                <a:tc>
+                  <a:txBody>
+                    <a:bodyPr/>
+                    <a:lstStyle/>
+                    <a:p>
+                      <a:pPr algn="l"/>
+                      <a:r>
+                        <a:rPr sz="1100" b="1" i="0">
+                          <a:solidFill>
+                            <a:srgbClr val="2B2B2B"/>
+                          </a:solidFill>
+                          <a:latin typeface="Calibri"/>
+                        </a:rPr>
+                        <a:t>ZoteroBib</a:t>
+                      </a:r>
+                      <a:r>
+                        <a:rPr sz="1100" b="0" i="0">
+                          <a:solidFill>
+                            <a:srgbClr val="2B2B2B"/>
+                          </a:solidFill>
+                          <a:latin typeface="Calibri"/>
+                        </a:rPr>
+                        <a:t> (zbib.org)</a:t>
+                      </a:r>
+                    </a:p>
+                  </a:txBody>
+                  <a:tcPr anchor="ctr" marL="109728" marR="91440" marT="36576" marB="36576">
+                    <a:solidFill>
+                      <a:srgbClr val="FFFFFF"/>
+                    </a:solidFill>
+                  </a:tcPr>
+                </a:tc>
+                <a:tc>
+                  <a:txBody>
+                    <a:bodyPr/>
+                    <a:lstStyle/>
+                    <a:p>
+                      <a:pPr algn="l"/>
+                      <a:r>
+                        <a:rPr sz="1100" b="0" i="0">
+                          <a:solidFill>
+                            <a:srgbClr val="2B2B2B"/>
+                          </a:solidFill>
+                          <a:latin typeface="Calibri"/>
+                        </a:rPr>
+                        <a:t>Armar las referencias en APA 7 sin instalar nada</a:t>
+                      </a:r>
+                    </a:p>
+                  </a:txBody>
+                  <a:tcPr anchor="ctr" marL="109728" marR="91440" marT="36576" marB="36576">
+                    <a:solidFill>
+                      <a:srgbClr val="FFFFFF"/>
+                    </a:solidFill>
+                  </a:tcPr>
+                </a:tc>
+                <a:tc>
+                  <a:txBody>
+                    <a:bodyPr/>
+                    <a:lstStyle/>
+                    <a:p>
+                      <a:pPr algn="l"/>
+                      <a:r>
+                        <a:rPr sz="1100" b="0" i="0">
+                          <a:solidFill>
+                            <a:srgbClr val="2B2B2B"/>
+                          </a:solidFill>
+                          <a:latin typeface="Calibri"/>
+                        </a:rPr>
+                        <a:t>Sin cuenta</a:t>
+                      </a:r>
+                    </a:p>
+                  </a:txBody>
+                  <a:tcPr anchor="ctr" marL="109728" marR="91440" marT="36576" marB="36576">
+                    <a:solidFill>
+                      <a:srgbClr val="FFFFFF"/>
+                    </a:solidFill>
+                  </a:tcPr>
+                </a:tc>
+              </a:tr>
+              <a:tr h="502920">
+                <a:tc>
+                  <a:txBody>
+                    <a:bodyPr/>
+                    <a:lstStyle/>
+                    <a:p>
+                      <a:pPr algn="l"/>
+                      <a:r>
+                        <a:rPr sz="1100" b="1" i="0">
+                          <a:solidFill>
+                            <a:srgbClr val="2B2B2B"/>
+                          </a:solidFill>
+                          <a:latin typeface="Calibri"/>
+                        </a:rPr>
+                        <a:t>Canva free</a:t>
+                      </a:r>
+                      <a:r>
+                        <a:rPr sz="1100" b="0" i="0">
+                          <a:solidFill>
+                            <a:srgbClr val="2B2B2B"/>
+                          </a:solidFill>
+                          <a:latin typeface="Calibri"/>
+                        </a:rPr>
+                        <a:t> (opcional)</a:t>
+                      </a:r>
+                    </a:p>
+                  </a:txBody>
+                  <a:tcPr anchor="ctr" marL="109728" marR="91440" marT="36576" marB="36576">
+                    <a:solidFill>
+                      <a:srgbClr val="F2F2F2"/>
+                    </a:solidFill>
+                  </a:tcPr>
+                </a:tc>
+                <a:tc>
+                  <a:txBody>
+                    <a:bodyPr/>
+                    <a:lstStyle/>
+                    <a:p>
+                      <a:pPr algn="l"/>
+                      <a:r>
+                        <a:rPr sz="1100" b="0" i="0">
+                          <a:solidFill>
+                            <a:srgbClr val="2B2B2B"/>
+                          </a:solidFill>
+                          <a:latin typeface="Calibri"/>
+                        </a:rPr>
+                        <a:t>Una diapositiva de pitch presentable, si la quiere</a:t>
+                      </a:r>
+                    </a:p>
+                  </a:txBody>
+                  <a:tcPr anchor="ctr" marL="109728" marR="91440" marT="36576" marB="36576">
+                    <a:solidFill>
+                      <a:srgbClr val="F2F2F2"/>
+                    </a:solidFill>
+                  </a:tcPr>
+                </a:tc>
+                <a:tc>
+                  <a:txBody>
+                    <a:bodyPr/>
+                    <a:lstStyle/>
+                    <a:p>
+                      <a:pPr algn="l"/>
+                      <a:r>
+                        <a:rPr sz="1100" b="0" i="0">
+                          <a:solidFill>
+                            <a:srgbClr val="2B2B2B"/>
+                          </a:solidFill>
+                          <a:latin typeface="Calibri"/>
+                        </a:rPr>
+                        <a:t>Cuenta gratuita</a:t>
+                      </a:r>
+                    </a:p>
+                  </a:txBody>
+                  <a:tcPr anchor="ctr" marL="109728" marR="91440" marT="36576" marB="36576">
+                    <a:solidFill>
+                      <a:srgbClr val="F2F2F2"/>
+                    </a:solidFill>
+                  </a:tcPr>
+                </a:tc>
+              </a:tr>
+            </a:tbl>
+          </a:graphicData>
+        </a:graphic>
+      </p:graphicFrame>
+      <p:sp>
+        <p:nvSpPr>
+          <p:cNvPr id="5" name="TextBox 4"/>
+          <p:cNvSpPr txBox="1"/>
+          <p:nvPr/>
+        </p:nvSpPr>
+        <p:spPr>
+          <a:xfrm>
+            <a:off x="640080" y="6080760"/>
+            <a:ext cx="10911535" cy="548640"/>
+          </a:xfrm>
+          <a:prstGeom prst="rect">
+            <a:avLst/>
+          </a:prstGeom>
+          <a:noFill/>
+        </p:spPr>
+        <p:txBody>
+          <a:bodyPr wrap="square" anchor="t" lIns="0" rIns="0" tIns="0" bIns="0">
+            <a:spAutoFit/>
+          </a:bodyPr>
+          <a:lstStyle/>
+          <a:p>
+            <a:r>
+              <a:rPr sz="1200" b="0" i="1">
+                <a:solidFill>
+                  <a:srgbClr val="2B2B2B"/>
+                </a:solidFill>
+                <a:latin typeface="Calibri"/>
+              </a:rPr>
+              <a:t>Regla del curso: </a:t>
+            </a:r>
+            <a:r>
+              <a:rPr sz="1200" b="1" i="1">
+                <a:solidFill>
+                  <a:srgbClr val="2B2B2B"/>
+                </a:solidFill>
+                <a:latin typeface="Calibri"/>
+              </a:rPr>
+              <a:t>nada de pagar ni de instalar</a:t>
+            </a:r>
+            <a:r>
+              <a:rPr sz="1200" b="0" i="1">
+                <a:solidFill>
+                  <a:srgbClr val="2B2B2B"/>
+                </a:solidFill>
+                <a:latin typeface="Calibri"/>
+              </a:rPr>
+              <a:t>. Si una herramienta le pide tarjeta, no es la que estamos pidiendo.</a:t>
+            </a:r>
+          </a:p>
+        </p:txBody>
+      </p:sp>
+      <p:sp>
+        <p:nvSpPr>
+          <p:cNvPr id="6" name="TextBox 5"/>
+          <p:cNvSpPr txBox="1"/>
+          <p:nvPr/>
+        </p:nvSpPr>
+        <p:spPr>
+          <a:xfrm>
+            <a:off x="2194560" y="6446520"/>
+            <a:ext cx="5943600" cy="274320"/>
+          </a:xfrm>
+          <a:prstGeom prst="rect">
+            <a:avLst/>
+          </a:prstGeom>
+          <a:noFill/>
+        </p:spPr>
+        <p:txBody>
+          <a:bodyPr wrap="square" anchor="t" lIns="0" rIns="0" tIns="0" bIns="0">
+            <a:spAutoFit/>
+          </a:bodyPr>
+          <a:lstStyle/>
+          <a:p>
+            <a:pPr algn="l"/>
+            <a:r>
+              <a:rPr sz="1000" b="1" i="0">
+                <a:solidFill>
+                  <a:srgbClr val="8F989D"/>
+                </a:solidFill>
+                <a:latin typeface="Calibri"/>
+              </a:rPr>
+              <a:t>Inicio 5:10 pm</a:t>
+            </a:r>
+          </a:p>
+        </p:txBody>
+      </p:sp>
+      <p:sp>
+        <p:nvSpPr>
+          <p:cNvPr id="7" name="TextBox 6"/>
+          <p:cNvSpPr txBox="1"/>
+          <p:nvPr/>
+        </p:nvSpPr>
+        <p:spPr>
+          <a:xfrm>
+            <a:off x="11094415" y="6446520"/>
+            <a:ext cx="548640" cy="274320"/>
+          </a:xfrm>
+          <a:prstGeom prst="rect">
+            <a:avLst/>
+          </a:prstGeom>
+          <a:noFill/>
+        </p:spPr>
+        <p:txBody>
+          <a:bodyPr wrap="square" anchor="t" lIns="0" rIns="0" tIns="0" bIns="0">
+            <a:spAutoFit/>
+          </a:bodyPr>
+          <a:lstStyle/>
+          <a:p>
+            <a:pPr algn="r"/>
+            <a:r>
+              <a:rPr sz="1000" b="1" i="0">
+                <a:solidFill>
+                  <a:srgbClr val="8F989D"/>
+                </a:solidFill>
+                <a:latin typeface="Calibri"/>
+              </a:rPr>
+              <a:t>14</a:t>
+            </a:r>
+          </a:p>
+        </p:txBody>
+      </p:sp>
+    </p:spTree>
+  </p:cSld>
+  <p:clrMapOvr>
+    <a:masterClrMapping/>
+  </p:clrMapOvr>
+</p:sld>
+</file>
+
+<file path=ppt/slides/slide15.xml><?xml version="1.0" encoding="utf-8"?>
+<p:sld xmlns:a="http://schemas.openxmlformats.org/drawingml/2006/main" xmlns:p="http://schemas.openxmlformats.org/presentationml/2006/main" xmlns:r="http://schemas.openxmlformats.org/officeDocument/2006/relationships">
+  <p:cSld>
+    <p:bg>
+      <p:bgPr>
+        <a:solidFill>
+          <a:srgbClr val="FFFFFF"/>
+        </a:solidFill>
+        <a:effectLst/>
+      </p:bgPr>
+    </p:bg>
+    <p:spTree>
+      <p:nvGrpSpPr>
+        <p:cNvPr id="1" name=""/>
+        <p:cNvGrpSpPr/>
+        <p:nvPr/>
+      </p:nvGrpSpPr>
+      <p:grpSpPr/>
+      <p:sp>
+        <p:nvSpPr>
+          <p:cNvPr id="2" name="Rectangle 1"/>
+          <p:cNvSpPr/>
+          <p:nvPr/>
+        </p:nvSpPr>
+        <p:spPr>
+          <a:xfrm>
+            <a:off x="0" y="0"/>
+            <a:ext cx="12191695" cy="1188720"/>
+          </a:xfrm>
+          <a:prstGeom prst="rect">
+            <a:avLst/>
+          </a:prstGeom>
+          <a:solidFill>
+            <a:srgbClr val="0C2340"/>
+          </a:solidFill>
+          <a:ln>
+            <a:noFill/>
+          </a:ln>
+          <a:effectLst/>
+        </p:spPr>
+        <p:style>
+          <a:lnRef idx="1">
+            <a:schemeClr val="accent1"/>
+          </a:lnRef>
+          <a:fillRef idx="3">
+            <a:schemeClr val="accent1"/>
+          </a:fillRef>
+          <a:effectRef idx="2">
+            <a:schemeClr val="accent1"/>
+          </a:effectRef>
+          <a:fontRef idx="minor">
+            <a:schemeClr val="lt1"/>
+          </a:fontRef>
+        </p:style>
+        <p:txBody>
+          <a:bodyPr rtlCol="0" anchor="ctr"/>
+          <a:lstStyle/>
+          <a:p>
+            <a:pPr algn="ctr"/>
+          </a:p>
+        </p:txBody>
+      </p:sp>
+      <p:sp>
+        <p:nvSpPr>
+          <p:cNvPr id="3" name="TextBox 2"/>
+          <p:cNvSpPr txBox="1"/>
+          <p:nvPr/>
+        </p:nvSpPr>
+        <p:spPr>
+          <a:xfrm>
+            <a:off x="640080" y="0"/>
+            <a:ext cx="9082735" cy="1188720"/>
+          </a:xfrm>
+          <a:prstGeom prst="rect">
+            <a:avLst/>
+          </a:prstGeom>
+          <a:noFill/>
+        </p:spPr>
+        <p:txBody>
+          <a:bodyPr wrap="square" anchor="ctr" lIns="0" rIns="0" tIns="0" bIns="0">
+            <a:spAutoFit/>
+          </a:bodyPr>
+          <a:lstStyle/>
+          <a:p>
+            <a:pPr algn="ctr"/>
+            <a:r>
+              <a:rPr sz="2600" b="1" i="0">
+                <a:solidFill>
+                  <a:srgbClr val="FFFFFF"/>
+                </a:solidFill>
+                <a:latin typeface="Calibri"/>
+              </a:rPr>
+              <a:t>Cómo pedir ayuda (y recibir respuesta pronto)</a:t>
+            </a:r>
+          </a:p>
+        </p:txBody>
+      </p:sp>
+      <p:sp>
+        <p:nvSpPr>
+          <p:cNvPr id="4" name="TextBox 3"/>
+          <p:cNvSpPr txBox="1"/>
+          <p:nvPr/>
+        </p:nvSpPr>
+        <p:spPr>
+          <a:xfrm>
+            <a:off x="640080" y="1691639"/>
+            <a:ext cx="10911535" cy="4617720"/>
+          </a:xfrm>
+          <a:prstGeom prst="rect">
+            <a:avLst/>
+          </a:prstGeom>
+          <a:noFill/>
+        </p:spPr>
+        <p:txBody>
+          <a:bodyPr wrap="square" anchor="t" lIns="0" rIns="0" tIns="0" bIns="0">
+            <a:spAutoFit/>
+          </a:bodyPr>
+          <a:lstStyle/>
+          <a:p>
+            <a:pPr>
+              <a:spcAft>
+                <a:spcPts val="1000"/>
+              </a:spcAft>
+            </a:pPr>
+            <a:r>
+              <a:rPr sz="1600" b="0" i="0">
+                <a:solidFill>
+                  <a:srgbClr val="2B2B2B"/>
+                </a:solidFill>
+                <a:latin typeface="Calibri"/>
+              </a:rPr>
+              <a:t>–   </a:t>
+            </a:r>
+            <a:r>
+              <a:rPr sz="1600" b="1" i="0">
+                <a:solidFill>
+                  <a:srgbClr val="2B2B2B"/>
+                </a:solidFill>
+                <a:latin typeface="Calibri"/>
+              </a:rPr>
+              <a:t>En el encuentro:</a:t>
+            </a:r>
+            <a:r>
+              <a:rPr sz="1600" b="0" i="0">
+                <a:solidFill>
+                  <a:srgbClr val="2B2B2B"/>
+                </a:solidFill>
+                <a:latin typeface="Calibri"/>
+              </a:rPr>
+              <a:t> los últimos minutos son para dudas. Es el canal más rápido y el que menos se usa.</a:t>
+            </a:r>
+          </a:p>
+          <a:p>
+            <a:pPr>
+              <a:spcAft>
+                <a:spcPts val="1000"/>
+              </a:spcAft>
+            </a:pPr>
+            <a:r>
+              <a:rPr sz="1600" b="0" i="0">
+                <a:solidFill>
+                  <a:srgbClr val="2B2B2B"/>
+                </a:solidFill>
+                <a:latin typeface="Calibri"/>
+              </a:rPr>
+              <a:t>–   </a:t>
+            </a:r>
+            <a:r>
+              <a:rPr sz="1600" b="1" i="0">
+                <a:solidFill>
+                  <a:srgbClr val="2B2B2B"/>
+                </a:solidFill>
+                <a:latin typeface="Calibri"/>
+              </a:rPr>
+              <a:t>Foro del curso en CDigital:</a:t>
+            </a:r>
+            <a:r>
+              <a:rPr sz="1600" b="0" i="0">
+                <a:solidFill>
+                  <a:srgbClr val="2B2B2B"/>
+                </a:solidFill>
+                <a:latin typeface="Calibri"/>
+              </a:rPr>
+              <a:t> para dudas que le sirven a todo el grupo (formato, entrega, alcance de un ACA).</a:t>
+            </a:r>
+          </a:p>
+          <a:p>
+            <a:pPr lvl="1">
+              <a:spcAft>
+                <a:spcPts val="600"/>
+              </a:spcAft>
+            </a:pPr>
+            <a:r>
+              <a:rPr sz="1500" b="0" i="0">
+                <a:solidFill>
+                  <a:srgbClr val="2B2B2B"/>
+                </a:solidFill>
+                <a:latin typeface="Calibri"/>
+              </a:rPr>
+              <a:t>●   Lo que se pregunta en el foro queda respondido para los demás; por eso se responde primero ahí.</a:t>
+            </a:r>
+          </a:p>
+          <a:p>
+            <a:pPr>
+              <a:spcAft>
+                <a:spcPts val="1000"/>
+              </a:spcAft>
+            </a:pPr>
+            <a:r>
+              <a:rPr sz="1600" b="0" i="0">
+                <a:solidFill>
+                  <a:srgbClr val="2B2B2B"/>
+                </a:solidFill>
+                <a:latin typeface="Calibri"/>
+              </a:rPr>
+              <a:t>–   </a:t>
+            </a:r>
+            <a:r>
+              <a:rPr sz="1600" b="1" i="0">
+                <a:solidFill>
+                  <a:srgbClr val="2B2B2B"/>
+                </a:solidFill>
+                <a:latin typeface="Calibri"/>
+              </a:rPr>
+              <a:t>Correo institucional del Docente:</a:t>
+            </a:r>
+            <a:r>
+              <a:rPr sz="1600" b="0" i="0">
+                <a:solidFill>
+                  <a:srgbClr val="2B2B2B"/>
+                </a:solidFill>
+                <a:latin typeface="Calibri"/>
+              </a:rPr>
+              <a:t> para lo personal (una situación particular, una nota, una dificultad).</a:t>
+            </a:r>
+          </a:p>
+          <a:p>
+            <a:pPr lvl="1">
+              <a:spcAft>
+                <a:spcPts val="600"/>
+              </a:spcAft>
+            </a:pPr>
+            <a:r>
+              <a:rPr sz="1500" b="0" i="0">
+                <a:solidFill>
+                  <a:srgbClr val="2B2B2B"/>
+                </a:solidFill>
+                <a:latin typeface="Calibri"/>
+              </a:rPr>
+              <a:t>●   Asunto sugerido: </a:t>
+            </a:r>
+            <a:r>
+              <a:rPr sz="1500" b="1" i="0">
+                <a:solidFill>
+                  <a:srgbClr val="2B2B2B"/>
+                </a:solidFill>
+                <a:latin typeface="Calibri"/>
+              </a:rPr>
+              <a:t>EI004 – su nombre – el tema en cuatro palabras</a:t>
+            </a:r>
+            <a:r>
+              <a:rPr sz="1500" b="0" i="0">
+                <a:solidFill>
+                  <a:srgbClr val="2B2B2B"/>
+                </a:solidFill>
+                <a:latin typeface="Calibri"/>
+              </a:rPr>
+              <a:t>. Sin asunto claro, la respuesta tarda más.</a:t>
+            </a:r>
+          </a:p>
+          <a:p>
+            <a:pPr>
+              <a:spcAft>
+                <a:spcPts val="1000"/>
+              </a:spcAft>
+            </a:pPr>
+            <a:r>
+              <a:rPr sz="1600" b="0" i="0">
+                <a:solidFill>
+                  <a:srgbClr val="2B2B2B"/>
+                </a:solidFill>
+                <a:latin typeface="Calibri"/>
+              </a:rPr>
+              <a:t>–   </a:t>
+            </a:r>
+            <a:r>
+              <a:rPr sz="1600" b="1" i="0">
+                <a:solidFill>
+                  <a:srgbClr val="2B2B2B"/>
+                </a:solidFill>
+                <a:latin typeface="Calibri"/>
+              </a:rPr>
+              <a:t>Tiempo de respuesta:</a:t>
+            </a:r>
+            <a:r>
+              <a:rPr sz="1600" b="0" i="0">
+                <a:solidFill>
+                  <a:srgbClr val="2B2B2B"/>
+                </a:solidFill>
+                <a:latin typeface="Calibri"/>
+              </a:rPr>
+              <a:t> en días hábiles, normalmente entre </a:t>
+            </a:r>
+            <a:r>
+              <a:rPr sz="1600" b="1" i="0">
+                <a:solidFill>
+                  <a:srgbClr val="2B2B2B"/>
+                </a:solidFill>
+                <a:latin typeface="Calibri"/>
+              </a:rPr>
+              <a:t>24 y 48 horas</a:t>
+            </a:r>
+            <a:r>
+              <a:rPr sz="1600" b="0" i="0">
+                <a:solidFill>
+                  <a:srgbClr val="2B2B2B"/>
+                </a:solidFill>
+                <a:latin typeface="Calibri"/>
+              </a:rPr>
+              <a:t>. No hay atención de madrugada ni domingo.</a:t>
+            </a:r>
+          </a:p>
+          <a:p>
+            <a:pPr>
+              <a:spcAft>
+                <a:spcPts val="1000"/>
+              </a:spcAft>
+            </a:pPr>
+            <a:r>
+              <a:rPr sz="1600" b="0" i="0">
+                <a:solidFill>
+                  <a:srgbClr val="2B2B2B"/>
+                </a:solidFill>
+                <a:latin typeface="Calibri"/>
+              </a:rPr>
+              <a:t>–   Formule la duda </a:t>
+            </a:r>
+            <a:r>
+              <a:rPr sz="1600" b="1" i="0">
+                <a:solidFill>
+                  <a:srgbClr val="2B2B2B"/>
+                </a:solidFill>
+                <a:latin typeface="Calibri"/>
+              </a:rPr>
+              <a:t>concreta</a:t>
+            </a:r>
+            <a:r>
+              <a:rPr sz="1600" b="0" i="0">
+                <a:solidFill>
+                  <a:srgbClr val="2B2B2B"/>
+                </a:solidFill>
+                <a:latin typeface="Calibri"/>
+              </a:rPr>
+              <a:t>: qué intentó, qué parte no le cuadra y qué necesita decidir.</a:t>
+            </a:r>
+          </a:p>
+          <a:p>
+            <a:pPr lvl="1">
+              <a:spcAft>
+                <a:spcPts val="600"/>
+              </a:spcAft>
+            </a:pPr>
+            <a:r>
+              <a:rPr sz="1500" b="0" i="0">
+                <a:solidFill>
+                  <a:srgbClr val="2B2B2B"/>
+                </a:solidFill>
+                <a:latin typeface="Calibri"/>
+              </a:rPr>
+              <a:t>●   “No entendí nada” no se puede responder. “No sé si mi usuario es el estudiante o el laboratorista” sí.</a:t>
+            </a:r>
+          </a:p>
+        </p:txBody>
+      </p:sp>
+      <p:sp>
+        <p:nvSpPr>
+          <p:cNvPr id="5" name="TextBox 4"/>
+          <p:cNvSpPr txBox="1"/>
+          <p:nvPr/>
+        </p:nvSpPr>
+        <p:spPr>
+          <a:xfrm>
+            <a:off x="2194560" y="6446520"/>
+            <a:ext cx="5943600" cy="274320"/>
+          </a:xfrm>
+          <a:prstGeom prst="rect">
+            <a:avLst/>
+          </a:prstGeom>
+          <a:noFill/>
+        </p:spPr>
+        <p:txBody>
+          <a:bodyPr wrap="square" anchor="t" lIns="0" rIns="0" tIns="0" bIns="0">
+            <a:spAutoFit/>
+          </a:bodyPr>
+          <a:lstStyle/>
+          <a:p>
+            <a:pPr algn="l"/>
+            <a:r>
+              <a:rPr sz="1000" b="1" i="0">
+                <a:solidFill>
+                  <a:srgbClr val="8F989D"/>
+                </a:solidFill>
+                <a:latin typeface="Calibri"/>
+              </a:rPr>
+              <a:t>Inicio 5:10 pm</a:t>
+            </a:r>
+          </a:p>
+        </p:txBody>
+      </p:sp>
+      <p:sp>
+        <p:nvSpPr>
+          <p:cNvPr id="6" name="TextBox 5"/>
+          <p:cNvSpPr txBox="1"/>
+          <p:nvPr/>
+        </p:nvSpPr>
+        <p:spPr>
+          <a:xfrm>
+            <a:off x="11094415" y="6446520"/>
+            <a:ext cx="548640" cy="274320"/>
+          </a:xfrm>
+          <a:prstGeom prst="rect">
+            <a:avLst/>
+          </a:prstGeom>
+          <a:noFill/>
+        </p:spPr>
+        <p:txBody>
+          <a:bodyPr wrap="square" anchor="t" lIns="0" rIns="0" tIns="0" bIns="0">
+            <a:spAutoFit/>
+          </a:bodyPr>
+          <a:lstStyle/>
+          <a:p>
+            <a:pPr algn="r"/>
+            <a:r>
+              <a:rPr sz="1000" b="1" i="0">
+                <a:solidFill>
+                  <a:srgbClr val="8F989D"/>
+                </a:solidFill>
+                <a:latin typeface="Calibri"/>
+              </a:rPr>
+              <a:t>15</a:t>
+            </a:r>
+          </a:p>
+        </p:txBody>
+      </p:sp>
+      <p:sp>
+        <p:nvSpPr>
+          <p:cNvPr id="7" name="TextBox 6"/>
+          <p:cNvSpPr txBox="1"/>
+          <p:nvPr/>
+        </p:nvSpPr>
+        <p:spPr>
+          <a:xfrm>
+            <a:off x="640080" y="5943600"/>
+            <a:ext cx="9997135" cy="457200"/>
+          </a:xfrm>
+          <a:prstGeom prst="rect">
+            <a:avLst/>
+          </a:prstGeom>
+          <a:noFill/>
+        </p:spPr>
+        <p:txBody>
+          <a:bodyPr wrap="square" anchor="t" lIns="0" rIns="0" tIns="0" bIns="0">
+            <a:spAutoFit/>
+          </a:bodyPr>
+          <a:lstStyle/>
+          <a:p>
+            <a:r>
+              <a:rPr sz="1200" b="0" i="1">
+                <a:solidFill>
+                  <a:srgbClr val="2B2B2B"/>
+                </a:solidFill>
+                <a:latin typeface="Calibri"/>
+              </a:rPr>
+              <a:t>Escribir la víspera de la entrega es válido, pero a esa hora ya no queda tiempo de arreglar mucho.</a:t>
+            </a:r>
+          </a:p>
+        </p:txBody>
+      </p:sp>
+    </p:spTree>
+  </p:cSld>
+  <p:clrMapOvr>
+    <a:masterClrMapping/>
+  </p:clrMapOvr>
+</p:sld>
+</file>
+
+<file path=ppt/slides/slide16.xml><?xml version="1.0" encoding="utf-8"?>
+<p:sld xmlns:a="http://schemas.openxmlformats.org/drawingml/2006/main" xmlns:p="http://schemas.openxmlformats.org/presentationml/2006/main" xmlns:r="http://schemas.openxmlformats.org/officeDocument/2006/relationships">
+  <p:cSld>
+    <p:bg>
+      <p:bgPr>
+        <a:solidFill>
+          <a:srgbClr val="FFFFFF"/>
+        </a:solidFill>
+        <a:effectLst/>
+      </p:bgPr>
+    </p:bg>
+    <p:spTree>
+      <p:nvGrpSpPr>
+        <p:cNvPr id="1" name=""/>
+        <p:cNvGrpSpPr/>
+        <p:nvPr/>
+      </p:nvGrpSpPr>
+      <p:grpSpPr/>
+      <p:sp>
+        <p:nvSpPr>
+          <p:cNvPr id="2" name="Rectangle 1"/>
+          <p:cNvSpPr/>
+          <p:nvPr/>
+        </p:nvSpPr>
+        <p:spPr>
+          <a:xfrm>
+            <a:off x="0" y="0"/>
+            <a:ext cx="12191695" cy="1188720"/>
+          </a:xfrm>
+          <a:prstGeom prst="rect">
+            <a:avLst/>
+          </a:prstGeom>
+          <a:solidFill>
+            <a:srgbClr val="0C2340"/>
+          </a:solidFill>
+          <a:ln>
+            <a:noFill/>
+          </a:ln>
+          <a:effectLst/>
+        </p:spPr>
+        <p:style>
+          <a:lnRef idx="1">
+            <a:schemeClr val="accent1"/>
+          </a:lnRef>
+          <a:fillRef idx="3">
+            <a:schemeClr val="accent1"/>
+          </a:fillRef>
+          <a:effectRef idx="2">
+            <a:schemeClr val="accent1"/>
+          </a:effectRef>
+          <a:fontRef idx="minor">
+            <a:schemeClr val="lt1"/>
+          </a:fontRef>
+        </p:style>
+        <p:txBody>
+          <a:bodyPr rtlCol="0" anchor="ctr"/>
+          <a:lstStyle/>
+          <a:p>
+            <a:pPr algn="ctr"/>
+          </a:p>
+        </p:txBody>
+      </p:sp>
+      <p:sp>
+        <p:nvSpPr>
+          <p:cNvPr id="3" name="TextBox 2"/>
+          <p:cNvSpPr txBox="1"/>
+          <p:nvPr/>
+        </p:nvSpPr>
+        <p:spPr>
+          <a:xfrm>
+            <a:off x="640080" y="0"/>
+            <a:ext cx="9082735" cy="1188720"/>
+          </a:xfrm>
+          <a:prstGeom prst="rect">
+            <a:avLst/>
+          </a:prstGeom>
+          <a:noFill/>
+        </p:spPr>
+        <p:txBody>
+          <a:bodyPr wrap="square" anchor="ctr" lIns="0" rIns="0" tIns="0" bIns="0">
+            <a:spAutoFit/>
+          </a:bodyPr>
+          <a:lstStyle/>
+          <a:p>
+            <a:pPr algn="ctr"/>
+            <a:r>
+              <a:rPr sz="2600" b="1" i="0">
+                <a:solidFill>
+                  <a:srgbClr val="FFFFFF"/>
+                </a:solidFill>
+                <a:latin typeface="Calibri"/>
+              </a:rPr>
+              <a:t>Acuerdos de convivencia del encuentro</a:t>
+            </a:r>
+          </a:p>
+        </p:txBody>
+      </p:sp>
+      <p:sp>
+        <p:nvSpPr>
+          <p:cNvPr id="4" name="TextBox 3"/>
+          <p:cNvSpPr txBox="1"/>
+          <p:nvPr/>
+        </p:nvSpPr>
+        <p:spPr>
+          <a:xfrm>
+            <a:off x="640080" y="1691639"/>
+            <a:ext cx="10911535" cy="4617720"/>
+          </a:xfrm>
+          <a:prstGeom prst="rect">
+            <a:avLst/>
+          </a:prstGeom>
+          <a:noFill/>
+        </p:spPr>
+        <p:txBody>
+          <a:bodyPr wrap="square" anchor="t" lIns="0" rIns="0" tIns="0" bIns="0">
+            <a:spAutoFit/>
+          </a:bodyPr>
+          <a:lstStyle/>
+          <a:p>
+            <a:pPr>
+              <a:spcAft>
+                <a:spcPts val="1000"/>
+              </a:spcAft>
+            </a:pPr>
+            <a:r>
+              <a:rPr sz="1600" b="0" i="0">
+                <a:solidFill>
+                  <a:srgbClr val="2B2B2B"/>
+                </a:solidFill>
+                <a:latin typeface="Calibri"/>
+              </a:rPr>
+              <a:t>–   </a:t>
+            </a:r>
+            <a:r>
+              <a:rPr sz="1600" b="1" i="0">
+                <a:solidFill>
+                  <a:srgbClr val="2B2B2B"/>
+                </a:solidFill>
+                <a:latin typeface="Calibri"/>
+              </a:rPr>
+              <a:t>Puntualidad:</a:t>
+            </a:r>
+            <a:r>
+              <a:rPr sz="1600" b="0" i="0">
+                <a:solidFill>
+                  <a:srgbClr val="2B2B2B"/>
+                </a:solidFill>
+                <a:latin typeface="Calibri"/>
+              </a:rPr>
+              <a:t> empezamos a la hora en punto y dura una hora. Quien llega tarde entra sin interrumpir.</a:t>
+            </a:r>
+          </a:p>
+          <a:p>
+            <a:pPr>
+              <a:spcAft>
+                <a:spcPts val="1000"/>
+              </a:spcAft>
+            </a:pPr>
+            <a:r>
+              <a:rPr sz="1600" b="0" i="0">
+                <a:solidFill>
+                  <a:srgbClr val="2B2B2B"/>
+                </a:solidFill>
+                <a:latin typeface="Calibri"/>
+              </a:rPr>
+              <a:t>–   </a:t>
+            </a:r>
+            <a:r>
+              <a:rPr sz="1600" b="1" i="0">
+                <a:solidFill>
+                  <a:srgbClr val="2B2B2B"/>
+                </a:solidFill>
+                <a:latin typeface="Calibri"/>
+              </a:rPr>
+              <a:t>Nombre real</a:t>
+            </a:r>
+            <a:r>
+              <a:rPr sz="1600" b="0" i="0">
+                <a:solidFill>
+                  <a:srgbClr val="2B2B2B"/>
+                </a:solidFill>
+                <a:latin typeface="Calibri"/>
+              </a:rPr>
+              <a:t> en la sala: si no sé quién es, no puedo registrar su participación ni llamarlo por su nombre.</a:t>
+            </a:r>
+          </a:p>
+          <a:p>
+            <a:pPr>
+              <a:spcAft>
+                <a:spcPts val="1000"/>
+              </a:spcAft>
+            </a:pPr>
+            <a:r>
+              <a:rPr sz="1600" b="0" i="0">
+                <a:solidFill>
+                  <a:srgbClr val="2B2B2B"/>
+                </a:solidFill>
+                <a:latin typeface="Calibri"/>
+              </a:rPr>
+              <a:t>–   </a:t>
+            </a:r>
+            <a:r>
+              <a:rPr sz="1600" b="1" i="0">
+                <a:solidFill>
+                  <a:srgbClr val="2B2B2B"/>
+                </a:solidFill>
+                <a:latin typeface="Calibri"/>
+              </a:rPr>
+              <a:t>Micrófono</a:t>
+            </a:r>
+            <a:r>
+              <a:rPr sz="1600" b="0" i="0">
+                <a:solidFill>
+                  <a:srgbClr val="2B2B2B"/>
+                </a:solidFill>
+                <a:latin typeface="Calibri"/>
+              </a:rPr>
+              <a:t> en silencio por defecto y abierto para participar. </a:t>
+            </a:r>
+            <a:r>
+              <a:rPr sz="1600" b="1" i="0">
+                <a:solidFill>
+                  <a:srgbClr val="2B2B2B"/>
+                </a:solidFill>
+                <a:latin typeface="Calibri"/>
+              </a:rPr>
+              <a:t>Cámara</a:t>
+            </a:r>
+            <a:r>
+              <a:rPr sz="1600" b="0" i="0">
+                <a:solidFill>
+                  <a:srgbClr val="2B2B2B"/>
+                </a:solidFill>
+                <a:latin typeface="Calibri"/>
+              </a:rPr>
+              <a:t>: bienvenida, no obligatoria.</a:t>
+            </a:r>
+          </a:p>
+          <a:p>
+            <a:pPr lvl="1">
+              <a:spcAft>
+                <a:spcPts val="600"/>
+              </a:spcAft>
+            </a:pPr>
+            <a:r>
+              <a:rPr sz="1500" b="0" i="0">
+                <a:solidFill>
+                  <a:srgbClr val="2B2B2B"/>
+                </a:solidFill>
+                <a:latin typeface="Calibri"/>
+              </a:rPr>
+              <a:t>●   Si no puede abrir cámara ni micrófono, participe por el chat. Lo que no funciona es </a:t>
+            </a:r>
+            <a:r>
+              <a:rPr sz="1500" b="1" i="0">
+                <a:solidFill>
+                  <a:srgbClr val="2B2B2B"/>
+                </a:solidFill>
+                <a:latin typeface="Calibri"/>
+              </a:rPr>
+              <a:t>estar conectado y ausente</a:t>
+            </a:r>
+            <a:r>
+              <a:rPr sz="1500" b="0" i="0">
+                <a:solidFill>
+                  <a:srgbClr val="2B2B2B"/>
+                </a:solidFill>
+                <a:latin typeface="Calibri"/>
+              </a:rPr>
+              <a:t>.</a:t>
+            </a:r>
+          </a:p>
+          <a:p>
+            <a:pPr>
+              <a:spcAft>
+                <a:spcPts val="1000"/>
+              </a:spcAft>
+            </a:pPr>
+            <a:r>
+              <a:rPr sz="1600" b="0" i="0">
+                <a:solidFill>
+                  <a:srgbClr val="2B2B2B"/>
+                </a:solidFill>
+                <a:latin typeface="Calibri"/>
+              </a:rPr>
+              <a:t>–   </a:t>
+            </a:r>
+            <a:r>
+              <a:rPr sz="1600" b="1" i="0">
+                <a:solidFill>
+                  <a:srgbClr val="2B2B2B"/>
+                </a:solidFill>
+                <a:latin typeface="Calibri"/>
+              </a:rPr>
+              <a:t>Participar es parte del método:</a:t>
+            </a:r>
+            <a:r>
+              <a:rPr sz="1600" b="0" i="0">
+                <a:solidFill>
+                  <a:srgbClr val="2B2B2B"/>
+                </a:solidFill>
+                <a:latin typeface="Calibri"/>
+              </a:rPr>
+              <a:t> aquí se piensa en voz alta y se muestran borradores a medio hacer.</a:t>
+            </a:r>
+          </a:p>
+          <a:p>
+            <a:pPr lvl="1">
+              <a:spcAft>
+                <a:spcPts val="600"/>
+              </a:spcAft>
+            </a:pPr>
+            <a:r>
+              <a:rPr sz="1500" b="0" i="0">
+                <a:solidFill>
+                  <a:srgbClr val="2B2B2B"/>
+                </a:solidFill>
+                <a:latin typeface="Calibri"/>
+              </a:rPr>
+              <a:t>●   Ninguna idea se ridiculiza. Las ideas se </a:t>
+            </a:r>
+            <a:r>
+              <a:rPr sz="1500" b="1" i="0">
+                <a:solidFill>
+                  <a:srgbClr val="2B2B2B"/>
+                </a:solidFill>
+                <a:latin typeface="Calibri"/>
+              </a:rPr>
+              <a:t>critican con criterio</a:t>
+            </a:r>
+            <a:r>
+              <a:rPr sz="1500" b="0" i="0">
+                <a:solidFill>
+                  <a:srgbClr val="2B2B2B"/>
+                </a:solidFill>
+                <a:latin typeface="Calibri"/>
+              </a:rPr>
+              <a:t>; a las personas no se las critica.</a:t>
+            </a:r>
+          </a:p>
+          <a:p>
+            <a:pPr>
+              <a:spcAft>
+                <a:spcPts val="1000"/>
+              </a:spcAft>
+            </a:pPr>
+            <a:r>
+              <a:rPr sz="1600" b="0" i="0">
+                <a:solidFill>
+                  <a:srgbClr val="2B2B2B"/>
+                </a:solidFill>
+                <a:latin typeface="Calibri"/>
+              </a:rPr>
+              <a:t>–   </a:t>
+            </a:r>
+            <a:r>
+              <a:rPr sz="1600" b="1" i="0">
+                <a:solidFill>
+                  <a:srgbClr val="2B2B2B"/>
+                </a:solidFill>
+                <a:latin typeface="Calibri"/>
+              </a:rPr>
+              <a:t>Respeto en el foro:</a:t>
+            </a:r>
+            <a:r>
+              <a:rPr sz="1600" b="0" i="0">
+                <a:solidFill>
+                  <a:srgbClr val="2B2B2B"/>
+                </a:solidFill>
+                <a:latin typeface="Calibri"/>
+              </a:rPr>
+              <a:t> se responde a la idea, no a quien la escribió, y no se publican datos ni capturas de terceros.</a:t>
+            </a:r>
+          </a:p>
+          <a:p>
+            <a:pPr>
+              <a:spcAft>
+                <a:spcPts val="1000"/>
+              </a:spcAft>
+            </a:pPr>
+            <a:r>
+              <a:rPr sz="1600" b="0" i="0">
+                <a:solidFill>
+                  <a:srgbClr val="2B2B2B"/>
+                </a:solidFill>
+                <a:latin typeface="Calibri"/>
+              </a:rPr>
+              <a:t>–   Si el encuentro se graba, se avisa al inicio y la grabación queda en </a:t>
+            </a:r>
+            <a:r>
+              <a:rPr sz="1600" b="1" i="0">
+                <a:solidFill>
+                  <a:srgbClr val="2B2B2B"/>
+                </a:solidFill>
+                <a:latin typeface="Calibri"/>
+              </a:rPr>
+              <a:t>CDigital</a:t>
+            </a:r>
+            <a:r>
+              <a:rPr sz="1600" b="0" i="0">
+                <a:solidFill>
+                  <a:srgbClr val="2B2B2B"/>
+                </a:solidFill>
+                <a:latin typeface="Calibri"/>
+              </a:rPr>
+              <a:t> para quien no pudo conectarse.</a:t>
+            </a:r>
+          </a:p>
+        </p:txBody>
+      </p:sp>
+      <p:sp>
+        <p:nvSpPr>
+          <p:cNvPr id="5" name="TextBox 4"/>
+          <p:cNvSpPr txBox="1"/>
+          <p:nvPr/>
+        </p:nvSpPr>
+        <p:spPr>
+          <a:xfrm>
+            <a:off x="2194560" y="6446520"/>
+            <a:ext cx="5943600" cy="274320"/>
+          </a:xfrm>
+          <a:prstGeom prst="rect">
+            <a:avLst/>
+          </a:prstGeom>
+          <a:noFill/>
+        </p:spPr>
+        <p:txBody>
+          <a:bodyPr wrap="square" anchor="t" lIns="0" rIns="0" tIns="0" bIns="0">
+            <a:spAutoFit/>
+          </a:bodyPr>
+          <a:lstStyle/>
+          <a:p>
+            <a:pPr algn="l"/>
+            <a:r>
+              <a:rPr sz="1000" b="1" i="0">
+                <a:solidFill>
+                  <a:srgbClr val="8F989D"/>
+                </a:solidFill>
+                <a:latin typeface="Calibri"/>
+              </a:rPr>
+              <a:t>Inicio 5:10 pm</a:t>
+            </a:r>
+          </a:p>
+        </p:txBody>
+      </p:sp>
+      <p:sp>
+        <p:nvSpPr>
+          <p:cNvPr id="6" name="TextBox 5"/>
+          <p:cNvSpPr txBox="1"/>
+          <p:nvPr/>
+        </p:nvSpPr>
+        <p:spPr>
+          <a:xfrm>
+            <a:off x="11094415" y="6446520"/>
+            <a:ext cx="548640" cy="274320"/>
+          </a:xfrm>
+          <a:prstGeom prst="rect">
+            <a:avLst/>
+          </a:prstGeom>
+          <a:noFill/>
+        </p:spPr>
+        <p:txBody>
+          <a:bodyPr wrap="square" anchor="t" lIns="0" rIns="0" tIns="0" bIns="0">
+            <a:spAutoFit/>
+          </a:bodyPr>
+          <a:lstStyle/>
+          <a:p>
+            <a:pPr algn="r"/>
+            <a:r>
+              <a:rPr sz="1000" b="1" i="0">
+                <a:solidFill>
+                  <a:srgbClr val="8F989D"/>
+                </a:solidFill>
+                <a:latin typeface="Calibri"/>
+              </a:rPr>
+              <a:t>16</a:t>
+            </a:r>
+          </a:p>
+        </p:txBody>
+      </p:sp>
+    </p:spTree>
+  </p:cSld>
+  <p:clrMapOvr>
+    <a:masterClrMapping/>
+  </p:clrMapOvr>
+</p:sld>
+</file>
+
+<file path=ppt/slides/slide17.xml><?xml version="1.0" encoding="utf-8"?>
+<p:sld xmlns:a="http://schemas.openxmlformats.org/drawingml/2006/main" xmlns:p="http://schemas.openxmlformats.org/presentationml/2006/main" xmlns:r="http://schemas.openxmlformats.org/officeDocument/2006/relationships">
+  <p:cSld>
+    <p:bg>
+      <p:bgPr>
+        <a:solidFill>
+          <a:srgbClr val="FFFFFF"/>
+        </a:solidFill>
+        <a:effectLst/>
+      </p:bgPr>
+    </p:bg>
+    <p:spTree>
+      <p:nvGrpSpPr>
+        <p:cNvPr id="1" name=""/>
+        <p:cNvGrpSpPr/>
+        <p:nvPr/>
+      </p:nvGrpSpPr>
+      <p:grpSpPr/>
+      <p:sp>
+        <p:nvSpPr>
+          <p:cNvPr id="2" name="Rectangle 1"/>
+          <p:cNvSpPr/>
+          <p:nvPr/>
+        </p:nvSpPr>
+        <p:spPr>
+          <a:xfrm>
+            <a:off x="0" y="0"/>
+            <a:ext cx="12191695" cy="1188720"/>
+          </a:xfrm>
+          <a:prstGeom prst="rect">
+            <a:avLst/>
+          </a:prstGeom>
+          <a:solidFill>
+            <a:srgbClr val="0C2340"/>
+          </a:solidFill>
+          <a:ln>
+            <a:noFill/>
+          </a:ln>
+          <a:effectLst/>
+        </p:spPr>
+        <p:style>
+          <a:lnRef idx="1">
+            <a:schemeClr val="accent1"/>
+          </a:lnRef>
+          <a:fillRef idx="3">
+            <a:schemeClr val="accent1"/>
+          </a:fillRef>
+          <a:effectRef idx="2">
+            <a:schemeClr val="accent1"/>
+          </a:effectRef>
+          <a:fontRef idx="minor">
+            <a:schemeClr val="lt1"/>
+          </a:fontRef>
+        </p:style>
+        <p:txBody>
+          <a:bodyPr rtlCol="0" anchor="ctr"/>
+          <a:lstStyle/>
+          <a:p>
+            <a:pPr algn="ctr"/>
+          </a:p>
+        </p:txBody>
+      </p:sp>
+      <p:sp>
+        <p:nvSpPr>
+          <p:cNvPr id="3" name="TextBox 2"/>
+          <p:cNvSpPr txBox="1"/>
+          <p:nvPr/>
+        </p:nvSpPr>
+        <p:spPr>
+          <a:xfrm>
+            <a:off x="640080" y="0"/>
+            <a:ext cx="9082735" cy="1188720"/>
+          </a:xfrm>
+          <a:prstGeom prst="rect">
+            <a:avLst/>
+          </a:prstGeom>
+          <a:noFill/>
+        </p:spPr>
+        <p:txBody>
+          <a:bodyPr wrap="square" anchor="ctr" lIns="0" rIns="0" tIns="0" bIns="0">
+            <a:spAutoFit/>
+          </a:bodyPr>
+          <a:lstStyle/>
+          <a:p>
+            <a:pPr algn="ctr"/>
+            <a:r>
+              <a:rPr sz="2600" b="1" i="0">
+                <a:solidFill>
+                  <a:srgbClr val="FFFFFF"/>
+                </a:solidFill>
+                <a:latin typeface="Calibri"/>
+              </a:rPr>
+              <a:t>Para la Sesión 02: lectura autónoma y qué traer</a:t>
+            </a:r>
+          </a:p>
+        </p:txBody>
+      </p:sp>
+      <p:sp>
+        <p:nvSpPr>
+          <p:cNvPr id="4" name="TextBox 3"/>
+          <p:cNvSpPr txBox="1"/>
+          <p:nvPr/>
+        </p:nvSpPr>
+        <p:spPr>
+          <a:xfrm>
+            <a:off x="640080" y="1691639"/>
+            <a:ext cx="10911535" cy="4617720"/>
+          </a:xfrm>
+          <a:prstGeom prst="rect">
+            <a:avLst/>
+          </a:prstGeom>
+          <a:noFill/>
+        </p:spPr>
+        <p:txBody>
+          <a:bodyPr wrap="square" anchor="t" lIns="0" rIns="0" tIns="0" bIns="0">
+            <a:spAutoFit/>
+          </a:bodyPr>
+          <a:lstStyle/>
+          <a:p>
+            <a:pPr>
+              <a:spcAft>
+                <a:spcPts val="1000"/>
+              </a:spcAft>
+            </a:pPr>
+            <a:r>
+              <a:rPr sz="1600" b="0" i="0">
+                <a:solidFill>
+                  <a:srgbClr val="2B2B2B"/>
+                </a:solidFill>
+                <a:latin typeface="Calibri"/>
+              </a:rPr>
+              <a:t>–   </a:t>
+            </a:r>
+            <a:r>
+              <a:rPr sz="1600" b="1" i="0">
+                <a:solidFill>
+                  <a:srgbClr val="2B2B2B"/>
+                </a:solidFill>
+                <a:latin typeface="Calibri"/>
+              </a:rPr>
+              <a:t>Lectura autónoma (obligatoria):</a:t>
+            </a:r>
+            <a:r>
+              <a:rPr sz="1600" b="0" i="0">
+                <a:solidFill>
+                  <a:srgbClr val="2B2B2B"/>
+                </a:solidFill>
+                <a:latin typeface="Calibri"/>
+              </a:rPr>
+              <a:t> unidades </a:t>
+            </a:r>
+            <a:r>
+              <a:rPr sz="1600" b="1" i="0">
+                <a:solidFill>
+                  <a:srgbClr val="2B2B2B"/>
+                </a:solidFill>
+                <a:latin typeface="Calibri"/>
+              </a:rPr>
+              <a:t>U1–U2</a:t>
+            </a:r>
+            <a:r>
+              <a:rPr sz="1600" b="0" i="0">
+                <a:solidFill>
+                  <a:srgbClr val="2B2B2B"/>
+                </a:solidFill>
+                <a:latin typeface="Calibri"/>
+              </a:rPr>
+              <a:t> del Syllabus — *Propuesta de Innovación* y *creatividad e inteligencia emocional*.</a:t>
+            </a:r>
+          </a:p>
+          <a:p>
+            <a:pPr lvl="1">
+              <a:spcAft>
+                <a:spcPts val="600"/>
+              </a:spcAft>
+            </a:pPr>
+            <a:r>
+              <a:rPr sz="1500" b="0" i="0">
+                <a:solidFill>
+                  <a:srgbClr val="2B2B2B"/>
+                </a:solidFill>
+                <a:latin typeface="Calibri"/>
+              </a:rPr>
+              <a:t>●   El material está en </a:t>
+            </a:r>
+            <a:r>
+              <a:rPr sz="1500" b="1" i="0">
+                <a:solidFill>
+                  <a:srgbClr val="2B2B2B"/>
+                </a:solidFill>
+                <a:latin typeface="Calibri"/>
+              </a:rPr>
+              <a:t>CDigital</a:t>
+            </a:r>
+            <a:r>
+              <a:rPr sz="1500" b="0" i="0">
+                <a:solidFill>
+                  <a:srgbClr val="2B2B2B"/>
+                </a:solidFill>
+                <a:latin typeface="Calibri"/>
+              </a:rPr>
+              <a:t>. Las retomamos en los primeros minutos de la Sesión 02: se repasan, no se dictan completas.</a:t>
+            </a:r>
+          </a:p>
+          <a:p>
+            <a:pPr lvl="1">
+              <a:spcAft>
+                <a:spcPts val="600"/>
+              </a:spcAft>
+            </a:pPr>
+            <a:r>
+              <a:rPr sz="1500" b="0" i="0">
+                <a:solidFill>
+                  <a:srgbClr val="2B2B2B"/>
+                </a:solidFill>
+                <a:latin typeface="Calibri"/>
+              </a:rPr>
+              <a:t>●   Léalas con una pregunta en la mano: </a:t>
+            </a:r>
+            <a:r>
+              <a:rPr sz="1500" b="1" i="0">
+                <a:solidFill>
+                  <a:srgbClr val="2B2B2B"/>
+                </a:solidFill>
+                <a:latin typeface="Calibri"/>
+              </a:rPr>
+              <a:t>¿qué de esto me sirve para el problema que voy a elegir?</a:t>
+            </a:r>
+          </a:p>
+          <a:p>
+            <a:pPr>
+              <a:spcAft>
+                <a:spcPts val="1000"/>
+              </a:spcAft>
+            </a:pPr>
+            <a:r>
+              <a:rPr sz="1600" b="0" i="0">
+                <a:solidFill>
+                  <a:srgbClr val="2B2B2B"/>
+                </a:solidFill>
+                <a:latin typeface="Calibri"/>
+              </a:rPr>
+              <a:t>–   </a:t>
+            </a:r>
+            <a:r>
+              <a:rPr sz="1600" b="1" i="0">
+                <a:solidFill>
+                  <a:srgbClr val="2B2B2B"/>
+                </a:solidFill>
+                <a:latin typeface="Calibri"/>
+              </a:rPr>
+              <a:t>Abra el enunciado de la ACA 1</a:t>
+            </a:r>
+            <a:r>
+              <a:rPr sz="1600" b="0" i="0">
+                <a:solidFill>
+                  <a:srgbClr val="2B2B2B"/>
+                </a:solidFill>
+                <a:latin typeface="Calibri"/>
+              </a:rPr>
+              <a:t> en `Clases/Recursos/ACAs/` y léalo entero, checklist incluido.</a:t>
+            </a:r>
+          </a:p>
+          <a:p>
+            <a:pPr>
+              <a:spcAft>
+                <a:spcPts val="1000"/>
+              </a:spcAft>
+            </a:pPr>
+            <a:r>
+              <a:rPr sz="1600" b="0" i="0">
+                <a:solidFill>
+                  <a:srgbClr val="2B2B2B"/>
+                </a:solidFill>
+                <a:latin typeface="Calibri"/>
+              </a:rPr>
+              <a:t>–   </a:t>
+            </a:r>
+            <a:r>
+              <a:rPr sz="1600" b="1" i="0">
+                <a:solidFill>
+                  <a:srgbClr val="2B2B2B"/>
+                </a:solidFill>
+                <a:latin typeface="Calibri"/>
+              </a:rPr>
+              <a:t>Traiga escrito</a:t>
+            </a:r>
+            <a:r>
+              <a:rPr sz="1600" b="0" i="0">
+                <a:solidFill>
+                  <a:srgbClr val="2B2B2B"/>
+                </a:solidFill>
+                <a:latin typeface="Calibri"/>
+              </a:rPr>
+              <a:t> (con tres líneas basta): un problema real que le moleste, </a:t>
+            </a:r>
+            <a:r>
+              <a:rPr sz="1600" b="1" i="0">
+                <a:solidFill>
+                  <a:srgbClr val="2B2B2B"/>
+                </a:solidFill>
+                <a:latin typeface="Calibri"/>
+              </a:rPr>
+              <a:t>a quién</a:t>
+            </a:r>
+            <a:r>
+              <a:rPr sz="1600" b="0" i="0">
+                <a:solidFill>
+                  <a:srgbClr val="2B2B2B"/>
+                </a:solidFill>
+                <a:latin typeface="Calibri"/>
+              </a:rPr>
+              <a:t> le pasa y </a:t>
+            </a:r>
+            <a:r>
+              <a:rPr sz="1600" b="1" i="0">
+                <a:solidFill>
+                  <a:srgbClr val="2B2B2B"/>
+                </a:solidFill>
+                <a:latin typeface="Calibri"/>
+              </a:rPr>
+              <a:t>dónde</a:t>
+            </a:r>
+            <a:r>
+              <a:rPr sz="1600" b="0" i="0">
+                <a:solidFill>
+                  <a:srgbClr val="2B2B2B"/>
+                </a:solidFill>
+                <a:latin typeface="Calibri"/>
+              </a:rPr>
+              <a:t> lo vio.</a:t>
+            </a:r>
+          </a:p>
+          <a:p>
+            <a:pPr lvl="1">
+              <a:spcAft>
+                <a:spcPts val="600"/>
+              </a:spcAft>
+            </a:pPr>
+            <a:r>
+              <a:rPr sz="1500" b="0" i="0">
+                <a:solidFill>
+                  <a:srgbClr val="2B2B2B"/>
+                </a:solidFill>
+                <a:latin typeface="Calibri"/>
+              </a:rPr>
+              <a:t>●   No traiga una solución: traiga un problema. La solución es el trabajo del resto del curso.</a:t>
+            </a:r>
+          </a:p>
+          <a:p>
+            <a:pPr>
+              <a:spcAft>
+                <a:spcPts val="1000"/>
+              </a:spcAft>
+            </a:pPr>
+            <a:r>
+              <a:rPr sz="1600" b="0" i="0">
+                <a:solidFill>
+                  <a:srgbClr val="2B2B2B"/>
+                </a:solidFill>
+                <a:latin typeface="Calibri"/>
+              </a:rPr>
+              <a:t>–   </a:t>
+            </a:r>
+            <a:r>
+              <a:rPr sz="1600" b="1" i="0">
+                <a:solidFill>
+                  <a:srgbClr val="2B2B2B"/>
+                </a:solidFill>
+                <a:latin typeface="Calibri"/>
+              </a:rPr>
+              <a:t>Cree su documento de trabajo</a:t>
+            </a:r>
+            <a:r>
+              <a:rPr sz="1600" b="0" i="0">
+                <a:solidFill>
+                  <a:srgbClr val="2B2B2B"/>
+                </a:solidFill>
+                <a:latin typeface="Calibri"/>
+              </a:rPr>
+              <a:t> en Google Docs con la plantilla APA CUN y déjelo listo para escribir encima.</a:t>
+            </a:r>
+          </a:p>
+          <a:p>
+            <a:pPr>
+              <a:spcAft>
+                <a:spcPts val="1000"/>
+              </a:spcAft>
+            </a:pPr>
+            <a:r>
+              <a:rPr sz="1600" b="0" i="0">
+                <a:solidFill>
+                  <a:srgbClr val="2B2B2B"/>
+                </a:solidFill>
+                <a:latin typeface="Calibri"/>
+              </a:rPr>
+              <a:t>–   </a:t>
+            </a:r>
+            <a:r>
+              <a:rPr sz="1600" b="1" i="0">
+                <a:solidFill>
+                  <a:srgbClr val="2B2B2B"/>
+                </a:solidFill>
+                <a:latin typeface="Calibri"/>
+              </a:rPr>
+              <a:t>Sesión 02:</a:t>
+            </a:r>
+            <a:r>
+              <a:rPr sz="1600" b="0" i="0">
+                <a:solidFill>
+                  <a:srgbClr val="2B2B2B"/>
+                </a:solidFill>
+                <a:latin typeface="Calibri"/>
+              </a:rPr>
+              <a:t> *Creatividad e innovación en I+D · Design Thinking y técnicas* — se trabaja sobre lo que usted traiga.</a:t>
+            </a:r>
+          </a:p>
+        </p:txBody>
+      </p:sp>
+      <p:sp>
+        <p:nvSpPr>
+          <p:cNvPr id="5" name="TextBox 4"/>
+          <p:cNvSpPr txBox="1"/>
+          <p:nvPr/>
+        </p:nvSpPr>
+        <p:spPr>
+          <a:xfrm>
+            <a:off x="2194560" y="6446520"/>
+            <a:ext cx="5943600" cy="274320"/>
+          </a:xfrm>
+          <a:prstGeom prst="rect">
+            <a:avLst/>
+          </a:prstGeom>
+          <a:noFill/>
+        </p:spPr>
+        <p:txBody>
+          <a:bodyPr wrap="square" anchor="t" lIns="0" rIns="0" tIns="0" bIns="0">
+            <a:spAutoFit/>
+          </a:bodyPr>
+          <a:lstStyle/>
+          <a:p>
+            <a:pPr algn="l"/>
+            <a:r>
+              <a:rPr sz="1000" b="1" i="0">
+                <a:solidFill>
+                  <a:srgbClr val="8F989D"/>
+                </a:solidFill>
+                <a:latin typeface="Calibri"/>
+              </a:rPr>
+              <a:t>Inicio 5:10 pm</a:t>
+            </a:r>
+          </a:p>
+        </p:txBody>
+      </p:sp>
+      <p:sp>
+        <p:nvSpPr>
+          <p:cNvPr id="6" name="TextBox 5"/>
+          <p:cNvSpPr txBox="1"/>
+          <p:nvPr/>
+        </p:nvSpPr>
+        <p:spPr>
+          <a:xfrm>
+            <a:off x="11094415" y="6446520"/>
+            <a:ext cx="548640" cy="274320"/>
+          </a:xfrm>
+          <a:prstGeom prst="rect">
+            <a:avLst/>
+          </a:prstGeom>
+          <a:noFill/>
+        </p:spPr>
+        <p:txBody>
+          <a:bodyPr wrap="square" anchor="t" lIns="0" rIns="0" tIns="0" bIns="0">
+            <a:spAutoFit/>
+          </a:bodyPr>
+          <a:lstStyle/>
+          <a:p>
+            <a:pPr algn="r"/>
+            <a:r>
+              <a:rPr sz="1000" b="1" i="0">
+                <a:solidFill>
+                  <a:srgbClr val="8F989D"/>
+                </a:solidFill>
+                <a:latin typeface="Calibri"/>
+              </a:rPr>
+              <a:t>17</a:t>
+            </a:r>
+          </a:p>
+        </p:txBody>
+      </p:sp>
+      <p:sp>
+        <p:nvSpPr>
+          <p:cNvPr id="7" name="TextBox 6"/>
+          <p:cNvSpPr txBox="1"/>
+          <p:nvPr/>
+        </p:nvSpPr>
+        <p:spPr>
+          <a:xfrm>
+            <a:off x="640080" y="5943600"/>
+            <a:ext cx="9997135" cy="457200"/>
+          </a:xfrm>
+          <a:prstGeom prst="rect">
+            <a:avLst/>
+          </a:prstGeom>
+          <a:noFill/>
+        </p:spPr>
+        <p:txBody>
+          <a:bodyPr wrap="square" anchor="t" lIns="0" rIns="0" tIns="0" bIns="0">
+            <a:spAutoFit/>
+          </a:bodyPr>
+          <a:lstStyle/>
+          <a:p>
+            <a:r>
+              <a:rPr sz="1200" b="0" i="1">
+                <a:solidFill>
+                  <a:srgbClr val="2B2B2B"/>
+                </a:solidFill>
+                <a:latin typeface="Calibri"/>
+              </a:rPr>
+              <a:t>Sin un problema propio, la Sesión 02 se le vuelve teoría. Con un problema propio, sale de ella con su reto ya planteado.</a:t>
+            </a:r>
+          </a:p>
+        </p:txBody>
+      </p:sp>
+    </p:spTree>
+  </p:cSld>
+  <p:clrMapOvr>
+    <a:masterClrMapping/>
+  </p:clrMapOvr>
+</p:sld>
+</file>
+
+<file path=ppt/slides/slide18.xml><?xml version="1.0" encoding="utf-8"?>
+<p:sld xmlns:a="http://schemas.openxmlformats.org/drawingml/2006/main" xmlns:p="http://schemas.openxmlformats.org/presentationml/2006/main" xmlns:r="http://schemas.openxmlformats.org/officeDocument/2006/relationships">
+  <p:cSld>
+    <p:bg>
+      <p:bgPr>
+        <a:solidFill>
+          <a:srgbClr val="FFFFFF"/>
+        </a:solidFill>
+        <a:effectLst/>
+      </p:bgPr>
+    </p:bg>
+    <p:spTree>
+      <p:nvGrpSpPr>
+        <p:cNvPr id="1" name=""/>
+        <p:cNvGrpSpPr/>
+        <p:nvPr/>
+      </p:nvGrpSpPr>
+      <p:grpSpPr/>
+      <p:sp>
+        <p:nvSpPr>
+          <p:cNvPr id="2" name="Rectangle 1"/>
+          <p:cNvSpPr/>
+          <p:nvPr/>
+        </p:nvSpPr>
+        <p:spPr>
+          <a:xfrm>
+            <a:off x="0" y="0"/>
+            <a:ext cx="12191695" cy="1188720"/>
+          </a:xfrm>
+          <a:prstGeom prst="rect">
+            <a:avLst/>
+          </a:prstGeom>
+          <a:solidFill>
+            <a:srgbClr val="0C2340"/>
+          </a:solidFill>
+          <a:ln>
+            <a:noFill/>
+          </a:ln>
+          <a:effectLst/>
+        </p:spPr>
+        <p:style>
+          <a:lnRef idx="1">
+            <a:schemeClr val="accent1"/>
+          </a:lnRef>
+          <a:fillRef idx="3">
+            <a:schemeClr val="accent1"/>
+          </a:fillRef>
+          <a:effectRef idx="2">
+            <a:schemeClr val="accent1"/>
+          </a:effectRef>
+          <a:fontRef idx="minor">
+            <a:schemeClr val="lt1"/>
+          </a:fontRef>
+        </p:style>
+        <p:txBody>
+          <a:bodyPr rtlCol="0" anchor="ctr"/>
+          <a:lstStyle/>
+          <a:p>
+            <a:pPr algn="ctr"/>
+          </a:p>
+        </p:txBody>
+      </p:sp>
+      <p:sp>
+        <p:nvSpPr>
+          <p:cNvPr id="3" name="TextBox 2"/>
+          <p:cNvSpPr txBox="1"/>
+          <p:nvPr/>
+        </p:nvSpPr>
+        <p:spPr>
+          <a:xfrm>
+            <a:off x="640080" y="0"/>
+            <a:ext cx="9082735" cy="1188720"/>
+          </a:xfrm>
+          <a:prstGeom prst="rect">
+            <a:avLst/>
+          </a:prstGeom>
+          <a:noFill/>
+        </p:spPr>
+        <p:txBody>
+          <a:bodyPr wrap="square" anchor="ctr" lIns="0" rIns="0" tIns="0" bIns="0">
+            <a:spAutoFit/>
+          </a:bodyPr>
+          <a:lstStyle/>
+          <a:p>
+            <a:pPr algn="ctr"/>
+            <a:r>
+              <a:rPr sz="2600" b="1" i="0">
+                <a:solidFill>
+                  <a:srgbClr val="FFFFFF"/>
+                </a:solidFill>
+                <a:latin typeface="Calibri"/>
+              </a:rPr>
+              <a:t>Preguntas del primer día</a:t>
+            </a:r>
+          </a:p>
+        </p:txBody>
+      </p:sp>
+      <p:sp>
+        <p:nvSpPr>
+          <p:cNvPr id="4" name="Rounded Rectangle 3"/>
+          <p:cNvSpPr/>
+          <p:nvPr/>
+        </p:nvSpPr>
+        <p:spPr>
+          <a:xfrm>
+            <a:off x="640080" y="1737360"/>
+            <a:ext cx="10911535" cy="969264"/>
+          </a:xfrm>
+          <a:prstGeom prst="roundRect">
+            <a:avLst/>
+          </a:prstGeom>
+          <a:solidFill>
+            <a:srgbClr val="E8F5EC"/>
+          </a:solidFill>
+          <a:ln>
+            <a:noFill/>
+          </a:ln>
+          <a:effectLst/>
+        </p:spPr>
+        <p:style>
+          <a:lnRef idx="1">
+            <a:schemeClr val="accent1"/>
+          </a:lnRef>
+          <a:fillRef idx="3">
+            <a:schemeClr val="accent1"/>
+          </a:fillRef>
+          <a:effectRef idx="2">
+            <a:schemeClr val="accent1"/>
+          </a:effectRef>
+          <a:fontRef idx="minor">
+            <a:schemeClr val="lt1"/>
+          </a:fontRef>
+        </p:style>
+        <p:txBody>
+          <a:bodyPr rtlCol="0" anchor="ctr"/>
+          <a:lstStyle/>
+          <a:p>
+            <a:pPr algn="ctr"/>
+          </a:p>
+        </p:txBody>
+      </p:sp>
+      <p:sp>
+        <p:nvSpPr>
+          <p:cNvPr id="5" name="TextBox 4"/>
+          <p:cNvSpPr txBox="1"/>
+          <p:nvPr/>
+        </p:nvSpPr>
+        <p:spPr>
+          <a:xfrm>
+            <a:off x="868680" y="1847088"/>
+            <a:ext cx="10454335" cy="749808"/>
+          </a:xfrm>
+          <a:prstGeom prst="rect">
+            <a:avLst/>
+          </a:prstGeom>
+          <a:noFill/>
+        </p:spPr>
+        <p:txBody>
+          <a:bodyPr wrap="square" anchor="t" lIns="0" rIns="0" tIns="0" bIns="0">
+            <a:spAutoFit/>
+          </a:bodyPr>
+          <a:lstStyle/>
+          <a:p>
+            <a:r>
+              <a:rPr sz="1300" b="1" i="0">
+                <a:solidFill>
+                  <a:srgbClr val="0C2340"/>
+                </a:solidFill>
+                <a:latin typeface="Calibri"/>
+              </a:rPr>
+              <a:t>ℹ️ Nota institucional</a:t>
+            </a:r>
+          </a:p>
+          <a:p>
+            <a:pPr>
+              <a:spcBef>
+                <a:spcPts val="400"/>
+              </a:spcBef>
+            </a:pPr>
+            <a:r>
+              <a:rPr sz="1300" b="1" i="0">
+                <a:solidFill>
+                  <a:srgbClr val="2B2B2B"/>
+                </a:solidFill>
+                <a:latin typeface="Calibri"/>
+              </a:rPr>
+              <a:t>¿Esta materia se pierde fácil?</a:t>
+            </a:r>
+            <a:r>
+              <a:rPr sz="1300" b="0" i="0">
+                <a:solidFill>
+                  <a:srgbClr val="2B2B2B"/>
+                </a:solidFill>
+                <a:latin typeface="Calibri"/>
+              </a:rPr>
+              <a:t> No, si entrega. Se pierde por no entregar y por dejarlo todo para el Corte 3, que pesa el 40%.</a:t>
+            </a:r>
+          </a:p>
+        </p:txBody>
+      </p:sp>
+      <p:sp>
+        <p:nvSpPr>
+          <p:cNvPr id="6" name="Rounded Rectangle 5"/>
+          <p:cNvSpPr/>
+          <p:nvPr/>
+        </p:nvSpPr>
+        <p:spPr>
+          <a:xfrm>
+            <a:off x="640080" y="2935224"/>
+            <a:ext cx="10911535" cy="969264"/>
+          </a:xfrm>
+          <a:prstGeom prst="roundRect">
+            <a:avLst/>
+          </a:prstGeom>
+          <a:solidFill>
+            <a:srgbClr val="FDECD8"/>
+          </a:solidFill>
+          <a:ln>
+            <a:noFill/>
+          </a:ln>
+          <a:effectLst/>
+        </p:spPr>
+        <p:style>
+          <a:lnRef idx="1">
+            <a:schemeClr val="accent1"/>
+          </a:lnRef>
+          <a:fillRef idx="3">
+            <a:schemeClr val="accent1"/>
+          </a:fillRef>
+          <a:effectRef idx="2">
+            <a:schemeClr val="accent1"/>
+          </a:effectRef>
+          <a:fontRef idx="minor">
+            <a:schemeClr val="lt1"/>
+          </a:fontRef>
+        </p:style>
+        <p:txBody>
+          <a:bodyPr rtlCol="0" anchor="ctr"/>
+          <a:lstStyle/>
+          <a:p>
+            <a:pPr algn="ctr"/>
+          </a:p>
+        </p:txBody>
+      </p:sp>
+      <p:sp>
+        <p:nvSpPr>
+          <p:cNvPr id="7" name="TextBox 6"/>
+          <p:cNvSpPr txBox="1"/>
+          <p:nvPr/>
+        </p:nvSpPr>
+        <p:spPr>
+          <a:xfrm>
+            <a:off x="868680" y="3044952"/>
+            <a:ext cx="10454335" cy="749808"/>
+          </a:xfrm>
+          <a:prstGeom prst="rect">
+            <a:avLst/>
+          </a:prstGeom>
+          <a:noFill/>
+        </p:spPr>
+        <p:txBody>
+          <a:bodyPr wrap="square" anchor="t" lIns="0" rIns="0" tIns="0" bIns="0">
+            <a:spAutoFit/>
+          </a:bodyPr>
+          <a:lstStyle/>
+          <a:p>
+            <a:r>
+              <a:rPr sz="1300" b="1" i="0">
+                <a:solidFill>
+                  <a:srgbClr val="0C2340"/>
+                </a:solidFill>
+                <a:latin typeface="Calibri"/>
+              </a:rPr>
+              <a:t>💡 Aclaración</a:t>
+            </a:r>
+          </a:p>
+          <a:p>
+            <a:pPr>
+              <a:spcBef>
+                <a:spcPts val="400"/>
+              </a:spcBef>
+            </a:pPr>
+            <a:r>
+              <a:rPr sz="1300" b="1" i="0">
+                <a:solidFill>
+                  <a:srgbClr val="2B2B2B"/>
+                </a:solidFill>
+                <a:latin typeface="Calibri"/>
+              </a:rPr>
+              <a:t>¿Puedo trabajar solo o en grupo?</a:t>
+            </a:r>
+            <a:r>
+              <a:rPr sz="1300" b="0" i="0">
+                <a:solidFill>
+                  <a:srgbClr val="2B2B2B"/>
+                </a:solidFill>
+                <a:latin typeface="Calibri"/>
+              </a:rPr>
+              <a:t> Puede trabajar en dúo si comparten el mismo problema, pero </a:t>
+            </a:r>
+            <a:r>
+              <a:rPr sz="1300" b="1" i="0">
+                <a:solidFill>
+                  <a:srgbClr val="2B2B2B"/>
+                </a:solidFill>
+                <a:latin typeface="Calibri"/>
+              </a:rPr>
+              <a:t>cada uno entrega</a:t>
+            </a:r>
+            <a:r>
+              <a:rPr sz="1300" b="0" i="0">
+                <a:solidFill>
+                  <a:srgbClr val="2B2B2B"/>
+                </a:solidFill>
+                <a:latin typeface="Calibri"/>
+              </a:rPr>
+              <a:t> su documento en CDigital.</a:t>
+            </a:r>
+          </a:p>
+        </p:txBody>
+      </p:sp>
+      <p:sp>
+        <p:nvSpPr>
+          <p:cNvPr id="8" name="Rounded Rectangle 7"/>
+          <p:cNvSpPr/>
+          <p:nvPr/>
+        </p:nvSpPr>
+        <p:spPr>
+          <a:xfrm>
+            <a:off x="640080" y="4133087"/>
+            <a:ext cx="10911535" cy="969264"/>
+          </a:xfrm>
+          <a:prstGeom prst="roundRect">
+            <a:avLst/>
+          </a:prstGeom>
+          <a:solidFill>
+            <a:srgbClr val="FBE4E4"/>
+          </a:solidFill>
+          <a:ln>
+            <a:noFill/>
+          </a:ln>
+          <a:effectLst/>
+        </p:spPr>
+        <p:style>
+          <a:lnRef idx="1">
+            <a:schemeClr val="accent1"/>
+          </a:lnRef>
+          <a:fillRef idx="3">
+            <a:schemeClr val="accent1"/>
+          </a:fillRef>
+          <a:effectRef idx="2">
+            <a:schemeClr val="accent1"/>
+          </a:effectRef>
+          <a:fontRef idx="minor">
+            <a:schemeClr val="lt1"/>
+          </a:fontRef>
+        </p:style>
+        <p:txBody>
+          <a:bodyPr rtlCol="0" anchor="ctr"/>
+          <a:lstStyle/>
+          <a:p>
+            <a:pPr algn="ctr"/>
+          </a:p>
+        </p:txBody>
+      </p:sp>
+      <p:sp>
+        <p:nvSpPr>
+          <p:cNvPr id="9" name="TextBox 8"/>
+          <p:cNvSpPr txBox="1"/>
+          <p:nvPr/>
+        </p:nvSpPr>
+        <p:spPr>
+          <a:xfrm>
+            <a:off x="868680" y="4242816"/>
+            <a:ext cx="10454335" cy="749808"/>
+          </a:xfrm>
+          <a:prstGeom prst="rect">
+            <a:avLst/>
+          </a:prstGeom>
+          <a:noFill/>
+        </p:spPr>
+        <p:txBody>
+          <a:bodyPr wrap="square" anchor="t" lIns="0" rIns="0" tIns="0" bIns="0">
+            <a:spAutoFit/>
+          </a:bodyPr>
+          <a:lstStyle/>
+          <a:p>
+            <a:r>
+              <a:rPr sz="1300" b="1" i="0">
+                <a:solidFill>
+                  <a:srgbClr val="0C2340"/>
+                </a:solidFill>
+                <a:latin typeface="Calibri"/>
+              </a:rPr>
+              <a:t>⚠️ Importante</a:t>
+            </a:r>
+          </a:p>
+          <a:p>
+            <a:pPr>
+              <a:spcBef>
+                <a:spcPts val="400"/>
+              </a:spcBef>
+            </a:pPr>
+            <a:r>
+              <a:rPr sz="1300" b="1" i="0">
+                <a:solidFill>
+                  <a:srgbClr val="2B2B2B"/>
+                </a:solidFill>
+                <a:latin typeface="Calibri"/>
+              </a:rPr>
+              <a:t>¿Sirve un trabajo de otro semestre?</a:t>
+            </a:r>
+            <a:r>
+              <a:rPr sz="1300" b="0" i="0">
+                <a:solidFill>
+                  <a:srgbClr val="2B2B2B"/>
+                </a:solidFill>
+                <a:latin typeface="Calibri"/>
+              </a:rPr>
+              <a:t> Puede partir de un proyecto suyo si lo declara y lo lleva más lejos. Volver a entregar lo mismo es autoplagio.</a:t>
+            </a:r>
+          </a:p>
+        </p:txBody>
+      </p:sp>
+      <p:sp>
+        <p:nvSpPr>
+          <p:cNvPr id="10" name="Rounded Rectangle 9"/>
+          <p:cNvSpPr/>
+          <p:nvPr/>
+        </p:nvSpPr>
+        <p:spPr>
+          <a:xfrm>
+            <a:off x="640080" y="5330952"/>
+            <a:ext cx="10911535" cy="713232"/>
+          </a:xfrm>
+          <a:prstGeom prst="roundRect">
+            <a:avLst/>
+          </a:prstGeom>
+          <a:solidFill>
+            <a:srgbClr val="E8F5EC"/>
+          </a:solidFill>
+          <a:ln>
+            <a:noFill/>
+          </a:ln>
+          <a:effectLst/>
+        </p:spPr>
+        <p:style>
+          <a:lnRef idx="1">
+            <a:schemeClr val="accent1"/>
+          </a:lnRef>
+          <a:fillRef idx="3">
+            <a:schemeClr val="accent1"/>
+          </a:fillRef>
+          <a:effectRef idx="2">
+            <a:schemeClr val="accent1"/>
+          </a:effectRef>
+          <a:fontRef idx="minor">
+            <a:schemeClr val="lt1"/>
+          </a:fontRef>
+        </p:style>
+        <p:txBody>
+          <a:bodyPr rtlCol="0" anchor="ctr"/>
+          <a:lstStyle/>
+          <a:p>
+            <a:pPr algn="ctr"/>
+          </a:p>
+        </p:txBody>
+      </p:sp>
+      <p:sp>
+        <p:nvSpPr>
+          <p:cNvPr id="11" name="TextBox 10"/>
+          <p:cNvSpPr txBox="1"/>
+          <p:nvPr/>
+        </p:nvSpPr>
+        <p:spPr>
+          <a:xfrm>
+            <a:off x="868680" y="5440680"/>
+            <a:ext cx="10454335" cy="493776"/>
+          </a:xfrm>
+          <a:prstGeom prst="rect">
+            <a:avLst/>
+          </a:prstGeom>
+          <a:noFill/>
+        </p:spPr>
+        <p:txBody>
+          <a:bodyPr wrap="square" anchor="t" lIns="0" rIns="0" tIns="0" bIns="0">
+            <a:spAutoFit/>
+          </a:bodyPr>
+          <a:lstStyle/>
+          <a:p>
+            <a:r>
+              <a:rPr sz="1300" b="1" i="0">
+                <a:solidFill>
+                  <a:srgbClr val="0C2340"/>
+                </a:solidFill>
+                <a:latin typeface="Calibri"/>
+              </a:rPr>
+              <a:t>ℹ️ Nota institucional</a:t>
+            </a:r>
+          </a:p>
+          <a:p>
+            <a:pPr>
+              <a:spcBef>
+                <a:spcPts val="400"/>
+              </a:spcBef>
+            </a:pPr>
+            <a:r>
+              <a:rPr sz="1300" b="1" i="0">
+                <a:solidFill>
+                  <a:srgbClr val="2B2B2B"/>
+                </a:solidFill>
+                <a:latin typeface="Calibri"/>
+              </a:rPr>
+              <a:t>¿Necesito saber programar o diseñar?</a:t>
+            </a:r>
+            <a:r>
+              <a:rPr sz="1300" b="0" i="0">
+                <a:solidFill>
+                  <a:srgbClr val="2B2B2B"/>
+                </a:solidFill>
+                <a:latin typeface="Calibri"/>
+              </a:rPr>
+              <a:t> No. Aquí se evalúa criterio, no herramientas.</a:t>
+            </a:r>
+          </a:p>
+        </p:txBody>
+      </p:sp>
+      <p:sp>
+        <p:nvSpPr>
+          <p:cNvPr id="12" name="TextBox 11"/>
+          <p:cNvSpPr txBox="1"/>
+          <p:nvPr/>
+        </p:nvSpPr>
+        <p:spPr>
+          <a:xfrm>
+            <a:off x="2194560" y="6446520"/>
+            <a:ext cx="5943600" cy="274320"/>
+          </a:xfrm>
+          <a:prstGeom prst="rect">
+            <a:avLst/>
+          </a:prstGeom>
+          <a:noFill/>
+        </p:spPr>
+        <p:txBody>
+          <a:bodyPr wrap="square" anchor="t" lIns="0" rIns="0" tIns="0" bIns="0">
+            <a:spAutoFit/>
+          </a:bodyPr>
+          <a:lstStyle/>
+          <a:p>
+            <a:pPr algn="l"/>
+            <a:r>
+              <a:rPr sz="1000" b="1" i="0">
+                <a:solidFill>
+                  <a:srgbClr val="8F989D"/>
+                </a:solidFill>
+                <a:latin typeface="Calibri"/>
+              </a:rPr>
+              <a:t>Inicio 5:10 pm</a:t>
+            </a:r>
+          </a:p>
+        </p:txBody>
+      </p:sp>
+      <p:sp>
+        <p:nvSpPr>
+          <p:cNvPr id="13" name="TextBox 12"/>
+          <p:cNvSpPr txBox="1"/>
+          <p:nvPr/>
+        </p:nvSpPr>
+        <p:spPr>
+          <a:xfrm>
+            <a:off x="11094415" y="6446520"/>
+            <a:ext cx="548640" cy="274320"/>
+          </a:xfrm>
+          <a:prstGeom prst="rect">
+            <a:avLst/>
+          </a:prstGeom>
+          <a:noFill/>
+        </p:spPr>
+        <p:txBody>
+          <a:bodyPr wrap="square" anchor="t" lIns="0" rIns="0" tIns="0" bIns="0">
+            <a:spAutoFit/>
+          </a:bodyPr>
+          <a:lstStyle/>
+          <a:p>
+            <a:pPr algn="r"/>
+            <a:r>
+              <a:rPr sz="1000" b="1" i="0">
+                <a:solidFill>
+                  <a:srgbClr val="8F989D"/>
+                </a:solidFill>
+                <a:latin typeface="Calibri"/>
+              </a:rPr>
+              <a:t>18</a:t>
+            </a:r>
+          </a:p>
+        </p:txBody>
+      </p:sp>
+    </p:spTree>
+  </p:cSld>
+  <p:clrMapOvr>
+    <a:masterClrMapping/>
+  </p:clrMapOvr>
+</p:sld>
+</file>
+
+<file path=ppt/slides/slide19.xml><?xml version="1.0" encoding="utf-8"?>
+<p:sld xmlns:a="http://schemas.openxmlformats.org/drawingml/2006/main" xmlns:p="http://schemas.openxmlformats.org/presentationml/2006/main" xmlns:r="http://schemas.openxmlformats.org/officeDocument/2006/relationships">
+  <p:cSld>
+    <p:bg>
+      <p:bgPr>
+        <a:solidFill>
+          <a:srgbClr val="FFFFFF"/>
+        </a:solidFill>
+        <a:effectLst/>
+      </p:bgPr>
+    </p:bg>
+    <p:spTree>
+      <p:nvGrpSpPr>
+        <p:cNvPr id="1" name=""/>
+        <p:cNvGrpSpPr/>
+        <p:nvPr/>
+      </p:nvGrpSpPr>
+      <p:grpSpPr/>
+      <p:sp>
+        <p:nvSpPr>
+          <p:cNvPr id="2" name="Rectangle 1"/>
+          <p:cNvSpPr/>
+          <p:nvPr/>
+        </p:nvSpPr>
+        <p:spPr>
+          <a:xfrm>
+            <a:off x="0" y="0"/>
+            <a:ext cx="12191695" cy="1188720"/>
+          </a:xfrm>
+          <a:prstGeom prst="rect">
+            <a:avLst/>
+          </a:prstGeom>
+          <a:solidFill>
+            <a:srgbClr val="0C2340"/>
+          </a:solidFill>
+          <a:ln>
+            <a:noFill/>
+          </a:ln>
+          <a:effectLst/>
+        </p:spPr>
+        <p:style>
+          <a:lnRef idx="1">
+            <a:schemeClr val="accent1"/>
+          </a:lnRef>
+          <a:fillRef idx="3">
+            <a:schemeClr val="accent1"/>
+          </a:fillRef>
+          <a:effectRef idx="2">
+            <a:schemeClr val="accent1"/>
+          </a:effectRef>
+          <a:fontRef idx="minor">
+            <a:schemeClr val="lt1"/>
+          </a:fontRef>
+        </p:style>
+        <p:txBody>
+          <a:bodyPr rtlCol="0" anchor="ctr"/>
+          <a:lstStyle/>
+          <a:p>
+            <a:pPr algn="ctr"/>
+          </a:p>
+        </p:txBody>
+      </p:sp>
+      <p:sp>
+        <p:nvSpPr>
+          <p:cNvPr id="3" name="TextBox 2"/>
+          <p:cNvSpPr txBox="1"/>
+          <p:nvPr/>
+        </p:nvSpPr>
+        <p:spPr>
+          <a:xfrm>
+            <a:off x="640080" y="0"/>
+            <a:ext cx="9082735" cy="1188720"/>
+          </a:xfrm>
+          <a:prstGeom prst="rect">
+            <a:avLst/>
+          </a:prstGeom>
+          <a:noFill/>
+        </p:spPr>
+        <p:txBody>
+          <a:bodyPr wrap="square" anchor="ctr" lIns="0" rIns="0" tIns="0" bIns="0">
+            <a:spAutoFit/>
+          </a:bodyPr>
+          <a:lstStyle/>
+          <a:p>
+            <a:pPr algn="ctr"/>
+            <a:r>
+              <a:rPr sz="2600" b="1" i="0">
+                <a:solidFill>
+                  <a:srgbClr val="FFFFFF"/>
+                </a:solidFill>
+                <a:latin typeface="Calibri"/>
+              </a:rPr>
+              <a:t>ACUERDOS DE TRABAJO</a:t>
+            </a:r>
+          </a:p>
+        </p:txBody>
+      </p:sp>
+      <p:sp>
+        <p:nvSpPr>
+          <p:cNvPr id="4" name="Rounded Rectangle 3"/>
+          <p:cNvSpPr/>
+          <p:nvPr/>
+        </p:nvSpPr>
+        <p:spPr>
+          <a:xfrm>
+            <a:off x="640080" y="1737360"/>
+            <a:ext cx="10911535" cy="713232"/>
+          </a:xfrm>
+          <a:prstGeom prst="roundRect">
+            <a:avLst/>
+          </a:prstGeom>
+          <a:solidFill>
+            <a:srgbClr val="E8F5EC"/>
+          </a:solidFill>
+          <a:ln>
+            <a:noFill/>
+          </a:ln>
+          <a:effectLst/>
+        </p:spPr>
+        <p:style>
+          <a:lnRef idx="1">
+            <a:schemeClr val="accent1"/>
+          </a:lnRef>
+          <a:fillRef idx="3">
+            <a:schemeClr val="accent1"/>
+          </a:fillRef>
+          <a:effectRef idx="2">
+            <a:schemeClr val="accent1"/>
+          </a:effectRef>
+          <a:fontRef idx="minor">
+            <a:schemeClr val="lt1"/>
+          </a:fontRef>
+        </p:style>
+        <p:txBody>
+          <a:bodyPr rtlCol="0" anchor="ctr"/>
+          <a:lstStyle/>
+          <a:p>
+            <a:pPr algn="ctr"/>
+          </a:p>
+        </p:txBody>
+      </p:sp>
+      <p:sp>
+        <p:nvSpPr>
+          <p:cNvPr id="5" name="TextBox 4"/>
+          <p:cNvSpPr txBox="1"/>
+          <p:nvPr/>
+        </p:nvSpPr>
+        <p:spPr>
+          <a:xfrm>
+            <a:off x="868680" y="1847088"/>
+            <a:ext cx="10454335" cy="493776"/>
+          </a:xfrm>
+          <a:prstGeom prst="rect">
+            <a:avLst/>
+          </a:prstGeom>
+          <a:noFill/>
+        </p:spPr>
+        <p:txBody>
+          <a:bodyPr wrap="square" anchor="t" lIns="0" rIns="0" tIns="0" bIns="0">
+            <a:spAutoFit/>
+          </a:bodyPr>
+          <a:lstStyle/>
+          <a:p>
+            <a:r>
+              <a:rPr sz="1300" b="1" i="0">
+                <a:solidFill>
+                  <a:srgbClr val="0C2340"/>
+                </a:solidFill>
+                <a:latin typeface="Calibri"/>
+              </a:rPr>
+              <a:t>ℹ️ Nota institucional</a:t>
+            </a:r>
+          </a:p>
+          <a:p>
+            <a:pPr>
+              <a:spcBef>
+                <a:spcPts val="400"/>
+              </a:spcBef>
+            </a:pPr>
+            <a:r>
+              <a:rPr sz="1300" b="1" i="0">
+                <a:solidFill>
+                  <a:srgbClr val="2B2B2B"/>
+                </a:solidFill>
+                <a:latin typeface="Calibri"/>
+              </a:rPr>
+              <a:t>Entrega oficial: CDigital.</a:t>
+            </a:r>
+            <a:r>
+              <a:rPr sz="1300" b="0" i="0">
+                <a:solidFill>
+                  <a:srgbClr val="2B2B2B"/>
+                </a:solidFill>
+                <a:latin typeface="Calibri"/>
+              </a:rPr>
+              <a:t> Lo que no esté ahí, no está entregado.</a:t>
+            </a:r>
+          </a:p>
+        </p:txBody>
+      </p:sp>
+      <p:sp>
+        <p:nvSpPr>
+          <p:cNvPr id="6" name="Rounded Rectangle 5"/>
+          <p:cNvSpPr/>
+          <p:nvPr/>
+        </p:nvSpPr>
+        <p:spPr>
+          <a:xfrm>
+            <a:off x="640080" y="2679191"/>
+            <a:ext cx="10911535" cy="713232"/>
+          </a:xfrm>
+          <a:prstGeom prst="roundRect">
+            <a:avLst/>
+          </a:prstGeom>
+          <a:solidFill>
+            <a:srgbClr val="FDECD8"/>
+          </a:solidFill>
+          <a:ln>
+            <a:noFill/>
+          </a:ln>
+          <a:effectLst/>
+        </p:spPr>
+        <p:style>
+          <a:lnRef idx="1">
+            <a:schemeClr val="accent1"/>
+          </a:lnRef>
+          <a:fillRef idx="3">
+            <a:schemeClr val="accent1"/>
+          </a:fillRef>
+          <a:effectRef idx="2">
+            <a:schemeClr val="accent1"/>
+          </a:effectRef>
+          <a:fontRef idx="minor">
+            <a:schemeClr val="lt1"/>
+          </a:fontRef>
+        </p:style>
+        <p:txBody>
+          <a:bodyPr rtlCol="0" anchor="ctr"/>
+          <a:lstStyle/>
+          <a:p>
+            <a:pPr algn="ctr"/>
+          </a:p>
+        </p:txBody>
+      </p:sp>
+      <p:sp>
+        <p:nvSpPr>
+          <p:cNvPr id="7" name="TextBox 6"/>
+          <p:cNvSpPr txBox="1"/>
+          <p:nvPr/>
+        </p:nvSpPr>
+        <p:spPr>
+          <a:xfrm>
+            <a:off x="868680" y="2788920"/>
+            <a:ext cx="10454335" cy="493776"/>
+          </a:xfrm>
+          <a:prstGeom prst="rect">
+            <a:avLst/>
+          </a:prstGeom>
+          <a:noFill/>
+        </p:spPr>
+        <p:txBody>
+          <a:bodyPr wrap="square" anchor="t" lIns="0" rIns="0" tIns="0" bIns="0">
+            <a:spAutoFit/>
+          </a:bodyPr>
+          <a:lstStyle/>
+          <a:p>
+            <a:r>
+              <a:rPr sz="1300" b="1" i="0">
+                <a:solidFill>
+                  <a:srgbClr val="0C2340"/>
+                </a:solidFill>
+                <a:latin typeface="Calibri"/>
+              </a:rPr>
+              <a:t>💡 Aclaración</a:t>
+            </a:r>
+          </a:p>
+          <a:p>
+            <a:pPr>
+              <a:spcBef>
+                <a:spcPts val="400"/>
+              </a:spcBef>
+            </a:pPr>
+            <a:r>
+              <a:rPr sz="1300" b="0" i="0">
+                <a:solidFill>
+                  <a:srgbClr val="2B2B2B"/>
+                </a:solidFill>
+                <a:latin typeface="Calibri"/>
+              </a:rPr>
+              <a:t>Traer el avance </a:t>
+            </a:r>
+            <a:r>
+              <a:rPr sz="1300" b="1" i="0">
+                <a:solidFill>
+                  <a:srgbClr val="2B2B2B"/>
+                </a:solidFill>
+                <a:latin typeface="Calibri"/>
+              </a:rPr>
+              <a:t>escrito</a:t>
+            </a:r>
+            <a:r>
+              <a:rPr sz="1300" b="0" i="0">
+                <a:solidFill>
+                  <a:srgbClr val="2B2B2B"/>
+                </a:solidFill>
+                <a:latin typeface="Calibri"/>
+              </a:rPr>
+              <a:t> a cada encuentro: se trabaja sobre lo que ya existe.</a:t>
+            </a:r>
+          </a:p>
+        </p:txBody>
+      </p:sp>
+      <p:sp>
+        <p:nvSpPr>
+          <p:cNvPr id="8" name="Rounded Rectangle 7"/>
+          <p:cNvSpPr/>
+          <p:nvPr/>
+        </p:nvSpPr>
+        <p:spPr>
+          <a:xfrm>
+            <a:off x="640080" y="3621024"/>
+            <a:ext cx="10911535" cy="713232"/>
+          </a:xfrm>
+          <a:prstGeom prst="roundRect">
+            <a:avLst/>
+          </a:prstGeom>
+          <a:solidFill>
+            <a:srgbClr val="FBE4E4"/>
+          </a:solidFill>
+          <a:ln>
+            <a:noFill/>
+          </a:ln>
+          <a:effectLst/>
+        </p:spPr>
+        <p:style>
+          <a:lnRef idx="1">
+            <a:schemeClr val="accent1"/>
+          </a:lnRef>
+          <a:fillRef idx="3">
+            <a:schemeClr val="accent1"/>
+          </a:fillRef>
+          <a:effectRef idx="2">
+            <a:schemeClr val="accent1"/>
+          </a:effectRef>
+          <a:fontRef idx="minor">
+            <a:schemeClr val="lt1"/>
+          </a:fontRef>
+        </p:style>
+        <p:txBody>
+          <a:bodyPr rtlCol="0" anchor="ctr"/>
+          <a:lstStyle/>
+          <a:p>
+            <a:pPr algn="ctr"/>
+          </a:p>
+        </p:txBody>
+      </p:sp>
+      <p:sp>
+        <p:nvSpPr>
+          <p:cNvPr id="9" name="TextBox 8"/>
+          <p:cNvSpPr txBox="1"/>
+          <p:nvPr/>
+        </p:nvSpPr>
+        <p:spPr>
+          <a:xfrm>
+            <a:off x="868680" y="3730752"/>
+            <a:ext cx="10454335" cy="493776"/>
+          </a:xfrm>
+          <a:prstGeom prst="rect">
+            <a:avLst/>
+          </a:prstGeom>
+          <a:noFill/>
+        </p:spPr>
+        <p:txBody>
+          <a:bodyPr wrap="square" anchor="t" lIns="0" rIns="0" tIns="0" bIns="0">
+            <a:spAutoFit/>
+          </a:bodyPr>
+          <a:lstStyle/>
+          <a:p>
+            <a:r>
+              <a:rPr sz="1300" b="1" i="0">
+                <a:solidFill>
+                  <a:srgbClr val="0C2340"/>
+                </a:solidFill>
+                <a:latin typeface="Calibri"/>
+              </a:rPr>
+              <a:t>⚠️ Importante</a:t>
+            </a:r>
+          </a:p>
+          <a:p>
+            <a:pPr>
+              <a:spcBef>
+                <a:spcPts val="400"/>
+              </a:spcBef>
+            </a:pPr>
+            <a:r>
+              <a:rPr sz="1300" b="0" i="0">
+                <a:solidFill>
+                  <a:srgbClr val="2B2B2B"/>
+                </a:solidFill>
+                <a:latin typeface="Calibri"/>
+              </a:rPr>
+              <a:t>Integridad académica: citar siempre en </a:t>
+            </a:r>
+            <a:r>
+              <a:rPr sz="1300" b="1" i="0">
+                <a:solidFill>
+                  <a:srgbClr val="2B2B2B"/>
+                </a:solidFill>
+                <a:latin typeface="Calibri"/>
+              </a:rPr>
+              <a:t>APA 7</a:t>
+            </a:r>
+            <a:r>
+              <a:rPr sz="1300" b="0" i="0">
+                <a:solidFill>
+                  <a:srgbClr val="2B2B2B"/>
+                </a:solidFill>
+                <a:latin typeface="Calibri"/>
+              </a:rPr>
+              <a:t>. El plagio tiene debido proceso.</a:t>
+            </a:r>
+          </a:p>
+        </p:txBody>
+      </p:sp>
+      <p:sp>
+        <p:nvSpPr>
+          <p:cNvPr id="10" name="TextBox 9"/>
+          <p:cNvSpPr txBox="1"/>
+          <p:nvPr/>
+        </p:nvSpPr>
+        <p:spPr>
+          <a:xfrm>
+            <a:off x="2194560" y="6446520"/>
+            <a:ext cx="5943600" cy="274320"/>
+          </a:xfrm>
+          <a:prstGeom prst="rect">
+            <a:avLst/>
+          </a:prstGeom>
+          <a:noFill/>
+        </p:spPr>
+        <p:txBody>
+          <a:bodyPr wrap="square" anchor="t" lIns="0" rIns="0" tIns="0" bIns="0">
+            <a:spAutoFit/>
+          </a:bodyPr>
+          <a:lstStyle/>
+          <a:p>
+            <a:pPr algn="l"/>
+            <a:r>
+              <a:rPr sz="1000" b="1" i="0">
+                <a:solidFill>
+                  <a:srgbClr val="8F989D"/>
+                </a:solidFill>
+                <a:latin typeface="Calibri"/>
+              </a:rPr>
+              <a:t>Inicio 5:10 pm</a:t>
+            </a:r>
+          </a:p>
+        </p:txBody>
+      </p:sp>
+      <p:sp>
+        <p:nvSpPr>
+          <p:cNvPr id="11" name="TextBox 10"/>
+          <p:cNvSpPr txBox="1"/>
+          <p:nvPr/>
+        </p:nvSpPr>
+        <p:spPr>
+          <a:xfrm>
+            <a:off x="11094415" y="6446520"/>
+            <a:ext cx="548640" cy="274320"/>
+          </a:xfrm>
+          <a:prstGeom prst="rect">
+            <a:avLst/>
+          </a:prstGeom>
+          <a:noFill/>
+        </p:spPr>
+        <p:txBody>
+          <a:bodyPr wrap="square" anchor="t" lIns="0" rIns="0" tIns="0" bIns="0">
+            <a:spAutoFit/>
+          </a:bodyPr>
+          <a:lstStyle/>
+          <a:p>
+            <a:pPr algn="r"/>
+            <a:r>
+              <a:rPr sz="1000" b="1" i="0">
+                <a:solidFill>
+                  <a:srgbClr val="8F989D"/>
+                </a:solidFill>
+                <a:latin typeface="Calibri"/>
+              </a:rPr>
+              <a:t>19</a:t>
+            </a:r>
+          </a:p>
+        </p:txBody>
+      </p:sp>
+    </p:spTree>
+  </p:cSld>
+  <p:clrMapOvr>
+    <a:masterClrMapping/>
+  </p:clrMapOvr>
+</p:sld>
+</file>
+
 <file path=ppt/slides/slide2.xml><?xml version="1.0" encoding="utf-8"?>
 <p:sld xmlns:a="http://schemas.openxmlformats.org/drawingml/2006/main" xmlns:p="http://schemas.openxmlformats.org/presentationml/2006/main" xmlns:r="http://schemas.openxmlformats.org/officeDocument/2006/relationships">
   <p:cSld>
@@ -3798,6 +9829,569 @@
                 <a:latin typeface="Calibri"/>
               </a:rPr>
               <a:t>2</a:t>
+            </a:r>
+          </a:p>
+        </p:txBody>
+      </p:sp>
+    </p:spTree>
+  </p:cSld>
+  <p:clrMapOvr>
+    <a:masterClrMapping/>
+  </p:clrMapOvr>
+</p:sld>
+</file>
+
+<file path=ppt/slides/slide20.xml><?xml version="1.0" encoding="utf-8"?>
+<p:sld xmlns:a="http://schemas.openxmlformats.org/drawingml/2006/main" xmlns:p="http://schemas.openxmlformats.org/presentationml/2006/main" xmlns:r="http://schemas.openxmlformats.org/officeDocument/2006/relationships">
+  <p:cSld>
+    <p:bg>
+      <p:bgPr>
+        <a:solidFill>
+          <a:srgbClr val="FFFFFF"/>
+        </a:solidFill>
+        <a:effectLst/>
+      </p:bgPr>
+    </p:bg>
+    <p:spTree>
+      <p:nvGrpSpPr>
+        <p:cNvPr id="1" name=""/>
+        <p:cNvGrpSpPr/>
+        <p:nvPr/>
+      </p:nvGrpSpPr>
+      <p:grpSpPr/>
+      <p:sp>
+        <p:nvSpPr>
+          <p:cNvPr id="2" name="Rectangle 1"/>
+          <p:cNvSpPr/>
+          <p:nvPr/>
+        </p:nvSpPr>
+        <p:spPr>
+          <a:xfrm>
+            <a:off x="0" y="0"/>
+            <a:ext cx="12191695" cy="1188720"/>
+          </a:xfrm>
+          <a:prstGeom prst="rect">
+            <a:avLst/>
+          </a:prstGeom>
+          <a:solidFill>
+            <a:srgbClr val="0C2340"/>
+          </a:solidFill>
+          <a:ln>
+            <a:noFill/>
+          </a:ln>
+          <a:effectLst/>
+        </p:spPr>
+        <p:style>
+          <a:lnRef idx="1">
+            <a:schemeClr val="accent1"/>
+          </a:lnRef>
+          <a:fillRef idx="3">
+            <a:schemeClr val="accent1"/>
+          </a:fillRef>
+          <a:effectRef idx="2">
+            <a:schemeClr val="accent1"/>
+          </a:effectRef>
+          <a:fontRef idx="minor">
+            <a:schemeClr val="lt1"/>
+          </a:fontRef>
+        </p:style>
+        <p:txBody>
+          <a:bodyPr rtlCol="0" anchor="ctr"/>
+          <a:lstStyle/>
+          <a:p>
+            <a:pPr algn="ctr"/>
+          </a:p>
+        </p:txBody>
+      </p:sp>
+      <p:sp>
+        <p:nvSpPr>
+          <p:cNvPr id="3" name="TextBox 2"/>
+          <p:cNvSpPr txBox="1"/>
+          <p:nvPr/>
+        </p:nvSpPr>
+        <p:spPr>
+          <a:xfrm>
+            <a:off x="640080" y="0"/>
+            <a:ext cx="9082735" cy="1188720"/>
+          </a:xfrm>
+          <a:prstGeom prst="rect">
+            <a:avLst/>
+          </a:prstGeom>
+          <a:noFill/>
+        </p:spPr>
+        <p:txBody>
+          <a:bodyPr wrap="square" anchor="ctr" lIns="0" rIns="0" tIns="0" bIns="0">
+            <a:spAutoFit/>
+          </a:bodyPr>
+          <a:lstStyle/>
+          <a:p>
+            <a:pPr algn="ctr"/>
+            <a:r>
+              <a:rPr sz="2600" b="1" i="0">
+                <a:solidFill>
+                  <a:srgbClr val="FFFFFF"/>
+                </a:solidFill>
+                <a:latin typeface="Calibri"/>
+              </a:rPr>
+              <a:t>PARA LA PRÓXIMA SESIÓN</a:t>
+            </a:r>
+          </a:p>
+        </p:txBody>
+      </p:sp>
+      <p:sp>
+        <p:nvSpPr>
+          <p:cNvPr id="4" name="TextBox 3"/>
+          <p:cNvSpPr txBox="1"/>
+          <p:nvPr/>
+        </p:nvSpPr>
+        <p:spPr>
+          <a:xfrm>
+            <a:off x="640080" y="1691639"/>
+            <a:ext cx="10911535" cy="4617720"/>
+          </a:xfrm>
+          <a:prstGeom prst="rect">
+            <a:avLst/>
+          </a:prstGeom>
+          <a:noFill/>
+        </p:spPr>
+        <p:txBody>
+          <a:bodyPr wrap="square" anchor="t" lIns="0" rIns="0" tIns="0" bIns="0">
+            <a:spAutoFit/>
+          </a:bodyPr>
+          <a:lstStyle/>
+          <a:p>
+            <a:pPr>
+              <a:spcAft>
+                <a:spcPts val="1000"/>
+              </a:spcAft>
+            </a:pPr>
+            <a:r>
+              <a:rPr sz="1600" b="0" i="0">
+                <a:solidFill>
+                  <a:srgbClr val="2B2B2B"/>
+                </a:solidFill>
+                <a:latin typeface="Calibri"/>
+              </a:rPr>
+              <a:t>–   </a:t>
+            </a:r>
+            <a:r>
+              <a:rPr sz="1600" b="1" i="0">
+                <a:solidFill>
+                  <a:srgbClr val="2B2B2B"/>
+                </a:solidFill>
+                <a:latin typeface="Calibri"/>
+              </a:rPr>
+              <a:t>Lectura autónoma:</a:t>
+            </a:r>
+            <a:r>
+              <a:rPr sz="1600" b="0" i="0">
+                <a:solidFill>
+                  <a:srgbClr val="2B2B2B"/>
+                </a:solidFill>
+                <a:latin typeface="Calibri"/>
+              </a:rPr>
+              <a:t> U1–U2 (Propuesta de Innovación · creatividad e inteligencia emocional) — la retomamos al abrir la Sesión 02.</a:t>
+            </a:r>
+          </a:p>
+          <a:p>
+            <a:pPr>
+              <a:spcAft>
+                <a:spcPts val="1000"/>
+              </a:spcAft>
+            </a:pPr>
+            <a:r>
+              <a:rPr sz="1600" b="0" i="0">
+                <a:solidFill>
+                  <a:srgbClr val="2B2B2B"/>
+                </a:solidFill>
+                <a:latin typeface="Calibri"/>
+              </a:rPr>
+              <a:t>–   Revisar la </a:t>
+            </a:r>
+            <a:r>
+              <a:rPr sz="1600" b="1" i="0">
+                <a:solidFill>
+                  <a:srgbClr val="2B2B2B"/>
+                </a:solidFill>
+                <a:latin typeface="Calibri"/>
+              </a:rPr>
+              <a:t>Presentación del Curso</a:t>
+            </a:r>
+            <a:r>
+              <a:rPr sz="1600" b="0" i="0">
+                <a:solidFill>
+                  <a:srgbClr val="2B2B2B"/>
+                </a:solidFill>
+                <a:latin typeface="Calibri"/>
+              </a:rPr>
+              <a:t> completa (fechas, evaluación, contenido de todas las sesiones).</a:t>
+            </a:r>
+          </a:p>
+          <a:p>
+            <a:pPr>
+              <a:spcAft>
+                <a:spcPts val="1000"/>
+              </a:spcAft>
+            </a:pPr>
+            <a:r>
+              <a:rPr sz="1600" b="0" i="0">
+                <a:solidFill>
+                  <a:srgbClr val="2B2B2B"/>
+                </a:solidFill>
+                <a:latin typeface="Calibri"/>
+              </a:rPr>
+              <a:t>–   Abrir el enunciado de la </a:t>
+            </a:r>
+            <a:r>
+              <a:rPr sz="1600" b="1" i="0">
+                <a:solidFill>
+                  <a:srgbClr val="2B2B2B"/>
+                </a:solidFill>
+                <a:latin typeface="Calibri"/>
+              </a:rPr>
+              <a:t>ACA 1</a:t>
+            </a:r>
+            <a:r>
+              <a:rPr sz="1600" b="0" i="0">
+                <a:solidFill>
+                  <a:srgbClr val="2B2B2B"/>
+                </a:solidFill>
+                <a:latin typeface="Calibri"/>
+              </a:rPr>
+              <a:t> en `Clases/Recursos/ACAs/` y leerlo entero.</a:t>
+            </a:r>
+          </a:p>
+        </p:txBody>
+      </p:sp>
+      <p:sp>
+        <p:nvSpPr>
+          <p:cNvPr id="5" name="TextBox 4"/>
+          <p:cNvSpPr txBox="1"/>
+          <p:nvPr/>
+        </p:nvSpPr>
+        <p:spPr>
+          <a:xfrm>
+            <a:off x="2194560" y="6446520"/>
+            <a:ext cx="5943600" cy="274320"/>
+          </a:xfrm>
+          <a:prstGeom prst="rect">
+            <a:avLst/>
+          </a:prstGeom>
+          <a:noFill/>
+        </p:spPr>
+        <p:txBody>
+          <a:bodyPr wrap="square" anchor="t" lIns="0" rIns="0" tIns="0" bIns="0">
+            <a:spAutoFit/>
+          </a:bodyPr>
+          <a:lstStyle/>
+          <a:p>
+            <a:pPr algn="l"/>
+            <a:r>
+              <a:rPr sz="1000" b="1" i="0">
+                <a:solidFill>
+                  <a:srgbClr val="8F989D"/>
+                </a:solidFill>
+                <a:latin typeface="Calibri"/>
+              </a:rPr>
+              <a:t>Inicio 5:10 pm</a:t>
+            </a:r>
+          </a:p>
+        </p:txBody>
+      </p:sp>
+      <p:sp>
+        <p:nvSpPr>
+          <p:cNvPr id="6" name="TextBox 5"/>
+          <p:cNvSpPr txBox="1"/>
+          <p:nvPr/>
+        </p:nvSpPr>
+        <p:spPr>
+          <a:xfrm>
+            <a:off x="11094415" y="6446520"/>
+            <a:ext cx="548640" cy="274320"/>
+          </a:xfrm>
+          <a:prstGeom prst="rect">
+            <a:avLst/>
+          </a:prstGeom>
+          <a:noFill/>
+        </p:spPr>
+        <p:txBody>
+          <a:bodyPr wrap="square" anchor="t" lIns="0" rIns="0" tIns="0" bIns="0">
+            <a:spAutoFit/>
+          </a:bodyPr>
+          <a:lstStyle/>
+          <a:p>
+            <a:pPr algn="r"/>
+            <a:r>
+              <a:rPr sz="1000" b="1" i="0">
+                <a:solidFill>
+                  <a:srgbClr val="8F989D"/>
+                </a:solidFill>
+                <a:latin typeface="Calibri"/>
+              </a:rPr>
+              <a:t>20</a:t>
+            </a:r>
+          </a:p>
+        </p:txBody>
+      </p:sp>
+    </p:spTree>
+  </p:cSld>
+  <p:clrMapOvr>
+    <a:masterClrMapping/>
+  </p:clrMapOvr>
+</p:sld>
+</file>
+
+<file path=ppt/slides/slide21.xml><?xml version="1.0" encoding="utf-8"?>
+<p:sld xmlns:a="http://schemas.openxmlformats.org/drawingml/2006/main" xmlns:p="http://schemas.openxmlformats.org/presentationml/2006/main" xmlns:r="http://schemas.openxmlformats.org/officeDocument/2006/relationships">
+  <p:cSld>
+    <p:bg>
+      <p:bgPr>
+        <a:solidFill>
+          <a:srgbClr val="FFFFFF"/>
+        </a:solidFill>
+        <a:effectLst/>
+      </p:bgPr>
+    </p:bg>
+    <p:spTree>
+      <p:nvGrpSpPr>
+        <p:cNvPr id="1" name=""/>
+        <p:cNvGrpSpPr/>
+        <p:nvPr/>
+      </p:nvGrpSpPr>
+      <p:grpSpPr/>
+      <p:sp>
+        <p:nvSpPr>
+          <p:cNvPr id="2" name="Rectangle 1"/>
+          <p:cNvSpPr/>
+          <p:nvPr/>
+        </p:nvSpPr>
+        <p:spPr>
+          <a:xfrm>
+            <a:off x="0" y="0"/>
+            <a:ext cx="12191695" cy="164592"/>
+          </a:xfrm>
+          <a:prstGeom prst="rect">
+            <a:avLst/>
+          </a:prstGeom>
+          <a:solidFill>
+            <a:srgbClr val="007433"/>
+          </a:solidFill>
+          <a:ln>
+            <a:noFill/>
+          </a:ln>
+          <a:effectLst/>
+        </p:spPr>
+        <p:style>
+          <a:lnRef idx="1">
+            <a:schemeClr val="accent1"/>
+          </a:lnRef>
+          <a:fillRef idx="3">
+            <a:schemeClr val="accent1"/>
+          </a:fillRef>
+          <a:effectRef idx="2">
+            <a:schemeClr val="accent1"/>
+          </a:effectRef>
+          <a:fontRef idx="minor">
+            <a:schemeClr val="lt1"/>
+          </a:fontRef>
+        </p:style>
+        <p:txBody>
+          <a:bodyPr rtlCol="0" anchor="ctr"/>
+          <a:lstStyle/>
+          <a:p>
+            <a:pPr algn="ctr"/>
+          </a:p>
+        </p:txBody>
+      </p:sp>
+      <p:pic>
+        <p:nvPicPr>
+          <p:cNvPr id="3" name="Picture 2" descr="logo_cun_solo.png"/>
+          <p:cNvPicPr>
+            <a:picLocks noChangeAspect="1"/>
+          </p:cNvPicPr>
+          <p:nvPr/>
+        </p:nvPicPr>
+        <p:blipFill>
+          <a:blip r:embed="rId2"/>
+          <a:stretch>
+            <a:fillRect/>
+          </a:stretch>
+        </p:blipFill>
+        <p:spPr>
+          <a:xfrm>
+            <a:off x="10362895" y="5632704"/>
+            <a:ext cx="1371600" cy="950976"/>
+          </a:xfrm>
+          <a:prstGeom prst="rect">
+            <a:avLst/>
+          </a:prstGeom>
+        </p:spPr>
+      </p:pic>
+      <p:sp>
+        <p:nvSpPr>
+          <p:cNvPr id="4" name="TextBox 3"/>
+          <p:cNvSpPr txBox="1"/>
+          <p:nvPr/>
+        </p:nvSpPr>
+        <p:spPr>
+          <a:xfrm>
+            <a:off x="640080" y="1737360"/>
+            <a:ext cx="10911535" cy="1097280"/>
+          </a:xfrm>
+          <a:prstGeom prst="rect">
+            <a:avLst/>
+          </a:prstGeom>
+          <a:noFill/>
+        </p:spPr>
+        <p:txBody>
+          <a:bodyPr wrap="square" anchor="ctr" lIns="0" rIns="0" tIns="0" bIns="0">
+            <a:spAutoFit/>
+          </a:bodyPr>
+          <a:lstStyle/>
+          <a:p>
+            <a:pPr algn="ctr"/>
+            <a:r>
+              <a:rPr sz="3400" b="1" i="0">
+                <a:solidFill>
+                  <a:srgbClr val="0C2340"/>
+                </a:solidFill>
+                <a:latin typeface="Calibri"/>
+              </a:rPr>
+              <a:t>Cierre — Sesión 01</a:t>
+            </a:r>
+          </a:p>
+        </p:txBody>
+      </p:sp>
+      <p:sp>
+        <p:nvSpPr>
+          <p:cNvPr id="5" name="TextBox 4"/>
+          <p:cNvSpPr txBox="1"/>
+          <p:nvPr/>
+        </p:nvSpPr>
+        <p:spPr>
+          <a:xfrm>
+            <a:off x="640080" y="3017520"/>
+            <a:ext cx="10911535" cy="1645920"/>
+          </a:xfrm>
+          <a:prstGeom prst="rect">
+            <a:avLst/>
+          </a:prstGeom>
+          <a:noFill/>
+        </p:spPr>
+        <p:txBody>
+          <a:bodyPr wrap="square" anchor="t" lIns="0" rIns="0" tIns="0" bIns="0">
+            <a:spAutoFit/>
+          </a:bodyPr>
+          <a:lstStyle/>
+          <a:p>
+            <a:pPr algn="ctr">
+              <a:spcAft>
+                <a:spcPts val="600"/>
+              </a:spcAft>
+            </a:pPr>
+            <a:r>
+              <a:rPr sz="1600" b="0" i="0">
+                <a:solidFill>
+                  <a:srgbClr val="2B2B2B"/>
+                </a:solidFill>
+                <a:latin typeface="Calibri"/>
+              </a:rPr>
+              <a:t>Ya sabemos qué haremos, cómo se evalúa y quién es quién.</a:t>
+            </a:r>
+          </a:p>
+          <a:p>
+            <a:pPr algn="ctr">
+              <a:spcAft>
+                <a:spcPts val="600"/>
+              </a:spcAft>
+            </a:pPr>
+            <a:r>
+              <a:rPr sz="1600" b="1" i="0">
+                <a:solidFill>
+                  <a:srgbClr val="2B2B2B"/>
+                </a:solidFill>
+                <a:latin typeface="Calibri"/>
+              </a:rPr>
+              <a:t>Sesión 02:</a:t>
+            </a:r>
+            <a:r>
+              <a:rPr sz="1600" b="0" i="0">
+                <a:solidFill>
+                  <a:srgbClr val="2B2B2B"/>
+                </a:solidFill>
+                <a:latin typeface="Calibri"/>
+              </a:rPr>
+              <a:t> arranca el contenido del curso.</a:t>
+            </a:r>
+          </a:p>
+        </p:txBody>
+      </p:sp>
+      <p:sp>
+        <p:nvSpPr>
+          <p:cNvPr id="6" name="TextBox 5"/>
+          <p:cNvSpPr txBox="1"/>
+          <p:nvPr/>
+        </p:nvSpPr>
+        <p:spPr>
+          <a:xfrm>
+            <a:off x="640080" y="4754880"/>
+            <a:ext cx="10911535" cy="640080"/>
+          </a:xfrm>
+          <a:prstGeom prst="rect">
+            <a:avLst/>
+          </a:prstGeom>
+          <a:noFill/>
+        </p:spPr>
+        <p:txBody>
+          <a:bodyPr wrap="square" anchor="t" lIns="0" rIns="0" tIns="0" bIns="0">
+            <a:spAutoFit/>
+          </a:bodyPr>
+          <a:lstStyle/>
+          <a:p>
+            <a:pPr algn="ctr"/>
+            <a:r>
+              <a:rPr sz="2000" b="1" i="0">
+                <a:solidFill>
+                  <a:srgbClr val="007433"/>
+                </a:solidFill>
+                <a:latin typeface="Calibri"/>
+              </a:rPr>
+              <a:t>CREATIVIDAD Y PENSAMIENTO INNOVADOR</a:t>
+            </a:r>
+          </a:p>
+        </p:txBody>
+      </p:sp>
+      <p:sp>
+        <p:nvSpPr>
+          <p:cNvPr id="7" name="TextBox 6"/>
+          <p:cNvSpPr txBox="1"/>
+          <p:nvPr/>
+        </p:nvSpPr>
+        <p:spPr>
+          <a:xfrm>
+            <a:off x="2194560" y="6446520"/>
+            <a:ext cx="5943600" cy="274320"/>
+          </a:xfrm>
+          <a:prstGeom prst="rect">
+            <a:avLst/>
+          </a:prstGeom>
+          <a:noFill/>
+        </p:spPr>
+        <p:txBody>
+          <a:bodyPr wrap="square" anchor="t" lIns="0" rIns="0" tIns="0" bIns="0">
+            <a:spAutoFit/>
+          </a:bodyPr>
+          <a:lstStyle/>
+          <a:p>
+            <a:pPr algn="l"/>
+            <a:r>
+              <a:rPr sz="1000" b="1" i="0">
+                <a:solidFill>
+                  <a:srgbClr val="8F989D"/>
+                </a:solidFill>
+                <a:latin typeface="Calibri"/>
+              </a:rPr>
+              <a:t>Inicio 5:10 pm</a:t>
             </a:r>
           </a:p>
         </p:txBody>
@@ -5353,65 +11947,21 @@
                 </a:solidFill>
                 <a:latin typeface="Calibri"/>
               </a:rPr>
-              <a:t>ACUERDOS DE TRABAJO</a:t>
-            </a:r>
-          </a:p>
-        </p:txBody>
-      </p:sp>
-      <p:sp>
-        <p:nvSpPr>
-          <p:cNvPr id="4" name="Rounded Rectangle 3"/>
-          <p:cNvSpPr/>
-          <p:nvPr/>
-        </p:nvSpPr>
-        <p:spPr>
-          <a:xfrm>
-            <a:off x="640080" y="1737360"/>
-            <a:ext cx="10911535" cy="713232"/>
-          </a:xfrm>
-          <a:prstGeom prst="roundRect">
-            <a:avLst/>
-          </a:prstGeom>
-          <a:solidFill>
-            <a:srgbClr val="E8F5EC"/>
-          </a:solidFill>
-          <a:ln>
-            <a:noFill/>
-          </a:ln>
-          <a:effectLst/>
-        </p:spPr>
-        <p:style>
-          <a:lnRef idx="1">
-            <a:schemeClr val="accent1"/>
-          </a:lnRef>
-          <a:fillRef idx="3">
-            <a:schemeClr val="accent1"/>
-          </a:fillRef>
-          <a:effectRef idx="2">
-            <a:schemeClr val="accent1"/>
-          </a:effectRef>
-          <a:fontRef idx="minor">
-            <a:schemeClr val="lt1"/>
-          </a:fontRef>
-        </p:style>
-        <p:txBody>
-          <a:bodyPr rtlCol="0" anchor="ctr"/>
-          <a:lstStyle/>
-          <a:p>
-            <a:pPr algn="ctr"/>
-          </a:p>
-        </p:txBody>
-      </p:sp>
-      <p:sp>
-        <p:nvSpPr>
-          <p:cNvPr id="5" name="TextBox 4"/>
+              <a:t>Cómo trabajamos: una hora juntos, el resto por su cuenta</a:t>
+            </a:r>
+          </a:p>
+        </p:txBody>
+      </p:sp>
+      <p:sp>
+        <p:nvSpPr>
+          <p:cNvPr id="4" name="TextBox 3"/>
           <p:cNvSpPr txBox="1"/>
           <p:nvPr/>
         </p:nvSpPr>
         <p:spPr>
           <a:xfrm>
-            <a:off x="868680" y="1847088"/>
-            <a:ext cx="10454335" cy="493776"/>
+            <a:off x="640080" y="1691639"/>
+            <a:ext cx="10911535" cy="4617720"/>
           </a:xfrm>
           <a:prstGeom prst="rect">
             <a:avLst/>
@@ -5424,97 +11974,379 @@
           </a:bodyPr>
           <a:lstStyle/>
           <a:p>
-            <a:r>
-              <a:rPr sz="1300" b="1" i="0">
-                <a:solidFill>
-                  <a:srgbClr val="0C2340"/>
-                </a:solidFill>
-                <a:latin typeface="Calibri"/>
-              </a:rPr>
-              <a:t>ℹ️ Nota institucional</a:t>
-            </a:r>
-          </a:p>
-          <a:p>
             <a:pPr>
-              <a:spcBef>
-                <a:spcPts val="400"/>
-              </a:spcBef>
+              <a:spcAft>
+                <a:spcPts val="1000"/>
+              </a:spcAft>
             </a:pPr>
             <a:r>
-              <a:rPr sz="1300" b="1" i="0">
-                <a:solidFill>
-                  <a:srgbClr val="2B2B2B"/>
-                </a:solidFill>
-                <a:latin typeface="Calibri"/>
-              </a:rPr>
-              <a:t>Entrega oficial: CDigital.</a:t>
-            </a:r>
-            <a:r>
-              <a:rPr sz="1300" b="0" i="0">
-                <a:solidFill>
-                  <a:srgbClr val="2B2B2B"/>
-                </a:solidFill>
-                <a:latin typeface="Calibri"/>
-              </a:rPr>
-              <a:t> Lo que no esté ahí, no está entregado.</a:t>
-            </a:r>
-          </a:p>
-        </p:txBody>
-      </p:sp>
-      <p:sp>
-        <p:nvSpPr>
-          <p:cNvPr id="6" name="Rounded Rectangle 5"/>
-          <p:cNvSpPr/>
-          <p:nvPr/>
-        </p:nvSpPr>
-        <p:spPr>
-          <a:xfrm>
-            <a:off x="640080" y="2679191"/>
-            <a:ext cx="10911535" cy="713232"/>
-          </a:xfrm>
-          <a:prstGeom prst="roundRect">
-            <a:avLst/>
-          </a:prstGeom>
-          <a:solidFill>
-            <a:srgbClr val="FDECD8"/>
-          </a:solidFill>
-          <a:ln>
-            <a:noFill/>
-          </a:ln>
-          <a:effectLst/>
-        </p:spPr>
-        <p:style>
-          <a:lnRef idx="1">
-            <a:schemeClr val="accent1"/>
-          </a:lnRef>
-          <a:fillRef idx="3">
-            <a:schemeClr val="accent1"/>
-          </a:fillRef>
-          <a:effectRef idx="2">
-            <a:schemeClr val="accent1"/>
-          </a:effectRef>
-          <a:fontRef idx="minor">
-            <a:schemeClr val="lt1"/>
-          </a:fontRef>
-        </p:style>
-        <p:txBody>
-          <a:bodyPr rtlCol="0" anchor="ctr"/>
-          <a:lstStyle/>
-          <a:p>
-            <a:pPr algn="ctr"/>
-          </a:p>
-        </p:txBody>
-      </p:sp>
-      <p:sp>
-        <p:nvSpPr>
-          <p:cNvPr id="7" name="TextBox 6"/>
+              <a:rPr sz="1600" b="0" i="0">
+                <a:solidFill>
+                  <a:srgbClr val="2B2B2B"/>
+                </a:solidFill>
+                <a:latin typeface="Calibri"/>
+              </a:rPr>
+              <a:t>–   El curso son </a:t>
+            </a:r>
+            <a:r>
+              <a:rPr sz="1600" b="1" i="0">
+                <a:solidFill>
+                  <a:srgbClr val="2B2B2B"/>
+                </a:solidFill>
+                <a:latin typeface="Calibri"/>
+              </a:rPr>
+              <a:t>2 créditos</a:t>
+            </a:r>
+            <a:r>
+              <a:rPr sz="1600" b="0" i="0">
+                <a:solidFill>
+                  <a:srgbClr val="2B2B2B"/>
+                </a:solidFill>
+                <a:latin typeface="Calibri"/>
+              </a:rPr>
+              <a:t>: unas </a:t>
+            </a:r>
+            <a:r>
+              <a:rPr sz="1600" b="1" i="0">
+                <a:solidFill>
+                  <a:srgbClr val="2B2B2B"/>
+                </a:solidFill>
+                <a:latin typeface="Calibri"/>
+              </a:rPr>
+              <a:t>32 horas</a:t>
+            </a:r>
+            <a:r>
+              <a:rPr sz="1600" b="0" i="0">
+                <a:solidFill>
+                  <a:srgbClr val="2B2B2B"/>
+                </a:solidFill>
+                <a:latin typeface="Calibri"/>
+              </a:rPr>
+              <a:t> de acompañamiento y unas </a:t>
+            </a:r>
+            <a:r>
+              <a:rPr sz="1600" b="1" i="0">
+                <a:solidFill>
+                  <a:srgbClr val="2B2B2B"/>
+                </a:solidFill>
+                <a:latin typeface="Calibri"/>
+              </a:rPr>
+              <a:t>64 horas</a:t>
+            </a:r>
+            <a:r>
+              <a:rPr sz="1600" b="0" i="0">
+                <a:solidFill>
+                  <a:srgbClr val="2B2B2B"/>
+                </a:solidFill>
+                <a:latin typeface="Calibri"/>
+              </a:rPr>
+              <a:t> de trabajo autónomo.</a:t>
+            </a:r>
+          </a:p>
+          <a:p>
+            <a:pPr lvl="1">
+              <a:spcAft>
+                <a:spcPts val="600"/>
+              </a:spcAft>
+            </a:pPr>
+            <a:r>
+              <a:rPr sz="1500" b="0" i="0">
+                <a:solidFill>
+                  <a:srgbClr val="2B2B2B"/>
+                </a:solidFill>
+                <a:latin typeface="Calibri"/>
+              </a:rPr>
+              <a:t>●   Traducción honesta: lo que decide su nota </a:t>
+            </a:r>
+            <a:r>
+              <a:rPr sz="1500" b="1" i="0">
+                <a:solidFill>
+                  <a:srgbClr val="2B2B2B"/>
+                </a:solidFill>
+                <a:latin typeface="Calibri"/>
+              </a:rPr>
+              <a:t>no pasa en la hora de clase</a:t>
+            </a:r>
+            <a:r>
+              <a:rPr sz="1500" b="0" i="0">
+                <a:solidFill>
+                  <a:srgbClr val="2B2B2B"/>
+                </a:solidFill>
+                <a:latin typeface="Calibri"/>
+              </a:rPr>
+              <a:t>, pasa entre semana.</a:t>
+            </a:r>
+          </a:p>
+          <a:p>
+            <a:pPr>
+              <a:spcAft>
+                <a:spcPts val="1000"/>
+              </a:spcAft>
+            </a:pPr>
+            <a:r>
+              <a:rPr sz="1600" b="0" i="0">
+                <a:solidFill>
+                  <a:srgbClr val="2B2B2B"/>
+                </a:solidFill>
+                <a:latin typeface="Calibri"/>
+              </a:rPr>
+              <a:t>–   El encuentro sincrónico es de </a:t>
+            </a:r>
+            <a:r>
+              <a:rPr sz="1600" b="1" i="0">
+                <a:solidFill>
+                  <a:srgbClr val="2B2B2B"/>
+                </a:solidFill>
+                <a:latin typeface="Calibri"/>
+              </a:rPr>
+              <a:t>una hora</a:t>
+            </a:r>
+            <a:r>
+              <a:rPr sz="1600" b="0" i="0">
+                <a:solidFill>
+                  <a:srgbClr val="2B2B2B"/>
+                </a:solidFill>
+                <a:latin typeface="Calibri"/>
+              </a:rPr>
+              <a:t>. No alcanza para dictar todo y además hacer el taller.</a:t>
+            </a:r>
+          </a:p>
+          <a:p>
+            <a:pPr lvl="1">
+              <a:spcAft>
+                <a:spcPts val="600"/>
+              </a:spcAft>
+            </a:pPr>
+            <a:r>
+              <a:rPr sz="1500" b="0" i="0">
+                <a:solidFill>
+                  <a:srgbClr val="2B2B2B"/>
+                </a:solidFill>
+                <a:latin typeface="Calibri"/>
+              </a:rPr>
+              <a:t>●   Por eso trabajamos en </a:t>
+            </a:r>
+            <a:r>
+              <a:rPr sz="1500" b="1" i="0">
+                <a:solidFill>
+                  <a:srgbClr val="2B2B2B"/>
+                </a:solidFill>
+                <a:latin typeface="Calibri"/>
+              </a:rPr>
+              <a:t>aula invertida</a:t>
+            </a:r>
+            <a:r>
+              <a:rPr sz="1500" b="0" i="0">
+                <a:solidFill>
+                  <a:srgbClr val="2B2B2B"/>
+                </a:solidFill>
+                <a:latin typeface="Calibri"/>
+              </a:rPr>
+              <a:t>: usted llega leído y la hora se usa para </a:t>
+            </a:r>
+            <a:r>
+              <a:rPr sz="1500" b="1" i="0">
+                <a:solidFill>
+                  <a:srgbClr val="2B2B2B"/>
+                </a:solidFill>
+                <a:latin typeface="Calibri"/>
+              </a:rPr>
+              <a:t>aplicar</a:t>
+            </a:r>
+            <a:r>
+              <a:rPr sz="1500" b="0" i="0">
+                <a:solidFill>
+                  <a:srgbClr val="2B2B2B"/>
+                </a:solidFill>
+                <a:latin typeface="Calibri"/>
+              </a:rPr>
+              <a:t>, no para leerle diapositivas.</a:t>
+            </a:r>
+          </a:p>
+          <a:p>
+            <a:pPr>
+              <a:spcAft>
+                <a:spcPts val="1000"/>
+              </a:spcAft>
+            </a:pPr>
+            <a:r>
+              <a:rPr sz="1600" b="0" i="0">
+                <a:solidFill>
+                  <a:srgbClr val="2B2B2B"/>
+                </a:solidFill>
+                <a:latin typeface="Calibri"/>
+              </a:rPr>
+              <a:t>–   </a:t>
+            </a:r>
+            <a:r>
+              <a:rPr sz="1600" b="1" i="0">
+                <a:solidFill>
+                  <a:srgbClr val="2B2B2B"/>
+                </a:solidFill>
+                <a:latin typeface="Calibri"/>
+              </a:rPr>
+              <a:t>Antes del encuentro:</a:t>
+            </a:r>
+            <a:r>
+              <a:rPr sz="1600" b="0" i="0">
+                <a:solidFill>
+                  <a:srgbClr val="2B2B2B"/>
+                </a:solidFill>
+                <a:latin typeface="Calibri"/>
+              </a:rPr>
+              <a:t> leer el material de la unidad publicado en </a:t>
+            </a:r>
+            <a:r>
+              <a:rPr sz="1600" b="1" i="0">
+                <a:solidFill>
+                  <a:srgbClr val="2B2B2B"/>
+                </a:solidFill>
+                <a:latin typeface="Calibri"/>
+              </a:rPr>
+              <a:t>CDigital</a:t>
+            </a:r>
+            <a:r>
+              <a:rPr sz="1600" b="0" i="0">
+                <a:solidFill>
+                  <a:srgbClr val="2B2B2B"/>
+                </a:solidFill>
+                <a:latin typeface="Calibri"/>
+              </a:rPr>
+              <a:t>.</a:t>
+            </a:r>
+          </a:p>
+          <a:p>
+            <a:pPr>
+              <a:spcAft>
+                <a:spcPts val="1000"/>
+              </a:spcAft>
+            </a:pPr>
+            <a:r>
+              <a:rPr sz="1600" b="0" i="0">
+                <a:solidFill>
+                  <a:srgbClr val="2B2B2B"/>
+                </a:solidFill>
+                <a:latin typeface="Calibri"/>
+              </a:rPr>
+              <a:t>–   </a:t>
+            </a:r>
+            <a:r>
+              <a:rPr sz="1600" b="1" i="0">
+                <a:solidFill>
+                  <a:srgbClr val="2B2B2B"/>
+                </a:solidFill>
+                <a:latin typeface="Calibri"/>
+              </a:rPr>
+              <a:t>Durante el encuentro:</a:t>
+            </a:r>
+            <a:r>
+              <a:rPr sz="1600" b="0" i="0">
+                <a:solidFill>
+                  <a:srgbClr val="2B2B2B"/>
+                </a:solidFill>
+                <a:latin typeface="Calibri"/>
+              </a:rPr>
+              <a:t> un ejemplo modelado por el Docente + taller sobre </a:t>
+            </a:r>
+            <a:r>
+              <a:rPr sz="1600" b="1" i="0">
+                <a:solidFill>
+                  <a:srgbClr val="2B2B2B"/>
+                </a:solidFill>
+                <a:latin typeface="Calibri"/>
+              </a:rPr>
+              <a:t>su propia propuesta</a:t>
+            </a:r>
+            <a:r>
+              <a:rPr sz="1600" b="0" i="0">
+                <a:solidFill>
+                  <a:srgbClr val="2B2B2B"/>
+                </a:solidFill>
+                <a:latin typeface="Calibri"/>
+              </a:rPr>
+              <a:t> + preguntas.</a:t>
+            </a:r>
+          </a:p>
+          <a:p>
+            <a:pPr>
+              <a:spcAft>
+                <a:spcPts val="1000"/>
+              </a:spcAft>
+            </a:pPr>
+            <a:r>
+              <a:rPr sz="1600" b="0" i="0">
+                <a:solidFill>
+                  <a:srgbClr val="2B2B2B"/>
+                </a:solidFill>
+                <a:latin typeface="Calibri"/>
+              </a:rPr>
+              <a:t>–   </a:t>
+            </a:r>
+            <a:r>
+              <a:rPr sz="1600" b="1" i="0">
+                <a:solidFill>
+                  <a:srgbClr val="2B2B2B"/>
+                </a:solidFill>
+                <a:latin typeface="Calibri"/>
+              </a:rPr>
+              <a:t>Después del encuentro:</a:t>
+            </a:r>
+            <a:r>
+              <a:rPr sz="1600" b="0" i="0">
+                <a:solidFill>
+                  <a:srgbClr val="2B2B2B"/>
+                </a:solidFill>
+                <a:latin typeface="Calibri"/>
+              </a:rPr>
+              <a:t> terminar el avance de la semana y guardarlo para el paquete del corte.</a:t>
+            </a:r>
+          </a:p>
+          <a:p>
+            <a:pPr>
+              <a:spcAft>
+                <a:spcPts val="1000"/>
+              </a:spcAft>
+            </a:pPr>
+            <a:r>
+              <a:rPr sz="1600" b="0" i="0">
+                <a:solidFill>
+                  <a:srgbClr val="2B2B2B"/>
+                </a:solidFill>
+                <a:latin typeface="Calibri"/>
+              </a:rPr>
+              <a:t>–   Traiga siempre su </a:t>
+            </a:r>
+            <a:r>
+              <a:rPr sz="1600" b="1" i="0">
+                <a:solidFill>
+                  <a:srgbClr val="2B2B2B"/>
+                </a:solidFill>
+                <a:latin typeface="Calibri"/>
+              </a:rPr>
+              <a:t>documento de trabajo abierto</a:t>
+            </a:r>
+            <a:r>
+              <a:rPr sz="1600" b="0" i="0">
+                <a:solidFill>
+                  <a:srgbClr val="2B2B2B"/>
+                </a:solidFill>
+                <a:latin typeface="Calibri"/>
+              </a:rPr>
+              <a:t>: se trabaja sobre lo que ya está escrito, no sobre lo que recuerda.</a:t>
+            </a:r>
+          </a:p>
+        </p:txBody>
+      </p:sp>
+      <p:sp>
+        <p:nvSpPr>
+          <p:cNvPr id="5" name="TextBox 4"/>
           <p:cNvSpPr txBox="1"/>
           <p:nvPr/>
         </p:nvSpPr>
         <p:spPr>
           <a:xfrm>
-            <a:off x="868680" y="2788920"/>
-            <a:ext cx="10454335" cy="493776"/>
+            <a:off x="2194560" y="6446520"/>
+            <a:ext cx="5943600" cy="274320"/>
           </a:xfrm>
           <a:prstGeom prst="rect">
             <a:avLst/>
@@ -5527,106 +12359,29 @@
           </a:bodyPr>
           <a:lstStyle/>
           <a:p>
-            <a:r>
-              <a:rPr sz="1300" b="1" i="0">
-                <a:solidFill>
-                  <a:srgbClr val="0C2340"/>
-                </a:solidFill>
-                <a:latin typeface="Calibri"/>
-              </a:rPr>
-              <a:t>💡 Aclaración</a:t>
-            </a:r>
-          </a:p>
-          <a:p>
-            <a:pPr>
-              <a:spcBef>
-                <a:spcPts val="400"/>
-              </a:spcBef>
-            </a:pPr>
-            <a:r>
-              <a:rPr sz="1300" b="0" i="0">
-                <a:solidFill>
-                  <a:srgbClr val="2B2B2B"/>
-                </a:solidFill>
-                <a:latin typeface="Calibri"/>
-              </a:rPr>
-              <a:t>Traer el avance </a:t>
-            </a:r>
-            <a:r>
-              <a:rPr sz="1300" b="1" i="0">
-                <a:solidFill>
-                  <a:srgbClr val="2B2B2B"/>
-                </a:solidFill>
-                <a:latin typeface="Calibri"/>
-              </a:rPr>
-              <a:t>escrito</a:t>
-            </a:r>
-            <a:r>
-              <a:rPr sz="1300" b="0" i="0">
-                <a:solidFill>
-                  <a:srgbClr val="2B2B2B"/>
-                </a:solidFill>
-                <a:latin typeface="Calibri"/>
-              </a:rPr>
-              <a:t> a cada encuentro: se trabaja sobre lo que ya existe.</a:t>
-            </a:r>
-          </a:p>
-        </p:txBody>
-      </p:sp>
-      <p:sp>
-        <p:nvSpPr>
-          <p:cNvPr id="8" name="Rounded Rectangle 7"/>
-          <p:cNvSpPr/>
-          <p:nvPr/>
-        </p:nvSpPr>
-        <p:spPr>
-          <a:xfrm>
-            <a:off x="640080" y="3621024"/>
-            <a:ext cx="10911535" cy="713232"/>
-          </a:xfrm>
-          <a:prstGeom prst="roundRect">
-            <a:avLst/>
-          </a:prstGeom>
-          <a:solidFill>
-            <a:srgbClr val="FBE4E4"/>
-          </a:solidFill>
-          <a:ln>
-            <a:noFill/>
-          </a:ln>
-          <a:effectLst/>
-        </p:spPr>
-        <p:style>
-          <a:lnRef idx="1">
-            <a:schemeClr val="accent1"/>
-          </a:lnRef>
-          <a:fillRef idx="3">
-            <a:schemeClr val="accent1"/>
-          </a:fillRef>
-          <a:effectRef idx="2">
-            <a:schemeClr val="accent1"/>
-          </a:effectRef>
-          <a:fontRef idx="minor">
-            <a:schemeClr val="lt1"/>
-          </a:fontRef>
-        </p:style>
-        <p:txBody>
-          <a:bodyPr rtlCol="0" anchor="ctr"/>
-          <a:lstStyle/>
-          <a:p>
-            <a:pPr algn="ctr"/>
-          </a:p>
-        </p:txBody>
-      </p:sp>
-      <p:sp>
-        <p:nvSpPr>
-          <p:cNvPr id="9" name="TextBox 8"/>
+            <a:pPr algn="l"/>
+            <a:r>
+              <a:rPr sz="1000" b="1" i="0">
+                <a:solidFill>
+                  <a:srgbClr val="8F989D"/>
+                </a:solidFill>
+                <a:latin typeface="Calibri"/>
+              </a:rPr>
+              <a:t>Inicio 5:10 pm</a:t>
+            </a:r>
+          </a:p>
+        </p:txBody>
+      </p:sp>
+      <p:sp>
+        <p:nvSpPr>
+          <p:cNvPr id="6" name="TextBox 5"/>
           <p:cNvSpPr txBox="1"/>
           <p:nvPr/>
         </p:nvSpPr>
         <p:spPr>
           <a:xfrm>
-            <a:off x="868680" y="3730752"/>
-            <a:ext cx="10454335" cy="493776"/>
+            <a:off x="11094415" y="6446520"/>
+            <a:ext cx="548640" cy="274320"/>
           </a:xfrm>
           <a:prstGeom prst="rect">
             <a:avLst/>
@@ -5639,62 +12394,29 @@
           </a:bodyPr>
           <a:lstStyle/>
           <a:p>
-            <a:r>
-              <a:rPr sz="1300" b="1" i="0">
-                <a:solidFill>
-                  <a:srgbClr val="0C2340"/>
-                </a:solidFill>
-                <a:latin typeface="Calibri"/>
-              </a:rPr>
-              <a:t>⚠️ Importante</a:t>
-            </a:r>
-          </a:p>
-          <a:p>
-            <a:pPr>
-              <a:spcBef>
-                <a:spcPts val="400"/>
-              </a:spcBef>
-            </a:pPr>
-            <a:r>
-              <a:rPr sz="1300" b="0" i="0">
-                <a:solidFill>
-                  <a:srgbClr val="2B2B2B"/>
-                </a:solidFill>
-                <a:latin typeface="Calibri"/>
-              </a:rPr>
-              <a:t>Integridad académica: citar siempre en </a:t>
-            </a:r>
-            <a:r>
-              <a:rPr sz="1300" b="1" i="0">
-                <a:solidFill>
-                  <a:srgbClr val="2B2B2B"/>
-                </a:solidFill>
-                <a:latin typeface="Calibri"/>
-              </a:rPr>
-              <a:t>APA 7</a:t>
-            </a:r>
-            <a:r>
-              <a:rPr sz="1300" b="0" i="0">
-                <a:solidFill>
-                  <a:srgbClr val="2B2B2B"/>
-                </a:solidFill>
-                <a:latin typeface="Calibri"/>
-              </a:rPr>
-              <a:t>. El plagio tiene debido proceso.</a:t>
-            </a:r>
-          </a:p>
-        </p:txBody>
-      </p:sp>
-      <p:sp>
-        <p:nvSpPr>
-          <p:cNvPr id="10" name="TextBox 9"/>
+            <a:pPr algn="r"/>
+            <a:r>
+              <a:rPr sz="1000" b="1" i="0">
+                <a:solidFill>
+                  <a:srgbClr val="8F989D"/>
+                </a:solidFill>
+                <a:latin typeface="Calibri"/>
+              </a:rPr>
+              <a:t>6</a:t>
+            </a:r>
+          </a:p>
+        </p:txBody>
+      </p:sp>
+      <p:sp>
+        <p:nvSpPr>
+          <p:cNvPr id="7" name="TextBox 6"/>
           <p:cNvSpPr txBox="1"/>
           <p:nvPr/>
         </p:nvSpPr>
         <p:spPr>
           <a:xfrm>
-            <a:off x="2194560" y="6446520"/>
-            <a:ext cx="5943600" cy="274320"/>
+            <a:off x="640080" y="5943600"/>
+            <a:ext cx="9997135" cy="457200"/>
           </a:xfrm>
           <a:prstGeom prst="rect">
             <a:avLst/>
@@ -5707,50 +12429,32 @@
           </a:bodyPr>
           <a:lstStyle/>
           <a:p>
-            <a:pPr algn="l"/>
-            <a:r>
-              <a:rPr sz="1000" b="1" i="0">
-                <a:solidFill>
-                  <a:srgbClr val="8F989D"/>
-                </a:solidFill>
-                <a:latin typeface="Calibri"/>
-              </a:rPr>
-              <a:t>Inicio 5:10 pm</a:t>
-            </a:r>
-          </a:p>
-        </p:txBody>
-      </p:sp>
-      <p:sp>
-        <p:nvSpPr>
-          <p:cNvPr id="11" name="TextBox 10"/>
-          <p:cNvSpPr txBox="1"/>
-          <p:nvPr/>
-        </p:nvSpPr>
-        <p:spPr>
-          <a:xfrm>
-            <a:off x="11094415" y="6446520"/>
-            <a:ext cx="548640" cy="274320"/>
-          </a:xfrm>
-          <a:prstGeom prst="rect">
-            <a:avLst/>
-          </a:prstGeom>
-          <a:noFill/>
-        </p:spPr>
-        <p:txBody>
-          <a:bodyPr wrap="square" anchor="t" lIns="0" rIns="0" tIns="0" bIns="0">
-            <a:spAutoFit/>
-          </a:bodyPr>
-          <a:lstStyle/>
-          <a:p>
-            <a:pPr algn="r"/>
-            <a:r>
-              <a:rPr sz="1000" b="1" i="0">
-                <a:solidFill>
-                  <a:srgbClr val="8F989D"/>
-                </a:solidFill>
-                <a:latin typeface="Calibri"/>
-              </a:rPr>
-              <a:t>6</a:t>
+            <a:r>
+              <a:rPr sz="1200" b="0" i="1">
+                <a:solidFill>
+                  <a:srgbClr val="2B2B2B"/>
+                </a:solidFill>
+                <a:latin typeface="Calibri"/>
+              </a:rPr>
+              <a:t>Regla del curso: cada sesión </a:t>
+            </a:r>
+            <a:r>
+              <a:rPr sz="1200" b="1" i="1">
+                <a:solidFill>
+                  <a:srgbClr val="2B2B2B"/>
+                </a:solidFill>
+                <a:latin typeface="Calibri"/>
+              </a:rPr>
+              <a:t>alimenta el mismo documento</a:t>
+            </a:r>
+            <a:r>
+              <a:rPr sz="1200" b="0" i="1">
+                <a:solidFill>
+                  <a:srgbClr val="2B2B2B"/>
+                </a:solidFill>
+                <a:latin typeface="Calibri"/>
+              </a:rPr>
+              <a:t>. Aquí ningún taller es una isla.</a:t>
             </a:r>
           </a:p>
         </p:txBody>
@@ -5855,21 +12559,661 @@
                 </a:solidFill>
                 <a:latin typeface="Calibri"/>
               </a:rPr>
-              <a:t>PARA LA PRÓXIMA SESIÓN</a:t>
-            </a:r>
-          </a:p>
-        </p:txBody>
-      </p:sp>
-      <p:sp>
-        <p:nvSpPr>
-          <p:cNvPr id="4" name="TextBox 3"/>
+              <a:t>Mapa del curso: las 7 sesiones de un vistazo</a:t>
+            </a:r>
+          </a:p>
+        </p:txBody>
+      </p:sp>
+      <p:graphicFrame>
+        <p:nvGraphicFramePr>
+          <p:cNvPr id="4" name="Table 3"/>
+          <p:cNvGraphicFramePr>
+            <a:graphicFrameLocks noGrp="1"/>
+          </p:cNvGraphicFramePr>
+          <p:nvPr/>
+        </p:nvGraphicFramePr>
+        <p:xfrm>
+          <a:off x="640080" y="1691639"/>
+          <a:ext cx="10911535" cy="4023360"/>
+        </p:xfrm>
+        <a:graphic>
+          <a:graphicData uri="http://schemas.openxmlformats.org/drawingml/2006/table">
+            <a:tbl>
+              <a:tblPr>
+                <a:tableStyleId>{2D5ABB26-0587-4C30-8999-92F81FD0307C}</a:tableStyleId>
+              </a:tblPr>
+              <a:tblGrid>
+                <a:gridCol w="1283710"/>
+                <a:gridCol w="5134840"/>
+                <a:gridCol w="4492985"/>
+              </a:tblGrid>
+              <a:tr h="502920">
+                <a:tc>
+                  <a:txBody>
+                    <a:bodyPr/>
+                    <a:lstStyle/>
+                    <a:p>
+                      <a:pPr algn="l"/>
+                      <a:r>
+                        <a:rPr sz="1300" b="1" i="0">
+                          <a:solidFill>
+                            <a:srgbClr val="FFFFFF"/>
+                          </a:solidFill>
+                          <a:latin typeface="Calibri"/>
+                        </a:rPr>
+                        <a:t>Sesión</a:t>
+                      </a:r>
+                    </a:p>
+                  </a:txBody>
+                  <a:tcPr anchor="ctr" marL="109728" marR="91440" marT="36576" marB="36576">
+                    <a:solidFill>
+                      <a:srgbClr val="0C2340"/>
+                    </a:solidFill>
+                  </a:tcPr>
+                </a:tc>
+                <a:tc>
+                  <a:txBody>
+                    <a:bodyPr/>
+                    <a:lstStyle/>
+                    <a:p>
+                      <a:pPr algn="l"/>
+                      <a:r>
+                        <a:rPr sz="1300" b="1" i="0">
+                          <a:solidFill>
+                            <a:srgbClr val="FFFFFF"/>
+                          </a:solidFill>
+                          <a:latin typeface="Calibri"/>
+                        </a:rPr>
+                        <a:t>Tema del encuentro</a:t>
+                      </a:r>
+                    </a:p>
+                  </a:txBody>
+                  <a:tcPr anchor="ctr" marL="109728" marR="91440" marT="36576" marB="36576">
+                    <a:solidFill>
+                      <a:srgbClr val="0C2340"/>
+                    </a:solidFill>
+                  </a:tcPr>
+                </a:tc>
+                <a:tc>
+                  <a:txBody>
+                    <a:bodyPr/>
+                    <a:lstStyle/>
+                    <a:p>
+                      <a:pPr algn="l"/>
+                      <a:r>
+                        <a:rPr sz="1300" b="1" i="0">
+                          <a:solidFill>
+                            <a:srgbClr val="FFFFFF"/>
+                          </a:solidFill>
+                          <a:latin typeface="Calibri"/>
+                        </a:rPr>
+                        <a:t>Qué sale de esa sesión</a:t>
+                      </a:r>
+                    </a:p>
+                  </a:txBody>
+                  <a:tcPr anchor="ctr" marL="109728" marR="91440" marT="36576" marB="36576">
+                    <a:solidFill>
+                      <a:srgbClr val="0C2340"/>
+                    </a:solidFill>
+                  </a:tcPr>
+                </a:tc>
+              </a:tr>
+              <a:tr h="502920">
+                <a:tc>
+                  <a:txBody>
+                    <a:bodyPr/>
+                    <a:lstStyle/>
+                    <a:p>
+                      <a:pPr algn="l"/>
+                      <a:r>
+                        <a:rPr sz="1100" b="1" i="0">
+                          <a:solidFill>
+                            <a:srgbClr val="2B2B2B"/>
+                          </a:solidFill>
+                          <a:latin typeface="Calibri"/>
+                        </a:rPr>
+                        <a:t>01</a:t>
+                      </a:r>
+                      <a:r>
+                        <a:rPr sz="1100" b="0" i="0">
+                          <a:solidFill>
+                            <a:srgbClr val="2B2B2B"/>
+                          </a:solidFill>
+                          <a:latin typeface="Calibri"/>
+                        </a:rPr>
+                        <a:t> (hoy)</a:t>
+                      </a:r>
+                    </a:p>
+                  </a:txBody>
+                  <a:tcPr anchor="ctr" marL="109728" marR="91440" marT="36576" marB="36576">
+                    <a:solidFill>
+                      <a:srgbClr val="FFFFFF"/>
+                    </a:solidFill>
+                  </a:tcPr>
+                </a:tc>
+                <a:tc>
+                  <a:txBody>
+                    <a:bodyPr/>
+                    <a:lstStyle/>
+                    <a:p>
+                      <a:pPr algn="l"/>
+                      <a:r>
+                        <a:rPr sz="1100" b="0" i="0">
+                          <a:solidFill>
+                            <a:srgbClr val="2B2B2B"/>
+                          </a:solidFill>
+                          <a:latin typeface="Calibri"/>
+                        </a:rPr>
+                        <a:t>Encuadre: el curso, el Docente, ustedes y las ACAs</a:t>
+                      </a:r>
+                    </a:p>
+                  </a:txBody>
+                  <a:tcPr anchor="ctr" marL="109728" marR="91440" marT="36576" marB="36576">
+                    <a:solidFill>
+                      <a:srgbClr val="FFFFFF"/>
+                    </a:solidFill>
+                  </a:tcPr>
+                </a:tc>
+                <a:tc>
+                  <a:txBody>
+                    <a:bodyPr/>
+                    <a:lstStyle/>
+                    <a:p>
+                      <a:pPr algn="l"/>
+                      <a:r>
+                        <a:rPr sz="1100" b="0" i="0">
+                          <a:solidFill>
+                            <a:srgbClr val="2B2B2B"/>
+                          </a:solidFill>
+                          <a:latin typeface="Calibri"/>
+                        </a:rPr>
+                        <a:t>Reglas claras + encargo de lectura autónoma</a:t>
+                      </a:r>
+                    </a:p>
+                  </a:txBody>
+                  <a:tcPr anchor="ctr" marL="109728" marR="91440" marT="36576" marB="36576">
+                    <a:solidFill>
+                      <a:srgbClr val="FFFFFF"/>
+                    </a:solidFill>
+                  </a:tcPr>
+                </a:tc>
+              </a:tr>
+              <a:tr h="502920">
+                <a:tc>
+                  <a:txBody>
+                    <a:bodyPr/>
+                    <a:lstStyle/>
+                    <a:p>
+                      <a:pPr algn="l"/>
+                      <a:r>
+                        <a:rPr sz="1100" b="1" i="0">
+                          <a:solidFill>
+                            <a:srgbClr val="2B2B2B"/>
+                          </a:solidFill>
+                          <a:latin typeface="Calibri"/>
+                        </a:rPr>
+                        <a:t>02</a:t>
+                      </a:r>
+                    </a:p>
+                  </a:txBody>
+                  <a:tcPr anchor="ctr" marL="109728" marR="91440" marT="36576" marB="36576">
+                    <a:solidFill>
+                      <a:srgbClr val="F2F2F2"/>
+                    </a:solidFill>
+                  </a:tcPr>
+                </a:tc>
+                <a:tc>
+                  <a:txBody>
+                    <a:bodyPr/>
+                    <a:lstStyle/>
+                    <a:p>
+                      <a:pPr algn="l"/>
+                      <a:r>
+                        <a:rPr sz="1100" b="0" i="0">
+                          <a:solidFill>
+                            <a:srgbClr val="2B2B2B"/>
+                          </a:solidFill>
+                          <a:latin typeface="Calibri"/>
+                        </a:rPr>
+                        <a:t>Creatividad e innovación en I+D · </a:t>
+                      </a:r>
+                      <a:r>
+                        <a:rPr sz="1100" b="1" i="0">
+                          <a:solidFill>
+                            <a:srgbClr val="2B2B2B"/>
+                          </a:solidFill>
+                          <a:latin typeface="Calibri"/>
+                        </a:rPr>
+                        <a:t>Design Thinking</a:t>
+                      </a:r>
+                      <a:r>
+                        <a:rPr sz="1100" b="0" i="0">
+                          <a:solidFill>
+                            <a:srgbClr val="2B2B2B"/>
+                          </a:solidFill>
+                          <a:latin typeface="Calibri"/>
+                        </a:rPr>
+                        <a:t> y técnicas</a:t>
+                      </a:r>
+                    </a:p>
+                  </a:txBody>
+                  <a:tcPr anchor="ctr" marL="109728" marR="91440" marT="36576" marB="36576">
+                    <a:solidFill>
+                      <a:srgbClr val="F2F2F2"/>
+                    </a:solidFill>
+                  </a:tcPr>
+                </a:tc>
+                <a:tc>
+                  <a:txBody>
+                    <a:bodyPr/>
+                    <a:lstStyle/>
+                    <a:p>
+                      <a:pPr algn="l"/>
+                      <a:r>
+                        <a:rPr sz="1100" b="0" i="0">
+                          <a:solidFill>
+                            <a:srgbClr val="2B2B2B"/>
+                          </a:solidFill>
+                          <a:latin typeface="Calibri"/>
+                        </a:rPr>
+                        <a:t>Su reto bien planteado y un banco de ideas</a:t>
+                      </a:r>
+                    </a:p>
+                  </a:txBody>
+                  <a:tcPr anchor="ctr" marL="109728" marR="91440" marT="36576" marB="36576">
+                    <a:solidFill>
+                      <a:srgbClr val="F2F2F2"/>
+                    </a:solidFill>
+                  </a:tcPr>
+                </a:tc>
+              </a:tr>
+              <a:tr h="502920">
+                <a:tc>
+                  <a:txBody>
+                    <a:bodyPr/>
+                    <a:lstStyle/>
+                    <a:p>
+                      <a:pPr algn="l"/>
+                      <a:r>
+                        <a:rPr sz="1100" b="1" i="0">
+                          <a:solidFill>
+                            <a:srgbClr val="2B2B2B"/>
+                          </a:solidFill>
+                          <a:latin typeface="Calibri"/>
+                        </a:rPr>
+                        <a:t>03</a:t>
+                      </a:r>
+                    </a:p>
+                  </a:txBody>
+                  <a:tcPr anchor="ctr" marL="109728" marR="91440" marT="36576" marB="36576">
+                    <a:solidFill>
+                      <a:srgbClr val="FFFFFF"/>
+                    </a:solidFill>
+                  </a:tcPr>
+                </a:tc>
+                <a:tc>
+                  <a:txBody>
+                    <a:bodyPr/>
+                    <a:lstStyle/>
+                    <a:p>
+                      <a:pPr algn="l"/>
+                      <a:r>
+                        <a:rPr sz="1100" b="0" i="0">
+                          <a:solidFill>
+                            <a:srgbClr val="2B2B2B"/>
+                          </a:solidFill>
+                          <a:latin typeface="Calibri"/>
+                        </a:rPr>
+                        <a:t>Gestión de la innovación (</a:t>
+                      </a:r>
+                      <a:r>
+                        <a:rPr sz="1100" b="1" i="0">
+                          <a:solidFill>
+                            <a:srgbClr val="2B2B2B"/>
+                          </a:solidFill>
+                          <a:latin typeface="Calibri"/>
+                        </a:rPr>
+                        <a:t>Manual de Oslo</a:t>
+                      </a:r>
+                      <a:r>
+                        <a:rPr sz="1100" b="0" i="0">
+                          <a:solidFill>
+                            <a:srgbClr val="2B2B2B"/>
+                          </a:solidFill>
+                          <a:latin typeface="Calibri"/>
+                        </a:rPr>
+                        <a:t> / OCDE)</a:t>
+                      </a:r>
+                    </a:p>
+                  </a:txBody>
+                  <a:tcPr anchor="ctr" marL="109728" marR="91440" marT="36576" marB="36576">
+                    <a:solidFill>
+                      <a:srgbClr val="FFFFFF"/>
+                    </a:solidFill>
+                  </a:tcPr>
+                </a:tc>
+                <a:tc>
+                  <a:txBody>
+                    <a:bodyPr/>
+                    <a:lstStyle/>
+                    <a:p>
+                      <a:pPr algn="l"/>
+                      <a:r>
+                        <a:rPr sz="1100" b="0" i="0">
+                          <a:solidFill>
+                            <a:srgbClr val="2B2B2B"/>
+                          </a:solidFill>
+                          <a:latin typeface="Calibri"/>
+                        </a:rPr>
+                        <a:t>Su propuesta clasificada y justificada</a:t>
+                      </a:r>
+                    </a:p>
+                  </a:txBody>
+                  <a:tcPr anchor="ctr" marL="109728" marR="91440" marT="36576" marB="36576">
+                    <a:solidFill>
+                      <a:srgbClr val="FFFFFF"/>
+                    </a:solidFill>
+                  </a:tcPr>
+                </a:tc>
+              </a:tr>
+              <a:tr h="502920">
+                <a:tc>
+                  <a:txBody>
+                    <a:bodyPr/>
+                    <a:lstStyle/>
+                    <a:p>
+                      <a:pPr algn="l"/>
+                      <a:r>
+                        <a:rPr sz="1100" b="1" i="0">
+                          <a:solidFill>
+                            <a:srgbClr val="2B2B2B"/>
+                          </a:solidFill>
+                          <a:latin typeface="Calibri"/>
+                        </a:rPr>
+                        <a:t>04</a:t>
+                      </a:r>
+                    </a:p>
+                  </a:txBody>
+                  <a:tcPr anchor="ctr" marL="109728" marR="91440" marT="36576" marB="36576">
+                    <a:solidFill>
+                      <a:srgbClr val="F2F2F2"/>
+                    </a:solidFill>
+                  </a:tcPr>
+                </a:tc>
+                <a:tc>
+                  <a:txBody>
+                    <a:bodyPr/>
+                    <a:lstStyle/>
+                    <a:p>
+                      <a:pPr algn="l"/>
+                      <a:r>
+                        <a:rPr sz="1100" b="0" i="0">
+                          <a:solidFill>
+                            <a:srgbClr val="2B2B2B"/>
+                          </a:solidFill>
+                          <a:latin typeface="Calibri"/>
+                        </a:rPr>
+                        <a:t>Tipos de innovación</a:t>
+                      </a:r>
+                    </a:p>
+                  </a:txBody>
+                  <a:tcPr anchor="ctr" marL="109728" marR="91440" marT="36576" marB="36576">
+                    <a:solidFill>
+                      <a:srgbClr val="F2F2F2"/>
+                    </a:solidFill>
+                  </a:tcPr>
+                </a:tc>
+                <a:tc>
+                  <a:txBody>
+                    <a:bodyPr/>
+                    <a:lstStyle/>
+                    <a:p>
+                      <a:pPr algn="l"/>
+                      <a:r>
+                        <a:rPr sz="1100" b="0" i="0">
+                          <a:solidFill>
+                            <a:srgbClr val="2B2B2B"/>
+                          </a:solidFill>
+                          <a:latin typeface="Calibri"/>
+                        </a:rPr>
+                        <a:t>Cuadro comparativo aplicado a su caso</a:t>
+                      </a:r>
+                    </a:p>
+                  </a:txBody>
+                  <a:tcPr anchor="ctr" marL="109728" marR="91440" marT="36576" marB="36576">
+                    <a:solidFill>
+                      <a:srgbClr val="F2F2F2"/>
+                    </a:solidFill>
+                  </a:tcPr>
+                </a:tc>
+              </a:tr>
+              <a:tr h="502920">
+                <a:tc>
+                  <a:txBody>
+                    <a:bodyPr/>
+                    <a:lstStyle/>
+                    <a:p>
+                      <a:pPr algn="l"/>
+                      <a:r>
+                        <a:rPr sz="1100" b="1" i="0">
+                          <a:solidFill>
+                            <a:srgbClr val="2B2B2B"/>
+                          </a:solidFill>
+                          <a:latin typeface="Calibri"/>
+                        </a:rPr>
+                        <a:t>05</a:t>
+                      </a:r>
+                    </a:p>
+                  </a:txBody>
+                  <a:tcPr anchor="ctr" marL="109728" marR="91440" marT="36576" marB="36576">
+                    <a:solidFill>
+                      <a:srgbClr val="FFFFFF"/>
+                    </a:solidFill>
+                  </a:tcPr>
+                </a:tc>
+                <a:tc>
+                  <a:txBody>
+                    <a:bodyPr/>
+                    <a:lstStyle/>
+                    <a:p>
+                      <a:pPr algn="l"/>
+                      <a:r>
+                        <a:rPr sz="1100" b="0" i="0">
+                          <a:solidFill>
+                            <a:srgbClr val="2B2B2B"/>
+                          </a:solidFill>
+                          <a:latin typeface="Calibri"/>
+                        </a:rPr>
+                        <a:t>Análisis de negocios · validación de la propuesta</a:t>
+                      </a:r>
+                    </a:p>
+                  </a:txBody>
+                  <a:tcPr anchor="ctr" marL="109728" marR="91440" marT="36576" marB="36576">
+                    <a:solidFill>
+                      <a:srgbClr val="FFFFFF"/>
+                    </a:solidFill>
+                  </a:tcPr>
+                </a:tc>
+                <a:tc>
+                  <a:txBody>
+                    <a:bodyPr/>
+                    <a:lstStyle/>
+                    <a:p>
+                      <a:pPr algn="l"/>
+                      <a:r>
+                        <a:rPr sz="1100" b="0" i="0">
+                          <a:solidFill>
+                            <a:srgbClr val="2B2B2B"/>
+                          </a:solidFill>
+                          <a:latin typeface="Calibri"/>
+                        </a:rPr>
+                        <a:t>FODA, Canvas y MVP de su propuesta</a:t>
+                      </a:r>
+                    </a:p>
+                  </a:txBody>
+                  <a:tcPr anchor="ctr" marL="109728" marR="91440" marT="36576" marB="36576">
+                    <a:solidFill>
+                      <a:srgbClr val="FFFFFF"/>
+                    </a:solidFill>
+                  </a:tcPr>
+                </a:tc>
+              </a:tr>
+              <a:tr h="502920">
+                <a:tc>
+                  <a:txBody>
+                    <a:bodyPr/>
+                    <a:lstStyle/>
+                    <a:p>
+                      <a:pPr algn="l"/>
+                      <a:r>
+                        <a:rPr sz="1100" b="1" i="0">
+                          <a:solidFill>
+                            <a:srgbClr val="2B2B2B"/>
+                          </a:solidFill>
+                          <a:latin typeface="Calibri"/>
+                        </a:rPr>
+                        <a:t>06</a:t>
+                      </a:r>
+                    </a:p>
+                  </a:txBody>
+                  <a:tcPr anchor="ctr" marL="109728" marR="91440" marT="36576" marB="36576">
+                    <a:solidFill>
+                      <a:srgbClr val="F2F2F2"/>
+                    </a:solidFill>
+                  </a:tcPr>
+                </a:tc>
+                <a:tc>
+                  <a:txBody>
+                    <a:bodyPr/>
+                    <a:lstStyle/>
+                    <a:p>
+                      <a:pPr algn="l"/>
+                      <a:r>
+                        <a:rPr sz="1100" b="0" i="0">
+                          <a:solidFill>
+                            <a:srgbClr val="2B2B2B"/>
+                          </a:solidFill>
+                          <a:latin typeface="Calibri"/>
+                        </a:rPr>
+                        <a:t>Vigilancia tecnológica</a:t>
+                      </a:r>
+                    </a:p>
+                  </a:txBody>
+                  <a:tcPr anchor="ctr" marL="109728" marR="91440" marT="36576" marB="36576">
+                    <a:solidFill>
+                      <a:srgbClr val="F2F2F2"/>
+                    </a:solidFill>
+                  </a:tcPr>
+                </a:tc>
+                <a:tc>
+                  <a:txBody>
+                    <a:bodyPr/>
+                    <a:lstStyle/>
+                    <a:p>
+                      <a:pPr algn="l"/>
+                      <a:r>
+                        <a:rPr sz="1100" b="0" i="0">
+                          <a:solidFill>
+                            <a:srgbClr val="2B2B2B"/>
+                          </a:solidFill>
+                          <a:latin typeface="Calibri"/>
+                        </a:rPr>
+                        <a:t>Tablero de señales, fuentes e implicaciones</a:t>
+                      </a:r>
+                    </a:p>
+                  </a:txBody>
+                  <a:tcPr anchor="ctr" marL="109728" marR="91440" marT="36576" marB="36576">
+                    <a:solidFill>
+                      <a:srgbClr val="F2F2F2"/>
+                    </a:solidFill>
+                  </a:tcPr>
+                </a:tc>
+              </a:tr>
+              <a:tr h="502920">
+                <a:tc>
+                  <a:txBody>
+                    <a:bodyPr/>
+                    <a:lstStyle/>
+                    <a:p>
+                      <a:pPr algn="l"/>
+                      <a:r>
+                        <a:rPr sz="1100" b="1" i="0">
+                          <a:solidFill>
+                            <a:srgbClr val="2B2B2B"/>
+                          </a:solidFill>
+                          <a:latin typeface="Calibri"/>
+                        </a:rPr>
+                        <a:t>07</a:t>
+                      </a:r>
+                    </a:p>
+                  </a:txBody>
+                  <a:tcPr anchor="ctr" marL="109728" marR="91440" marT="36576" marB="36576">
+                    <a:solidFill>
+                      <a:srgbClr val="FFFFFF"/>
+                    </a:solidFill>
+                  </a:tcPr>
+                </a:tc>
+                <a:tc>
+                  <a:txBody>
+                    <a:bodyPr/>
+                    <a:lstStyle/>
+                    <a:p>
+                      <a:pPr algn="l"/>
+                      <a:r>
+                        <a:rPr sz="1100" b="0" i="0">
+                          <a:solidFill>
+                            <a:srgbClr val="2B2B2B"/>
+                          </a:solidFill>
+                          <a:latin typeface="Calibri"/>
+                        </a:rPr>
+                        <a:t>Innovación local–internacional · entidades de apoyo</a:t>
+                      </a:r>
+                    </a:p>
+                  </a:txBody>
+                  <a:tcPr anchor="ctr" marL="109728" marR="91440" marT="36576" marB="36576">
+                    <a:solidFill>
+                      <a:srgbClr val="FFFFFF"/>
+                    </a:solidFill>
+                  </a:tcPr>
+                </a:tc>
+                <a:tc>
+                  <a:txBody>
+                    <a:bodyPr/>
+                    <a:lstStyle/>
+                    <a:p>
+                      <a:pPr algn="l"/>
+                      <a:r>
+                        <a:rPr sz="1100" b="0" i="0">
+                          <a:solidFill>
+                            <a:srgbClr val="2B2B2B"/>
+                          </a:solidFill>
+                          <a:latin typeface="Calibri"/>
+                        </a:rPr>
+                        <a:t>Mapa de entidades + pitch de 60 segundos</a:t>
+                      </a:r>
+                    </a:p>
+                  </a:txBody>
+                  <a:tcPr anchor="ctr" marL="109728" marR="91440" marT="36576" marB="36576">
+                    <a:solidFill>
+                      <a:srgbClr val="FFFFFF"/>
+                    </a:solidFill>
+                  </a:tcPr>
+                </a:tc>
+              </a:tr>
+            </a:tbl>
+          </a:graphicData>
+        </a:graphic>
+      </p:graphicFrame>
+      <p:sp>
+        <p:nvSpPr>
+          <p:cNvPr id="5" name="TextBox 4"/>
           <p:cNvSpPr txBox="1"/>
           <p:nvPr/>
         </p:nvSpPr>
         <p:spPr>
           <a:xfrm>
-            <a:off x="640080" y="1691639"/>
-            <a:ext cx="10911535" cy="4617720"/>
+            <a:off x="640080" y="5852160"/>
+            <a:ext cx="10911535" cy="548640"/>
           </a:xfrm>
           <a:prstGeom prst="rect">
             <a:avLst/>
@@ -5882,112 +13226,39 @@
           </a:bodyPr>
           <a:lstStyle/>
           <a:p>
-            <a:pPr>
-              <a:spcAft>
-                <a:spcPts val="1000"/>
-              </a:spcAft>
-            </a:pPr>
-            <a:r>
-              <a:rPr sz="1600" b="0" i="0">
-                <a:solidFill>
-                  <a:srgbClr val="2B2B2B"/>
-                </a:solidFill>
-                <a:latin typeface="Calibri"/>
-              </a:rPr>
-              <a:t>–   </a:t>
-            </a:r>
-            <a:r>
-              <a:rPr sz="1600" b="1" i="0">
-                <a:solidFill>
-                  <a:srgbClr val="2B2B2B"/>
-                </a:solidFill>
-                <a:latin typeface="Calibri"/>
-              </a:rPr>
-              <a:t>Lectura autónoma:</a:t>
-            </a:r>
-            <a:r>
-              <a:rPr sz="1600" b="0" i="0">
-                <a:solidFill>
-                  <a:srgbClr val="2B2B2B"/>
-                </a:solidFill>
-                <a:latin typeface="Calibri"/>
-              </a:rPr>
-              <a:t> U1–U2 (Propuesta de Innovación · creatividad e inteligencia emocional) — la retomamos al abrir la Sesión 02.</a:t>
-            </a:r>
-          </a:p>
-          <a:p>
-            <a:pPr>
-              <a:spcAft>
-                <a:spcPts val="1000"/>
-              </a:spcAft>
-            </a:pPr>
-            <a:r>
-              <a:rPr sz="1600" b="0" i="0">
-                <a:solidFill>
-                  <a:srgbClr val="2B2B2B"/>
-                </a:solidFill>
-                <a:latin typeface="Calibri"/>
-              </a:rPr>
-              <a:t>–   Revisar la </a:t>
-            </a:r>
-            <a:r>
-              <a:rPr sz="1600" b="1" i="0">
-                <a:solidFill>
-                  <a:srgbClr val="2B2B2B"/>
-                </a:solidFill>
-                <a:latin typeface="Calibri"/>
-              </a:rPr>
-              <a:t>Presentación del Curso</a:t>
-            </a:r>
-            <a:r>
-              <a:rPr sz="1600" b="0" i="0">
-                <a:solidFill>
-                  <a:srgbClr val="2B2B2B"/>
-                </a:solidFill>
-                <a:latin typeface="Calibri"/>
-              </a:rPr>
-              <a:t> completa (fechas, evaluación, contenido de todas las sesiones).</a:t>
-            </a:r>
-          </a:p>
-          <a:p>
-            <a:pPr>
-              <a:spcAft>
-                <a:spcPts val="1000"/>
-              </a:spcAft>
-            </a:pPr>
-            <a:r>
-              <a:rPr sz="1600" b="0" i="0">
-                <a:solidFill>
-                  <a:srgbClr val="2B2B2B"/>
-                </a:solidFill>
-                <a:latin typeface="Calibri"/>
-              </a:rPr>
-              <a:t>–   Abrir el enunciado de la </a:t>
-            </a:r>
-            <a:r>
-              <a:rPr sz="1600" b="1" i="0">
-                <a:solidFill>
-                  <a:srgbClr val="2B2B2B"/>
-                </a:solidFill>
-                <a:latin typeface="Calibri"/>
-              </a:rPr>
-              <a:t>ACA 1</a:t>
-            </a:r>
-            <a:r>
-              <a:rPr sz="1600" b="0" i="0">
-                <a:solidFill>
-                  <a:srgbClr val="2B2B2B"/>
-                </a:solidFill>
-                <a:latin typeface="Calibri"/>
-              </a:rPr>
-              <a:t> en `Clases/Recursos/ACAs/` y leerlo entero.</a:t>
-            </a:r>
-          </a:p>
-        </p:txBody>
-      </p:sp>
-      <p:sp>
-        <p:nvSpPr>
-          <p:cNvPr id="5" name="TextBox 4"/>
+            <a:r>
+              <a:rPr sz="1200" b="0" i="1">
+                <a:solidFill>
+                  <a:srgbClr val="2B2B2B"/>
+                </a:solidFill>
+                <a:latin typeface="Calibri"/>
+              </a:rPr>
+              <a:t>Ocho unidades del Syllabus en siete encuentros: </a:t>
+            </a:r>
+            <a:r>
+              <a:rPr sz="1200" b="1" i="1">
+                <a:solidFill>
+                  <a:srgbClr val="2B2B2B"/>
+                </a:solidFill>
+                <a:latin typeface="Calibri"/>
+              </a:rPr>
+              <a:t>U1–U2 se leen de forma autónoma</a:t>
+            </a:r>
+            <a:r>
+              <a:rPr sz="1200" b="0" i="1">
+                <a:solidFill>
+                  <a:srgbClr val="2B2B2B"/>
+                </a:solidFill>
+                <a:latin typeface="Calibri"/>
+              </a:rPr>
+              <a:t> y las retomamos al abrir la Sesión 02.</a:t>
+            </a:r>
+          </a:p>
+        </p:txBody>
+      </p:sp>
+      <p:sp>
+        <p:nvSpPr>
+          <p:cNvPr id="6" name="TextBox 5"/>
           <p:cNvSpPr txBox="1"/>
           <p:nvPr/>
         </p:nvSpPr>
@@ -6022,7 +13293,7 @@
       </p:sp>
       <p:sp>
         <p:nvSpPr>
-          <p:cNvPr id="6" name="TextBox 5"/>
+          <p:cNvPr id="7" name="TextBox 6"/>
           <p:cNvSpPr txBox="1"/>
           <p:nvPr/>
         </p:nvSpPr>
@@ -6090,13 +13361,13 @@
         <p:spPr>
           <a:xfrm>
             <a:off x="0" y="0"/>
-            <a:ext cx="12191695" cy="164592"/>
+            <a:ext cx="12191695" cy="1188720"/>
           </a:xfrm>
           <a:prstGeom prst="rect">
             <a:avLst/>
           </a:prstGeom>
           <a:solidFill>
-            <a:srgbClr val="007433"/>
+            <a:srgbClr val="0C2340"/>
           </a:solidFill>
           <a:ln>
             <a:noFill/>
@@ -6125,40 +13396,16 @@
           </a:p>
         </p:txBody>
       </p:sp>
-      <p:pic>
-        <p:nvPicPr>
-          <p:cNvPr id="3" name="Picture 2" descr="logo_cun_solo.png"/>
-          <p:cNvPicPr>
-            <a:picLocks noChangeAspect="1"/>
-          </p:cNvPicPr>
-          <p:nvPr/>
-        </p:nvPicPr>
-        <p:blipFill>
-          <a:blip r:embed="rId2"/>
-          <a:stretch>
-            <a:fillRect/>
-          </a:stretch>
-        </p:blipFill>
-        <p:spPr>
-          <a:xfrm>
-            <a:off x="10362895" y="5632704"/>
-            <a:ext cx="1371600" cy="950976"/>
-          </a:xfrm>
-          <a:prstGeom prst="rect">
-            <a:avLst/>
-          </a:prstGeom>
-        </p:spPr>
-      </p:pic>
-      <p:sp>
-        <p:nvSpPr>
-          <p:cNvPr id="4" name="TextBox 3"/>
+      <p:sp>
+        <p:nvSpPr>
+          <p:cNvPr id="3" name="TextBox 2"/>
           <p:cNvSpPr txBox="1"/>
           <p:nvPr/>
         </p:nvSpPr>
         <p:spPr>
           <a:xfrm>
-            <a:off x="640080" y="1737360"/>
-            <a:ext cx="10911535" cy="1097280"/>
+            <a:off x="640080" y="0"/>
+            <a:ext cx="9082735" cy="1188720"/>
           </a:xfrm>
           <a:prstGeom prst="rect">
             <a:avLst/>
@@ -6173,27 +13420,27 @@
           <a:p>
             <a:pPr algn="ctr"/>
             <a:r>
-              <a:rPr sz="3400" b="1" i="0">
-                <a:solidFill>
-                  <a:srgbClr val="0C2340"/>
-                </a:solidFill>
-                <a:latin typeface="Calibri"/>
-              </a:rPr>
-              <a:t>Cierre — Sesión 01</a:t>
-            </a:r>
-          </a:p>
-        </p:txBody>
-      </p:sp>
-      <p:sp>
-        <p:nvSpPr>
-          <p:cNvPr id="5" name="TextBox 4"/>
+              <a:rPr sz="2600" b="1" i="0">
+                <a:solidFill>
+                  <a:srgbClr val="FFFFFF"/>
+                </a:solidFill>
+                <a:latin typeface="Calibri"/>
+              </a:rPr>
+              <a:t>Qué se llevan al final: la Propuesta de Innovación</a:t>
+            </a:r>
+          </a:p>
+        </p:txBody>
+      </p:sp>
+      <p:sp>
+        <p:nvSpPr>
+          <p:cNvPr id="4" name="TextBox 3"/>
           <p:cNvSpPr txBox="1"/>
           <p:nvPr/>
         </p:nvSpPr>
         <p:spPr>
           <a:xfrm>
-            <a:off x="640080" y="3017520"/>
-            <a:ext cx="10911535" cy="1645920"/>
+            <a:off x="640080" y="1691639"/>
+            <a:ext cx="10911535" cy="4617720"/>
           </a:xfrm>
           <a:prstGeom prst="rect">
             <a:avLst/>
@@ -6206,58 +13453,307 @@
           </a:bodyPr>
           <a:lstStyle/>
           <a:p>
-            <a:pPr algn="ctr">
+            <a:pPr>
+              <a:spcAft>
+                <a:spcPts val="1000"/>
+              </a:spcAft>
+            </a:pPr>
+            <a:r>
+              <a:rPr sz="1600" b="0" i="0">
+                <a:solidFill>
+                  <a:srgbClr val="2B2B2B"/>
+                </a:solidFill>
+                <a:latin typeface="Calibri"/>
+              </a:rPr>
+              <a:t>–   Este curso tiene </a:t>
+            </a:r>
+            <a:r>
+              <a:rPr sz="1600" b="1" i="0">
+                <a:solidFill>
+                  <a:srgbClr val="2B2B2B"/>
+                </a:solidFill>
+                <a:latin typeface="Calibri"/>
+              </a:rPr>
+              <a:t>un solo producto</a:t>
+            </a:r>
+            <a:r>
+              <a:rPr sz="1600" b="0" i="0">
+                <a:solidFill>
+                  <a:srgbClr val="2B2B2B"/>
+                </a:solidFill>
+                <a:latin typeface="Calibri"/>
+              </a:rPr>
+              <a:t>: una </a:t>
+            </a:r>
+            <a:r>
+              <a:rPr sz="1600" b="1" i="0">
+                <a:solidFill>
+                  <a:srgbClr val="2B2B2B"/>
+                </a:solidFill>
+                <a:latin typeface="Calibri"/>
+              </a:rPr>
+              <a:t>Propuesta de Innovación</a:t>
+            </a:r>
+            <a:r>
+              <a:rPr sz="1600" b="0" i="0">
+                <a:solidFill>
+                  <a:srgbClr val="2B2B2B"/>
+                </a:solidFill>
+                <a:latin typeface="Calibri"/>
+              </a:rPr>
+              <a:t> escrita, construida por partes desde hoy.</a:t>
+            </a:r>
+          </a:p>
+          <a:p>
+            <a:pPr>
+              <a:spcAft>
+                <a:spcPts val="1000"/>
+              </a:spcAft>
+            </a:pPr>
+            <a:r>
+              <a:rPr sz="1600" b="0" i="0">
+                <a:solidFill>
+                  <a:srgbClr val="2B2B2B"/>
+                </a:solidFill>
+                <a:latin typeface="Calibri"/>
+              </a:rPr>
+              <a:t>–   No es un ensayo *sobre* innovación: es </a:t>
+            </a:r>
+            <a:r>
+              <a:rPr sz="1600" b="1" i="0">
+                <a:solidFill>
+                  <a:srgbClr val="2B2B2B"/>
+                </a:solidFill>
+                <a:latin typeface="Calibri"/>
+              </a:rPr>
+              <a:t>su</a:t>
+            </a:r>
+            <a:r>
+              <a:rPr sz="1600" b="0" i="0">
+                <a:solidFill>
+                  <a:srgbClr val="2B2B2B"/>
+                </a:solidFill>
+                <a:latin typeface="Calibri"/>
+              </a:rPr>
+              <a:t> propuesta, sobre un problema real, con un usuario concreto.</a:t>
+            </a:r>
+          </a:p>
+          <a:p>
+            <a:pPr>
+              <a:spcAft>
+                <a:spcPts val="1000"/>
+              </a:spcAft>
+            </a:pPr>
+            <a:r>
+              <a:rPr sz="1600" b="0" i="0">
+                <a:solidFill>
+                  <a:srgbClr val="2B2B2B"/>
+                </a:solidFill>
+                <a:latin typeface="Calibri"/>
+              </a:rPr>
+              <a:t>–   El documento final responde, en este orden: </a:t>
+            </a:r>
+            <a:r>
+              <a:rPr sz="1600" b="1" i="0">
+                <a:solidFill>
+                  <a:srgbClr val="2B2B2B"/>
+                </a:solidFill>
+                <a:latin typeface="Calibri"/>
+              </a:rPr>
+              <a:t>problema → usuario → propuesta de valor → tipo de innovación → validación → vigilancia → siguiente paso</a:t>
+            </a:r>
+            <a:r>
+              <a:rPr sz="1600" b="0" i="0">
+                <a:solidFill>
+                  <a:srgbClr val="2B2B2B"/>
+                </a:solidFill>
+                <a:latin typeface="Calibri"/>
+              </a:rPr>
+              <a:t>.</a:t>
+            </a:r>
+          </a:p>
+          <a:p>
+            <a:pPr lvl="1">
               <a:spcAft>
                 <a:spcPts val="600"/>
               </a:spcAft>
             </a:pPr>
             <a:r>
+              <a:rPr sz="1500" b="0" i="0">
+                <a:solidFill>
+                  <a:srgbClr val="2B2B2B"/>
+                </a:solidFill>
+                <a:latin typeface="Calibri"/>
+              </a:rPr>
+              <a:t>●   Extensión orientativa: </a:t>
+            </a:r>
+            <a:r>
+              <a:rPr sz="1500" b="1" i="0">
+                <a:solidFill>
+                  <a:srgbClr val="2B2B2B"/>
+                </a:solidFill>
+                <a:latin typeface="Calibri"/>
+              </a:rPr>
+              <a:t>8–12 páginas</a:t>
+            </a:r>
+            <a:r>
+              <a:rPr sz="1500" b="0" i="0">
+                <a:solidFill>
+                  <a:srgbClr val="2B2B2B"/>
+                </a:solidFill>
+                <a:latin typeface="Calibri"/>
+              </a:rPr>
+              <a:t> más un </a:t>
+            </a:r>
+            <a:r>
+              <a:rPr sz="1500" b="1" i="0">
+                <a:solidFill>
+                  <a:srgbClr val="2B2B2B"/>
+                </a:solidFill>
+                <a:latin typeface="Calibri"/>
+              </a:rPr>
+              <a:t>pitch de una página</a:t>
+            </a:r>
+            <a:r>
+              <a:rPr sz="1500" b="0" i="0">
+                <a:solidFill>
+                  <a:srgbClr val="2B2B2B"/>
+                </a:solidFill>
+                <a:latin typeface="Calibri"/>
+              </a:rPr>
+              <a:t>.</a:t>
+            </a:r>
+          </a:p>
+          <a:p>
+            <a:pPr>
+              <a:spcAft>
+                <a:spcPts val="1000"/>
+              </a:spcAft>
+            </a:pPr>
+            <a:r>
               <a:rPr sz="1600" b="0" i="0">
                 <a:solidFill>
                   <a:srgbClr val="2B2B2B"/>
                 </a:solidFill>
                 <a:latin typeface="Calibri"/>
               </a:rPr>
-              <a:t>Ya sabemos qué haremos, cómo se evalúa y quién es quién.</a:t>
-            </a:r>
-          </a:p>
-          <a:p>
-            <a:pPr algn="ctr">
+              <a:t>–   Para qué le sirve cuando el curso termine:</a:t>
+            </a:r>
+          </a:p>
+          <a:p>
+            <a:pPr lvl="1">
               <a:spcAft>
                 <a:spcPts val="600"/>
               </a:spcAft>
             </a:pPr>
             <a:r>
-              <a:rPr sz="1600" b="1" i="0">
-                <a:solidFill>
-                  <a:srgbClr val="2B2B2B"/>
-                </a:solidFill>
-                <a:latin typeface="Calibri"/>
-              </a:rPr>
-              <a:t>Sesión 02:</a:t>
-            </a:r>
-            <a:r>
-              <a:rPr sz="1600" b="0" i="0">
-                <a:solidFill>
-                  <a:srgbClr val="2B2B2B"/>
-                </a:solidFill>
-                <a:latin typeface="Calibri"/>
-              </a:rPr>
-              <a:t> arranca el contenido del curso.</a:t>
-            </a:r>
-          </a:p>
-        </p:txBody>
-      </p:sp>
-      <p:sp>
-        <p:nvSpPr>
-          <p:cNvPr id="6" name="TextBox 5"/>
+              <a:rPr sz="1500" b="0" i="0">
+                <a:solidFill>
+                  <a:srgbClr val="2B2B2B"/>
+                </a:solidFill>
+                <a:latin typeface="Calibri"/>
+              </a:rPr>
+              <a:t>●   Es la base de una </a:t>
+            </a:r>
+            <a:r>
+              <a:rPr sz="1500" b="1" i="0">
+                <a:solidFill>
+                  <a:srgbClr val="2B2B2B"/>
+                </a:solidFill>
+                <a:latin typeface="Calibri"/>
+              </a:rPr>
+              <a:t>idea de emprendimiento</a:t>
+            </a:r>
+            <a:r>
+              <a:rPr sz="1500" b="0" i="0">
+                <a:solidFill>
+                  <a:srgbClr val="2B2B2B"/>
+                </a:solidFill>
+                <a:latin typeface="Calibri"/>
+              </a:rPr>
+              <a:t> o de un proyecto de mejora dentro de la empresa donde trabaja.</a:t>
+            </a:r>
+          </a:p>
+          <a:p>
+            <a:pPr lvl="1">
+              <a:spcAft>
+                <a:spcPts val="600"/>
+              </a:spcAft>
+            </a:pPr>
+            <a:r>
+              <a:rPr sz="1500" b="0" i="0">
+                <a:solidFill>
+                  <a:srgbClr val="2B2B2B"/>
+                </a:solidFill>
+                <a:latin typeface="Calibri"/>
+              </a:rPr>
+              <a:t>●   Es material real para una </a:t>
+            </a:r>
+            <a:r>
+              <a:rPr sz="1500" b="1" i="0">
+                <a:solidFill>
+                  <a:srgbClr val="2B2B2B"/>
+                </a:solidFill>
+                <a:latin typeface="Calibri"/>
+              </a:rPr>
+              <a:t>entrevista de trabajo</a:t>
+            </a:r>
+            <a:r>
+              <a:rPr sz="1500" b="0" i="0">
+                <a:solidFill>
+                  <a:srgbClr val="2B2B2B"/>
+                </a:solidFill>
+                <a:latin typeface="Calibri"/>
+              </a:rPr>
+              <a:t>: muestra criterio, no solo herramientas.</a:t>
+            </a:r>
+          </a:p>
+          <a:p>
+            <a:pPr lvl="1">
+              <a:spcAft>
+                <a:spcPts val="600"/>
+              </a:spcAft>
+            </a:pPr>
+            <a:r>
+              <a:rPr sz="1500" b="0" i="0">
+                <a:solidFill>
+                  <a:srgbClr val="2B2B2B"/>
+                </a:solidFill>
+                <a:latin typeface="Calibri"/>
+              </a:rPr>
+              <a:t>●   Puede ser la semilla de su </a:t>
+            </a:r>
+            <a:r>
+              <a:rPr sz="1500" b="1" i="0">
+                <a:solidFill>
+                  <a:srgbClr val="2B2B2B"/>
+                </a:solidFill>
+                <a:latin typeface="Calibri"/>
+              </a:rPr>
+              <a:t>opción de grado</a:t>
+            </a:r>
+            <a:r>
+              <a:rPr sz="1500" b="0" i="0">
+                <a:solidFill>
+                  <a:srgbClr val="2B2B2B"/>
+                </a:solidFill>
+                <a:latin typeface="Calibri"/>
+              </a:rPr>
+              <a:t> o de una postulación a una convocatoria de apoyo.</a:t>
+            </a:r>
+          </a:p>
+        </p:txBody>
+      </p:sp>
+      <p:sp>
+        <p:nvSpPr>
+          <p:cNvPr id="5" name="TextBox 4"/>
           <p:cNvSpPr txBox="1"/>
           <p:nvPr/>
         </p:nvSpPr>
         <p:spPr>
           <a:xfrm>
-            <a:off x="640080" y="4754880"/>
-            <a:ext cx="10911535" cy="640080"/>
+            <a:off x="2194560" y="6446520"/>
+            <a:ext cx="5943600" cy="274320"/>
           </a:xfrm>
           <a:prstGeom prst="rect">
             <a:avLst/>
@@ -6270,29 +13766,29 @@
           </a:bodyPr>
           <a:lstStyle/>
           <a:p>
-            <a:pPr algn="ctr"/>
-            <a:r>
-              <a:rPr sz="2000" b="1" i="0">
-                <a:solidFill>
-                  <a:srgbClr val="007433"/>
-                </a:solidFill>
-                <a:latin typeface="Calibri"/>
-              </a:rPr>
-              <a:t>CREATIVIDAD Y PENSAMIENTO INNOVADOR</a:t>
-            </a:r>
-          </a:p>
-        </p:txBody>
-      </p:sp>
-      <p:sp>
-        <p:nvSpPr>
-          <p:cNvPr id="7" name="TextBox 6"/>
+            <a:pPr algn="l"/>
+            <a:r>
+              <a:rPr sz="1000" b="1" i="0">
+                <a:solidFill>
+                  <a:srgbClr val="8F989D"/>
+                </a:solidFill>
+                <a:latin typeface="Calibri"/>
+              </a:rPr>
+              <a:t>Inicio 5:10 pm</a:t>
+            </a:r>
+          </a:p>
+        </p:txBody>
+      </p:sp>
+      <p:sp>
+        <p:nvSpPr>
+          <p:cNvPr id="6" name="TextBox 5"/>
           <p:cNvSpPr txBox="1"/>
           <p:nvPr/>
         </p:nvSpPr>
         <p:spPr>
           <a:xfrm>
-            <a:off x="2194560" y="6446520"/>
-            <a:ext cx="5943600" cy="274320"/>
+            <a:off x="11094415" y="6446520"/>
+            <a:ext cx="548640" cy="274320"/>
           </a:xfrm>
           <a:prstGeom prst="rect">
             <a:avLst/>
@@ -6305,6 +13801,678 @@
           </a:bodyPr>
           <a:lstStyle/>
           <a:p>
+            <a:pPr algn="r"/>
+            <a:r>
+              <a:rPr sz="1000" b="1" i="0">
+                <a:solidFill>
+                  <a:srgbClr val="8F989D"/>
+                </a:solidFill>
+                <a:latin typeface="Calibri"/>
+              </a:rPr>
+              <a:t>8</a:t>
+            </a:r>
+          </a:p>
+        </p:txBody>
+      </p:sp>
+      <p:sp>
+        <p:nvSpPr>
+          <p:cNvPr id="7" name="TextBox 6"/>
+          <p:cNvSpPr txBox="1"/>
+          <p:nvPr/>
+        </p:nvSpPr>
+        <p:spPr>
+          <a:xfrm>
+            <a:off x="640080" y="5943600"/>
+            <a:ext cx="9997135" cy="457200"/>
+          </a:xfrm>
+          <a:prstGeom prst="rect">
+            <a:avLst/>
+          </a:prstGeom>
+          <a:noFill/>
+        </p:spPr>
+        <p:txBody>
+          <a:bodyPr wrap="square" anchor="t" lIns="0" rIns="0" tIns="0" bIns="0">
+            <a:spAutoFit/>
+          </a:bodyPr>
+          <a:lstStyle/>
+          <a:p>
+            <a:r>
+              <a:rPr sz="1200" b="0" i="1">
+                <a:solidFill>
+                  <a:srgbClr val="2B2B2B"/>
+                </a:solidFill>
+                <a:latin typeface="Calibri"/>
+              </a:rPr>
+              <a:t>Si al terminar solo tiene un archivo para la nota, desperdició el semestre.</a:t>
+            </a:r>
+          </a:p>
+        </p:txBody>
+      </p:sp>
+    </p:spTree>
+  </p:cSld>
+  <p:clrMapOvr>
+    <a:masterClrMapping/>
+  </p:clrMapOvr>
+</p:sld>
+</file>
+
+<file path=ppt/slides/slide9.xml><?xml version="1.0" encoding="utf-8"?>
+<p:sld xmlns:a="http://schemas.openxmlformats.org/drawingml/2006/main" xmlns:p="http://schemas.openxmlformats.org/presentationml/2006/main" xmlns:r="http://schemas.openxmlformats.org/officeDocument/2006/relationships">
+  <p:cSld>
+    <p:bg>
+      <p:bgPr>
+        <a:solidFill>
+          <a:srgbClr val="FFFFFF"/>
+        </a:solidFill>
+        <a:effectLst/>
+      </p:bgPr>
+    </p:bg>
+    <p:spTree>
+      <p:nvGrpSpPr>
+        <p:cNvPr id="1" name=""/>
+        <p:cNvGrpSpPr/>
+        <p:nvPr/>
+      </p:nvGrpSpPr>
+      <p:grpSpPr/>
+      <p:sp>
+        <p:nvSpPr>
+          <p:cNvPr id="2" name="Rectangle 1"/>
+          <p:cNvSpPr/>
+          <p:nvPr/>
+        </p:nvSpPr>
+        <p:spPr>
+          <a:xfrm>
+            <a:off x="0" y="0"/>
+            <a:ext cx="12191695" cy="1188720"/>
+          </a:xfrm>
+          <a:prstGeom prst="rect">
+            <a:avLst/>
+          </a:prstGeom>
+          <a:solidFill>
+            <a:srgbClr val="0C2340"/>
+          </a:solidFill>
+          <a:ln>
+            <a:noFill/>
+          </a:ln>
+          <a:effectLst/>
+        </p:spPr>
+        <p:style>
+          <a:lnRef idx="1">
+            <a:schemeClr val="accent1"/>
+          </a:lnRef>
+          <a:fillRef idx="3">
+            <a:schemeClr val="accent1"/>
+          </a:fillRef>
+          <a:effectRef idx="2">
+            <a:schemeClr val="accent1"/>
+          </a:effectRef>
+          <a:fontRef idx="minor">
+            <a:schemeClr val="lt1"/>
+          </a:fontRef>
+        </p:style>
+        <p:txBody>
+          <a:bodyPr rtlCol="0" anchor="ctr"/>
+          <a:lstStyle/>
+          <a:p>
+            <a:pPr algn="ctr"/>
+          </a:p>
+        </p:txBody>
+      </p:sp>
+      <p:sp>
+        <p:nvSpPr>
+          <p:cNvPr id="3" name="TextBox 2"/>
+          <p:cNvSpPr txBox="1"/>
+          <p:nvPr/>
+        </p:nvSpPr>
+        <p:spPr>
+          <a:xfrm>
+            <a:off x="640080" y="0"/>
+            <a:ext cx="9082735" cy="1188720"/>
+          </a:xfrm>
+          <a:prstGeom prst="rect">
+            <a:avLst/>
+          </a:prstGeom>
+          <a:noFill/>
+        </p:spPr>
+        <p:txBody>
+          <a:bodyPr wrap="square" anchor="ctr" lIns="0" rIns="0" tIns="0" bIns="0">
+            <a:spAutoFit/>
+          </a:bodyPr>
+          <a:lstStyle/>
+          <a:p>
+            <a:pPr algn="ctr"/>
+            <a:r>
+              <a:rPr sz="2600" b="1" i="0">
+                <a:solidFill>
+                  <a:srgbClr val="FFFFFF"/>
+                </a:solidFill>
+                <a:latin typeface="Calibri"/>
+              </a:rPr>
+              <a:t>Las tres ACAs: qué se entrega en cada corte</a:t>
+            </a:r>
+          </a:p>
+        </p:txBody>
+      </p:sp>
+      <p:graphicFrame>
+        <p:nvGraphicFramePr>
+          <p:cNvPr id="4" name="Table 3"/>
+          <p:cNvGraphicFramePr>
+            <a:graphicFrameLocks noGrp="1"/>
+          </p:cNvGraphicFramePr>
+          <p:nvPr/>
+        </p:nvGraphicFramePr>
+        <p:xfrm>
+          <a:off x="640080" y="1691639"/>
+          <a:ext cx="10911534" cy="2011680"/>
+        </p:xfrm>
+        <a:graphic>
+          <a:graphicData uri="http://schemas.openxmlformats.org/drawingml/2006/table">
+            <a:tbl>
+              <a:tblPr>
+                <a:tableStyleId>{2D5ABB26-0587-4C30-8999-92F81FD0307C}</a:tableStyleId>
+              </a:tblPr>
+              <a:tblGrid>
+                <a:gridCol w="1375403"/>
+                <a:gridCol w="5501614"/>
+                <a:gridCol w="4034517"/>
+              </a:tblGrid>
+              <a:tr h="502920">
+                <a:tc>
+                  <a:txBody>
+                    <a:bodyPr/>
+                    <a:lstStyle/>
+                    <a:p>
+                      <a:pPr algn="l"/>
+                      <a:r>
+                        <a:rPr sz="1300" b="1" i="0">
+                          <a:solidFill>
+                            <a:srgbClr val="FFFFFF"/>
+                          </a:solidFill>
+                          <a:latin typeface="Calibri"/>
+                        </a:rPr>
+                        <a:t>ACA</a:t>
+                      </a:r>
+                    </a:p>
+                  </a:txBody>
+                  <a:tcPr anchor="ctr" marL="109728" marR="91440" marT="36576" marB="36576">
+                    <a:solidFill>
+                      <a:srgbClr val="0C2340"/>
+                    </a:solidFill>
+                  </a:tcPr>
+                </a:tc>
+                <a:tc>
+                  <a:txBody>
+                    <a:bodyPr/>
+                    <a:lstStyle/>
+                    <a:p>
+                      <a:pPr algn="l"/>
+                      <a:r>
+                        <a:rPr sz="1300" b="1" i="0">
+                          <a:solidFill>
+                            <a:srgbClr val="FFFFFF"/>
+                          </a:solidFill>
+                          <a:latin typeface="Calibri"/>
+                        </a:rPr>
+                        <a:t>Qué entrega exactamente</a:t>
+                      </a:r>
+                    </a:p>
+                  </a:txBody>
+                  <a:tcPr anchor="ctr" marL="109728" marR="91440" marT="36576" marB="36576">
+                    <a:solidFill>
+                      <a:srgbClr val="0C2340"/>
+                    </a:solidFill>
+                  </a:tcPr>
+                </a:tc>
+                <a:tc>
+                  <a:txBody>
+                    <a:bodyPr/>
+                    <a:lstStyle/>
+                    <a:p>
+                      <a:pPr algn="l"/>
+                      <a:r>
+                        <a:rPr sz="1300" b="1" i="0">
+                          <a:solidFill>
+                            <a:srgbClr val="FFFFFF"/>
+                          </a:solidFill>
+                          <a:latin typeface="Calibri"/>
+                        </a:rPr>
+                        <a:t>Qué se evalúa ahí</a:t>
+                      </a:r>
+                    </a:p>
+                  </a:txBody>
+                  <a:tcPr anchor="ctr" marL="109728" marR="91440" marT="36576" marB="36576">
+                    <a:solidFill>
+                      <a:srgbClr val="0C2340"/>
+                    </a:solidFill>
+                  </a:tcPr>
+                </a:tc>
+              </a:tr>
+              <a:tr h="502920">
+                <a:tc>
+                  <a:txBody>
+                    <a:bodyPr/>
+                    <a:lstStyle/>
+                    <a:p>
+                      <a:pPr algn="l"/>
+                      <a:r>
+                        <a:rPr sz="1100" b="1" i="0">
+                          <a:solidFill>
+                            <a:srgbClr val="2B2B2B"/>
+                          </a:solidFill>
+                          <a:latin typeface="Calibri"/>
+                        </a:rPr>
+                        <a:t>ACA 1</a:t>
+                      </a:r>
+                      <a:r>
+                        <a:rPr sz="1100" b="0" i="0">
+                          <a:solidFill>
+                            <a:srgbClr val="2B2B2B"/>
+                          </a:solidFill>
+                          <a:latin typeface="Calibri"/>
+                        </a:rPr>
+                        <a:t> · Corte 1</a:t>
+                      </a:r>
+                    </a:p>
+                  </a:txBody>
+                  <a:tcPr anchor="ctr" marL="109728" marR="91440" marT="36576" marB="36576">
+                    <a:solidFill>
+                      <a:srgbClr val="FFFFFF"/>
+                    </a:solidFill>
+                  </a:tcPr>
+                </a:tc>
+                <a:tc>
+                  <a:txBody>
+                    <a:bodyPr/>
+                    <a:lstStyle/>
+                    <a:p>
+                      <a:pPr algn="l"/>
+                      <a:r>
+                        <a:rPr sz="1100" b="0" i="0">
+                          <a:solidFill>
+                            <a:srgbClr val="2B2B2B"/>
+                          </a:solidFill>
+                          <a:latin typeface="Calibri"/>
+                        </a:rPr>
+                        <a:t>Ficha problema–oportunidad + mapa de bloqueadores y ensanchadores + síntesis de ideación (3–6 págs.).</a:t>
+                      </a:r>
+                    </a:p>
+                  </a:txBody>
+                  <a:tcPr anchor="ctr" marL="109728" marR="91440" marT="36576" marB="36576">
+                    <a:solidFill>
+                      <a:srgbClr val="FFFFFF"/>
+                    </a:solidFill>
+                  </a:tcPr>
+                </a:tc>
+                <a:tc>
+                  <a:txBody>
+                    <a:bodyPr/>
+                    <a:lstStyle/>
+                    <a:p>
+                      <a:pPr algn="l"/>
+                      <a:r>
+                        <a:rPr sz="1100" b="0" i="0">
+                          <a:solidFill>
+                            <a:srgbClr val="2B2B2B"/>
+                          </a:solidFill>
+                          <a:latin typeface="Calibri"/>
+                        </a:rPr>
+                        <a:t>Que el problema sea </a:t>
+                      </a:r>
+                      <a:r>
+                        <a:rPr sz="1100" b="1" i="0">
+                          <a:solidFill>
+                            <a:srgbClr val="2B2B2B"/>
+                          </a:solidFill>
+                          <a:latin typeface="Calibri"/>
+                        </a:rPr>
+                        <a:t>real, observable y de alguien concreto</a:t>
+                      </a:r>
+                      <a:r>
+                        <a:rPr sz="1100" b="0" i="0">
+                          <a:solidFill>
+                            <a:srgbClr val="2B2B2B"/>
+                          </a:solidFill>
+                          <a:latin typeface="Calibri"/>
+                        </a:rPr>
+                        <a:t>.</a:t>
+                      </a:r>
+                    </a:p>
+                  </a:txBody>
+                  <a:tcPr anchor="ctr" marL="109728" marR="91440" marT="36576" marB="36576">
+                    <a:solidFill>
+                      <a:srgbClr val="FFFFFF"/>
+                    </a:solidFill>
+                  </a:tcPr>
+                </a:tc>
+              </a:tr>
+              <a:tr h="502920">
+                <a:tc>
+                  <a:txBody>
+                    <a:bodyPr/>
+                    <a:lstStyle/>
+                    <a:p>
+                      <a:pPr algn="l"/>
+                      <a:r>
+                        <a:rPr sz="1100" b="1" i="0">
+                          <a:solidFill>
+                            <a:srgbClr val="2B2B2B"/>
+                          </a:solidFill>
+                          <a:latin typeface="Calibri"/>
+                        </a:rPr>
+                        <a:t>ACA 2</a:t>
+                      </a:r>
+                      <a:r>
+                        <a:rPr sz="1100" b="0" i="0">
+                          <a:solidFill>
+                            <a:srgbClr val="2B2B2B"/>
+                          </a:solidFill>
+                          <a:latin typeface="Calibri"/>
+                        </a:rPr>
+                        <a:t> · Corte 2</a:t>
+                      </a:r>
+                    </a:p>
+                  </a:txBody>
+                  <a:tcPr anchor="ctr" marL="109728" marR="91440" marT="36576" marB="36576">
+                    <a:solidFill>
+                      <a:srgbClr val="F2F2F2"/>
+                    </a:solidFill>
+                  </a:tcPr>
+                </a:tc>
+                <a:tc>
+                  <a:txBody>
+                    <a:bodyPr/>
+                    <a:lstStyle/>
+                    <a:p>
+                      <a:pPr algn="l"/>
+                      <a:r>
+                        <a:rPr sz="1100" b="0" i="0">
+                          <a:solidFill>
+                            <a:srgbClr val="2B2B2B"/>
+                          </a:solidFill>
+                          <a:latin typeface="Calibri"/>
+                        </a:rPr>
+                        <a:t>Propuesta tipificada + cuadro comparativo + </a:t>
+                      </a:r>
+                      <a:r>
+                        <a:rPr sz="1100" b="1" i="0">
+                          <a:solidFill>
+                            <a:srgbClr val="2B2B2B"/>
+                          </a:solidFill>
+                          <a:latin typeface="Calibri"/>
+                        </a:rPr>
+                        <a:t>FODA</a:t>
+                      </a:r>
+                      <a:r>
+                        <a:rPr sz="1100" b="0" i="0">
+                          <a:solidFill>
+                            <a:srgbClr val="2B2B2B"/>
+                          </a:solidFill>
+                          <a:latin typeface="Calibri"/>
+                        </a:rPr>
+                        <a:t>, </a:t>
+                      </a:r>
+                      <a:r>
+                        <a:rPr sz="1100" b="1" i="0">
+                          <a:solidFill>
+                            <a:srgbClr val="2B2B2B"/>
+                          </a:solidFill>
+                          <a:latin typeface="Calibri"/>
+                        </a:rPr>
+                        <a:t>Canvas</a:t>
+                      </a:r>
+                      <a:r>
+                        <a:rPr sz="1100" b="0" i="0">
+                          <a:solidFill>
+                            <a:srgbClr val="2B2B2B"/>
+                          </a:solidFill>
+                          <a:latin typeface="Calibri"/>
+                        </a:rPr>
+                        <a:t> y </a:t>
+                      </a:r>
+                      <a:r>
+                        <a:rPr sz="1100" b="1" i="0">
+                          <a:solidFill>
+                            <a:srgbClr val="2B2B2B"/>
+                          </a:solidFill>
+                          <a:latin typeface="Calibri"/>
+                        </a:rPr>
+                        <a:t>MVP</a:t>
+                      </a:r>
+                      <a:r>
+                        <a:rPr sz="1100" b="0" i="0">
+                          <a:solidFill>
+                            <a:srgbClr val="2B2B2B"/>
+                          </a:solidFill>
+                          <a:latin typeface="Calibri"/>
+                        </a:rPr>
+                        <a:t> + sustentación breve (6–10 págs.).</a:t>
+                      </a:r>
+                    </a:p>
+                  </a:txBody>
+                  <a:tcPr anchor="ctr" marL="109728" marR="91440" marT="36576" marB="36576">
+                    <a:solidFill>
+                      <a:srgbClr val="F2F2F2"/>
+                    </a:solidFill>
+                  </a:tcPr>
+                </a:tc>
+                <a:tc>
+                  <a:txBody>
+                    <a:bodyPr/>
+                    <a:lstStyle/>
+                    <a:p>
+                      <a:pPr algn="l"/>
+                      <a:r>
+                        <a:rPr sz="1100" b="0" i="0">
+                          <a:solidFill>
+                            <a:srgbClr val="2B2B2B"/>
+                          </a:solidFill>
+                          <a:latin typeface="Calibri"/>
+                        </a:rPr>
+                        <a:t>Que la propuesta esté </a:t>
+                      </a:r>
+                      <a:r>
+                        <a:rPr sz="1100" b="1" i="0">
+                          <a:solidFill>
+                            <a:srgbClr val="2B2B2B"/>
+                          </a:solidFill>
+                          <a:latin typeface="Calibri"/>
+                        </a:rPr>
+                        <a:t>clasificada y validada</a:t>
+                      </a:r>
+                      <a:r>
+                        <a:rPr sz="1100" b="0" i="0">
+                          <a:solidFill>
+                            <a:srgbClr val="2B2B2B"/>
+                          </a:solidFill>
+                          <a:latin typeface="Calibri"/>
+                        </a:rPr>
+                        <a:t>, no solo descrita.</a:t>
+                      </a:r>
+                    </a:p>
+                  </a:txBody>
+                  <a:tcPr anchor="ctr" marL="109728" marR="91440" marT="36576" marB="36576">
+                    <a:solidFill>
+                      <a:srgbClr val="F2F2F2"/>
+                    </a:solidFill>
+                  </a:tcPr>
+                </a:tc>
+              </a:tr>
+              <a:tr h="502920">
+                <a:tc>
+                  <a:txBody>
+                    <a:bodyPr/>
+                    <a:lstStyle/>
+                    <a:p>
+                      <a:pPr algn="l"/>
+                      <a:r>
+                        <a:rPr sz="1100" b="1" i="0">
+                          <a:solidFill>
+                            <a:srgbClr val="2B2B2B"/>
+                          </a:solidFill>
+                          <a:latin typeface="Calibri"/>
+                        </a:rPr>
+                        <a:t>ACA 3</a:t>
+                      </a:r>
+                      <a:r>
+                        <a:rPr sz="1100" b="0" i="0">
+                          <a:solidFill>
+                            <a:srgbClr val="2B2B2B"/>
+                          </a:solidFill>
+                          <a:latin typeface="Calibri"/>
+                        </a:rPr>
+                        <a:t> · Corte 3</a:t>
+                      </a:r>
+                    </a:p>
+                  </a:txBody>
+                  <a:tcPr anchor="ctr" marL="109728" marR="91440" marT="36576" marB="36576">
+                    <a:solidFill>
+                      <a:srgbClr val="FFFFFF"/>
+                    </a:solidFill>
+                  </a:tcPr>
+                </a:tc>
+                <a:tc>
+                  <a:txBody>
+                    <a:bodyPr/>
+                    <a:lstStyle/>
+                    <a:p>
+                      <a:pPr algn="l"/>
+                      <a:r>
+                        <a:rPr sz="1100" b="0" i="0">
+                          <a:solidFill>
+                            <a:srgbClr val="2B2B2B"/>
+                          </a:solidFill>
+                          <a:latin typeface="Calibri"/>
+                        </a:rPr>
+                        <a:t>Propuesta consolidada + vigilancia tecnológica + entidades de apoyo + </a:t>
+                      </a:r>
+                      <a:r>
+                        <a:rPr sz="1100" b="1" i="0">
+                          <a:solidFill>
+                            <a:srgbClr val="2B2B2B"/>
+                          </a:solidFill>
+                          <a:latin typeface="Calibri"/>
+                        </a:rPr>
+                        <a:t>pitch de 1 página</a:t>
+                      </a:r>
+                      <a:r>
+                        <a:rPr sz="1100" b="0" i="0">
+                          <a:solidFill>
+                            <a:srgbClr val="2B2B2B"/>
+                          </a:solidFill>
+                          <a:latin typeface="Calibri"/>
+                        </a:rPr>
+                        <a:t> (8–12 págs.).</a:t>
+                      </a:r>
+                    </a:p>
+                  </a:txBody>
+                  <a:tcPr anchor="ctr" marL="109728" marR="91440" marT="36576" marB="36576">
+                    <a:solidFill>
+                      <a:srgbClr val="FFFFFF"/>
+                    </a:solidFill>
+                  </a:tcPr>
+                </a:tc>
+                <a:tc>
+                  <a:txBody>
+                    <a:bodyPr/>
+                    <a:lstStyle/>
+                    <a:p>
+                      <a:pPr algn="l"/>
+                      <a:r>
+                        <a:rPr sz="1100" b="0" i="0">
+                          <a:solidFill>
+                            <a:srgbClr val="2B2B2B"/>
+                          </a:solidFill>
+                          <a:latin typeface="Calibri"/>
+                        </a:rPr>
+                        <a:t>Que el hilo </a:t>
+                      </a:r>
+                      <a:r>
+                        <a:rPr sz="1100" b="1" i="0">
+                          <a:solidFill>
+                            <a:srgbClr val="2B2B2B"/>
+                          </a:solidFill>
+                          <a:latin typeface="Calibri"/>
+                        </a:rPr>
+                        <a:t>cierre</a:t>
+                      </a:r>
+                      <a:r>
+                        <a:rPr sz="1100" b="0" i="0">
+                          <a:solidFill>
+                            <a:srgbClr val="2B2B2B"/>
+                          </a:solidFill>
+                          <a:latin typeface="Calibri"/>
+                        </a:rPr>
+                        <a:t>: del problema al siguiente paso, sin saltos.</a:t>
+                      </a:r>
+                    </a:p>
+                  </a:txBody>
+                  <a:tcPr anchor="ctr" marL="109728" marR="91440" marT="36576" marB="36576">
+                    <a:solidFill>
+                      <a:srgbClr val="FFFFFF"/>
+                    </a:solidFill>
+                  </a:tcPr>
+                </a:tc>
+              </a:tr>
+            </a:tbl>
+          </a:graphicData>
+        </a:graphic>
+      </p:graphicFrame>
+      <p:sp>
+        <p:nvSpPr>
+          <p:cNvPr id="5" name="TextBox 4"/>
+          <p:cNvSpPr txBox="1"/>
+          <p:nvPr/>
+        </p:nvSpPr>
+        <p:spPr>
+          <a:xfrm>
+            <a:off x="640080" y="3840480"/>
+            <a:ext cx="10911535" cy="548640"/>
+          </a:xfrm>
+          <a:prstGeom prst="rect">
+            <a:avLst/>
+          </a:prstGeom>
+          <a:noFill/>
+        </p:spPr>
+        <p:txBody>
+          <a:bodyPr wrap="square" anchor="t" lIns="0" rIns="0" tIns="0" bIns="0">
+            <a:spAutoFit/>
+          </a:bodyPr>
+          <a:lstStyle/>
+          <a:p>
+            <a:r>
+              <a:rPr sz="1200" b="0" i="1">
+                <a:solidFill>
+                  <a:srgbClr val="2B2B2B"/>
+                </a:solidFill>
+                <a:latin typeface="Calibri"/>
+              </a:rPr>
+              <a:t>Enunciado completo, rúbrica y fechas de cada ACA: `Clases/Recursos/ACAs/` y el espacio de entrega en CDigital.</a:t>
+            </a:r>
+          </a:p>
+        </p:txBody>
+      </p:sp>
+      <p:sp>
+        <p:nvSpPr>
+          <p:cNvPr id="6" name="TextBox 5"/>
+          <p:cNvSpPr txBox="1"/>
+          <p:nvPr/>
+        </p:nvSpPr>
+        <p:spPr>
+          <a:xfrm>
+            <a:off x="2194560" y="6446520"/>
+            <a:ext cx="5943600" cy="274320"/>
+          </a:xfrm>
+          <a:prstGeom prst="rect">
+            <a:avLst/>
+          </a:prstGeom>
+          <a:noFill/>
+        </p:spPr>
+        <p:txBody>
+          <a:bodyPr wrap="square" anchor="t" lIns="0" rIns="0" tIns="0" bIns="0">
+            <a:spAutoFit/>
+          </a:bodyPr>
+          <a:lstStyle/>
+          <a:p>
             <a:pPr algn="l"/>
             <a:r>
               <a:rPr sz="1000" b="1" i="0">
@@ -6314,6 +14482,41 @@
                 <a:latin typeface="Calibri"/>
               </a:rPr>
               <a:t>Inicio 5:10 pm</a:t>
+            </a:r>
+          </a:p>
+        </p:txBody>
+      </p:sp>
+      <p:sp>
+        <p:nvSpPr>
+          <p:cNvPr id="7" name="TextBox 6"/>
+          <p:cNvSpPr txBox="1"/>
+          <p:nvPr/>
+        </p:nvSpPr>
+        <p:spPr>
+          <a:xfrm>
+            <a:off x="11094415" y="6446520"/>
+            <a:ext cx="548640" cy="274320"/>
+          </a:xfrm>
+          <a:prstGeom prst="rect">
+            <a:avLst/>
+          </a:prstGeom>
+          <a:noFill/>
+        </p:spPr>
+        <p:txBody>
+          <a:bodyPr wrap="square" anchor="t" lIns="0" rIns="0" tIns="0" bIns="0">
+            <a:spAutoFit/>
+          </a:bodyPr>
+          <a:lstStyle/>
+          <a:p>
+            <a:pPr algn="r"/>
+            <a:r>
+              <a:rPr sz="1000" b="1" i="0">
+                <a:solidFill>
+                  <a:srgbClr val="8F989D"/>
+                </a:solidFill>
+                <a:latin typeface="Calibri"/>
+              </a:rPr>
+              <a:t>9</a:t>
             </a:r>
           </a:p>
         </p:txBody>

--- a/Pregrado/Creatividad y pensamiento innovador/Clases/Sesion 01 - Presentación del curso · docente · estudiantes · ACAs/Presentacion.pptx
+++ b/Pregrado/Creatividad y pensamiento innovador/Clases/Sesion 01 - Presentación del curso · docente · estudiantes · ACAs/Presentacion.pptx
@@ -3373,41 +3373,6 @@
                 <a:latin typeface="Calibri"/>
               </a:rPr>
               <a:t> CREATIVIDAD Y PENSAMIENTO INNOVADOR</a:t>
-            </a:r>
-          </a:p>
-        </p:txBody>
-      </p:sp>
-      <p:sp>
-        <p:nvSpPr>
-          <p:cNvPr id="7" name="TextBox 6"/>
-          <p:cNvSpPr txBox="1"/>
-          <p:nvPr/>
-        </p:nvSpPr>
-        <p:spPr>
-          <a:xfrm>
-            <a:off x="2194560" y="6446520"/>
-            <a:ext cx="5943600" cy="274320"/>
-          </a:xfrm>
-          <a:prstGeom prst="rect">
-            <a:avLst/>
-          </a:prstGeom>
-          <a:noFill/>
-        </p:spPr>
-        <p:txBody>
-          <a:bodyPr wrap="square" anchor="t" lIns="0" rIns="0" tIns="0" bIns="0">
-            <a:spAutoFit/>
-          </a:bodyPr>
-          <a:lstStyle/>
-          <a:p>
-            <a:pPr algn="l"/>
-            <a:r>
-              <a:rPr sz="1000" b="1" i="0">
-                <a:solidFill>
-                  <a:srgbClr val="8F989D"/>
-                </a:solidFill>
-                <a:latin typeface="Calibri"/>
-              </a:rPr>
-              <a:t>Inicio 5:10 pm</a:t>
             </a:r>
           </a:p>
         </p:txBody>
@@ -4137,41 +4102,6 @@
         </p:nvSpPr>
         <p:spPr>
           <a:xfrm>
-            <a:off x="2194560" y="6446520"/>
-            <a:ext cx="5943600" cy="274320"/>
-          </a:xfrm>
-          <a:prstGeom prst="rect">
-            <a:avLst/>
-          </a:prstGeom>
-          <a:noFill/>
-        </p:spPr>
-        <p:txBody>
-          <a:bodyPr wrap="square" anchor="t" lIns="0" rIns="0" tIns="0" bIns="0">
-            <a:spAutoFit/>
-          </a:bodyPr>
-          <a:lstStyle/>
-          <a:p>
-            <a:pPr algn="l"/>
-            <a:r>
-              <a:rPr sz="1000" b="1" i="0">
-                <a:solidFill>
-                  <a:srgbClr val="8F989D"/>
-                </a:solidFill>
-                <a:latin typeface="Calibri"/>
-              </a:rPr>
-              <a:t>Inicio 5:10 pm</a:t>
-            </a:r>
-          </a:p>
-        </p:txBody>
-      </p:sp>
-      <p:sp>
-        <p:nvSpPr>
-          <p:cNvPr id="7" name="TextBox 6"/>
-          <p:cNvSpPr txBox="1"/>
-          <p:nvPr/>
-        </p:nvSpPr>
-        <p:spPr>
-          <a:xfrm>
             <a:off x="11094415" y="6446520"/>
             <a:ext cx="548640" cy="274320"/>
           </a:xfrm>
@@ -4733,8 +4663,8 @@
         </p:nvSpPr>
         <p:spPr>
           <a:xfrm>
-            <a:off x="2194560" y="6446520"/>
-            <a:ext cx="5943600" cy="274320"/>
+            <a:off x="11094415" y="6446520"/>
+            <a:ext cx="548640" cy="274320"/>
           </a:xfrm>
           <a:prstGeom prst="rect">
             <a:avLst/>
@@ -4747,7 +4677,7 @@
           </a:bodyPr>
           <a:lstStyle/>
           <a:p>
-            <a:pPr algn="l"/>
+            <a:pPr algn="r"/>
             <a:r>
               <a:rPr sz="1000" b="1" i="0">
                 <a:solidFill>
@@ -4755,7 +4685,7 @@
                 </a:solidFill>
                 <a:latin typeface="Calibri"/>
               </a:rPr>
-              <a:t>Inicio 5:10 pm</a:t>
+              <a:t>11</a:t>
             </a:r>
           </a:p>
         </p:txBody>
@@ -4763,41 +4693,6 @@
       <p:sp>
         <p:nvSpPr>
           <p:cNvPr id="6" name="TextBox 5"/>
-          <p:cNvSpPr txBox="1"/>
-          <p:nvPr/>
-        </p:nvSpPr>
-        <p:spPr>
-          <a:xfrm>
-            <a:off x="11094415" y="6446520"/>
-            <a:ext cx="548640" cy="274320"/>
-          </a:xfrm>
-          <a:prstGeom prst="rect">
-            <a:avLst/>
-          </a:prstGeom>
-          <a:noFill/>
-        </p:spPr>
-        <p:txBody>
-          <a:bodyPr wrap="square" anchor="t" lIns="0" rIns="0" tIns="0" bIns="0">
-            <a:spAutoFit/>
-          </a:bodyPr>
-          <a:lstStyle/>
-          <a:p>
-            <a:pPr algn="r"/>
-            <a:r>
-              <a:rPr sz="1000" b="1" i="0">
-                <a:solidFill>
-                  <a:srgbClr val="8F989D"/>
-                </a:solidFill>
-                <a:latin typeface="Calibri"/>
-              </a:rPr>
-              <a:t>11</a:t>
-            </a:r>
-          </a:p>
-        </p:txBody>
-      </p:sp>
-      <p:sp>
-        <p:nvSpPr>
-          <p:cNvPr id="7" name="TextBox 6"/>
           <p:cNvSpPr txBox="1"/>
           <p:nvPr/>
         </p:nvSpPr>
@@ -5296,41 +5191,6 @@
         </p:nvSpPr>
         <p:spPr>
           <a:xfrm>
-            <a:off x="2194560" y="6446520"/>
-            <a:ext cx="5943600" cy="274320"/>
-          </a:xfrm>
-          <a:prstGeom prst="rect">
-            <a:avLst/>
-          </a:prstGeom>
-          <a:noFill/>
-        </p:spPr>
-        <p:txBody>
-          <a:bodyPr wrap="square" anchor="t" lIns="0" rIns="0" tIns="0" bIns="0">
-            <a:spAutoFit/>
-          </a:bodyPr>
-          <a:lstStyle/>
-          <a:p>
-            <a:pPr algn="l"/>
-            <a:r>
-              <a:rPr sz="1000" b="1" i="0">
-                <a:solidFill>
-                  <a:srgbClr val="8F989D"/>
-                </a:solidFill>
-                <a:latin typeface="Calibri"/>
-              </a:rPr>
-              <a:t>Inicio 5:10 pm</a:t>
-            </a:r>
-          </a:p>
-        </p:txBody>
-      </p:sp>
-      <p:sp>
-        <p:nvSpPr>
-          <p:cNvPr id="11" name="TextBox 10"/>
-          <p:cNvSpPr txBox="1"/>
-          <p:nvPr/>
-        </p:nvSpPr>
-        <p:spPr>
-          <a:xfrm>
             <a:off x="11094415" y="6446520"/>
             <a:ext cx="548640" cy="274320"/>
           </a:xfrm>
@@ -5784,8 +5644,8 @@
         </p:nvSpPr>
         <p:spPr>
           <a:xfrm>
-            <a:off x="2194560" y="6446520"/>
-            <a:ext cx="5943600" cy="274320"/>
+            <a:off x="11094415" y="6446520"/>
+            <a:ext cx="548640" cy="274320"/>
           </a:xfrm>
           <a:prstGeom prst="rect">
             <a:avLst/>
@@ -5798,7 +5658,7 @@
           </a:bodyPr>
           <a:lstStyle/>
           <a:p>
-            <a:pPr algn="l"/>
+            <a:pPr algn="r"/>
             <a:r>
               <a:rPr sz="1000" b="1" i="0">
                 <a:solidFill>
@@ -5806,7 +5666,7 @@
                 </a:solidFill>
                 <a:latin typeface="Calibri"/>
               </a:rPr>
-              <a:t>Inicio 5:10 pm</a:t>
+              <a:t>13</a:t>
             </a:r>
           </a:p>
         </p:txBody>
@@ -5814,41 +5674,6 @@
       <p:sp>
         <p:nvSpPr>
           <p:cNvPr id="6" name="TextBox 5"/>
-          <p:cNvSpPr txBox="1"/>
-          <p:nvPr/>
-        </p:nvSpPr>
-        <p:spPr>
-          <a:xfrm>
-            <a:off x="11094415" y="6446520"/>
-            <a:ext cx="548640" cy="274320"/>
-          </a:xfrm>
-          <a:prstGeom prst="rect">
-            <a:avLst/>
-          </a:prstGeom>
-          <a:noFill/>
-        </p:spPr>
-        <p:txBody>
-          <a:bodyPr wrap="square" anchor="t" lIns="0" rIns="0" tIns="0" bIns="0">
-            <a:spAutoFit/>
-          </a:bodyPr>
-          <a:lstStyle/>
-          <a:p>
-            <a:pPr algn="r"/>
-            <a:r>
-              <a:rPr sz="1000" b="1" i="0">
-                <a:solidFill>
-                  <a:srgbClr val="8F989D"/>
-                </a:solidFill>
-                <a:latin typeface="Calibri"/>
-              </a:rPr>
-              <a:t>13</a:t>
-            </a:r>
-          </a:p>
-        </p:txBody>
-      </p:sp>
-      <p:sp>
-        <p:nvSpPr>
-          <p:cNvPr id="7" name="TextBox 6"/>
           <p:cNvSpPr txBox="1"/>
           <p:nvPr/>
         </p:nvSpPr>
@@ -5995,7 +5820,7 @@
         </p:nvGraphicFramePr>
         <p:xfrm>
           <a:off x="640080" y="1691639"/>
-          <a:ext cx="10911534" cy="4526280"/>
+          <a:ext cx="10911534" cy="4023360"/>
         </p:xfrm>
         <a:graphic>
           <a:graphicData uri="http://schemas.openxmlformats.org/drawingml/2006/table">
@@ -6253,7 +6078,16 @@
                           </a:solidFill>
                           <a:latin typeface="Calibri"/>
                         </a:rPr>
-                        <a:t>Padlet</a:t>
+                        <a:t>Excalidraw</a:t>
+                      </a:r>
+                      <a:r>
+                        <a:rPr sz="1100" b="0" i="0">
+                          <a:solidFill>
+                            <a:srgbClr val="2B2B2B"/>
+                          </a:solidFill>
+                          <a:latin typeface="Calibri"/>
+                        </a:rPr>
+                        <a:t> (excalidraw.com)</a:t>
                       </a:r>
                     </a:p>
                   </a:txBody>
@@ -6276,7 +6110,7 @@
                           </a:solidFill>
                           <a:latin typeface="Calibri"/>
                         </a:rPr>
-                        <a:t>Tablero de presentación y lluvias de ideas rápidas</a:t>
+                        <a:t>Bocetos, mapas y diagramas: feos pero claros</a:t>
                       </a:r>
                     </a:p>
                   </a:txBody>
@@ -6299,7 +6133,7 @@
                           </a:solidFill>
                           <a:latin typeface="Calibri"/>
                         </a:rPr>
-                        <a:t>Sin cuenta, entra por el enlace</a:t>
+                        <a:t>Sin cuenta</a:t>
                       </a:r>
                     </a:p>
                   </a:txBody>
@@ -6324,16 +6158,7 @@
                           </a:solidFill>
                           <a:latin typeface="Calibri"/>
                         </a:rPr>
-                        <a:t>Excalidraw</a:t>
-                      </a:r>
-                      <a:r>
-                        <a:rPr sz="1100" b="0" i="0">
-                          <a:solidFill>
-                            <a:srgbClr val="2B2B2B"/>
-                          </a:solidFill>
-                          <a:latin typeface="Calibri"/>
-                        </a:rPr>
-                        <a:t> (excalidraw.com)</a:t>
+                        <a:t>Canvanizer</a:t>
                       </a:r>
                     </a:p>
                   </a:txBody>
@@ -6356,7 +6181,158 @@
                           </a:solidFill>
                           <a:latin typeface="Calibri"/>
                         </a:rPr>
-                        <a:t>Bocetos, mapas y diagramas: feos pero claros</a:t>
+                        <a:t>Business Model Canvas de su propuesta (Corte 2)</a:t>
+                      </a:r>
+                    </a:p>
+                  </a:txBody>
+                  <a:tcPr anchor="ctr" marL="109728" marR="91440" marT="36576" marB="36576">
+                    <a:solidFill>
+                      <a:srgbClr val="F2F2F2"/>
+                    </a:solidFill>
+                  </a:tcPr>
+                </a:tc>
+                <a:tc>
+                  <a:txBody>
+                    <a:bodyPr/>
+                    <a:lstStyle/>
+                    <a:p>
+                      <a:pPr algn="l"/>
+                      <a:r>
+                        <a:rPr sz="1100" b="0" i="0">
+                          <a:solidFill>
+                            <a:srgbClr val="2B2B2B"/>
+                          </a:solidFill>
+                          <a:latin typeface="Calibri"/>
+                        </a:rPr>
+                        <a:t>Gratis en el navegador</a:t>
+                      </a:r>
+                    </a:p>
+                  </a:txBody>
+                  <a:tcPr anchor="ctr" marL="109728" marR="91440" marT="36576" marB="36576">
+                    <a:solidFill>
+                      <a:srgbClr val="F2F2F2"/>
+                    </a:solidFill>
+                  </a:tcPr>
+                </a:tc>
+              </a:tr>
+              <a:tr h="502920">
+                <a:tc>
+                  <a:txBody>
+                    <a:bodyPr/>
+                    <a:lstStyle/>
+                    <a:p>
+                      <a:pPr algn="l"/>
+                      <a:r>
+                        <a:rPr sz="1100" b="1" i="0">
+                          <a:solidFill>
+                            <a:srgbClr val="2B2B2B"/>
+                          </a:solidFill>
+                          <a:latin typeface="Calibri"/>
+                        </a:rPr>
+                        <a:t>Scholar · SciELO · Redalyc</a:t>
+                      </a:r>
+                    </a:p>
+                  </a:txBody>
+                  <a:tcPr anchor="ctr" marL="109728" marR="91440" marT="36576" marB="36576">
+                    <a:solidFill>
+                      <a:srgbClr val="FFFFFF"/>
+                    </a:solidFill>
+                  </a:tcPr>
+                </a:tc>
+                <a:tc>
+                  <a:txBody>
+                    <a:bodyPr/>
+                    <a:lstStyle/>
+                    <a:p>
+                      <a:pPr algn="l"/>
+                      <a:r>
+                        <a:rPr sz="1100" b="0" i="0">
+                          <a:solidFill>
+                            <a:srgbClr val="2B2B2B"/>
+                          </a:solidFill>
+                          <a:latin typeface="Calibri"/>
+                        </a:rPr>
+                        <a:t>Buscar fuentes serias, antecedentes y referentes</a:t>
+                      </a:r>
+                    </a:p>
+                  </a:txBody>
+                  <a:tcPr anchor="ctr" marL="109728" marR="91440" marT="36576" marB="36576">
+                    <a:solidFill>
+                      <a:srgbClr val="FFFFFF"/>
+                    </a:solidFill>
+                  </a:tcPr>
+                </a:tc>
+                <a:tc>
+                  <a:txBody>
+                    <a:bodyPr/>
+                    <a:lstStyle/>
+                    <a:p>
+                      <a:pPr algn="l"/>
+                      <a:r>
+                        <a:rPr sz="1100" b="0" i="0">
+                          <a:solidFill>
+                            <a:srgbClr val="2B2B2B"/>
+                          </a:solidFill>
+                          <a:latin typeface="Calibri"/>
+                        </a:rPr>
+                        <a:t>Sin cuenta</a:t>
+                      </a:r>
+                    </a:p>
+                  </a:txBody>
+                  <a:tcPr anchor="ctr" marL="109728" marR="91440" marT="36576" marB="36576">
+                    <a:solidFill>
+                      <a:srgbClr val="FFFFFF"/>
+                    </a:solidFill>
+                  </a:tcPr>
+                </a:tc>
+              </a:tr>
+              <a:tr h="502920">
+                <a:tc>
+                  <a:txBody>
+                    <a:bodyPr/>
+                    <a:lstStyle/>
+                    <a:p>
+                      <a:pPr algn="l"/>
+                      <a:r>
+                        <a:rPr sz="1100" b="1" i="0">
+                          <a:solidFill>
+                            <a:srgbClr val="2B2B2B"/>
+                          </a:solidFill>
+                          <a:latin typeface="Calibri"/>
+                        </a:rPr>
+                        <a:t>ZoteroBib</a:t>
+                      </a:r>
+                      <a:r>
+                        <a:rPr sz="1100" b="0" i="0">
+                          <a:solidFill>
+                            <a:srgbClr val="2B2B2B"/>
+                          </a:solidFill>
+                          <a:latin typeface="Calibri"/>
+                        </a:rPr>
+                        <a:t> (zbib.org)</a:t>
+                      </a:r>
+                    </a:p>
+                  </a:txBody>
+                  <a:tcPr anchor="ctr" marL="109728" marR="91440" marT="36576" marB="36576">
+                    <a:solidFill>
+                      <a:srgbClr val="F2F2F2"/>
+                    </a:solidFill>
+                  </a:tcPr>
+                </a:tc>
+                <a:tc>
+                  <a:txBody>
+                    <a:bodyPr/>
+                    <a:lstStyle/>
+                    <a:p>
+                      <a:pPr algn="l"/>
+                      <a:r>
+                        <a:rPr sz="1100" b="0" i="0">
+                          <a:solidFill>
+                            <a:srgbClr val="2B2B2B"/>
+                          </a:solidFill>
+                          <a:latin typeface="Calibri"/>
+                        </a:rPr>
+                        <a:t>Armar las referencias en APA 7 sin instalar nada</a:t>
                       </a:r>
                     </a:p>
                   </a:txBody>
@@ -6404,7 +6380,16 @@
                           </a:solidFill>
                           <a:latin typeface="Calibri"/>
                         </a:rPr>
-                        <a:t>Canvanizer</a:t>
+                        <a:t>Canva free</a:t>
+                      </a:r>
+                      <a:r>
+                        <a:rPr sz="1100" b="0" i="0">
+                          <a:solidFill>
+                            <a:srgbClr val="2B2B2B"/>
+                          </a:solidFill>
+                          <a:latin typeface="Calibri"/>
+                        </a:rPr>
+                        <a:t> (opcional)</a:t>
                       </a:r>
                     </a:p>
                   </a:txBody>
@@ -6427,7 +6412,7 @@
                           </a:solidFill>
                           <a:latin typeface="Calibri"/>
                         </a:rPr>
-                        <a:t>Business Model Canvas de su propuesta (Corte 2)</a:t>
+                        <a:t>Una diapositiva de pitch presentable, si la quiere</a:t>
                       </a:r>
                     </a:p>
                   </a:txBody>
@@ -6450,7 +6435,7 @@
                           </a:solidFill>
                           <a:latin typeface="Calibri"/>
                         </a:rPr>
-                        <a:t>Gratis en el navegador</a:t>
+                        <a:t>Cuenta gratuita</a:t>
                       </a:r>
                     </a:p>
                   </a:txBody>
@@ -6461,237 +6446,6 @@
                   </a:tcPr>
                 </a:tc>
               </a:tr>
-              <a:tr h="502920">
-                <a:tc>
-                  <a:txBody>
-                    <a:bodyPr/>
-                    <a:lstStyle/>
-                    <a:p>
-                      <a:pPr algn="l"/>
-                      <a:r>
-                        <a:rPr sz="1100" b="1" i="0">
-                          <a:solidFill>
-                            <a:srgbClr val="2B2B2B"/>
-                          </a:solidFill>
-                          <a:latin typeface="Calibri"/>
-                        </a:rPr>
-                        <a:t>Scholar · SciELO · Redalyc</a:t>
-                      </a:r>
-                    </a:p>
-                  </a:txBody>
-                  <a:tcPr anchor="ctr" marL="109728" marR="91440" marT="36576" marB="36576">
-                    <a:solidFill>
-                      <a:srgbClr val="F2F2F2"/>
-                    </a:solidFill>
-                  </a:tcPr>
-                </a:tc>
-                <a:tc>
-                  <a:txBody>
-                    <a:bodyPr/>
-                    <a:lstStyle/>
-                    <a:p>
-                      <a:pPr algn="l"/>
-                      <a:r>
-                        <a:rPr sz="1100" b="0" i="0">
-                          <a:solidFill>
-                            <a:srgbClr val="2B2B2B"/>
-                          </a:solidFill>
-                          <a:latin typeface="Calibri"/>
-                        </a:rPr>
-                        <a:t>Buscar fuentes serias, antecedentes y referentes</a:t>
-                      </a:r>
-                    </a:p>
-                  </a:txBody>
-                  <a:tcPr anchor="ctr" marL="109728" marR="91440" marT="36576" marB="36576">
-                    <a:solidFill>
-                      <a:srgbClr val="F2F2F2"/>
-                    </a:solidFill>
-                  </a:tcPr>
-                </a:tc>
-                <a:tc>
-                  <a:txBody>
-                    <a:bodyPr/>
-                    <a:lstStyle/>
-                    <a:p>
-                      <a:pPr algn="l"/>
-                      <a:r>
-                        <a:rPr sz="1100" b="0" i="0">
-                          <a:solidFill>
-                            <a:srgbClr val="2B2B2B"/>
-                          </a:solidFill>
-                          <a:latin typeface="Calibri"/>
-                        </a:rPr>
-                        <a:t>Sin cuenta</a:t>
-                      </a:r>
-                    </a:p>
-                  </a:txBody>
-                  <a:tcPr anchor="ctr" marL="109728" marR="91440" marT="36576" marB="36576">
-                    <a:solidFill>
-                      <a:srgbClr val="F2F2F2"/>
-                    </a:solidFill>
-                  </a:tcPr>
-                </a:tc>
-              </a:tr>
-              <a:tr h="502920">
-                <a:tc>
-                  <a:txBody>
-                    <a:bodyPr/>
-                    <a:lstStyle/>
-                    <a:p>
-                      <a:pPr algn="l"/>
-                      <a:r>
-                        <a:rPr sz="1100" b="1" i="0">
-                          <a:solidFill>
-                            <a:srgbClr val="2B2B2B"/>
-                          </a:solidFill>
-                          <a:latin typeface="Calibri"/>
-                        </a:rPr>
-                        <a:t>ZoteroBib</a:t>
-                      </a:r>
-                      <a:r>
-                        <a:rPr sz="1100" b="0" i="0">
-                          <a:solidFill>
-                            <a:srgbClr val="2B2B2B"/>
-                          </a:solidFill>
-                          <a:latin typeface="Calibri"/>
-                        </a:rPr>
-                        <a:t> (zbib.org)</a:t>
-                      </a:r>
-                    </a:p>
-                  </a:txBody>
-                  <a:tcPr anchor="ctr" marL="109728" marR="91440" marT="36576" marB="36576">
-                    <a:solidFill>
-                      <a:srgbClr val="FFFFFF"/>
-                    </a:solidFill>
-                  </a:tcPr>
-                </a:tc>
-                <a:tc>
-                  <a:txBody>
-                    <a:bodyPr/>
-                    <a:lstStyle/>
-                    <a:p>
-                      <a:pPr algn="l"/>
-                      <a:r>
-                        <a:rPr sz="1100" b="0" i="0">
-                          <a:solidFill>
-                            <a:srgbClr val="2B2B2B"/>
-                          </a:solidFill>
-                          <a:latin typeface="Calibri"/>
-                        </a:rPr>
-                        <a:t>Armar las referencias en APA 7 sin instalar nada</a:t>
-                      </a:r>
-                    </a:p>
-                  </a:txBody>
-                  <a:tcPr anchor="ctr" marL="109728" marR="91440" marT="36576" marB="36576">
-                    <a:solidFill>
-                      <a:srgbClr val="FFFFFF"/>
-                    </a:solidFill>
-                  </a:tcPr>
-                </a:tc>
-                <a:tc>
-                  <a:txBody>
-                    <a:bodyPr/>
-                    <a:lstStyle/>
-                    <a:p>
-                      <a:pPr algn="l"/>
-                      <a:r>
-                        <a:rPr sz="1100" b="0" i="0">
-                          <a:solidFill>
-                            <a:srgbClr val="2B2B2B"/>
-                          </a:solidFill>
-                          <a:latin typeface="Calibri"/>
-                        </a:rPr>
-                        <a:t>Sin cuenta</a:t>
-                      </a:r>
-                    </a:p>
-                  </a:txBody>
-                  <a:tcPr anchor="ctr" marL="109728" marR="91440" marT="36576" marB="36576">
-                    <a:solidFill>
-                      <a:srgbClr val="FFFFFF"/>
-                    </a:solidFill>
-                  </a:tcPr>
-                </a:tc>
-              </a:tr>
-              <a:tr h="502920">
-                <a:tc>
-                  <a:txBody>
-                    <a:bodyPr/>
-                    <a:lstStyle/>
-                    <a:p>
-                      <a:pPr algn="l"/>
-                      <a:r>
-                        <a:rPr sz="1100" b="1" i="0">
-                          <a:solidFill>
-                            <a:srgbClr val="2B2B2B"/>
-                          </a:solidFill>
-                          <a:latin typeface="Calibri"/>
-                        </a:rPr>
-                        <a:t>Canva free</a:t>
-                      </a:r>
-                      <a:r>
-                        <a:rPr sz="1100" b="0" i="0">
-                          <a:solidFill>
-                            <a:srgbClr val="2B2B2B"/>
-                          </a:solidFill>
-                          <a:latin typeface="Calibri"/>
-                        </a:rPr>
-                        <a:t> (opcional)</a:t>
-                      </a:r>
-                    </a:p>
-                  </a:txBody>
-                  <a:tcPr anchor="ctr" marL="109728" marR="91440" marT="36576" marB="36576">
-                    <a:solidFill>
-                      <a:srgbClr val="F2F2F2"/>
-                    </a:solidFill>
-                  </a:tcPr>
-                </a:tc>
-                <a:tc>
-                  <a:txBody>
-                    <a:bodyPr/>
-                    <a:lstStyle/>
-                    <a:p>
-                      <a:pPr algn="l"/>
-                      <a:r>
-                        <a:rPr sz="1100" b="0" i="0">
-                          <a:solidFill>
-                            <a:srgbClr val="2B2B2B"/>
-                          </a:solidFill>
-                          <a:latin typeface="Calibri"/>
-                        </a:rPr>
-                        <a:t>Una diapositiva de pitch presentable, si la quiere</a:t>
-                      </a:r>
-                    </a:p>
-                  </a:txBody>
-                  <a:tcPr anchor="ctr" marL="109728" marR="91440" marT="36576" marB="36576">
-                    <a:solidFill>
-                      <a:srgbClr val="F2F2F2"/>
-                    </a:solidFill>
-                  </a:tcPr>
-                </a:tc>
-                <a:tc>
-                  <a:txBody>
-                    <a:bodyPr/>
-                    <a:lstStyle/>
-                    <a:p>
-                      <a:pPr algn="l"/>
-                      <a:r>
-                        <a:rPr sz="1100" b="0" i="0">
-                          <a:solidFill>
-                            <a:srgbClr val="2B2B2B"/>
-                          </a:solidFill>
-                          <a:latin typeface="Calibri"/>
-                        </a:rPr>
-                        <a:t>Cuenta gratuita</a:t>
-                      </a:r>
-                    </a:p>
-                  </a:txBody>
-                  <a:tcPr anchor="ctr" marL="109728" marR="91440" marT="36576" marB="36576">
-                    <a:solidFill>
-                      <a:srgbClr val="F2F2F2"/>
-                    </a:solidFill>
-                  </a:tcPr>
-                </a:tc>
-              </a:tr>
             </a:tbl>
           </a:graphicData>
         </a:graphic>
@@ -6704,7 +6458,7 @@
         </p:nvSpPr>
         <p:spPr>
           <a:xfrm>
-            <a:off x="640080" y="6080760"/>
+            <a:off x="640080" y="5852160"/>
             <a:ext cx="10911535" cy="548640"/>
           </a:xfrm>
           <a:prstGeom prst="rect">
@@ -6751,41 +6505,6 @@
       <p:sp>
         <p:nvSpPr>
           <p:cNvPr id="6" name="TextBox 5"/>
-          <p:cNvSpPr txBox="1"/>
-          <p:nvPr/>
-        </p:nvSpPr>
-        <p:spPr>
-          <a:xfrm>
-            <a:off x="2194560" y="6446520"/>
-            <a:ext cx="5943600" cy="274320"/>
-          </a:xfrm>
-          <a:prstGeom prst="rect">
-            <a:avLst/>
-          </a:prstGeom>
-          <a:noFill/>
-        </p:spPr>
-        <p:txBody>
-          <a:bodyPr wrap="square" anchor="t" lIns="0" rIns="0" tIns="0" bIns="0">
-            <a:spAutoFit/>
-          </a:bodyPr>
-          <a:lstStyle/>
-          <a:p>
-            <a:pPr algn="l"/>
-            <a:r>
-              <a:rPr sz="1000" b="1" i="0">
-                <a:solidFill>
-                  <a:srgbClr val="8F989D"/>
-                </a:solidFill>
-                <a:latin typeface="Calibri"/>
-              </a:rPr>
-              <a:t>Inicio 5:10 pm</a:t>
-            </a:r>
-          </a:p>
-        </p:txBody>
-      </p:sp>
-      <p:sp>
-        <p:nvSpPr>
-          <p:cNvPr id="7" name="TextBox 6"/>
           <p:cNvSpPr txBox="1"/>
           <p:nvPr/>
         </p:nvSpPr>
@@ -7208,8 +6927,8 @@
         </p:nvSpPr>
         <p:spPr>
           <a:xfrm>
-            <a:off x="2194560" y="6446520"/>
-            <a:ext cx="5943600" cy="274320"/>
+            <a:off x="11094415" y="6446520"/>
+            <a:ext cx="548640" cy="274320"/>
           </a:xfrm>
           <a:prstGeom prst="rect">
             <a:avLst/>
@@ -7222,7 +6941,7 @@
           </a:bodyPr>
           <a:lstStyle/>
           <a:p>
-            <a:pPr algn="l"/>
+            <a:pPr algn="r"/>
             <a:r>
               <a:rPr sz="1000" b="1" i="0">
                 <a:solidFill>
@@ -7230,7 +6949,7 @@
                 </a:solidFill>
                 <a:latin typeface="Calibri"/>
               </a:rPr>
-              <a:t>Inicio 5:10 pm</a:t>
+              <a:t>15</a:t>
             </a:r>
           </a:p>
         </p:txBody>
@@ -7238,41 +6957,6 @@
       <p:sp>
         <p:nvSpPr>
           <p:cNvPr id="6" name="TextBox 5"/>
-          <p:cNvSpPr txBox="1"/>
-          <p:nvPr/>
-        </p:nvSpPr>
-        <p:spPr>
-          <a:xfrm>
-            <a:off x="11094415" y="6446520"/>
-            <a:ext cx="548640" cy="274320"/>
-          </a:xfrm>
-          <a:prstGeom prst="rect">
-            <a:avLst/>
-          </a:prstGeom>
-          <a:noFill/>
-        </p:spPr>
-        <p:txBody>
-          <a:bodyPr wrap="square" anchor="t" lIns="0" rIns="0" tIns="0" bIns="0">
-            <a:spAutoFit/>
-          </a:bodyPr>
-          <a:lstStyle/>
-          <a:p>
-            <a:pPr algn="r"/>
-            <a:r>
-              <a:rPr sz="1000" b="1" i="0">
-                <a:solidFill>
-                  <a:srgbClr val="8F989D"/>
-                </a:solidFill>
-                <a:latin typeface="Calibri"/>
-              </a:rPr>
-              <a:t>15</a:t>
-            </a:r>
-          </a:p>
-        </p:txBody>
-      </p:sp>
-      <p:sp>
-        <p:nvSpPr>
-          <p:cNvPr id="7" name="TextBox 6"/>
           <p:cNvSpPr txBox="1"/>
           <p:nvPr/>
         </p:nvSpPr>
@@ -7730,41 +7414,6 @@
         </p:nvSpPr>
         <p:spPr>
           <a:xfrm>
-            <a:off x="2194560" y="6446520"/>
-            <a:ext cx="5943600" cy="274320"/>
-          </a:xfrm>
-          <a:prstGeom prst="rect">
-            <a:avLst/>
-          </a:prstGeom>
-          <a:noFill/>
-        </p:spPr>
-        <p:txBody>
-          <a:bodyPr wrap="square" anchor="t" lIns="0" rIns="0" tIns="0" bIns="0">
-            <a:spAutoFit/>
-          </a:bodyPr>
-          <a:lstStyle/>
-          <a:p>
-            <a:pPr algn="l"/>
-            <a:r>
-              <a:rPr sz="1000" b="1" i="0">
-                <a:solidFill>
-                  <a:srgbClr val="8F989D"/>
-                </a:solidFill>
-                <a:latin typeface="Calibri"/>
-              </a:rPr>
-              <a:t>Inicio 5:10 pm</a:t>
-            </a:r>
-          </a:p>
-        </p:txBody>
-      </p:sp>
-      <p:sp>
-        <p:nvSpPr>
-          <p:cNvPr id="6" name="TextBox 5"/>
-          <p:cNvSpPr txBox="1"/>
-          <p:nvPr/>
-        </p:nvSpPr>
-        <p:spPr>
-          <a:xfrm>
             <a:off x="11094415" y="6446520"/>
             <a:ext cx="548640" cy="274320"/>
           </a:xfrm>
@@ -8227,8 +7876,8 @@
         </p:nvSpPr>
         <p:spPr>
           <a:xfrm>
-            <a:off x="2194560" y="6446520"/>
-            <a:ext cx="5943600" cy="274320"/>
+            <a:off x="11094415" y="6446520"/>
+            <a:ext cx="548640" cy="274320"/>
           </a:xfrm>
           <a:prstGeom prst="rect">
             <a:avLst/>
@@ -8241,7 +7890,7 @@
           </a:bodyPr>
           <a:lstStyle/>
           <a:p>
-            <a:pPr algn="l"/>
+            <a:pPr algn="r"/>
             <a:r>
               <a:rPr sz="1000" b="1" i="0">
                 <a:solidFill>
@@ -8249,7 +7898,7 @@
                 </a:solidFill>
                 <a:latin typeface="Calibri"/>
               </a:rPr>
-              <a:t>Inicio 5:10 pm</a:t>
+              <a:t>17</a:t>
             </a:r>
           </a:p>
         </p:txBody>
@@ -8257,41 +7906,6 @@
       <p:sp>
         <p:nvSpPr>
           <p:cNvPr id="6" name="TextBox 5"/>
-          <p:cNvSpPr txBox="1"/>
-          <p:nvPr/>
-        </p:nvSpPr>
-        <p:spPr>
-          <a:xfrm>
-            <a:off x="11094415" y="6446520"/>
-            <a:ext cx="548640" cy="274320"/>
-          </a:xfrm>
-          <a:prstGeom prst="rect">
-            <a:avLst/>
-          </a:prstGeom>
-          <a:noFill/>
-        </p:spPr>
-        <p:txBody>
-          <a:bodyPr wrap="square" anchor="t" lIns="0" rIns="0" tIns="0" bIns="0">
-            <a:spAutoFit/>
-          </a:bodyPr>
-          <a:lstStyle/>
-          <a:p>
-            <a:pPr algn="r"/>
-            <a:r>
-              <a:rPr sz="1000" b="1" i="0">
-                <a:solidFill>
-                  <a:srgbClr val="8F989D"/>
-                </a:solidFill>
-                <a:latin typeface="Calibri"/>
-              </a:rPr>
-              <a:t>17</a:t>
-            </a:r>
-          </a:p>
-        </p:txBody>
-      </p:sp>
-      <p:sp>
-        <p:nvSpPr>
-          <p:cNvPr id="7" name="TextBox 6"/>
           <p:cNvSpPr txBox="1"/>
           <p:nvPr/>
         </p:nvSpPr>
@@ -8866,41 +8480,6 @@
         </p:nvSpPr>
         <p:spPr>
           <a:xfrm>
-            <a:off x="2194560" y="6446520"/>
-            <a:ext cx="5943600" cy="274320"/>
-          </a:xfrm>
-          <a:prstGeom prst="rect">
-            <a:avLst/>
-          </a:prstGeom>
-          <a:noFill/>
-        </p:spPr>
-        <p:txBody>
-          <a:bodyPr wrap="square" anchor="t" lIns="0" rIns="0" tIns="0" bIns="0">
-            <a:spAutoFit/>
-          </a:bodyPr>
-          <a:lstStyle/>
-          <a:p>
-            <a:pPr algn="l"/>
-            <a:r>
-              <a:rPr sz="1000" b="1" i="0">
-                <a:solidFill>
-                  <a:srgbClr val="8F989D"/>
-                </a:solidFill>
-                <a:latin typeface="Calibri"/>
-              </a:rPr>
-              <a:t>Inicio 5:10 pm</a:t>
-            </a:r>
-          </a:p>
-        </p:txBody>
-      </p:sp>
-      <p:sp>
-        <p:nvSpPr>
-          <p:cNvPr id="13" name="TextBox 12"/>
-          <p:cNvSpPr txBox="1"/>
-          <p:nvPr/>
-        </p:nvSpPr>
-        <p:spPr>
-          <a:xfrm>
             <a:off x="11094415" y="6446520"/>
             <a:ext cx="548640" cy="274320"/>
           </a:xfrm>
@@ -9368,41 +8947,6 @@
         </p:nvSpPr>
         <p:spPr>
           <a:xfrm>
-            <a:off x="2194560" y="6446520"/>
-            <a:ext cx="5943600" cy="274320"/>
-          </a:xfrm>
-          <a:prstGeom prst="rect">
-            <a:avLst/>
-          </a:prstGeom>
-          <a:noFill/>
-        </p:spPr>
-        <p:txBody>
-          <a:bodyPr wrap="square" anchor="t" lIns="0" rIns="0" tIns="0" bIns="0">
-            <a:spAutoFit/>
-          </a:bodyPr>
-          <a:lstStyle/>
-          <a:p>
-            <a:pPr algn="l"/>
-            <a:r>
-              <a:rPr sz="1000" b="1" i="0">
-                <a:solidFill>
-                  <a:srgbClr val="8F989D"/>
-                </a:solidFill>
-                <a:latin typeface="Calibri"/>
-              </a:rPr>
-              <a:t>Inicio 5:10 pm</a:t>
-            </a:r>
-          </a:p>
-        </p:txBody>
-      </p:sp>
-      <p:sp>
-        <p:nvSpPr>
-          <p:cNvPr id="11" name="TextBox 10"/>
-          <p:cNvSpPr txBox="1"/>
-          <p:nvPr/>
-        </p:nvSpPr>
-        <p:spPr>
-          <a:xfrm>
             <a:off x="11094415" y="6446520"/>
             <a:ext cx="548640" cy="274320"/>
           </a:xfrm>
@@ -9771,41 +9315,6 @@
         </p:nvSpPr>
         <p:spPr>
           <a:xfrm>
-            <a:off x="2194560" y="6446520"/>
-            <a:ext cx="5943600" cy="274320"/>
-          </a:xfrm>
-          <a:prstGeom prst="rect">
-            <a:avLst/>
-          </a:prstGeom>
-          <a:noFill/>
-        </p:spPr>
-        <p:txBody>
-          <a:bodyPr wrap="square" anchor="t" lIns="0" rIns="0" tIns="0" bIns="0">
-            <a:spAutoFit/>
-          </a:bodyPr>
-          <a:lstStyle/>
-          <a:p>
-            <a:pPr algn="l"/>
-            <a:r>
-              <a:rPr sz="1000" b="1" i="0">
-                <a:solidFill>
-                  <a:srgbClr val="8F989D"/>
-                </a:solidFill>
-                <a:latin typeface="Calibri"/>
-              </a:rPr>
-              <a:t>Inicio 5:10 pm</a:t>
-            </a:r>
-          </a:p>
-        </p:txBody>
-      </p:sp>
-      <p:sp>
-        <p:nvSpPr>
-          <p:cNvPr id="7" name="TextBox 6"/>
-          <p:cNvSpPr txBox="1"/>
-          <p:nvPr/>
-        </p:nvSpPr>
-        <p:spPr>
-          <a:xfrm>
             <a:off x="11094415" y="6446520"/>
             <a:ext cx="548640" cy="274320"/>
           </a:xfrm>
@@ -10071,41 +9580,6 @@
         </p:nvSpPr>
         <p:spPr>
           <a:xfrm>
-            <a:off x="2194560" y="6446520"/>
-            <a:ext cx="5943600" cy="274320"/>
-          </a:xfrm>
-          <a:prstGeom prst="rect">
-            <a:avLst/>
-          </a:prstGeom>
-          <a:noFill/>
-        </p:spPr>
-        <p:txBody>
-          <a:bodyPr wrap="square" anchor="t" lIns="0" rIns="0" tIns="0" bIns="0">
-            <a:spAutoFit/>
-          </a:bodyPr>
-          <a:lstStyle/>
-          <a:p>
-            <a:pPr algn="l"/>
-            <a:r>
-              <a:rPr sz="1000" b="1" i="0">
-                <a:solidFill>
-                  <a:srgbClr val="8F989D"/>
-                </a:solidFill>
-                <a:latin typeface="Calibri"/>
-              </a:rPr>
-              <a:t>Inicio 5:10 pm</a:t>
-            </a:r>
-          </a:p>
-        </p:txBody>
-      </p:sp>
-      <p:sp>
-        <p:nvSpPr>
-          <p:cNvPr id="6" name="TextBox 5"/>
-          <p:cNvSpPr txBox="1"/>
-          <p:nvPr/>
-        </p:nvSpPr>
-        <p:spPr>
-          <a:xfrm>
             <a:off x="11094415" y="6446520"/>
             <a:ext cx="548640" cy="274320"/>
           </a:xfrm>
@@ -10361,41 +9835,6 @@
           </a:p>
         </p:txBody>
       </p:sp>
-      <p:sp>
-        <p:nvSpPr>
-          <p:cNvPr id="7" name="TextBox 6"/>
-          <p:cNvSpPr txBox="1"/>
-          <p:nvPr/>
-        </p:nvSpPr>
-        <p:spPr>
-          <a:xfrm>
-            <a:off x="2194560" y="6446520"/>
-            <a:ext cx="5943600" cy="274320"/>
-          </a:xfrm>
-          <a:prstGeom prst="rect">
-            <a:avLst/>
-          </a:prstGeom>
-          <a:noFill/>
-        </p:spPr>
-        <p:txBody>
-          <a:bodyPr wrap="square" anchor="t" lIns="0" rIns="0" tIns="0" bIns="0">
-            <a:spAutoFit/>
-          </a:bodyPr>
-          <a:lstStyle/>
-          <a:p>
-            <a:pPr algn="l"/>
-            <a:r>
-              <a:rPr sz="1000" b="1" i="0">
-                <a:solidFill>
-                  <a:srgbClr val="8F989D"/>
-                </a:solidFill>
-                <a:latin typeface="Calibri"/>
-              </a:rPr>
-              <a:t>Inicio 5:10 pm</a:t>
-            </a:r>
-          </a:p>
-        </p:txBody>
-      </p:sp>
     </p:spTree>
   </p:cSld>
   <p:clrMapOvr>
@@ -10678,41 +10117,6 @@
         </p:nvSpPr>
         <p:spPr>
           <a:xfrm>
-            <a:off x="2194560" y="6446520"/>
-            <a:ext cx="5943600" cy="274320"/>
-          </a:xfrm>
-          <a:prstGeom prst="rect">
-            <a:avLst/>
-          </a:prstGeom>
-          <a:noFill/>
-        </p:spPr>
-        <p:txBody>
-          <a:bodyPr wrap="square" anchor="t" lIns="0" rIns="0" tIns="0" bIns="0">
-            <a:spAutoFit/>
-          </a:bodyPr>
-          <a:lstStyle/>
-          <a:p>
-            <a:pPr algn="l"/>
-            <a:r>
-              <a:rPr sz="1000" b="1" i="0">
-                <a:solidFill>
-                  <a:srgbClr val="8F989D"/>
-                </a:solidFill>
-                <a:latin typeface="Calibri"/>
-              </a:rPr>
-              <a:t>Inicio 5:10 pm</a:t>
-            </a:r>
-          </a:p>
-        </p:txBody>
-      </p:sp>
-      <p:sp>
-        <p:nvSpPr>
-          <p:cNvPr id="9" name="TextBox 8"/>
-          <p:cNvSpPr txBox="1"/>
-          <p:nvPr/>
-        </p:nvSpPr>
-        <p:spPr>
-          <a:xfrm>
             <a:off x="11094415" y="6446520"/>
             <a:ext cx="548640" cy="274320"/>
           </a:xfrm>
@@ -11198,41 +10602,6 @@
       <p:sp>
         <p:nvSpPr>
           <p:cNvPr id="10" name="TextBox 9"/>
-          <p:cNvSpPr txBox="1"/>
-          <p:nvPr/>
-        </p:nvSpPr>
-        <p:spPr>
-          <a:xfrm>
-            <a:off x="2194560" y="6446520"/>
-            <a:ext cx="5943600" cy="274320"/>
-          </a:xfrm>
-          <a:prstGeom prst="rect">
-            <a:avLst/>
-          </a:prstGeom>
-          <a:noFill/>
-        </p:spPr>
-        <p:txBody>
-          <a:bodyPr wrap="square" anchor="t" lIns="0" rIns="0" tIns="0" bIns="0">
-            <a:spAutoFit/>
-          </a:bodyPr>
-          <a:lstStyle/>
-          <a:p>
-            <a:pPr algn="l"/>
-            <a:r>
-              <a:rPr sz="1000" b="1" i="0">
-                <a:solidFill>
-                  <a:srgbClr val="8F989D"/>
-                </a:solidFill>
-                <a:latin typeface="Calibri"/>
-              </a:rPr>
-              <a:t>Inicio 5:10 pm</a:t>
-            </a:r>
-          </a:p>
-        </p:txBody>
-      </p:sp>
-      <p:sp>
-        <p:nvSpPr>
-          <p:cNvPr id="11" name="TextBox 10"/>
           <p:cNvSpPr txBox="1"/>
           <p:nvPr/>
         </p:nvSpPr>
@@ -11785,41 +11154,6 @@
         </p:nvSpPr>
         <p:spPr>
           <a:xfrm>
-            <a:off x="2194560" y="6446520"/>
-            <a:ext cx="5943600" cy="274320"/>
-          </a:xfrm>
-          <a:prstGeom prst="rect">
-            <a:avLst/>
-          </a:prstGeom>
-          <a:noFill/>
-        </p:spPr>
-        <p:txBody>
-          <a:bodyPr wrap="square" anchor="t" lIns="0" rIns="0" tIns="0" bIns="0">
-            <a:spAutoFit/>
-          </a:bodyPr>
-          <a:lstStyle/>
-          <a:p>
-            <a:pPr algn="l"/>
-            <a:r>
-              <a:rPr sz="1000" b="1" i="0">
-                <a:solidFill>
-                  <a:srgbClr val="8F989D"/>
-                </a:solidFill>
-                <a:latin typeface="Calibri"/>
-              </a:rPr>
-              <a:t>Inicio 5:10 pm</a:t>
-            </a:r>
-          </a:p>
-        </p:txBody>
-      </p:sp>
-      <p:sp>
-        <p:nvSpPr>
-          <p:cNvPr id="8" name="TextBox 7"/>
-          <p:cNvSpPr txBox="1"/>
-          <p:nvPr/>
-        </p:nvSpPr>
-        <p:spPr>
-          <a:xfrm>
             <a:off x="11094415" y="6446520"/>
             <a:ext cx="548640" cy="274320"/>
           </a:xfrm>
@@ -12345,8 +11679,8 @@
         </p:nvSpPr>
         <p:spPr>
           <a:xfrm>
-            <a:off x="2194560" y="6446520"/>
-            <a:ext cx="5943600" cy="274320"/>
+            <a:off x="11094415" y="6446520"/>
+            <a:ext cx="548640" cy="274320"/>
           </a:xfrm>
           <a:prstGeom prst="rect">
             <a:avLst/>
@@ -12359,7 +11693,7 @@
           </a:bodyPr>
           <a:lstStyle/>
           <a:p>
-            <a:pPr algn="l"/>
+            <a:pPr algn="r"/>
             <a:r>
               <a:rPr sz="1000" b="1" i="0">
                 <a:solidFill>
@@ -12367,7 +11701,7 @@
                 </a:solidFill>
                 <a:latin typeface="Calibri"/>
               </a:rPr>
-              <a:t>Inicio 5:10 pm</a:t>
+              <a:t>6</a:t>
             </a:r>
           </a:p>
         </p:txBody>
@@ -12375,41 +11709,6 @@
       <p:sp>
         <p:nvSpPr>
           <p:cNvPr id="6" name="TextBox 5"/>
-          <p:cNvSpPr txBox="1"/>
-          <p:nvPr/>
-        </p:nvSpPr>
-        <p:spPr>
-          <a:xfrm>
-            <a:off x="11094415" y="6446520"/>
-            <a:ext cx="548640" cy="274320"/>
-          </a:xfrm>
-          <a:prstGeom prst="rect">
-            <a:avLst/>
-          </a:prstGeom>
-          <a:noFill/>
-        </p:spPr>
-        <p:txBody>
-          <a:bodyPr wrap="square" anchor="t" lIns="0" rIns="0" tIns="0" bIns="0">
-            <a:spAutoFit/>
-          </a:bodyPr>
-          <a:lstStyle/>
-          <a:p>
-            <a:pPr algn="r"/>
-            <a:r>
-              <a:rPr sz="1000" b="1" i="0">
-                <a:solidFill>
-                  <a:srgbClr val="8F989D"/>
-                </a:solidFill>
-                <a:latin typeface="Calibri"/>
-              </a:rPr>
-              <a:t>6</a:t>
-            </a:r>
-          </a:p>
-        </p:txBody>
-      </p:sp>
-      <p:sp>
-        <p:nvSpPr>
-          <p:cNvPr id="7" name="TextBox 6"/>
           <p:cNvSpPr txBox="1"/>
           <p:nvPr/>
         </p:nvSpPr>
@@ -13264,41 +12563,6 @@
         </p:nvSpPr>
         <p:spPr>
           <a:xfrm>
-            <a:off x="2194560" y="6446520"/>
-            <a:ext cx="5943600" cy="274320"/>
-          </a:xfrm>
-          <a:prstGeom prst="rect">
-            <a:avLst/>
-          </a:prstGeom>
-          <a:noFill/>
-        </p:spPr>
-        <p:txBody>
-          <a:bodyPr wrap="square" anchor="t" lIns="0" rIns="0" tIns="0" bIns="0">
-            <a:spAutoFit/>
-          </a:bodyPr>
-          <a:lstStyle/>
-          <a:p>
-            <a:pPr algn="l"/>
-            <a:r>
-              <a:rPr sz="1000" b="1" i="0">
-                <a:solidFill>
-                  <a:srgbClr val="8F989D"/>
-                </a:solidFill>
-                <a:latin typeface="Calibri"/>
-              </a:rPr>
-              <a:t>Inicio 5:10 pm</a:t>
-            </a:r>
-          </a:p>
-        </p:txBody>
-      </p:sp>
-      <p:sp>
-        <p:nvSpPr>
-          <p:cNvPr id="7" name="TextBox 6"/>
-          <p:cNvSpPr txBox="1"/>
-          <p:nvPr/>
-        </p:nvSpPr>
-        <p:spPr>
-          <a:xfrm>
             <a:off x="11094415" y="6446520"/>
             <a:ext cx="548640" cy="274320"/>
           </a:xfrm>
@@ -13752,8 +13016,8 @@
         </p:nvSpPr>
         <p:spPr>
           <a:xfrm>
-            <a:off x="2194560" y="6446520"/>
-            <a:ext cx="5943600" cy="274320"/>
+            <a:off x="11094415" y="6446520"/>
+            <a:ext cx="548640" cy="274320"/>
           </a:xfrm>
           <a:prstGeom prst="rect">
             <a:avLst/>
@@ -13766,7 +13030,7 @@
           </a:bodyPr>
           <a:lstStyle/>
           <a:p>
-            <a:pPr algn="l"/>
+            <a:pPr algn="r"/>
             <a:r>
               <a:rPr sz="1000" b="1" i="0">
                 <a:solidFill>
@@ -13774,7 +13038,7 @@
                 </a:solidFill>
                 <a:latin typeface="Calibri"/>
               </a:rPr>
-              <a:t>Inicio 5:10 pm</a:t>
+              <a:t>8</a:t>
             </a:r>
           </a:p>
         </p:txBody>
@@ -13782,41 +13046,6 @@
       <p:sp>
         <p:nvSpPr>
           <p:cNvPr id="6" name="TextBox 5"/>
-          <p:cNvSpPr txBox="1"/>
-          <p:nvPr/>
-        </p:nvSpPr>
-        <p:spPr>
-          <a:xfrm>
-            <a:off x="11094415" y="6446520"/>
-            <a:ext cx="548640" cy="274320"/>
-          </a:xfrm>
-          <a:prstGeom prst="rect">
-            <a:avLst/>
-          </a:prstGeom>
-          <a:noFill/>
-        </p:spPr>
-        <p:txBody>
-          <a:bodyPr wrap="square" anchor="t" lIns="0" rIns="0" tIns="0" bIns="0">
-            <a:spAutoFit/>
-          </a:bodyPr>
-          <a:lstStyle/>
-          <a:p>
-            <a:pPr algn="r"/>
-            <a:r>
-              <a:rPr sz="1000" b="1" i="0">
-                <a:solidFill>
-                  <a:srgbClr val="8F989D"/>
-                </a:solidFill>
-                <a:latin typeface="Calibri"/>
-              </a:rPr>
-              <a:t>8</a:t>
-            </a:r>
-          </a:p>
-        </p:txBody>
-      </p:sp>
-      <p:sp>
-        <p:nvSpPr>
-          <p:cNvPr id="7" name="TextBox 6"/>
           <p:cNvSpPr txBox="1"/>
           <p:nvPr/>
         </p:nvSpPr>
@@ -14459,41 +13688,6 @@
         </p:nvSpPr>
         <p:spPr>
           <a:xfrm>
-            <a:off x="2194560" y="6446520"/>
-            <a:ext cx="5943600" cy="274320"/>
-          </a:xfrm>
-          <a:prstGeom prst="rect">
-            <a:avLst/>
-          </a:prstGeom>
-          <a:noFill/>
-        </p:spPr>
-        <p:txBody>
-          <a:bodyPr wrap="square" anchor="t" lIns="0" rIns="0" tIns="0" bIns="0">
-            <a:spAutoFit/>
-          </a:bodyPr>
-          <a:lstStyle/>
-          <a:p>
-            <a:pPr algn="l"/>
-            <a:r>
-              <a:rPr sz="1000" b="1" i="0">
-                <a:solidFill>
-                  <a:srgbClr val="8F989D"/>
-                </a:solidFill>
-                <a:latin typeface="Calibri"/>
-              </a:rPr>
-              <a:t>Inicio 5:10 pm</a:t>
-            </a:r>
-          </a:p>
-        </p:txBody>
-      </p:sp>
-      <p:sp>
-        <p:nvSpPr>
-          <p:cNvPr id="7" name="TextBox 6"/>
-          <p:cNvSpPr txBox="1"/>
-          <p:nvPr/>
-        </p:nvSpPr>
-        <p:spPr>
-          <a:xfrm>
             <a:off x="11094415" y="6446520"/>
             <a:ext cx="548640" cy="274320"/>
           </a:xfrm>

--- a/Pregrado/Creatividad y pensamiento innovador/Clases/Sesion 01 - Presentación del curso · docente · estudiantes · ACAs/Presentacion.pptx
+++ b/Pregrado/Creatividad y pensamiento innovador/Clases/Sesion 01 - Presentación del curso · docente · estudiantes · ACAs/Presentacion.pptx
@@ -26,6 +26,7 @@
     <p:sldId id="274" r:id="rId25"/>
     <p:sldId id="275" r:id="rId26"/>
     <p:sldId id="276" r:id="rId27"/>
+    <p:sldId id="277" r:id="rId28"/>
   </p:sldIdLst>
   <p:sldSz cx="12191695" cy="6858000" type="screen4x3"/>
   <p:notesSz cx="6858000" cy="9144000"/>
@@ -7574,7 +7575,7 @@
               </a:spcAft>
             </a:pPr>
             <a:r>
-              <a:rPr sz="1600" b="0" i="0">
+              <a:rPr sz="1400" b="0" i="0">
                 <a:solidFill>
                   <a:srgbClr val="2B2B2B"/>
                 </a:solidFill>
@@ -7583,7 +7584,7 @@
               <a:t>–   </a:t>
             </a:r>
             <a:r>
-              <a:rPr sz="1600" b="1" i="0">
+              <a:rPr sz="1400" b="1" i="0">
                 <a:solidFill>
                   <a:srgbClr val="2B2B2B"/>
                 </a:solidFill>
@@ -7592,7 +7593,7 @@
               <a:t>Lectura autónoma (obligatoria):</a:t>
             </a:r>
             <a:r>
-              <a:rPr sz="1600" b="0" i="0">
+              <a:rPr sz="1400" b="0" i="0">
                 <a:solidFill>
                   <a:srgbClr val="2B2B2B"/>
                 </a:solidFill>
@@ -7601,7 +7602,7 @@
               <a:t> unidades </a:t>
             </a:r>
             <a:r>
-              <a:rPr sz="1600" b="1" i="0">
+              <a:rPr sz="1400" b="1" i="0">
                 <a:solidFill>
                   <a:srgbClr val="2B2B2B"/>
                 </a:solidFill>
@@ -7610,7 +7611,7 @@
               <a:t>U1–U2</a:t>
             </a:r>
             <a:r>
-              <a:rPr sz="1600" b="0" i="0">
+              <a:rPr sz="1400" b="0" i="0">
                 <a:solidFill>
                   <a:srgbClr val="2B2B2B"/>
                 </a:solidFill>
@@ -7626,31 +7627,13 @@
               </a:spcAft>
             </a:pPr>
             <a:r>
-              <a:rPr sz="1500" b="0" i="0">
-                <a:solidFill>
-                  <a:srgbClr val="2B2B2B"/>
-                </a:solidFill>
-                <a:latin typeface="Calibri"/>
-              </a:rPr>
-              <a:t>●   El material está en </a:t>
-            </a:r>
-            <a:r>
-              <a:rPr sz="1500" b="1" i="0">
-                <a:solidFill>
-                  <a:srgbClr val="2B2B2B"/>
-                </a:solidFill>
-                <a:latin typeface="Calibri"/>
-              </a:rPr>
-              <a:t>CDigital</a:t>
-            </a:r>
-            <a:r>
-              <a:rPr sz="1500" b="0" i="0">
-                <a:solidFill>
-                  <a:srgbClr val="2B2B2B"/>
-                </a:solidFill>
-                <a:latin typeface="Calibri"/>
-              </a:rPr>
-              <a:t>. Las retomamos en los primeros minutos de la Sesión 02: se repasan, no se dictan completas.</a:t>
+              <a:rPr sz="1300" b="0" i="0">
+                <a:solidFill>
+                  <a:srgbClr val="2B2B2B"/>
+                </a:solidFill>
+                <a:latin typeface="Calibri"/>
+              </a:rPr>
+              <a:t>●   Las retomamos en los primeros minutos de la Sesión 02: se repasan, no se dictan completas.</a:t>
             </a:r>
           </a:p>
           <a:p>
@@ -7660,7 +7643,41 @@
               </a:spcAft>
             </a:pPr>
             <a:r>
-              <a:rPr sz="1500" b="0" i="0">
+              <a:rPr sz="1300" b="0" i="0">
+                <a:solidFill>
+                  <a:srgbClr val="2B2B2B"/>
+                </a:solidFill>
+                <a:latin typeface="Calibri"/>
+              </a:rPr>
+              <a:t>●   </a:t>
+            </a:r>
+            <a:r>
+              <a:rPr sz="1300" b="1" i="0">
+                <a:solidFill>
+                  <a:srgbClr val="2B2B2B"/>
+                </a:solidFill>
+                <a:latin typeface="Calibri"/>
+              </a:rPr>
+              <a:t>Dónde está:</a:t>
+            </a:r>
+            <a:r>
+              <a:rPr sz="1300" b="0" i="0">
+                <a:solidFill>
+                  <a:srgbClr val="2B2B2B"/>
+                </a:solidFill>
+                <a:latin typeface="Calibri"/>
+              </a:rPr>
+              <a:t> ya viene en tu carpeta del curso, en `Sesion 01 - …/` (el PDF `Lectura autonoma - Design Thinking en la universidad (REDIE 2020).pdf` y el archivo `Lectura autonoma - Sesion 01.txt` con la cita, el enlace y qué traer). También queda publicada en CDigital.</a:t>
+            </a:r>
+          </a:p>
+          <a:p>
+            <a:pPr lvl="1">
+              <a:spcAft>
+                <a:spcPts val="600"/>
+              </a:spcAft>
+            </a:pPr>
+            <a:r>
+              <a:rPr sz="1300" b="0" i="0">
                 <a:solidFill>
                   <a:srgbClr val="2B2B2B"/>
                 </a:solidFill>
@@ -7669,7 +7686,7 @@
               <a:t>●   Léalas con una pregunta en la mano: </a:t>
             </a:r>
             <a:r>
-              <a:rPr sz="1500" b="1" i="0">
+              <a:rPr sz="1300" b="1" i="0">
                 <a:solidFill>
                   <a:srgbClr val="2B2B2B"/>
                 </a:solidFill>
@@ -7685,7 +7702,7 @@
               </a:spcAft>
             </a:pPr>
             <a:r>
-              <a:rPr sz="1600" b="0" i="0">
+              <a:rPr sz="1400" b="0" i="0">
                 <a:solidFill>
                   <a:srgbClr val="2B2B2B"/>
                 </a:solidFill>
@@ -7694,7 +7711,7 @@
               <a:t>–   </a:t>
             </a:r>
             <a:r>
-              <a:rPr sz="1600" b="1" i="0">
+              <a:rPr sz="1400" b="1" i="0">
                 <a:solidFill>
                   <a:srgbClr val="2B2B2B"/>
                 </a:solidFill>
@@ -7703,7 +7720,7 @@
               <a:t>Abra el enunciado de la ACA 1</a:t>
             </a:r>
             <a:r>
-              <a:rPr sz="1600" b="0" i="0">
+              <a:rPr sz="1400" b="0" i="0">
                 <a:solidFill>
                   <a:srgbClr val="2B2B2B"/>
                 </a:solidFill>
@@ -7719,7 +7736,7 @@
               </a:spcAft>
             </a:pPr>
             <a:r>
-              <a:rPr sz="1600" b="0" i="0">
+              <a:rPr sz="1400" b="0" i="0">
                 <a:solidFill>
                   <a:srgbClr val="2B2B2B"/>
                 </a:solidFill>
@@ -7728,7 +7745,7 @@
               <a:t>–   </a:t>
             </a:r>
             <a:r>
-              <a:rPr sz="1600" b="1" i="0">
+              <a:rPr sz="1400" b="1" i="0">
                 <a:solidFill>
                   <a:srgbClr val="2B2B2B"/>
                 </a:solidFill>
@@ -7737,7 +7754,7 @@
               <a:t>Traiga escrito</a:t>
             </a:r>
             <a:r>
-              <a:rPr sz="1600" b="0" i="0">
+              <a:rPr sz="1400" b="0" i="0">
                 <a:solidFill>
                   <a:srgbClr val="2B2B2B"/>
                 </a:solidFill>
@@ -7746,7 +7763,7 @@
               <a:t> (con tres líneas basta): un problema real que le moleste, </a:t>
             </a:r>
             <a:r>
-              <a:rPr sz="1600" b="1" i="0">
+              <a:rPr sz="1400" b="1" i="0">
                 <a:solidFill>
                   <a:srgbClr val="2B2B2B"/>
                 </a:solidFill>
@@ -7755,7 +7772,7 @@
               <a:t>a quién</a:t>
             </a:r>
             <a:r>
-              <a:rPr sz="1600" b="0" i="0">
+              <a:rPr sz="1400" b="0" i="0">
                 <a:solidFill>
                   <a:srgbClr val="2B2B2B"/>
                 </a:solidFill>
@@ -7764,7 +7781,7 @@
               <a:t> le pasa y </a:t>
             </a:r>
             <a:r>
-              <a:rPr sz="1600" b="1" i="0">
+              <a:rPr sz="1400" b="1" i="0">
                 <a:solidFill>
                   <a:srgbClr val="2B2B2B"/>
                 </a:solidFill>
@@ -7773,7 +7790,7 @@
               <a:t>dónde</a:t>
             </a:r>
             <a:r>
-              <a:rPr sz="1600" b="0" i="0">
+              <a:rPr sz="1400" b="0" i="0">
                 <a:solidFill>
                   <a:srgbClr val="2B2B2B"/>
                 </a:solidFill>
@@ -7789,7 +7806,7 @@
               </a:spcAft>
             </a:pPr>
             <a:r>
-              <a:rPr sz="1500" b="0" i="0">
+              <a:rPr sz="1300" b="0" i="0">
                 <a:solidFill>
                   <a:srgbClr val="2B2B2B"/>
                 </a:solidFill>
@@ -7805,7 +7822,7 @@
               </a:spcAft>
             </a:pPr>
             <a:r>
-              <a:rPr sz="1600" b="0" i="0">
+              <a:rPr sz="1400" b="0" i="0">
                 <a:solidFill>
                   <a:srgbClr val="2B2B2B"/>
                 </a:solidFill>
@@ -7814,7 +7831,7 @@
               <a:t>–   </a:t>
             </a:r>
             <a:r>
-              <a:rPr sz="1600" b="1" i="0">
+              <a:rPr sz="1400" b="1" i="0">
                 <a:solidFill>
                   <a:srgbClr val="2B2B2B"/>
                 </a:solidFill>
@@ -7823,7 +7840,7 @@
               <a:t>Cree su documento de trabajo</a:t>
             </a:r>
             <a:r>
-              <a:rPr sz="1600" b="0" i="0">
+              <a:rPr sz="1400" b="0" i="0">
                 <a:solidFill>
                   <a:srgbClr val="2B2B2B"/>
                 </a:solidFill>
@@ -7839,7 +7856,7 @@
               </a:spcAft>
             </a:pPr>
             <a:r>
-              <a:rPr sz="1600" b="0" i="0">
+              <a:rPr sz="1400" b="0" i="0">
                 <a:solidFill>
                   <a:srgbClr val="2B2B2B"/>
                 </a:solidFill>
@@ -7848,22 +7865,22 @@
               <a:t>–   </a:t>
             </a:r>
             <a:r>
-              <a:rPr sz="1600" b="1" i="0">
-                <a:solidFill>
-                  <a:srgbClr val="2B2B2B"/>
-                </a:solidFill>
-                <a:latin typeface="Calibri"/>
-              </a:rPr>
-              <a:t>Sesión 02:</a:t>
-            </a:r>
-            <a:r>
-              <a:rPr sz="1600" b="0" i="0">
-                <a:solidFill>
-                  <a:srgbClr val="2B2B2B"/>
-                </a:solidFill>
-                <a:latin typeface="Calibri"/>
-              </a:rPr>
-              <a:t> *Creatividad e innovación en I+D · Design Thinking y técnicas* — se trabaja sobre lo que usted traiga.</a:t>
+              <a:rPr sz="1400" b="1" i="0">
+                <a:solidFill>
+                  <a:srgbClr val="2B2B2B"/>
+                </a:solidFill>
+                <a:latin typeface="Calibri"/>
+              </a:rPr>
+              <a:t>Use la ficha del curso:</a:t>
+            </a:r>
+            <a:r>
+              <a:rPr sz="1400" b="0" i="0">
+                <a:solidFill>
+                  <a:srgbClr val="2B2B2B"/>
+                </a:solidFill>
+                <a:latin typeface="Calibri"/>
+              </a:rPr>
+              <a:t> en `Sesion 01 - …/` están `Ficha_problema_oportunidad.docx` (la plantilla que se llena) y `Ejemplo_ficha_modelo.html` (un ejemplo ya diligenciado, ábralo en el navegador). Esa ficha se reutiliza como insumo de la ACA 1.</a:t>
             </a:r>
           </a:p>
         </p:txBody>
@@ -7899,40 +7916,6 @@
                 <a:latin typeface="Calibri"/>
               </a:rPr>
               <a:t>17</a:t>
-            </a:r>
-          </a:p>
-        </p:txBody>
-      </p:sp>
-      <p:sp>
-        <p:nvSpPr>
-          <p:cNvPr id="6" name="TextBox 5"/>
-          <p:cNvSpPr txBox="1"/>
-          <p:nvPr/>
-        </p:nvSpPr>
-        <p:spPr>
-          <a:xfrm>
-            <a:off x="640080" y="5943600"/>
-            <a:ext cx="9997135" cy="457200"/>
-          </a:xfrm>
-          <a:prstGeom prst="rect">
-            <a:avLst/>
-          </a:prstGeom>
-          <a:noFill/>
-        </p:spPr>
-        <p:txBody>
-          <a:bodyPr wrap="square" anchor="t" lIns="0" rIns="0" tIns="0" bIns="0">
-            <a:spAutoFit/>
-          </a:bodyPr>
-          <a:lstStyle/>
-          <a:p>
-            <a:r>
-              <a:rPr sz="1200" b="0" i="1">
-                <a:solidFill>
-                  <a:srgbClr val="2B2B2B"/>
-                </a:solidFill>
-                <a:latin typeface="Calibri"/>
-              </a:rPr>
-              <a:t>Sin un problema propio, la Sesión 02 se le vuelve teoría. Con un problema propio, sale de ella con su reto ya planteado.</a:t>
             </a:r>
           </a:p>
         </p:txBody>
@@ -8037,65 +8020,21 @@
                 </a:solidFill>
                 <a:latin typeface="Calibri"/>
               </a:rPr>
-              <a:t>Preguntas del primer día</a:t>
-            </a:r>
-          </a:p>
-        </p:txBody>
-      </p:sp>
-      <p:sp>
-        <p:nvSpPr>
-          <p:cNvPr id="4" name="Rounded Rectangle 3"/>
-          <p:cNvSpPr/>
-          <p:nvPr/>
-        </p:nvSpPr>
-        <p:spPr>
-          <a:xfrm>
-            <a:off x="640080" y="1737360"/>
-            <a:ext cx="10911535" cy="969264"/>
-          </a:xfrm>
-          <a:prstGeom prst="roundRect">
-            <a:avLst/>
-          </a:prstGeom>
-          <a:solidFill>
-            <a:srgbClr val="E8F5EC"/>
-          </a:solidFill>
-          <a:ln>
-            <a:noFill/>
-          </a:ln>
-          <a:effectLst/>
-        </p:spPr>
-        <p:style>
-          <a:lnRef idx="1">
-            <a:schemeClr val="accent1"/>
-          </a:lnRef>
-          <a:fillRef idx="3">
-            <a:schemeClr val="accent1"/>
-          </a:fillRef>
-          <a:effectRef idx="2">
-            <a:schemeClr val="accent1"/>
-          </a:effectRef>
-          <a:fontRef idx="minor">
-            <a:schemeClr val="lt1"/>
-          </a:fontRef>
-        </p:style>
-        <p:txBody>
-          <a:bodyPr rtlCol="0" anchor="ctr"/>
-          <a:lstStyle/>
-          <a:p>
-            <a:pPr algn="ctr"/>
-          </a:p>
-        </p:txBody>
-      </p:sp>
-      <p:sp>
-        <p:nvSpPr>
-          <p:cNvPr id="5" name="TextBox 4"/>
+              <a:t>Para la Sesión 02: lectura autónoma y qué traer (cont.)</a:t>
+            </a:r>
+          </a:p>
+        </p:txBody>
+      </p:sp>
+      <p:sp>
+        <p:nvSpPr>
+          <p:cNvPr id="4" name="TextBox 3"/>
           <p:cNvSpPr txBox="1"/>
           <p:nvPr/>
         </p:nvSpPr>
         <p:spPr>
           <a:xfrm>
-            <a:off x="868680" y="1847088"/>
-            <a:ext cx="10454335" cy="749808"/>
+            <a:off x="640080" y="1691639"/>
+            <a:ext cx="10911535" cy="4617720"/>
           </a:xfrm>
           <a:prstGeom prst="rect">
             <a:avLst/>
@@ -8108,97 +8047,51 @@
           </a:bodyPr>
           <a:lstStyle/>
           <a:p>
-            <a:r>
-              <a:rPr sz="1300" b="1" i="0">
-                <a:solidFill>
-                  <a:srgbClr val="0C2340"/>
-                </a:solidFill>
-                <a:latin typeface="Calibri"/>
-              </a:rPr>
-              <a:t>ℹ️ Nota institucional</a:t>
-            </a:r>
-          </a:p>
-          <a:p>
             <a:pPr>
-              <a:spcBef>
-                <a:spcPts val="400"/>
-              </a:spcBef>
+              <a:spcAft>
+                <a:spcPts val="1000"/>
+              </a:spcAft>
             </a:pPr>
             <a:r>
-              <a:rPr sz="1300" b="1" i="0">
-                <a:solidFill>
-                  <a:srgbClr val="2B2B2B"/>
-                </a:solidFill>
-                <a:latin typeface="Calibri"/>
-              </a:rPr>
-              <a:t>¿Esta materia se pierde fácil?</a:t>
-            </a:r>
-            <a:r>
-              <a:rPr sz="1300" b="0" i="0">
-                <a:solidFill>
-                  <a:srgbClr val="2B2B2B"/>
-                </a:solidFill>
-                <a:latin typeface="Calibri"/>
-              </a:rPr>
-              <a:t> No, si entrega. Se pierde por no entregar y por dejarlo todo para el Corte 3, que pesa el 40%.</a:t>
-            </a:r>
-          </a:p>
-        </p:txBody>
-      </p:sp>
-      <p:sp>
-        <p:nvSpPr>
-          <p:cNvPr id="6" name="Rounded Rectangle 5"/>
-          <p:cNvSpPr/>
-          <p:nvPr/>
-        </p:nvSpPr>
-        <p:spPr>
-          <a:xfrm>
-            <a:off x="640080" y="2935224"/>
-            <a:ext cx="10911535" cy="969264"/>
-          </a:xfrm>
-          <a:prstGeom prst="roundRect">
-            <a:avLst/>
-          </a:prstGeom>
-          <a:solidFill>
-            <a:srgbClr val="FDECD8"/>
-          </a:solidFill>
-          <a:ln>
-            <a:noFill/>
-          </a:ln>
-          <a:effectLst/>
-        </p:spPr>
-        <p:style>
-          <a:lnRef idx="1">
-            <a:schemeClr val="accent1"/>
-          </a:lnRef>
-          <a:fillRef idx="3">
-            <a:schemeClr val="accent1"/>
-          </a:fillRef>
-          <a:effectRef idx="2">
-            <a:schemeClr val="accent1"/>
-          </a:effectRef>
-          <a:fontRef idx="minor">
-            <a:schemeClr val="lt1"/>
-          </a:fontRef>
-        </p:style>
-        <p:txBody>
-          <a:bodyPr rtlCol="0" anchor="ctr"/>
-          <a:lstStyle/>
-          <a:p>
-            <a:pPr algn="ctr"/>
-          </a:p>
-        </p:txBody>
-      </p:sp>
-      <p:sp>
-        <p:nvSpPr>
-          <p:cNvPr id="7" name="TextBox 6"/>
+              <a:rPr sz="1600" b="0" i="0">
+                <a:solidFill>
+                  <a:srgbClr val="2B2B2B"/>
+                </a:solidFill>
+                <a:latin typeface="Calibri"/>
+              </a:rPr>
+              <a:t>–   </a:t>
+            </a:r>
+            <a:r>
+              <a:rPr sz="1600" b="1" i="0">
+                <a:solidFill>
+                  <a:srgbClr val="2B2B2B"/>
+                </a:solidFill>
+                <a:latin typeface="Calibri"/>
+              </a:rPr>
+              <a:t>Sesión 02:</a:t>
+            </a:r>
+            <a:r>
+              <a:rPr sz="1600" b="0" i="0">
+                <a:solidFill>
+                  <a:srgbClr val="2B2B2B"/>
+                </a:solidFill>
+                <a:latin typeface="Calibri"/>
+              </a:rPr>
+              <a:t> *Creatividad e innovación en I+D · Design Thinking y técnicas* — se trabaja sobre lo que usted traiga.</a:t>
+            </a:r>
+          </a:p>
+        </p:txBody>
+      </p:sp>
+      <p:sp>
+        <p:nvSpPr>
+          <p:cNvPr id="5" name="TextBox 4"/>
           <p:cNvSpPr txBox="1"/>
           <p:nvPr/>
         </p:nvSpPr>
         <p:spPr>
           <a:xfrm>
-            <a:off x="868680" y="3044952"/>
-            <a:ext cx="10454335" cy="749808"/>
+            <a:off x="11094415" y="6446520"/>
+            <a:ext cx="548640" cy="274320"/>
           </a:xfrm>
           <a:prstGeom prst="rect">
             <a:avLst/>
@@ -8211,115 +8104,29 @@
           </a:bodyPr>
           <a:lstStyle/>
           <a:p>
-            <a:r>
-              <a:rPr sz="1300" b="1" i="0">
-                <a:solidFill>
-                  <a:srgbClr val="0C2340"/>
-                </a:solidFill>
-                <a:latin typeface="Calibri"/>
-              </a:rPr>
-              <a:t>💡 Aclaración</a:t>
-            </a:r>
-          </a:p>
-          <a:p>
-            <a:pPr>
-              <a:spcBef>
-                <a:spcPts val="400"/>
-              </a:spcBef>
-            </a:pPr>
-            <a:r>
-              <a:rPr sz="1300" b="1" i="0">
-                <a:solidFill>
-                  <a:srgbClr val="2B2B2B"/>
-                </a:solidFill>
-                <a:latin typeface="Calibri"/>
-              </a:rPr>
-              <a:t>¿Puedo trabajar solo o en grupo?</a:t>
-            </a:r>
-            <a:r>
-              <a:rPr sz="1300" b="0" i="0">
-                <a:solidFill>
-                  <a:srgbClr val="2B2B2B"/>
-                </a:solidFill>
-                <a:latin typeface="Calibri"/>
-              </a:rPr>
-              <a:t> Puede trabajar en dúo si comparten el mismo problema, pero </a:t>
-            </a:r>
-            <a:r>
-              <a:rPr sz="1300" b="1" i="0">
-                <a:solidFill>
-                  <a:srgbClr val="2B2B2B"/>
-                </a:solidFill>
-                <a:latin typeface="Calibri"/>
-              </a:rPr>
-              <a:t>cada uno entrega</a:t>
-            </a:r>
-            <a:r>
-              <a:rPr sz="1300" b="0" i="0">
-                <a:solidFill>
-                  <a:srgbClr val="2B2B2B"/>
-                </a:solidFill>
-                <a:latin typeface="Calibri"/>
-              </a:rPr>
-              <a:t> su documento en CDigital.</a:t>
-            </a:r>
-          </a:p>
-        </p:txBody>
-      </p:sp>
-      <p:sp>
-        <p:nvSpPr>
-          <p:cNvPr id="8" name="Rounded Rectangle 7"/>
-          <p:cNvSpPr/>
-          <p:nvPr/>
-        </p:nvSpPr>
-        <p:spPr>
-          <a:xfrm>
-            <a:off x="640080" y="4133087"/>
-            <a:ext cx="10911535" cy="969264"/>
-          </a:xfrm>
-          <a:prstGeom prst="roundRect">
-            <a:avLst/>
-          </a:prstGeom>
-          <a:solidFill>
-            <a:srgbClr val="FBE4E4"/>
-          </a:solidFill>
-          <a:ln>
-            <a:noFill/>
-          </a:ln>
-          <a:effectLst/>
-        </p:spPr>
-        <p:style>
-          <a:lnRef idx="1">
-            <a:schemeClr val="accent1"/>
-          </a:lnRef>
-          <a:fillRef idx="3">
-            <a:schemeClr val="accent1"/>
-          </a:fillRef>
-          <a:effectRef idx="2">
-            <a:schemeClr val="accent1"/>
-          </a:effectRef>
-          <a:fontRef idx="minor">
-            <a:schemeClr val="lt1"/>
-          </a:fontRef>
-        </p:style>
-        <p:txBody>
-          <a:bodyPr rtlCol="0" anchor="ctr"/>
-          <a:lstStyle/>
-          <a:p>
-            <a:pPr algn="ctr"/>
-          </a:p>
-        </p:txBody>
-      </p:sp>
-      <p:sp>
-        <p:nvSpPr>
-          <p:cNvPr id="9" name="TextBox 8"/>
+            <a:pPr algn="r"/>
+            <a:r>
+              <a:rPr sz="1000" b="1" i="0">
+                <a:solidFill>
+                  <a:srgbClr val="8F989D"/>
+                </a:solidFill>
+                <a:latin typeface="Calibri"/>
+              </a:rPr>
+              <a:t>18</a:t>
+            </a:r>
+          </a:p>
+        </p:txBody>
+      </p:sp>
+      <p:sp>
+        <p:nvSpPr>
+          <p:cNvPr id="6" name="TextBox 5"/>
           <p:cNvSpPr txBox="1"/>
           <p:nvPr/>
         </p:nvSpPr>
         <p:spPr>
           <a:xfrm>
-            <a:off x="868680" y="4242816"/>
-            <a:ext cx="10454335" cy="749808"/>
+            <a:off x="640080" y="5943600"/>
+            <a:ext cx="9997135" cy="457200"/>
           </a:xfrm>
           <a:prstGeom prst="rect">
             <a:avLst/>
@@ -8333,176 +8140,13 @@
           <a:lstStyle/>
           <a:p>
             <a:r>
-              <a:rPr sz="1300" b="1" i="0">
-                <a:solidFill>
-                  <a:srgbClr val="0C2340"/>
-                </a:solidFill>
-                <a:latin typeface="Calibri"/>
-              </a:rPr>
-              <a:t>⚠️ Importante</a:t>
-            </a:r>
-          </a:p>
-          <a:p>
-            <a:pPr>
-              <a:spcBef>
-                <a:spcPts val="400"/>
-              </a:spcBef>
-            </a:pPr>
-            <a:r>
-              <a:rPr sz="1300" b="1" i="0">
-                <a:solidFill>
-                  <a:srgbClr val="2B2B2B"/>
-                </a:solidFill>
-                <a:latin typeface="Calibri"/>
-              </a:rPr>
-              <a:t>¿Sirve un trabajo de otro semestre?</a:t>
-            </a:r>
-            <a:r>
-              <a:rPr sz="1300" b="0" i="0">
-                <a:solidFill>
-                  <a:srgbClr val="2B2B2B"/>
-                </a:solidFill>
-                <a:latin typeface="Calibri"/>
-              </a:rPr>
-              <a:t> Puede partir de un proyecto suyo si lo declara y lo lleva más lejos. Volver a entregar lo mismo es autoplagio.</a:t>
-            </a:r>
-          </a:p>
-        </p:txBody>
-      </p:sp>
-      <p:sp>
-        <p:nvSpPr>
-          <p:cNvPr id="10" name="Rounded Rectangle 9"/>
-          <p:cNvSpPr/>
-          <p:nvPr/>
-        </p:nvSpPr>
-        <p:spPr>
-          <a:xfrm>
-            <a:off x="640080" y="5330952"/>
-            <a:ext cx="10911535" cy="713232"/>
-          </a:xfrm>
-          <a:prstGeom prst="roundRect">
-            <a:avLst/>
-          </a:prstGeom>
-          <a:solidFill>
-            <a:srgbClr val="E8F5EC"/>
-          </a:solidFill>
-          <a:ln>
-            <a:noFill/>
-          </a:ln>
-          <a:effectLst/>
-        </p:spPr>
-        <p:style>
-          <a:lnRef idx="1">
-            <a:schemeClr val="accent1"/>
-          </a:lnRef>
-          <a:fillRef idx="3">
-            <a:schemeClr val="accent1"/>
-          </a:fillRef>
-          <a:effectRef idx="2">
-            <a:schemeClr val="accent1"/>
-          </a:effectRef>
-          <a:fontRef idx="minor">
-            <a:schemeClr val="lt1"/>
-          </a:fontRef>
-        </p:style>
-        <p:txBody>
-          <a:bodyPr rtlCol="0" anchor="ctr"/>
-          <a:lstStyle/>
-          <a:p>
-            <a:pPr algn="ctr"/>
-          </a:p>
-        </p:txBody>
-      </p:sp>
-      <p:sp>
-        <p:nvSpPr>
-          <p:cNvPr id="11" name="TextBox 10"/>
-          <p:cNvSpPr txBox="1"/>
-          <p:nvPr/>
-        </p:nvSpPr>
-        <p:spPr>
-          <a:xfrm>
-            <a:off x="868680" y="5440680"/>
-            <a:ext cx="10454335" cy="493776"/>
-          </a:xfrm>
-          <a:prstGeom prst="rect">
-            <a:avLst/>
-          </a:prstGeom>
-          <a:noFill/>
-        </p:spPr>
-        <p:txBody>
-          <a:bodyPr wrap="square" anchor="t" lIns="0" rIns="0" tIns="0" bIns="0">
-            <a:spAutoFit/>
-          </a:bodyPr>
-          <a:lstStyle/>
-          <a:p>
-            <a:r>
-              <a:rPr sz="1300" b="1" i="0">
-                <a:solidFill>
-                  <a:srgbClr val="0C2340"/>
-                </a:solidFill>
-                <a:latin typeface="Calibri"/>
-              </a:rPr>
-              <a:t>ℹ️ Nota institucional</a:t>
-            </a:r>
-          </a:p>
-          <a:p>
-            <a:pPr>
-              <a:spcBef>
-                <a:spcPts val="400"/>
-              </a:spcBef>
-            </a:pPr>
-            <a:r>
-              <a:rPr sz="1300" b="1" i="0">
-                <a:solidFill>
-                  <a:srgbClr val="2B2B2B"/>
-                </a:solidFill>
-                <a:latin typeface="Calibri"/>
-              </a:rPr>
-              <a:t>¿Necesito saber programar o diseñar?</a:t>
-            </a:r>
-            <a:r>
-              <a:rPr sz="1300" b="0" i="0">
-                <a:solidFill>
-                  <a:srgbClr val="2B2B2B"/>
-                </a:solidFill>
-                <a:latin typeface="Calibri"/>
-              </a:rPr>
-              <a:t> No. Aquí se evalúa criterio, no herramientas.</a:t>
-            </a:r>
-          </a:p>
-        </p:txBody>
-      </p:sp>
-      <p:sp>
-        <p:nvSpPr>
-          <p:cNvPr id="12" name="TextBox 11"/>
-          <p:cNvSpPr txBox="1"/>
-          <p:nvPr/>
-        </p:nvSpPr>
-        <p:spPr>
-          <a:xfrm>
-            <a:off x="11094415" y="6446520"/>
-            <a:ext cx="548640" cy="274320"/>
-          </a:xfrm>
-          <a:prstGeom prst="rect">
-            <a:avLst/>
-          </a:prstGeom>
-          <a:noFill/>
-        </p:spPr>
-        <p:txBody>
-          <a:bodyPr wrap="square" anchor="t" lIns="0" rIns="0" tIns="0" bIns="0">
-            <a:spAutoFit/>
-          </a:bodyPr>
-          <a:lstStyle/>
-          <a:p>
-            <a:pPr algn="r"/>
-            <a:r>
-              <a:rPr sz="1000" b="1" i="0">
-                <a:solidFill>
-                  <a:srgbClr val="8F989D"/>
-                </a:solidFill>
-                <a:latin typeface="Calibri"/>
-              </a:rPr>
-              <a:t>18</a:t>
+              <a:rPr sz="1200" b="0" i="1">
+                <a:solidFill>
+                  <a:srgbClr val="2B2B2B"/>
+                </a:solidFill>
+                <a:latin typeface="Calibri"/>
+              </a:rPr>
+              <a:t>Sin un problema propio, la Sesión 02 se le vuelve teoría. Con un problema propio, sale de ella con su reto ya planteado.</a:t>
             </a:r>
           </a:p>
         </p:txBody>
@@ -8607,7 +8251,7 @@
                 </a:solidFill>
                 <a:latin typeface="Calibri"/>
               </a:rPr>
-              <a:t>ACUERDOS DE TRABAJO</a:t>
+              <a:t>Preguntas del primer día</a:t>
             </a:r>
           </a:p>
         </p:txBody>
@@ -8621,7 +8265,7 @@
         <p:spPr>
           <a:xfrm>
             <a:off x="640080" y="1737360"/>
-            <a:ext cx="10911535" cy="713232"/>
+            <a:ext cx="10911535" cy="969264"/>
           </a:xfrm>
           <a:prstGeom prst="roundRect">
             <a:avLst/>
@@ -8665,7 +8309,7 @@
         <p:spPr>
           <a:xfrm>
             <a:off x="868680" y="1847088"/>
-            <a:ext cx="10454335" cy="493776"/>
+            <a:ext cx="10454335" cy="749808"/>
           </a:xfrm>
           <a:prstGeom prst="rect">
             <a:avLst/>
@@ -8701,7 +8345,7 @@
                 </a:solidFill>
                 <a:latin typeface="Calibri"/>
               </a:rPr>
-              <a:t>Entrega oficial: CDigital.</a:t>
+              <a:t>¿Esta materia se pierde fácil?</a:t>
             </a:r>
             <a:r>
               <a:rPr sz="1300" b="0" i="0">
@@ -8710,7 +8354,7 @@
                 </a:solidFill>
                 <a:latin typeface="Calibri"/>
               </a:rPr>
-              <a:t> Lo que no esté ahí, no está entregado.</a:t>
+              <a:t> No, si entrega. Se pierde por no entregar y por dejarlo todo para el Corte 3, que pesa el 40%.</a:t>
             </a:r>
           </a:p>
         </p:txBody>
@@ -8723,8 +8367,8 @@
         </p:nvSpPr>
         <p:spPr>
           <a:xfrm>
-            <a:off x="640080" y="2679191"/>
-            <a:ext cx="10911535" cy="713232"/>
+            <a:off x="640080" y="2935224"/>
+            <a:ext cx="10911535" cy="969264"/>
           </a:xfrm>
           <a:prstGeom prst="roundRect">
             <a:avLst/>
@@ -8767,8 +8411,8 @@
         </p:nvSpPr>
         <p:spPr>
           <a:xfrm>
-            <a:off x="868680" y="2788920"/>
-            <a:ext cx="10454335" cy="493776"/>
+            <a:off x="868680" y="3044952"/>
+            <a:ext cx="10454335" cy="749808"/>
           </a:xfrm>
           <a:prstGeom prst="rect">
             <a:avLst/>
@@ -8798,13 +8442,22 @@
               </a:spcBef>
             </a:pPr>
             <a:r>
+              <a:rPr sz="1300" b="1" i="0">
+                <a:solidFill>
+                  <a:srgbClr val="2B2B2B"/>
+                </a:solidFill>
+                <a:latin typeface="Calibri"/>
+              </a:rPr>
+              <a:t>¿Puedo trabajar solo o en grupo?</a:t>
+            </a:r>
+            <a:r>
               <a:rPr sz="1300" b="0" i="0">
                 <a:solidFill>
                   <a:srgbClr val="2B2B2B"/>
                 </a:solidFill>
                 <a:latin typeface="Calibri"/>
               </a:rPr>
-              <a:t>Traer el avance </a:t>
+              <a:t> Puede trabajar en dúo si comparten el mismo problema, pero </a:t>
             </a:r>
             <a:r>
               <a:rPr sz="1300" b="1" i="0">
@@ -8813,7 +8466,7 @@
                 </a:solidFill>
                 <a:latin typeface="Calibri"/>
               </a:rPr>
-              <a:t>escrito</a:t>
+              <a:t>cada uno entrega</a:t>
             </a:r>
             <a:r>
               <a:rPr sz="1300" b="0" i="0">
@@ -8822,7 +8475,7 @@
                 </a:solidFill>
                 <a:latin typeface="Calibri"/>
               </a:rPr>
-              <a:t> a cada encuentro: se trabaja sobre lo que ya existe.</a:t>
+              <a:t> su documento en CDigital.</a:t>
             </a:r>
           </a:p>
         </p:txBody>
@@ -8835,8 +8488,8 @@
         </p:nvSpPr>
         <p:spPr>
           <a:xfrm>
-            <a:off x="640080" y="3621024"/>
-            <a:ext cx="10911535" cy="713232"/>
+            <a:off x="640080" y="4133087"/>
+            <a:ext cx="10911535" cy="969264"/>
           </a:xfrm>
           <a:prstGeom prst="roundRect">
             <a:avLst/>
@@ -8879,8 +8532,8 @@
         </p:nvSpPr>
         <p:spPr>
           <a:xfrm>
-            <a:off x="868680" y="3730752"/>
-            <a:ext cx="10454335" cy="493776"/>
+            <a:off x="868680" y="4242816"/>
+            <a:ext cx="10454335" cy="749808"/>
           </a:xfrm>
           <a:prstGeom prst="rect">
             <a:avLst/>
@@ -8910,22 +8563,116 @@
               </a:spcBef>
             </a:pPr>
             <a:r>
+              <a:rPr sz="1300" b="1" i="0">
+                <a:solidFill>
+                  <a:srgbClr val="2B2B2B"/>
+                </a:solidFill>
+                <a:latin typeface="Calibri"/>
+              </a:rPr>
+              <a:t>¿Sirve un trabajo de otro semestre?</a:t>
+            </a:r>
+            <a:r>
               <a:rPr sz="1300" b="0" i="0">
                 <a:solidFill>
                   <a:srgbClr val="2B2B2B"/>
                 </a:solidFill>
                 <a:latin typeface="Calibri"/>
               </a:rPr>
-              <a:t>Integridad académica: citar siempre en </a:t>
-            </a:r>
+              <a:t> Puede partir de un proyecto suyo si lo declara y lo lleva más lejos. Volver a entregar lo mismo es autoplagio.</a:t>
+            </a:r>
+          </a:p>
+        </p:txBody>
+      </p:sp>
+      <p:sp>
+        <p:nvSpPr>
+          <p:cNvPr id="10" name="Rounded Rectangle 9"/>
+          <p:cNvSpPr/>
+          <p:nvPr/>
+        </p:nvSpPr>
+        <p:spPr>
+          <a:xfrm>
+            <a:off x="640080" y="5330952"/>
+            <a:ext cx="10911535" cy="713232"/>
+          </a:xfrm>
+          <a:prstGeom prst="roundRect">
+            <a:avLst/>
+          </a:prstGeom>
+          <a:solidFill>
+            <a:srgbClr val="E8F5EC"/>
+          </a:solidFill>
+          <a:ln>
+            <a:noFill/>
+          </a:ln>
+          <a:effectLst/>
+        </p:spPr>
+        <p:style>
+          <a:lnRef idx="1">
+            <a:schemeClr val="accent1"/>
+          </a:lnRef>
+          <a:fillRef idx="3">
+            <a:schemeClr val="accent1"/>
+          </a:fillRef>
+          <a:effectRef idx="2">
+            <a:schemeClr val="accent1"/>
+          </a:effectRef>
+          <a:fontRef idx="minor">
+            <a:schemeClr val="lt1"/>
+          </a:fontRef>
+        </p:style>
+        <p:txBody>
+          <a:bodyPr rtlCol="0" anchor="ctr"/>
+          <a:lstStyle/>
+          <a:p>
+            <a:pPr algn="ctr"/>
+          </a:p>
+        </p:txBody>
+      </p:sp>
+      <p:sp>
+        <p:nvSpPr>
+          <p:cNvPr id="11" name="TextBox 10"/>
+          <p:cNvSpPr txBox="1"/>
+          <p:nvPr/>
+        </p:nvSpPr>
+        <p:spPr>
+          <a:xfrm>
+            <a:off x="868680" y="5440680"/>
+            <a:ext cx="10454335" cy="493776"/>
+          </a:xfrm>
+          <a:prstGeom prst="rect">
+            <a:avLst/>
+          </a:prstGeom>
+          <a:noFill/>
+        </p:spPr>
+        <p:txBody>
+          <a:bodyPr wrap="square" anchor="t" lIns="0" rIns="0" tIns="0" bIns="0">
+            <a:spAutoFit/>
+          </a:bodyPr>
+          <a:lstStyle/>
+          <a:p>
             <a:r>
               <a:rPr sz="1300" b="1" i="0">
                 <a:solidFill>
-                  <a:srgbClr val="2B2B2B"/>
-                </a:solidFill>
-                <a:latin typeface="Calibri"/>
-              </a:rPr>
-              <a:t>APA 7</a:t>
+                  <a:srgbClr val="0C2340"/>
+                </a:solidFill>
+                <a:latin typeface="Calibri"/>
+              </a:rPr>
+              <a:t>ℹ️ Nota institucional</a:t>
+            </a:r>
+          </a:p>
+          <a:p>
+            <a:pPr>
+              <a:spcBef>
+                <a:spcPts val="400"/>
+              </a:spcBef>
+            </a:pPr>
+            <a:r>
+              <a:rPr sz="1300" b="1" i="0">
+                <a:solidFill>
+                  <a:srgbClr val="2B2B2B"/>
+                </a:solidFill>
+                <a:latin typeface="Calibri"/>
+              </a:rPr>
+              <a:t>¿Necesito saber programar o diseñar?</a:t>
             </a:r>
             <a:r>
               <a:rPr sz="1300" b="0" i="0">
@@ -8934,14 +8681,14 @@
                 </a:solidFill>
                 <a:latin typeface="Calibri"/>
               </a:rPr>
-              <a:t>. El plagio tiene debido proceso.</a:t>
-            </a:r>
-          </a:p>
-        </p:txBody>
-      </p:sp>
-      <p:sp>
-        <p:nvSpPr>
-          <p:cNvPr id="10" name="TextBox 9"/>
+              <a:t> No. Aquí se evalúa criterio, no herramientas.</a:t>
+            </a:r>
+          </a:p>
+        </p:txBody>
+      </p:sp>
+      <p:sp>
+        <p:nvSpPr>
+          <p:cNvPr id="12" name="TextBox 11"/>
           <p:cNvSpPr txBox="1"/>
           <p:nvPr/>
         </p:nvSpPr>
@@ -9442,21 +9189,65 @@
                 </a:solidFill>
                 <a:latin typeface="Calibri"/>
               </a:rPr>
-              <a:t>PARA LA PRÓXIMA SESIÓN</a:t>
-            </a:r>
-          </a:p>
-        </p:txBody>
-      </p:sp>
-      <p:sp>
-        <p:nvSpPr>
-          <p:cNvPr id="4" name="TextBox 3"/>
+              <a:t>ACUERDOS DE TRABAJO</a:t>
+            </a:r>
+          </a:p>
+        </p:txBody>
+      </p:sp>
+      <p:sp>
+        <p:nvSpPr>
+          <p:cNvPr id="4" name="Rounded Rectangle 3"/>
+          <p:cNvSpPr/>
+          <p:nvPr/>
+        </p:nvSpPr>
+        <p:spPr>
+          <a:xfrm>
+            <a:off x="640080" y="1737360"/>
+            <a:ext cx="10911535" cy="713232"/>
+          </a:xfrm>
+          <a:prstGeom prst="roundRect">
+            <a:avLst/>
+          </a:prstGeom>
+          <a:solidFill>
+            <a:srgbClr val="E8F5EC"/>
+          </a:solidFill>
+          <a:ln>
+            <a:noFill/>
+          </a:ln>
+          <a:effectLst/>
+        </p:spPr>
+        <p:style>
+          <a:lnRef idx="1">
+            <a:schemeClr val="accent1"/>
+          </a:lnRef>
+          <a:fillRef idx="3">
+            <a:schemeClr val="accent1"/>
+          </a:fillRef>
+          <a:effectRef idx="2">
+            <a:schemeClr val="accent1"/>
+          </a:effectRef>
+          <a:fontRef idx="minor">
+            <a:schemeClr val="lt1"/>
+          </a:fontRef>
+        </p:style>
+        <p:txBody>
+          <a:bodyPr rtlCol="0" anchor="ctr"/>
+          <a:lstStyle/>
+          <a:p>
+            <a:pPr algn="ctr"/>
+          </a:p>
+        </p:txBody>
+      </p:sp>
+      <p:sp>
+        <p:nvSpPr>
+          <p:cNvPr id="5" name="TextBox 4"/>
           <p:cNvSpPr txBox="1"/>
           <p:nvPr/>
         </p:nvSpPr>
         <p:spPr>
           <a:xfrm>
-            <a:off x="640080" y="1691639"/>
-            <a:ext cx="10911535" cy="4617720"/>
+            <a:off x="868680" y="1847088"/>
+            <a:ext cx="10454335" cy="493776"/>
           </a:xfrm>
           <a:prstGeom prst="rect">
             <a:avLst/>
@@ -9469,112 +9260,270 @@
           </a:bodyPr>
           <a:lstStyle/>
           <a:p>
+            <a:r>
+              <a:rPr sz="1300" b="1" i="0">
+                <a:solidFill>
+                  <a:srgbClr val="0C2340"/>
+                </a:solidFill>
+                <a:latin typeface="Calibri"/>
+              </a:rPr>
+              <a:t>ℹ️ Nota institucional</a:t>
+            </a:r>
+          </a:p>
+          <a:p>
             <a:pPr>
-              <a:spcAft>
-                <a:spcPts val="1000"/>
-              </a:spcAft>
+              <a:spcBef>
+                <a:spcPts val="400"/>
+              </a:spcBef>
             </a:pPr>
             <a:r>
-              <a:rPr sz="1600" b="0" i="0">
-                <a:solidFill>
-                  <a:srgbClr val="2B2B2B"/>
-                </a:solidFill>
-                <a:latin typeface="Calibri"/>
-              </a:rPr>
-              <a:t>–   </a:t>
-            </a:r>
-            <a:r>
-              <a:rPr sz="1600" b="1" i="0">
-                <a:solidFill>
-                  <a:srgbClr val="2B2B2B"/>
-                </a:solidFill>
-                <a:latin typeface="Calibri"/>
-              </a:rPr>
-              <a:t>Lectura autónoma:</a:t>
-            </a:r>
-            <a:r>
-              <a:rPr sz="1600" b="0" i="0">
-                <a:solidFill>
-                  <a:srgbClr val="2B2B2B"/>
-                </a:solidFill>
-                <a:latin typeface="Calibri"/>
-              </a:rPr>
-              <a:t> U1–U2 (Propuesta de Innovación · creatividad e inteligencia emocional) — la retomamos al abrir la Sesión 02.</a:t>
+              <a:rPr sz="1300" b="1" i="0">
+                <a:solidFill>
+                  <a:srgbClr val="2B2B2B"/>
+                </a:solidFill>
+                <a:latin typeface="Calibri"/>
+              </a:rPr>
+              <a:t>Entrega oficial: CDigital.</a:t>
+            </a:r>
+            <a:r>
+              <a:rPr sz="1300" b="0" i="0">
+                <a:solidFill>
+                  <a:srgbClr val="2B2B2B"/>
+                </a:solidFill>
+                <a:latin typeface="Calibri"/>
+              </a:rPr>
+              <a:t> Lo que no esté ahí, no está entregado.</a:t>
+            </a:r>
+          </a:p>
+        </p:txBody>
+      </p:sp>
+      <p:sp>
+        <p:nvSpPr>
+          <p:cNvPr id="6" name="Rounded Rectangle 5"/>
+          <p:cNvSpPr/>
+          <p:nvPr/>
+        </p:nvSpPr>
+        <p:spPr>
+          <a:xfrm>
+            <a:off x="640080" y="2679191"/>
+            <a:ext cx="10911535" cy="713232"/>
+          </a:xfrm>
+          <a:prstGeom prst="roundRect">
+            <a:avLst/>
+          </a:prstGeom>
+          <a:solidFill>
+            <a:srgbClr val="FDECD8"/>
+          </a:solidFill>
+          <a:ln>
+            <a:noFill/>
+          </a:ln>
+          <a:effectLst/>
+        </p:spPr>
+        <p:style>
+          <a:lnRef idx="1">
+            <a:schemeClr val="accent1"/>
+          </a:lnRef>
+          <a:fillRef idx="3">
+            <a:schemeClr val="accent1"/>
+          </a:fillRef>
+          <a:effectRef idx="2">
+            <a:schemeClr val="accent1"/>
+          </a:effectRef>
+          <a:fontRef idx="minor">
+            <a:schemeClr val="lt1"/>
+          </a:fontRef>
+        </p:style>
+        <p:txBody>
+          <a:bodyPr rtlCol="0" anchor="ctr"/>
+          <a:lstStyle/>
+          <a:p>
+            <a:pPr algn="ctr"/>
+          </a:p>
+        </p:txBody>
+      </p:sp>
+      <p:sp>
+        <p:nvSpPr>
+          <p:cNvPr id="7" name="TextBox 6"/>
+          <p:cNvSpPr txBox="1"/>
+          <p:nvPr/>
+        </p:nvSpPr>
+        <p:spPr>
+          <a:xfrm>
+            <a:off x="868680" y="2788920"/>
+            <a:ext cx="10454335" cy="493776"/>
+          </a:xfrm>
+          <a:prstGeom prst="rect">
+            <a:avLst/>
+          </a:prstGeom>
+          <a:noFill/>
+        </p:spPr>
+        <p:txBody>
+          <a:bodyPr wrap="square" anchor="t" lIns="0" rIns="0" tIns="0" bIns="0">
+            <a:spAutoFit/>
+          </a:bodyPr>
+          <a:lstStyle/>
+          <a:p>
+            <a:r>
+              <a:rPr sz="1300" b="1" i="0">
+                <a:solidFill>
+                  <a:srgbClr val="0C2340"/>
+                </a:solidFill>
+                <a:latin typeface="Calibri"/>
+              </a:rPr>
+              <a:t>💡 Aclaración</a:t>
             </a:r>
           </a:p>
           <a:p>
             <a:pPr>
-              <a:spcAft>
-                <a:spcPts val="1000"/>
-              </a:spcAft>
+              <a:spcBef>
+                <a:spcPts val="400"/>
+              </a:spcBef>
             </a:pPr>
             <a:r>
-              <a:rPr sz="1600" b="0" i="0">
-                <a:solidFill>
-                  <a:srgbClr val="2B2B2B"/>
-                </a:solidFill>
-                <a:latin typeface="Calibri"/>
-              </a:rPr>
-              <a:t>–   Revisar la </a:t>
-            </a:r>
-            <a:r>
-              <a:rPr sz="1600" b="1" i="0">
-                <a:solidFill>
-                  <a:srgbClr val="2B2B2B"/>
-                </a:solidFill>
-                <a:latin typeface="Calibri"/>
-              </a:rPr>
-              <a:t>Presentación del Curso</a:t>
-            </a:r>
-            <a:r>
-              <a:rPr sz="1600" b="0" i="0">
-                <a:solidFill>
-                  <a:srgbClr val="2B2B2B"/>
-                </a:solidFill>
-                <a:latin typeface="Calibri"/>
-              </a:rPr>
-              <a:t> completa (fechas, evaluación, contenido de todas las sesiones).</a:t>
+              <a:rPr sz="1300" b="0" i="0">
+                <a:solidFill>
+                  <a:srgbClr val="2B2B2B"/>
+                </a:solidFill>
+                <a:latin typeface="Calibri"/>
+              </a:rPr>
+              <a:t>Traer el avance </a:t>
+            </a:r>
+            <a:r>
+              <a:rPr sz="1300" b="1" i="0">
+                <a:solidFill>
+                  <a:srgbClr val="2B2B2B"/>
+                </a:solidFill>
+                <a:latin typeface="Calibri"/>
+              </a:rPr>
+              <a:t>escrito</a:t>
+            </a:r>
+            <a:r>
+              <a:rPr sz="1300" b="0" i="0">
+                <a:solidFill>
+                  <a:srgbClr val="2B2B2B"/>
+                </a:solidFill>
+                <a:latin typeface="Calibri"/>
+              </a:rPr>
+              <a:t> a cada encuentro: se trabaja sobre lo que ya existe.</a:t>
+            </a:r>
+          </a:p>
+        </p:txBody>
+      </p:sp>
+      <p:sp>
+        <p:nvSpPr>
+          <p:cNvPr id="8" name="Rounded Rectangle 7"/>
+          <p:cNvSpPr/>
+          <p:nvPr/>
+        </p:nvSpPr>
+        <p:spPr>
+          <a:xfrm>
+            <a:off x="640080" y="3621024"/>
+            <a:ext cx="10911535" cy="713232"/>
+          </a:xfrm>
+          <a:prstGeom prst="roundRect">
+            <a:avLst/>
+          </a:prstGeom>
+          <a:solidFill>
+            <a:srgbClr val="FBE4E4"/>
+          </a:solidFill>
+          <a:ln>
+            <a:noFill/>
+          </a:ln>
+          <a:effectLst/>
+        </p:spPr>
+        <p:style>
+          <a:lnRef idx="1">
+            <a:schemeClr val="accent1"/>
+          </a:lnRef>
+          <a:fillRef idx="3">
+            <a:schemeClr val="accent1"/>
+          </a:fillRef>
+          <a:effectRef idx="2">
+            <a:schemeClr val="accent1"/>
+          </a:effectRef>
+          <a:fontRef idx="minor">
+            <a:schemeClr val="lt1"/>
+          </a:fontRef>
+        </p:style>
+        <p:txBody>
+          <a:bodyPr rtlCol="0" anchor="ctr"/>
+          <a:lstStyle/>
+          <a:p>
+            <a:pPr algn="ctr"/>
+          </a:p>
+        </p:txBody>
+      </p:sp>
+      <p:sp>
+        <p:nvSpPr>
+          <p:cNvPr id="9" name="TextBox 8"/>
+          <p:cNvSpPr txBox="1"/>
+          <p:nvPr/>
+        </p:nvSpPr>
+        <p:spPr>
+          <a:xfrm>
+            <a:off x="868680" y="3730752"/>
+            <a:ext cx="10454335" cy="493776"/>
+          </a:xfrm>
+          <a:prstGeom prst="rect">
+            <a:avLst/>
+          </a:prstGeom>
+          <a:noFill/>
+        </p:spPr>
+        <p:txBody>
+          <a:bodyPr wrap="square" anchor="t" lIns="0" rIns="0" tIns="0" bIns="0">
+            <a:spAutoFit/>
+          </a:bodyPr>
+          <a:lstStyle/>
+          <a:p>
+            <a:r>
+              <a:rPr sz="1300" b="1" i="0">
+                <a:solidFill>
+                  <a:srgbClr val="0C2340"/>
+                </a:solidFill>
+                <a:latin typeface="Calibri"/>
+              </a:rPr>
+              <a:t>⚠️ Importante</a:t>
             </a:r>
           </a:p>
           <a:p>
             <a:pPr>
-              <a:spcAft>
-                <a:spcPts val="1000"/>
-              </a:spcAft>
+              <a:spcBef>
+                <a:spcPts val="400"/>
+              </a:spcBef>
             </a:pPr>
             <a:r>
-              <a:rPr sz="1600" b="0" i="0">
-                <a:solidFill>
-                  <a:srgbClr val="2B2B2B"/>
-                </a:solidFill>
-                <a:latin typeface="Calibri"/>
-              </a:rPr>
-              <a:t>–   Abrir el enunciado de la </a:t>
-            </a:r>
-            <a:r>
-              <a:rPr sz="1600" b="1" i="0">
-                <a:solidFill>
-                  <a:srgbClr val="2B2B2B"/>
-                </a:solidFill>
-                <a:latin typeface="Calibri"/>
-              </a:rPr>
-              <a:t>ACA 1</a:t>
-            </a:r>
-            <a:r>
-              <a:rPr sz="1600" b="0" i="0">
-                <a:solidFill>
-                  <a:srgbClr val="2B2B2B"/>
-                </a:solidFill>
-                <a:latin typeface="Calibri"/>
-              </a:rPr>
-              <a:t> en `Clases/Recursos/ACAs/` y leerlo entero.</a:t>
-            </a:r>
-          </a:p>
-        </p:txBody>
-      </p:sp>
-      <p:sp>
-        <p:nvSpPr>
-          <p:cNvPr id="5" name="TextBox 4"/>
+              <a:rPr sz="1300" b="0" i="0">
+                <a:solidFill>
+                  <a:srgbClr val="2B2B2B"/>
+                </a:solidFill>
+                <a:latin typeface="Calibri"/>
+              </a:rPr>
+              <a:t>Integridad académica: citar siempre en </a:t>
+            </a:r>
+            <a:r>
+              <a:rPr sz="1300" b="1" i="0">
+                <a:solidFill>
+                  <a:srgbClr val="2B2B2B"/>
+                </a:solidFill>
+                <a:latin typeface="Calibri"/>
+              </a:rPr>
+              <a:t>APA 7</a:t>
+            </a:r>
+            <a:r>
+              <a:rPr sz="1300" b="0" i="0">
+                <a:solidFill>
+                  <a:srgbClr val="2B2B2B"/>
+                </a:solidFill>
+                <a:latin typeface="Calibri"/>
+              </a:rPr>
+              <a:t>. El plagio tiene debido proceso.</a:t>
+            </a:r>
+          </a:p>
+        </p:txBody>
+      </p:sp>
+      <p:sp>
+        <p:nvSpPr>
+          <p:cNvPr id="10" name="TextBox 9"/>
           <p:cNvSpPr txBox="1"/>
           <p:nvPr/>
         </p:nvSpPr>
@@ -9616,6 +9565,271 @@
 </file>
 
 <file path=ppt/slides/slide21.xml><?xml version="1.0" encoding="utf-8"?>
+<p:sld xmlns:a="http://schemas.openxmlformats.org/drawingml/2006/main" xmlns:p="http://schemas.openxmlformats.org/presentationml/2006/main" xmlns:r="http://schemas.openxmlformats.org/officeDocument/2006/relationships">
+  <p:cSld>
+    <p:bg>
+      <p:bgPr>
+        <a:solidFill>
+          <a:srgbClr val="FFFFFF"/>
+        </a:solidFill>
+        <a:effectLst/>
+      </p:bgPr>
+    </p:bg>
+    <p:spTree>
+      <p:nvGrpSpPr>
+        <p:cNvPr id="1" name=""/>
+        <p:cNvGrpSpPr/>
+        <p:nvPr/>
+      </p:nvGrpSpPr>
+      <p:grpSpPr/>
+      <p:sp>
+        <p:nvSpPr>
+          <p:cNvPr id="2" name="Rectangle 1"/>
+          <p:cNvSpPr/>
+          <p:nvPr/>
+        </p:nvSpPr>
+        <p:spPr>
+          <a:xfrm>
+            <a:off x="0" y="0"/>
+            <a:ext cx="12191695" cy="1188720"/>
+          </a:xfrm>
+          <a:prstGeom prst="rect">
+            <a:avLst/>
+          </a:prstGeom>
+          <a:solidFill>
+            <a:srgbClr val="0C2340"/>
+          </a:solidFill>
+          <a:ln>
+            <a:noFill/>
+          </a:ln>
+          <a:effectLst/>
+        </p:spPr>
+        <p:style>
+          <a:lnRef idx="1">
+            <a:schemeClr val="accent1"/>
+          </a:lnRef>
+          <a:fillRef idx="3">
+            <a:schemeClr val="accent1"/>
+          </a:fillRef>
+          <a:effectRef idx="2">
+            <a:schemeClr val="accent1"/>
+          </a:effectRef>
+          <a:fontRef idx="minor">
+            <a:schemeClr val="lt1"/>
+          </a:fontRef>
+        </p:style>
+        <p:txBody>
+          <a:bodyPr rtlCol="0" anchor="ctr"/>
+          <a:lstStyle/>
+          <a:p>
+            <a:pPr algn="ctr"/>
+          </a:p>
+        </p:txBody>
+      </p:sp>
+      <p:sp>
+        <p:nvSpPr>
+          <p:cNvPr id="3" name="TextBox 2"/>
+          <p:cNvSpPr txBox="1"/>
+          <p:nvPr/>
+        </p:nvSpPr>
+        <p:spPr>
+          <a:xfrm>
+            <a:off x="640080" y="0"/>
+            <a:ext cx="9082735" cy="1188720"/>
+          </a:xfrm>
+          <a:prstGeom prst="rect">
+            <a:avLst/>
+          </a:prstGeom>
+          <a:noFill/>
+        </p:spPr>
+        <p:txBody>
+          <a:bodyPr wrap="square" anchor="ctr" lIns="0" rIns="0" tIns="0" bIns="0">
+            <a:spAutoFit/>
+          </a:bodyPr>
+          <a:lstStyle/>
+          <a:p>
+            <a:pPr algn="ctr"/>
+            <a:r>
+              <a:rPr sz="2600" b="1" i="0">
+                <a:solidFill>
+                  <a:srgbClr val="FFFFFF"/>
+                </a:solidFill>
+                <a:latin typeface="Calibri"/>
+              </a:rPr>
+              <a:t>PARA LA PRÓXIMA SESIÓN</a:t>
+            </a:r>
+          </a:p>
+        </p:txBody>
+      </p:sp>
+      <p:sp>
+        <p:nvSpPr>
+          <p:cNvPr id="4" name="TextBox 3"/>
+          <p:cNvSpPr txBox="1"/>
+          <p:nvPr/>
+        </p:nvSpPr>
+        <p:spPr>
+          <a:xfrm>
+            <a:off x="640080" y="1691639"/>
+            <a:ext cx="10911535" cy="4617720"/>
+          </a:xfrm>
+          <a:prstGeom prst="rect">
+            <a:avLst/>
+          </a:prstGeom>
+          <a:noFill/>
+        </p:spPr>
+        <p:txBody>
+          <a:bodyPr wrap="square" anchor="t" lIns="0" rIns="0" tIns="0" bIns="0">
+            <a:spAutoFit/>
+          </a:bodyPr>
+          <a:lstStyle/>
+          <a:p>
+            <a:pPr>
+              <a:spcAft>
+                <a:spcPts val="1000"/>
+              </a:spcAft>
+            </a:pPr>
+            <a:r>
+              <a:rPr sz="1600" b="0" i="0">
+                <a:solidFill>
+                  <a:srgbClr val="2B2B2B"/>
+                </a:solidFill>
+                <a:latin typeface="Calibri"/>
+              </a:rPr>
+              <a:t>–   </a:t>
+            </a:r>
+            <a:r>
+              <a:rPr sz="1600" b="1" i="0">
+                <a:solidFill>
+                  <a:srgbClr val="2B2B2B"/>
+                </a:solidFill>
+                <a:latin typeface="Calibri"/>
+              </a:rPr>
+              <a:t>Lectura autónoma:</a:t>
+            </a:r>
+            <a:r>
+              <a:rPr sz="1600" b="0" i="0">
+                <a:solidFill>
+                  <a:srgbClr val="2B2B2B"/>
+                </a:solidFill>
+                <a:latin typeface="Calibri"/>
+              </a:rPr>
+              <a:t> U1–U2 (Propuesta de Innovación · creatividad e inteligencia emocional) — la retomamos al abrir la Sesión 02.</a:t>
+            </a:r>
+          </a:p>
+          <a:p>
+            <a:pPr>
+              <a:spcAft>
+                <a:spcPts val="1000"/>
+              </a:spcAft>
+            </a:pPr>
+            <a:r>
+              <a:rPr sz="1600" b="0" i="0">
+                <a:solidFill>
+                  <a:srgbClr val="2B2B2B"/>
+                </a:solidFill>
+                <a:latin typeface="Calibri"/>
+              </a:rPr>
+              <a:t>–   Revisar la </a:t>
+            </a:r>
+            <a:r>
+              <a:rPr sz="1600" b="1" i="0">
+                <a:solidFill>
+                  <a:srgbClr val="2B2B2B"/>
+                </a:solidFill>
+                <a:latin typeface="Calibri"/>
+              </a:rPr>
+              <a:t>Presentación del Curso</a:t>
+            </a:r>
+            <a:r>
+              <a:rPr sz="1600" b="0" i="0">
+                <a:solidFill>
+                  <a:srgbClr val="2B2B2B"/>
+                </a:solidFill>
+                <a:latin typeface="Calibri"/>
+              </a:rPr>
+              <a:t> completa (fechas, evaluación, contenido de todas las sesiones).</a:t>
+            </a:r>
+          </a:p>
+          <a:p>
+            <a:pPr>
+              <a:spcAft>
+                <a:spcPts val="1000"/>
+              </a:spcAft>
+            </a:pPr>
+            <a:r>
+              <a:rPr sz="1600" b="0" i="0">
+                <a:solidFill>
+                  <a:srgbClr val="2B2B2B"/>
+                </a:solidFill>
+                <a:latin typeface="Calibri"/>
+              </a:rPr>
+              <a:t>–   Abrir el enunciado de la </a:t>
+            </a:r>
+            <a:r>
+              <a:rPr sz="1600" b="1" i="0">
+                <a:solidFill>
+                  <a:srgbClr val="2B2B2B"/>
+                </a:solidFill>
+                <a:latin typeface="Calibri"/>
+              </a:rPr>
+              <a:t>ACA 1</a:t>
+            </a:r>
+            <a:r>
+              <a:rPr sz="1600" b="0" i="0">
+                <a:solidFill>
+                  <a:srgbClr val="2B2B2B"/>
+                </a:solidFill>
+                <a:latin typeface="Calibri"/>
+              </a:rPr>
+              <a:t> en `Clases/Recursos/ACAs/` y leerlo entero.</a:t>
+            </a:r>
+          </a:p>
+        </p:txBody>
+      </p:sp>
+      <p:sp>
+        <p:nvSpPr>
+          <p:cNvPr id="5" name="TextBox 4"/>
+          <p:cNvSpPr txBox="1"/>
+          <p:nvPr/>
+        </p:nvSpPr>
+        <p:spPr>
+          <a:xfrm>
+            <a:off x="11094415" y="6446520"/>
+            <a:ext cx="548640" cy="274320"/>
+          </a:xfrm>
+          <a:prstGeom prst="rect">
+            <a:avLst/>
+          </a:prstGeom>
+          <a:noFill/>
+        </p:spPr>
+        <p:txBody>
+          <a:bodyPr wrap="square" anchor="t" lIns="0" rIns="0" tIns="0" bIns="0">
+            <a:spAutoFit/>
+          </a:bodyPr>
+          <a:lstStyle/>
+          <a:p>
+            <a:pPr algn="r"/>
+            <a:r>
+              <a:rPr sz="1000" b="1" i="0">
+                <a:solidFill>
+                  <a:srgbClr val="8F989D"/>
+                </a:solidFill>
+                <a:latin typeface="Calibri"/>
+              </a:rPr>
+              <a:t>21</a:t>
+            </a:r>
+          </a:p>
+        </p:txBody>
+      </p:sp>
+    </p:spTree>
+  </p:cSld>
+  <p:clrMapOvr>
+    <a:masterClrMapping/>
+  </p:clrMapOvr>
+</p:sld>
+</file>
+
+<file path=ppt/slides/slide22.xml><?xml version="1.0" encoding="utf-8"?>
 <p:sld xmlns:a="http://schemas.openxmlformats.org/drawingml/2006/main" xmlns:p="http://schemas.openxmlformats.org/presentationml/2006/main" xmlns:r="http://schemas.openxmlformats.org/officeDocument/2006/relationships">
   <p:cSld>
     <p:bg>

--- a/Pregrado/Creatividad y pensamiento innovador/Clases/Sesion 01 - Presentación del curso · docente · estudiantes · ACAs/Presentacion.pptx
+++ b/Pregrado/Creatividad y pensamiento innovador/Clases/Sesion 01 - Presentación del curso · docente · estudiantes · ACAs/Presentacion.pptx
@@ -27,6 +27,7 @@
     <p:sldId id="275" r:id="rId26"/>
     <p:sldId id="276" r:id="rId27"/>
     <p:sldId id="277" r:id="rId28"/>
+    <p:sldId id="278" r:id="rId29"/>
   </p:sldIdLst>
   <p:sldSz cx="12191695" cy="6858000" type="screen4x3"/>
   <p:notesSz cx="6858000" cy="9144000"/>
@@ -3348,7 +3349,7 @@
                 </a:solidFill>
                 <a:latin typeface="Calibri"/>
               </a:rPr>
-              <a:t> el curso · el Docente · ustedes · las ACAs</a:t>
+              <a:t> el curso · el Docente · ustedes · cómo se evalúa</a:t>
             </a:r>
           </a:p>
           <a:p>
@@ -4263,7 +4264,7 @@
               </a:spcAft>
             </a:pPr>
             <a:r>
-              <a:rPr sz="1600" b="0" i="0">
+              <a:rPr sz="1500" b="0" i="0">
                 <a:solidFill>
                   <a:srgbClr val="2B2B2B"/>
                 </a:solidFill>
@@ -4272,7 +4273,7 @@
               <a:t>–   </a:t>
             </a:r>
             <a:r>
-              <a:rPr sz="1600" b="1" i="0">
+              <a:rPr sz="1500" b="1" i="0">
                 <a:solidFill>
                   <a:srgbClr val="2B2B2B"/>
                 </a:solidFill>
@@ -4281,7 +4282,7 @@
               <a:t>1.</a:t>
             </a:r>
             <a:r>
-              <a:rPr sz="1600" b="0" i="0">
+              <a:rPr sz="1500" b="0" i="0">
                 <a:solidFill>
                   <a:srgbClr val="2B2B2B"/>
                 </a:solidFill>
@@ -4290,7 +4291,7 @@
               <a:t> Escriba en la </a:t>
             </a:r>
             <a:r>
-              <a:rPr sz="1600" b="1" i="0">
+              <a:rPr sz="1500" b="1" i="0">
                 <a:solidFill>
                   <a:srgbClr val="2B2B2B"/>
                 </a:solidFill>
@@ -4299,7 +4300,7 @@
               <a:t>plantilla APA CUN</a:t>
             </a:r>
             <a:r>
-              <a:rPr sz="1600" b="0" i="0">
+              <a:rPr sz="1500" b="0" i="0">
                 <a:solidFill>
                   <a:srgbClr val="2B2B2B"/>
                 </a:solidFill>
@@ -4308,7 +4309,7 @@
               <a:t> (`Clases/Recursos/`): ábrala en </a:t>
             </a:r>
             <a:r>
-              <a:rPr sz="1600" b="1" i="0">
+              <a:rPr sz="1500" b="1" i="0">
                 <a:solidFill>
                   <a:srgbClr val="2B2B2B"/>
                 </a:solidFill>
@@ -4317,7 +4318,7 @@
               <a:t>Google Docs</a:t>
             </a:r>
             <a:r>
-              <a:rPr sz="1600" b="0" i="0">
+              <a:rPr sz="1500" b="0" i="0">
                 <a:solidFill>
                   <a:srgbClr val="2B2B2B"/>
                 </a:solidFill>
@@ -4333,7 +4334,7 @@
               </a:spcAft>
             </a:pPr>
             <a:r>
-              <a:rPr sz="1600" b="0" i="0">
+              <a:rPr sz="1500" b="0" i="0">
                 <a:solidFill>
                   <a:srgbClr val="2B2B2B"/>
                 </a:solidFill>
@@ -4342,7 +4343,7 @@
               <a:t>–   </a:t>
             </a:r>
             <a:r>
-              <a:rPr sz="1600" b="1" i="0">
+              <a:rPr sz="1500" b="1" i="0">
                 <a:solidFill>
                   <a:srgbClr val="2B2B2B"/>
                 </a:solidFill>
@@ -4351,16 +4352,16 @@
               <a:t>2.</a:t>
             </a:r>
             <a:r>
-              <a:rPr sz="1600" b="0" i="0">
-                <a:solidFill>
-                  <a:srgbClr val="2B2B2B"/>
-                </a:solidFill>
-                <a:latin typeface="Calibri"/>
-              </a:rPr>
-              <a:t> Abra el enunciado del ACA en `Clases/Recursos/ACAs/` y marque su </a:t>
-            </a:r>
-            <a:r>
-              <a:rPr sz="1600" b="1" i="0">
+              <a:rPr sz="1500" b="0" i="0">
+                <a:solidFill>
+                  <a:srgbClr val="2B2B2B"/>
+                </a:solidFill>
+                <a:latin typeface="Calibri"/>
+              </a:rPr>
+              <a:t> Abra el enunciado del corte en `Clases/Recursos/ACAs/` y marque su </a:t>
+            </a:r>
+            <a:r>
+              <a:rPr sz="1500" b="1" i="0">
                 <a:solidFill>
                   <a:srgbClr val="2B2B2B"/>
                 </a:solidFill>
@@ -4369,7 +4370,7 @@
               <a:t>checklist de criterios</a:t>
             </a:r>
             <a:r>
-              <a:rPr sz="1600" b="0" i="0">
+              <a:rPr sz="1500" b="0" i="0">
                 <a:solidFill>
                   <a:srgbClr val="2B2B2B"/>
                 </a:solidFill>
@@ -4385,7 +4386,7 @@
               </a:spcAft>
             </a:pPr>
             <a:r>
-              <a:rPr sz="1600" b="0" i="0">
+              <a:rPr sz="1500" b="0" i="0">
                 <a:solidFill>
                   <a:srgbClr val="2B2B2B"/>
                 </a:solidFill>
@@ -4394,7 +4395,7 @@
               <a:t>–   </a:t>
             </a:r>
             <a:r>
-              <a:rPr sz="1600" b="1" i="0">
+              <a:rPr sz="1500" b="1" i="0">
                 <a:solidFill>
                   <a:srgbClr val="2B2B2B"/>
                 </a:solidFill>
@@ -4403,7 +4404,7 @@
               <a:t>3.</a:t>
             </a:r>
             <a:r>
-              <a:rPr sz="1600" b="0" i="0">
+              <a:rPr sz="1500" b="0" i="0">
                 <a:solidFill>
                   <a:srgbClr val="2B2B2B"/>
                 </a:solidFill>
@@ -4412,7 +4413,7 @@
               <a:t> Exporte a </a:t>
             </a:r>
             <a:r>
-              <a:rPr sz="1600" b="1" i="0">
+              <a:rPr sz="1500" b="1" i="0">
                 <a:solidFill>
                   <a:srgbClr val="2B2B2B"/>
                 </a:solidFill>
@@ -4421,7 +4422,7 @@
               <a:t>PDF</a:t>
             </a:r>
             <a:r>
-              <a:rPr sz="1600" b="0" i="0">
+              <a:rPr sz="1500" b="0" i="0">
                 <a:solidFill>
                   <a:srgbClr val="2B2B2B"/>
                 </a:solidFill>
@@ -4437,7 +4438,7 @@
               </a:spcAft>
             </a:pPr>
             <a:r>
-              <a:rPr sz="1600" b="0" i="0">
+              <a:rPr sz="1500" b="0" i="0">
                 <a:solidFill>
                   <a:srgbClr val="2B2B2B"/>
                 </a:solidFill>
@@ -4446,7 +4447,7 @@
               <a:t>–   </a:t>
             </a:r>
             <a:r>
-              <a:rPr sz="1600" b="1" i="0">
+              <a:rPr sz="1500" b="1" i="0">
                 <a:solidFill>
                   <a:srgbClr val="2B2B2B"/>
                 </a:solidFill>
@@ -4455,7 +4456,7 @@
               <a:t>4.</a:t>
             </a:r>
             <a:r>
-              <a:rPr sz="1600" b="0" i="0">
+              <a:rPr sz="1500" b="0" i="0">
                 <a:solidFill>
                   <a:srgbClr val="2B2B2B"/>
                 </a:solidFill>
@@ -4464,22 +4465,22 @@
               <a:t> Nombre el archivo así: </a:t>
             </a:r>
             <a:r>
-              <a:rPr sz="1600" b="1" i="0">
-                <a:solidFill>
-                  <a:srgbClr val="2B2B2B"/>
-                </a:solidFill>
-                <a:latin typeface="Calibri"/>
-              </a:rPr>
-              <a:t>CRE_ACA1_Apellido</a:t>
-            </a:r>
-            <a:r>
-              <a:rPr sz="1600" b="0" i="0">
-                <a:solidFill>
-                  <a:srgbClr val="2B2B2B"/>
-                </a:solidFill>
-                <a:latin typeface="Calibri"/>
-              </a:rPr>
-              <a:t> (cambie el número del ACA y su apellido).</a:t>
+              <a:rPr sz="1500" b="1" i="0">
+                <a:solidFill>
+                  <a:srgbClr val="2B2B2B"/>
+                </a:solidFill>
+                <a:latin typeface="Calibri"/>
+              </a:rPr>
+              <a:t>CRE_ACAFinal_Apellido</a:t>
+            </a:r>
+            <a:r>
+              <a:rPr sz="1500" b="0" i="0">
+                <a:solidFill>
+                  <a:srgbClr val="2B2B2B"/>
+                </a:solidFill>
+                <a:latin typeface="Calibri"/>
+              </a:rPr>
+              <a:t> (con su apellido).</a:t>
             </a:r>
           </a:p>
           <a:p>
@@ -4489,7 +4490,7 @@
               </a:spcAft>
             </a:pPr>
             <a:r>
-              <a:rPr sz="1600" b="0" i="0">
+              <a:rPr sz="1500" b="0" i="0">
                 <a:solidFill>
                   <a:srgbClr val="2B2B2B"/>
                 </a:solidFill>
@@ -4498,7 +4499,7 @@
               <a:t>–   </a:t>
             </a:r>
             <a:r>
-              <a:rPr sz="1600" b="1" i="0">
+              <a:rPr sz="1500" b="1" i="0">
                 <a:solidFill>
                   <a:srgbClr val="2B2B2B"/>
                 </a:solidFill>
@@ -4507,25 +4508,25 @@
               <a:t>5.</a:t>
             </a:r>
             <a:r>
-              <a:rPr sz="1600" b="0" i="0">
-                <a:solidFill>
-                  <a:srgbClr val="2B2B2B"/>
-                </a:solidFill>
-                <a:latin typeface="Calibri"/>
-              </a:rPr>
-              <a:t> Suba el archivo al </a:t>
-            </a:r>
-            <a:r>
-              <a:rPr sz="1600" b="1" i="0">
-                <a:solidFill>
-                  <a:srgbClr val="2B2B2B"/>
-                </a:solidFill>
-                <a:latin typeface="Calibri"/>
-              </a:rPr>
-              <a:t>espacio de entrega del corte en CDigital</a:t>
-            </a:r>
-            <a:r>
-              <a:rPr sz="1600" b="0" i="0">
+              <a:rPr sz="1500" b="0" i="0">
+                <a:solidFill>
+                  <a:srgbClr val="2B2B2B"/>
+                </a:solidFill>
+                <a:latin typeface="Calibri"/>
+              </a:rPr>
+              <a:t> Suba el archivo al espacio de la </a:t>
+            </a:r>
+            <a:r>
+              <a:rPr sz="1500" b="1" i="0">
+                <a:solidFill>
+                  <a:srgbClr val="2B2B2B"/>
+                </a:solidFill>
+                <a:latin typeface="Calibri"/>
+              </a:rPr>
+              <a:t>ACA Final en CDigital</a:t>
+            </a:r>
+            <a:r>
+              <a:rPr sz="1500" b="0" i="0">
                 <a:solidFill>
                   <a:srgbClr val="2B2B2B"/>
                 </a:solidFill>
@@ -4541,7 +4542,7 @@
               </a:spcAft>
             </a:pPr>
             <a:r>
-              <a:rPr sz="1600" b="0" i="0">
+              <a:rPr sz="1500" b="0" i="0">
                 <a:solidFill>
                   <a:srgbClr val="2B2B2B"/>
                 </a:solidFill>
@@ -4550,7 +4551,7 @@
               <a:t>–   </a:t>
             </a:r>
             <a:r>
-              <a:rPr sz="1600" b="1" i="0">
+              <a:rPr sz="1500" b="1" i="0">
                 <a:solidFill>
                   <a:srgbClr val="2B2B2B"/>
                 </a:solidFill>
@@ -4559,7 +4560,7 @@
               <a:t>6.</a:t>
             </a:r>
             <a:r>
-              <a:rPr sz="1600" b="0" i="0">
+              <a:rPr sz="1500" b="0" i="0">
                 <a:solidFill>
                   <a:srgbClr val="2B2B2B"/>
                 </a:solidFill>
@@ -4568,7 +4569,7 @@
               <a:t> Verifique que quedó cargado y </a:t>
             </a:r>
             <a:r>
-              <a:rPr sz="1600" b="1" i="0">
+              <a:rPr sz="1500" b="1" i="0">
                 <a:solidFill>
                   <a:srgbClr val="2B2B2B"/>
                 </a:solidFill>
@@ -4577,7 +4578,7 @@
               <a:t>ábralo desde la plataforma</a:t>
             </a:r>
             <a:r>
-              <a:rPr sz="1600" b="0" i="0">
+              <a:rPr sz="1500" b="0" i="0">
                 <a:solidFill>
                   <a:srgbClr val="2B2B2B"/>
                 </a:solidFill>
@@ -4593,7 +4594,7 @@
               </a:spcAft>
             </a:pPr>
             <a:r>
-              <a:rPr sz="1600" b="0" i="0">
+              <a:rPr sz="1500" b="0" i="0">
                 <a:solidFill>
                   <a:srgbClr val="2B2B2B"/>
                 </a:solidFill>
@@ -4602,7 +4603,41 @@
               <a:t>–   </a:t>
             </a:r>
             <a:r>
-              <a:rPr sz="1600" b="1" i="0">
+              <a:rPr sz="1500" b="1" i="0">
+                <a:solidFill>
+                  <a:srgbClr val="2B2B2B"/>
+                </a:solidFill>
+                <a:latin typeface="Calibri"/>
+              </a:rPr>
+              <a:t>Los quices y parciales no se suben:</a:t>
+            </a:r>
+            <a:r>
+              <a:rPr sz="1500" b="0" i="0">
+                <a:solidFill>
+                  <a:srgbClr val="2B2B2B"/>
+                </a:solidFill>
+                <a:latin typeface="Calibri"/>
+              </a:rPr>
+              <a:t> son cuestionarios que se resuelven en el aula dentro de su ventana. Si la ventana se cierra, no hay archivo que lo reemplace.</a:t>
+            </a:r>
+          </a:p>
+          <a:p>
+            <a:pPr>
+              <a:spcAft>
+                <a:spcPts val="1000"/>
+              </a:spcAft>
+            </a:pPr>
+            <a:r>
+              <a:rPr sz="1500" b="0" i="0">
+                <a:solidFill>
+                  <a:srgbClr val="2B2B2B"/>
+                </a:solidFill>
+                <a:latin typeface="Calibri"/>
+              </a:rPr>
+              <a:t>–   </a:t>
+            </a:r>
+            <a:r>
+              <a:rPr sz="1500" b="1" i="0">
                 <a:solidFill>
                   <a:srgbClr val="2B2B2B"/>
                 </a:solidFill>
@@ -4611,7 +4646,7 @@
               <a:t>Entrega oficial = CDigital.</a:t>
             </a:r>
             <a:r>
-              <a:rPr sz="1600" b="0" i="0">
+              <a:rPr sz="1500" b="0" i="0">
                 <a:solidFill>
                   <a:srgbClr val="2B2B2B"/>
                 </a:solidFill>
@@ -4627,7 +4662,7 @@
               </a:spcAft>
             </a:pPr>
             <a:r>
-              <a:rPr sz="1500" b="0" i="0">
+              <a:rPr sz="1400" b="0" i="0">
                 <a:solidFill>
                   <a:srgbClr val="2B2B2B"/>
                 </a:solidFill>
@@ -4636,7 +4671,7 @@
               <a:t>●   ¿Se le complicó la fecha? Se habla con el Docente </a:t>
             </a:r>
             <a:r>
-              <a:rPr sz="1500" b="1" i="0">
+              <a:rPr sz="1400" b="1" i="0">
                 <a:solidFill>
                   <a:srgbClr val="2B2B2B"/>
                 </a:solidFill>
@@ -4645,7 +4680,7 @@
               <a:t>antes</a:t>
             </a:r>
             <a:r>
-              <a:rPr sz="1500" b="0" i="0">
+              <a:rPr sz="1400" b="0" i="0">
                 <a:solidFill>
                   <a:srgbClr val="2B2B2B"/>
                 </a:solidFill>
@@ -5942,7 +5977,7 @@
                           </a:solidFill>
                           <a:latin typeface="Calibri"/>
                         </a:rPr>
-                        <a:t>Material, anuncios, foro y </a:t>
+                        <a:t>Material, anuncios, foro, </a:t>
                       </a:r>
                       <a:r>
                         <a:rPr sz="1100" b="1" i="0">
@@ -5951,7 +5986,7 @@
                           </a:solidFill>
                           <a:latin typeface="Calibri"/>
                         </a:rPr>
-                        <a:t>entrega oficial</a:t>
+                        <a:t>quices y parciales</a:t>
                       </a:r>
                       <a:r>
                         <a:rPr sz="1100" b="0" i="0">
@@ -5960,7 +5995,16 @@
                           </a:solidFill>
                           <a:latin typeface="Calibri"/>
                         </a:rPr>
-                        <a:t> de las ACAs</a:t>
+                        <a:t> y entrega de la </a:t>
+                      </a:r>
+                      <a:r>
+                        <a:rPr sz="1100" b="1" i="0">
+                          <a:solidFill>
+                            <a:srgbClr val="2B2B2B"/>
+                          </a:solidFill>
+                          <a:latin typeface="Calibri"/>
+                        </a:rPr>
+                        <a:t>ACA Final</a:t>
                       </a:r>
                     </a:p>
                   </a:txBody>
@@ -6729,7 +6773,7 @@
                 </a:solidFill>
                 <a:latin typeface="Calibri"/>
               </a:rPr>
-              <a:t> para dudas que le sirven a todo el grupo (formato, entrega, alcance de un ACA).</a:t>
+              <a:t> para dudas que le sirven a todo el grupo (formato, entrega, alcance de un corte, temario de un quiz).</a:t>
             </a:r>
           </a:p>
           <a:p>
@@ -7575,7 +7619,7 @@
               </a:spcAft>
             </a:pPr>
             <a:r>
-              <a:rPr sz="1400" b="0" i="0">
+              <a:rPr sz="1300" b="0" i="0">
                 <a:solidFill>
                   <a:srgbClr val="2B2B2B"/>
                 </a:solidFill>
@@ -7584,7 +7628,7 @@
               <a:t>–   </a:t>
             </a:r>
             <a:r>
-              <a:rPr sz="1400" b="1" i="0">
+              <a:rPr sz="1300" b="1" i="0">
                 <a:solidFill>
                   <a:srgbClr val="2B2B2B"/>
                 </a:solidFill>
@@ -7593,7 +7637,7 @@
               <a:t>Lectura autónoma (obligatoria):</a:t>
             </a:r>
             <a:r>
-              <a:rPr sz="1400" b="0" i="0">
+              <a:rPr sz="1300" b="0" i="0">
                 <a:solidFill>
                   <a:srgbClr val="2B2B2B"/>
                 </a:solidFill>
@@ -7602,7 +7646,7 @@
               <a:t> unidades </a:t>
             </a:r>
             <a:r>
-              <a:rPr sz="1400" b="1" i="0">
+              <a:rPr sz="1300" b="1" i="0">
                 <a:solidFill>
                   <a:srgbClr val="2B2B2B"/>
                 </a:solidFill>
@@ -7611,7 +7655,7 @@
               <a:t>U1–U2</a:t>
             </a:r>
             <a:r>
-              <a:rPr sz="1400" b="0" i="0">
+              <a:rPr sz="1300" b="0" i="0">
                 <a:solidFill>
                   <a:srgbClr val="2B2B2B"/>
                 </a:solidFill>
@@ -7627,7 +7671,7 @@
               </a:spcAft>
             </a:pPr>
             <a:r>
-              <a:rPr sz="1300" b="0" i="0">
+              <a:rPr sz="1200" b="0" i="0">
                 <a:solidFill>
                   <a:srgbClr val="2B2B2B"/>
                 </a:solidFill>
@@ -7643,7 +7687,7 @@
               </a:spcAft>
             </a:pPr>
             <a:r>
-              <a:rPr sz="1300" b="0" i="0">
+              <a:rPr sz="1200" b="0" i="0">
                 <a:solidFill>
                   <a:srgbClr val="2B2B2B"/>
                 </a:solidFill>
@@ -7652,7 +7696,7 @@
               <a:t>●   </a:t>
             </a:r>
             <a:r>
-              <a:rPr sz="1300" b="1" i="0">
+              <a:rPr sz="1200" b="1" i="0">
                 <a:solidFill>
                   <a:srgbClr val="2B2B2B"/>
                 </a:solidFill>
@@ -7661,7 +7705,7 @@
               <a:t>Dónde está:</a:t>
             </a:r>
             <a:r>
-              <a:rPr sz="1300" b="0" i="0">
+              <a:rPr sz="1200" b="0" i="0">
                 <a:solidFill>
                   <a:srgbClr val="2B2B2B"/>
                 </a:solidFill>
@@ -7677,7 +7721,7 @@
               </a:spcAft>
             </a:pPr>
             <a:r>
-              <a:rPr sz="1300" b="0" i="0">
+              <a:rPr sz="1200" b="0" i="0">
                 <a:solidFill>
                   <a:srgbClr val="2B2B2B"/>
                 </a:solidFill>
@@ -7686,7 +7730,7 @@
               <a:t>●   Léalas con una pregunta en la mano: </a:t>
             </a:r>
             <a:r>
-              <a:rPr sz="1300" b="1" i="0">
+              <a:rPr sz="1200" b="1" i="0">
                 <a:solidFill>
                   <a:srgbClr val="2B2B2B"/>
                 </a:solidFill>
@@ -7702,7 +7746,7 @@
               </a:spcAft>
             </a:pPr>
             <a:r>
-              <a:rPr sz="1400" b="0" i="0">
+              <a:rPr sz="1300" b="0" i="0">
                 <a:solidFill>
                   <a:srgbClr val="2B2B2B"/>
                 </a:solidFill>
@@ -7711,22 +7755,22 @@
               <a:t>–   </a:t>
             </a:r>
             <a:r>
-              <a:rPr sz="1400" b="1" i="0">
-                <a:solidFill>
-                  <a:srgbClr val="2B2B2B"/>
-                </a:solidFill>
-                <a:latin typeface="Calibri"/>
-              </a:rPr>
-              <a:t>Abra el enunciado de la ACA 1</a:t>
-            </a:r>
-            <a:r>
-              <a:rPr sz="1400" b="0" i="0">
-                <a:solidFill>
-                  <a:srgbClr val="2B2B2B"/>
-                </a:solidFill>
-                <a:latin typeface="Calibri"/>
-              </a:rPr>
-              <a:t> en `Clases/Recursos/ACAs/` y léalo entero, checklist incluido.</a:t>
+              <a:rPr sz="1300" b="1" i="0">
+                <a:solidFill>
+                  <a:srgbClr val="2B2B2B"/>
+                </a:solidFill>
+                <a:latin typeface="Calibri"/>
+              </a:rPr>
+              <a:t>Abra las dos guías del primer corte</a:t>
+            </a:r>
+            <a:r>
+              <a:rPr sz="1300" b="0" i="0">
+                <a:solidFill>
+                  <a:srgbClr val="2B2B2B"/>
+                </a:solidFill>
+                <a:latin typeface="Calibri"/>
+              </a:rPr>
+              <a:t> en `Clases/Recursos/ACAs/` — `Quiz 1 (6%)` y `Parcial 1 (24%)` — y léalas enteras, checklist incluido: eso es exactamente lo que se pregunta.</a:t>
             </a:r>
           </a:p>
           <a:p>
@@ -7736,7 +7780,7 @@
               </a:spcAft>
             </a:pPr>
             <a:r>
-              <a:rPr sz="1400" b="0" i="0">
+              <a:rPr sz="1300" b="0" i="0">
                 <a:solidFill>
                   <a:srgbClr val="2B2B2B"/>
                 </a:solidFill>
@@ -7745,7 +7789,7 @@
               <a:t>–   </a:t>
             </a:r>
             <a:r>
-              <a:rPr sz="1400" b="1" i="0">
+              <a:rPr sz="1300" b="1" i="0">
                 <a:solidFill>
                   <a:srgbClr val="2B2B2B"/>
                 </a:solidFill>
@@ -7754,7 +7798,7 @@
               <a:t>Traiga escrito</a:t>
             </a:r>
             <a:r>
-              <a:rPr sz="1400" b="0" i="0">
+              <a:rPr sz="1300" b="0" i="0">
                 <a:solidFill>
                   <a:srgbClr val="2B2B2B"/>
                 </a:solidFill>
@@ -7763,7 +7807,7 @@
               <a:t> (con tres líneas basta): un problema real que le moleste, </a:t>
             </a:r>
             <a:r>
-              <a:rPr sz="1400" b="1" i="0">
+              <a:rPr sz="1300" b="1" i="0">
                 <a:solidFill>
                   <a:srgbClr val="2B2B2B"/>
                 </a:solidFill>
@@ -7772,7 +7816,7 @@
               <a:t>a quién</a:t>
             </a:r>
             <a:r>
-              <a:rPr sz="1400" b="0" i="0">
+              <a:rPr sz="1300" b="0" i="0">
                 <a:solidFill>
                   <a:srgbClr val="2B2B2B"/>
                 </a:solidFill>
@@ -7781,7 +7825,7 @@
               <a:t> le pasa y </a:t>
             </a:r>
             <a:r>
-              <a:rPr sz="1400" b="1" i="0">
+              <a:rPr sz="1300" b="1" i="0">
                 <a:solidFill>
                   <a:srgbClr val="2B2B2B"/>
                 </a:solidFill>
@@ -7790,7 +7834,7 @@
               <a:t>dónde</a:t>
             </a:r>
             <a:r>
-              <a:rPr sz="1400" b="0" i="0">
+              <a:rPr sz="1300" b="0" i="0">
                 <a:solidFill>
                   <a:srgbClr val="2B2B2B"/>
                 </a:solidFill>
@@ -7806,7 +7850,7 @@
               </a:spcAft>
             </a:pPr>
             <a:r>
-              <a:rPr sz="1300" b="0" i="0">
+              <a:rPr sz="1200" b="0" i="0">
                 <a:solidFill>
                   <a:srgbClr val="2B2B2B"/>
                 </a:solidFill>
@@ -7822,7 +7866,7 @@
               </a:spcAft>
             </a:pPr>
             <a:r>
-              <a:rPr sz="1400" b="0" i="0">
+              <a:rPr sz="1300" b="0" i="0">
                 <a:solidFill>
                   <a:srgbClr val="2B2B2B"/>
                 </a:solidFill>
@@ -7831,7 +7875,7 @@
               <a:t>–   </a:t>
             </a:r>
             <a:r>
-              <a:rPr sz="1400" b="1" i="0">
+              <a:rPr sz="1300" b="1" i="0">
                 <a:solidFill>
                   <a:srgbClr val="2B2B2B"/>
                 </a:solidFill>
@@ -7840,7 +7884,7 @@
               <a:t>Cree su documento de trabajo</a:t>
             </a:r>
             <a:r>
-              <a:rPr sz="1400" b="0" i="0">
+              <a:rPr sz="1300" b="0" i="0">
                 <a:solidFill>
                   <a:srgbClr val="2B2B2B"/>
                 </a:solidFill>
@@ -7856,7 +7900,7 @@
               </a:spcAft>
             </a:pPr>
             <a:r>
-              <a:rPr sz="1400" b="0" i="0">
+              <a:rPr sz="1300" b="0" i="0">
                 <a:solidFill>
                   <a:srgbClr val="2B2B2B"/>
                 </a:solidFill>
@@ -7865,7 +7909,7 @@
               <a:t>–   </a:t>
             </a:r>
             <a:r>
-              <a:rPr sz="1400" b="1" i="0">
+              <a:rPr sz="1300" b="1" i="0">
                 <a:solidFill>
                   <a:srgbClr val="2B2B2B"/>
                 </a:solidFill>
@@ -7874,13 +7918,31 @@
               <a:t>Use la ficha del curso:</a:t>
             </a:r>
             <a:r>
-              <a:rPr sz="1400" b="0" i="0">
-                <a:solidFill>
-                  <a:srgbClr val="2B2B2B"/>
-                </a:solidFill>
-                <a:latin typeface="Calibri"/>
-              </a:rPr>
-              <a:t> en `Sesion 01 - …/` están `Ficha_problema_oportunidad.docx` (la plantilla que se llena) y `Ejemplo_ficha_modelo.html` (un ejemplo ya diligenciado, ábralo en el navegador). Esa ficha se reutiliza como insumo de la ACA 1.</a:t>
+              <a:rPr sz="1300" b="0" i="0">
+                <a:solidFill>
+                  <a:srgbClr val="2B2B2B"/>
+                </a:solidFill>
+                <a:latin typeface="Calibri"/>
+              </a:rPr>
+              <a:t> en `Sesion 01 - …/` están `Ficha_problema_oportunidad.docx` (la plantilla que se llena) y `Ejemplo_ficha_modelo.html` (un ejemplo ya diligenciado, ábralo en el navegador). Esa ficha es el insumo del primer corte y el primer pedazo de su </a:t>
+            </a:r>
+            <a:r>
+              <a:rPr sz="1300" b="1" i="0">
+                <a:solidFill>
+                  <a:srgbClr val="2B2B2B"/>
+                </a:solidFill>
+                <a:latin typeface="Calibri"/>
+              </a:rPr>
+              <a:t>ACA Final</a:t>
+            </a:r>
+            <a:r>
+              <a:rPr sz="1300" b="0" i="0">
+                <a:solidFill>
+                  <a:srgbClr val="2B2B2B"/>
+                </a:solidFill>
+                <a:latin typeface="Calibri"/>
+              </a:rPr>
+              <a:t>.</a:t>
             </a:r>
           </a:p>
         </p:txBody>
@@ -8265,7 +8327,7 @@
         <p:spPr>
           <a:xfrm>
             <a:off x="640080" y="1737360"/>
-            <a:ext cx="10911535" cy="969264"/>
+            <a:ext cx="10911535" cy="1225296"/>
           </a:xfrm>
           <a:prstGeom prst="roundRect">
             <a:avLst/>
@@ -8309,7 +8371,7 @@
         <p:spPr>
           <a:xfrm>
             <a:off x="868680" y="1847088"/>
-            <a:ext cx="10454335" cy="749808"/>
+            <a:ext cx="10454335" cy="1005840"/>
           </a:xfrm>
           <a:prstGeom prst="rect">
             <a:avLst/>
@@ -8354,7 +8416,7 @@
                 </a:solidFill>
                 <a:latin typeface="Calibri"/>
               </a:rPr>
-              <a:t> No, si entrega. Se pierde por no entregar y por dejarlo todo para el Corte 3, que pesa el 40%.</a:t>
+              <a:t> No, si trabaja al día. Se pierde por dejar pasar la ventana de un quiz o de un parcial y por armar la ACA Final la última noche: el corte 3 es el que más pesa (vea «CÓMO SE EVALÚA»).</a:t>
             </a:r>
           </a:p>
         </p:txBody>
@@ -8367,7 +8429,7 @@
         </p:nvSpPr>
         <p:spPr>
           <a:xfrm>
-            <a:off x="640080" y="2935224"/>
+            <a:off x="640080" y="3191256"/>
             <a:ext cx="10911535" cy="969264"/>
           </a:xfrm>
           <a:prstGeom prst="roundRect">
@@ -8411,7 +8473,7 @@
         </p:nvSpPr>
         <p:spPr>
           <a:xfrm>
-            <a:off x="868680" y="3044952"/>
+            <a:off x="868680" y="3300984"/>
             <a:ext cx="10454335" cy="749808"/>
           </a:xfrm>
           <a:prstGeom prst="rect">
@@ -8488,7 +8550,7 @@
         </p:nvSpPr>
         <p:spPr>
           <a:xfrm>
-            <a:off x="640080" y="4133087"/>
+            <a:off x="640080" y="4389120"/>
             <a:ext cx="10911535" cy="969264"/>
           </a:xfrm>
           <a:prstGeom prst="roundRect">
@@ -8532,7 +8594,7 @@
         </p:nvSpPr>
         <p:spPr>
           <a:xfrm>
-            <a:off x="868680" y="4242816"/>
+            <a:off x="868680" y="4498848"/>
             <a:ext cx="10454335" cy="749808"/>
           </a:xfrm>
           <a:prstGeom prst="rect">
@@ -8585,110 +8647,7 @@
       </p:sp>
       <p:sp>
         <p:nvSpPr>
-          <p:cNvPr id="10" name="Rounded Rectangle 9"/>
-          <p:cNvSpPr/>
-          <p:nvPr/>
-        </p:nvSpPr>
-        <p:spPr>
-          <a:xfrm>
-            <a:off x="640080" y="5330952"/>
-            <a:ext cx="10911535" cy="713232"/>
-          </a:xfrm>
-          <a:prstGeom prst="roundRect">
-            <a:avLst/>
-          </a:prstGeom>
-          <a:solidFill>
-            <a:srgbClr val="E8F5EC"/>
-          </a:solidFill>
-          <a:ln>
-            <a:noFill/>
-          </a:ln>
-          <a:effectLst/>
-        </p:spPr>
-        <p:style>
-          <a:lnRef idx="1">
-            <a:schemeClr val="accent1"/>
-          </a:lnRef>
-          <a:fillRef idx="3">
-            <a:schemeClr val="accent1"/>
-          </a:fillRef>
-          <a:effectRef idx="2">
-            <a:schemeClr val="accent1"/>
-          </a:effectRef>
-          <a:fontRef idx="minor">
-            <a:schemeClr val="lt1"/>
-          </a:fontRef>
-        </p:style>
-        <p:txBody>
-          <a:bodyPr rtlCol="0" anchor="ctr"/>
-          <a:lstStyle/>
-          <a:p>
-            <a:pPr algn="ctr"/>
-          </a:p>
-        </p:txBody>
-      </p:sp>
-      <p:sp>
-        <p:nvSpPr>
-          <p:cNvPr id="11" name="TextBox 10"/>
-          <p:cNvSpPr txBox="1"/>
-          <p:nvPr/>
-        </p:nvSpPr>
-        <p:spPr>
-          <a:xfrm>
-            <a:off x="868680" y="5440680"/>
-            <a:ext cx="10454335" cy="493776"/>
-          </a:xfrm>
-          <a:prstGeom prst="rect">
-            <a:avLst/>
-          </a:prstGeom>
-          <a:noFill/>
-        </p:spPr>
-        <p:txBody>
-          <a:bodyPr wrap="square" anchor="t" lIns="0" rIns="0" tIns="0" bIns="0">
-            <a:spAutoFit/>
-          </a:bodyPr>
-          <a:lstStyle/>
-          <a:p>
-            <a:r>
-              <a:rPr sz="1300" b="1" i="0">
-                <a:solidFill>
-                  <a:srgbClr val="0C2340"/>
-                </a:solidFill>
-                <a:latin typeface="Calibri"/>
-              </a:rPr>
-              <a:t>ℹ️ Nota institucional</a:t>
-            </a:r>
-          </a:p>
-          <a:p>
-            <a:pPr>
-              <a:spcBef>
-                <a:spcPts val="400"/>
-              </a:spcBef>
-            </a:pPr>
-            <a:r>
-              <a:rPr sz="1300" b="1" i="0">
-                <a:solidFill>
-                  <a:srgbClr val="2B2B2B"/>
-                </a:solidFill>
-                <a:latin typeface="Calibri"/>
-              </a:rPr>
-              <a:t>¿Necesito saber programar o diseñar?</a:t>
-            </a:r>
-            <a:r>
-              <a:rPr sz="1300" b="0" i="0">
-                <a:solidFill>
-                  <a:srgbClr val="2B2B2B"/>
-                </a:solidFill>
-                <a:latin typeface="Calibri"/>
-              </a:rPr>
-              <a:t> No. Aquí se evalúa criterio, no herramientas.</a:t>
-            </a:r>
-          </a:p>
-        </p:txBody>
-      </p:sp>
-      <p:sp>
-        <p:nvSpPr>
-          <p:cNvPr id="12" name="TextBox 11"/>
+          <p:cNvPr id="10" name="TextBox 9"/>
           <p:cNvSpPr txBox="1"/>
           <p:nvPr/>
         </p:nvSpPr>
@@ -9006,7 +8965,7 @@
                 </a:solidFill>
                 <a:latin typeface="Calibri"/>
               </a:rPr>
-              <a:t>Las ACAs:</a:t>
+              <a:t>Cómo se evalúa:</a:t>
             </a:r>
             <a:r>
               <a:rPr sz="1600" b="0" i="0">
@@ -9015,7 +8974,7 @@
                 </a:solidFill>
                 <a:latin typeface="Calibri"/>
               </a:rPr>
-              <a:t> qué se entrega, cuánto pesa y dónde se sube.</a:t>
+              <a:t> qué ítems tiene el aula, cuánto pesa cada uno y qué se hace con él.</a:t>
             </a:r>
           </a:p>
           <a:p>
@@ -9189,7 +9148,7 @@
                 </a:solidFill>
                 <a:latin typeface="Calibri"/>
               </a:rPr>
-              <a:t>ACUERDOS DE TRABAJO</a:t>
+              <a:t>Preguntas del primer día (cont.)</a:t>
             </a:r>
           </a:p>
         </p:txBody>
@@ -9283,6 +9242,249 @@
                 </a:solidFill>
                 <a:latin typeface="Calibri"/>
               </a:rPr>
+              <a:t>¿Necesito saber programar o diseñar?</a:t>
+            </a:r>
+            <a:r>
+              <a:rPr sz="1300" b="0" i="0">
+                <a:solidFill>
+                  <a:srgbClr val="2B2B2B"/>
+                </a:solidFill>
+                <a:latin typeface="Calibri"/>
+              </a:rPr>
+              <a:t> No. Aquí se evalúa criterio, no herramientas.</a:t>
+            </a:r>
+          </a:p>
+        </p:txBody>
+      </p:sp>
+      <p:sp>
+        <p:nvSpPr>
+          <p:cNvPr id="6" name="TextBox 5"/>
+          <p:cNvSpPr txBox="1"/>
+          <p:nvPr/>
+        </p:nvSpPr>
+        <p:spPr>
+          <a:xfrm>
+            <a:off x="11094415" y="6446520"/>
+            <a:ext cx="548640" cy="274320"/>
+          </a:xfrm>
+          <a:prstGeom prst="rect">
+            <a:avLst/>
+          </a:prstGeom>
+          <a:noFill/>
+        </p:spPr>
+        <p:txBody>
+          <a:bodyPr wrap="square" anchor="t" lIns="0" rIns="0" tIns="0" bIns="0">
+            <a:spAutoFit/>
+          </a:bodyPr>
+          <a:lstStyle/>
+          <a:p>
+            <a:pPr algn="r"/>
+            <a:r>
+              <a:rPr sz="1000" b="1" i="0">
+                <a:solidFill>
+                  <a:srgbClr val="8F989D"/>
+                </a:solidFill>
+                <a:latin typeface="Calibri"/>
+              </a:rPr>
+              <a:t>20</a:t>
+            </a:r>
+          </a:p>
+        </p:txBody>
+      </p:sp>
+    </p:spTree>
+  </p:cSld>
+  <p:clrMapOvr>
+    <a:masterClrMapping/>
+  </p:clrMapOvr>
+</p:sld>
+</file>
+
+<file path=ppt/slides/slide21.xml><?xml version="1.0" encoding="utf-8"?>
+<p:sld xmlns:a="http://schemas.openxmlformats.org/drawingml/2006/main" xmlns:p="http://schemas.openxmlformats.org/presentationml/2006/main" xmlns:r="http://schemas.openxmlformats.org/officeDocument/2006/relationships">
+  <p:cSld>
+    <p:bg>
+      <p:bgPr>
+        <a:solidFill>
+          <a:srgbClr val="FFFFFF"/>
+        </a:solidFill>
+        <a:effectLst/>
+      </p:bgPr>
+    </p:bg>
+    <p:spTree>
+      <p:nvGrpSpPr>
+        <p:cNvPr id="1" name=""/>
+        <p:cNvGrpSpPr/>
+        <p:nvPr/>
+      </p:nvGrpSpPr>
+      <p:grpSpPr/>
+      <p:sp>
+        <p:nvSpPr>
+          <p:cNvPr id="2" name="Rectangle 1"/>
+          <p:cNvSpPr/>
+          <p:nvPr/>
+        </p:nvSpPr>
+        <p:spPr>
+          <a:xfrm>
+            <a:off x="0" y="0"/>
+            <a:ext cx="12191695" cy="1188720"/>
+          </a:xfrm>
+          <a:prstGeom prst="rect">
+            <a:avLst/>
+          </a:prstGeom>
+          <a:solidFill>
+            <a:srgbClr val="0C2340"/>
+          </a:solidFill>
+          <a:ln>
+            <a:noFill/>
+          </a:ln>
+          <a:effectLst/>
+        </p:spPr>
+        <p:style>
+          <a:lnRef idx="1">
+            <a:schemeClr val="accent1"/>
+          </a:lnRef>
+          <a:fillRef idx="3">
+            <a:schemeClr val="accent1"/>
+          </a:fillRef>
+          <a:effectRef idx="2">
+            <a:schemeClr val="accent1"/>
+          </a:effectRef>
+          <a:fontRef idx="minor">
+            <a:schemeClr val="lt1"/>
+          </a:fontRef>
+        </p:style>
+        <p:txBody>
+          <a:bodyPr rtlCol="0" anchor="ctr"/>
+          <a:lstStyle/>
+          <a:p>
+            <a:pPr algn="ctr"/>
+          </a:p>
+        </p:txBody>
+      </p:sp>
+      <p:sp>
+        <p:nvSpPr>
+          <p:cNvPr id="3" name="TextBox 2"/>
+          <p:cNvSpPr txBox="1"/>
+          <p:nvPr/>
+        </p:nvSpPr>
+        <p:spPr>
+          <a:xfrm>
+            <a:off x="640080" y="0"/>
+            <a:ext cx="9082735" cy="1188720"/>
+          </a:xfrm>
+          <a:prstGeom prst="rect">
+            <a:avLst/>
+          </a:prstGeom>
+          <a:noFill/>
+        </p:spPr>
+        <p:txBody>
+          <a:bodyPr wrap="square" anchor="ctr" lIns="0" rIns="0" tIns="0" bIns="0">
+            <a:spAutoFit/>
+          </a:bodyPr>
+          <a:lstStyle/>
+          <a:p>
+            <a:pPr algn="ctr"/>
+            <a:r>
+              <a:rPr sz="2600" b="1" i="0">
+                <a:solidFill>
+                  <a:srgbClr val="FFFFFF"/>
+                </a:solidFill>
+                <a:latin typeface="Calibri"/>
+              </a:rPr>
+              <a:t>ACUERDOS DE TRABAJO</a:t>
+            </a:r>
+          </a:p>
+        </p:txBody>
+      </p:sp>
+      <p:sp>
+        <p:nvSpPr>
+          <p:cNvPr id="4" name="Rounded Rectangle 3"/>
+          <p:cNvSpPr/>
+          <p:nvPr/>
+        </p:nvSpPr>
+        <p:spPr>
+          <a:xfrm>
+            <a:off x="640080" y="1737360"/>
+            <a:ext cx="10911535" cy="713232"/>
+          </a:xfrm>
+          <a:prstGeom prst="roundRect">
+            <a:avLst/>
+          </a:prstGeom>
+          <a:solidFill>
+            <a:srgbClr val="E8F5EC"/>
+          </a:solidFill>
+          <a:ln>
+            <a:noFill/>
+          </a:ln>
+          <a:effectLst/>
+        </p:spPr>
+        <p:style>
+          <a:lnRef idx="1">
+            <a:schemeClr val="accent1"/>
+          </a:lnRef>
+          <a:fillRef idx="3">
+            <a:schemeClr val="accent1"/>
+          </a:fillRef>
+          <a:effectRef idx="2">
+            <a:schemeClr val="accent1"/>
+          </a:effectRef>
+          <a:fontRef idx="minor">
+            <a:schemeClr val="lt1"/>
+          </a:fontRef>
+        </p:style>
+        <p:txBody>
+          <a:bodyPr rtlCol="0" anchor="ctr"/>
+          <a:lstStyle/>
+          <a:p>
+            <a:pPr algn="ctr"/>
+          </a:p>
+        </p:txBody>
+      </p:sp>
+      <p:sp>
+        <p:nvSpPr>
+          <p:cNvPr id="5" name="TextBox 4"/>
+          <p:cNvSpPr txBox="1"/>
+          <p:nvPr/>
+        </p:nvSpPr>
+        <p:spPr>
+          <a:xfrm>
+            <a:off x="868680" y="1847088"/>
+            <a:ext cx="10454335" cy="493776"/>
+          </a:xfrm>
+          <a:prstGeom prst="rect">
+            <a:avLst/>
+          </a:prstGeom>
+          <a:noFill/>
+        </p:spPr>
+        <p:txBody>
+          <a:bodyPr wrap="square" anchor="t" lIns="0" rIns="0" tIns="0" bIns="0">
+            <a:spAutoFit/>
+          </a:bodyPr>
+          <a:lstStyle/>
+          <a:p>
+            <a:r>
+              <a:rPr sz="1300" b="1" i="0">
+                <a:solidFill>
+                  <a:srgbClr val="0C2340"/>
+                </a:solidFill>
+                <a:latin typeface="Calibri"/>
+              </a:rPr>
+              <a:t>ℹ️ Nota institucional</a:t>
+            </a:r>
+          </a:p>
+          <a:p>
+            <a:pPr>
+              <a:spcBef>
+                <a:spcPts val="400"/>
+              </a:spcBef>
+            </a:pPr>
+            <a:r>
+              <a:rPr sz="1300" b="1" i="0">
+                <a:solidFill>
+                  <a:srgbClr val="2B2B2B"/>
+                </a:solidFill>
+                <a:latin typeface="Calibri"/>
+              </a:rPr>
               <a:t>Entrega oficial: CDigital.</a:t>
             </a:r>
             <a:r>
@@ -9551,7 +9753,7 @@
                 </a:solidFill>
                 <a:latin typeface="Calibri"/>
               </a:rPr>
-              <a:t>20</a:t>
+              <a:t>21</a:t>
             </a:r>
           </a:p>
         </p:txBody>
@@ -9564,7 +9766,7 @@
 </p:sld>
 </file>
 
-<file path=ppt/slides/slide21.xml><?xml version="1.0" encoding="utf-8"?>
+<file path=ppt/slides/slide22.xml><?xml version="1.0" encoding="utf-8"?>
 <p:sld xmlns:a="http://schemas.openxmlformats.org/drawingml/2006/main" xmlns:p="http://schemas.openxmlformats.org/presentationml/2006/main" xmlns:r="http://schemas.openxmlformats.org/officeDocument/2006/relationships">
   <p:cSld>
     <p:bg>
@@ -9763,25 +9965,7 @@
                 </a:solidFill>
                 <a:latin typeface="Calibri"/>
               </a:rPr>
-              <a:t>–   Abrir el enunciado de la </a:t>
-            </a:r>
-            <a:r>
-              <a:rPr sz="1600" b="1" i="0">
-                <a:solidFill>
-                  <a:srgbClr val="2B2B2B"/>
-                </a:solidFill>
-                <a:latin typeface="Calibri"/>
-              </a:rPr>
-              <a:t>ACA 1</a:t>
-            </a:r>
-            <a:r>
-              <a:rPr sz="1600" b="0" i="0">
-                <a:solidFill>
-                  <a:srgbClr val="2B2B2B"/>
-                </a:solidFill>
-                <a:latin typeface="Calibri"/>
-              </a:rPr>
-              <a:t> en `Clases/Recursos/ACAs/` y leerlo entero.</a:t>
+              <a:t>–   Abrir los enunciados de `Clases/Recursos/ACAs/`: son la guía escrita de lo que evalúa cada corte.</a:t>
             </a:r>
           </a:p>
         </p:txBody>
@@ -9816,7 +10000,7 @@
                 </a:solidFill>
                 <a:latin typeface="Calibri"/>
               </a:rPr>
-              <a:t>21</a:t>
+              <a:t>22</a:t>
             </a:r>
           </a:p>
         </p:txBody>
@@ -9829,7 +10013,7 @@
 </p:sld>
 </file>
 
-<file path=ppt/slides/slide22.xml><?xml version="1.0" encoding="utf-8"?>
+<file path=ppt/slides/slide23.xml><?xml version="1.0" encoding="utf-8"?>
 <p:sld xmlns:a="http://schemas.openxmlformats.org/drawingml/2006/main" xmlns:p="http://schemas.openxmlformats.org/presentationml/2006/main" xmlns:r="http://schemas.openxmlformats.org/officeDocument/2006/relationships">
   <p:cSld>
     <p:bg>
@@ -10948,7 +11132,7 @@
                 </a:solidFill>
                 <a:latin typeface="Calibri"/>
               </a:rPr>
-              <a:t>LAS ACAs — QUÉ SE EVALÚA</a:t>
+              <a:t>CÓMO SE EVALÚA — LOS ÍTEMS DEL AULA</a:t>
             </a:r>
           </a:p>
         </p:txBody>
@@ -10983,7 +11167,7 @@
                 </a:solidFill>
                 <a:latin typeface="Calibri"/>
               </a:rPr>
-              <a:t>Entrega oficial: </a:t>
+              <a:t>Evaluación y notas: solo en </a:t>
             </a:r>
             <a:r>
               <a:rPr sz="1500" b="1" i="0">
@@ -10993,6 +11177,33 @@
                 <a:latin typeface="Calibri"/>
               </a:rPr>
               <a:t>CDigital</a:t>
+            </a:r>
+            <a:r>
+              <a:rPr sz="1500" b="0" i="0">
+                <a:solidFill>
+                  <a:srgbClr val="2B2B2B"/>
+                </a:solidFill>
+                <a:latin typeface="Calibri"/>
+              </a:rPr>
+              <a:t> · los pesos suman </a:t>
+            </a:r>
+            <a:r>
+              <a:rPr sz="1500" b="1" i="0">
+                <a:solidFill>
+                  <a:srgbClr val="2B2B2B"/>
+                </a:solidFill>
+                <a:latin typeface="Calibri"/>
+              </a:rPr>
+              <a:t>100%</a:t>
+            </a:r>
+            <a:r>
+              <a:rPr sz="1500" b="0" i="0">
+                <a:solidFill>
+                  <a:srgbClr val="2B2B2B"/>
+                </a:solidFill>
+                <a:latin typeface="Calibri"/>
+              </a:rPr>
+              <a:t> · fechas: enunciados y Presentación del Curso</a:t>
             </a:r>
           </a:p>
         </p:txBody>
@@ -11007,7 +11218,7 @@
         </p:nvGraphicFramePr>
         <p:xfrm>
           <a:off x="640080" y="2011679"/>
-          <a:ext cx="10911533" cy="2011680"/>
+          <a:ext cx="10911533" cy="4297680"/>
         </p:xfrm>
         <a:graphic>
           <a:graphicData uri="http://schemas.openxmlformats.org/drawingml/2006/table">
@@ -11016,11 +11227,13 @@
                 <a:tableStyleId>{2D5ABB26-0587-4C30-8999-92F81FD0307C}</a:tableStyleId>
               </a:tblPr>
               <a:tblGrid>
-                <a:gridCol w="1993453"/>
-                <a:gridCol w="7763976"/>
-                <a:gridCol w="1154104"/>
+                <a:gridCol w="1833871"/>
+                <a:gridCol w="1192016"/>
+                <a:gridCol w="1192016"/>
+                <a:gridCol w="825242"/>
+                <a:gridCol w="5868388"/>
               </a:tblGrid>
-              <a:tr h="502920">
+              <a:tr h="477520">
                 <a:tc>
                   <a:txBody>
                     <a:bodyPr/>
@@ -11034,7 +11247,7 @@
                           </a:solidFill>
                           <a:latin typeface="Calibri"/>
                         </a:rPr>
-                        <a:t>ACA</a:t>
+                        <a:t>Ítem en CDigital</a:t>
                       </a:r>
                     </a:p>
                   </a:txBody>
@@ -11057,7 +11270,7 @@
                           </a:solidFill>
                           <a:latin typeface="Calibri"/>
                         </a:rPr>
-                        <a:t>Qué entregas</a:t>
+                        <a:t>Tipo</a:t>
                       </a:r>
                     </a:p>
                   </a:txBody>
@@ -11080,7 +11293,53 @@
                           </a:solidFill>
                           <a:latin typeface="Calibri"/>
                         </a:rPr>
+                        <a:t>Corte (peso)</a:t>
+                      </a:r>
+                    </a:p>
+                  </a:txBody>
+                  <a:tcPr anchor="ctr" marL="109728" marR="91440" marT="36576" marB="36576">
+                    <a:solidFill>
+                      <a:srgbClr val="0C2340"/>
+                    </a:solidFill>
+                  </a:tcPr>
+                </a:tc>
+                <a:tc>
+                  <a:txBody>
+                    <a:bodyPr/>
+                    <a:lstStyle/>
+                    <a:p>
+                      <a:pPr algn="l"/>
+                      <a:r>
+                        <a:rPr sz="1300" b="1" i="0">
+                          <a:solidFill>
+                            <a:srgbClr val="FFFFFF"/>
+                          </a:solidFill>
+                          <a:latin typeface="Calibri"/>
+                        </a:rPr>
                         <a:t>Peso</a:t>
+                      </a:r>
+                    </a:p>
+                  </a:txBody>
+                  <a:tcPr anchor="ctr" marL="109728" marR="91440" marT="36576" marB="36576">
+                    <a:solidFill>
+                      <a:srgbClr val="0C2340"/>
+                    </a:solidFill>
+                  </a:tcPr>
+                </a:tc>
+                <a:tc>
+                  <a:txBody>
+                    <a:bodyPr/>
+                    <a:lstStyle/>
+                    <a:p>
+                      <a:pPr algn="l"/>
+                      <a:r>
+                        <a:rPr sz="1300" b="1" i="0">
+                          <a:solidFill>
+                            <a:srgbClr val="FFFFFF"/>
+                          </a:solidFill>
+                          <a:latin typeface="Calibri"/>
+                        </a:rPr>
+                        <a:t>Qué haces con él</a:t>
                       </a:r>
                     </a:p>
                   </a:txBody>
@@ -11091,7 +11350,7 @@
                   </a:tcPr>
                 </a:tc>
               </a:tr>
-              <a:tr h="502920">
+              <a:tr h="477520">
                 <a:tc>
                   <a:txBody>
                     <a:bodyPr/>
@@ -11099,13 +11358,13 @@
                     <a:p>
                       <a:pPr algn="l"/>
                       <a:r>
-                        <a:rPr sz="1200" b="0" i="0">
+                        <a:rPr sz="1100" b="1" i="0">
                           <a:solidFill>
                             <a:srgbClr val="2B2B2B"/>
                           </a:solidFill>
                           <a:latin typeface="Calibri"/>
                         </a:rPr>
-                        <a:t>ACA 1</a:t>
+                        <a:t>Quiz 1</a:t>
                       </a:r>
                     </a:p>
                   </a:txBody>
@@ -11122,13 +11381,13 @@
                     <a:p>
                       <a:pPr algn="l"/>
                       <a:r>
-                        <a:rPr sz="1200" b="0" i="0">
+                        <a:rPr sz="1100" b="0" i="0">
                           <a:solidFill>
                             <a:srgbClr val="2B2B2B"/>
                           </a:solidFill>
                           <a:latin typeface="Calibri"/>
                         </a:rPr>
-                        <a:t>Corte 1 · Problema–oportunidad</a:t>
+                        <a:t>Cuestionario</a:t>
                       </a:r>
                     </a:p>
                   </a:txBody>
@@ -11145,13 +11404,59 @@
                     <a:p>
                       <a:pPr algn="l"/>
                       <a:r>
-                        <a:rPr sz="1200" b="0" i="0">
+                        <a:rPr sz="1100" b="0" i="0">
                           <a:solidFill>
                             <a:srgbClr val="2B2B2B"/>
                           </a:solidFill>
                           <a:latin typeface="Calibri"/>
                         </a:rPr>
-                        <a:t>30%</a:t>
+                        <a:t>1 (30%)</a:t>
+                      </a:r>
+                    </a:p>
+                  </a:txBody>
+                  <a:tcPr anchor="ctr" marL="109728" marR="91440" marT="36576" marB="36576">
+                    <a:solidFill>
+                      <a:srgbClr val="FFFFFF"/>
+                    </a:solidFill>
+                  </a:tcPr>
+                </a:tc>
+                <a:tc>
+                  <a:txBody>
+                    <a:bodyPr/>
+                    <a:lstStyle/>
+                    <a:p>
+                      <a:pPr algn="l"/>
+                      <a:r>
+                        <a:rPr sz="1100" b="1" i="0">
+                          <a:solidFill>
+                            <a:srgbClr val="2B2B2B"/>
+                          </a:solidFill>
+                          <a:latin typeface="Calibri"/>
+                        </a:rPr>
+                        <a:t>6%</a:t>
+                      </a:r>
+                    </a:p>
+                  </a:txBody>
+                  <a:tcPr anchor="ctr" marL="109728" marR="91440" marT="36576" marB="36576">
+                    <a:solidFill>
+                      <a:srgbClr val="FFFFFF"/>
+                    </a:solidFill>
+                  </a:tcPr>
+                </a:tc>
+                <a:tc>
+                  <a:txBody>
+                    <a:bodyPr/>
+                    <a:lstStyle/>
+                    <a:p>
+                      <a:pPr algn="l"/>
+                      <a:r>
+                        <a:rPr sz="1100" b="0" i="0">
+                          <a:solidFill>
+                            <a:srgbClr val="2B2B2B"/>
+                          </a:solidFill>
+                          <a:latin typeface="Calibri"/>
+                        </a:rPr>
+                        <a:t>Lo resuelves en CDigital dentro de su ventana. No se sube archivo.</a:t>
                       </a:r>
                     </a:p>
                   </a:txBody>
@@ -11162,7 +11467,7 @@
                   </a:tcPr>
                 </a:tc>
               </a:tr>
-              <a:tr h="502920">
+              <a:tr h="477520">
                 <a:tc>
                   <a:txBody>
                     <a:bodyPr/>
@@ -11170,13 +11475,13 @@
                     <a:p>
                       <a:pPr algn="l"/>
                       <a:r>
-                        <a:rPr sz="1200" b="0" i="0">
+                        <a:rPr sz="1100" b="1" i="0">
                           <a:solidFill>
                             <a:srgbClr val="2B2B2B"/>
                           </a:solidFill>
                           <a:latin typeface="Calibri"/>
                         </a:rPr>
-                        <a:t>ACA 2</a:t>
+                        <a:t>Parcial 1</a:t>
                       </a:r>
                     </a:p>
                   </a:txBody>
@@ -11193,13 +11498,13 @@
                     <a:p>
                       <a:pPr algn="l"/>
                       <a:r>
-                        <a:rPr sz="1200" b="0" i="0">
+                        <a:rPr sz="1100" b="0" i="0">
                           <a:solidFill>
                             <a:srgbClr val="2B2B2B"/>
                           </a:solidFill>
                           <a:latin typeface="Calibri"/>
                         </a:rPr>
-                        <a:t>Corte 2 · Validación de la propuesta</a:t>
+                        <a:t>Cuestionario</a:t>
                       </a:r>
                     </a:p>
                   </a:txBody>
@@ -11216,13 +11521,59 @@
                     <a:p>
                       <a:pPr algn="l"/>
                       <a:r>
-                        <a:rPr sz="1200" b="0" i="0">
+                        <a:rPr sz="1100" b="0" i="0">
                           <a:solidFill>
                             <a:srgbClr val="2B2B2B"/>
                           </a:solidFill>
                           <a:latin typeface="Calibri"/>
                         </a:rPr>
-                        <a:t>30%</a:t>
+                        <a:t>1 (30%)</a:t>
+                      </a:r>
+                    </a:p>
+                  </a:txBody>
+                  <a:tcPr anchor="ctr" marL="109728" marR="91440" marT="36576" marB="36576">
+                    <a:solidFill>
+                      <a:srgbClr val="F2F2F2"/>
+                    </a:solidFill>
+                  </a:tcPr>
+                </a:tc>
+                <a:tc>
+                  <a:txBody>
+                    <a:bodyPr/>
+                    <a:lstStyle/>
+                    <a:p>
+                      <a:pPr algn="l"/>
+                      <a:r>
+                        <a:rPr sz="1100" b="1" i="0">
+                          <a:solidFill>
+                            <a:srgbClr val="2B2B2B"/>
+                          </a:solidFill>
+                          <a:latin typeface="Calibri"/>
+                        </a:rPr>
+                        <a:t>24%</a:t>
+                      </a:r>
+                    </a:p>
+                  </a:txBody>
+                  <a:tcPr anchor="ctr" marL="109728" marR="91440" marT="36576" marB="36576">
+                    <a:solidFill>
+                      <a:srgbClr val="F2F2F2"/>
+                    </a:solidFill>
+                  </a:tcPr>
+                </a:tc>
+                <a:tc>
+                  <a:txBody>
+                    <a:bodyPr/>
+                    <a:lstStyle/>
+                    <a:p>
+                      <a:pPr algn="l"/>
+                      <a:r>
+                        <a:rPr sz="1100" b="0" i="0">
+                          <a:solidFill>
+                            <a:srgbClr val="2B2B2B"/>
+                          </a:solidFill>
+                          <a:latin typeface="Calibri"/>
+                        </a:rPr>
+                        <a:t>Lo resuelves en CDigital dentro de su ventana. No se sube archivo.</a:t>
                       </a:r>
                     </a:p>
                   </a:txBody>
@@ -11233,7 +11584,7 @@
                   </a:tcPr>
                 </a:tc>
               </a:tr>
-              <a:tr h="502920">
+              <a:tr h="477520">
                 <a:tc>
                   <a:txBody>
                     <a:bodyPr/>
@@ -11241,13 +11592,13 @@
                     <a:p>
                       <a:pPr algn="l"/>
                       <a:r>
-                        <a:rPr sz="1200" b="0" i="0">
+                        <a:rPr sz="1100" b="1" i="0">
                           <a:solidFill>
                             <a:srgbClr val="2B2B2B"/>
                           </a:solidFill>
                           <a:latin typeface="Calibri"/>
                         </a:rPr>
-                        <a:t>ACA 3</a:t>
+                        <a:t>Quiz 2</a:t>
                       </a:r>
                     </a:p>
                   </a:txBody>
@@ -11264,13 +11615,13 @@
                     <a:p>
                       <a:pPr algn="l"/>
                       <a:r>
-                        <a:rPr sz="1200" b="0" i="0">
+                        <a:rPr sz="1100" b="0" i="0">
                           <a:solidFill>
                             <a:srgbClr val="2B2B2B"/>
                           </a:solidFill>
                           <a:latin typeface="Calibri"/>
                         </a:rPr>
-                        <a:t>Corte 3 · Propuesta de Innovación final</a:t>
+                        <a:t>Cuestionario</a:t>
                       </a:r>
                     </a:p>
                   </a:txBody>
@@ -11287,13 +11638,59 @@
                     <a:p>
                       <a:pPr algn="l"/>
                       <a:r>
-                        <a:rPr sz="1200" b="0" i="0">
+                        <a:rPr sz="1100" b="0" i="0">
                           <a:solidFill>
                             <a:srgbClr val="2B2B2B"/>
                           </a:solidFill>
                           <a:latin typeface="Calibri"/>
                         </a:rPr>
-                        <a:t>40%</a:t>
+                        <a:t>2 (30%)</a:t>
+                      </a:r>
+                    </a:p>
+                  </a:txBody>
+                  <a:tcPr anchor="ctr" marL="109728" marR="91440" marT="36576" marB="36576">
+                    <a:solidFill>
+                      <a:srgbClr val="FFFFFF"/>
+                    </a:solidFill>
+                  </a:tcPr>
+                </a:tc>
+                <a:tc>
+                  <a:txBody>
+                    <a:bodyPr/>
+                    <a:lstStyle/>
+                    <a:p>
+                      <a:pPr algn="l"/>
+                      <a:r>
+                        <a:rPr sz="1100" b="1" i="0">
+                          <a:solidFill>
+                            <a:srgbClr val="2B2B2B"/>
+                          </a:solidFill>
+                          <a:latin typeface="Calibri"/>
+                        </a:rPr>
+                        <a:t>9%</a:t>
+                      </a:r>
+                    </a:p>
+                  </a:txBody>
+                  <a:tcPr anchor="ctr" marL="109728" marR="91440" marT="36576" marB="36576">
+                    <a:solidFill>
+                      <a:srgbClr val="FFFFFF"/>
+                    </a:solidFill>
+                  </a:tcPr>
+                </a:tc>
+                <a:tc>
+                  <a:txBody>
+                    <a:bodyPr/>
+                    <a:lstStyle/>
+                    <a:p>
+                      <a:pPr algn="l"/>
+                      <a:r>
+                        <a:rPr sz="1100" b="0" i="0">
+                          <a:solidFill>
+                            <a:srgbClr val="2B2B2B"/>
+                          </a:solidFill>
+                          <a:latin typeface="Calibri"/>
+                        </a:rPr>
+                        <a:t>Lo resuelves en CDigital dentro de su ventana. No se sube archivo.</a:t>
                       </a:r>
                     </a:p>
                   </a:txBody>
@@ -11304,6 +11701,591 @@
                   </a:tcPr>
                 </a:tc>
               </a:tr>
+              <a:tr h="477520">
+                <a:tc>
+                  <a:txBody>
+                    <a:bodyPr/>
+                    <a:lstStyle/>
+                    <a:p>
+                      <a:pPr algn="l"/>
+                      <a:r>
+                        <a:rPr sz="1100" b="1" i="0">
+                          <a:solidFill>
+                            <a:srgbClr val="2B2B2B"/>
+                          </a:solidFill>
+                          <a:latin typeface="Calibri"/>
+                        </a:rPr>
+                        <a:t>Parcial 2</a:t>
+                      </a:r>
+                    </a:p>
+                  </a:txBody>
+                  <a:tcPr anchor="ctr" marL="109728" marR="91440" marT="36576" marB="36576">
+                    <a:solidFill>
+                      <a:srgbClr val="F2F2F2"/>
+                    </a:solidFill>
+                  </a:tcPr>
+                </a:tc>
+                <a:tc>
+                  <a:txBody>
+                    <a:bodyPr/>
+                    <a:lstStyle/>
+                    <a:p>
+                      <a:pPr algn="l"/>
+                      <a:r>
+                        <a:rPr sz="1100" b="0" i="0">
+                          <a:solidFill>
+                            <a:srgbClr val="2B2B2B"/>
+                          </a:solidFill>
+                          <a:latin typeface="Calibri"/>
+                        </a:rPr>
+                        <a:t>Cuestionario</a:t>
+                      </a:r>
+                    </a:p>
+                  </a:txBody>
+                  <a:tcPr anchor="ctr" marL="109728" marR="91440" marT="36576" marB="36576">
+                    <a:solidFill>
+                      <a:srgbClr val="F2F2F2"/>
+                    </a:solidFill>
+                  </a:tcPr>
+                </a:tc>
+                <a:tc>
+                  <a:txBody>
+                    <a:bodyPr/>
+                    <a:lstStyle/>
+                    <a:p>
+                      <a:pPr algn="l"/>
+                      <a:r>
+                        <a:rPr sz="1100" b="0" i="0">
+                          <a:solidFill>
+                            <a:srgbClr val="2B2B2B"/>
+                          </a:solidFill>
+                          <a:latin typeface="Calibri"/>
+                        </a:rPr>
+                        <a:t>2 (30%)</a:t>
+                      </a:r>
+                    </a:p>
+                  </a:txBody>
+                  <a:tcPr anchor="ctr" marL="109728" marR="91440" marT="36576" marB="36576">
+                    <a:solidFill>
+                      <a:srgbClr val="F2F2F2"/>
+                    </a:solidFill>
+                  </a:tcPr>
+                </a:tc>
+                <a:tc>
+                  <a:txBody>
+                    <a:bodyPr/>
+                    <a:lstStyle/>
+                    <a:p>
+                      <a:pPr algn="l"/>
+                      <a:r>
+                        <a:rPr sz="1100" b="1" i="0">
+                          <a:solidFill>
+                            <a:srgbClr val="2B2B2B"/>
+                          </a:solidFill>
+                          <a:latin typeface="Calibri"/>
+                        </a:rPr>
+                        <a:t>21%</a:t>
+                      </a:r>
+                    </a:p>
+                  </a:txBody>
+                  <a:tcPr anchor="ctr" marL="109728" marR="91440" marT="36576" marB="36576">
+                    <a:solidFill>
+                      <a:srgbClr val="F2F2F2"/>
+                    </a:solidFill>
+                  </a:tcPr>
+                </a:tc>
+                <a:tc>
+                  <a:txBody>
+                    <a:bodyPr/>
+                    <a:lstStyle/>
+                    <a:p>
+                      <a:pPr algn="l"/>
+                      <a:r>
+                        <a:rPr sz="1100" b="0" i="0">
+                          <a:solidFill>
+                            <a:srgbClr val="2B2B2B"/>
+                          </a:solidFill>
+                          <a:latin typeface="Calibri"/>
+                        </a:rPr>
+                        <a:t>Lo resuelves en CDigital dentro de su ventana. No se sube archivo.</a:t>
+                      </a:r>
+                    </a:p>
+                  </a:txBody>
+                  <a:tcPr anchor="ctr" marL="109728" marR="91440" marT="36576" marB="36576">
+                    <a:solidFill>
+                      <a:srgbClr val="F2F2F2"/>
+                    </a:solidFill>
+                  </a:tcPr>
+                </a:tc>
+              </a:tr>
+              <a:tr h="477520">
+                <a:tc>
+                  <a:txBody>
+                    <a:bodyPr/>
+                    <a:lstStyle/>
+                    <a:p>
+                      <a:pPr algn="l"/>
+                      <a:r>
+                        <a:rPr sz="1100" b="1" i="0">
+                          <a:solidFill>
+                            <a:srgbClr val="2B2B2B"/>
+                          </a:solidFill>
+                          <a:latin typeface="Calibri"/>
+                        </a:rPr>
+                        <a:t>ACA Final</a:t>
+                      </a:r>
+                    </a:p>
+                  </a:txBody>
+                  <a:tcPr anchor="ctr" marL="109728" marR="91440" marT="36576" marB="36576">
+                    <a:solidFill>
+                      <a:srgbClr val="FFFFFF"/>
+                    </a:solidFill>
+                  </a:tcPr>
+                </a:tc>
+                <a:tc>
+                  <a:txBody>
+                    <a:bodyPr/>
+                    <a:lstStyle/>
+                    <a:p>
+                      <a:pPr algn="l"/>
+                      <a:r>
+                        <a:rPr sz="1100" b="0" i="0">
+                          <a:solidFill>
+                            <a:srgbClr val="2B2B2B"/>
+                          </a:solidFill>
+                          <a:latin typeface="Calibri"/>
+                        </a:rPr>
+                        <a:t>Tarea</a:t>
+                      </a:r>
+                    </a:p>
+                  </a:txBody>
+                  <a:tcPr anchor="ctr" marL="109728" marR="91440" marT="36576" marB="36576">
+                    <a:solidFill>
+                      <a:srgbClr val="FFFFFF"/>
+                    </a:solidFill>
+                  </a:tcPr>
+                </a:tc>
+                <a:tc>
+                  <a:txBody>
+                    <a:bodyPr/>
+                    <a:lstStyle/>
+                    <a:p>
+                      <a:pPr algn="l"/>
+                      <a:r>
+                        <a:rPr sz="1100" b="0" i="0">
+                          <a:solidFill>
+                            <a:srgbClr val="2B2B2B"/>
+                          </a:solidFill>
+                          <a:latin typeface="Calibri"/>
+                        </a:rPr>
+                        <a:t>3 (40%)</a:t>
+                      </a:r>
+                    </a:p>
+                  </a:txBody>
+                  <a:tcPr anchor="ctr" marL="109728" marR="91440" marT="36576" marB="36576">
+                    <a:solidFill>
+                      <a:srgbClr val="FFFFFF"/>
+                    </a:solidFill>
+                  </a:tcPr>
+                </a:tc>
+                <a:tc>
+                  <a:txBody>
+                    <a:bodyPr/>
+                    <a:lstStyle/>
+                    <a:p>
+                      <a:pPr algn="l"/>
+                      <a:r>
+                        <a:rPr sz="1100" b="1" i="0">
+                          <a:solidFill>
+                            <a:srgbClr val="2B2B2B"/>
+                          </a:solidFill>
+                          <a:latin typeface="Calibri"/>
+                        </a:rPr>
+                        <a:t>32,8%</a:t>
+                      </a:r>
+                    </a:p>
+                  </a:txBody>
+                  <a:tcPr anchor="ctr" marL="109728" marR="91440" marT="36576" marB="36576">
+                    <a:solidFill>
+                      <a:srgbClr val="FFFFFF"/>
+                    </a:solidFill>
+                  </a:tcPr>
+                </a:tc>
+                <a:tc>
+                  <a:txBody>
+                    <a:bodyPr/>
+                    <a:lstStyle/>
+                    <a:p>
+                      <a:pPr algn="l"/>
+                      <a:r>
+                        <a:rPr sz="1100" b="0" i="0">
+                          <a:solidFill>
+                            <a:srgbClr val="2B2B2B"/>
+                          </a:solidFill>
+                          <a:latin typeface="Calibri"/>
+                        </a:rPr>
+                        <a:t>Subes el documento (plantilla APA CUN) al espacio de la tarea.</a:t>
+                      </a:r>
+                    </a:p>
+                  </a:txBody>
+                  <a:tcPr anchor="ctr" marL="109728" marR="91440" marT="36576" marB="36576">
+                    <a:solidFill>
+                      <a:srgbClr val="FFFFFF"/>
+                    </a:solidFill>
+                  </a:tcPr>
+                </a:tc>
+              </a:tr>
+              <a:tr h="477520">
+                <a:tc>
+                  <a:txBody>
+                    <a:bodyPr/>
+                    <a:lstStyle/>
+                    <a:p>
+                      <a:pPr algn="l"/>
+                      <a:r>
+                        <a:rPr sz="1100" b="1" i="0">
+                          <a:solidFill>
+                            <a:srgbClr val="2B2B2B"/>
+                          </a:solidFill>
+                          <a:latin typeface="Calibri"/>
+                        </a:rPr>
+                        <a:t>Quiz 3</a:t>
+                      </a:r>
+                    </a:p>
+                  </a:txBody>
+                  <a:tcPr anchor="ctr" marL="109728" marR="91440" marT="36576" marB="36576">
+                    <a:solidFill>
+                      <a:srgbClr val="F2F2F2"/>
+                    </a:solidFill>
+                  </a:tcPr>
+                </a:tc>
+                <a:tc>
+                  <a:txBody>
+                    <a:bodyPr/>
+                    <a:lstStyle/>
+                    <a:p>
+                      <a:pPr algn="l"/>
+                      <a:r>
+                        <a:rPr sz="1100" b="0" i="0">
+                          <a:solidFill>
+                            <a:srgbClr val="2B2B2B"/>
+                          </a:solidFill>
+                          <a:latin typeface="Calibri"/>
+                        </a:rPr>
+                        <a:t>Cuestionario</a:t>
+                      </a:r>
+                    </a:p>
+                  </a:txBody>
+                  <a:tcPr anchor="ctr" marL="109728" marR="91440" marT="36576" marB="36576">
+                    <a:solidFill>
+                      <a:srgbClr val="F2F2F2"/>
+                    </a:solidFill>
+                  </a:tcPr>
+                </a:tc>
+                <a:tc>
+                  <a:txBody>
+                    <a:bodyPr/>
+                    <a:lstStyle/>
+                    <a:p>
+                      <a:pPr algn="l"/>
+                      <a:r>
+                        <a:rPr sz="1100" b="0" i="0">
+                          <a:solidFill>
+                            <a:srgbClr val="2B2B2B"/>
+                          </a:solidFill>
+                          <a:latin typeface="Calibri"/>
+                        </a:rPr>
+                        <a:t>3 (40%)</a:t>
+                      </a:r>
+                    </a:p>
+                  </a:txBody>
+                  <a:tcPr anchor="ctr" marL="109728" marR="91440" marT="36576" marB="36576">
+                    <a:solidFill>
+                      <a:srgbClr val="F2F2F2"/>
+                    </a:solidFill>
+                  </a:tcPr>
+                </a:tc>
+                <a:tc>
+                  <a:txBody>
+                    <a:bodyPr/>
+                    <a:lstStyle/>
+                    <a:p>
+                      <a:pPr algn="l"/>
+                      <a:r>
+                        <a:rPr sz="1100" b="1" i="0">
+                          <a:solidFill>
+                            <a:srgbClr val="2B2B2B"/>
+                          </a:solidFill>
+                          <a:latin typeface="Calibri"/>
+                        </a:rPr>
+                        <a:t>4%</a:t>
+                      </a:r>
+                    </a:p>
+                  </a:txBody>
+                  <a:tcPr anchor="ctr" marL="109728" marR="91440" marT="36576" marB="36576">
+                    <a:solidFill>
+                      <a:srgbClr val="F2F2F2"/>
+                    </a:solidFill>
+                  </a:tcPr>
+                </a:tc>
+                <a:tc>
+                  <a:txBody>
+                    <a:bodyPr/>
+                    <a:lstStyle/>
+                    <a:p>
+                      <a:pPr algn="l"/>
+                      <a:r>
+                        <a:rPr sz="1100" b="0" i="0">
+                          <a:solidFill>
+                            <a:srgbClr val="2B2B2B"/>
+                          </a:solidFill>
+                          <a:latin typeface="Calibri"/>
+                        </a:rPr>
+                        <a:t>Lo resuelves en CDigital dentro de su ventana. No se sube archivo.</a:t>
+                      </a:r>
+                    </a:p>
+                  </a:txBody>
+                  <a:tcPr anchor="ctr" marL="109728" marR="91440" marT="36576" marB="36576">
+                    <a:solidFill>
+                      <a:srgbClr val="F2F2F2"/>
+                    </a:solidFill>
+                  </a:tcPr>
+                </a:tc>
+              </a:tr>
+              <a:tr h="477520">
+                <a:tc>
+                  <a:txBody>
+                    <a:bodyPr/>
+                    <a:lstStyle/>
+                    <a:p>
+                      <a:pPr algn="l"/>
+                      <a:r>
+                        <a:rPr sz="1100" b="1" i="0">
+                          <a:solidFill>
+                            <a:srgbClr val="2B2B2B"/>
+                          </a:solidFill>
+                          <a:latin typeface="Calibri"/>
+                        </a:rPr>
+                        <a:t>Autoevaluación</a:t>
+                      </a:r>
+                    </a:p>
+                  </a:txBody>
+                  <a:tcPr anchor="ctr" marL="109728" marR="91440" marT="36576" marB="36576">
+                    <a:solidFill>
+                      <a:srgbClr val="FFFFFF"/>
+                    </a:solidFill>
+                  </a:tcPr>
+                </a:tc>
+                <a:tc>
+                  <a:txBody>
+                    <a:bodyPr/>
+                    <a:lstStyle/>
+                    <a:p>
+                      <a:pPr algn="l"/>
+                      <a:r>
+                        <a:rPr sz="1100" b="0" i="0">
+                          <a:solidFill>
+                            <a:srgbClr val="2B2B2B"/>
+                          </a:solidFill>
+                          <a:latin typeface="Calibri"/>
+                        </a:rPr>
+                        <a:t>Cuestionario</a:t>
+                      </a:r>
+                    </a:p>
+                  </a:txBody>
+                  <a:tcPr anchor="ctr" marL="109728" marR="91440" marT="36576" marB="36576">
+                    <a:solidFill>
+                      <a:srgbClr val="FFFFFF"/>
+                    </a:solidFill>
+                  </a:tcPr>
+                </a:tc>
+                <a:tc>
+                  <a:txBody>
+                    <a:bodyPr/>
+                    <a:lstStyle/>
+                    <a:p>
+                      <a:pPr algn="l"/>
+                      <a:r>
+                        <a:rPr sz="1100" b="0" i="0">
+                          <a:solidFill>
+                            <a:srgbClr val="2B2B2B"/>
+                          </a:solidFill>
+                          <a:latin typeface="Calibri"/>
+                        </a:rPr>
+                        <a:t>3 (40%)</a:t>
+                      </a:r>
+                    </a:p>
+                  </a:txBody>
+                  <a:tcPr anchor="ctr" marL="109728" marR="91440" marT="36576" marB="36576">
+                    <a:solidFill>
+                      <a:srgbClr val="FFFFFF"/>
+                    </a:solidFill>
+                  </a:tcPr>
+                </a:tc>
+                <a:tc>
+                  <a:txBody>
+                    <a:bodyPr/>
+                    <a:lstStyle/>
+                    <a:p>
+                      <a:pPr algn="l"/>
+                      <a:r>
+                        <a:rPr sz="1100" b="1" i="0">
+                          <a:solidFill>
+                            <a:srgbClr val="2B2B2B"/>
+                          </a:solidFill>
+                          <a:latin typeface="Calibri"/>
+                        </a:rPr>
+                        <a:t>1,6%</a:t>
+                      </a:r>
+                    </a:p>
+                  </a:txBody>
+                  <a:tcPr anchor="ctr" marL="109728" marR="91440" marT="36576" marB="36576">
+                    <a:solidFill>
+                      <a:srgbClr val="FFFFFF"/>
+                    </a:solidFill>
+                  </a:tcPr>
+                </a:tc>
+                <a:tc>
+                  <a:txBody>
+                    <a:bodyPr/>
+                    <a:lstStyle/>
+                    <a:p>
+                      <a:pPr algn="l"/>
+                      <a:r>
+                        <a:rPr sz="1100" b="0" i="0">
+                          <a:solidFill>
+                            <a:srgbClr val="2B2B2B"/>
+                          </a:solidFill>
+                          <a:latin typeface="Calibri"/>
+                        </a:rPr>
+                        <a:t>La diligencias tú mismo en el aula (cuestionario individual).</a:t>
+                      </a:r>
+                    </a:p>
+                  </a:txBody>
+                  <a:tcPr anchor="ctr" marL="109728" marR="91440" marT="36576" marB="36576">
+                    <a:solidFill>
+                      <a:srgbClr val="FFFFFF"/>
+                    </a:solidFill>
+                  </a:tcPr>
+                </a:tc>
+              </a:tr>
+              <a:tr h="477520">
+                <a:tc>
+                  <a:txBody>
+                    <a:bodyPr/>
+                    <a:lstStyle/>
+                    <a:p>
+                      <a:pPr algn="l"/>
+                      <a:r>
+                        <a:rPr sz="1100" b="1" i="0">
+                          <a:solidFill>
+                            <a:srgbClr val="2B2B2B"/>
+                          </a:solidFill>
+                          <a:latin typeface="Calibri"/>
+                        </a:rPr>
+                        <a:t>Coevaluación</a:t>
+                      </a:r>
+                    </a:p>
+                  </a:txBody>
+                  <a:tcPr anchor="ctr" marL="109728" marR="91440" marT="36576" marB="36576">
+                    <a:solidFill>
+                      <a:srgbClr val="F2F2F2"/>
+                    </a:solidFill>
+                  </a:tcPr>
+                </a:tc>
+                <a:tc>
+                  <a:txBody>
+                    <a:bodyPr/>
+                    <a:lstStyle/>
+                    <a:p>
+                      <a:pPr algn="l"/>
+                      <a:r>
+                        <a:rPr sz="1100" b="0" i="0">
+                          <a:solidFill>
+                            <a:srgbClr val="2B2B2B"/>
+                          </a:solidFill>
+                          <a:latin typeface="Calibri"/>
+                        </a:rPr>
+                        <a:t>Foro</a:t>
+                      </a:r>
+                    </a:p>
+                  </a:txBody>
+                  <a:tcPr anchor="ctr" marL="109728" marR="91440" marT="36576" marB="36576">
+                    <a:solidFill>
+                      <a:srgbClr val="F2F2F2"/>
+                    </a:solidFill>
+                  </a:tcPr>
+                </a:tc>
+                <a:tc>
+                  <a:txBody>
+                    <a:bodyPr/>
+                    <a:lstStyle/>
+                    <a:p>
+                      <a:pPr algn="l"/>
+                      <a:r>
+                        <a:rPr sz="1100" b="0" i="0">
+                          <a:solidFill>
+                            <a:srgbClr val="2B2B2B"/>
+                          </a:solidFill>
+                          <a:latin typeface="Calibri"/>
+                        </a:rPr>
+                        <a:t>3 (40%)</a:t>
+                      </a:r>
+                    </a:p>
+                  </a:txBody>
+                  <a:tcPr anchor="ctr" marL="109728" marR="91440" marT="36576" marB="36576">
+                    <a:solidFill>
+                      <a:srgbClr val="F2F2F2"/>
+                    </a:solidFill>
+                  </a:tcPr>
+                </a:tc>
+                <a:tc>
+                  <a:txBody>
+                    <a:bodyPr/>
+                    <a:lstStyle/>
+                    <a:p>
+                      <a:pPr algn="l"/>
+                      <a:r>
+                        <a:rPr sz="1100" b="1" i="0">
+                          <a:solidFill>
+                            <a:srgbClr val="2B2B2B"/>
+                          </a:solidFill>
+                          <a:latin typeface="Calibri"/>
+                        </a:rPr>
+                        <a:t>1,6%</a:t>
+                      </a:r>
+                    </a:p>
+                  </a:txBody>
+                  <a:tcPr anchor="ctr" marL="109728" marR="91440" marT="36576" marB="36576">
+                    <a:solidFill>
+                      <a:srgbClr val="F2F2F2"/>
+                    </a:solidFill>
+                  </a:tcPr>
+                </a:tc>
+                <a:tc>
+                  <a:txBody>
+                    <a:bodyPr/>
+                    <a:lstStyle/>
+                    <a:p>
+                      <a:pPr algn="l"/>
+                      <a:r>
+                        <a:rPr sz="1100" b="0" i="0">
+                          <a:solidFill>
+                            <a:srgbClr val="2B2B2B"/>
+                          </a:solidFill>
+                          <a:latin typeface="Calibri"/>
+                        </a:rPr>
+                        <a:t>Participas en el foro valorando el trabajo de tus pares.</a:t>
+                      </a:r>
+                    </a:p>
+                  </a:txBody>
+                  <a:tcPr anchor="ctr" marL="109728" marR="91440" marT="36576" marB="36576">
+                    <a:solidFill>
+                      <a:srgbClr val="F2F2F2"/>
+                    </a:solidFill>
+                  </a:tcPr>
+                </a:tc>
+              </a:tr>
             </a:tbl>
           </a:graphicData>
         </a:graphic>
@@ -11311,58 +12293,6 @@
       <p:sp>
         <p:nvSpPr>
           <p:cNvPr id="6" name="TextBox 5"/>
-          <p:cNvSpPr txBox="1"/>
-          <p:nvPr/>
-        </p:nvSpPr>
-        <p:spPr>
-          <a:xfrm>
-            <a:off x="640080" y="4160520"/>
-            <a:ext cx="10911535" cy="548640"/>
-          </a:xfrm>
-          <a:prstGeom prst="rect">
-            <a:avLst/>
-          </a:prstGeom>
-          <a:noFill/>
-        </p:spPr>
-        <p:txBody>
-          <a:bodyPr wrap="square" anchor="t" lIns="0" rIns="0" tIns="0" bIns="0">
-            <a:spAutoFit/>
-          </a:bodyPr>
-          <a:lstStyle/>
-          <a:p>
-            <a:r>
-              <a:rPr sz="1200" b="0" i="1">
-                <a:solidFill>
-                  <a:srgbClr val="2B2B2B"/>
-                </a:solidFill>
-                <a:latin typeface="Calibri"/>
-              </a:rPr>
-              <a:t>Enunciado completo y </a:t>
-            </a:r>
-            <a:r>
-              <a:rPr sz="1200" b="1" i="1">
-                <a:solidFill>
-                  <a:srgbClr val="2B2B2B"/>
-                </a:solidFill>
-                <a:latin typeface="Calibri"/>
-              </a:rPr>
-              <a:t>fechas exactas</a:t>
-            </a:r>
-            <a:r>
-              <a:rPr sz="1200" b="0" i="1">
-                <a:solidFill>
-                  <a:srgbClr val="2B2B2B"/>
-                </a:solidFill>
-                <a:latin typeface="Calibri"/>
-              </a:rPr>
-              <a:t>: `Clases/Recursos/ACAs/` y la Presentación del Curso.</a:t>
-            </a:r>
-          </a:p>
-        </p:txBody>
-      </p:sp>
-      <p:sp>
-        <p:nvSpPr>
-          <p:cNvPr id="7" name="TextBox 6"/>
           <p:cNvSpPr txBox="1"/>
           <p:nvPr/>
         </p:nvSpPr>
@@ -12217,7 +13147,7 @@
                           </a:solidFill>
                           <a:latin typeface="Calibri"/>
                         </a:rPr>
-                        <a:t>Encuadre: el curso, el Docente, ustedes y las ACAs</a:t>
+                        <a:t>Encuadre: el curso, el Docente, ustedes y cómo se evalúa</a:t>
                       </a:r>
                     </a:p>
                   </a:txBody>
@@ -13391,7 +14321,7 @@
                 </a:solidFill>
                 <a:latin typeface="Calibri"/>
               </a:rPr>
-              <a:t>Las tres ACAs: qué se entrega en cada corte</a:t>
+              <a:t>Qué evalúa cada corte: lo que está en el libro de calificaciones</a:t>
             </a:r>
           </a:p>
         </p:txBody>
@@ -13415,9 +14345,9 @@
                 <a:tableStyleId>{2D5ABB26-0587-4C30-8999-92F81FD0307C}</a:tableStyleId>
               </a:tblPr>
               <a:tblGrid>
-                <a:gridCol w="1375403"/>
-                <a:gridCol w="5501614"/>
-                <a:gridCol w="4034517"/>
+                <a:gridCol w="1008629"/>
+                <a:gridCol w="4492985"/>
+                <a:gridCol w="5409920"/>
               </a:tblGrid>
               <a:tr h="502920">
                 <a:tc>
@@ -13433,7 +14363,7 @@
                           </a:solidFill>
                           <a:latin typeface="Calibri"/>
                         </a:rPr>
-                        <a:t>ACA</a:t>
+                        <a:t>Corte</a:t>
                       </a:r>
                     </a:p>
                   </a:txBody>
@@ -13456,7 +14386,7 @@
                           </a:solidFill>
                           <a:latin typeface="Calibri"/>
                         </a:rPr>
-                        <a:t>Qué entrega exactamente</a:t>
+                        <a:t>Qué hay en el aula (CDigital)</a:t>
                       </a:r>
                     </a:p>
                   </a:txBody>
@@ -13479,7 +14409,7 @@
                           </a:solidFill>
                           <a:latin typeface="Calibri"/>
                         </a:rPr>
-                        <a:t>Qué se evalúa ahí</a:t>
+                        <a:t>Qué se prepara para eso</a:t>
                       </a:r>
                     </a:p>
                   </a:txBody>
@@ -13504,16 +14434,7 @@
                           </a:solidFill>
                           <a:latin typeface="Calibri"/>
                         </a:rPr>
-                        <a:t>ACA 1</a:t>
-                      </a:r>
-                      <a:r>
-                        <a:rPr sz="1100" b="0" i="0">
-                          <a:solidFill>
-                            <a:srgbClr val="2B2B2B"/>
-                          </a:solidFill>
-                          <a:latin typeface="Calibri"/>
-                        </a:rPr>
-                        <a:t> · Corte 1</a:t>
+                        <a:t>Corte 1</a:t>
                       </a:r>
                     </a:p>
                   </a:txBody>
@@ -13530,13 +14451,40 @@
                     <a:p>
                       <a:pPr algn="l"/>
                       <a:r>
+                        <a:rPr sz="1100" b="1" i="0">
+                          <a:solidFill>
+                            <a:srgbClr val="2B2B2B"/>
+                          </a:solidFill>
+                          <a:latin typeface="Calibri"/>
+                        </a:rPr>
+                        <a:t>Quiz 1</a:t>
+                      </a:r>
+                      <a:r>
                         <a:rPr sz="1100" b="0" i="0">
                           <a:solidFill>
                             <a:srgbClr val="2B2B2B"/>
                           </a:solidFill>
                           <a:latin typeface="Calibri"/>
                         </a:rPr>
-                        <a:t>Ficha problema–oportunidad + mapa de bloqueadores y ensanchadores + síntesis de ideación (3–6 págs.).</a:t>
+                        <a:t> y </a:t>
+                      </a:r>
+                      <a:r>
+                        <a:rPr sz="1100" b="1" i="0">
+                          <a:solidFill>
+                            <a:srgbClr val="2B2B2B"/>
+                          </a:solidFill>
+                          <a:latin typeface="Calibri"/>
+                        </a:rPr>
+                        <a:t>Parcial 1</a:t>
+                      </a:r>
+                      <a:r>
+                        <a:rPr sz="1100" b="0" i="0">
+                          <a:solidFill>
+                            <a:srgbClr val="2B2B2B"/>
+                          </a:solidFill>
+                          <a:latin typeface="Calibri"/>
+                        </a:rPr>
+                        <a:t>: cuestionarios que se resuelven en el aula, dentro de su ventana. No se sube archivo.</a:t>
                       </a:r>
                     </a:p>
                   </a:txBody>
@@ -13559,25 +14507,7 @@
                           </a:solidFill>
                           <a:latin typeface="Calibri"/>
                         </a:rPr>
-                        <a:t>Que el problema sea </a:t>
-                      </a:r>
-                      <a:r>
-                        <a:rPr sz="1100" b="1" i="0">
-                          <a:solidFill>
-                            <a:srgbClr val="2B2B2B"/>
-                          </a:solidFill>
-                          <a:latin typeface="Calibri"/>
-                        </a:rPr>
-                        <a:t>real, observable y de alguien concreto</a:t>
-                      </a:r>
-                      <a:r>
-                        <a:rPr sz="1100" b="0" i="0">
-                          <a:solidFill>
-                            <a:srgbClr val="2B2B2B"/>
-                          </a:solidFill>
-                          <a:latin typeface="Calibri"/>
-                        </a:rPr>
-                        <a:t>.</a:t>
+                        <a:t>Lo trabajado hasta ahí: problema–oportunidad real y observable, bloqueadores y ensanchadores, técnicas de ideación. Guías escritas: `Quiz 1 (6%)` y `Parcial 1 (24%)` en `Recursos/ACAs/`.</a:t>
                       </a:r>
                     </a:p>
                   </a:txBody>
@@ -13602,16 +14532,7 @@
                           </a:solidFill>
                           <a:latin typeface="Calibri"/>
                         </a:rPr>
-                        <a:t>ACA 2</a:t>
-                      </a:r>
-                      <a:r>
-                        <a:rPr sz="1100" b="0" i="0">
-                          <a:solidFill>
-                            <a:srgbClr val="2B2B2B"/>
-                          </a:solidFill>
-                          <a:latin typeface="Calibri"/>
-                        </a:rPr>
-                        <a:t> · Corte 2</a:t>
+                        <a:t>Corte 2</a:t>
                       </a:r>
                     </a:p>
                   </a:txBody>
@@ -13628,13 +14549,22 @@
                     <a:p>
                       <a:pPr algn="l"/>
                       <a:r>
+                        <a:rPr sz="1100" b="1" i="0">
+                          <a:solidFill>
+                            <a:srgbClr val="2B2B2B"/>
+                          </a:solidFill>
+                          <a:latin typeface="Calibri"/>
+                        </a:rPr>
+                        <a:t>Quiz 2</a:t>
+                      </a:r>
+                      <a:r>
                         <a:rPr sz="1100" b="0" i="0">
                           <a:solidFill>
                             <a:srgbClr val="2B2B2B"/>
                           </a:solidFill>
                           <a:latin typeface="Calibri"/>
                         </a:rPr>
-                        <a:t>Propuesta tipificada + cuadro comparativo + </a:t>
+                        <a:t> y </a:t>
                       </a:r>
                       <a:r>
                         <a:rPr sz="1100" b="1" i="0">
@@ -13643,7 +14573,7 @@
                           </a:solidFill>
                           <a:latin typeface="Calibri"/>
                         </a:rPr>
-                        <a:t>FODA</a:t>
+                        <a:t>Parcial 2</a:t>
                       </a:r>
                       <a:r>
                         <a:rPr sz="1100" b="0" i="0">
@@ -13652,43 +14582,7 @@
                           </a:solidFill>
                           <a:latin typeface="Calibri"/>
                         </a:rPr>
-                        <a:t>, </a:t>
-                      </a:r>
-                      <a:r>
-                        <a:rPr sz="1100" b="1" i="0">
-                          <a:solidFill>
-                            <a:srgbClr val="2B2B2B"/>
-                          </a:solidFill>
-                          <a:latin typeface="Calibri"/>
-                        </a:rPr>
-                        <a:t>Canvas</a:t>
-                      </a:r>
-                      <a:r>
-                        <a:rPr sz="1100" b="0" i="0">
-                          <a:solidFill>
-                            <a:srgbClr val="2B2B2B"/>
-                          </a:solidFill>
-                          <a:latin typeface="Calibri"/>
-                        </a:rPr>
-                        <a:t> y </a:t>
-                      </a:r>
-                      <a:r>
-                        <a:rPr sz="1100" b="1" i="0">
-                          <a:solidFill>
-                            <a:srgbClr val="2B2B2B"/>
-                          </a:solidFill>
-                          <a:latin typeface="Calibri"/>
-                        </a:rPr>
-                        <a:t>MVP</a:t>
-                      </a:r>
-                      <a:r>
-                        <a:rPr sz="1100" b="0" i="0">
-                          <a:solidFill>
-                            <a:srgbClr val="2B2B2B"/>
-                          </a:solidFill>
-                          <a:latin typeface="Calibri"/>
-                        </a:rPr>
-                        <a:t> + sustentación breve (6–10 págs.).</a:t>
+                        <a:t>: también cuestionarios en el aula.</a:t>
                       </a:r>
                     </a:p>
                   </a:txBody>
@@ -13711,7 +14605,7 @@
                           </a:solidFill>
                           <a:latin typeface="Calibri"/>
                         </a:rPr>
-                        <a:t>Que la propuesta esté </a:t>
+                        <a:t>Tipificar la propuesta (</a:t>
                       </a:r>
                       <a:r>
                         <a:rPr sz="1100" b="1" i="0">
@@ -13720,7 +14614,7 @@
                           </a:solidFill>
                           <a:latin typeface="Calibri"/>
                         </a:rPr>
-                        <a:t>clasificada y validada</a:t>
+                        <a:t>Manual de Oslo</a:t>
                       </a:r>
                       <a:r>
                         <a:rPr sz="1100" b="0" i="0">
@@ -13729,7 +14623,61 @@
                           </a:solidFill>
                           <a:latin typeface="Calibri"/>
                         </a:rPr>
-                        <a:t>, no solo descrita.</a:t>
+                        <a:t>) y validarla: cuadro comparativo, </a:t>
+                      </a:r>
+                      <a:r>
+                        <a:rPr sz="1100" b="1" i="0">
+                          <a:solidFill>
+                            <a:srgbClr val="2B2B2B"/>
+                          </a:solidFill>
+                          <a:latin typeface="Calibri"/>
+                        </a:rPr>
+                        <a:t>FODA</a:t>
+                      </a:r>
+                      <a:r>
+                        <a:rPr sz="1100" b="0" i="0">
+                          <a:solidFill>
+                            <a:srgbClr val="2B2B2B"/>
+                          </a:solidFill>
+                          <a:latin typeface="Calibri"/>
+                        </a:rPr>
+                        <a:t>, </a:t>
+                      </a:r>
+                      <a:r>
+                        <a:rPr sz="1100" b="1" i="0">
+                          <a:solidFill>
+                            <a:srgbClr val="2B2B2B"/>
+                          </a:solidFill>
+                          <a:latin typeface="Calibri"/>
+                        </a:rPr>
+                        <a:t>Canvas</a:t>
+                      </a:r>
+                      <a:r>
+                        <a:rPr sz="1100" b="0" i="0">
+                          <a:solidFill>
+                            <a:srgbClr val="2B2B2B"/>
+                          </a:solidFill>
+                          <a:latin typeface="Calibri"/>
+                        </a:rPr>
+                        <a:t> y </a:t>
+                      </a:r>
+                      <a:r>
+                        <a:rPr sz="1100" b="1" i="0">
+                          <a:solidFill>
+                            <a:srgbClr val="2B2B2B"/>
+                          </a:solidFill>
+                          <a:latin typeface="Calibri"/>
+                        </a:rPr>
+                        <a:t>MVP</a:t>
+                      </a:r>
+                      <a:r>
+                        <a:rPr sz="1100" b="0" i="0">
+                          <a:solidFill>
+                            <a:srgbClr val="2B2B2B"/>
+                          </a:solidFill>
+                          <a:latin typeface="Calibri"/>
+                        </a:rPr>
+                        <a:t> aplicados a su propia propuesta. Guías: `Quiz 2 (9%)` y `Parcial 2 (21%)`.</a:t>
                       </a:r>
                     </a:p>
                   </a:txBody>
@@ -13754,16 +14702,7 @@
                           </a:solidFill>
                           <a:latin typeface="Calibri"/>
                         </a:rPr>
-                        <a:t>ACA 3</a:t>
-                      </a:r>
-                      <a:r>
-                        <a:rPr sz="1100" b="0" i="0">
-                          <a:solidFill>
-                            <a:srgbClr val="2B2B2B"/>
-                          </a:solidFill>
-                          <a:latin typeface="Calibri"/>
-                        </a:rPr>
-                        <a:t> · Corte 3</a:t>
+                        <a:t>Corte 3</a:t>
                       </a:r>
                     </a:p>
                   </a:txBody>
@@ -13780,13 +14719,22 @@
                     <a:p>
                       <a:pPr algn="l"/>
                       <a:r>
+                        <a:rPr sz="1100" b="1" i="0">
+                          <a:solidFill>
+                            <a:srgbClr val="2B2B2B"/>
+                          </a:solidFill>
+                          <a:latin typeface="Calibri"/>
+                        </a:rPr>
+                        <a:t>Quiz 3</a:t>
+                      </a:r>
+                      <a:r>
                         <a:rPr sz="1100" b="0" i="0">
                           <a:solidFill>
                             <a:srgbClr val="2B2B2B"/>
                           </a:solidFill>
                           <a:latin typeface="Calibri"/>
                         </a:rPr>
-                        <a:t>Propuesta consolidada + vigilancia tecnológica + entidades de apoyo + </a:t>
+                        <a:t> (cuestionario) + </a:t>
                       </a:r>
                       <a:r>
                         <a:rPr sz="1100" b="1" i="0">
@@ -13795,7 +14743,7 @@
                           </a:solidFill>
                           <a:latin typeface="Calibri"/>
                         </a:rPr>
-                        <a:t>pitch de 1 página</a:t>
+                        <a:t>ACA Final</a:t>
                       </a:r>
                       <a:r>
                         <a:rPr sz="1100" b="0" i="0">
@@ -13804,7 +14752,43 @@
                           </a:solidFill>
                           <a:latin typeface="Calibri"/>
                         </a:rPr>
-                        <a:t> (8–12 págs.).</a:t>
+                        <a:t> (tarea: el único documento que se sube) + </a:t>
+                      </a:r>
+                      <a:r>
+                        <a:rPr sz="1100" b="1" i="0">
+                          <a:solidFill>
+                            <a:srgbClr val="2B2B2B"/>
+                          </a:solidFill>
+                          <a:latin typeface="Calibri"/>
+                        </a:rPr>
+                        <a:t>autoevaluación</a:t>
+                      </a:r>
+                      <a:r>
+                        <a:rPr sz="1100" b="0" i="0">
+                          <a:solidFill>
+                            <a:srgbClr val="2B2B2B"/>
+                          </a:solidFill>
+                          <a:latin typeface="Calibri"/>
+                        </a:rPr>
+                        <a:t> (cuestionario) y </a:t>
+                      </a:r>
+                      <a:r>
+                        <a:rPr sz="1100" b="1" i="0">
+                          <a:solidFill>
+                            <a:srgbClr val="2B2B2B"/>
+                          </a:solidFill>
+                          <a:latin typeface="Calibri"/>
+                        </a:rPr>
+                        <a:t>coevaluación</a:t>
+                      </a:r>
+                      <a:r>
+                        <a:rPr sz="1100" b="0" i="0">
+                          <a:solidFill>
+                            <a:srgbClr val="2B2B2B"/>
+                          </a:solidFill>
+                          <a:latin typeface="Calibri"/>
+                        </a:rPr>
+                        <a:t> (foro).</a:t>
                       </a:r>
                     </a:p>
                   </a:txBody>
@@ -13827,7 +14811,7 @@
                           </a:solidFill>
                           <a:latin typeface="Calibri"/>
                         </a:rPr>
-                        <a:t>Que el hilo </a:t>
+                        <a:t>La </a:t>
                       </a:r>
                       <a:r>
                         <a:rPr sz="1100" b="1" i="0">
@@ -13836,7 +14820,7 @@
                           </a:solidFill>
                           <a:latin typeface="Calibri"/>
                         </a:rPr>
-                        <a:t>cierre</a:t>
+                        <a:t>Propuesta de Innovación</a:t>
                       </a:r>
                       <a:r>
                         <a:rPr sz="1100" b="0" i="0">
@@ -13845,7 +14829,25 @@
                           </a:solidFill>
                           <a:latin typeface="Calibri"/>
                         </a:rPr>
-                        <a:t>: del problema al siguiente paso, sin saltos.</a:t>
+                        <a:t> consolidada: problema → propuesta → validación → vigilancia → entidades de apoyo + </a:t>
+                      </a:r>
+                      <a:r>
+                        <a:rPr sz="1100" b="1" i="0">
+                          <a:solidFill>
+                            <a:srgbClr val="2B2B2B"/>
+                          </a:solidFill>
+                          <a:latin typeface="Calibri"/>
+                        </a:rPr>
+                        <a:t>pitch de 1 página</a:t>
+                      </a:r>
+                      <a:r>
+                        <a:rPr sz="1100" b="0" i="0">
+                          <a:solidFill>
+                            <a:srgbClr val="2B2B2B"/>
+                          </a:solidFill>
+                          <a:latin typeface="Calibri"/>
+                        </a:rPr>
+                        <a:t> (8–12 págs.). Guías: `Quiz 3 (4%)` y `ACA Final (32,8%)`.</a:t>
                       </a:r>
                     </a:p>
                   </a:txBody>
@@ -13889,7 +14891,7 @@
                 </a:solidFill>
                 <a:latin typeface="Calibri"/>
               </a:rPr>
-              <a:t>Enunciado completo, rúbrica y fechas de cada ACA: `Clases/Recursos/ACAs/` y el espacio de entrega en CDigital.</a:t>
+              <a:t>El peso de cada ítem está en la slide «CÓMO SE EVALÚA» de esta misma sesión, con el tipo de actividad. Enunciados y checklists: `Clases/Recursos/ACAs/`; fechas exactas, en la Presentación del Curso.</a:t>
             </a:r>
           </a:p>
         </p:txBody>

--- a/Pregrado/Creatividad y pensamiento innovador/Clases/Sesion 01 - Presentación del curso · docente · estudiantes · ACAs/Presentacion.pptx
+++ b/Pregrado/Creatividad y pensamiento innovador/Clases/Sesion 01 - Presentación del curso · docente · estudiantes · ACAs/Presentacion.pptx
@@ -13467,7 +13467,25 @@
                           </a:solidFill>
                           <a:latin typeface="Calibri"/>
                         </a:rPr>
-                        <a:t>Análisis de negocios · validación de la propuesta</a:t>
+                        <a:t>Validación de la propuesta · </a:t>
+                      </a:r>
+                      <a:r>
+                        <a:rPr sz="1100" b="1" i="0">
+                          <a:solidFill>
+                            <a:srgbClr val="2B2B2B"/>
+                          </a:solidFill>
+                          <a:latin typeface="Calibri"/>
+                        </a:rPr>
+                        <a:t>vigilancia tecnológica</a:t>
+                      </a:r>
+                      <a:r>
+                        <a:rPr sz="1100" b="0" i="0">
+                          <a:solidFill>
+                            <a:srgbClr val="2B2B2B"/>
+                          </a:solidFill>
+                          <a:latin typeface="Calibri"/>
+                        </a:rPr>
+                        <a:t> (sesión doble)</a:t>
                       </a:r>
                     </a:p>
                   </a:txBody>
@@ -13490,7 +13508,7 @@
                           </a:solidFill>
                           <a:latin typeface="Calibri"/>
                         </a:rPr>
-                        <a:t>FODA, Canvas y MVP de su propuesta</a:t>
+                        <a:t>FODA, Canvas, MVP + tablero de señales con una decisión</a:t>
                       </a:r>
                     </a:p>
                   </a:txBody>
@@ -13538,7 +13556,7 @@
                           </a:solidFill>
                           <a:latin typeface="Calibri"/>
                         </a:rPr>
-                        <a:t>Vigilancia tecnológica</a:t>
+                        <a:t>Innovación local–internacional · entidades de apoyo</a:t>
                       </a:r>
                     </a:p>
                   </a:txBody>
@@ -13561,7 +13579,7 @@
                           </a:solidFill>
                           <a:latin typeface="Calibri"/>
                         </a:rPr>
-                        <a:t>Tablero de señales, fuentes e implicaciones</a:t>
+                        <a:t>Mapa de entidades + guion del pitch de 60 segundos</a:t>
                       </a:r>
                     </a:p>
                   </a:txBody>
@@ -13609,7 +13627,25 @@
                           </a:solidFill>
                           <a:latin typeface="Calibri"/>
                         </a:rPr>
-                        <a:t>Innovación local–internacional · entidades de apoyo</a:t>
+                        <a:t>Taller de consolidación y </a:t>
+                      </a:r>
+                      <a:r>
+                        <a:rPr sz="1100" b="1" i="0">
+                          <a:solidFill>
+                            <a:srgbClr val="2B2B2B"/>
+                          </a:solidFill>
+                          <a:latin typeface="Calibri"/>
+                        </a:rPr>
+                        <a:t>sustentación</a:t>
+                      </a:r>
+                      <a:r>
+                        <a:rPr sz="1100" b="0" i="0">
+                          <a:solidFill>
+                            <a:srgbClr val="2B2B2B"/>
+                          </a:solidFill>
+                          <a:latin typeface="Calibri"/>
+                        </a:rPr>
+                        <a:t> de la propuesta</a:t>
                       </a:r>
                     </a:p>
                   </a:txBody>
@@ -13632,7 +13668,7 @@
                           </a:solidFill>
                           <a:latin typeface="Calibri"/>
                         </a:rPr>
-                        <a:t>Mapa de entidades + pitch de 60 segundos</a:t>
+                        <a:t>Su propuesta defendida, ajustada y cerrada</a:t>
                       </a:r>
                     </a:p>
                   </a:txBody>
@@ -13694,7 +13730,43 @@
                 </a:solidFill>
                 <a:latin typeface="Calibri"/>
               </a:rPr>
-              <a:t> y las retomamos al abrir la Sesión 02.</a:t>
+              <a:t> y las retomamos al abrir la Sesión 02. Todo lo que la </a:t>
+            </a:r>
+            <a:r>
+              <a:rPr sz="1200" b="1" i="1">
+                <a:solidFill>
+                  <a:srgbClr val="2B2B2B"/>
+                </a:solidFill>
+                <a:latin typeface="Calibri"/>
+              </a:rPr>
+              <a:t>ACA Final</a:t>
+            </a:r>
+            <a:r>
+              <a:rPr sz="1200" b="0" i="1">
+                <a:solidFill>
+                  <a:srgbClr val="2B2B2B"/>
+                </a:solidFill>
+                <a:latin typeface="Calibri"/>
+              </a:rPr>
+              <a:t> califica se dicta hasta la </a:t>
+            </a:r>
+            <a:r>
+              <a:rPr sz="1200" b="1" i="1">
+                <a:solidFill>
+                  <a:srgbClr val="2B2B2B"/>
+                </a:solidFill>
+                <a:latin typeface="Calibri"/>
+              </a:rPr>
+              <a:t>Sesión 06</a:t>
+            </a:r>
+            <a:r>
+              <a:rPr sz="1200" b="0" i="1">
+                <a:solidFill>
+                  <a:srgbClr val="2B2B2B"/>
+                </a:solidFill>
+                <a:latin typeface="Calibri"/>
+              </a:rPr>
+              <a:t>; la 07 es taller de cierre.</a:t>
             </a:r>
           </a:p>
         </p:txBody>

--- a/Pregrado/Creatividad y pensamiento innovador/Clases/Sesion 01 - Presentación del curso · docente · estudiantes · ACAs/Presentacion.pptx
+++ b/Pregrado/Creatividad y pensamiento innovador/Clases/Sesion 01 - Presentación del curso · docente · estudiantes · ACAs/Presentacion.pptx
@@ -28,6 +28,7 @@
     <p:sldId id="276" r:id="rId27"/>
     <p:sldId id="277" r:id="rId28"/>
     <p:sldId id="278" r:id="rId29"/>
+    <p:sldId id="279" r:id="rId30"/>
   </p:sldIdLst>
   <p:sldSz cx="12191695" cy="6858000" type="screen4x3"/>
   <p:notesSz cx="6858000" cy="9144000"/>
@@ -3479,6 +3480,716 @@
                 </a:solidFill>
                 <a:latin typeface="Calibri"/>
               </a:rPr>
+              <a:t>Qué evalúa cada corte: lo que está en el libro de calificaciones</a:t>
+            </a:r>
+          </a:p>
+        </p:txBody>
+      </p:sp>
+      <p:graphicFrame>
+        <p:nvGraphicFramePr>
+          <p:cNvPr id="4" name="Table 3"/>
+          <p:cNvGraphicFramePr>
+            <a:graphicFrameLocks noGrp="1"/>
+          </p:cNvGraphicFramePr>
+          <p:nvPr/>
+        </p:nvGraphicFramePr>
+        <p:xfrm>
+          <a:off x="640080" y="1691639"/>
+          <a:ext cx="10911534" cy="2011680"/>
+        </p:xfrm>
+        <a:graphic>
+          <a:graphicData uri="http://schemas.openxmlformats.org/drawingml/2006/table">
+            <a:tbl>
+              <a:tblPr>
+                <a:tableStyleId>{2D5ABB26-0587-4C30-8999-92F81FD0307C}</a:tableStyleId>
+              </a:tblPr>
+              <a:tblGrid>
+                <a:gridCol w="1008629"/>
+                <a:gridCol w="4492985"/>
+                <a:gridCol w="5409920"/>
+              </a:tblGrid>
+              <a:tr h="502920">
+                <a:tc>
+                  <a:txBody>
+                    <a:bodyPr/>
+                    <a:lstStyle/>
+                    <a:p>
+                      <a:pPr algn="l"/>
+                      <a:r>
+                        <a:rPr sz="1300" b="1" i="0">
+                          <a:solidFill>
+                            <a:srgbClr val="FFFFFF"/>
+                          </a:solidFill>
+                          <a:latin typeface="Calibri"/>
+                        </a:rPr>
+                        <a:t>Corte</a:t>
+                      </a:r>
+                    </a:p>
+                  </a:txBody>
+                  <a:tcPr anchor="ctr" marL="109728" marR="91440" marT="36576" marB="36576">
+                    <a:solidFill>
+                      <a:srgbClr val="0C2340"/>
+                    </a:solidFill>
+                  </a:tcPr>
+                </a:tc>
+                <a:tc>
+                  <a:txBody>
+                    <a:bodyPr/>
+                    <a:lstStyle/>
+                    <a:p>
+                      <a:pPr algn="l"/>
+                      <a:r>
+                        <a:rPr sz="1300" b="1" i="0">
+                          <a:solidFill>
+                            <a:srgbClr val="FFFFFF"/>
+                          </a:solidFill>
+                          <a:latin typeface="Calibri"/>
+                        </a:rPr>
+                        <a:t>Qué hay en el aula (CDigital)</a:t>
+                      </a:r>
+                    </a:p>
+                  </a:txBody>
+                  <a:tcPr anchor="ctr" marL="109728" marR="91440" marT="36576" marB="36576">
+                    <a:solidFill>
+                      <a:srgbClr val="0C2340"/>
+                    </a:solidFill>
+                  </a:tcPr>
+                </a:tc>
+                <a:tc>
+                  <a:txBody>
+                    <a:bodyPr/>
+                    <a:lstStyle/>
+                    <a:p>
+                      <a:pPr algn="l"/>
+                      <a:r>
+                        <a:rPr sz="1300" b="1" i="0">
+                          <a:solidFill>
+                            <a:srgbClr val="FFFFFF"/>
+                          </a:solidFill>
+                          <a:latin typeface="Calibri"/>
+                        </a:rPr>
+                        <a:t>Qué se prepara para eso</a:t>
+                      </a:r>
+                    </a:p>
+                  </a:txBody>
+                  <a:tcPr anchor="ctr" marL="109728" marR="91440" marT="36576" marB="36576">
+                    <a:solidFill>
+                      <a:srgbClr val="0C2340"/>
+                    </a:solidFill>
+                  </a:tcPr>
+                </a:tc>
+              </a:tr>
+              <a:tr h="502920">
+                <a:tc>
+                  <a:txBody>
+                    <a:bodyPr/>
+                    <a:lstStyle/>
+                    <a:p>
+                      <a:pPr algn="l"/>
+                      <a:r>
+                        <a:rPr sz="1100" b="1" i="0">
+                          <a:solidFill>
+                            <a:srgbClr val="2B2B2B"/>
+                          </a:solidFill>
+                          <a:latin typeface="Calibri"/>
+                        </a:rPr>
+                        <a:t>Corte 1</a:t>
+                      </a:r>
+                    </a:p>
+                  </a:txBody>
+                  <a:tcPr anchor="ctr" marL="109728" marR="91440" marT="36576" marB="36576">
+                    <a:solidFill>
+                      <a:srgbClr val="FFFFFF"/>
+                    </a:solidFill>
+                  </a:tcPr>
+                </a:tc>
+                <a:tc>
+                  <a:txBody>
+                    <a:bodyPr/>
+                    <a:lstStyle/>
+                    <a:p>
+                      <a:pPr algn="l"/>
+                      <a:r>
+                        <a:rPr sz="1100" b="1" i="0">
+                          <a:solidFill>
+                            <a:srgbClr val="2B2B2B"/>
+                          </a:solidFill>
+                          <a:latin typeface="Calibri"/>
+                        </a:rPr>
+                        <a:t>Quiz 1</a:t>
+                      </a:r>
+                      <a:r>
+                        <a:rPr sz="1100" b="0" i="0">
+                          <a:solidFill>
+                            <a:srgbClr val="2B2B2B"/>
+                          </a:solidFill>
+                          <a:latin typeface="Calibri"/>
+                        </a:rPr>
+                        <a:t> y </a:t>
+                      </a:r>
+                      <a:r>
+                        <a:rPr sz="1100" b="1" i="0">
+                          <a:solidFill>
+                            <a:srgbClr val="2B2B2B"/>
+                          </a:solidFill>
+                          <a:latin typeface="Calibri"/>
+                        </a:rPr>
+                        <a:t>Parcial 1</a:t>
+                      </a:r>
+                      <a:r>
+                        <a:rPr sz="1100" b="0" i="0">
+                          <a:solidFill>
+                            <a:srgbClr val="2B2B2B"/>
+                          </a:solidFill>
+                          <a:latin typeface="Calibri"/>
+                        </a:rPr>
+                        <a:t>: cuestionarios que se resuelven en el aula, dentro de su ventana. No se sube archivo.</a:t>
+                      </a:r>
+                    </a:p>
+                  </a:txBody>
+                  <a:tcPr anchor="ctr" marL="109728" marR="91440" marT="36576" marB="36576">
+                    <a:solidFill>
+                      <a:srgbClr val="FFFFFF"/>
+                    </a:solidFill>
+                  </a:tcPr>
+                </a:tc>
+                <a:tc>
+                  <a:txBody>
+                    <a:bodyPr/>
+                    <a:lstStyle/>
+                    <a:p>
+                      <a:pPr algn="l"/>
+                      <a:r>
+                        <a:rPr sz="1100" b="0" i="0">
+                          <a:solidFill>
+                            <a:srgbClr val="2B2B2B"/>
+                          </a:solidFill>
+                          <a:latin typeface="Calibri"/>
+                        </a:rPr>
+                        <a:t>Lo trabajado hasta ahí: problema–oportunidad real y observable, bloqueadores y ensanchadores, técnicas de ideación. Guías escritas: `Quiz 1 (6%)` y `Parcial 1 (24%)` en `Recursos/ACAs/`.</a:t>
+                      </a:r>
+                    </a:p>
+                  </a:txBody>
+                  <a:tcPr anchor="ctr" marL="109728" marR="91440" marT="36576" marB="36576">
+                    <a:solidFill>
+                      <a:srgbClr val="FFFFFF"/>
+                    </a:solidFill>
+                  </a:tcPr>
+                </a:tc>
+              </a:tr>
+              <a:tr h="502920">
+                <a:tc>
+                  <a:txBody>
+                    <a:bodyPr/>
+                    <a:lstStyle/>
+                    <a:p>
+                      <a:pPr algn="l"/>
+                      <a:r>
+                        <a:rPr sz="1100" b="1" i="0">
+                          <a:solidFill>
+                            <a:srgbClr val="2B2B2B"/>
+                          </a:solidFill>
+                          <a:latin typeface="Calibri"/>
+                        </a:rPr>
+                        <a:t>Corte 2</a:t>
+                      </a:r>
+                    </a:p>
+                  </a:txBody>
+                  <a:tcPr anchor="ctr" marL="109728" marR="91440" marT="36576" marB="36576">
+                    <a:solidFill>
+                      <a:srgbClr val="F2F2F2"/>
+                    </a:solidFill>
+                  </a:tcPr>
+                </a:tc>
+                <a:tc>
+                  <a:txBody>
+                    <a:bodyPr/>
+                    <a:lstStyle/>
+                    <a:p>
+                      <a:pPr algn="l"/>
+                      <a:r>
+                        <a:rPr sz="1100" b="1" i="0">
+                          <a:solidFill>
+                            <a:srgbClr val="2B2B2B"/>
+                          </a:solidFill>
+                          <a:latin typeface="Calibri"/>
+                        </a:rPr>
+                        <a:t>Quiz 2</a:t>
+                      </a:r>
+                      <a:r>
+                        <a:rPr sz="1100" b="0" i="0">
+                          <a:solidFill>
+                            <a:srgbClr val="2B2B2B"/>
+                          </a:solidFill>
+                          <a:latin typeface="Calibri"/>
+                        </a:rPr>
+                        <a:t> y </a:t>
+                      </a:r>
+                      <a:r>
+                        <a:rPr sz="1100" b="1" i="0">
+                          <a:solidFill>
+                            <a:srgbClr val="2B2B2B"/>
+                          </a:solidFill>
+                          <a:latin typeface="Calibri"/>
+                        </a:rPr>
+                        <a:t>Parcial 2</a:t>
+                      </a:r>
+                      <a:r>
+                        <a:rPr sz="1100" b="0" i="0">
+                          <a:solidFill>
+                            <a:srgbClr val="2B2B2B"/>
+                          </a:solidFill>
+                          <a:latin typeface="Calibri"/>
+                        </a:rPr>
+                        <a:t>: también cuestionarios en el aula.</a:t>
+                      </a:r>
+                    </a:p>
+                  </a:txBody>
+                  <a:tcPr anchor="ctr" marL="109728" marR="91440" marT="36576" marB="36576">
+                    <a:solidFill>
+                      <a:srgbClr val="F2F2F2"/>
+                    </a:solidFill>
+                  </a:tcPr>
+                </a:tc>
+                <a:tc>
+                  <a:txBody>
+                    <a:bodyPr/>
+                    <a:lstStyle/>
+                    <a:p>
+                      <a:pPr algn="l"/>
+                      <a:r>
+                        <a:rPr sz="1100" b="0" i="0">
+                          <a:solidFill>
+                            <a:srgbClr val="2B2B2B"/>
+                          </a:solidFill>
+                          <a:latin typeface="Calibri"/>
+                        </a:rPr>
+                        <a:t>Tipificar la propuesta (</a:t>
+                      </a:r>
+                      <a:r>
+                        <a:rPr sz="1100" b="1" i="0">
+                          <a:solidFill>
+                            <a:srgbClr val="2B2B2B"/>
+                          </a:solidFill>
+                          <a:latin typeface="Calibri"/>
+                        </a:rPr>
+                        <a:t>Manual de Oslo</a:t>
+                      </a:r>
+                      <a:r>
+                        <a:rPr sz="1100" b="0" i="0">
+                          <a:solidFill>
+                            <a:srgbClr val="2B2B2B"/>
+                          </a:solidFill>
+                          <a:latin typeface="Calibri"/>
+                        </a:rPr>
+                        <a:t>) y validarla: cuadro comparativo, </a:t>
+                      </a:r>
+                      <a:r>
+                        <a:rPr sz="1100" b="1" i="0">
+                          <a:solidFill>
+                            <a:srgbClr val="2B2B2B"/>
+                          </a:solidFill>
+                          <a:latin typeface="Calibri"/>
+                        </a:rPr>
+                        <a:t>FODA</a:t>
+                      </a:r>
+                      <a:r>
+                        <a:rPr sz="1100" b="0" i="0">
+                          <a:solidFill>
+                            <a:srgbClr val="2B2B2B"/>
+                          </a:solidFill>
+                          <a:latin typeface="Calibri"/>
+                        </a:rPr>
+                        <a:t>, </a:t>
+                      </a:r>
+                      <a:r>
+                        <a:rPr sz="1100" b="1" i="0">
+                          <a:solidFill>
+                            <a:srgbClr val="2B2B2B"/>
+                          </a:solidFill>
+                          <a:latin typeface="Calibri"/>
+                        </a:rPr>
+                        <a:t>Canvas</a:t>
+                      </a:r>
+                      <a:r>
+                        <a:rPr sz="1100" b="0" i="0">
+                          <a:solidFill>
+                            <a:srgbClr val="2B2B2B"/>
+                          </a:solidFill>
+                          <a:latin typeface="Calibri"/>
+                        </a:rPr>
+                        <a:t> y </a:t>
+                      </a:r>
+                      <a:r>
+                        <a:rPr sz="1100" b="1" i="0">
+                          <a:solidFill>
+                            <a:srgbClr val="2B2B2B"/>
+                          </a:solidFill>
+                          <a:latin typeface="Calibri"/>
+                        </a:rPr>
+                        <a:t>MVP</a:t>
+                      </a:r>
+                      <a:r>
+                        <a:rPr sz="1100" b="0" i="0">
+                          <a:solidFill>
+                            <a:srgbClr val="2B2B2B"/>
+                          </a:solidFill>
+                          <a:latin typeface="Calibri"/>
+                        </a:rPr>
+                        <a:t> aplicados a su propia propuesta. Guías: `Quiz 2 (9%)` y `Parcial 2 (21%)`.</a:t>
+                      </a:r>
+                    </a:p>
+                  </a:txBody>
+                  <a:tcPr anchor="ctr" marL="109728" marR="91440" marT="36576" marB="36576">
+                    <a:solidFill>
+                      <a:srgbClr val="F2F2F2"/>
+                    </a:solidFill>
+                  </a:tcPr>
+                </a:tc>
+              </a:tr>
+              <a:tr h="502920">
+                <a:tc>
+                  <a:txBody>
+                    <a:bodyPr/>
+                    <a:lstStyle/>
+                    <a:p>
+                      <a:pPr algn="l"/>
+                      <a:r>
+                        <a:rPr sz="1100" b="1" i="0">
+                          <a:solidFill>
+                            <a:srgbClr val="2B2B2B"/>
+                          </a:solidFill>
+                          <a:latin typeface="Calibri"/>
+                        </a:rPr>
+                        <a:t>Corte 3</a:t>
+                      </a:r>
+                    </a:p>
+                  </a:txBody>
+                  <a:tcPr anchor="ctr" marL="109728" marR="91440" marT="36576" marB="36576">
+                    <a:solidFill>
+                      <a:srgbClr val="FFFFFF"/>
+                    </a:solidFill>
+                  </a:tcPr>
+                </a:tc>
+                <a:tc>
+                  <a:txBody>
+                    <a:bodyPr/>
+                    <a:lstStyle/>
+                    <a:p>
+                      <a:pPr algn="l"/>
+                      <a:r>
+                        <a:rPr sz="1100" b="1" i="0">
+                          <a:solidFill>
+                            <a:srgbClr val="2B2B2B"/>
+                          </a:solidFill>
+                          <a:latin typeface="Calibri"/>
+                        </a:rPr>
+                        <a:t>Quiz 3</a:t>
+                      </a:r>
+                      <a:r>
+                        <a:rPr sz="1100" b="0" i="0">
+                          <a:solidFill>
+                            <a:srgbClr val="2B2B2B"/>
+                          </a:solidFill>
+                          <a:latin typeface="Calibri"/>
+                        </a:rPr>
+                        <a:t> (cuestionario) + </a:t>
+                      </a:r>
+                      <a:r>
+                        <a:rPr sz="1100" b="1" i="0">
+                          <a:solidFill>
+                            <a:srgbClr val="2B2B2B"/>
+                          </a:solidFill>
+                          <a:latin typeface="Calibri"/>
+                        </a:rPr>
+                        <a:t>ACA Final</a:t>
+                      </a:r>
+                      <a:r>
+                        <a:rPr sz="1100" b="0" i="0">
+                          <a:solidFill>
+                            <a:srgbClr val="2B2B2B"/>
+                          </a:solidFill>
+                          <a:latin typeface="Calibri"/>
+                        </a:rPr>
+                        <a:t> (tarea: el único documento que se sube) + </a:t>
+                      </a:r>
+                      <a:r>
+                        <a:rPr sz="1100" b="1" i="0">
+                          <a:solidFill>
+                            <a:srgbClr val="2B2B2B"/>
+                          </a:solidFill>
+                          <a:latin typeface="Calibri"/>
+                        </a:rPr>
+                        <a:t>autoevaluación</a:t>
+                      </a:r>
+                      <a:r>
+                        <a:rPr sz="1100" b="0" i="0">
+                          <a:solidFill>
+                            <a:srgbClr val="2B2B2B"/>
+                          </a:solidFill>
+                          <a:latin typeface="Calibri"/>
+                        </a:rPr>
+                        <a:t> (cuestionario) y </a:t>
+                      </a:r>
+                      <a:r>
+                        <a:rPr sz="1100" b="1" i="0">
+                          <a:solidFill>
+                            <a:srgbClr val="2B2B2B"/>
+                          </a:solidFill>
+                          <a:latin typeface="Calibri"/>
+                        </a:rPr>
+                        <a:t>coevaluación</a:t>
+                      </a:r>
+                      <a:r>
+                        <a:rPr sz="1100" b="0" i="0">
+                          <a:solidFill>
+                            <a:srgbClr val="2B2B2B"/>
+                          </a:solidFill>
+                          <a:latin typeface="Calibri"/>
+                        </a:rPr>
+                        <a:t> (foro).</a:t>
+                      </a:r>
+                    </a:p>
+                  </a:txBody>
+                  <a:tcPr anchor="ctr" marL="109728" marR="91440" marT="36576" marB="36576">
+                    <a:solidFill>
+                      <a:srgbClr val="FFFFFF"/>
+                    </a:solidFill>
+                  </a:tcPr>
+                </a:tc>
+                <a:tc>
+                  <a:txBody>
+                    <a:bodyPr/>
+                    <a:lstStyle/>
+                    <a:p>
+                      <a:pPr algn="l"/>
+                      <a:r>
+                        <a:rPr sz="1100" b="0" i="0">
+                          <a:solidFill>
+                            <a:srgbClr val="2B2B2B"/>
+                          </a:solidFill>
+                          <a:latin typeface="Calibri"/>
+                        </a:rPr>
+                        <a:t>La </a:t>
+                      </a:r>
+                      <a:r>
+                        <a:rPr sz="1100" b="1" i="0">
+                          <a:solidFill>
+                            <a:srgbClr val="2B2B2B"/>
+                          </a:solidFill>
+                          <a:latin typeface="Calibri"/>
+                        </a:rPr>
+                        <a:t>Propuesta de Innovación</a:t>
+                      </a:r>
+                      <a:r>
+                        <a:rPr sz="1100" b="0" i="0">
+                          <a:solidFill>
+                            <a:srgbClr val="2B2B2B"/>
+                          </a:solidFill>
+                          <a:latin typeface="Calibri"/>
+                        </a:rPr>
+                        <a:t> consolidada: problema → propuesta → validación → vigilancia → entidades de apoyo + </a:t>
+                      </a:r>
+                      <a:r>
+                        <a:rPr sz="1100" b="1" i="0">
+                          <a:solidFill>
+                            <a:srgbClr val="2B2B2B"/>
+                          </a:solidFill>
+                          <a:latin typeface="Calibri"/>
+                        </a:rPr>
+                        <a:t>pitch de 1 página</a:t>
+                      </a:r>
+                      <a:r>
+                        <a:rPr sz="1100" b="0" i="0">
+                          <a:solidFill>
+                            <a:srgbClr val="2B2B2B"/>
+                          </a:solidFill>
+                          <a:latin typeface="Calibri"/>
+                        </a:rPr>
+                        <a:t> (8–12 págs.). Guías: `Quiz 3 (4%)` y `ACA Final (32,8%)`.</a:t>
+                      </a:r>
+                    </a:p>
+                  </a:txBody>
+                  <a:tcPr anchor="ctr" marL="109728" marR="91440" marT="36576" marB="36576">
+                    <a:solidFill>
+                      <a:srgbClr val="FFFFFF"/>
+                    </a:solidFill>
+                  </a:tcPr>
+                </a:tc>
+              </a:tr>
+            </a:tbl>
+          </a:graphicData>
+        </a:graphic>
+      </p:graphicFrame>
+      <p:sp>
+        <p:nvSpPr>
+          <p:cNvPr id="5" name="TextBox 4"/>
+          <p:cNvSpPr txBox="1"/>
+          <p:nvPr/>
+        </p:nvSpPr>
+        <p:spPr>
+          <a:xfrm>
+            <a:off x="640080" y="3840480"/>
+            <a:ext cx="10911535" cy="548640"/>
+          </a:xfrm>
+          <a:prstGeom prst="rect">
+            <a:avLst/>
+          </a:prstGeom>
+          <a:noFill/>
+        </p:spPr>
+        <p:txBody>
+          <a:bodyPr wrap="square" anchor="t" lIns="0" rIns="0" tIns="0" bIns="0">
+            <a:spAutoFit/>
+          </a:bodyPr>
+          <a:lstStyle/>
+          <a:p>
+            <a:r>
+              <a:rPr sz="1200" b="0" i="1">
+                <a:solidFill>
+                  <a:srgbClr val="2B2B2B"/>
+                </a:solidFill>
+                <a:latin typeface="Calibri"/>
+              </a:rPr>
+              <a:t>El peso de cada ítem está en la slide «CÓMO SE EVALÚA» de esta misma sesión, con el tipo de actividad. Enunciados y checklists: `Clases/Recursos/ACAs/`; fechas exactas, en la Presentación del Curso.</a:t>
+            </a:r>
+          </a:p>
+        </p:txBody>
+      </p:sp>
+      <p:sp>
+        <p:nvSpPr>
+          <p:cNvPr id="6" name="TextBox 5"/>
+          <p:cNvSpPr txBox="1"/>
+          <p:nvPr/>
+        </p:nvSpPr>
+        <p:spPr>
+          <a:xfrm>
+            <a:off x="11094415" y="6446520"/>
+            <a:ext cx="548640" cy="274320"/>
+          </a:xfrm>
+          <a:prstGeom prst="rect">
+            <a:avLst/>
+          </a:prstGeom>
+          <a:noFill/>
+        </p:spPr>
+        <p:txBody>
+          <a:bodyPr wrap="square" anchor="t" lIns="0" rIns="0" tIns="0" bIns="0">
+            <a:spAutoFit/>
+          </a:bodyPr>
+          <a:lstStyle/>
+          <a:p>
+            <a:pPr algn="r"/>
+            <a:r>
+              <a:rPr sz="1000" b="1" i="0">
+                <a:solidFill>
+                  <a:srgbClr val="8F989D"/>
+                </a:solidFill>
+                <a:latin typeface="Calibri"/>
+              </a:rPr>
+              <a:t>10</a:t>
+            </a:r>
+          </a:p>
+        </p:txBody>
+      </p:sp>
+    </p:spTree>
+  </p:cSld>
+  <p:clrMapOvr>
+    <a:masterClrMapping/>
+  </p:clrMapOvr>
+</p:sld>
+</file>
+
+<file path=ppt/slides/slide11.xml><?xml version="1.0" encoding="utf-8"?>
+<p:sld xmlns:a="http://schemas.openxmlformats.org/drawingml/2006/main" xmlns:p="http://schemas.openxmlformats.org/presentationml/2006/main" xmlns:r="http://schemas.openxmlformats.org/officeDocument/2006/relationships">
+  <p:cSld>
+    <p:bg>
+      <p:bgPr>
+        <a:solidFill>
+          <a:srgbClr val="FFFFFF"/>
+        </a:solidFill>
+        <a:effectLst/>
+      </p:bgPr>
+    </p:bg>
+    <p:spTree>
+      <p:nvGrpSpPr>
+        <p:cNvPr id="1" name=""/>
+        <p:cNvGrpSpPr/>
+        <p:nvPr/>
+      </p:nvGrpSpPr>
+      <p:grpSpPr/>
+      <p:sp>
+        <p:nvSpPr>
+          <p:cNvPr id="2" name="Rectangle 1"/>
+          <p:cNvSpPr/>
+          <p:nvPr/>
+        </p:nvSpPr>
+        <p:spPr>
+          <a:xfrm>
+            <a:off x="0" y="0"/>
+            <a:ext cx="12191695" cy="1188720"/>
+          </a:xfrm>
+          <a:prstGeom prst="rect">
+            <a:avLst/>
+          </a:prstGeom>
+          <a:solidFill>
+            <a:srgbClr val="0C2340"/>
+          </a:solidFill>
+          <a:ln>
+            <a:noFill/>
+          </a:ln>
+          <a:effectLst/>
+        </p:spPr>
+        <p:style>
+          <a:lnRef idx="1">
+            <a:schemeClr val="accent1"/>
+          </a:lnRef>
+          <a:fillRef idx="3">
+            <a:schemeClr val="accent1"/>
+          </a:fillRef>
+          <a:effectRef idx="2">
+            <a:schemeClr val="accent1"/>
+          </a:effectRef>
+          <a:fontRef idx="minor">
+            <a:schemeClr val="lt1"/>
+          </a:fontRef>
+        </p:style>
+        <p:txBody>
+          <a:bodyPr rtlCol="0" anchor="ctr"/>
+          <a:lstStyle/>
+          <a:p>
+            <a:pPr algn="ctr"/>
+          </a:p>
+        </p:txBody>
+      </p:sp>
+      <p:sp>
+        <p:nvSpPr>
+          <p:cNvPr id="3" name="TextBox 2"/>
+          <p:cNvSpPr txBox="1"/>
+          <p:nvPr/>
+        </p:nvSpPr>
+        <p:spPr>
+          <a:xfrm>
+            <a:off x="640080" y="0"/>
+            <a:ext cx="9082735" cy="1188720"/>
+          </a:xfrm>
+          <a:prstGeom prst="rect">
+            <a:avLst/>
+          </a:prstGeom>
+          <a:noFill/>
+        </p:spPr>
+        <p:txBody>
+          <a:bodyPr wrap="square" anchor="ctr" lIns="0" rIns="0" tIns="0" bIns="0">
+            <a:spAutoFit/>
+          </a:bodyPr>
+          <a:lstStyle/>
+          <a:p>
+            <a:pPr algn="ctr"/>
+            <a:r>
+              <a:rPr sz="2600" b="1" i="0">
+                <a:solidFill>
+                  <a:srgbClr val="FFFFFF"/>
+                </a:solidFill>
+                <a:latin typeface="Calibri"/>
+              </a:rPr>
               <a:t>Qué separa un entregable fuerte de uno flojo</a:t>
             </a:r>
           </a:p>
@@ -4126,7 +4837,7 @@
                 </a:solidFill>
                 <a:latin typeface="Calibri"/>
               </a:rPr>
-              <a:t>10</a:t>
+              <a:t>11</a:t>
             </a:r>
           </a:p>
         </p:txBody>
@@ -4139,7 +4850,7 @@
 </p:sld>
 </file>
 
-<file path=ppt/slides/slide11.xml><?xml version="1.0" encoding="utf-8"?>
+<file path=ppt/slides/slide12.xml><?xml version="1.0" encoding="utf-8"?>
 <p:sld xmlns:a="http://schemas.openxmlformats.org/drawingml/2006/main" xmlns:p="http://schemas.openxmlformats.org/presentationml/2006/main" xmlns:r="http://schemas.openxmlformats.org/officeDocument/2006/relationships">
   <p:cSld>
     <p:bg>
@@ -4721,7 +5432,7 @@
                 </a:solidFill>
                 <a:latin typeface="Calibri"/>
               </a:rPr>
-              <a:t>11</a:t>
+              <a:t>12</a:t>
             </a:r>
           </a:p>
         </p:txBody>
@@ -4786,7 +5497,7 @@
 </p:sld>
 </file>
 
-<file path=ppt/slides/slide12.xml><?xml version="1.0" encoding="utf-8"?>
+<file path=ppt/slides/slide13.xml><?xml version="1.0" encoding="utf-8"?>
 <p:sld xmlns:a="http://schemas.openxmlformats.org/drawingml/2006/main" xmlns:p="http://schemas.openxmlformats.org/presentationml/2006/main" xmlns:r="http://schemas.openxmlformats.org/officeDocument/2006/relationships">
   <p:cSld>
     <p:bg>
@@ -5249,7 +5960,7 @@
                 </a:solidFill>
                 <a:latin typeface="Calibri"/>
               </a:rPr>
-              <a:t>12</a:t>
+              <a:t>13</a:t>
             </a:r>
           </a:p>
         </p:txBody>
@@ -5262,7 +5973,7 @@
 </p:sld>
 </file>
 
-<file path=ppt/slides/slide13.xml><?xml version="1.0" encoding="utf-8"?>
+<file path=ppt/slides/slide14.xml><?xml version="1.0" encoding="utf-8"?>
 <p:sld xmlns:a="http://schemas.openxmlformats.org/drawingml/2006/main" xmlns:p="http://schemas.openxmlformats.org/presentationml/2006/main" xmlns:r="http://schemas.openxmlformats.org/officeDocument/2006/relationships">
   <p:cSld>
     <p:bg>
@@ -5702,7 +6413,7 @@
                 </a:solidFill>
                 <a:latin typeface="Calibri"/>
               </a:rPr>
-              <a:t>13</a:t>
+              <a:t>14</a:t>
             </a:r>
           </a:p>
         </p:txBody>
@@ -5749,7 +6460,7 @@
 </p:sld>
 </file>
 
-<file path=ppt/slides/slide14.xml><?xml version="1.0" encoding="utf-8"?>
+<file path=ppt/slides/slide15.xml><?xml version="1.0" encoding="utf-8"?>
 <p:sld xmlns:a="http://schemas.openxmlformats.org/drawingml/2006/main" xmlns:p="http://schemas.openxmlformats.org/presentationml/2006/main" xmlns:r="http://schemas.openxmlformats.org/officeDocument/2006/relationships">
   <p:cSld>
     <p:bg>
@@ -6577,7 +7288,7 @@
                 </a:solidFill>
                 <a:latin typeface="Calibri"/>
               </a:rPr>
-              <a:t>14</a:t>
+              <a:t>15</a:t>
             </a:r>
           </a:p>
         </p:txBody>
@@ -6590,7 +7301,7 @@
 </p:sld>
 </file>
 
-<file path=ppt/slides/slide15.xml><?xml version="1.0" encoding="utf-8"?>
+<file path=ppt/slides/slide16.xml><?xml version="1.0" encoding="utf-8"?>
 <p:sld xmlns:a="http://schemas.openxmlformats.org/drawingml/2006/main" xmlns:p="http://schemas.openxmlformats.org/presentationml/2006/main" xmlns:r="http://schemas.openxmlformats.org/officeDocument/2006/relationships">
   <p:cSld>
     <p:bg>
@@ -6994,7 +7705,7 @@
                 </a:solidFill>
                 <a:latin typeface="Calibri"/>
               </a:rPr>
-              <a:t>15</a:t>
+              <a:t>16</a:t>
             </a:r>
           </a:p>
         </p:txBody>
@@ -7041,7 +7752,7 @@
 </p:sld>
 </file>
 
-<file path=ppt/slides/slide16.xml><?xml version="1.0" encoding="utf-8"?>
+<file path=ppt/slides/slide17.xml><?xml version="1.0" encoding="utf-8"?>
 <p:sld xmlns:a="http://schemas.openxmlformats.org/drawingml/2006/main" xmlns:p="http://schemas.openxmlformats.org/presentationml/2006/main" xmlns:r="http://schemas.openxmlformats.org/officeDocument/2006/relationships">
   <p:cSld>
     <p:bg>
@@ -7428,7 +8139,7 @@
                 </a:solidFill>
                 <a:latin typeface="Calibri"/>
               </a:rPr>
-              <a:t>–   Si el encuentro se graba, se avisa al inicio y la grabación queda en </a:t>
+              <a:t>–   Si el encuentro se graba, se avisa al inicio y la grabación queda en la </a:t>
             </a:r>
             <a:r>
               <a:rPr sz="1600" b="1" i="0">
@@ -7437,7 +8148,7 @@
                 </a:solidFill>
                 <a:latin typeface="Calibri"/>
               </a:rPr>
-              <a:t>CDigital</a:t>
+              <a:t>carpeta de grabaciones en Drive</a:t>
             </a:r>
             <a:r>
               <a:rPr sz="1600" b="0" i="0">
@@ -7446,7 +8157,7 @@
                 </a:solidFill>
                 <a:latin typeface="Calibri"/>
               </a:rPr>
-              <a:t> para quien no pudo conectarse.</a:t>
+              <a:t> (el enlace está en el LEEME de `Clases/` y en el correo de bienvenida).</a:t>
             </a:r>
           </a:p>
         </p:txBody>
@@ -7481,7 +8192,7 @@
                 </a:solidFill>
                 <a:latin typeface="Calibri"/>
               </a:rPr>
-              <a:t>16</a:t>
+              <a:t>17</a:t>
             </a:r>
           </a:p>
         </p:txBody>
@@ -7494,7 +8205,7 @@
 </p:sld>
 </file>
 
-<file path=ppt/slides/slide17.xml><?xml version="1.0" encoding="utf-8"?>
+<file path=ppt/slides/slide18.xml><?xml version="1.0" encoding="utf-8"?>
 <p:sld xmlns:a="http://schemas.openxmlformats.org/drawingml/2006/main" xmlns:p="http://schemas.openxmlformats.org/presentationml/2006/main" xmlns:r="http://schemas.openxmlformats.org/officeDocument/2006/relationships">
   <p:cSld>
     <p:bg>
@@ -7977,7 +8688,7 @@
                 </a:solidFill>
                 <a:latin typeface="Calibri"/>
               </a:rPr>
-              <a:t>17</a:t>
+              <a:t>18</a:t>
             </a:r>
           </a:p>
         </p:txBody>
@@ -7990,7 +8701,7 @@
 </p:sld>
 </file>
 
-<file path=ppt/slides/slide18.xml><?xml version="1.0" encoding="utf-8"?>
+<file path=ppt/slides/slide19.xml><?xml version="1.0" encoding="utf-8"?>
 <p:sld xmlns:a="http://schemas.openxmlformats.org/drawingml/2006/main" xmlns:p="http://schemas.openxmlformats.org/presentationml/2006/main" xmlns:r="http://schemas.openxmlformats.org/officeDocument/2006/relationships">
   <p:cSld>
     <p:bg>
@@ -8174,7 +8885,7 @@
                 </a:solidFill>
                 <a:latin typeface="Calibri"/>
               </a:rPr>
-              <a:t>18</a:t>
+              <a:t>19</a:t>
             </a:r>
           </a:p>
         </p:txBody>
@@ -8221,7 +8932,7 @@
 </p:sld>
 </file>
 
-<file path=ppt/slides/slide19.xml><?xml version="1.0" encoding="utf-8"?>
+<file path=ppt/slides/slide2.xml><?xml version="1.0" encoding="utf-8"?>
 <p:sld xmlns:a="http://schemas.openxmlformats.org/drawingml/2006/main" xmlns:p="http://schemas.openxmlformats.org/presentationml/2006/main" xmlns:r="http://schemas.openxmlformats.org/officeDocument/2006/relationships">
   <p:cSld>
     <p:bg>
@@ -8313,6 +9024,374 @@
                 </a:solidFill>
                 <a:latin typeface="Calibri"/>
               </a:rPr>
+              <a:t>AGENDA DE HOY</a:t>
+            </a:r>
+          </a:p>
+        </p:txBody>
+      </p:sp>
+      <p:sp>
+        <p:nvSpPr>
+          <p:cNvPr id="4" name="TextBox 3"/>
+          <p:cNvSpPr txBox="1"/>
+          <p:nvPr/>
+        </p:nvSpPr>
+        <p:spPr>
+          <a:xfrm>
+            <a:off x="640080" y="1280160"/>
+            <a:ext cx="10911535" cy="411480"/>
+          </a:xfrm>
+          <a:prstGeom prst="rect">
+            <a:avLst/>
+          </a:prstGeom>
+          <a:noFill/>
+        </p:spPr>
+        <p:txBody>
+          <a:bodyPr wrap="square" anchor="t" lIns="0" rIns="0" tIns="0" bIns="0">
+            <a:spAutoFit/>
+          </a:bodyPr>
+          <a:lstStyle/>
+          <a:p>
+            <a:pPr algn="ctr"/>
+            <a:r>
+              <a:rPr sz="1500" b="0" i="0">
+                <a:solidFill>
+                  <a:srgbClr val="2B2B2B"/>
+                </a:solidFill>
+                <a:latin typeface="Calibri"/>
+              </a:rPr>
+              <a:t>Sesión de encuadre — hoy no vemos tema; el contenido arranca en la Sesión 02.</a:t>
+            </a:r>
+          </a:p>
+        </p:txBody>
+      </p:sp>
+      <p:sp>
+        <p:nvSpPr>
+          <p:cNvPr id="5" name="TextBox 4"/>
+          <p:cNvSpPr txBox="1"/>
+          <p:nvPr/>
+        </p:nvSpPr>
+        <p:spPr>
+          <a:xfrm>
+            <a:off x="640080" y="2011679"/>
+            <a:ext cx="10911535" cy="4297680"/>
+          </a:xfrm>
+          <a:prstGeom prst="rect">
+            <a:avLst/>
+          </a:prstGeom>
+          <a:noFill/>
+        </p:spPr>
+        <p:txBody>
+          <a:bodyPr wrap="square" anchor="t" lIns="0" rIns="0" tIns="0" bIns="0">
+            <a:spAutoFit/>
+          </a:bodyPr>
+          <a:lstStyle/>
+          <a:p>
+            <a:pPr>
+              <a:spcAft>
+                <a:spcPts val="1000"/>
+              </a:spcAft>
+            </a:pPr>
+            <a:r>
+              <a:rPr sz="1600" b="0" i="0">
+                <a:solidFill>
+                  <a:srgbClr val="2B2B2B"/>
+                </a:solidFill>
+                <a:latin typeface="Calibri"/>
+              </a:rPr>
+              <a:t>–   </a:t>
+            </a:r>
+            <a:r>
+              <a:rPr sz="1600" b="1" i="0">
+                <a:solidFill>
+                  <a:srgbClr val="2B2B2B"/>
+                </a:solidFill>
+                <a:latin typeface="Calibri"/>
+              </a:rPr>
+              <a:t>El curso:</a:t>
+            </a:r>
+            <a:r>
+              <a:rPr sz="1600" b="0" i="0">
+                <a:solidFill>
+                  <a:srgbClr val="2B2B2B"/>
+                </a:solidFill>
+                <a:latin typeface="Calibri"/>
+              </a:rPr>
+              <a:t> de qué se trata, cómo trabajamos y qué se llevan al final.</a:t>
+            </a:r>
+          </a:p>
+          <a:p>
+            <a:pPr>
+              <a:spcAft>
+                <a:spcPts val="1000"/>
+              </a:spcAft>
+            </a:pPr>
+            <a:r>
+              <a:rPr sz="1600" b="0" i="0">
+                <a:solidFill>
+                  <a:srgbClr val="2B2B2B"/>
+                </a:solidFill>
+                <a:latin typeface="Calibri"/>
+              </a:rPr>
+              <a:t>–   </a:t>
+            </a:r>
+            <a:r>
+              <a:rPr sz="1600" b="1" i="0">
+                <a:solidFill>
+                  <a:srgbClr val="2B2B2B"/>
+                </a:solidFill>
+                <a:latin typeface="Calibri"/>
+              </a:rPr>
+              <a:t>El Docente:</a:t>
+            </a:r>
+            <a:r>
+              <a:rPr sz="1600" b="0" i="0">
+                <a:solidFill>
+                  <a:srgbClr val="2B2B2B"/>
+                </a:solidFill>
+                <a:latin typeface="Calibri"/>
+              </a:rPr>
+              <a:t> quién los acompaña y cómo contactarlo.</a:t>
+            </a:r>
+          </a:p>
+          <a:p>
+            <a:pPr>
+              <a:spcAft>
+                <a:spcPts val="1000"/>
+              </a:spcAft>
+            </a:pPr>
+            <a:r>
+              <a:rPr sz="1600" b="0" i="0">
+                <a:solidFill>
+                  <a:srgbClr val="2B2B2B"/>
+                </a:solidFill>
+                <a:latin typeface="Calibri"/>
+              </a:rPr>
+              <a:t>–   </a:t>
+            </a:r>
+            <a:r>
+              <a:rPr sz="1600" b="1" i="0">
+                <a:solidFill>
+                  <a:srgbClr val="2B2B2B"/>
+                </a:solidFill>
+                <a:latin typeface="Calibri"/>
+              </a:rPr>
+              <a:t>Ustedes:</a:t>
+            </a:r>
+            <a:r>
+              <a:rPr sz="1600" b="0" i="0">
+                <a:solidFill>
+                  <a:srgbClr val="2B2B2B"/>
+                </a:solidFill>
+                <a:latin typeface="Calibri"/>
+              </a:rPr>
+              <a:t> nos presentamos en el tablero colaborativo.</a:t>
+            </a:r>
+          </a:p>
+          <a:p>
+            <a:pPr>
+              <a:spcAft>
+                <a:spcPts val="1000"/>
+              </a:spcAft>
+            </a:pPr>
+            <a:r>
+              <a:rPr sz="1600" b="0" i="0">
+                <a:solidFill>
+                  <a:srgbClr val="2B2B2B"/>
+                </a:solidFill>
+                <a:latin typeface="Calibri"/>
+              </a:rPr>
+              <a:t>–   </a:t>
+            </a:r>
+            <a:r>
+              <a:rPr sz="1600" b="1" i="0">
+                <a:solidFill>
+                  <a:srgbClr val="2B2B2B"/>
+                </a:solidFill>
+                <a:latin typeface="Calibri"/>
+              </a:rPr>
+              <a:t>Cómo se evalúa:</a:t>
+            </a:r>
+            <a:r>
+              <a:rPr sz="1600" b="0" i="0">
+                <a:solidFill>
+                  <a:srgbClr val="2B2B2B"/>
+                </a:solidFill>
+                <a:latin typeface="Calibri"/>
+              </a:rPr>
+              <a:t> qué ítems tiene el aula, cuánto pesa cada uno y qué se hace con él.</a:t>
+            </a:r>
+          </a:p>
+          <a:p>
+            <a:pPr>
+              <a:spcAft>
+                <a:spcPts val="1000"/>
+              </a:spcAft>
+            </a:pPr>
+            <a:r>
+              <a:rPr sz="1600" b="0" i="0">
+                <a:solidFill>
+                  <a:srgbClr val="2B2B2B"/>
+                </a:solidFill>
+                <a:latin typeface="Calibri"/>
+              </a:rPr>
+              <a:t>–   </a:t>
+            </a:r>
+            <a:r>
+              <a:rPr sz="1600" b="1" i="0">
+                <a:solidFill>
+                  <a:srgbClr val="2B2B2B"/>
+                </a:solidFill>
+                <a:latin typeface="Calibri"/>
+              </a:rPr>
+              <a:t>Acuerdos</a:t>
+            </a:r>
+            <a:r>
+              <a:rPr sz="1600" b="0" i="0">
+                <a:solidFill>
+                  <a:srgbClr val="2B2B2B"/>
+                </a:solidFill>
+                <a:latin typeface="Calibri"/>
+              </a:rPr>
+              <a:t> de trabajo y el primer encargo autónomo.</a:t>
+            </a:r>
+          </a:p>
+        </p:txBody>
+      </p:sp>
+      <p:sp>
+        <p:nvSpPr>
+          <p:cNvPr id="6" name="TextBox 5"/>
+          <p:cNvSpPr txBox="1"/>
+          <p:nvPr/>
+        </p:nvSpPr>
+        <p:spPr>
+          <a:xfrm>
+            <a:off x="11094415" y="6446520"/>
+            <a:ext cx="548640" cy="274320"/>
+          </a:xfrm>
+          <a:prstGeom prst="rect">
+            <a:avLst/>
+          </a:prstGeom>
+          <a:noFill/>
+        </p:spPr>
+        <p:txBody>
+          <a:bodyPr wrap="square" anchor="t" lIns="0" rIns="0" tIns="0" bIns="0">
+            <a:spAutoFit/>
+          </a:bodyPr>
+          <a:lstStyle/>
+          <a:p>
+            <a:pPr algn="r"/>
+            <a:r>
+              <a:rPr sz="1000" b="1" i="0">
+                <a:solidFill>
+                  <a:srgbClr val="8F989D"/>
+                </a:solidFill>
+                <a:latin typeface="Calibri"/>
+              </a:rPr>
+              <a:t>2</a:t>
+            </a:r>
+          </a:p>
+        </p:txBody>
+      </p:sp>
+    </p:spTree>
+  </p:cSld>
+  <p:clrMapOvr>
+    <a:masterClrMapping/>
+  </p:clrMapOvr>
+</p:sld>
+</file>
+
+<file path=ppt/slides/slide20.xml><?xml version="1.0" encoding="utf-8"?>
+<p:sld xmlns:a="http://schemas.openxmlformats.org/drawingml/2006/main" xmlns:p="http://schemas.openxmlformats.org/presentationml/2006/main" xmlns:r="http://schemas.openxmlformats.org/officeDocument/2006/relationships">
+  <p:cSld>
+    <p:bg>
+      <p:bgPr>
+        <a:solidFill>
+          <a:srgbClr val="FFFFFF"/>
+        </a:solidFill>
+        <a:effectLst/>
+      </p:bgPr>
+    </p:bg>
+    <p:spTree>
+      <p:nvGrpSpPr>
+        <p:cNvPr id="1" name=""/>
+        <p:cNvGrpSpPr/>
+        <p:nvPr/>
+      </p:nvGrpSpPr>
+      <p:grpSpPr/>
+      <p:sp>
+        <p:nvSpPr>
+          <p:cNvPr id="2" name="Rectangle 1"/>
+          <p:cNvSpPr/>
+          <p:nvPr/>
+        </p:nvSpPr>
+        <p:spPr>
+          <a:xfrm>
+            <a:off x="0" y="0"/>
+            <a:ext cx="12191695" cy="1188720"/>
+          </a:xfrm>
+          <a:prstGeom prst="rect">
+            <a:avLst/>
+          </a:prstGeom>
+          <a:solidFill>
+            <a:srgbClr val="0C2340"/>
+          </a:solidFill>
+          <a:ln>
+            <a:noFill/>
+          </a:ln>
+          <a:effectLst/>
+        </p:spPr>
+        <p:style>
+          <a:lnRef idx="1">
+            <a:schemeClr val="accent1"/>
+          </a:lnRef>
+          <a:fillRef idx="3">
+            <a:schemeClr val="accent1"/>
+          </a:fillRef>
+          <a:effectRef idx="2">
+            <a:schemeClr val="accent1"/>
+          </a:effectRef>
+          <a:fontRef idx="minor">
+            <a:schemeClr val="lt1"/>
+          </a:fontRef>
+        </p:style>
+        <p:txBody>
+          <a:bodyPr rtlCol="0" anchor="ctr"/>
+          <a:lstStyle/>
+          <a:p>
+            <a:pPr algn="ctr"/>
+          </a:p>
+        </p:txBody>
+      </p:sp>
+      <p:sp>
+        <p:nvSpPr>
+          <p:cNvPr id="3" name="TextBox 2"/>
+          <p:cNvSpPr txBox="1"/>
+          <p:nvPr/>
+        </p:nvSpPr>
+        <p:spPr>
+          <a:xfrm>
+            <a:off x="640080" y="0"/>
+            <a:ext cx="9082735" cy="1188720"/>
+          </a:xfrm>
+          <a:prstGeom prst="rect">
+            <a:avLst/>
+          </a:prstGeom>
+          <a:noFill/>
+        </p:spPr>
+        <p:txBody>
+          <a:bodyPr wrap="square" anchor="ctr" lIns="0" rIns="0" tIns="0" bIns="0">
+            <a:spAutoFit/>
+          </a:bodyPr>
+          <a:lstStyle/>
+          <a:p>
+            <a:pPr algn="ctr"/>
+            <a:r>
+              <a:rPr sz="2600" b="1" i="0">
+                <a:solidFill>
+                  <a:srgbClr val="FFFFFF"/>
+                </a:solidFill>
+                <a:latin typeface="Calibri"/>
+              </a:rPr>
               <a:t>Preguntas del primer día</a:t>
             </a:r>
           </a:p>
@@ -8675,7 +9754,7 @@
                 </a:solidFill>
                 <a:latin typeface="Calibri"/>
               </a:rPr>
-              <a:t>19</a:t>
+              <a:t>20</a:t>
             </a:r>
           </a:p>
         </p:txBody>
@@ -8688,7 +9767,7 @@
 </p:sld>
 </file>
 
-<file path=ppt/slides/slide2.xml><?xml version="1.0" encoding="utf-8"?>
+<file path=ppt/slides/slide21.xml><?xml version="1.0" encoding="utf-8"?>
 <p:sld xmlns:a="http://schemas.openxmlformats.org/drawingml/2006/main" xmlns:p="http://schemas.openxmlformats.org/presentationml/2006/main" xmlns:r="http://schemas.openxmlformats.org/officeDocument/2006/relationships">
   <p:cSld>
     <p:bg>
@@ -8780,21 +9859,65 @@
                 </a:solidFill>
                 <a:latin typeface="Calibri"/>
               </a:rPr>
-              <a:t>AGENDA DE HOY</a:t>
-            </a:r>
-          </a:p>
-        </p:txBody>
-      </p:sp>
-      <p:sp>
-        <p:nvSpPr>
-          <p:cNvPr id="4" name="TextBox 3"/>
+              <a:t>Preguntas del primer día (cont.)</a:t>
+            </a:r>
+          </a:p>
+        </p:txBody>
+      </p:sp>
+      <p:sp>
+        <p:nvSpPr>
+          <p:cNvPr id="4" name="Rounded Rectangle 3"/>
+          <p:cNvSpPr/>
+          <p:nvPr/>
+        </p:nvSpPr>
+        <p:spPr>
+          <a:xfrm>
+            <a:off x="640080" y="1737360"/>
+            <a:ext cx="10911535" cy="713232"/>
+          </a:xfrm>
+          <a:prstGeom prst="roundRect">
+            <a:avLst/>
+          </a:prstGeom>
+          <a:solidFill>
+            <a:srgbClr val="E8F5EC"/>
+          </a:solidFill>
+          <a:ln>
+            <a:noFill/>
+          </a:ln>
+          <a:effectLst/>
+        </p:spPr>
+        <p:style>
+          <a:lnRef idx="1">
+            <a:schemeClr val="accent1"/>
+          </a:lnRef>
+          <a:fillRef idx="3">
+            <a:schemeClr val="accent1"/>
+          </a:fillRef>
+          <a:effectRef idx="2">
+            <a:schemeClr val="accent1"/>
+          </a:effectRef>
+          <a:fontRef idx="minor">
+            <a:schemeClr val="lt1"/>
+          </a:fontRef>
+        </p:style>
+        <p:txBody>
+          <a:bodyPr rtlCol="0" anchor="ctr"/>
+          <a:lstStyle/>
+          <a:p>
+            <a:pPr algn="ctr"/>
+          </a:p>
+        </p:txBody>
+      </p:sp>
+      <p:sp>
+        <p:nvSpPr>
+          <p:cNvPr id="5" name="TextBox 4"/>
           <p:cNvSpPr txBox="1"/>
           <p:nvPr/>
         </p:nvSpPr>
         <p:spPr>
           <a:xfrm>
-            <a:off x="640080" y="1280160"/>
-            <a:ext cx="10911535" cy="411480"/>
+            <a:off x="868680" y="1847088"/>
+            <a:ext cx="10454335" cy="493776"/>
           </a:xfrm>
           <a:prstGeom prst="rect">
             <a:avLst/>
@@ -8807,208 +9930,39 @@
           </a:bodyPr>
           <a:lstStyle/>
           <a:p>
-            <a:pPr algn="ctr"/>
-            <a:r>
-              <a:rPr sz="1500" b="0" i="0">
-                <a:solidFill>
-                  <a:srgbClr val="2B2B2B"/>
-                </a:solidFill>
-                <a:latin typeface="Calibri"/>
-              </a:rPr>
-              <a:t>Sesión de encuadre — hoy no vemos tema; el contenido arranca en la Sesión 02.</a:t>
-            </a:r>
-          </a:p>
-        </p:txBody>
-      </p:sp>
-      <p:sp>
-        <p:nvSpPr>
-          <p:cNvPr id="5" name="TextBox 4"/>
-          <p:cNvSpPr txBox="1"/>
-          <p:nvPr/>
-        </p:nvSpPr>
-        <p:spPr>
-          <a:xfrm>
-            <a:off x="640080" y="2011679"/>
-            <a:ext cx="10911535" cy="4297680"/>
-          </a:xfrm>
-          <a:prstGeom prst="rect">
-            <a:avLst/>
-          </a:prstGeom>
-          <a:noFill/>
-        </p:spPr>
-        <p:txBody>
-          <a:bodyPr wrap="square" anchor="t" lIns="0" rIns="0" tIns="0" bIns="0">
-            <a:spAutoFit/>
-          </a:bodyPr>
-          <a:lstStyle/>
+            <a:r>
+              <a:rPr sz="1300" b="1" i="0">
+                <a:solidFill>
+                  <a:srgbClr val="0C2340"/>
+                </a:solidFill>
+                <a:latin typeface="Calibri"/>
+              </a:rPr>
+              <a:t>ℹ️ Nota institucional</a:t>
+            </a:r>
+          </a:p>
           <a:p>
             <a:pPr>
-              <a:spcAft>
-                <a:spcPts val="1000"/>
-              </a:spcAft>
+              <a:spcBef>
+                <a:spcPts val="400"/>
+              </a:spcBef>
             </a:pPr>
             <a:r>
-              <a:rPr sz="1600" b="0" i="0">
-                <a:solidFill>
-                  <a:srgbClr val="2B2B2B"/>
-                </a:solidFill>
-                <a:latin typeface="Calibri"/>
-              </a:rPr>
-              <a:t>–   </a:t>
-            </a:r>
-            <a:r>
-              <a:rPr sz="1600" b="1" i="0">
-                <a:solidFill>
-                  <a:srgbClr val="2B2B2B"/>
-                </a:solidFill>
-                <a:latin typeface="Calibri"/>
-              </a:rPr>
-              <a:t>El curso:</a:t>
-            </a:r>
-            <a:r>
-              <a:rPr sz="1600" b="0" i="0">
-                <a:solidFill>
-                  <a:srgbClr val="2B2B2B"/>
-                </a:solidFill>
-                <a:latin typeface="Calibri"/>
-              </a:rPr>
-              <a:t> de qué se trata, cómo trabajamos y qué se llevan al final.</a:t>
-            </a:r>
-          </a:p>
-          <a:p>
-            <a:pPr>
-              <a:spcAft>
-                <a:spcPts val="1000"/>
-              </a:spcAft>
-            </a:pPr>
-            <a:r>
-              <a:rPr sz="1600" b="0" i="0">
-                <a:solidFill>
-                  <a:srgbClr val="2B2B2B"/>
-                </a:solidFill>
-                <a:latin typeface="Calibri"/>
-              </a:rPr>
-              <a:t>–   </a:t>
-            </a:r>
-            <a:r>
-              <a:rPr sz="1600" b="1" i="0">
-                <a:solidFill>
-                  <a:srgbClr val="2B2B2B"/>
-                </a:solidFill>
-                <a:latin typeface="Calibri"/>
-              </a:rPr>
-              <a:t>El Docente:</a:t>
-            </a:r>
-            <a:r>
-              <a:rPr sz="1600" b="0" i="0">
-                <a:solidFill>
-                  <a:srgbClr val="2B2B2B"/>
-                </a:solidFill>
-                <a:latin typeface="Calibri"/>
-              </a:rPr>
-              <a:t> quién los acompaña y cómo contactarlo.</a:t>
-            </a:r>
-          </a:p>
-          <a:p>
-            <a:pPr>
-              <a:spcAft>
-                <a:spcPts val="1000"/>
-              </a:spcAft>
-            </a:pPr>
-            <a:r>
-              <a:rPr sz="1600" b="0" i="0">
-                <a:solidFill>
-                  <a:srgbClr val="2B2B2B"/>
-                </a:solidFill>
-                <a:latin typeface="Calibri"/>
-              </a:rPr>
-              <a:t>–   </a:t>
-            </a:r>
-            <a:r>
-              <a:rPr sz="1600" b="1" i="0">
-                <a:solidFill>
-                  <a:srgbClr val="2B2B2B"/>
-                </a:solidFill>
-                <a:latin typeface="Calibri"/>
-              </a:rPr>
-              <a:t>Ustedes:</a:t>
-            </a:r>
-            <a:r>
-              <a:rPr sz="1600" b="0" i="0">
-                <a:solidFill>
-                  <a:srgbClr val="2B2B2B"/>
-                </a:solidFill>
-                <a:latin typeface="Calibri"/>
-              </a:rPr>
-              <a:t> nos presentamos en el tablero colaborativo.</a:t>
-            </a:r>
-          </a:p>
-          <a:p>
-            <a:pPr>
-              <a:spcAft>
-                <a:spcPts val="1000"/>
-              </a:spcAft>
-            </a:pPr>
-            <a:r>
-              <a:rPr sz="1600" b="0" i="0">
-                <a:solidFill>
-                  <a:srgbClr val="2B2B2B"/>
-                </a:solidFill>
-                <a:latin typeface="Calibri"/>
-              </a:rPr>
-              <a:t>–   </a:t>
-            </a:r>
-            <a:r>
-              <a:rPr sz="1600" b="1" i="0">
-                <a:solidFill>
-                  <a:srgbClr val="2B2B2B"/>
-                </a:solidFill>
-                <a:latin typeface="Calibri"/>
-              </a:rPr>
-              <a:t>Cómo se evalúa:</a:t>
-            </a:r>
-            <a:r>
-              <a:rPr sz="1600" b="0" i="0">
-                <a:solidFill>
-                  <a:srgbClr val="2B2B2B"/>
-                </a:solidFill>
-                <a:latin typeface="Calibri"/>
-              </a:rPr>
-              <a:t> qué ítems tiene el aula, cuánto pesa cada uno y qué se hace con él.</a:t>
-            </a:r>
-          </a:p>
-          <a:p>
-            <a:pPr>
-              <a:spcAft>
-                <a:spcPts val="1000"/>
-              </a:spcAft>
-            </a:pPr>
-            <a:r>
-              <a:rPr sz="1600" b="0" i="0">
-                <a:solidFill>
-                  <a:srgbClr val="2B2B2B"/>
-                </a:solidFill>
-                <a:latin typeface="Calibri"/>
-              </a:rPr>
-              <a:t>–   </a:t>
-            </a:r>
-            <a:r>
-              <a:rPr sz="1600" b="1" i="0">
-                <a:solidFill>
-                  <a:srgbClr val="2B2B2B"/>
-                </a:solidFill>
-                <a:latin typeface="Calibri"/>
-              </a:rPr>
-              <a:t>Acuerdos</a:t>
-            </a:r>
-            <a:r>
-              <a:rPr sz="1600" b="0" i="0">
-                <a:solidFill>
-                  <a:srgbClr val="2B2B2B"/>
-                </a:solidFill>
-                <a:latin typeface="Calibri"/>
-              </a:rPr>
-              <a:t> de trabajo y el primer encargo autónomo.</a:t>
+              <a:rPr sz="1300" b="1" i="0">
+                <a:solidFill>
+                  <a:srgbClr val="2B2B2B"/>
+                </a:solidFill>
+                <a:latin typeface="Calibri"/>
+              </a:rPr>
+              <a:t>¿Necesito saber programar o diseñar?</a:t>
+            </a:r>
+            <a:r>
+              <a:rPr sz="1300" b="0" i="0">
+                <a:solidFill>
+                  <a:srgbClr val="2B2B2B"/>
+                </a:solidFill>
+                <a:latin typeface="Calibri"/>
+              </a:rPr>
+              <a:t> No. Aquí se evalúa criterio, no herramientas.</a:t>
             </a:r>
           </a:p>
         </p:txBody>
@@ -9043,7 +9997,7 @@
                 </a:solidFill>
                 <a:latin typeface="Calibri"/>
               </a:rPr>
-              <a:t>2</a:t>
+              <a:t>21</a:t>
             </a:r>
           </a:p>
         </p:txBody>
@@ -9056,7 +10010,7 @@
 </p:sld>
 </file>
 
-<file path=ppt/slides/slide20.xml><?xml version="1.0" encoding="utf-8"?>
+<file path=ppt/slides/slide22.xml><?xml version="1.0" encoding="utf-8"?>
 <p:sld xmlns:a="http://schemas.openxmlformats.org/drawingml/2006/main" xmlns:p="http://schemas.openxmlformats.org/presentationml/2006/main" xmlns:r="http://schemas.openxmlformats.org/officeDocument/2006/relationships">
   <p:cSld>
     <p:bg>
@@ -9148,7 +10102,7 @@
                 </a:solidFill>
                 <a:latin typeface="Calibri"/>
               </a:rPr>
-              <a:t>Preguntas del primer día (cont.)</a:t>
+              <a:t>ACUERDOS DE TRABAJO</a:t>
             </a:r>
           </a:p>
         </p:txBody>
@@ -9242,7 +10196,7 @@
                 </a:solidFill>
                 <a:latin typeface="Calibri"/>
               </a:rPr>
-              <a:t>¿Necesito saber programar o diseñar?</a:t>
+              <a:t>Entrega oficial: CDigital.</a:t>
             </a:r>
             <a:r>
               <a:rPr sz="1300" b="0" i="0">
@@ -9251,14 +10205,238 @@
                 </a:solidFill>
                 <a:latin typeface="Calibri"/>
               </a:rPr>
-              <a:t> No. Aquí se evalúa criterio, no herramientas.</a:t>
-            </a:r>
-          </a:p>
-        </p:txBody>
-      </p:sp>
-      <p:sp>
-        <p:nvSpPr>
-          <p:cNvPr id="6" name="TextBox 5"/>
+              <a:t> Lo que no esté ahí, no está entregado.</a:t>
+            </a:r>
+          </a:p>
+        </p:txBody>
+      </p:sp>
+      <p:sp>
+        <p:nvSpPr>
+          <p:cNvPr id="6" name="Rounded Rectangle 5"/>
+          <p:cNvSpPr/>
+          <p:nvPr/>
+        </p:nvSpPr>
+        <p:spPr>
+          <a:xfrm>
+            <a:off x="640080" y="2679191"/>
+            <a:ext cx="10911535" cy="713232"/>
+          </a:xfrm>
+          <a:prstGeom prst="roundRect">
+            <a:avLst/>
+          </a:prstGeom>
+          <a:solidFill>
+            <a:srgbClr val="FDECD8"/>
+          </a:solidFill>
+          <a:ln>
+            <a:noFill/>
+          </a:ln>
+          <a:effectLst/>
+        </p:spPr>
+        <p:style>
+          <a:lnRef idx="1">
+            <a:schemeClr val="accent1"/>
+          </a:lnRef>
+          <a:fillRef idx="3">
+            <a:schemeClr val="accent1"/>
+          </a:fillRef>
+          <a:effectRef idx="2">
+            <a:schemeClr val="accent1"/>
+          </a:effectRef>
+          <a:fontRef idx="minor">
+            <a:schemeClr val="lt1"/>
+          </a:fontRef>
+        </p:style>
+        <p:txBody>
+          <a:bodyPr rtlCol="0" anchor="ctr"/>
+          <a:lstStyle/>
+          <a:p>
+            <a:pPr algn="ctr"/>
+          </a:p>
+        </p:txBody>
+      </p:sp>
+      <p:sp>
+        <p:nvSpPr>
+          <p:cNvPr id="7" name="TextBox 6"/>
+          <p:cNvSpPr txBox="1"/>
+          <p:nvPr/>
+        </p:nvSpPr>
+        <p:spPr>
+          <a:xfrm>
+            <a:off x="868680" y="2788920"/>
+            <a:ext cx="10454335" cy="493776"/>
+          </a:xfrm>
+          <a:prstGeom prst="rect">
+            <a:avLst/>
+          </a:prstGeom>
+          <a:noFill/>
+        </p:spPr>
+        <p:txBody>
+          <a:bodyPr wrap="square" anchor="t" lIns="0" rIns="0" tIns="0" bIns="0">
+            <a:spAutoFit/>
+          </a:bodyPr>
+          <a:lstStyle/>
+          <a:p>
+            <a:r>
+              <a:rPr sz="1300" b="1" i="0">
+                <a:solidFill>
+                  <a:srgbClr val="0C2340"/>
+                </a:solidFill>
+                <a:latin typeface="Calibri"/>
+              </a:rPr>
+              <a:t>💡 Aclaración</a:t>
+            </a:r>
+          </a:p>
+          <a:p>
+            <a:pPr>
+              <a:spcBef>
+                <a:spcPts val="400"/>
+              </a:spcBef>
+            </a:pPr>
+            <a:r>
+              <a:rPr sz="1300" b="0" i="0">
+                <a:solidFill>
+                  <a:srgbClr val="2B2B2B"/>
+                </a:solidFill>
+                <a:latin typeface="Calibri"/>
+              </a:rPr>
+              <a:t>Traer el avance </a:t>
+            </a:r>
+            <a:r>
+              <a:rPr sz="1300" b="1" i="0">
+                <a:solidFill>
+                  <a:srgbClr val="2B2B2B"/>
+                </a:solidFill>
+                <a:latin typeface="Calibri"/>
+              </a:rPr>
+              <a:t>escrito</a:t>
+            </a:r>
+            <a:r>
+              <a:rPr sz="1300" b="0" i="0">
+                <a:solidFill>
+                  <a:srgbClr val="2B2B2B"/>
+                </a:solidFill>
+                <a:latin typeface="Calibri"/>
+              </a:rPr>
+              <a:t> a cada encuentro: se trabaja sobre lo que ya existe.</a:t>
+            </a:r>
+          </a:p>
+        </p:txBody>
+      </p:sp>
+      <p:sp>
+        <p:nvSpPr>
+          <p:cNvPr id="8" name="Rounded Rectangle 7"/>
+          <p:cNvSpPr/>
+          <p:nvPr/>
+        </p:nvSpPr>
+        <p:spPr>
+          <a:xfrm>
+            <a:off x="640080" y="3621024"/>
+            <a:ext cx="10911535" cy="713232"/>
+          </a:xfrm>
+          <a:prstGeom prst="roundRect">
+            <a:avLst/>
+          </a:prstGeom>
+          <a:solidFill>
+            <a:srgbClr val="FBE4E4"/>
+          </a:solidFill>
+          <a:ln>
+            <a:noFill/>
+          </a:ln>
+          <a:effectLst/>
+        </p:spPr>
+        <p:style>
+          <a:lnRef idx="1">
+            <a:schemeClr val="accent1"/>
+          </a:lnRef>
+          <a:fillRef idx="3">
+            <a:schemeClr val="accent1"/>
+          </a:fillRef>
+          <a:effectRef idx="2">
+            <a:schemeClr val="accent1"/>
+          </a:effectRef>
+          <a:fontRef idx="minor">
+            <a:schemeClr val="lt1"/>
+          </a:fontRef>
+        </p:style>
+        <p:txBody>
+          <a:bodyPr rtlCol="0" anchor="ctr"/>
+          <a:lstStyle/>
+          <a:p>
+            <a:pPr algn="ctr"/>
+          </a:p>
+        </p:txBody>
+      </p:sp>
+      <p:sp>
+        <p:nvSpPr>
+          <p:cNvPr id="9" name="TextBox 8"/>
+          <p:cNvSpPr txBox="1"/>
+          <p:nvPr/>
+        </p:nvSpPr>
+        <p:spPr>
+          <a:xfrm>
+            <a:off x="868680" y="3730752"/>
+            <a:ext cx="10454335" cy="493776"/>
+          </a:xfrm>
+          <a:prstGeom prst="rect">
+            <a:avLst/>
+          </a:prstGeom>
+          <a:noFill/>
+        </p:spPr>
+        <p:txBody>
+          <a:bodyPr wrap="square" anchor="t" lIns="0" rIns="0" tIns="0" bIns="0">
+            <a:spAutoFit/>
+          </a:bodyPr>
+          <a:lstStyle/>
+          <a:p>
+            <a:r>
+              <a:rPr sz="1300" b="1" i="0">
+                <a:solidFill>
+                  <a:srgbClr val="0C2340"/>
+                </a:solidFill>
+                <a:latin typeface="Calibri"/>
+              </a:rPr>
+              <a:t>⚠️ Importante</a:t>
+            </a:r>
+          </a:p>
+          <a:p>
+            <a:pPr>
+              <a:spcBef>
+                <a:spcPts val="400"/>
+              </a:spcBef>
+            </a:pPr>
+            <a:r>
+              <a:rPr sz="1300" b="0" i="0">
+                <a:solidFill>
+                  <a:srgbClr val="2B2B2B"/>
+                </a:solidFill>
+                <a:latin typeface="Calibri"/>
+              </a:rPr>
+              <a:t>Integridad académica: citar siempre en </a:t>
+            </a:r>
+            <a:r>
+              <a:rPr sz="1300" b="1" i="0">
+                <a:solidFill>
+                  <a:srgbClr val="2B2B2B"/>
+                </a:solidFill>
+                <a:latin typeface="Calibri"/>
+              </a:rPr>
+              <a:t>APA 7</a:t>
+            </a:r>
+            <a:r>
+              <a:rPr sz="1300" b="0" i="0">
+                <a:solidFill>
+                  <a:srgbClr val="2B2B2B"/>
+                </a:solidFill>
+                <a:latin typeface="Calibri"/>
+              </a:rPr>
+              <a:t>. El plagio tiene debido proceso.</a:t>
+            </a:r>
+          </a:p>
+        </p:txBody>
+      </p:sp>
+      <p:sp>
+        <p:nvSpPr>
+          <p:cNvPr id="10" name="TextBox 9"/>
           <p:cNvSpPr txBox="1"/>
           <p:nvPr/>
         </p:nvSpPr>
@@ -9286,7 +10464,7 @@
                 </a:solidFill>
                 <a:latin typeface="Calibri"/>
               </a:rPr>
-              <a:t>20</a:t>
+              <a:t>22</a:t>
             </a:r>
           </a:p>
         </p:txBody>
@@ -9299,7 +10477,7 @@
 </p:sld>
 </file>
 
-<file path=ppt/slides/slide21.xml><?xml version="1.0" encoding="utf-8"?>
+<file path=ppt/slides/slide23.xml><?xml version="1.0" encoding="utf-8"?>
 <p:sld xmlns:a="http://schemas.openxmlformats.org/drawingml/2006/main" xmlns:p="http://schemas.openxmlformats.org/presentationml/2006/main" xmlns:r="http://schemas.openxmlformats.org/officeDocument/2006/relationships">
   <p:cSld>
     <p:bg>
@@ -9391,27 +10569,195 @@
                 </a:solidFill>
                 <a:latin typeface="Calibri"/>
               </a:rPr>
-              <a:t>ACUERDOS DE TRABAJO</a:t>
-            </a:r>
-          </a:p>
-        </p:txBody>
-      </p:sp>
-      <p:sp>
-        <p:nvSpPr>
-          <p:cNvPr id="4" name="Rounded Rectangle 3"/>
+              <a:t>PARA LA PRÓXIMA SESIÓN</a:t>
+            </a:r>
+          </a:p>
+        </p:txBody>
+      </p:sp>
+      <p:sp>
+        <p:nvSpPr>
+          <p:cNvPr id="4" name="TextBox 3"/>
+          <p:cNvSpPr txBox="1"/>
+          <p:nvPr/>
+        </p:nvSpPr>
+        <p:spPr>
+          <a:xfrm>
+            <a:off x="640080" y="1691639"/>
+            <a:ext cx="10911535" cy="4617720"/>
+          </a:xfrm>
+          <a:prstGeom prst="rect">
+            <a:avLst/>
+          </a:prstGeom>
+          <a:noFill/>
+        </p:spPr>
+        <p:txBody>
+          <a:bodyPr wrap="square" anchor="t" lIns="0" rIns="0" tIns="0" bIns="0">
+            <a:spAutoFit/>
+          </a:bodyPr>
+          <a:lstStyle/>
+          <a:p>
+            <a:pPr>
+              <a:spcAft>
+                <a:spcPts val="1000"/>
+              </a:spcAft>
+            </a:pPr>
+            <a:r>
+              <a:rPr sz="1600" b="0" i="0">
+                <a:solidFill>
+                  <a:srgbClr val="2B2B2B"/>
+                </a:solidFill>
+                <a:latin typeface="Calibri"/>
+              </a:rPr>
+              <a:t>–   </a:t>
+            </a:r>
+            <a:r>
+              <a:rPr sz="1600" b="1" i="0">
+                <a:solidFill>
+                  <a:srgbClr val="2B2B2B"/>
+                </a:solidFill>
+                <a:latin typeface="Calibri"/>
+              </a:rPr>
+              <a:t>Lectura autónoma:</a:t>
+            </a:r>
+            <a:r>
+              <a:rPr sz="1600" b="0" i="0">
+                <a:solidFill>
+                  <a:srgbClr val="2B2B2B"/>
+                </a:solidFill>
+                <a:latin typeface="Calibri"/>
+              </a:rPr>
+              <a:t> U1–U2 (Propuesta de Innovación · creatividad e inteligencia emocional) — la retomamos al abrir la Sesión 02.</a:t>
+            </a:r>
+          </a:p>
+          <a:p>
+            <a:pPr>
+              <a:spcAft>
+                <a:spcPts val="1000"/>
+              </a:spcAft>
+            </a:pPr>
+            <a:r>
+              <a:rPr sz="1600" b="0" i="0">
+                <a:solidFill>
+                  <a:srgbClr val="2B2B2B"/>
+                </a:solidFill>
+                <a:latin typeface="Calibri"/>
+              </a:rPr>
+              <a:t>–   Revisar la </a:t>
+            </a:r>
+            <a:r>
+              <a:rPr sz="1600" b="1" i="0">
+                <a:solidFill>
+                  <a:srgbClr val="2B2B2B"/>
+                </a:solidFill>
+                <a:latin typeface="Calibri"/>
+              </a:rPr>
+              <a:t>Presentación del Curso</a:t>
+            </a:r>
+            <a:r>
+              <a:rPr sz="1600" b="0" i="0">
+                <a:solidFill>
+                  <a:srgbClr val="2B2B2B"/>
+                </a:solidFill>
+                <a:latin typeface="Calibri"/>
+              </a:rPr>
+              <a:t> completa (fechas, evaluación, contenido de todas las sesiones).</a:t>
+            </a:r>
+          </a:p>
+          <a:p>
+            <a:pPr>
+              <a:spcAft>
+                <a:spcPts val="1000"/>
+              </a:spcAft>
+            </a:pPr>
+            <a:r>
+              <a:rPr sz="1600" b="0" i="0">
+                <a:solidFill>
+                  <a:srgbClr val="2B2B2B"/>
+                </a:solidFill>
+                <a:latin typeface="Calibri"/>
+              </a:rPr>
+              <a:t>–   Abrir los enunciados de `Clases/Recursos/ACAs/`: son la guía escrita de lo que evalúa cada corte.</a:t>
+            </a:r>
+          </a:p>
+        </p:txBody>
+      </p:sp>
+      <p:sp>
+        <p:nvSpPr>
+          <p:cNvPr id="5" name="TextBox 4"/>
+          <p:cNvSpPr txBox="1"/>
+          <p:nvPr/>
+        </p:nvSpPr>
+        <p:spPr>
+          <a:xfrm>
+            <a:off x="11094415" y="6446520"/>
+            <a:ext cx="548640" cy="274320"/>
+          </a:xfrm>
+          <a:prstGeom prst="rect">
+            <a:avLst/>
+          </a:prstGeom>
+          <a:noFill/>
+        </p:spPr>
+        <p:txBody>
+          <a:bodyPr wrap="square" anchor="t" lIns="0" rIns="0" tIns="0" bIns="0">
+            <a:spAutoFit/>
+          </a:bodyPr>
+          <a:lstStyle/>
+          <a:p>
+            <a:pPr algn="r"/>
+            <a:r>
+              <a:rPr sz="1000" b="1" i="0">
+                <a:solidFill>
+                  <a:srgbClr val="8F989D"/>
+                </a:solidFill>
+                <a:latin typeface="Calibri"/>
+              </a:rPr>
+              <a:t>23</a:t>
+            </a:r>
+          </a:p>
+        </p:txBody>
+      </p:sp>
+    </p:spTree>
+  </p:cSld>
+  <p:clrMapOvr>
+    <a:masterClrMapping/>
+  </p:clrMapOvr>
+</p:sld>
+</file>
+
+<file path=ppt/slides/slide24.xml><?xml version="1.0" encoding="utf-8"?>
+<p:sld xmlns:a="http://schemas.openxmlformats.org/drawingml/2006/main" xmlns:p="http://schemas.openxmlformats.org/presentationml/2006/main" xmlns:r="http://schemas.openxmlformats.org/officeDocument/2006/relationships">
+  <p:cSld>
+    <p:bg>
+      <p:bgPr>
+        <a:solidFill>
+          <a:srgbClr val="FFFFFF"/>
+        </a:solidFill>
+        <a:effectLst/>
+      </p:bgPr>
+    </p:bg>
+    <p:spTree>
+      <p:nvGrpSpPr>
+        <p:cNvPr id="1" name=""/>
+        <p:cNvGrpSpPr/>
+        <p:nvPr/>
+      </p:nvGrpSpPr>
+      <p:grpSpPr/>
+      <p:sp>
+        <p:nvSpPr>
+          <p:cNvPr id="2" name="Rectangle 1"/>
           <p:cNvSpPr/>
           <p:nvPr/>
         </p:nvSpPr>
         <p:spPr>
           <a:xfrm>
-            <a:off x="640080" y="1737360"/>
-            <a:ext cx="10911535" cy="713232"/>
+            <a:off x="0" y="0"/>
+            <a:ext cx="12191695" cy="164592"/>
           </a:xfrm>
-          <a:prstGeom prst="roundRect">
+          <a:prstGeom prst="rect">
             <a:avLst/>
           </a:prstGeom>
           <a:solidFill>
-            <a:srgbClr val="E8F5EC"/>
+            <a:srgbClr val="007433"/>
           </a:solidFill>
           <a:ln>
             <a:noFill/>
@@ -9440,16 +10786,40 @@
           </a:p>
         </p:txBody>
       </p:sp>
-      <p:sp>
-        <p:nvSpPr>
-          <p:cNvPr id="5" name="TextBox 4"/>
+      <p:pic>
+        <p:nvPicPr>
+          <p:cNvPr id="3" name="Picture 2" descr="logo_cun_solo.png"/>
+          <p:cNvPicPr>
+            <a:picLocks noChangeAspect="1"/>
+          </p:cNvPicPr>
+          <p:nvPr/>
+        </p:nvPicPr>
+        <p:blipFill>
+          <a:blip r:embed="rId2"/>
+          <a:stretch>
+            <a:fillRect/>
+          </a:stretch>
+        </p:blipFill>
+        <p:spPr>
+          <a:xfrm>
+            <a:off x="10362895" y="5632704"/>
+            <a:ext cx="1371600" cy="950976"/>
+          </a:xfrm>
+          <a:prstGeom prst="rect">
+            <a:avLst/>
+          </a:prstGeom>
+        </p:spPr>
+      </p:pic>
+      <p:sp>
+        <p:nvSpPr>
+          <p:cNvPr id="4" name="TextBox 3"/>
           <p:cNvSpPr txBox="1"/>
           <p:nvPr/>
         </p:nvSpPr>
         <p:spPr>
           <a:xfrm>
-            <a:off x="868680" y="1847088"/>
-            <a:ext cx="10454335" cy="493776"/>
+            <a:off x="640080" y="1737360"/>
+            <a:ext cx="10911535" cy="1097280"/>
           </a:xfrm>
           <a:prstGeom prst="rect">
             <a:avLst/>
@@ -9457,102 +10827,34 @@
           <a:noFill/>
         </p:spPr>
         <p:txBody>
-          <a:bodyPr wrap="square" anchor="t" lIns="0" rIns="0" tIns="0" bIns="0">
+          <a:bodyPr wrap="square" anchor="ctr" lIns="0" rIns="0" tIns="0" bIns="0">
             <a:spAutoFit/>
           </a:bodyPr>
           <a:lstStyle/>
           <a:p>
-            <a:r>
-              <a:rPr sz="1300" b="1" i="0">
+            <a:pPr algn="ctr"/>
+            <a:r>
+              <a:rPr sz="3400" b="1" i="0">
                 <a:solidFill>
                   <a:srgbClr val="0C2340"/>
                 </a:solidFill>
                 <a:latin typeface="Calibri"/>
               </a:rPr>
-              <a:t>ℹ️ Nota institucional</a:t>
-            </a:r>
-          </a:p>
-          <a:p>
-            <a:pPr>
-              <a:spcBef>
-                <a:spcPts val="400"/>
-              </a:spcBef>
-            </a:pPr>
-            <a:r>
-              <a:rPr sz="1300" b="1" i="0">
-                <a:solidFill>
-                  <a:srgbClr val="2B2B2B"/>
-                </a:solidFill>
-                <a:latin typeface="Calibri"/>
-              </a:rPr>
-              <a:t>Entrega oficial: CDigital.</a:t>
-            </a:r>
-            <a:r>
-              <a:rPr sz="1300" b="0" i="0">
-                <a:solidFill>
-                  <a:srgbClr val="2B2B2B"/>
-                </a:solidFill>
-                <a:latin typeface="Calibri"/>
-              </a:rPr>
-              <a:t> Lo que no esté ahí, no está entregado.</a:t>
-            </a:r>
-          </a:p>
-        </p:txBody>
-      </p:sp>
-      <p:sp>
-        <p:nvSpPr>
-          <p:cNvPr id="6" name="Rounded Rectangle 5"/>
-          <p:cNvSpPr/>
+              <a:t>Cierre — Sesión 01</a:t>
+            </a:r>
+          </a:p>
+        </p:txBody>
+      </p:sp>
+      <p:sp>
+        <p:nvSpPr>
+          <p:cNvPr id="5" name="TextBox 4"/>
+          <p:cNvSpPr txBox="1"/>
           <p:nvPr/>
         </p:nvSpPr>
         <p:spPr>
           <a:xfrm>
-            <a:off x="640080" y="2679191"/>
-            <a:ext cx="10911535" cy="713232"/>
-          </a:xfrm>
-          <a:prstGeom prst="roundRect">
-            <a:avLst/>
-          </a:prstGeom>
-          <a:solidFill>
-            <a:srgbClr val="FDECD8"/>
-          </a:solidFill>
-          <a:ln>
-            <a:noFill/>
-          </a:ln>
-          <a:effectLst/>
-        </p:spPr>
-        <p:style>
-          <a:lnRef idx="1">
-            <a:schemeClr val="accent1"/>
-          </a:lnRef>
-          <a:fillRef idx="3">
-            <a:schemeClr val="accent1"/>
-          </a:fillRef>
-          <a:effectRef idx="2">
-            <a:schemeClr val="accent1"/>
-          </a:effectRef>
-          <a:fontRef idx="minor">
-            <a:schemeClr val="lt1"/>
-          </a:fontRef>
-        </p:style>
-        <p:txBody>
-          <a:bodyPr rtlCol="0" anchor="ctr"/>
-          <a:lstStyle/>
-          <a:p>
-            <a:pPr algn="ctr"/>
-          </a:p>
-        </p:txBody>
-      </p:sp>
-      <p:sp>
-        <p:nvSpPr>
-          <p:cNvPr id="7" name="TextBox 6"/>
-          <p:cNvSpPr txBox="1"/>
-          <p:nvPr/>
-        </p:nvSpPr>
-        <p:spPr>
-          <a:xfrm>
-            <a:off x="868680" y="2788920"/>
-            <a:ext cx="10454335" cy="493776"/>
+            <a:off x="640080" y="3017520"/>
+            <a:ext cx="10911535" cy="1645920"/>
           </a:xfrm>
           <a:prstGeom prst="rect">
             <a:avLst/>
@@ -9565,106 +10867,58 @@
           </a:bodyPr>
           <a:lstStyle/>
           <a:p>
-            <a:r>
-              <a:rPr sz="1300" b="1" i="0">
-                <a:solidFill>
-                  <a:srgbClr val="0C2340"/>
-                </a:solidFill>
-                <a:latin typeface="Calibri"/>
-              </a:rPr>
-              <a:t>💡 Aclaración</a:t>
-            </a:r>
-          </a:p>
-          <a:p>
-            <a:pPr>
-              <a:spcBef>
-                <a:spcPts val="400"/>
-              </a:spcBef>
+            <a:pPr algn="ctr">
+              <a:spcAft>
+                <a:spcPts val="600"/>
+              </a:spcAft>
             </a:pPr>
             <a:r>
-              <a:rPr sz="1300" b="0" i="0">
-                <a:solidFill>
-                  <a:srgbClr val="2B2B2B"/>
-                </a:solidFill>
-                <a:latin typeface="Calibri"/>
-              </a:rPr>
-              <a:t>Traer el avance </a:t>
-            </a:r>
-            <a:r>
-              <a:rPr sz="1300" b="1" i="0">
-                <a:solidFill>
-                  <a:srgbClr val="2B2B2B"/>
-                </a:solidFill>
-                <a:latin typeface="Calibri"/>
-              </a:rPr>
-              <a:t>escrito</a:t>
-            </a:r>
-            <a:r>
-              <a:rPr sz="1300" b="0" i="0">
-                <a:solidFill>
-                  <a:srgbClr val="2B2B2B"/>
-                </a:solidFill>
-                <a:latin typeface="Calibri"/>
-              </a:rPr>
-              <a:t> a cada encuentro: se trabaja sobre lo que ya existe.</a:t>
-            </a:r>
-          </a:p>
-        </p:txBody>
-      </p:sp>
-      <p:sp>
-        <p:nvSpPr>
-          <p:cNvPr id="8" name="Rounded Rectangle 7"/>
-          <p:cNvSpPr/>
+              <a:rPr sz="1600" b="0" i="0">
+                <a:solidFill>
+                  <a:srgbClr val="2B2B2B"/>
+                </a:solidFill>
+                <a:latin typeface="Calibri"/>
+              </a:rPr>
+              <a:t>Ya sabemos qué haremos, cómo se evalúa y quién es quién.</a:t>
+            </a:r>
+          </a:p>
+          <a:p>
+            <a:pPr algn="ctr">
+              <a:spcAft>
+                <a:spcPts val="600"/>
+              </a:spcAft>
+            </a:pPr>
+            <a:r>
+              <a:rPr sz="1600" b="1" i="0">
+                <a:solidFill>
+                  <a:srgbClr val="2B2B2B"/>
+                </a:solidFill>
+                <a:latin typeface="Calibri"/>
+              </a:rPr>
+              <a:t>Sesión 02:</a:t>
+            </a:r>
+            <a:r>
+              <a:rPr sz="1600" b="0" i="0">
+                <a:solidFill>
+                  <a:srgbClr val="2B2B2B"/>
+                </a:solidFill>
+                <a:latin typeface="Calibri"/>
+              </a:rPr>
+              <a:t> arranca el contenido del curso.</a:t>
+            </a:r>
+          </a:p>
+        </p:txBody>
+      </p:sp>
+      <p:sp>
+        <p:nvSpPr>
+          <p:cNvPr id="6" name="TextBox 5"/>
+          <p:cNvSpPr txBox="1"/>
           <p:nvPr/>
         </p:nvSpPr>
         <p:spPr>
           <a:xfrm>
-            <a:off x="640080" y="3621024"/>
-            <a:ext cx="10911535" cy="713232"/>
-          </a:xfrm>
-          <a:prstGeom prst="roundRect">
-            <a:avLst/>
-          </a:prstGeom>
-          <a:solidFill>
-            <a:srgbClr val="FBE4E4"/>
-          </a:solidFill>
-          <a:ln>
-            <a:noFill/>
-          </a:ln>
-          <a:effectLst/>
-        </p:spPr>
-        <p:style>
-          <a:lnRef idx="1">
-            <a:schemeClr val="accent1"/>
-          </a:lnRef>
-          <a:fillRef idx="3">
-            <a:schemeClr val="accent1"/>
-          </a:fillRef>
-          <a:effectRef idx="2">
-            <a:schemeClr val="accent1"/>
-          </a:effectRef>
-          <a:fontRef idx="minor">
-            <a:schemeClr val="lt1"/>
-          </a:fontRef>
-        </p:style>
-        <p:txBody>
-          <a:bodyPr rtlCol="0" anchor="ctr"/>
-          <a:lstStyle/>
-          <a:p>
-            <a:pPr algn="ctr"/>
-          </a:p>
-        </p:txBody>
-      </p:sp>
-      <p:sp>
-        <p:nvSpPr>
-          <p:cNvPr id="9" name="TextBox 8"/>
-          <p:cNvSpPr txBox="1"/>
-          <p:nvPr/>
-        </p:nvSpPr>
-        <p:spPr>
-          <a:xfrm>
-            <a:off x="868680" y="3730752"/>
-            <a:ext cx="10454335" cy="493776"/>
+            <a:off x="640080" y="4754880"/>
+            <a:ext cx="10911535" cy="640080"/>
           </a:xfrm>
           <a:prstGeom prst="rect">
             <a:avLst/>
@@ -9677,83 +10931,15 @@
           </a:bodyPr>
           <a:lstStyle/>
           <a:p>
-            <a:r>
-              <a:rPr sz="1300" b="1" i="0">
-                <a:solidFill>
-                  <a:srgbClr val="0C2340"/>
-                </a:solidFill>
-                <a:latin typeface="Calibri"/>
-              </a:rPr>
-              <a:t>⚠️ Importante</a:t>
-            </a:r>
-          </a:p>
-          <a:p>
-            <a:pPr>
-              <a:spcBef>
-                <a:spcPts val="400"/>
-              </a:spcBef>
-            </a:pPr>
-            <a:r>
-              <a:rPr sz="1300" b="0" i="0">
-                <a:solidFill>
-                  <a:srgbClr val="2B2B2B"/>
-                </a:solidFill>
-                <a:latin typeface="Calibri"/>
-              </a:rPr>
-              <a:t>Integridad académica: citar siempre en </a:t>
-            </a:r>
-            <a:r>
-              <a:rPr sz="1300" b="1" i="0">
-                <a:solidFill>
-                  <a:srgbClr val="2B2B2B"/>
-                </a:solidFill>
-                <a:latin typeface="Calibri"/>
-              </a:rPr>
-              <a:t>APA 7</a:t>
-            </a:r>
-            <a:r>
-              <a:rPr sz="1300" b="0" i="0">
-                <a:solidFill>
-                  <a:srgbClr val="2B2B2B"/>
-                </a:solidFill>
-                <a:latin typeface="Calibri"/>
-              </a:rPr>
-              <a:t>. El plagio tiene debido proceso.</a:t>
-            </a:r>
-          </a:p>
-        </p:txBody>
-      </p:sp>
-      <p:sp>
-        <p:nvSpPr>
-          <p:cNvPr id="10" name="TextBox 9"/>
-          <p:cNvSpPr txBox="1"/>
-          <p:nvPr/>
-        </p:nvSpPr>
-        <p:spPr>
-          <a:xfrm>
-            <a:off x="11094415" y="6446520"/>
-            <a:ext cx="548640" cy="274320"/>
-          </a:xfrm>
-          <a:prstGeom prst="rect">
-            <a:avLst/>
-          </a:prstGeom>
-          <a:noFill/>
-        </p:spPr>
-        <p:txBody>
-          <a:bodyPr wrap="square" anchor="t" lIns="0" rIns="0" tIns="0" bIns="0">
-            <a:spAutoFit/>
-          </a:bodyPr>
-          <a:lstStyle/>
-          <a:p>
-            <a:pPr algn="r"/>
-            <a:r>
-              <a:rPr sz="1000" b="1" i="0">
-                <a:solidFill>
-                  <a:srgbClr val="8F989D"/>
-                </a:solidFill>
-                <a:latin typeface="Calibri"/>
-              </a:rPr>
-              <a:t>21</a:t>
+            <a:pPr algn="ctr"/>
+            <a:r>
+              <a:rPr sz="2000" b="1" i="0">
+                <a:solidFill>
+                  <a:srgbClr val="007433"/>
+                </a:solidFill>
+                <a:latin typeface="Calibri"/>
+              </a:rPr>
+              <a:t>CREATIVIDAD Y PENSAMIENTO INNOVADOR</a:t>
             </a:r>
           </a:p>
         </p:txBody>
@@ -9766,7 +10952,7 @@
 </p:sld>
 </file>
 
-<file path=ppt/slides/slide22.xml><?xml version="1.0" encoding="utf-8"?>
+<file path=ppt/slides/slide3.xml><?xml version="1.0" encoding="utf-8"?>
 <p:sld xmlns:a="http://schemas.openxmlformats.org/drawingml/2006/main" xmlns:p="http://schemas.openxmlformats.org/presentationml/2006/main" xmlns:r="http://schemas.openxmlformats.org/officeDocument/2006/relationships">
   <p:cSld>
     <p:bg>
@@ -9858,7 +11044,7 @@
                 </a:solidFill>
                 <a:latin typeface="Calibri"/>
               </a:rPr>
-              <a:t>PARA LA PRÓXIMA SESIÓN</a:t>
+              <a:t>Docente</a:t>
             </a:r>
           </a:p>
         </p:txBody>
@@ -9871,8 +11057,8 @@
         </p:nvSpPr>
         <p:spPr>
           <a:xfrm>
-            <a:off x="640080" y="1691639"/>
-            <a:ext cx="10911535" cy="4617720"/>
+            <a:off x="2560320" y="2148840"/>
+            <a:ext cx="8991295" cy="1874519"/>
           </a:xfrm>
           <a:prstGeom prst="rect">
             <a:avLst/>
@@ -9887,197 +11073,72 @@
           <a:p>
             <a:pPr>
               <a:spcAft>
-                <a:spcPts val="1000"/>
+                <a:spcPts val="1200"/>
               </a:spcAft>
             </a:pPr>
             <a:r>
-              <a:rPr sz="1600" b="0" i="0">
-                <a:solidFill>
-                  <a:srgbClr val="2B2B2B"/>
-                </a:solidFill>
-                <a:latin typeface="Calibri"/>
-              </a:rPr>
-              <a:t>–   </a:t>
-            </a:r>
-            <a:r>
-              <a:rPr sz="1600" b="1" i="0">
-                <a:solidFill>
-                  <a:srgbClr val="2B2B2B"/>
-                </a:solidFill>
-                <a:latin typeface="Calibri"/>
-              </a:rPr>
-              <a:t>Lectura autónoma:</a:t>
-            </a:r>
-            <a:r>
-              <a:rPr sz="1600" b="0" i="0">
-                <a:solidFill>
-                  <a:srgbClr val="2B2B2B"/>
-                </a:solidFill>
-                <a:latin typeface="Calibri"/>
-              </a:rPr>
-              <a:t> U1–U2 (Propuesta de Innovación · creatividad e inteligencia emocional) — la retomamos al abrir la Sesión 02.</a:t>
+              <a:rPr sz="1800" b="0" i="0">
+                <a:solidFill>
+                  <a:srgbClr val="2B2B2B"/>
+                </a:solidFill>
+                <a:latin typeface="Calibri"/>
+              </a:rPr>
+              <a:t>Ingeniero de Sistemas</a:t>
             </a:r>
           </a:p>
           <a:p>
             <a:pPr>
               <a:spcAft>
-                <a:spcPts val="1000"/>
+                <a:spcPts val="1200"/>
               </a:spcAft>
             </a:pPr>
             <a:r>
-              <a:rPr sz="1600" b="0" i="0">
-                <a:solidFill>
-                  <a:srgbClr val="2B2B2B"/>
-                </a:solidFill>
-                <a:latin typeface="Calibri"/>
-              </a:rPr>
-              <a:t>–   Revisar la </a:t>
-            </a:r>
-            <a:r>
-              <a:rPr sz="1600" b="1" i="0">
-                <a:solidFill>
-                  <a:srgbClr val="2B2B2B"/>
-                </a:solidFill>
-                <a:latin typeface="Calibri"/>
-              </a:rPr>
-              <a:t>Presentación del Curso</a:t>
-            </a:r>
-            <a:r>
-              <a:rPr sz="1600" b="0" i="0">
-                <a:solidFill>
-                  <a:srgbClr val="2B2B2B"/>
-                </a:solidFill>
-                <a:latin typeface="Calibri"/>
-              </a:rPr>
-              <a:t> completa (fechas, evaluación, contenido de todas las sesiones).</a:t>
+              <a:rPr sz="1800" b="0" i="0">
+                <a:solidFill>
+                  <a:srgbClr val="2B2B2B"/>
+                </a:solidFill>
+                <a:latin typeface="Calibri"/>
+              </a:rPr>
+              <a:t>Candidato a MSc en Inteligencia Artificial</a:t>
             </a:r>
           </a:p>
           <a:p>
             <a:pPr>
               <a:spcAft>
-                <a:spcPts val="1000"/>
+                <a:spcPts val="1200"/>
               </a:spcAft>
             </a:pPr>
             <a:r>
-              <a:rPr sz="1600" b="0" i="0">
-                <a:solidFill>
-                  <a:srgbClr val="2B2B2B"/>
-                </a:solidFill>
-                <a:latin typeface="Calibri"/>
-              </a:rPr>
-              <a:t>–   Abrir los enunciados de `Clases/Recursos/ACAs/`: son la guía escrita de lo que evalúa cada corte.</a:t>
-            </a:r>
-          </a:p>
-        </p:txBody>
-      </p:sp>
-      <p:sp>
-        <p:nvSpPr>
-          <p:cNvPr id="5" name="TextBox 4"/>
-          <p:cNvSpPr txBox="1"/>
-          <p:nvPr/>
-        </p:nvSpPr>
-        <p:spPr>
-          <a:xfrm>
-            <a:off x="11094415" y="6446520"/>
-            <a:ext cx="548640" cy="274320"/>
-          </a:xfrm>
-          <a:prstGeom prst="rect">
-            <a:avLst/>
-          </a:prstGeom>
-          <a:noFill/>
-        </p:spPr>
-        <p:txBody>
-          <a:bodyPr wrap="square" anchor="t" lIns="0" rIns="0" tIns="0" bIns="0">
-            <a:spAutoFit/>
-          </a:bodyPr>
-          <a:lstStyle/>
-          <a:p>
-            <a:pPr algn="r"/>
-            <a:r>
-              <a:rPr sz="1000" b="1" i="0">
-                <a:solidFill>
-                  <a:srgbClr val="8F989D"/>
-                </a:solidFill>
-                <a:latin typeface="Calibri"/>
-              </a:rPr>
-              <a:t>22</a:t>
-            </a:r>
-          </a:p>
-        </p:txBody>
-      </p:sp>
-    </p:spTree>
-  </p:cSld>
-  <p:clrMapOvr>
-    <a:masterClrMapping/>
-  </p:clrMapOvr>
-</p:sld>
-</file>
-
-<file path=ppt/slides/slide23.xml><?xml version="1.0" encoding="utf-8"?>
-<p:sld xmlns:a="http://schemas.openxmlformats.org/drawingml/2006/main" xmlns:p="http://schemas.openxmlformats.org/presentationml/2006/main" xmlns:r="http://schemas.openxmlformats.org/officeDocument/2006/relationships">
-  <p:cSld>
-    <p:bg>
-      <p:bgPr>
-        <a:solidFill>
-          <a:srgbClr val="FFFFFF"/>
-        </a:solidFill>
-        <a:effectLst/>
-      </p:bgPr>
-    </p:bg>
-    <p:spTree>
-      <p:nvGrpSpPr>
-        <p:cNvPr id="1" name=""/>
-        <p:cNvGrpSpPr/>
-        <p:nvPr/>
-      </p:nvGrpSpPr>
-      <p:grpSpPr/>
-      <p:sp>
-        <p:nvSpPr>
-          <p:cNvPr id="2" name="Rectangle 1"/>
-          <p:cNvSpPr/>
-          <p:nvPr/>
-        </p:nvSpPr>
-        <p:spPr>
-          <a:xfrm>
-            <a:off x="0" y="0"/>
-            <a:ext cx="12191695" cy="164592"/>
-          </a:xfrm>
-          <a:prstGeom prst="rect">
-            <a:avLst/>
-          </a:prstGeom>
-          <a:solidFill>
-            <a:srgbClr val="007433"/>
-          </a:solidFill>
-          <a:ln>
-            <a:noFill/>
-          </a:ln>
-          <a:effectLst/>
-        </p:spPr>
-        <p:style>
-          <a:lnRef idx="1">
-            <a:schemeClr val="accent1"/>
-          </a:lnRef>
-          <a:fillRef idx="3">
-            <a:schemeClr val="accent1"/>
-          </a:fillRef>
-          <a:effectRef idx="2">
-            <a:schemeClr val="accent1"/>
-          </a:effectRef>
-          <a:fontRef idx="minor">
-            <a:schemeClr val="lt1"/>
-          </a:fontRef>
-        </p:style>
-        <p:txBody>
-          <a:bodyPr rtlCol="0" anchor="ctr"/>
-          <a:lstStyle/>
-          <a:p>
-            <a:pPr algn="ctr"/>
+              <a:rPr sz="1800" b="0" i="0">
+                <a:solidFill>
+                  <a:srgbClr val="2B2B2B"/>
+                </a:solidFill>
+                <a:latin typeface="Calibri"/>
+              </a:rPr>
+              <a:t>Líder Técnico</a:t>
+            </a:r>
+          </a:p>
+          <a:p>
+            <a:pPr>
+              <a:spcAft>
+                <a:spcPts val="1200"/>
+              </a:spcAft>
+            </a:pPr>
+            <a:r>
+              <a:rPr sz="1800" b="0" i="0">
+                <a:solidFill>
+                  <a:srgbClr val="2B2B2B"/>
+                </a:solidFill>
+                <a:latin typeface="Calibri"/>
+              </a:rPr>
+              <a:t>Speaker Tecnológico</a:t>
+            </a:r>
           </a:p>
         </p:txBody>
       </p:sp>
       <p:pic>
         <p:nvPicPr>
-          <p:cNvPr id="3" name="Picture 2" descr="logo_cun_solo.png"/>
+          <p:cNvPr id="5" name="Picture 4" descr="gmail_icon.png"/>
           <p:cNvPicPr>
             <a:picLocks noChangeAspect="1"/>
           </p:cNvPicPr>
@@ -10091,8 +11152,8 @@
         </p:blipFill>
         <p:spPr>
           <a:xfrm>
-            <a:off x="10362895" y="5632704"/>
-            <a:ext cx="1371600" cy="950976"/>
+            <a:off x="2560320" y="4160520"/>
+            <a:ext cx="292608" cy="292608"/>
           </a:xfrm>
           <a:prstGeom prst="rect">
             <a:avLst/>
@@ -10101,14 +11162,14 @@
       </p:pic>
       <p:sp>
         <p:nvSpPr>
-          <p:cNvPr id="4" name="TextBox 3"/>
+          <p:cNvPr id="6" name="TextBox 5"/>
           <p:cNvSpPr txBox="1"/>
           <p:nvPr/>
         </p:nvSpPr>
         <p:spPr>
           <a:xfrm>
-            <a:off x="640080" y="1737360"/>
-            <a:ext cx="10911535" cy="1097280"/>
+            <a:off x="3063239" y="4142232"/>
+            <a:ext cx="8488375" cy="365760"/>
           </a:xfrm>
           <a:prstGeom prst="rect">
             <a:avLst/>
@@ -10121,29 +11182,52 @@
           </a:bodyPr>
           <a:lstStyle/>
           <a:p>
-            <a:pPr algn="ctr"/>
-            <a:r>
-              <a:rPr sz="3400" b="1" i="0">
-                <a:solidFill>
-                  <a:srgbClr val="0C2340"/>
-                </a:solidFill>
-                <a:latin typeface="Calibri"/>
-              </a:rPr>
-              <a:t>Cierre — Sesión 01</a:t>
-            </a:r>
-          </a:p>
-        </p:txBody>
-      </p:sp>
-      <p:sp>
-        <p:nvSpPr>
-          <p:cNvPr id="5" name="TextBox 4"/>
+            <a:r>
+              <a:rPr sz="1600" b="1" i="0">
+                <a:solidFill>
+                  <a:srgbClr val="007433"/>
+                </a:solidFill>
+                <a:latin typeface="Calibri"/>
+              </a:rPr>
+              <a:t>julian_castanoe@cun.edu.co</a:t>
+            </a:r>
+          </a:p>
+        </p:txBody>
+      </p:sp>
+      <p:pic>
+        <p:nvPicPr>
+          <p:cNvPr id="7" name="Picture 6" descr="logo_cun_solo.png"/>
+          <p:cNvPicPr>
+            <a:picLocks noChangeAspect="1"/>
+          </p:cNvPicPr>
+          <p:nvPr/>
+        </p:nvPicPr>
+        <p:blipFill>
+          <a:blip r:embed="rId3"/>
+          <a:stretch>
+            <a:fillRect/>
+          </a:stretch>
+        </p:blipFill>
+        <p:spPr>
+          <a:xfrm>
+            <a:off x="457200" y="5523586"/>
+            <a:ext cx="1463040" cy="1014374"/>
+          </a:xfrm>
+          <a:prstGeom prst="rect">
+            <a:avLst/>
+          </a:prstGeom>
+        </p:spPr>
+      </p:pic>
+      <p:sp>
+        <p:nvSpPr>
+          <p:cNvPr id="8" name="TextBox 7"/>
           <p:cNvSpPr txBox="1"/>
           <p:nvPr/>
         </p:nvSpPr>
         <p:spPr>
           <a:xfrm>
-            <a:off x="640080" y="3017520"/>
-            <a:ext cx="10911535" cy="1645920"/>
+            <a:off x="11094415" y="6446520"/>
+            <a:ext cx="548640" cy="274320"/>
           </a:xfrm>
           <a:prstGeom prst="rect">
             <a:avLst/>
@@ -10156,79 +11240,15 @@
           </a:bodyPr>
           <a:lstStyle/>
           <a:p>
-            <a:pPr algn="ctr">
-              <a:spcAft>
-                <a:spcPts val="600"/>
-              </a:spcAft>
-            </a:pPr>
-            <a:r>
-              <a:rPr sz="1600" b="0" i="0">
-                <a:solidFill>
-                  <a:srgbClr val="2B2B2B"/>
-                </a:solidFill>
-                <a:latin typeface="Calibri"/>
-              </a:rPr>
-              <a:t>Ya sabemos qué haremos, cómo se evalúa y quién es quién.</a:t>
-            </a:r>
-          </a:p>
-          <a:p>
-            <a:pPr algn="ctr">
-              <a:spcAft>
-                <a:spcPts val="600"/>
-              </a:spcAft>
-            </a:pPr>
-            <a:r>
-              <a:rPr sz="1600" b="1" i="0">
-                <a:solidFill>
-                  <a:srgbClr val="2B2B2B"/>
-                </a:solidFill>
-                <a:latin typeface="Calibri"/>
-              </a:rPr>
-              <a:t>Sesión 02:</a:t>
-            </a:r>
-            <a:r>
-              <a:rPr sz="1600" b="0" i="0">
-                <a:solidFill>
-                  <a:srgbClr val="2B2B2B"/>
-                </a:solidFill>
-                <a:latin typeface="Calibri"/>
-              </a:rPr>
-              <a:t> arranca el contenido del curso.</a:t>
-            </a:r>
-          </a:p>
-        </p:txBody>
-      </p:sp>
-      <p:sp>
-        <p:nvSpPr>
-          <p:cNvPr id="6" name="TextBox 5"/>
-          <p:cNvSpPr txBox="1"/>
-          <p:nvPr/>
-        </p:nvSpPr>
-        <p:spPr>
-          <a:xfrm>
-            <a:off x="640080" y="4754880"/>
-            <a:ext cx="10911535" cy="640080"/>
-          </a:xfrm>
-          <a:prstGeom prst="rect">
-            <a:avLst/>
-          </a:prstGeom>
-          <a:noFill/>
-        </p:spPr>
-        <p:txBody>
-          <a:bodyPr wrap="square" anchor="t" lIns="0" rIns="0" tIns="0" bIns="0">
-            <a:spAutoFit/>
-          </a:bodyPr>
-          <a:lstStyle/>
-          <a:p>
-            <a:pPr algn="ctr"/>
-            <a:r>
-              <a:rPr sz="2000" b="1" i="0">
-                <a:solidFill>
-                  <a:srgbClr val="007433"/>
-                </a:solidFill>
-                <a:latin typeface="Calibri"/>
-              </a:rPr>
-              <a:t>CREATIVIDAD Y PENSAMIENTO INNOVADOR</a:t>
+            <a:pPr algn="r"/>
+            <a:r>
+              <a:rPr sz="1000" b="1" i="0">
+                <a:solidFill>
+                  <a:srgbClr val="8F989D"/>
+                </a:solidFill>
+                <a:latin typeface="Calibri"/>
+              </a:rPr>
+              <a:t>3</a:t>
             </a:r>
           </a:p>
         </p:txBody>
@@ -10241,7 +11261,7 @@
 </p:sld>
 </file>
 
-<file path=ppt/slides/slide3.xml><?xml version="1.0" encoding="utf-8"?>
+<file path=ppt/slides/slide4.xml><?xml version="1.0" encoding="utf-8"?>
 <p:sld xmlns:a="http://schemas.openxmlformats.org/drawingml/2006/main" xmlns:p="http://schemas.openxmlformats.org/presentationml/2006/main" xmlns:r="http://schemas.openxmlformats.org/officeDocument/2006/relationships">
   <p:cSld>
     <p:bg>
@@ -10333,315 +11353,6 @@
                 </a:solidFill>
                 <a:latin typeface="Calibri"/>
               </a:rPr>
-              <a:t>Docente</a:t>
-            </a:r>
-          </a:p>
-        </p:txBody>
-      </p:sp>
-      <p:sp>
-        <p:nvSpPr>
-          <p:cNvPr id="4" name="TextBox 3"/>
-          <p:cNvSpPr txBox="1"/>
-          <p:nvPr/>
-        </p:nvSpPr>
-        <p:spPr>
-          <a:xfrm>
-            <a:off x="2560320" y="2148840"/>
-            <a:ext cx="8991295" cy="1874519"/>
-          </a:xfrm>
-          <a:prstGeom prst="rect">
-            <a:avLst/>
-          </a:prstGeom>
-          <a:noFill/>
-        </p:spPr>
-        <p:txBody>
-          <a:bodyPr wrap="square" anchor="t" lIns="0" rIns="0" tIns="0" bIns="0">
-            <a:spAutoFit/>
-          </a:bodyPr>
-          <a:lstStyle/>
-          <a:p>
-            <a:pPr>
-              <a:spcAft>
-                <a:spcPts val="1200"/>
-              </a:spcAft>
-            </a:pPr>
-            <a:r>
-              <a:rPr sz="1800" b="0" i="0">
-                <a:solidFill>
-                  <a:srgbClr val="2B2B2B"/>
-                </a:solidFill>
-                <a:latin typeface="Calibri"/>
-              </a:rPr>
-              <a:t>Ingeniero de Sistemas</a:t>
-            </a:r>
-          </a:p>
-          <a:p>
-            <a:pPr>
-              <a:spcAft>
-                <a:spcPts val="1200"/>
-              </a:spcAft>
-            </a:pPr>
-            <a:r>
-              <a:rPr sz="1800" b="0" i="0">
-                <a:solidFill>
-                  <a:srgbClr val="2B2B2B"/>
-                </a:solidFill>
-                <a:latin typeface="Calibri"/>
-              </a:rPr>
-              <a:t>Candidato a MSc en Inteligencia Artificial</a:t>
-            </a:r>
-          </a:p>
-          <a:p>
-            <a:pPr>
-              <a:spcAft>
-                <a:spcPts val="1200"/>
-              </a:spcAft>
-            </a:pPr>
-            <a:r>
-              <a:rPr sz="1800" b="0" i="0">
-                <a:solidFill>
-                  <a:srgbClr val="2B2B2B"/>
-                </a:solidFill>
-                <a:latin typeface="Calibri"/>
-              </a:rPr>
-              <a:t>Líder Técnico</a:t>
-            </a:r>
-          </a:p>
-          <a:p>
-            <a:pPr>
-              <a:spcAft>
-                <a:spcPts val="1200"/>
-              </a:spcAft>
-            </a:pPr>
-            <a:r>
-              <a:rPr sz="1800" b="0" i="0">
-                <a:solidFill>
-                  <a:srgbClr val="2B2B2B"/>
-                </a:solidFill>
-                <a:latin typeface="Calibri"/>
-              </a:rPr>
-              <a:t>Speaker Tecnológico</a:t>
-            </a:r>
-          </a:p>
-        </p:txBody>
-      </p:sp>
-      <p:pic>
-        <p:nvPicPr>
-          <p:cNvPr id="5" name="Picture 4" descr="gmail_icon.png"/>
-          <p:cNvPicPr>
-            <a:picLocks noChangeAspect="1"/>
-          </p:cNvPicPr>
-          <p:nvPr/>
-        </p:nvPicPr>
-        <p:blipFill>
-          <a:blip r:embed="rId2"/>
-          <a:stretch>
-            <a:fillRect/>
-          </a:stretch>
-        </p:blipFill>
-        <p:spPr>
-          <a:xfrm>
-            <a:off x="2560320" y="4160520"/>
-            <a:ext cx="292608" cy="292608"/>
-          </a:xfrm>
-          <a:prstGeom prst="rect">
-            <a:avLst/>
-          </a:prstGeom>
-        </p:spPr>
-      </p:pic>
-      <p:sp>
-        <p:nvSpPr>
-          <p:cNvPr id="6" name="TextBox 5"/>
-          <p:cNvSpPr txBox="1"/>
-          <p:nvPr/>
-        </p:nvSpPr>
-        <p:spPr>
-          <a:xfrm>
-            <a:off x="3063239" y="4142232"/>
-            <a:ext cx="8488375" cy="365760"/>
-          </a:xfrm>
-          <a:prstGeom prst="rect">
-            <a:avLst/>
-          </a:prstGeom>
-          <a:noFill/>
-        </p:spPr>
-        <p:txBody>
-          <a:bodyPr wrap="square" anchor="ctr" lIns="0" rIns="0" tIns="0" bIns="0">
-            <a:spAutoFit/>
-          </a:bodyPr>
-          <a:lstStyle/>
-          <a:p>
-            <a:r>
-              <a:rPr sz="1600" b="1" i="0">
-                <a:solidFill>
-                  <a:srgbClr val="007433"/>
-                </a:solidFill>
-                <a:latin typeface="Calibri"/>
-              </a:rPr>
-              <a:t>julian_castanoe@cun.edu.co</a:t>
-            </a:r>
-          </a:p>
-        </p:txBody>
-      </p:sp>
-      <p:pic>
-        <p:nvPicPr>
-          <p:cNvPr id="7" name="Picture 6" descr="logo_cun_solo.png"/>
-          <p:cNvPicPr>
-            <a:picLocks noChangeAspect="1"/>
-          </p:cNvPicPr>
-          <p:nvPr/>
-        </p:nvPicPr>
-        <p:blipFill>
-          <a:blip r:embed="rId3"/>
-          <a:stretch>
-            <a:fillRect/>
-          </a:stretch>
-        </p:blipFill>
-        <p:spPr>
-          <a:xfrm>
-            <a:off x="457200" y="5523586"/>
-            <a:ext cx="1463040" cy="1014374"/>
-          </a:xfrm>
-          <a:prstGeom prst="rect">
-            <a:avLst/>
-          </a:prstGeom>
-        </p:spPr>
-      </p:pic>
-      <p:sp>
-        <p:nvSpPr>
-          <p:cNvPr id="8" name="TextBox 7"/>
-          <p:cNvSpPr txBox="1"/>
-          <p:nvPr/>
-        </p:nvSpPr>
-        <p:spPr>
-          <a:xfrm>
-            <a:off x="11094415" y="6446520"/>
-            <a:ext cx="548640" cy="274320"/>
-          </a:xfrm>
-          <a:prstGeom prst="rect">
-            <a:avLst/>
-          </a:prstGeom>
-          <a:noFill/>
-        </p:spPr>
-        <p:txBody>
-          <a:bodyPr wrap="square" anchor="t" lIns="0" rIns="0" tIns="0" bIns="0">
-            <a:spAutoFit/>
-          </a:bodyPr>
-          <a:lstStyle/>
-          <a:p>
-            <a:pPr algn="r"/>
-            <a:r>
-              <a:rPr sz="1000" b="1" i="0">
-                <a:solidFill>
-                  <a:srgbClr val="8F989D"/>
-                </a:solidFill>
-                <a:latin typeface="Calibri"/>
-              </a:rPr>
-              <a:t>3</a:t>
-            </a:r>
-          </a:p>
-        </p:txBody>
-      </p:sp>
-    </p:spTree>
-  </p:cSld>
-  <p:clrMapOvr>
-    <a:masterClrMapping/>
-  </p:clrMapOvr>
-</p:sld>
-</file>
-
-<file path=ppt/slides/slide4.xml><?xml version="1.0" encoding="utf-8"?>
-<p:sld xmlns:a="http://schemas.openxmlformats.org/drawingml/2006/main" xmlns:p="http://schemas.openxmlformats.org/presentationml/2006/main" xmlns:r="http://schemas.openxmlformats.org/officeDocument/2006/relationships">
-  <p:cSld>
-    <p:bg>
-      <p:bgPr>
-        <a:solidFill>
-          <a:srgbClr val="FFFFFF"/>
-        </a:solidFill>
-        <a:effectLst/>
-      </p:bgPr>
-    </p:bg>
-    <p:spTree>
-      <p:nvGrpSpPr>
-        <p:cNvPr id="1" name=""/>
-        <p:cNvGrpSpPr/>
-        <p:nvPr/>
-      </p:nvGrpSpPr>
-      <p:grpSpPr/>
-      <p:sp>
-        <p:nvSpPr>
-          <p:cNvPr id="2" name="Rectangle 1"/>
-          <p:cNvSpPr/>
-          <p:nvPr/>
-        </p:nvSpPr>
-        <p:spPr>
-          <a:xfrm>
-            <a:off x="0" y="0"/>
-            <a:ext cx="12191695" cy="1188720"/>
-          </a:xfrm>
-          <a:prstGeom prst="rect">
-            <a:avLst/>
-          </a:prstGeom>
-          <a:solidFill>
-            <a:srgbClr val="0C2340"/>
-          </a:solidFill>
-          <a:ln>
-            <a:noFill/>
-          </a:ln>
-          <a:effectLst/>
-        </p:spPr>
-        <p:style>
-          <a:lnRef idx="1">
-            <a:schemeClr val="accent1"/>
-          </a:lnRef>
-          <a:fillRef idx="3">
-            <a:schemeClr val="accent1"/>
-          </a:fillRef>
-          <a:effectRef idx="2">
-            <a:schemeClr val="accent1"/>
-          </a:effectRef>
-          <a:fontRef idx="minor">
-            <a:schemeClr val="lt1"/>
-          </a:fontRef>
-        </p:style>
-        <p:txBody>
-          <a:bodyPr rtlCol="0" anchor="ctr"/>
-          <a:lstStyle/>
-          <a:p>
-            <a:pPr algn="ctr"/>
-          </a:p>
-        </p:txBody>
-      </p:sp>
-      <p:sp>
-        <p:nvSpPr>
-          <p:cNvPr id="3" name="TextBox 2"/>
-          <p:cNvSpPr txBox="1"/>
-          <p:nvPr/>
-        </p:nvSpPr>
-        <p:spPr>
-          <a:xfrm>
-            <a:off x="640080" y="0"/>
-            <a:ext cx="9082735" cy="1188720"/>
-          </a:xfrm>
-          <a:prstGeom prst="rect">
-            <a:avLst/>
-          </a:prstGeom>
-          <a:noFill/>
-        </p:spPr>
-        <p:txBody>
-          <a:bodyPr wrap="square" anchor="ctr" lIns="0" rIns="0" tIns="0" bIns="0">
-            <a:spAutoFit/>
-          </a:bodyPr>
-          <a:lstStyle/>
-          <a:p>
-            <a:pPr algn="ctr"/>
-            <a:r>
-              <a:rPr sz="2600" b="1" i="0">
-                <a:solidFill>
-                  <a:srgbClr val="FFFFFF"/>
-                </a:solidFill>
-                <a:latin typeface="Calibri"/>
-              </a:rPr>
               <a:t>PRESÉNTATE — ROMPEHIELOS</a:t>
             </a:r>
           </a:p>
@@ -10677,7 +11388,7 @@
                 </a:solidFill>
                 <a:latin typeface="Calibri"/>
               </a:rPr>
-              <a:t>Preséntate: quién eres y qué esperas del curso</a:t>
+              <a:t>Formulario de Google · encuestas y Q&amp;A en el propio Meet</a:t>
             </a:r>
           </a:p>
         </p:txBody>
@@ -10710,7 +11421,7 @@
               </a:spcAft>
             </a:pPr>
             <a:r>
-              <a:rPr sz="1400" b="0" i="0">
+              <a:rPr sz="1300" b="0" i="0">
                 <a:solidFill>
                   <a:srgbClr val="2B2B2B"/>
                 </a:solidFill>
@@ -10719,22 +11430,22 @@
               <a:t>–   </a:t>
             </a:r>
             <a:r>
-              <a:rPr sz="1400" b="1" i="0">
-                <a:solidFill>
-                  <a:srgbClr val="2B2B2B"/>
-                </a:solidFill>
-                <a:latin typeface="Calibri"/>
-              </a:rPr>
-              <a:t>Escanea o abre:</a:t>
-            </a:r>
-            <a:r>
-              <a:rPr sz="1400" b="0" i="0">
-                <a:solidFill>
-                  <a:srgbClr val="2B2B2B"/>
-                </a:solidFill>
-                <a:latin typeface="Calibri"/>
-              </a:rPr>
-              <a:t> https://padlet.com/andres_dfx/cun-wruz81hmf9k06gd7</a:t>
+              <a:rPr sz="1300" b="1" i="0">
+                <a:solidFill>
+                  <a:srgbClr val="2B2B2B"/>
+                </a:solidFill>
+                <a:latin typeface="Calibri"/>
+              </a:rPr>
+              <a:t>Escanea el QR o abre:</a:t>
+            </a:r>
+            <a:r>
+              <a:rPr sz="1300" b="0" i="0">
+                <a:solidFill>
+                  <a:srgbClr val="2B2B2B"/>
+                </a:solidFill>
+                <a:latin typeface="Calibri"/>
+              </a:rPr>
+              <a:t> [URL Formulario Preséntate — pendiente · CREATIVIDAD Y PENSAMIENTO INNOVADOR]</a:t>
             </a:r>
           </a:p>
           <a:p>
@@ -10744,16 +11455,34 @@
               </a:spcAft>
             </a:pPr>
             <a:r>
-              <a:rPr sz="1400" b="0" i="0">
-                <a:solidFill>
-                  <a:srgbClr val="2B2B2B"/>
-                </a:solidFill>
-                <a:latin typeface="Calibri"/>
-              </a:rPr>
-              <a:t>–   En un post-it escribe: </a:t>
-            </a:r>
-            <a:r>
-              <a:rPr sz="1400" b="1" i="0">
+              <a:rPr sz="1300" b="0" i="0">
+                <a:solidFill>
+                  <a:srgbClr val="2B2B2B"/>
+                </a:solidFill>
+                <a:latin typeface="Calibri"/>
+              </a:rPr>
+              <a:t>–   </a:t>
+            </a:r>
+            <a:r>
+              <a:rPr sz="1300" b="1" i="0">
+                <a:solidFill>
+                  <a:srgbClr val="2B2B2B"/>
+                </a:solidFill>
+                <a:latin typeface="Calibri"/>
+              </a:rPr>
+              <a:t>Qué respondes (1 min):</a:t>
+            </a:r>
+            <a:r>
+              <a:rPr sz="1300" b="0" i="0">
+                <a:solidFill>
+                  <a:srgbClr val="2B2B2B"/>
+                </a:solidFill>
+                <a:latin typeface="Calibri"/>
+              </a:rPr>
+              <a:t> tu </a:t>
+            </a:r>
+            <a:r>
+              <a:rPr sz="1300" b="1" i="0">
                 <a:solidFill>
                   <a:srgbClr val="2B2B2B"/>
                 </a:solidFill>
@@ -10762,49 +11491,49 @@
               <a:t>nombre</a:t>
             </a:r>
             <a:r>
-              <a:rPr sz="1400" b="0" i="0">
-                <a:solidFill>
-                  <a:srgbClr val="2B2B2B"/>
-                </a:solidFill>
-                <a:latin typeface="Calibri"/>
-              </a:rPr>
-              <a:t> + </a:t>
-            </a:r>
-            <a:r>
-              <a:rPr sz="1400" b="1" i="0">
-                <a:solidFill>
-                  <a:srgbClr val="2B2B2B"/>
-                </a:solidFill>
-                <a:latin typeface="Calibri"/>
-              </a:rPr>
-              <a:t>expectativa del curso</a:t>
-            </a:r>
-            <a:r>
-              <a:rPr sz="1400" b="0" i="0">
-                <a:solidFill>
-                  <a:srgbClr val="2B2B2B"/>
-                </a:solidFill>
-                <a:latin typeface="Calibri"/>
-              </a:rPr>
-              <a:t> o </a:t>
-            </a:r>
-            <a:r>
-              <a:rPr sz="1400" b="1" i="0">
-                <a:solidFill>
-                  <a:srgbClr val="2B2B2B"/>
-                </a:solidFill>
-                <a:latin typeface="Calibri"/>
-              </a:rPr>
-              <a:t>tema de interés</a:t>
-            </a:r>
-            <a:r>
-              <a:rPr sz="1400" b="0" i="0">
-                <a:solidFill>
-                  <a:srgbClr val="2B2B2B"/>
-                </a:solidFill>
-                <a:latin typeface="Calibri"/>
-              </a:rPr>
-              <a:t> (1 frase).</a:t>
+              <a:rPr sz="1300" b="0" i="0">
+                <a:solidFill>
+                  <a:srgbClr val="2B2B2B"/>
+                </a:solidFill>
+                <a:latin typeface="Calibri"/>
+              </a:rPr>
+              <a:t> + expectativa del curso + </a:t>
+            </a:r>
+            <a:r>
+              <a:rPr sz="1300" b="1" i="0">
+                <a:solidFill>
+                  <a:srgbClr val="2B2B2B"/>
+                </a:solidFill>
+                <a:latin typeface="Calibri"/>
+              </a:rPr>
+              <a:t>tema/problema</a:t>
+            </a:r>
+            <a:r>
+              <a:rPr sz="1300" b="0" i="0">
+                <a:solidFill>
+                  <a:srgbClr val="2B2B2B"/>
+                </a:solidFill>
+                <a:latin typeface="Calibri"/>
+              </a:rPr>
+              <a:t> de interés. Entras con tu correo </a:t>
+            </a:r>
+            <a:r>
+              <a:rPr sz="1300" b="1" i="0">
+                <a:solidFill>
+                  <a:srgbClr val="2B2B2B"/>
+                </a:solidFill>
+                <a:latin typeface="Calibri"/>
+              </a:rPr>
+              <a:t>@cun.edu.co</a:t>
+            </a:r>
+            <a:r>
+              <a:rPr sz="1300" b="0" i="0">
+                <a:solidFill>
+                  <a:srgbClr val="2B2B2B"/>
+                </a:solidFill>
+                <a:latin typeface="Calibri"/>
+              </a:rPr>
+              <a:t>: no hay que crear cuenta ni instalar nada.</a:t>
             </a:r>
           </a:p>
           <a:p>
@@ -10814,31 +11543,31 @@
               </a:spcAft>
             </a:pPr>
             <a:r>
-              <a:rPr sz="1400" b="0" i="0">
-                <a:solidFill>
-                  <a:srgbClr val="2B2B2B"/>
-                </a:solidFill>
-                <a:latin typeface="Calibri"/>
-              </a:rPr>
-              <a:t>–   Tablero oficial: </a:t>
-            </a:r>
-            <a:r>
-              <a:rPr sz="1400" b="1" i="0">
-                <a:solidFill>
-                  <a:srgbClr val="2B2B2B"/>
-                </a:solidFill>
-                <a:latin typeface="Calibri"/>
-              </a:rPr>
-              <a:t>Padlet</a:t>
-            </a:r>
-            <a:r>
-              <a:rPr sz="1400" b="0" i="0">
-                <a:solidFill>
-                  <a:srgbClr val="2B2B2B"/>
-                </a:solidFill>
-                <a:latin typeface="Calibri"/>
-              </a:rPr>
-              <a:t> (mismo enlace en los 5 cursos).</a:t>
+              <a:rPr sz="1300" b="0" i="0">
+                <a:solidFill>
+                  <a:srgbClr val="2B2B2B"/>
+                </a:solidFill>
+                <a:latin typeface="Calibri"/>
+              </a:rPr>
+              <a:t>–   </a:t>
+            </a:r>
+            <a:r>
+              <a:rPr sz="1300" b="1" i="0">
+                <a:solidFill>
+                  <a:srgbClr val="2B2B2B"/>
+                </a:solidFill>
+                <a:latin typeface="Calibri"/>
+              </a:rPr>
+              <a:t>Ahora, ~3 min.</a:t>
+            </a:r>
+            <a:r>
+              <a:rPr sz="1300" b="0" i="0">
+                <a:solidFill>
+                  <a:srgbClr val="2B2B2B"/>
+                </a:solidFill>
+                <a:latin typeface="Calibri"/>
+              </a:rPr>
+              <a:t> Somos 50: no alcanzamos a presentarnos uno por uno, así que el formulario nos ordena.</a:t>
             </a:r>
           </a:p>
           <a:p>
@@ -10848,13 +11577,171 @@
               </a:spcAft>
             </a:pPr>
             <a:r>
-              <a:rPr sz="1400" b="0" i="0">
-                <a:solidFill>
-                  <a:srgbClr val="2B2B2B"/>
-                </a:solidFill>
-                <a:latin typeface="Calibri"/>
-              </a:rPr>
-              <a:t>–   Ahora (~7 min). Leemos juntos 3–4 notas (sin juzgar).</a:t>
+              <a:rPr sz="1300" b="0" i="0">
+                <a:solidFill>
+                  <a:srgbClr val="2B2B2B"/>
+                </a:solidFill>
+                <a:latin typeface="Calibri"/>
+              </a:rPr>
+              <a:t>–   </a:t>
+            </a:r>
+            <a:r>
+              <a:rPr sz="1300" b="1" i="0">
+                <a:solidFill>
+                  <a:srgbClr val="2B2B2B"/>
+                </a:solidFill>
+                <a:latin typeface="Calibri"/>
+              </a:rPr>
+              <a:t>Con eso, hoy:</a:t>
+            </a:r>
+            <a:r>
+              <a:rPr sz="1300" b="0" i="0">
+                <a:solidFill>
+                  <a:srgbClr val="2B2B2B"/>
+                </a:solidFill>
+                <a:latin typeface="Calibri"/>
+              </a:rPr>
+              <a:t> el Docente lee en voz alta </a:t>
+            </a:r>
+            <a:r>
+              <a:rPr sz="1300" b="1" i="0">
+                <a:solidFill>
+                  <a:srgbClr val="2B2B2B"/>
+                </a:solidFill>
+                <a:latin typeface="Calibri"/>
+              </a:rPr>
+              <a:t>5 o 6 respuestas</a:t>
+            </a:r>
+            <a:r>
+              <a:rPr sz="1300" b="0" i="0">
+                <a:solidFill>
+                  <a:srgbClr val="2B2B2B"/>
+                </a:solidFill>
+                <a:latin typeface="Calibri"/>
+              </a:rPr>
+              <a:t> y proyecta el </a:t>
+            </a:r>
+            <a:r>
+              <a:rPr sz="1300" b="1" i="0">
+                <a:solidFill>
+                  <a:srgbClr val="2B2B2B"/>
+                </a:solidFill>
+                <a:latin typeface="Calibri"/>
+              </a:rPr>
+              <a:t>resumen</a:t>
+            </a:r>
+            <a:r>
+              <a:rPr sz="1300" b="0" i="0">
+                <a:solidFill>
+                  <a:srgbClr val="2B2B2B"/>
+                </a:solidFill>
+                <a:latin typeface="Calibri"/>
+              </a:rPr>
+              <a:t> del formulario — ahí quedan todas a la vista, no solo las leídas.</a:t>
+            </a:r>
+          </a:p>
+          <a:p>
+            <a:pPr>
+              <a:spcAft>
+                <a:spcPts val="1000"/>
+              </a:spcAft>
+            </a:pPr>
+            <a:r>
+              <a:rPr sz="1300" b="0" i="0">
+                <a:solidFill>
+                  <a:srgbClr val="2B2B2B"/>
+                </a:solidFill>
+                <a:latin typeface="Calibri"/>
+              </a:rPr>
+              <a:t>–   </a:t>
+            </a:r>
+            <a:r>
+              <a:rPr sz="1300" b="1" i="0">
+                <a:solidFill>
+                  <a:srgbClr val="2B2B2B"/>
+                </a:solidFill>
+                <a:latin typeface="Calibri"/>
+              </a:rPr>
+              <a:t>En vivo:</a:t>
+            </a:r>
+            <a:r>
+              <a:rPr sz="1300" b="0" i="0">
+                <a:solidFill>
+                  <a:srgbClr val="2B2B2B"/>
+                </a:solidFill>
+                <a:latin typeface="Calibri"/>
+              </a:rPr>
+              <a:t> las preguntas y las votaciones van por la </a:t>
+            </a:r>
+            <a:r>
+              <a:rPr sz="1300" b="1" i="0">
+                <a:solidFill>
+                  <a:srgbClr val="2B2B2B"/>
+                </a:solidFill>
+                <a:latin typeface="Calibri"/>
+              </a:rPr>
+              <a:t>encuesta</a:t>
+            </a:r>
+            <a:r>
+              <a:rPr sz="1300" b="0" i="0">
+                <a:solidFill>
+                  <a:srgbClr val="2B2B2B"/>
+                </a:solidFill>
+                <a:latin typeface="Calibri"/>
+              </a:rPr>
+              <a:t> y el </a:t>
+            </a:r>
+            <a:r>
+              <a:rPr sz="1300" b="1" i="0">
+                <a:solidFill>
+                  <a:srgbClr val="2B2B2B"/>
+                </a:solidFill>
+                <a:latin typeface="Calibri"/>
+              </a:rPr>
+              <a:t>Q&amp;A</a:t>
+            </a:r>
+            <a:r>
+              <a:rPr sz="1300" b="0" i="0">
+                <a:solidFill>
+                  <a:srgbClr val="2B2B2B"/>
+                </a:solidFill>
+                <a:latin typeface="Calibri"/>
+              </a:rPr>
+              <a:t> del propio Meet; no hay que abrir ninguna otra plataforma.</a:t>
+            </a:r>
+          </a:p>
+          <a:p>
+            <a:pPr>
+              <a:spcAft>
+                <a:spcPts val="1000"/>
+              </a:spcAft>
+            </a:pPr>
+            <a:r>
+              <a:rPr sz="1300" b="0" i="0">
+                <a:solidFill>
+                  <a:srgbClr val="2B2B2B"/>
+                </a:solidFill>
+                <a:latin typeface="Calibri"/>
+              </a:rPr>
+              <a:t>–   </a:t>
+            </a:r>
+            <a:r>
+              <a:rPr sz="1300" b="1" i="0">
+                <a:solidFill>
+                  <a:srgbClr val="2B2B2B"/>
+                </a:solidFill>
+                <a:latin typeface="Calibri"/>
+              </a:rPr>
+              <a:t>Después:</a:t>
+            </a:r>
+            <a:r>
+              <a:rPr sz="1300" b="0" i="0">
+                <a:solidFill>
+                  <a:srgbClr val="2B2B2B"/>
+                </a:solidFill>
+                <a:latin typeface="Calibri"/>
+              </a:rPr>
+              <a:t> las respuestas quedan en una hoja que el Docente usa todo el periodo (equipos, ejemplos y seguimiento).</a:t>
             </a:r>
           </a:p>
         </p:txBody>
@@ -10903,40 +11790,16 @@
           </a:p>
         </p:txBody>
       </p:sp>
-      <p:pic>
-        <p:nvPicPr>
-          <p:cNvPr id="7" name="Picture 6" descr="qr_presentacion_estudiantes.png"/>
-          <p:cNvPicPr>
-            <a:picLocks noChangeAspect="1"/>
-          </p:cNvPicPr>
+      <p:sp>
+        <p:nvSpPr>
+          <p:cNvPr id="7" name="TextBox 6"/>
+          <p:cNvSpPr txBox="1"/>
           <p:nvPr/>
-        </p:nvPicPr>
-        <p:blipFill>
-          <a:blip r:embed="rId2"/>
-          <a:stretch>
-            <a:fillRect/>
-          </a:stretch>
-        </p:blipFill>
+        </p:nvSpPr>
         <p:spPr>
           <a:xfrm>
-            <a:off x="8442655" y="2103120"/>
-            <a:ext cx="3108960" cy="3108960"/>
-          </a:xfrm>
-          <a:prstGeom prst="rect">
-            <a:avLst/>
-          </a:prstGeom>
-        </p:spPr>
-      </p:pic>
-      <p:sp>
-        <p:nvSpPr>
-          <p:cNvPr id="8" name="TextBox 7"/>
-          <p:cNvSpPr txBox="1"/>
-          <p:nvPr/>
-        </p:nvSpPr>
-        <p:spPr>
-          <a:xfrm>
-            <a:off x="8332927" y="5230367"/>
-            <a:ext cx="3328415" cy="256032"/>
+            <a:off x="8579815" y="2926079"/>
+            <a:ext cx="2834640" cy="1463040"/>
           </a:xfrm>
           <a:prstGeom prst="rect">
             <a:avLst/>
@@ -10944,34 +11807,50 @@
           <a:noFill/>
         </p:spPr>
         <p:txBody>
-          <a:bodyPr wrap="square" anchor="t" lIns="0" rIns="0" tIns="0" bIns="0">
+          <a:bodyPr wrap="square" anchor="ctr" lIns="0" rIns="0" tIns="0" bIns="0">
             <a:spAutoFit/>
           </a:bodyPr>
           <a:lstStyle/>
           <a:p>
             <a:pPr algn="ctr"/>
             <a:r>
-              <a:rPr sz="1200" b="1" i="0">
+              <a:rPr sz="1800" b="1" i="0">
                 <a:solidFill>
                   <a:srgbClr val="0C2340"/>
                 </a:solidFill>
                 <a:latin typeface="Calibri"/>
               </a:rPr>
-              <a:t>Escanea o abre</a:t>
-            </a:r>
-          </a:p>
-        </p:txBody>
-      </p:sp>
-      <p:sp>
-        <p:nvSpPr>
-          <p:cNvPr id="9" name="TextBox 8"/>
+              <a:t>QR pendiente</a:t>
+            </a:r>
+          </a:p>
+          <a:p>
+            <a:pPr algn="ctr">
+              <a:spcBef>
+                <a:spcPts val="1000"/>
+              </a:spcBef>
+            </a:pPr>
+            <a:r>
+              <a:rPr sz="1200" b="0" i="0">
+                <a:solidFill>
+                  <a:srgbClr val="2B2B2B"/>
+                </a:solidFill>
+                <a:latin typeface="Calibri"/>
+              </a:rPr>
+              <a:t>Se genera cuando el formulario tenga enlace real.</a:t>
+            </a:r>
+          </a:p>
+        </p:txBody>
+      </p:sp>
+      <p:sp>
+        <p:nvSpPr>
+          <p:cNvPr id="8" name="TextBox 7"/>
           <p:cNvSpPr txBox="1"/>
           <p:nvPr/>
         </p:nvSpPr>
         <p:spPr>
           <a:xfrm>
-            <a:off x="8332927" y="5468112"/>
-            <a:ext cx="3328415" cy="411480"/>
+            <a:off x="8332927" y="5230367"/>
+            <a:ext cx="3328415" cy="640080"/>
           </a:xfrm>
           <a:prstGeom prst="rect">
             <a:avLst/>
@@ -10992,14 +11871,14 @@
                 </a:solidFill>
                 <a:latin typeface="Calibri"/>
               </a:rPr>
-              <a:t>https://padlet.com/andres_dfx/cun-wruz81hmf9k06gd7</a:t>
-            </a:r>
-          </a:p>
-        </p:txBody>
-      </p:sp>
-      <p:sp>
-        <p:nvSpPr>
-          <p:cNvPr id="10" name="TextBox 9"/>
+              <a:t>[URL Formulario Preséntate — pendiente · CREATIVIDAD Y PENSAMIENTO INNOVADOR]</a:t>
+            </a:r>
+          </a:p>
+        </p:txBody>
+      </p:sp>
+      <p:sp>
+        <p:nvSpPr>
+          <p:cNvPr id="9" name="TextBox 8"/>
           <p:cNvSpPr txBox="1"/>
           <p:nvPr/>
         </p:nvSpPr>
@@ -12425,7 +13304,7 @@
                 </a:solidFill>
                 <a:latin typeface="Calibri"/>
               </a:rPr>
-              <a:t>Cómo trabajamos: una hora juntos, el resto por su cuenta</a:t>
+              <a:t>Preséntate: el formulario del curso (2 minutos)</a:t>
             </a:r>
           </a:p>
         </p:txBody>
@@ -12464,7 +13343,7 @@
                 </a:solidFill>
                 <a:latin typeface="Calibri"/>
               </a:rPr>
-              <a:t>–   El curso son </a:t>
+              <a:t>–   En el grupo hay </a:t>
             </a:r>
             <a:r>
               <a:rPr sz="1600" b="1" i="0">
@@ -12473,7 +13352,7 @@
                 </a:solidFill>
                 <a:latin typeface="Calibri"/>
               </a:rPr>
-              <a:t>2 créditos</a:t>
+              <a:t>50 matriculados</a:t>
             </a:r>
             <a:r>
               <a:rPr sz="1600" b="0" i="0">
@@ -12482,7 +13361,23 @@
                 </a:solidFill>
                 <a:latin typeface="Calibri"/>
               </a:rPr>
-              <a:t>: unas </a:t>
+              <a:t>. Un muro con 50 notas no se lee en una hora de clase: nadie alcanza a ser visto.</a:t>
+            </a:r>
+          </a:p>
+          <a:p>
+            <a:pPr>
+              <a:spcAft>
+                <a:spcPts val="1000"/>
+              </a:spcAft>
+            </a:pPr>
+            <a:r>
+              <a:rPr sz="1600" b="0" i="0">
+                <a:solidFill>
+                  <a:srgbClr val="2B2B2B"/>
+                </a:solidFill>
+                <a:latin typeface="Calibri"/>
+              </a:rPr>
+              <a:t>–   Por eso nos presentamos en un </a:t>
             </a:r>
             <a:r>
               <a:rPr sz="1600" b="1" i="0">
@@ -12491,7 +13386,7 @@
                 </a:solidFill>
                 <a:latin typeface="Calibri"/>
               </a:rPr>
-              <a:t>32 horas</a:t>
+              <a:t>formulario de Google</a:t>
             </a:r>
             <a:r>
               <a:rPr sz="1600" b="0" i="0">
@@ -12500,25 +13395,7 @@
                 </a:solidFill>
                 <a:latin typeface="Calibri"/>
               </a:rPr>
-              <a:t> de acompañamiento y unas </a:t>
-            </a:r>
-            <a:r>
-              <a:rPr sz="1600" b="1" i="0">
-                <a:solidFill>
-                  <a:srgbClr val="2B2B2B"/>
-                </a:solidFill>
-                <a:latin typeface="Calibri"/>
-              </a:rPr>
-              <a:t>64 horas</a:t>
-            </a:r>
-            <a:r>
-              <a:rPr sz="1600" b="0" i="0">
-                <a:solidFill>
-                  <a:srgbClr val="2B2B2B"/>
-                </a:solidFill>
-                <a:latin typeface="Calibri"/>
-              </a:rPr>
-              <a:t> de trabajo autónomo.</a:t>
+              <a:t>, que el Docente pega en el chat del Meet y queda en el LEEME de `Clases/`.</a:t>
             </a:r>
           </a:p>
           <a:p>
@@ -12534,7 +13411,7 @@
                 </a:solidFill>
                 <a:latin typeface="Calibri"/>
               </a:rPr>
-              <a:t>●   Traducción honesta: lo que decide su nota </a:t>
+              <a:t>●   </a:t>
             </a:r>
             <a:r>
               <a:rPr sz="1500" b="1" i="0">
@@ -12543,7 +13420,7 @@
                 </a:solidFill>
                 <a:latin typeface="Calibri"/>
               </a:rPr>
-              <a:t>no pasa en la hora de clase</a:t>
+              <a:t>Enlace:</a:t>
             </a:r>
             <a:r>
               <a:rPr sz="1500" b="0" i="0">
@@ -12552,7 +13429,41 @@
                 </a:solidFill>
                 <a:latin typeface="Calibri"/>
               </a:rPr>
-              <a:t>, pasa entre semana.</a:t>
+              <a:t> [URL Formulario «Preséntate» — pendiente]</a:t>
+            </a:r>
+          </a:p>
+          <a:p>
+            <a:pPr lvl="1">
+              <a:spcAft>
+                <a:spcPts val="600"/>
+              </a:spcAft>
+            </a:pPr>
+            <a:r>
+              <a:rPr sz="1500" b="0" i="0">
+                <a:solidFill>
+                  <a:srgbClr val="2B2B2B"/>
+                </a:solidFill>
+                <a:latin typeface="Calibri"/>
+              </a:rPr>
+              <a:t>●   Se entra con su correo </a:t>
+            </a:r>
+            <a:r>
+              <a:rPr sz="1500" b="1" i="0">
+                <a:solidFill>
+                  <a:srgbClr val="2B2B2B"/>
+                </a:solidFill>
+                <a:latin typeface="Calibri"/>
+              </a:rPr>
+              <a:t>@cun.edu.co</a:t>
+            </a:r>
+            <a:r>
+              <a:rPr sz="1500" b="0" i="0">
+                <a:solidFill>
+                  <a:srgbClr val="2B2B2B"/>
+                </a:solidFill>
+                <a:latin typeface="Calibri"/>
+              </a:rPr>
+              <a:t>: sin registrarse en nada nuevo, sin instalar nada y sin costo.</a:t>
             </a:r>
           </a:p>
           <a:p>
@@ -12568,7 +13479,7 @@
                 </a:solidFill>
                 <a:latin typeface="Calibri"/>
               </a:rPr>
-              <a:t>–   El encuentro sincrónico es de </a:t>
+              <a:t>–   </a:t>
             </a:r>
             <a:r>
               <a:rPr sz="1600" b="1" i="0">
@@ -12577,7 +13488,7 @@
                 </a:solidFill>
                 <a:latin typeface="Calibri"/>
               </a:rPr>
-              <a:t>una hora</a:t>
+              <a:t>Qué responde</a:t>
             </a:r>
             <a:r>
               <a:rPr sz="1600" b="0" i="0">
@@ -12586,59 +13497,25 @@
                 </a:solidFill>
                 <a:latin typeface="Calibri"/>
               </a:rPr>
-              <a:t>. No alcanza para dictar todo y además hacer el taller.</a:t>
-            </a:r>
-          </a:p>
-          <a:p>
-            <a:pPr lvl="1">
-              <a:spcAft>
-                <a:spcPts val="600"/>
-              </a:spcAft>
-            </a:pPr>
-            <a:r>
-              <a:rPr sz="1500" b="0" i="0">
-                <a:solidFill>
-                  <a:srgbClr val="2B2B2B"/>
-                </a:solidFill>
-                <a:latin typeface="Calibri"/>
-              </a:rPr>
-              <a:t>●   Por eso trabajamos en </a:t>
-            </a:r>
-            <a:r>
-              <a:rPr sz="1500" b="1" i="0">
-                <a:solidFill>
-                  <a:srgbClr val="2B2B2B"/>
-                </a:solidFill>
-                <a:latin typeface="Calibri"/>
-              </a:rPr>
-              <a:t>aula invertida</a:t>
-            </a:r>
-            <a:r>
-              <a:rPr sz="1500" b="0" i="0">
-                <a:solidFill>
-                  <a:srgbClr val="2B2B2B"/>
-                </a:solidFill>
-                <a:latin typeface="Calibri"/>
-              </a:rPr>
-              <a:t>: usted llega leído y la hora se usa para </a:t>
-            </a:r>
-            <a:r>
-              <a:rPr sz="1500" b="1" i="0">
-                <a:solidFill>
-                  <a:srgbClr val="2B2B2B"/>
-                </a:solidFill>
-                <a:latin typeface="Calibri"/>
-              </a:rPr>
-              <a:t>aplicar</a:t>
-            </a:r>
-            <a:r>
-              <a:rPr sz="1500" b="0" i="0">
-                <a:solidFill>
-                  <a:srgbClr val="2B2B2B"/>
-                </a:solidFill>
-                <a:latin typeface="Calibri"/>
-              </a:rPr>
-              <a:t>, no para leerle diapositivas.</a:t>
+              <a:t> (2–3 minutos, una sola vez): nombre, expectativa del curso y </a:t>
+            </a:r>
+            <a:r>
+              <a:rPr sz="1600" b="1" i="0">
+                <a:solidFill>
+                  <a:srgbClr val="2B2B2B"/>
+                </a:solidFill>
+                <a:latin typeface="Calibri"/>
+              </a:rPr>
+              <a:t>el tema o problema</a:t>
+            </a:r>
+            <a:r>
+              <a:rPr sz="1600" b="0" i="0">
+                <a:solidFill>
+                  <a:srgbClr val="2B2B2B"/>
+                </a:solidFill>
+                <a:latin typeface="Calibri"/>
+              </a:rPr>
+              <a:t> que le interesa mirar.</a:t>
             </a:r>
           </a:p>
           <a:p>
@@ -12663,7 +13540,7 @@
                 </a:solidFill>
                 <a:latin typeface="Calibri"/>
               </a:rPr>
-              <a:t>Antes del encuentro:</a:t>
+              <a:t>Cuándo:</a:t>
             </a:r>
             <a:r>
               <a:rPr sz="1600" b="0" i="0">
@@ -12672,25 +13549,7 @@
                 </a:solidFill>
                 <a:latin typeface="Calibri"/>
               </a:rPr>
-              <a:t> leer el material de la unidad publicado en </a:t>
-            </a:r>
-            <a:r>
-              <a:rPr sz="1600" b="1" i="0">
-                <a:solidFill>
-                  <a:srgbClr val="2B2B2B"/>
-                </a:solidFill>
-                <a:latin typeface="Calibri"/>
-              </a:rPr>
-              <a:t>CDigital</a:t>
-            </a:r>
-            <a:r>
-              <a:rPr sz="1600" b="0" i="0">
-                <a:solidFill>
-                  <a:srgbClr val="2B2B2B"/>
-                </a:solidFill>
-                <a:latin typeface="Calibri"/>
-              </a:rPr>
-              <a:t>.</a:t>
+              <a:t> en los primeros minutos del encuentro. Después el Docente proyecta el resumen y lee cinco o seis respuestas en voz alta, sin juzgar ninguna.</a:t>
             </a:r>
           </a:p>
           <a:p>
@@ -12715,7 +13574,7 @@
                 </a:solidFill>
                 <a:latin typeface="Calibri"/>
               </a:rPr>
-              <a:t>Durante el encuentro:</a:t>
+              <a:t>Durante el encuentro</a:t>
             </a:r>
             <a:r>
               <a:rPr sz="1600" b="0" i="0">
@@ -12724,7 +13583,7 @@
                 </a:solidFill>
                 <a:latin typeface="Calibri"/>
               </a:rPr>
-              <a:t> un ejemplo modelado por el Docente + taller sobre </a:t>
+              <a:t> se participa con las </a:t>
             </a:r>
             <a:r>
               <a:rPr sz="1600" b="1" i="0">
@@ -12733,7 +13592,7 @@
                 </a:solidFill>
                 <a:latin typeface="Calibri"/>
               </a:rPr>
-              <a:t>su propia propuesta</a:t>
+              <a:t>encuestas</a:t>
             </a:r>
             <a:r>
               <a:rPr sz="1600" b="0" i="0">
@@ -12742,7 +13601,25 @@
                 </a:solidFill>
                 <a:latin typeface="Calibri"/>
               </a:rPr>
-              <a:t> + preguntas.</a:t>
+              <a:t> y el </a:t>
+            </a:r>
+            <a:r>
+              <a:rPr sz="1600" b="1" i="0">
+                <a:solidFill>
+                  <a:srgbClr val="2B2B2B"/>
+                </a:solidFill>
+                <a:latin typeface="Calibri"/>
+              </a:rPr>
+              <a:t>Q&amp;A</a:t>
+            </a:r>
+            <a:r>
+              <a:rPr sz="1600" b="0" i="0">
+                <a:solidFill>
+                  <a:srgbClr val="2B2B2B"/>
+                </a:solidFill>
+                <a:latin typeface="Calibri"/>
+              </a:rPr>
+              <a:t> del propio Meet: no se abre otra plataforma.</a:t>
             </a:r>
           </a:p>
           <a:p>
@@ -12758,59 +13635,7 @@
                 </a:solidFill>
                 <a:latin typeface="Calibri"/>
               </a:rPr>
-              <a:t>–   </a:t>
-            </a:r>
-            <a:r>
-              <a:rPr sz="1600" b="1" i="0">
-                <a:solidFill>
-                  <a:srgbClr val="2B2B2B"/>
-                </a:solidFill>
-                <a:latin typeface="Calibri"/>
-              </a:rPr>
-              <a:t>Después del encuentro:</a:t>
-            </a:r>
-            <a:r>
-              <a:rPr sz="1600" b="0" i="0">
-                <a:solidFill>
-                  <a:srgbClr val="2B2B2B"/>
-                </a:solidFill>
-                <a:latin typeface="Calibri"/>
-              </a:rPr>
-              <a:t> terminar el avance de la semana y guardarlo para el paquete del corte.</a:t>
-            </a:r>
-          </a:p>
-          <a:p>
-            <a:pPr>
-              <a:spcAft>
-                <a:spcPts val="1000"/>
-              </a:spcAft>
-            </a:pPr>
-            <a:r>
-              <a:rPr sz="1600" b="0" i="0">
-                <a:solidFill>
-                  <a:srgbClr val="2B2B2B"/>
-                </a:solidFill>
-                <a:latin typeface="Calibri"/>
-              </a:rPr>
-              <a:t>–   Traiga siempre su </a:t>
-            </a:r>
-            <a:r>
-              <a:rPr sz="1600" b="1" i="0">
-                <a:solidFill>
-                  <a:srgbClr val="2B2B2B"/>
-                </a:solidFill>
-                <a:latin typeface="Calibri"/>
-              </a:rPr>
-              <a:t>documento de trabajo abierto</a:t>
-            </a:r>
-            <a:r>
-              <a:rPr sz="1600" b="0" i="0">
-                <a:solidFill>
-                  <a:srgbClr val="2B2B2B"/>
-                </a:solidFill>
-                <a:latin typeface="Calibri"/>
-              </a:rPr>
-              <a:t>: se trabaja sobre lo que ya está escrito, no sobre lo que recuerda.</a:t>
+              <a:t>–   Si llegó tarde o se le cayó el internet, el formulario sigue abierto hasta la Sesión 02.</a:t>
             </a:r>
           </a:p>
         </p:txBody>
@@ -12879,25 +13704,7 @@
                 </a:solidFill>
                 <a:latin typeface="Calibri"/>
               </a:rPr>
-              <a:t>Regla del curso: cada sesión </a:t>
-            </a:r>
-            <a:r>
-              <a:rPr sz="1200" b="1" i="1">
-                <a:solidFill>
-                  <a:srgbClr val="2B2B2B"/>
-                </a:solidFill>
-                <a:latin typeface="Calibri"/>
-              </a:rPr>
-              <a:t>alimenta el mismo documento</a:t>
-            </a:r>
-            <a:r>
-              <a:rPr sz="1200" b="0" i="1">
-                <a:solidFill>
-                  <a:srgbClr val="2B2B2B"/>
-                </a:solidFill>
-                <a:latin typeface="Calibri"/>
-              </a:rPr>
-              <a:t>. Aquí ningún taller es una isla.</a:t>
+              <a:t>Esas respuestas no se pierden: con ellas el Docente escoge los ejemplos del curso y junta a quienes traen problemas parecidos.</a:t>
             </a:r>
           </a:p>
         </p:txBody>
@@ -13002,6 +13809,583 @@
                 </a:solidFill>
                 <a:latin typeface="Calibri"/>
               </a:rPr>
+              <a:t>Cómo trabajamos: una hora juntos, el resto por su cuenta</a:t>
+            </a:r>
+          </a:p>
+        </p:txBody>
+      </p:sp>
+      <p:sp>
+        <p:nvSpPr>
+          <p:cNvPr id="4" name="TextBox 3"/>
+          <p:cNvSpPr txBox="1"/>
+          <p:nvPr/>
+        </p:nvSpPr>
+        <p:spPr>
+          <a:xfrm>
+            <a:off x="640080" y="1691639"/>
+            <a:ext cx="10911535" cy="4617720"/>
+          </a:xfrm>
+          <a:prstGeom prst="rect">
+            <a:avLst/>
+          </a:prstGeom>
+          <a:noFill/>
+        </p:spPr>
+        <p:txBody>
+          <a:bodyPr wrap="square" anchor="t" lIns="0" rIns="0" tIns="0" bIns="0">
+            <a:spAutoFit/>
+          </a:bodyPr>
+          <a:lstStyle/>
+          <a:p>
+            <a:pPr>
+              <a:spcAft>
+                <a:spcPts val="1000"/>
+              </a:spcAft>
+            </a:pPr>
+            <a:r>
+              <a:rPr sz="1600" b="0" i="0">
+                <a:solidFill>
+                  <a:srgbClr val="2B2B2B"/>
+                </a:solidFill>
+                <a:latin typeface="Calibri"/>
+              </a:rPr>
+              <a:t>–   El curso son </a:t>
+            </a:r>
+            <a:r>
+              <a:rPr sz="1600" b="1" i="0">
+                <a:solidFill>
+                  <a:srgbClr val="2B2B2B"/>
+                </a:solidFill>
+                <a:latin typeface="Calibri"/>
+              </a:rPr>
+              <a:t>2 créditos</a:t>
+            </a:r>
+            <a:r>
+              <a:rPr sz="1600" b="0" i="0">
+                <a:solidFill>
+                  <a:srgbClr val="2B2B2B"/>
+                </a:solidFill>
+                <a:latin typeface="Calibri"/>
+              </a:rPr>
+              <a:t>: unas </a:t>
+            </a:r>
+            <a:r>
+              <a:rPr sz="1600" b="1" i="0">
+                <a:solidFill>
+                  <a:srgbClr val="2B2B2B"/>
+                </a:solidFill>
+                <a:latin typeface="Calibri"/>
+              </a:rPr>
+              <a:t>32 horas</a:t>
+            </a:r>
+            <a:r>
+              <a:rPr sz="1600" b="0" i="0">
+                <a:solidFill>
+                  <a:srgbClr val="2B2B2B"/>
+                </a:solidFill>
+                <a:latin typeface="Calibri"/>
+              </a:rPr>
+              <a:t> de acompañamiento y unas </a:t>
+            </a:r>
+            <a:r>
+              <a:rPr sz="1600" b="1" i="0">
+                <a:solidFill>
+                  <a:srgbClr val="2B2B2B"/>
+                </a:solidFill>
+                <a:latin typeface="Calibri"/>
+              </a:rPr>
+              <a:t>64 horas</a:t>
+            </a:r>
+            <a:r>
+              <a:rPr sz="1600" b="0" i="0">
+                <a:solidFill>
+                  <a:srgbClr val="2B2B2B"/>
+                </a:solidFill>
+                <a:latin typeface="Calibri"/>
+              </a:rPr>
+              <a:t> de trabajo autónomo.</a:t>
+            </a:r>
+          </a:p>
+          <a:p>
+            <a:pPr lvl="1">
+              <a:spcAft>
+                <a:spcPts val="600"/>
+              </a:spcAft>
+            </a:pPr>
+            <a:r>
+              <a:rPr sz="1500" b="0" i="0">
+                <a:solidFill>
+                  <a:srgbClr val="2B2B2B"/>
+                </a:solidFill>
+                <a:latin typeface="Calibri"/>
+              </a:rPr>
+              <a:t>●   Traducción honesta: lo que decide su nota </a:t>
+            </a:r>
+            <a:r>
+              <a:rPr sz="1500" b="1" i="0">
+                <a:solidFill>
+                  <a:srgbClr val="2B2B2B"/>
+                </a:solidFill>
+                <a:latin typeface="Calibri"/>
+              </a:rPr>
+              <a:t>no pasa en la hora de clase</a:t>
+            </a:r>
+            <a:r>
+              <a:rPr sz="1500" b="0" i="0">
+                <a:solidFill>
+                  <a:srgbClr val="2B2B2B"/>
+                </a:solidFill>
+                <a:latin typeface="Calibri"/>
+              </a:rPr>
+              <a:t>, pasa entre semana.</a:t>
+            </a:r>
+          </a:p>
+          <a:p>
+            <a:pPr>
+              <a:spcAft>
+                <a:spcPts val="1000"/>
+              </a:spcAft>
+            </a:pPr>
+            <a:r>
+              <a:rPr sz="1600" b="0" i="0">
+                <a:solidFill>
+                  <a:srgbClr val="2B2B2B"/>
+                </a:solidFill>
+                <a:latin typeface="Calibri"/>
+              </a:rPr>
+              <a:t>–   El encuentro sincrónico es de </a:t>
+            </a:r>
+            <a:r>
+              <a:rPr sz="1600" b="1" i="0">
+                <a:solidFill>
+                  <a:srgbClr val="2B2B2B"/>
+                </a:solidFill>
+                <a:latin typeface="Calibri"/>
+              </a:rPr>
+              <a:t>una hora</a:t>
+            </a:r>
+            <a:r>
+              <a:rPr sz="1600" b="0" i="0">
+                <a:solidFill>
+                  <a:srgbClr val="2B2B2B"/>
+                </a:solidFill>
+                <a:latin typeface="Calibri"/>
+              </a:rPr>
+              <a:t>. No alcanza para dictar todo y además hacer el taller.</a:t>
+            </a:r>
+          </a:p>
+          <a:p>
+            <a:pPr lvl="1">
+              <a:spcAft>
+                <a:spcPts val="600"/>
+              </a:spcAft>
+            </a:pPr>
+            <a:r>
+              <a:rPr sz="1500" b="0" i="0">
+                <a:solidFill>
+                  <a:srgbClr val="2B2B2B"/>
+                </a:solidFill>
+                <a:latin typeface="Calibri"/>
+              </a:rPr>
+              <a:t>●   Por eso trabajamos en </a:t>
+            </a:r>
+            <a:r>
+              <a:rPr sz="1500" b="1" i="0">
+                <a:solidFill>
+                  <a:srgbClr val="2B2B2B"/>
+                </a:solidFill>
+                <a:latin typeface="Calibri"/>
+              </a:rPr>
+              <a:t>aula invertida</a:t>
+            </a:r>
+            <a:r>
+              <a:rPr sz="1500" b="0" i="0">
+                <a:solidFill>
+                  <a:srgbClr val="2B2B2B"/>
+                </a:solidFill>
+                <a:latin typeface="Calibri"/>
+              </a:rPr>
+              <a:t>: usted llega leído y la hora se usa para </a:t>
+            </a:r>
+            <a:r>
+              <a:rPr sz="1500" b="1" i="0">
+                <a:solidFill>
+                  <a:srgbClr val="2B2B2B"/>
+                </a:solidFill>
+                <a:latin typeface="Calibri"/>
+              </a:rPr>
+              <a:t>aplicar</a:t>
+            </a:r>
+            <a:r>
+              <a:rPr sz="1500" b="0" i="0">
+                <a:solidFill>
+                  <a:srgbClr val="2B2B2B"/>
+                </a:solidFill>
+                <a:latin typeface="Calibri"/>
+              </a:rPr>
+              <a:t>, no para leerle diapositivas.</a:t>
+            </a:r>
+          </a:p>
+          <a:p>
+            <a:pPr>
+              <a:spcAft>
+                <a:spcPts val="1000"/>
+              </a:spcAft>
+            </a:pPr>
+            <a:r>
+              <a:rPr sz="1600" b="0" i="0">
+                <a:solidFill>
+                  <a:srgbClr val="2B2B2B"/>
+                </a:solidFill>
+                <a:latin typeface="Calibri"/>
+              </a:rPr>
+              <a:t>–   </a:t>
+            </a:r>
+            <a:r>
+              <a:rPr sz="1600" b="1" i="0">
+                <a:solidFill>
+                  <a:srgbClr val="2B2B2B"/>
+                </a:solidFill>
+                <a:latin typeface="Calibri"/>
+              </a:rPr>
+              <a:t>Antes del encuentro:</a:t>
+            </a:r>
+            <a:r>
+              <a:rPr sz="1600" b="0" i="0">
+                <a:solidFill>
+                  <a:srgbClr val="2B2B2B"/>
+                </a:solidFill>
+                <a:latin typeface="Calibri"/>
+              </a:rPr>
+              <a:t> leer el material de la unidad publicado en </a:t>
+            </a:r>
+            <a:r>
+              <a:rPr sz="1600" b="1" i="0">
+                <a:solidFill>
+                  <a:srgbClr val="2B2B2B"/>
+                </a:solidFill>
+                <a:latin typeface="Calibri"/>
+              </a:rPr>
+              <a:t>CDigital</a:t>
+            </a:r>
+            <a:r>
+              <a:rPr sz="1600" b="0" i="0">
+                <a:solidFill>
+                  <a:srgbClr val="2B2B2B"/>
+                </a:solidFill>
+                <a:latin typeface="Calibri"/>
+              </a:rPr>
+              <a:t>.</a:t>
+            </a:r>
+          </a:p>
+          <a:p>
+            <a:pPr>
+              <a:spcAft>
+                <a:spcPts val="1000"/>
+              </a:spcAft>
+            </a:pPr>
+            <a:r>
+              <a:rPr sz="1600" b="0" i="0">
+                <a:solidFill>
+                  <a:srgbClr val="2B2B2B"/>
+                </a:solidFill>
+                <a:latin typeface="Calibri"/>
+              </a:rPr>
+              <a:t>–   </a:t>
+            </a:r>
+            <a:r>
+              <a:rPr sz="1600" b="1" i="0">
+                <a:solidFill>
+                  <a:srgbClr val="2B2B2B"/>
+                </a:solidFill>
+                <a:latin typeface="Calibri"/>
+              </a:rPr>
+              <a:t>Durante el encuentro:</a:t>
+            </a:r>
+            <a:r>
+              <a:rPr sz="1600" b="0" i="0">
+                <a:solidFill>
+                  <a:srgbClr val="2B2B2B"/>
+                </a:solidFill>
+                <a:latin typeface="Calibri"/>
+              </a:rPr>
+              <a:t> un ejemplo modelado por el Docente + taller sobre </a:t>
+            </a:r>
+            <a:r>
+              <a:rPr sz="1600" b="1" i="0">
+                <a:solidFill>
+                  <a:srgbClr val="2B2B2B"/>
+                </a:solidFill>
+                <a:latin typeface="Calibri"/>
+              </a:rPr>
+              <a:t>su propia propuesta</a:t>
+            </a:r>
+            <a:r>
+              <a:rPr sz="1600" b="0" i="0">
+                <a:solidFill>
+                  <a:srgbClr val="2B2B2B"/>
+                </a:solidFill>
+                <a:latin typeface="Calibri"/>
+              </a:rPr>
+              <a:t> + preguntas.</a:t>
+            </a:r>
+          </a:p>
+          <a:p>
+            <a:pPr>
+              <a:spcAft>
+                <a:spcPts val="1000"/>
+              </a:spcAft>
+            </a:pPr>
+            <a:r>
+              <a:rPr sz="1600" b="0" i="0">
+                <a:solidFill>
+                  <a:srgbClr val="2B2B2B"/>
+                </a:solidFill>
+                <a:latin typeface="Calibri"/>
+              </a:rPr>
+              <a:t>–   </a:t>
+            </a:r>
+            <a:r>
+              <a:rPr sz="1600" b="1" i="0">
+                <a:solidFill>
+                  <a:srgbClr val="2B2B2B"/>
+                </a:solidFill>
+                <a:latin typeface="Calibri"/>
+              </a:rPr>
+              <a:t>Después del encuentro:</a:t>
+            </a:r>
+            <a:r>
+              <a:rPr sz="1600" b="0" i="0">
+                <a:solidFill>
+                  <a:srgbClr val="2B2B2B"/>
+                </a:solidFill>
+                <a:latin typeface="Calibri"/>
+              </a:rPr>
+              <a:t> terminar el avance de la semana y guardarlo para el paquete del corte.</a:t>
+            </a:r>
+          </a:p>
+          <a:p>
+            <a:pPr>
+              <a:spcAft>
+                <a:spcPts val="1000"/>
+              </a:spcAft>
+            </a:pPr>
+            <a:r>
+              <a:rPr sz="1600" b="0" i="0">
+                <a:solidFill>
+                  <a:srgbClr val="2B2B2B"/>
+                </a:solidFill>
+                <a:latin typeface="Calibri"/>
+              </a:rPr>
+              <a:t>–   Traiga siempre su </a:t>
+            </a:r>
+            <a:r>
+              <a:rPr sz="1600" b="1" i="0">
+                <a:solidFill>
+                  <a:srgbClr val="2B2B2B"/>
+                </a:solidFill>
+                <a:latin typeface="Calibri"/>
+              </a:rPr>
+              <a:t>documento de trabajo abierto</a:t>
+            </a:r>
+            <a:r>
+              <a:rPr sz="1600" b="0" i="0">
+                <a:solidFill>
+                  <a:srgbClr val="2B2B2B"/>
+                </a:solidFill>
+                <a:latin typeface="Calibri"/>
+              </a:rPr>
+              <a:t>: se trabaja sobre lo que ya está escrito, no sobre lo que recuerda.</a:t>
+            </a:r>
+          </a:p>
+        </p:txBody>
+      </p:sp>
+      <p:sp>
+        <p:nvSpPr>
+          <p:cNvPr id="5" name="TextBox 4"/>
+          <p:cNvSpPr txBox="1"/>
+          <p:nvPr/>
+        </p:nvSpPr>
+        <p:spPr>
+          <a:xfrm>
+            <a:off x="11094415" y="6446520"/>
+            <a:ext cx="548640" cy="274320"/>
+          </a:xfrm>
+          <a:prstGeom prst="rect">
+            <a:avLst/>
+          </a:prstGeom>
+          <a:noFill/>
+        </p:spPr>
+        <p:txBody>
+          <a:bodyPr wrap="square" anchor="t" lIns="0" rIns="0" tIns="0" bIns="0">
+            <a:spAutoFit/>
+          </a:bodyPr>
+          <a:lstStyle/>
+          <a:p>
+            <a:pPr algn="r"/>
+            <a:r>
+              <a:rPr sz="1000" b="1" i="0">
+                <a:solidFill>
+                  <a:srgbClr val="8F989D"/>
+                </a:solidFill>
+                <a:latin typeface="Calibri"/>
+              </a:rPr>
+              <a:t>7</a:t>
+            </a:r>
+          </a:p>
+        </p:txBody>
+      </p:sp>
+      <p:sp>
+        <p:nvSpPr>
+          <p:cNvPr id="6" name="TextBox 5"/>
+          <p:cNvSpPr txBox="1"/>
+          <p:nvPr/>
+        </p:nvSpPr>
+        <p:spPr>
+          <a:xfrm>
+            <a:off x="640080" y="5943600"/>
+            <a:ext cx="9997135" cy="457200"/>
+          </a:xfrm>
+          <a:prstGeom prst="rect">
+            <a:avLst/>
+          </a:prstGeom>
+          <a:noFill/>
+        </p:spPr>
+        <p:txBody>
+          <a:bodyPr wrap="square" anchor="t" lIns="0" rIns="0" tIns="0" bIns="0">
+            <a:spAutoFit/>
+          </a:bodyPr>
+          <a:lstStyle/>
+          <a:p>
+            <a:r>
+              <a:rPr sz="1200" b="0" i="1">
+                <a:solidFill>
+                  <a:srgbClr val="2B2B2B"/>
+                </a:solidFill>
+                <a:latin typeface="Calibri"/>
+              </a:rPr>
+              <a:t>Regla del curso: cada sesión </a:t>
+            </a:r>
+            <a:r>
+              <a:rPr sz="1200" b="1" i="1">
+                <a:solidFill>
+                  <a:srgbClr val="2B2B2B"/>
+                </a:solidFill>
+                <a:latin typeface="Calibri"/>
+              </a:rPr>
+              <a:t>alimenta el mismo documento</a:t>
+            </a:r>
+            <a:r>
+              <a:rPr sz="1200" b="0" i="1">
+                <a:solidFill>
+                  <a:srgbClr val="2B2B2B"/>
+                </a:solidFill>
+                <a:latin typeface="Calibri"/>
+              </a:rPr>
+              <a:t>. Aquí ningún taller es una isla.</a:t>
+            </a:r>
+          </a:p>
+        </p:txBody>
+      </p:sp>
+    </p:spTree>
+  </p:cSld>
+  <p:clrMapOvr>
+    <a:masterClrMapping/>
+  </p:clrMapOvr>
+</p:sld>
+</file>
+
+<file path=ppt/slides/slide8.xml><?xml version="1.0" encoding="utf-8"?>
+<p:sld xmlns:a="http://schemas.openxmlformats.org/drawingml/2006/main" xmlns:p="http://schemas.openxmlformats.org/presentationml/2006/main" xmlns:r="http://schemas.openxmlformats.org/officeDocument/2006/relationships">
+  <p:cSld>
+    <p:bg>
+      <p:bgPr>
+        <a:solidFill>
+          <a:srgbClr val="FFFFFF"/>
+        </a:solidFill>
+        <a:effectLst/>
+      </p:bgPr>
+    </p:bg>
+    <p:spTree>
+      <p:nvGrpSpPr>
+        <p:cNvPr id="1" name=""/>
+        <p:cNvGrpSpPr/>
+        <p:nvPr/>
+      </p:nvGrpSpPr>
+      <p:grpSpPr/>
+      <p:sp>
+        <p:nvSpPr>
+          <p:cNvPr id="2" name="Rectangle 1"/>
+          <p:cNvSpPr/>
+          <p:nvPr/>
+        </p:nvSpPr>
+        <p:spPr>
+          <a:xfrm>
+            <a:off x="0" y="0"/>
+            <a:ext cx="12191695" cy="1188720"/>
+          </a:xfrm>
+          <a:prstGeom prst="rect">
+            <a:avLst/>
+          </a:prstGeom>
+          <a:solidFill>
+            <a:srgbClr val="0C2340"/>
+          </a:solidFill>
+          <a:ln>
+            <a:noFill/>
+          </a:ln>
+          <a:effectLst/>
+        </p:spPr>
+        <p:style>
+          <a:lnRef idx="1">
+            <a:schemeClr val="accent1"/>
+          </a:lnRef>
+          <a:fillRef idx="3">
+            <a:schemeClr val="accent1"/>
+          </a:fillRef>
+          <a:effectRef idx="2">
+            <a:schemeClr val="accent1"/>
+          </a:effectRef>
+          <a:fontRef idx="minor">
+            <a:schemeClr val="lt1"/>
+          </a:fontRef>
+        </p:style>
+        <p:txBody>
+          <a:bodyPr rtlCol="0" anchor="ctr"/>
+          <a:lstStyle/>
+          <a:p>
+            <a:pPr algn="ctr"/>
+          </a:p>
+        </p:txBody>
+      </p:sp>
+      <p:sp>
+        <p:nvSpPr>
+          <p:cNvPr id="3" name="TextBox 2"/>
+          <p:cNvSpPr txBox="1"/>
+          <p:nvPr/>
+        </p:nvSpPr>
+        <p:spPr>
+          <a:xfrm>
+            <a:off x="640080" y="0"/>
+            <a:ext cx="9082735" cy="1188720"/>
+          </a:xfrm>
+          <a:prstGeom prst="rect">
+            <a:avLst/>
+          </a:prstGeom>
+          <a:noFill/>
+        </p:spPr>
+        <p:txBody>
+          <a:bodyPr wrap="square" anchor="ctr" lIns="0" rIns="0" tIns="0" bIns="0">
+            <a:spAutoFit/>
+          </a:bodyPr>
+          <a:lstStyle/>
+          <a:p>
+            <a:pPr algn="ctr"/>
+            <a:r>
+              <a:rPr sz="2600" b="1" i="0">
+                <a:solidFill>
+                  <a:srgbClr val="FFFFFF"/>
+                </a:solidFill>
+                <a:latin typeface="Calibri"/>
+              </a:rPr>
               <a:t>Mapa del curso: las 7 sesiones de un vistazo</a:t>
             </a:r>
           </a:p>
@@ -13801,7 +15185,7 @@
                 </a:solidFill>
                 <a:latin typeface="Calibri"/>
               </a:rPr>
-              <a:t>7</a:t>
+              <a:t>8</a:t>
             </a:r>
           </a:p>
         </p:txBody>
@@ -13814,7 +15198,7 @@
 </p:sld>
 </file>
 
-<file path=ppt/slides/slide8.xml><?xml version="1.0" encoding="utf-8"?>
+<file path=ppt/slides/slide9.xml><?xml version="1.0" encoding="utf-8"?>
 <p:sld xmlns:a="http://schemas.openxmlformats.org/drawingml/2006/main" xmlns:p="http://schemas.openxmlformats.org/presentationml/2006/main" xmlns:r="http://schemas.openxmlformats.org/officeDocument/2006/relationships">
   <p:cSld>
     <p:bg>
@@ -14254,7 +15638,7 @@
                 </a:solidFill>
                 <a:latin typeface="Calibri"/>
               </a:rPr>
-              <a:t>8</a:t>
+              <a:t>9</a:t>
             </a:r>
           </a:p>
         </p:txBody>
@@ -14289,716 +15673,6 @@
                 <a:latin typeface="Calibri"/>
               </a:rPr>
               <a:t>Si al terminar solo tiene un archivo para la nota, desperdició el semestre.</a:t>
-            </a:r>
-          </a:p>
-        </p:txBody>
-      </p:sp>
-    </p:spTree>
-  </p:cSld>
-  <p:clrMapOvr>
-    <a:masterClrMapping/>
-  </p:clrMapOvr>
-</p:sld>
-</file>
-
-<file path=ppt/slides/slide9.xml><?xml version="1.0" encoding="utf-8"?>
-<p:sld xmlns:a="http://schemas.openxmlformats.org/drawingml/2006/main" xmlns:p="http://schemas.openxmlformats.org/presentationml/2006/main" xmlns:r="http://schemas.openxmlformats.org/officeDocument/2006/relationships">
-  <p:cSld>
-    <p:bg>
-      <p:bgPr>
-        <a:solidFill>
-          <a:srgbClr val="FFFFFF"/>
-        </a:solidFill>
-        <a:effectLst/>
-      </p:bgPr>
-    </p:bg>
-    <p:spTree>
-      <p:nvGrpSpPr>
-        <p:cNvPr id="1" name=""/>
-        <p:cNvGrpSpPr/>
-        <p:nvPr/>
-      </p:nvGrpSpPr>
-      <p:grpSpPr/>
-      <p:sp>
-        <p:nvSpPr>
-          <p:cNvPr id="2" name="Rectangle 1"/>
-          <p:cNvSpPr/>
-          <p:nvPr/>
-        </p:nvSpPr>
-        <p:spPr>
-          <a:xfrm>
-            <a:off x="0" y="0"/>
-            <a:ext cx="12191695" cy="1188720"/>
-          </a:xfrm>
-          <a:prstGeom prst="rect">
-            <a:avLst/>
-          </a:prstGeom>
-          <a:solidFill>
-            <a:srgbClr val="0C2340"/>
-          </a:solidFill>
-          <a:ln>
-            <a:noFill/>
-          </a:ln>
-          <a:effectLst/>
-        </p:spPr>
-        <p:style>
-          <a:lnRef idx="1">
-            <a:schemeClr val="accent1"/>
-          </a:lnRef>
-          <a:fillRef idx="3">
-            <a:schemeClr val="accent1"/>
-          </a:fillRef>
-          <a:effectRef idx="2">
-            <a:schemeClr val="accent1"/>
-          </a:effectRef>
-          <a:fontRef idx="minor">
-            <a:schemeClr val="lt1"/>
-          </a:fontRef>
-        </p:style>
-        <p:txBody>
-          <a:bodyPr rtlCol="0" anchor="ctr"/>
-          <a:lstStyle/>
-          <a:p>
-            <a:pPr algn="ctr"/>
-          </a:p>
-        </p:txBody>
-      </p:sp>
-      <p:sp>
-        <p:nvSpPr>
-          <p:cNvPr id="3" name="TextBox 2"/>
-          <p:cNvSpPr txBox="1"/>
-          <p:nvPr/>
-        </p:nvSpPr>
-        <p:spPr>
-          <a:xfrm>
-            <a:off x="640080" y="0"/>
-            <a:ext cx="9082735" cy="1188720"/>
-          </a:xfrm>
-          <a:prstGeom prst="rect">
-            <a:avLst/>
-          </a:prstGeom>
-          <a:noFill/>
-        </p:spPr>
-        <p:txBody>
-          <a:bodyPr wrap="square" anchor="ctr" lIns="0" rIns="0" tIns="0" bIns="0">
-            <a:spAutoFit/>
-          </a:bodyPr>
-          <a:lstStyle/>
-          <a:p>
-            <a:pPr algn="ctr"/>
-            <a:r>
-              <a:rPr sz="2600" b="1" i="0">
-                <a:solidFill>
-                  <a:srgbClr val="FFFFFF"/>
-                </a:solidFill>
-                <a:latin typeface="Calibri"/>
-              </a:rPr>
-              <a:t>Qué evalúa cada corte: lo que está en el libro de calificaciones</a:t>
-            </a:r>
-          </a:p>
-        </p:txBody>
-      </p:sp>
-      <p:graphicFrame>
-        <p:nvGraphicFramePr>
-          <p:cNvPr id="4" name="Table 3"/>
-          <p:cNvGraphicFramePr>
-            <a:graphicFrameLocks noGrp="1"/>
-          </p:cNvGraphicFramePr>
-          <p:nvPr/>
-        </p:nvGraphicFramePr>
-        <p:xfrm>
-          <a:off x="640080" y="1691639"/>
-          <a:ext cx="10911534" cy="2011680"/>
-        </p:xfrm>
-        <a:graphic>
-          <a:graphicData uri="http://schemas.openxmlformats.org/drawingml/2006/table">
-            <a:tbl>
-              <a:tblPr>
-                <a:tableStyleId>{2D5ABB26-0587-4C30-8999-92F81FD0307C}</a:tableStyleId>
-              </a:tblPr>
-              <a:tblGrid>
-                <a:gridCol w="1008629"/>
-                <a:gridCol w="4492985"/>
-                <a:gridCol w="5409920"/>
-              </a:tblGrid>
-              <a:tr h="502920">
-                <a:tc>
-                  <a:txBody>
-                    <a:bodyPr/>
-                    <a:lstStyle/>
-                    <a:p>
-                      <a:pPr algn="l"/>
-                      <a:r>
-                        <a:rPr sz="1300" b="1" i="0">
-                          <a:solidFill>
-                            <a:srgbClr val="FFFFFF"/>
-                          </a:solidFill>
-                          <a:latin typeface="Calibri"/>
-                        </a:rPr>
-                        <a:t>Corte</a:t>
-                      </a:r>
-                    </a:p>
-                  </a:txBody>
-                  <a:tcPr anchor="ctr" marL="109728" marR="91440" marT="36576" marB="36576">
-                    <a:solidFill>
-                      <a:srgbClr val="0C2340"/>
-                    </a:solidFill>
-                  </a:tcPr>
-                </a:tc>
-                <a:tc>
-                  <a:txBody>
-                    <a:bodyPr/>
-                    <a:lstStyle/>
-                    <a:p>
-                      <a:pPr algn="l"/>
-                      <a:r>
-                        <a:rPr sz="1300" b="1" i="0">
-                          <a:solidFill>
-                            <a:srgbClr val="FFFFFF"/>
-                          </a:solidFill>
-                          <a:latin typeface="Calibri"/>
-                        </a:rPr>
-                        <a:t>Qué hay en el aula (CDigital)</a:t>
-                      </a:r>
-                    </a:p>
-                  </a:txBody>
-                  <a:tcPr anchor="ctr" marL="109728" marR="91440" marT="36576" marB="36576">
-                    <a:solidFill>
-                      <a:srgbClr val="0C2340"/>
-                    </a:solidFill>
-                  </a:tcPr>
-                </a:tc>
-                <a:tc>
-                  <a:txBody>
-                    <a:bodyPr/>
-                    <a:lstStyle/>
-                    <a:p>
-                      <a:pPr algn="l"/>
-                      <a:r>
-                        <a:rPr sz="1300" b="1" i="0">
-                          <a:solidFill>
-                            <a:srgbClr val="FFFFFF"/>
-                          </a:solidFill>
-                          <a:latin typeface="Calibri"/>
-                        </a:rPr>
-                        <a:t>Qué se prepara para eso</a:t>
-                      </a:r>
-                    </a:p>
-                  </a:txBody>
-                  <a:tcPr anchor="ctr" marL="109728" marR="91440" marT="36576" marB="36576">
-                    <a:solidFill>
-                      <a:srgbClr val="0C2340"/>
-                    </a:solidFill>
-                  </a:tcPr>
-                </a:tc>
-              </a:tr>
-              <a:tr h="502920">
-                <a:tc>
-                  <a:txBody>
-                    <a:bodyPr/>
-                    <a:lstStyle/>
-                    <a:p>
-                      <a:pPr algn="l"/>
-                      <a:r>
-                        <a:rPr sz="1100" b="1" i="0">
-                          <a:solidFill>
-                            <a:srgbClr val="2B2B2B"/>
-                          </a:solidFill>
-                          <a:latin typeface="Calibri"/>
-                        </a:rPr>
-                        <a:t>Corte 1</a:t>
-                      </a:r>
-                    </a:p>
-                  </a:txBody>
-                  <a:tcPr anchor="ctr" marL="109728" marR="91440" marT="36576" marB="36576">
-                    <a:solidFill>
-                      <a:srgbClr val="FFFFFF"/>
-                    </a:solidFill>
-                  </a:tcPr>
-                </a:tc>
-                <a:tc>
-                  <a:txBody>
-                    <a:bodyPr/>
-                    <a:lstStyle/>
-                    <a:p>
-                      <a:pPr algn="l"/>
-                      <a:r>
-                        <a:rPr sz="1100" b="1" i="0">
-                          <a:solidFill>
-                            <a:srgbClr val="2B2B2B"/>
-                          </a:solidFill>
-                          <a:latin typeface="Calibri"/>
-                        </a:rPr>
-                        <a:t>Quiz 1</a:t>
-                      </a:r>
-                      <a:r>
-                        <a:rPr sz="1100" b="0" i="0">
-                          <a:solidFill>
-                            <a:srgbClr val="2B2B2B"/>
-                          </a:solidFill>
-                          <a:latin typeface="Calibri"/>
-                        </a:rPr>
-                        <a:t> y </a:t>
-                      </a:r>
-                      <a:r>
-                        <a:rPr sz="1100" b="1" i="0">
-                          <a:solidFill>
-                            <a:srgbClr val="2B2B2B"/>
-                          </a:solidFill>
-                          <a:latin typeface="Calibri"/>
-                        </a:rPr>
-                        <a:t>Parcial 1</a:t>
-                      </a:r>
-                      <a:r>
-                        <a:rPr sz="1100" b="0" i="0">
-                          <a:solidFill>
-                            <a:srgbClr val="2B2B2B"/>
-                          </a:solidFill>
-                          <a:latin typeface="Calibri"/>
-                        </a:rPr>
-                        <a:t>: cuestionarios que se resuelven en el aula, dentro de su ventana. No se sube archivo.</a:t>
-                      </a:r>
-                    </a:p>
-                  </a:txBody>
-                  <a:tcPr anchor="ctr" marL="109728" marR="91440" marT="36576" marB="36576">
-                    <a:solidFill>
-                      <a:srgbClr val="FFFFFF"/>
-                    </a:solidFill>
-                  </a:tcPr>
-                </a:tc>
-                <a:tc>
-                  <a:txBody>
-                    <a:bodyPr/>
-                    <a:lstStyle/>
-                    <a:p>
-                      <a:pPr algn="l"/>
-                      <a:r>
-                        <a:rPr sz="1100" b="0" i="0">
-                          <a:solidFill>
-                            <a:srgbClr val="2B2B2B"/>
-                          </a:solidFill>
-                          <a:latin typeface="Calibri"/>
-                        </a:rPr>
-                        <a:t>Lo trabajado hasta ahí: problema–oportunidad real y observable, bloqueadores y ensanchadores, técnicas de ideación. Guías escritas: `Quiz 1 (6%)` y `Parcial 1 (24%)` en `Recursos/ACAs/`.</a:t>
-                      </a:r>
-                    </a:p>
-                  </a:txBody>
-                  <a:tcPr anchor="ctr" marL="109728" marR="91440" marT="36576" marB="36576">
-                    <a:solidFill>
-                      <a:srgbClr val="FFFFFF"/>
-                    </a:solidFill>
-                  </a:tcPr>
-                </a:tc>
-              </a:tr>
-              <a:tr h="502920">
-                <a:tc>
-                  <a:txBody>
-                    <a:bodyPr/>
-                    <a:lstStyle/>
-                    <a:p>
-                      <a:pPr algn="l"/>
-                      <a:r>
-                        <a:rPr sz="1100" b="1" i="0">
-                          <a:solidFill>
-                            <a:srgbClr val="2B2B2B"/>
-                          </a:solidFill>
-                          <a:latin typeface="Calibri"/>
-                        </a:rPr>
-                        <a:t>Corte 2</a:t>
-                      </a:r>
-                    </a:p>
-                  </a:txBody>
-                  <a:tcPr anchor="ctr" marL="109728" marR="91440" marT="36576" marB="36576">
-                    <a:solidFill>
-                      <a:srgbClr val="F2F2F2"/>
-                    </a:solidFill>
-                  </a:tcPr>
-                </a:tc>
-                <a:tc>
-                  <a:txBody>
-                    <a:bodyPr/>
-                    <a:lstStyle/>
-                    <a:p>
-                      <a:pPr algn="l"/>
-                      <a:r>
-                        <a:rPr sz="1100" b="1" i="0">
-                          <a:solidFill>
-                            <a:srgbClr val="2B2B2B"/>
-                          </a:solidFill>
-                          <a:latin typeface="Calibri"/>
-                        </a:rPr>
-                        <a:t>Quiz 2</a:t>
-                      </a:r>
-                      <a:r>
-                        <a:rPr sz="1100" b="0" i="0">
-                          <a:solidFill>
-                            <a:srgbClr val="2B2B2B"/>
-                          </a:solidFill>
-                          <a:latin typeface="Calibri"/>
-                        </a:rPr>
-                        <a:t> y </a:t>
-                      </a:r>
-                      <a:r>
-                        <a:rPr sz="1100" b="1" i="0">
-                          <a:solidFill>
-                            <a:srgbClr val="2B2B2B"/>
-                          </a:solidFill>
-                          <a:latin typeface="Calibri"/>
-                        </a:rPr>
-                        <a:t>Parcial 2</a:t>
-                      </a:r>
-                      <a:r>
-                        <a:rPr sz="1100" b="0" i="0">
-                          <a:solidFill>
-                            <a:srgbClr val="2B2B2B"/>
-                          </a:solidFill>
-                          <a:latin typeface="Calibri"/>
-                        </a:rPr>
-                        <a:t>: también cuestionarios en el aula.</a:t>
-                      </a:r>
-                    </a:p>
-                  </a:txBody>
-                  <a:tcPr anchor="ctr" marL="109728" marR="91440" marT="36576" marB="36576">
-                    <a:solidFill>
-                      <a:srgbClr val="F2F2F2"/>
-                    </a:solidFill>
-                  </a:tcPr>
-                </a:tc>
-                <a:tc>
-                  <a:txBody>
-                    <a:bodyPr/>
-                    <a:lstStyle/>
-                    <a:p>
-                      <a:pPr algn="l"/>
-                      <a:r>
-                        <a:rPr sz="1100" b="0" i="0">
-                          <a:solidFill>
-                            <a:srgbClr val="2B2B2B"/>
-                          </a:solidFill>
-                          <a:latin typeface="Calibri"/>
-                        </a:rPr>
-                        <a:t>Tipificar la propuesta (</a:t>
-                      </a:r>
-                      <a:r>
-                        <a:rPr sz="1100" b="1" i="0">
-                          <a:solidFill>
-                            <a:srgbClr val="2B2B2B"/>
-                          </a:solidFill>
-                          <a:latin typeface="Calibri"/>
-                        </a:rPr>
-                        <a:t>Manual de Oslo</a:t>
-                      </a:r>
-                      <a:r>
-                        <a:rPr sz="1100" b="0" i="0">
-                          <a:solidFill>
-                            <a:srgbClr val="2B2B2B"/>
-                          </a:solidFill>
-                          <a:latin typeface="Calibri"/>
-                        </a:rPr>
-                        <a:t>) y validarla: cuadro comparativo, </a:t>
-                      </a:r>
-                      <a:r>
-                        <a:rPr sz="1100" b="1" i="0">
-                          <a:solidFill>
-                            <a:srgbClr val="2B2B2B"/>
-                          </a:solidFill>
-                          <a:latin typeface="Calibri"/>
-                        </a:rPr>
-                        <a:t>FODA</a:t>
-                      </a:r>
-                      <a:r>
-                        <a:rPr sz="1100" b="0" i="0">
-                          <a:solidFill>
-                            <a:srgbClr val="2B2B2B"/>
-                          </a:solidFill>
-                          <a:latin typeface="Calibri"/>
-                        </a:rPr>
-                        <a:t>, </a:t>
-                      </a:r>
-                      <a:r>
-                        <a:rPr sz="1100" b="1" i="0">
-                          <a:solidFill>
-                            <a:srgbClr val="2B2B2B"/>
-                          </a:solidFill>
-                          <a:latin typeface="Calibri"/>
-                        </a:rPr>
-                        <a:t>Canvas</a:t>
-                      </a:r>
-                      <a:r>
-                        <a:rPr sz="1100" b="0" i="0">
-                          <a:solidFill>
-                            <a:srgbClr val="2B2B2B"/>
-                          </a:solidFill>
-                          <a:latin typeface="Calibri"/>
-                        </a:rPr>
-                        <a:t> y </a:t>
-                      </a:r>
-                      <a:r>
-                        <a:rPr sz="1100" b="1" i="0">
-                          <a:solidFill>
-                            <a:srgbClr val="2B2B2B"/>
-                          </a:solidFill>
-                          <a:latin typeface="Calibri"/>
-                        </a:rPr>
-                        <a:t>MVP</a:t>
-                      </a:r>
-                      <a:r>
-                        <a:rPr sz="1100" b="0" i="0">
-                          <a:solidFill>
-                            <a:srgbClr val="2B2B2B"/>
-                          </a:solidFill>
-                          <a:latin typeface="Calibri"/>
-                        </a:rPr>
-                        <a:t> aplicados a su propia propuesta. Guías: `Quiz 2 (9%)` y `Parcial 2 (21%)`.</a:t>
-                      </a:r>
-                    </a:p>
-                  </a:txBody>
-                  <a:tcPr anchor="ctr" marL="109728" marR="91440" marT="36576" marB="36576">
-                    <a:solidFill>
-                      <a:srgbClr val="F2F2F2"/>
-                    </a:solidFill>
-                  </a:tcPr>
-                </a:tc>
-              </a:tr>
-              <a:tr h="502920">
-                <a:tc>
-                  <a:txBody>
-                    <a:bodyPr/>
-                    <a:lstStyle/>
-                    <a:p>
-                      <a:pPr algn="l"/>
-                      <a:r>
-                        <a:rPr sz="1100" b="1" i="0">
-                          <a:solidFill>
-                            <a:srgbClr val="2B2B2B"/>
-                          </a:solidFill>
-                          <a:latin typeface="Calibri"/>
-                        </a:rPr>
-                        <a:t>Corte 3</a:t>
-                      </a:r>
-                    </a:p>
-                  </a:txBody>
-                  <a:tcPr anchor="ctr" marL="109728" marR="91440" marT="36576" marB="36576">
-                    <a:solidFill>
-                      <a:srgbClr val="FFFFFF"/>
-                    </a:solidFill>
-                  </a:tcPr>
-                </a:tc>
-                <a:tc>
-                  <a:txBody>
-                    <a:bodyPr/>
-                    <a:lstStyle/>
-                    <a:p>
-                      <a:pPr algn="l"/>
-                      <a:r>
-                        <a:rPr sz="1100" b="1" i="0">
-                          <a:solidFill>
-                            <a:srgbClr val="2B2B2B"/>
-                          </a:solidFill>
-                          <a:latin typeface="Calibri"/>
-                        </a:rPr>
-                        <a:t>Quiz 3</a:t>
-                      </a:r>
-                      <a:r>
-                        <a:rPr sz="1100" b="0" i="0">
-                          <a:solidFill>
-                            <a:srgbClr val="2B2B2B"/>
-                          </a:solidFill>
-                          <a:latin typeface="Calibri"/>
-                        </a:rPr>
-                        <a:t> (cuestionario) + </a:t>
-                      </a:r>
-                      <a:r>
-                        <a:rPr sz="1100" b="1" i="0">
-                          <a:solidFill>
-                            <a:srgbClr val="2B2B2B"/>
-                          </a:solidFill>
-                          <a:latin typeface="Calibri"/>
-                        </a:rPr>
-                        <a:t>ACA Final</a:t>
-                      </a:r>
-                      <a:r>
-                        <a:rPr sz="1100" b="0" i="0">
-                          <a:solidFill>
-                            <a:srgbClr val="2B2B2B"/>
-                          </a:solidFill>
-                          <a:latin typeface="Calibri"/>
-                        </a:rPr>
-                        <a:t> (tarea: el único documento que se sube) + </a:t>
-                      </a:r>
-                      <a:r>
-                        <a:rPr sz="1100" b="1" i="0">
-                          <a:solidFill>
-                            <a:srgbClr val="2B2B2B"/>
-                          </a:solidFill>
-                          <a:latin typeface="Calibri"/>
-                        </a:rPr>
-                        <a:t>autoevaluación</a:t>
-                      </a:r>
-                      <a:r>
-                        <a:rPr sz="1100" b="0" i="0">
-                          <a:solidFill>
-                            <a:srgbClr val="2B2B2B"/>
-                          </a:solidFill>
-                          <a:latin typeface="Calibri"/>
-                        </a:rPr>
-                        <a:t> (cuestionario) y </a:t>
-                      </a:r>
-                      <a:r>
-                        <a:rPr sz="1100" b="1" i="0">
-                          <a:solidFill>
-                            <a:srgbClr val="2B2B2B"/>
-                          </a:solidFill>
-                          <a:latin typeface="Calibri"/>
-                        </a:rPr>
-                        <a:t>coevaluación</a:t>
-                      </a:r>
-                      <a:r>
-                        <a:rPr sz="1100" b="0" i="0">
-                          <a:solidFill>
-                            <a:srgbClr val="2B2B2B"/>
-                          </a:solidFill>
-                          <a:latin typeface="Calibri"/>
-                        </a:rPr>
-                        <a:t> (foro).</a:t>
-                      </a:r>
-                    </a:p>
-                  </a:txBody>
-                  <a:tcPr anchor="ctr" marL="109728" marR="91440" marT="36576" marB="36576">
-                    <a:solidFill>
-                      <a:srgbClr val="FFFFFF"/>
-                    </a:solidFill>
-                  </a:tcPr>
-                </a:tc>
-                <a:tc>
-                  <a:txBody>
-                    <a:bodyPr/>
-                    <a:lstStyle/>
-                    <a:p>
-                      <a:pPr algn="l"/>
-                      <a:r>
-                        <a:rPr sz="1100" b="0" i="0">
-                          <a:solidFill>
-                            <a:srgbClr val="2B2B2B"/>
-                          </a:solidFill>
-                          <a:latin typeface="Calibri"/>
-                        </a:rPr>
-                        <a:t>La </a:t>
-                      </a:r>
-                      <a:r>
-                        <a:rPr sz="1100" b="1" i="0">
-                          <a:solidFill>
-                            <a:srgbClr val="2B2B2B"/>
-                          </a:solidFill>
-                          <a:latin typeface="Calibri"/>
-                        </a:rPr>
-                        <a:t>Propuesta de Innovación</a:t>
-                      </a:r>
-                      <a:r>
-                        <a:rPr sz="1100" b="0" i="0">
-                          <a:solidFill>
-                            <a:srgbClr val="2B2B2B"/>
-                          </a:solidFill>
-                          <a:latin typeface="Calibri"/>
-                        </a:rPr>
-                        <a:t> consolidada: problema → propuesta → validación → vigilancia → entidades de apoyo + </a:t>
-                      </a:r>
-                      <a:r>
-                        <a:rPr sz="1100" b="1" i="0">
-                          <a:solidFill>
-                            <a:srgbClr val="2B2B2B"/>
-                          </a:solidFill>
-                          <a:latin typeface="Calibri"/>
-                        </a:rPr>
-                        <a:t>pitch de 1 página</a:t>
-                      </a:r>
-                      <a:r>
-                        <a:rPr sz="1100" b="0" i="0">
-                          <a:solidFill>
-                            <a:srgbClr val="2B2B2B"/>
-                          </a:solidFill>
-                          <a:latin typeface="Calibri"/>
-                        </a:rPr>
-                        <a:t> (8–12 págs.). Guías: `Quiz 3 (4%)` y `ACA Final (32,8%)`.</a:t>
-                      </a:r>
-                    </a:p>
-                  </a:txBody>
-                  <a:tcPr anchor="ctr" marL="109728" marR="91440" marT="36576" marB="36576">
-                    <a:solidFill>
-                      <a:srgbClr val="FFFFFF"/>
-                    </a:solidFill>
-                  </a:tcPr>
-                </a:tc>
-              </a:tr>
-            </a:tbl>
-          </a:graphicData>
-        </a:graphic>
-      </p:graphicFrame>
-      <p:sp>
-        <p:nvSpPr>
-          <p:cNvPr id="5" name="TextBox 4"/>
-          <p:cNvSpPr txBox="1"/>
-          <p:nvPr/>
-        </p:nvSpPr>
-        <p:spPr>
-          <a:xfrm>
-            <a:off x="640080" y="3840480"/>
-            <a:ext cx="10911535" cy="548640"/>
-          </a:xfrm>
-          <a:prstGeom prst="rect">
-            <a:avLst/>
-          </a:prstGeom>
-          <a:noFill/>
-        </p:spPr>
-        <p:txBody>
-          <a:bodyPr wrap="square" anchor="t" lIns="0" rIns="0" tIns="0" bIns="0">
-            <a:spAutoFit/>
-          </a:bodyPr>
-          <a:lstStyle/>
-          <a:p>
-            <a:r>
-              <a:rPr sz="1200" b="0" i="1">
-                <a:solidFill>
-                  <a:srgbClr val="2B2B2B"/>
-                </a:solidFill>
-                <a:latin typeface="Calibri"/>
-              </a:rPr>
-              <a:t>El peso de cada ítem está en la slide «CÓMO SE EVALÚA» de esta misma sesión, con el tipo de actividad. Enunciados y checklists: `Clases/Recursos/ACAs/`; fechas exactas, en la Presentación del Curso.</a:t>
-            </a:r>
-          </a:p>
-        </p:txBody>
-      </p:sp>
-      <p:sp>
-        <p:nvSpPr>
-          <p:cNvPr id="6" name="TextBox 5"/>
-          <p:cNvSpPr txBox="1"/>
-          <p:nvPr/>
-        </p:nvSpPr>
-        <p:spPr>
-          <a:xfrm>
-            <a:off x="11094415" y="6446520"/>
-            <a:ext cx="548640" cy="274320"/>
-          </a:xfrm>
-          <a:prstGeom prst="rect">
-            <a:avLst/>
-          </a:prstGeom>
-          <a:noFill/>
-        </p:spPr>
-        <p:txBody>
-          <a:bodyPr wrap="square" anchor="t" lIns="0" rIns="0" tIns="0" bIns="0">
-            <a:spAutoFit/>
-          </a:bodyPr>
-          <a:lstStyle/>
-          <a:p>
-            <a:pPr algn="r"/>
-            <a:r>
-              <a:rPr sz="1000" b="1" i="0">
-                <a:solidFill>
-                  <a:srgbClr val="8F989D"/>
-                </a:solidFill>
-                <a:latin typeface="Calibri"/>
-              </a:rPr>
-              <a:t>9</a:t>
             </a:r>
           </a:p>
         </p:txBody>

--- a/Pregrado/Creatividad y pensamiento innovador/Clases/Sesion 01 - Presentación del curso · docente · estudiantes · ACAs/Presentacion.pptx
+++ b/Pregrado/Creatividad y pensamiento innovador/Clases/Sesion 01 - Presentación del curso · docente · estudiantes · ACAs/Presentacion.pptx
@@ -14615,22 +14615,66 @@
                 </a:solidFill>
                 <a:latin typeface="Calibri"/>
               </a:rPr>
-              <a:t>Qué evalúa cada corte: lo que está en el libro de calificaciones</a:t>
+              <a:t>Qué evalúa cada instrumento: lo que está en el libro de calificaciones</a:t>
+            </a:r>
+          </a:p>
+        </p:txBody>
+      </p:sp>
+      <p:sp>
+        <p:nvSpPr>
+          <p:cNvPr id="4" name="TextBox 3"/>
+          <p:cNvSpPr txBox="1"/>
+          <p:nvPr/>
+        </p:nvSpPr>
+        <p:spPr>
+          <a:xfrm>
+            <a:off x="640080" y="1280160"/>
+            <a:ext cx="10911535" cy="411480"/>
+          </a:xfrm>
+          <a:prstGeom prst="rect">
+            <a:avLst/>
+          </a:prstGeom>
+          <a:noFill/>
+        </p:spPr>
+        <p:txBody>
+          <a:bodyPr wrap="square" anchor="t" lIns="0" rIns="0" tIns="0" bIns="0">
+            <a:spAutoFit/>
+          </a:bodyPr>
+          <a:lstStyle/>
+          <a:p>
+            <a:pPr algn="ctr"/>
+            <a:r>
+              <a:rPr sz="1500" b="1" i="0">
+                <a:solidFill>
+                  <a:srgbClr val="2B2B2B"/>
+                </a:solidFill>
+                <a:latin typeface="Calibri"/>
+              </a:rPr>
+              <a:t>Quiz 1 y Parcial 1 no evalúan lo mismo</a:t>
+            </a:r>
+            <a:r>
+              <a:rPr sz="1500" b="0" i="0">
+                <a:solidFill>
+                  <a:srgbClr val="2B2B2B"/>
+                </a:solidFill>
+                <a:latin typeface="Calibri"/>
+              </a:rPr>
+              <a:t> · pesos: slide «CÓMO SE EVALÚA» · fechas: Presentación del Curso</a:t>
             </a:r>
           </a:p>
         </p:txBody>
       </p:sp>
       <p:graphicFrame>
         <p:nvGraphicFramePr>
-          <p:cNvPr id="4" name="Table 3"/>
+          <p:cNvPr id="5" name="Table 4"/>
           <p:cNvGraphicFramePr>
             <a:graphicFrameLocks noGrp="1"/>
           </p:cNvGraphicFramePr>
           <p:nvPr/>
         </p:nvGraphicFramePr>
         <p:xfrm>
-          <a:off x="640080" y="1691639"/>
-          <a:ext cx="10911534" cy="2011680"/>
+          <a:off x="640080" y="2011679"/>
+          <a:ext cx="10911533" cy="2514600"/>
         </p:xfrm>
         <a:graphic>
           <a:graphicData uri="http://schemas.openxmlformats.org/drawingml/2006/table">
@@ -14639,9 +14683,9 @@
                 <a:tableStyleId>{2D5ABB26-0587-4C30-8999-92F81FD0307C}</a:tableStyleId>
               </a:tblPr>
               <a:tblGrid>
-                <a:gridCol w="1008629"/>
-                <a:gridCol w="4492985"/>
-                <a:gridCol w="5409920"/>
+                <a:gridCol w="1742177"/>
+                <a:gridCol w="3576049"/>
+                <a:gridCol w="5593307"/>
               </a:tblGrid>
               <a:tr h="502920">
                 <a:tc>
@@ -14657,7 +14701,7 @@
                           </a:solidFill>
                           <a:latin typeface="Calibri"/>
                         </a:rPr>
-                        <a:t>Corte</a:t>
+                        <a:t>Corte · ítem</a:t>
                       </a:r>
                     </a:p>
                   </a:txBody>
@@ -14703,7 +14747,7 @@
                           </a:solidFill>
                           <a:latin typeface="Calibri"/>
                         </a:rPr>
-                        <a:t>Qué se prepara para eso</a:t>
+                        <a:t>Qué se estudia para eso (y qué no)</a:t>
                       </a:r>
                     </a:p>
                   </a:txBody>
@@ -14730,6 +14774,33 @@
                         </a:rPr>
                         <a:t>Corte 1</a:t>
                       </a:r>
+                      <a:r>
+                        <a:rPr sz="1100" b="0" i="0">
+                          <a:solidFill>
+                            <a:srgbClr val="2B2B2B"/>
+                          </a:solidFill>
+                          <a:latin typeface="Calibri"/>
+                        </a:rPr>
+                        <a:t> · </a:t>
+                      </a:r>
+                      <a:r>
+                        <a:rPr sz="1100" b="1" i="0">
+                          <a:solidFill>
+                            <a:srgbClr val="2B2B2B"/>
+                          </a:solidFill>
+                          <a:latin typeface="Calibri"/>
+                        </a:rPr>
+                        <a:t>Quiz 1</a:t>
+                      </a:r>
+                      <a:r>
+                        <a:rPr sz="1100" b="0" i="0">
+                          <a:solidFill>
+                            <a:srgbClr val="2B2B2B"/>
+                          </a:solidFill>
+                          <a:latin typeface="Calibri"/>
+                        </a:rPr>
+                        <a:t> (6%)</a:t>
+                      </a:r>
                     </a:p>
                   </a:txBody>
                   <a:tcPr anchor="ctr" marL="109728" marR="91440" marT="36576" marB="36576">
@@ -14745,40 +14816,13 @@
                     <a:p>
                       <a:pPr algn="l"/>
                       <a:r>
-                        <a:rPr sz="1100" b="1" i="0">
-                          <a:solidFill>
-                            <a:srgbClr val="2B2B2B"/>
-                          </a:solidFill>
-                          <a:latin typeface="Calibri"/>
-                        </a:rPr>
-                        <a:t>Quiz 1</a:t>
-                      </a:r>
-                      <a:r>
                         <a:rPr sz="1100" b="0" i="0">
                           <a:solidFill>
                             <a:srgbClr val="2B2B2B"/>
                           </a:solidFill>
                           <a:latin typeface="Calibri"/>
                         </a:rPr>
-                        <a:t> y </a:t>
-                      </a:r>
-                      <a:r>
-                        <a:rPr sz="1100" b="1" i="0">
-                          <a:solidFill>
-                            <a:srgbClr val="2B2B2B"/>
-                          </a:solidFill>
-                          <a:latin typeface="Calibri"/>
-                        </a:rPr>
-                        <a:t>Parcial 1</a:t>
-                      </a:r>
-                      <a:r>
-                        <a:rPr sz="1100" b="0" i="0">
-                          <a:solidFill>
-                            <a:srgbClr val="2B2B2B"/>
-                          </a:solidFill>
-                          <a:latin typeface="Calibri"/>
-                        </a:rPr>
-                        <a:t>: cuestionarios que se resuelven en el aula, dentro de su ventana. No se sube archivo.</a:t>
+                        <a:t>Cuestionario que se resuelve en el aula, dentro de su ventana. No se sube archivo.</a:t>
                       </a:r>
                     </a:p>
                   </a:txBody>
@@ -14795,13 +14839,184 @@
                     <a:p>
                       <a:pPr algn="l"/>
                       <a:r>
+                        <a:rPr sz="1100" b="1" i="0">
+                          <a:solidFill>
+                            <a:srgbClr val="2B2B2B"/>
+                          </a:solidFill>
+                          <a:latin typeface="Calibri"/>
+                        </a:rPr>
+                        <a:t>Solo el material de la Sesión 01</a:t>
+                      </a:r>
+                      <a:r>
                         <a:rPr sz="1100" b="0" i="0">
                           <a:solidFill>
                             <a:srgbClr val="2B2B2B"/>
                           </a:solidFill>
                           <a:latin typeface="Calibri"/>
                         </a:rPr>
-                        <a:t>Lo trabajado hasta ahí: problema–oportunidad real y observable, bloqueadores y ensanchadores, técnicas de ideación. Guías escritas: `Quiz 1 (6%)` y `Parcial 1 (24%)` en `Recursos/ACAs/`.</a:t>
+                        <a:t>: la lectura autónoma </a:t>
+                      </a:r>
+                      <a:r>
+                        <a:rPr sz="1100" b="1" i="0">
+                          <a:solidFill>
+                            <a:srgbClr val="2B2B2B"/>
+                          </a:solidFill>
+                          <a:latin typeface="Calibri"/>
+                        </a:rPr>
+                        <a:t>U1–U2</a:t>
+                      </a:r>
+                      <a:r>
+                        <a:rPr sz="1100" b="0" i="0">
+                          <a:solidFill>
+                            <a:srgbClr val="2B2B2B"/>
+                          </a:solidFill>
+                          <a:latin typeface="Calibri"/>
+                        </a:rPr>
+                        <a:t> del Syllabus —la </a:t>
+                      </a:r>
+                      <a:r>
+                        <a:rPr sz="1100" b="1" i="0">
+                          <a:solidFill>
+                            <a:srgbClr val="2B2B2B"/>
+                          </a:solidFill>
+                          <a:latin typeface="Calibri"/>
+                        </a:rPr>
+                        <a:t>Propuesta de Innovación</a:t>
+                      </a:r>
+                      <a:r>
+                        <a:rPr sz="1100" b="0" i="0">
+                          <a:solidFill>
+                            <a:srgbClr val="2B2B2B"/>
+                          </a:solidFill>
+                          <a:latin typeface="Calibri"/>
+                        </a:rPr>
+                        <a:t> y el orden de sus partes, el problema–oportunidad </a:t>
+                      </a:r>
+                      <a:r>
+                        <a:rPr sz="1100" b="1" i="0">
+                          <a:solidFill>
+                            <a:srgbClr val="2B2B2B"/>
+                          </a:solidFill>
+                          <a:latin typeface="Calibri"/>
+                        </a:rPr>
+                        <a:t>real y observable</a:t>
+                      </a:r>
+                      <a:r>
+                        <a:rPr sz="1100" b="0" i="0">
+                          <a:solidFill>
+                            <a:srgbClr val="2B2B2B"/>
+                          </a:solidFill>
+                          <a:latin typeface="Calibri"/>
+                        </a:rPr>
+                        <a:t> con un </a:t>
+                      </a:r>
+                      <a:r>
+                        <a:rPr sz="1100" b="1" i="0">
+                          <a:solidFill>
+                            <a:srgbClr val="2B2B2B"/>
+                          </a:solidFill>
+                          <a:latin typeface="Calibri"/>
+                        </a:rPr>
+                        <a:t>usuario concreto</a:t>
+                      </a:r>
+                      <a:r>
+                        <a:rPr sz="1100" b="0" i="0">
+                          <a:solidFill>
+                            <a:srgbClr val="2B2B2B"/>
+                          </a:solidFill>
+                          <a:latin typeface="Calibri"/>
+                        </a:rPr>
+                        <a:t>, y </a:t>
+                      </a:r>
+                      <a:r>
+                        <a:rPr sz="1100" b="1" i="0">
+                          <a:solidFill>
+                            <a:srgbClr val="2B2B2B"/>
+                          </a:solidFill>
+                          <a:latin typeface="Calibri"/>
+                        </a:rPr>
+                        <a:t>la inteligencia emocional y su incidencia en la innovación y la creatividad</a:t>
+                      </a:r>
+                      <a:r>
+                        <a:rPr sz="1100" b="0" i="0">
+                          <a:solidFill>
+                            <a:srgbClr val="2B2B2B"/>
+                          </a:solidFill>
+                          <a:latin typeface="Calibri"/>
+                        </a:rPr>
+                        <a:t> (U2, en palabras del Syllabus)—. De la </a:t>
+                      </a:r>
+                      <a:r>
+                        <a:rPr sz="1100" b="1" i="0">
+                          <a:solidFill>
+                            <a:srgbClr val="2B2B2B"/>
+                          </a:solidFill>
+                          <a:latin typeface="Calibri"/>
+                        </a:rPr>
+                        <a:t>lectura obligatoria</a:t>
+                      </a:r>
+                      <a:r>
+                        <a:rPr sz="1100" b="0" i="0">
+                          <a:solidFill>
+                            <a:srgbClr val="2B2B2B"/>
+                          </a:solidFill>
+                          <a:latin typeface="Calibri"/>
+                        </a:rPr>
+                        <a:t> entra </a:t>
+                      </a:r>
+                      <a:r>
+                        <a:rPr sz="1100" b="1" i="0">
+                          <a:solidFill>
+                            <a:srgbClr val="2B2B2B"/>
+                          </a:solidFill>
+                          <a:latin typeface="Calibri"/>
+                        </a:rPr>
+                        <a:t>lo que reporta</a:t>
+                      </a:r>
+                      <a:r>
+                        <a:rPr sz="1100" b="0" i="0">
+                          <a:solidFill>
+                            <a:srgbClr val="2B2B2B"/>
+                          </a:solidFill>
+                          <a:latin typeface="Calibri"/>
+                        </a:rPr>
+                        <a:t> (qué estudió y qué encontró): el </a:t>
+                      </a:r>
+                      <a:r>
+                        <a:rPr sz="1100" b="1" i="0">
+                          <a:solidFill>
+                            <a:srgbClr val="2B2B2B"/>
+                          </a:solidFill>
+                          <a:latin typeface="Calibri"/>
+                        </a:rPr>
+                        <a:t>archivo está en alcance</a:t>
+                      </a:r>
+                      <a:r>
+                        <a:rPr sz="1100" b="0" i="0">
+                          <a:solidFill>
+                            <a:srgbClr val="2B2B2B"/>
+                          </a:solidFill>
+                          <a:latin typeface="Calibri"/>
+                        </a:rPr>
+                        <a:t>, el </a:t>
+                      </a:r>
+                      <a:r>
+                        <a:rPr sz="1100" b="1" i="0">
+                          <a:solidFill>
+                            <a:srgbClr val="2B2B2B"/>
+                          </a:solidFill>
+                          <a:latin typeface="Calibri"/>
+                        </a:rPr>
+                        <a:t>método Design Thinking no</a:t>
+                      </a:r>
+                      <a:r>
+                        <a:rPr sz="1100" b="0" i="0">
+                          <a:solidFill>
+                            <a:srgbClr val="2B2B2B"/>
+                          </a:solidFill>
+                          <a:latin typeface="Calibri"/>
+                        </a:rPr>
+                        <a:t>. Guía: `Quiz 1 (6%)` en `Recursos/ACAs/`.</a:t>
                       </a:r>
                     </a:p>
                   </a:txBody>
@@ -14826,7 +15041,34 @@
                           </a:solidFill>
                           <a:latin typeface="Calibri"/>
                         </a:rPr>
-                        <a:t>Corte 2</a:t>
+                        <a:t>Corte 1</a:t>
+                      </a:r>
+                      <a:r>
+                        <a:rPr sz="1100" b="0" i="0">
+                          <a:solidFill>
+                            <a:srgbClr val="2B2B2B"/>
+                          </a:solidFill>
+                          <a:latin typeface="Calibri"/>
+                        </a:rPr>
+                        <a:t> · </a:t>
+                      </a:r>
+                      <a:r>
+                        <a:rPr sz="1100" b="1" i="0">
+                          <a:solidFill>
+                            <a:srgbClr val="2B2B2B"/>
+                          </a:solidFill>
+                          <a:latin typeface="Calibri"/>
+                        </a:rPr>
+                        <a:t>Parcial 1</a:t>
+                      </a:r>
+                      <a:r>
+                        <a:rPr sz="1100" b="0" i="0">
+                          <a:solidFill>
+                            <a:srgbClr val="2B2B2B"/>
+                          </a:solidFill>
+                          <a:latin typeface="Calibri"/>
+                        </a:rPr>
+                        <a:t> (24%)</a:t>
                       </a:r>
                     </a:p>
                   </a:txBody>
@@ -14843,40 +15085,13 @@
                     <a:p>
                       <a:pPr algn="l"/>
                       <a:r>
-                        <a:rPr sz="1100" b="1" i="0">
-                          <a:solidFill>
-                            <a:srgbClr val="2B2B2B"/>
-                          </a:solidFill>
-                          <a:latin typeface="Calibri"/>
-                        </a:rPr>
-                        <a:t>Quiz 2</a:t>
-                      </a:r>
-                      <a:r>
                         <a:rPr sz="1100" b="0" i="0">
                           <a:solidFill>
                             <a:srgbClr val="2B2B2B"/>
                           </a:solidFill>
                           <a:latin typeface="Calibri"/>
                         </a:rPr>
-                        <a:t> y </a:t>
-                      </a:r>
-                      <a:r>
-                        <a:rPr sz="1100" b="1" i="0">
-                          <a:solidFill>
-                            <a:srgbClr val="2B2B2B"/>
-                          </a:solidFill>
-                          <a:latin typeface="Calibri"/>
-                        </a:rPr>
-                        <a:t>Parcial 2</a:t>
-                      </a:r>
-                      <a:r>
-                        <a:rPr sz="1100" b="0" i="0">
-                          <a:solidFill>
-                            <a:srgbClr val="2B2B2B"/>
-                          </a:solidFill>
-                          <a:latin typeface="Calibri"/>
-                        </a:rPr>
-                        <a:t>: también cuestionarios en el aula.</a:t>
+                        <a:t>Cuestionario que se resuelve en el aula, dentro de su ventana. No se sube archivo.</a:t>
                       </a:r>
                     </a:p>
                   </a:txBody>
@@ -14899,7 +15114,7 @@
                           </a:solidFill>
                           <a:latin typeface="Calibri"/>
                         </a:rPr>
-                        <a:t>Tipificar la propuesta (</a:t>
+                        <a:t>Lo del Quiz 1 </a:t>
                       </a:r>
                       <a:r>
                         <a:rPr sz="1100" b="1" i="0">
@@ -14908,7 +15123,7 @@
                           </a:solidFill>
                           <a:latin typeface="Calibri"/>
                         </a:rPr>
-                        <a:t>Manual de Oslo</a:t>
+                        <a:t>más la Sesión 02</a:t>
                       </a:r>
                       <a:r>
                         <a:rPr sz="1100" b="0" i="0">
@@ -14917,7 +15132,7 @@
                           </a:solidFill>
                           <a:latin typeface="Calibri"/>
                         </a:rPr>
-                        <a:t>) y validarla: cuadro comparativo, </a:t>
+                        <a:t>: </a:t>
                       </a:r>
                       <a:r>
                         <a:rPr sz="1100" b="1" i="0">
@@ -14926,7 +15141,7 @@
                           </a:solidFill>
                           <a:latin typeface="Calibri"/>
                         </a:rPr>
-                        <a:t>FODA</a:t>
+                        <a:t>Design Thinking como método</a:t>
                       </a:r>
                       <a:r>
                         <a:rPr sz="1100" b="0" i="0">
@@ -14935,7 +15150,7 @@
                           </a:solidFill>
                           <a:latin typeface="Calibri"/>
                         </a:rPr>
-                        <a:t>, </a:t>
+                        <a:t> y sus fases, las </a:t>
                       </a:r>
                       <a:r>
                         <a:rPr sz="1100" b="1" i="0">
@@ -14944,7 +15159,7 @@
                           </a:solidFill>
                           <a:latin typeface="Calibri"/>
                         </a:rPr>
-                        <a:t>Canvas</a:t>
+                        <a:t>técnicas de ideación</a:t>
                       </a:r>
                       <a:r>
                         <a:rPr sz="1100" b="0" i="0">
@@ -14953,7 +15168,7 @@
                           </a:solidFill>
                           <a:latin typeface="Calibri"/>
                         </a:rPr>
-                        <a:t> y </a:t>
+                        <a:t> del Syllabus (árbol de problemas, seis sombreros, SCAMPER, océano azul) y </a:t>
                       </a:r>
                       <a:r>
                         <a:rPr sz="1100" b="1" i="0">
@@ -14962,7 +15177,7 @@
                           </a:solidFill>
                           <a:latin typeface="Calibri"/>
                         </a:rPr>
-                        <a:t>MVP</a:t>
+                        <a:t>divergencia/convergencia</a:t>
                       </a:r>
                       <a:r>
                         <a:rPr sz="1100" b="0" i="0">
@@ -14971,7 +15186,43 @@
                           </a:solidFill>
                           <a:latin typeface="Calibri"/>
                         </a:rPr>
-                        <a:t> aplicados a su propia propuesta. Guías: `Quiz 2 (9%)` y `Parcial 2 (21%)`.</a:t>
+                        <a:t>. Aquí sí se pregunta el </a:t>
+                      </a:r>
+                      <a:r>
+                        <a:rPr sz="1100" b="1" i="0">
+                          <a:solidFill>
+                            <a:srgbClr val="2B2B2B"/>
+                          </a:solidFill>
+                          <a:latin typeface="Calibri"/>
+                        </a:rPr>
+                        <a:t>método</a:t>
+                      </a:r>
+                      <a:r>
+                        <a:rPr sz="1100" b="0" i="0">
+                          <a:solidFill>
+                            <a:srgbClr val="2B2B2B"/>
+                          </a:solidFill>
+                          <a:latin typeface="Calibri"/>
+                        </a:rPr>
+                        <a:t>, y entra todo lo dictado </a:t>
+                      </a:r>
+                      <a:r>
+                        <a:rPr sz="1100" b="1" i="0">
+                          <a:solidFill>
+                            <a:srgbClr val="2B2B2B"/>
+                          </a:solidFill>
+                          <a:latin typeface="Calibri"/>
+                        </a:rPr>
+                        <a:t>antes</a:t>
+                      </a:r>
+                      <a:r>
+                        <a:rPr sz="1100" b="0" i="0">
+                          <a:solidFill>
+                            <a:srgbClr val="2B2B2B"/>
+                          </a:solidFill>
+                          <a:latin typeface="Calibri"/>
+                        </a:rPr>
+                        <a:t> de que cierre la ventana. Guía: `Parcial 1 (24%)` en `Recursos/ACAs/`.</a:t>
                       </a:r>
                     </a:p>
                   </a:txBody>
@@ -14996,7 +15247,7 @@
                           </a:solidFill>
                           <a:latin typeface="Calibri"/>
                         </a:rPr>
-                        <a:t>Corte 3</a:t>
+                        <a:t>Corte 2</a:t>
                       </a:r>
                     </a:p>
                   </a:txBody>
@@ -15019,7 +15270,7 @@
                           </a:solidFill>
                           <a:latin typeface="Calibri"/>
                         </a:rPr>
-                        <a:t>Quiz 3</a:t>
+                        <a:t>Quiz 2</a:t>
                       </a:r>
                       <a:r>
                         <a:rPr sz="1100" b="0" i="0">
@@ -15028,7 +15279,7 @@
                           </a:solidFill>
                           <a:latin typeface="Calibri"/>
                         </a:rPr>
-                        <a:t> (cuestionario) + </a:t>
+                        <a:t> y </a:t>
                       </a:r>
                       <a:r>
                         <a:rPr sz="1100" b="1" i="0">
@@ -15037,7 +15288,7 @@
                           </a:solidFill>
                           <a:latin typeface="Calibri"/>
                         </a:rPr>
-                        <a:t>ACA Final</a:t>
+                        <a:t>Parcial 2</a:t>
                       </a:r>
                       <a:r>
                         <a:rPr sz="1100" b="0" i="0">
@@ -15046,43 +15297,7 @@
                           </a:solidFill>
                           <a:latin typeface="Calibri"/>
                         </a:rPr>
-                        <a:t> (tarea: el único documento que se sube) + </a:t>
-                      </a:r>
-                      <a:r>
-                        <a:rPr sz="1100" b="1" i="0">
-                          <a:solidFill>
-                            <a:srgbClr val="2B2B2B"/>
-                          </a:solidFill>
-                          <a:latin typeface="Calibri"/>
-                        </a:rPr>
-                        <a:t>autoevaluación</a:t>
-                      </a:r>
-                      <a:r>
-                        <a:rPr sz="1100" b="0" i="0">
-                          <a:solidFill>
-                            <a:srgbClr val="2B2B2B"/>
-                          </a:solidFill>
-                          <a:latin typeface="Calibri"/>
-                        </a:rPr>
-                        <a:t> (cuestionario) y </a:t>
-                      </a:r>
-                      <a:r>
-                        <a:rPr sz="1100" b="1" i="0">
-                          <a:solidFill>
-                            <a:srgbClr val="2B2B2B"/>
-                          </a:solidFill>
-                          <a:latin typeface="Calibri"/>
-                        </a:rPr>
-                        <a:t>coevaluación</a:t>
-                      </a:r>
-                      <a:r>
-                        <a:rPr sz="1100" b="0" i="0">
-                          <a:solidFill>
-                            <a:srgbClr val="2B2B2B"/>
-                          </a:solidFill>
-                          <a:latin typeface="Calibri"/>
-                        </a:rPr>
-                        <a:t> (foro).</a:t>
+                        <a:t>: también cuestionarios en el aula.</a:t>
                       </a:r>
                     </a:p>
                   </a:txBody>
@@ -15105,7 +15320,7 @@
                           </a:solidFill>
                           <a:latin typeface="Calibri"/>
                         </a:rPr>
-                        <a:t>La </a:t>
+                        <a:t>Tipificar la propuesta (</a:t>
                       </a:r>
                       <a:r>
                         <a:rPr sz="1100" b="1" i="0">
@@ -15114,7 +15329,7 @@
                           </a:solidFill>
                           <a:latin typeface="Calibri"/>
                         </a:rPr>
-                        <a:t>Propuesta de Innovación</a:t>
+                        <a:t>Manual de Oslo</a:t>
                       </a:r>
                       <a:r>
                         <a:rPr sz="1100" b="0" i="0">
@@ -15123,7 +15338,7 @@
                           </a:solidFill>
                           <a:latin typeface="Calibri"/>
                         </a:rPr>
-                        <a:t> consolidada: problema → propuesta → validación → vigilancia → entidades de apoyo + </a:t>
+                        <a:t>) y validarla: cuadro comparativo, </a:t>
                       </a:r>
                       <a:r>
                         <a:rPr sz="1100" b="1" i="0">
@@ -15132,7 +15347,7 @@
                           </a:solidFill>
                           <a:latin typeface="Calibri"/>
                         </a:rPr>
-                        <a:t>pitch de 1 página</a:t>
+                        <a:t>FODA</a:t>
                       </a:r>
                       <a:r>
                         <a:rPr sz="1100" b="0" i="0">
@@ -15141,7 +15356,43 @@
                           </a:solidFill>
                           <a:latin typeface="Calibri"/>
                         </a:rPr>
-                        <a:t> (8–12 págs.). Guías: `Quiz 3 (4%)` y `ACA Final (32,8%)`.</a:t>
+                        <a:t>, </a:t>
+                      </a:r>
+                      <a:r>
+                        <a:rPr sz="1100" b="1" i="0">
+                          <a:solidFill>
+                            <a:srgbClr val="2B2B2B"/>
+                          </a:solidFill>
+                          <a:latin typeface="Calibri"/>
+                        </a:rPr>
+                        <a:t>Canvas</a:t>
+                      </a:r>
+                      <a:r>
+                        <a:rPr sz="1100" b="0" i="0">
+                          <a:solidFill>
+                            <a:srgbClr val="2B2B2B"/>
+                          </a:solidFill>
+                          <a:latin typeface="Calibri"/>
+                        </a:rPr>
+                        <a:t> y </a:t>
+                      </a:r>
+                      <a:r>
+                        <a:rPr sz="1100" b="1" i="0">
+                          <a:solidFill>
+                            <a:srgbClr val="2B2B2B"/>
+                          </a:solidFill>
+                          <a:latin typeface="Calibri"/>
+                        </a:rPr>
+                        <a:t>MVP</a:t>
+                      </a:r>
+                      <a:r>
+                        <a:rPr sz="1100" b="0" i="0">
+                          <a:solidFill>
+                            <a:srgbClr val="2B2B2B"/>
+                          </a:solidFill>
+                          <a:latin typeface="Calibri"/>
+                        </a:rPr>
+                        <a:t> aplicados a su propia propuesta. Guías: `Quiz 2 (9%)` y `Parcial 2 (21%)`.</a:t>
                       </a:r>
                     </a:p>
                   </a:txBody>
@@ -15152,44 +15403,180 @@
                   </a:tcPr>
                 </a:tc>
               </a:tr>
+              <a:tr h="502920">
+                <a:tc>
+                  <a:txBody>
+                    <a:bodyPr/>
+                    <a:lstStyle/>
+                    <a:p>
+                      <a:pPr algn="l"/>
+                      <a:r>
+                        <a:rPr sz="1100" b="1" i="0">
+                          <a:solidFill>
+                            <a:srgbClr val="2B2B2B"/>
+                          </a:solidFill>
+                          <a:latin typeface="Calibri"/>
+                        </a:rPr>
+                        <a:t>Corte 3</a:t>
+                      </a:r>
+                    </a:p>
+                  </a:txBody>
+                  <a:tcPr anchor="ctr" marL="109728" marR="91440" marT="36576" marB="36576">
+                    <a:solidFill>
+                      <a:srgbClr val="F2F2F2"/>
+                    </a:solidFill>
+                  </a:tcPr>
+                </a:tc>
+                <a:tc>
+                  <a:txBody>
+                    <a:bodyPr/>
+                    <a:lstStyle/>
+                    <a:p>
+                      <a:pPr algn="l"/>
+                      <a:r>
+                        <a:rPr sz="1100" b="1" i="0">
+                          <a:solidFill>
+                            <a:srgbClr val="2B2B2B"/>
+                          </a:solidFill>
+                          <a:latin typeface="Calibri"/>
+                        </a:rPr>
+                        <a:t>Quiz 3</a:t>
+                      </a:r>
+                      <a:r>
+                        <a:rPr sz="1100" b="0" i="0">
+                          <a:solidFill>
+                            <a:srgbClr val="2B2B2B"/>
+                          </a:solidFill>
+                          <a:latin typeface="Calibri"/>
+                        </a:rPr>
+                        <a:t> (cuestionario) + </a:t>
+                      </a:r>
+                      <a:r>
+                        <a:rPr sz="1100" b="1" i="0">
+                          <a:solidFill>
+                            <a:srgbClr val="2B2B2B"/>
+                          </a:solidFill>
+                          <a:latin typeface="Calibri"/>
+                        </a:rPr>
+                        <a:t>ACA Final</a:t>
+                      </a:r>
+                      <a:r>
+                        <a:rPr sz="1100" b="0" i="0">
+                          <a:solidFill>
+                            <a:srgbClr val="2B2B2B"/>
+                          </a:solidFill>
+                          <a:latin typeface="Calibri"/>
+                        </a:rPr>
+                        <a:t> (tarea: el único documento que se sube) + </a:t>
+                      </a:r>
+                      <a:r>
+                        <a:rPr sz="1100" b="1" i="0">
+                          <a:solidFill>
+                            <a:srgbClr val="2B2B2B"/>
+                          </a:solidFill>
+                          <a:latin typeface="Calibri"/>
+                        </a:rPr>
+                        <a:t>autoevaluación</a:t>
+                      </a:r>
+                      <a:r>
+                        <a:rPr sz="1100" b="0" i="0">
+                          <a:solidFill>
+                            <a:srgbClr val="2B2B2B"/>
+                          </a:solidFill>
+                          <a:latin typeface="Calibri"/>
+                        </a:rPr>
+                        <a:t> (cuestionario) y </a:t>
+                      </a:r>
+                      <a:r>
+                        <a:rPr sz="1100" b="1" i="0">
+                          <a:solidFill>
+                            <a:srgbClr val="2B2B2B"/>
+                          </a:solidFill>
+                          <a:latin typeface="Calibri"/>
+                        </a:rPr>
+                        <a:t>coevaluación</a:t>
+                      </a:r>
+                      <a:r>
+                        <a:rPr sz="1100" b="0" i="0">
+                          <a:solidFill>
+                            <a:srgbClr val="2B2B2B"/>
+                          </a:solidFill>
+                          <a:latin typeface="Calibri"/>
+                        </a:rPr>
+                        <a:t> (foro).</a:t>
+                      </a:r>
+                    </a:p>
+                  </a:txBody>
+                  <a:tcPr anchor="ctr" marL="109728" marR="91440" marT="36576" marB="36576">
+                    <a:solidFill>
+                      <a:srgbClr val="F2F2F2"/>
+                    </a:solidFill>
+                  </a:tcPr>
+                </a:tc>
+                <a:tc>
+                  <a:txBody>
+                    <a:bodyPr/>
+                    <a:lstStyle/>
+                    <a:p>
+                      <a:pPr algn="l"/>
+                      <a:r>
+                        <a:rPr sz="1100" b="0" i="0">
+                          <a:solidFill>
+                            <a:srgbClr val="2B2B2B"/>
+                          </a:solidFill>
+                          <a:latin typeface="Calibri"/>
+                        </a:rPr>
+                        <a:t>La </a:t>
+                      </a:r>
+                      <a:r>
+                        <a:rPr sz="1100" b="1" i="0">
+                          <a:solidFill>
+                            <a:srgbClr val="2B2B2B"/>
+                          </a:solidFill>
+                          <a:latin typeface="Calibri"/>
+                        </a:rPr>
+                        <a:t>Propuesta de Innovación</a:t>
+                      </a:r>
+                      <a:r>
+                        <a:rPr sz="1100" b="0" i="0">
+                          <a:solidFill>
+                            <a:srgbClr val="2B2B2B"/>
+                          </a:solidFill>
+                          <a:latin typeface="Calibri"/>
+                        </a:rPr>
+                        <a:t> consolidada: problema → propuesta → validación → vigilancia → entidades de apoyo + </a:t>
+                      </a:r>
+                      <a:r>
+                        <a:rPr sz="1100" b="1" i="0">
+                          <a:solidFill>
+                            <a:srgbClr val="2B2B2B"/>
+                          </a:solidFill>
+                          <a:latin typeface="Calibri"/>
+                        </a:rPr>
+                        <a:t>pitch de 1 página</a:t>
+                      </a:r>
+                      <a:r>
+                        <a:rPr sz="1100" b="0" i="0">
+                          <a:solidFill>
+                            <a:srgbClr val="2B2B2B"/>
+                          </a:solidFill>
+                          <a:latin typeface="Calibri"/>
+                        </a:rPr>
+                        <a:t> (8–12 págs.). Guías: `Quiz 3 (4%)` y `ACA Final (32,8%)`.</a:t>
+                      </a:r>
+                    </a:p>
+                  </a:txBody>
+                  <a:tcPr anchor="ctr" marL="109728" marR="91440" marT="36576" marB="36576">
+                    <a:solidFill>
+                      <a:srgbClr val="F2F2F2"/>
+                    </a:solidFill>
+                  </a:tcPr>
+                </a:tc>
+              </a:tr>
             </a:tbl>
           </a:graphicData>
         </a:graphic>
       </p:graphicFrame>
-      <p:sp>
-        <p:nvSpPr>
-          <p:cNvPr id="5" name="TextBox 4"/>
-          <p:cNvSpPr txBox="1"/>
-          <p:nvPr/>
-        </p:nvSpPr>
-        <p:spPr>
-          <a:xfrm>
-            <a:off x="640080" y="3840480"/>
-            <a:ext cx="10911535" cy="548640"/>
-          </a:xfrm>
-          <a:prstGeom prst="rect">
-            <a:avLst/>
-          </a:prstGeom>
-          <a:noFill/>
-        </p:spPr>
-        <p:txBody>
-          <a:bodyPr wrap="square" anchor="t" lIns="0" rIns="0" tIns="0" bIns="0">
-            <a:spAutoFit/>
-          </a:bodyPr>
-          <a:lstStyle/>
-          <a:p>
-            <a:r>
-              <a:rPr sz="1200" b="0" i="1">
-                <a:solidFill>
-                  <a:srgbClr val="2B2B2B"/>
-                </a:solidFill>
-                <a:latin typeface="Calibri"/>
-              </a:rPr>
-              <a:t>El peso de cada ítem está en la slide «CÓMO SE EVALÚA» de esta misma sesión, con el tipo de actividad. Enunciados y checklists: `Clases/Recursos/ACAs/`; fechas exactas, en la Presentación del Curso.</a:t>
-            </a:r>
-          </a:p>
-        </p:txBody>
-      </p:sp>
       <p:sp>
         <p:nvSpPr>
           <p:cNvPr id="6" name="TextBox 5"/>

--- a/Pregrado/Creatividad y pensamiento innovador/Clases/Sesion 01 - Presentación del curso · docente · estudiantes · ACAs/Presentacion.pptx
+++ b/Pregrado/Creatividad y pensamiento innovador/Clases/Sesion 01 - Presentación del curso · docente · estudiantes · ACAs/Presentacion.pptx
@@ -28,6 +28,7 @@
     <p:sldId id="276" r:id="rId27"/>
     <p:sldId id="277" r:id="rId28"/>
     <p:sldId id="278" r:id="rId29"/>
+    <p:sldId id="279" r:id="rId30"/>
   </p:sldIdLst>
   <p:sldSz cx="12191695" cy="6858000" type="screen4x3"/>
   <p:notesSz cx="6858000" cy="9144000"/>
@@ -10014,6 +10015,1214 @@
 </file>
 
 <file path=ppt/slides/slide23.xml><?xml version="1.0" encoding="utf-8"?>
+<p:sld xmlns:a="http://schemas.openxmlformats.org/drawingml/2006/main" xmlns:p="http://schemas.openxmlformats.org/presentationml/2006/main" xmlns:r="http://schemas.openxmlformats.org/officeDocument/2006/relationships">
+  <p:cSld>
+    <p:bg>
+      <p:bgPr>
+        <a:solidFill>
+          <a:srgbClr val="FFFFFF"/>
+        </a:solidFill>
+        <a:effectLst/>
+      </p:bgPr>
+    </p:bg>
+    <p:spTree>
+      <p:nvGrpSpPr>
+        <p:cNvPr id="1" name=""/>
+        <p:cNvGrpSpPr/>
+        <p:nvPr/>
+      </p:nvGrpSpPr>
+      <p:grpSpPr/>
+      <p:sp>
+        <p:nvSpPr>
+          <p:cNvPr id="2" name="Rectangle 1"/>
+          <p:cNvSpPr/>
+          <p:nvPr/>
+        </p:nvSpPr>
+        <p:spPr>
+          <a:xfrm>
+            <a:off x="0" y="0"/>
+            <a:ext cx="12191695" cy="1188720"/>
+          </a:xfrm>
+          <a:prstGeom prst="rect">
+            <a:avLst/>
+          </a:prstGeom>
+          <a:solidFill>
+            <a:srgbClr val="0C2340"/>
+          </a:solidFill>
+          <a:ln>
+            <a:noFill/>
+          </a:ln>
+          <a:effectLst/>
+        </p:spPr>
+        <p:style>
+          <a:lnRef idx="1">
+            <a:schemeClr val="accent1"/>
+          </a:lnRef>
+          <a:fillRef idx="3">
+            <a:schemeClr val="accent1"/>
+          </a:fillRef>
+          <a:effectRef idx="2">
+            <a:schemeClr val="accent1"/>
+          </a:effectRef>
+          <a:fontRef idx="minor">
+            <a:schemeClr val="lt1"/>
+          </a:fontRef>
+        </p:style>
+        <p:txBody>
+          <a:bodyPr rtlCol="0" anchor="ctr"/>
+          <a:lstStyle/>
+          <a:p>
+            <a:pPr algn="ctr"/>
+          </a:p>
+        </p:txBody>
+      </p:sp>
+      <p:sp>
+        <p:nvSpPr>
+          <p:cNvPr id="3" name="TextBox 2"/>
+          <p:cNvSpPr txBox="1"/>
+          <p:nvPr/>
+        </p:nvSpPr>
+        <p:spPr>
+          <a:xfrm>
+            <a:off x="640080" y="0"/>
+            <a:ext cx="9082735" cy="1188720"/>
+          </a:xfrm>
+          <a:prstGeom prst="rect">
+            <a:avLst/>
+          </a:prstGeom>
+          <a:noFill/>
+        </p:spPr>
+        <p:txBody>
+          <a:bodyPr wrap="square" anchor="ctr" lIns="0" rIns="0" tIns="0" bIns="0">
+            <a:spAutoFit/>
+          </a:bodyPr>
+          <a:lstStyle/>
+          <a:p>
+            <a:pPr algn="ctr"/>
+            <a:r>
+              <a:rPr sz="2600" b="1" i="0">
+                <a:solidFill>
+                  <a:srgbClr val="FFFFFF"/>
+                </a:solidFill>
+                <a:latin typeface="Calibri"/>
+              </a:rPr>
+              <a:t>RUTA DE ENTREGABLES DEL CURSO</a:t>
+            </a:r>
+          </a:p>
+        </p:txBody>
+      </p:sp>
+      <p:sp>
+        <p:nvSpPr>
+          <p:cNvPr id="4" name="TextBox 3"/>
+          <p:cNvSpPr txBox="1"/>
+          <p:nvPr/>
+        </p:nvSpPr>
+        <p:spPr>
+          <a:xfrm>
+            <a:off x="640080" y="1280160"/>
+            <a:ext cx="10911535" cy="411480"/>
+          </a:xfrm>
+          <a:prstGeom prst="rect">
+            <a:avLst/>
+          </a:prstGeom>
+          <a:noFill/>
+        </p:spPr>
+        <p:txBody>
+          <a:bodyPr wrap="square" anchor="t" lIns="0" rIns="0" tIns="0" bIns="0">
+            <a:spAutoFit/>
+          </a:bodyPr>
+          <a:lstStyle/>
+          <a:p>
+            <a:pPr algn="ctr"/>
+            <a:r>
+              <a:rPr sz="1500" b="0" i="0">
+                <a:solidFill>
+                  <a:srgbClr val="2B2B2B"/>
+                </a:solidFill>
+                <a:latin typeface="Calibri"/>
+              </a:rPr>
+              <a:t>Sin fechas a propósito: aquí va </a:t>
+            </a:r>
+            <a:r>
+              <a:rPr sz="1500" b="1" i="0">
+                <a:solidFill>
+                  <a:srgbClr val="2B2B2B"/>
+                </a:solidFill>
+                <a:latin typeface="Calibri"/>
+              </a:rPr>
+              <a:t>en qué punto del curso</a:t>
+            </a:r>
+            <a:r>
+              <a:rPr sz="1500" b="0" i="0">
+                <a:solidFill>
+                  <a:srgbClr val="2B2B2B"/>
+                </a:solidFill>
+                <a:latin typeface="Calibri"/>
+              </a:rPr>
+              <a:t> cierra cada ítem · la ventana exacta la fija CDigital</a:t>
+            </a:r>
+          </a:p>
+        </p:txBody>
+      </p:sp>
+      <p:graphicFrame>
+        <p:nvGraphicFramePr>
+          <p:cNvPr id="5" name="Table 4"/>
+          <p:cNvGraphicFramePr>
+            <a:graphicFrameLocks noGrp="1"/>
+          </p:cNvGraphicFramePr>
+          <p:nvPr/>
+        </p:nvGraphicFramePr>
+        <p:xfrm>
+          <a:off x="640080" y="2011679"/>
+          <a:ext cx="10911533" cy="4297680"/>
+        </p:xfrm>
+        <a:graphic>
+          <a:graphicData uri="http://schemas.openxmlformats.org/drawingml/2006/table">
+            <a:tbl>
+              <a:tblPr>
+                <a:tableStyleId>{2D5ABB26-0587-4C30-8999-92F81FD0307C}</a:tableStyleId>
+              </a:tblPr>
+              <a:tblGrid>
+                <a:gridCol w="2659113"/>
+                <a:gridCol w="2659113"/>
+                <a:gridCol w="5593307"/>
+              </a:tblGrid>
+              <a:tr h="477520">
+                <a:tc>
+                  <a:txBody>
+                    <a:bodyPr/>
+                    <a:lstStyle/>
+                    <a:p>
+                      <a:pPr algn="l"/>
+                      <a:r>
+                        <a:rPr sz="1300" b="1" i="0">
+                          <a:solidFill>
+                            <a:srgbClr val="FFFFFF"/>
+                          </a:solidFill>
+                          <a:latin typeface="Calibri"/>
+                        </a:rPr>
+                        <a:t>Cierra en la semana de…</a:t>
+                      </a:r>
+                    </a:p>
+                  </a:txBody>
+                  <a:tcPr anchor="ctr" marL="109728" marR="91440" marT="36576" marB="36576">
+                    <a:solidFill>
+                      <a:srgbClr val="0C2340"/>
+                    </a:solidFill>
+                  </a:tcPr>
+                </a:tc>
+                <a:tc>
+                  <a:txBody>
+                    <a:bodyPr/>
+                    <a:lstStyle/>
+                    <a:p>
+                      <a:pPr algn="l"/>
+                      <a:r>
+                        <a:rPr sz="1300" b="1" i="0">
+                          <a:solidFill>
+                            <a:srgbClr val="FFFFFF"/>
+                          </a:solidFill>
+                          <a:latin typeface="Calibri"/>
+                        </a:rPr>
+                        <a:t>Entregable</a:t>
+                      </a:r>
+                    </a:p>
+                  </a:txBody>
+                  <a:tcPr anchor="ctr" marL="109728" marR="91440" marT="36576" marB="36576">
+                    <a:solidFill>
+                      <a:srgbClr val="0C2340"/>
+                    </a:solidFill>
+                  </a:tcPr>
+                </a:tc>
+                <a:tc>
+                  <a:txBody>
+                    <a:bodyPr/>
+                    <a:lstStyle/>
+                    <a:p>
+                      <a:pPr algn="l"/>
+                      <a:r>
+                        <a:rPr sz="1300" b="1" i="0">
+                          <a:solidFill>
+                            <a:srgbClr val="FFFFFF"/>
+                          </a:solidFill>
+                          <a:latin typeface="Calibri"/>
+                        </a:rPr>
+                        <a:t>Qué debes tener listo</a:t>
+                      </a:r>
+                    </a:p>
+                  </a:txBody>
+                  <a:tcPr anchor="ctr" marL="109728" marR="91440" marT="36576" marB="36576">
+                    <a:solidFill>
+                      <a:srgbClr val="0C2340"/>
+                    </a:solidFill>
+                  </a:tcPr>
+                </a:tc>
+              </a:tr>
+              <a:tr h="477520">
+                <a:tc>
+                  <a:txBody>
+                    <a:bodyPr/>
+                    <a:lstStyle/>
+                    <a:p>
+                      <a:pPr algn="l"/>
+                      <a:r>
+                        <a:rPr sz="1100" b="1" i="0">
+                          <a:solidFill>
+                            <a:srgbClr val="2B2B2B"/>
+                          </a:solidFill>
+                          <a:latin typeface="Calibri"/>
+                        </a:rPr>
+                        <a:t>Sesión 02</a:t>
+                      </a:r>
+                      <a:r>
+                        <a:rPr sz="1100" b="0" i="0">
+                          <a:solidFill>
+                            <a:srgbClr val="2B2B2B"/>
+                          </a:solidFill>
+                          <a:latin typeface="Calibri"/>
+                        </a:rPr>
+                        <a:t> · pendiente</a:t>
+                      </a:r>
+                    </a:p>
+                  </a:txBody>
+                  <a:tcPr anchor="ctr" marL="109728" marR="91440" marT="36576" marB="36576">
+                    <a:solidFill>
+                      <a:srgbClr val="FFFFFF"/>
+                    </a:solidFill>
+                  </a:tcPr>
+                </a:tc>
+                <a:tc>
+                  <a:txBody>
+                    <a:bodyPr/>
+                    <a:lstStyle/>
+                    <a:p>
+                      <a:pPr algn="l"/>
+                      <a:r>
+                        <a:rPr sz="1100" b="1" i="0">
+                          <a:solidFill>
+                            <a:srgbClr val="2B2B2B"/>
+                          </a:solidFill>
+                          <a:latin typeface="Calibri"/>
+                        </a:rPr>
+                        <a:t>Quiz 1</a:t>
+                      </a:r>
+                      <a:r>
+                        <a:rPr sz="1100" b="0" i="0">
+                          <a:solidFill>
+                            <a:srgbClr val="2B2B2B"/>
+                          </a:solidFill>
+                          <a:latin typeface="Calibri"/>
+                        </a:rPr>
+                        <a:t> · Cuestionario · 6%</a:t>
+                      </a:r>
+                    </a:p>
+                  </a:txBody>
+                  <a:tcPr anchor="ctr" marL="109728" marR="91440" marT="36576" marB="36576">
+                    <a:solidFill>
+                      <a:srgbClr val="FFFFFF"/>
+                    </a:solidFill>
+                  </a:tcPr>
+                </a:tc>
+                <a:tc>
+                  <a:txBody>
+                    <a:bodyPr/>
+                    <a:lstStyle/>
+                    <a:p>
+                      <a:pPr algn="l"/>
+                      <a:r>
+                        <a:rPr sz="1100" b="0" i="0">
+                          <a:solidFill>
+                            <a:srgbClr val="2B2B2B"/>
+                          </a:solidFill>
+                          <a:latin typeface="Calibri"/>
+                        </a:rPr>
+                        <a:t>Ten leída la unidad del encuadre: </a:t>
+                      </a:r>
+                      <a:r>
+                        <a:rPr sz="1100" b="1" i="0">
+                          <a:solidFill>
+                            <a:srgbClr val="2B2B2B"/>
+                          </a:solidFill>
+                          <a:latin typeface="Calibri"/>
+                        </a:rPr>
+                        <a:t>Propuesta de Innovación</a:t>
+                      </a:r>
+                      <a:r>
+                        <a:rPr sz="1100" b="0" i="0">
+                          <a:solidFill>
+                            <a:srgbClr val="2B2B2B"/>
+                          </a:solidFill>
+                          <a:latin typeface="Calibri"/>
+                        </a:rPr>
+                        <a:t> e inteligencia emocional.</a:t>
+                      </a:r>
+                    </a:p>
+                  </a:txBody>
+                  <a:tcPr anchor="ctr" marL="109728" marR="91440" marT="36576" marB="36576">
+                    <a:solidFill>
+                      <a:srgbClr val="FFFFFF"/>
+                    </a:solidFill>
+                  </a:tcPr>
+                </a:tc>
+              </a:tr>
+              <a:tr h="477520">
+                <a:tc>
+                  <a:txBody>
+                    <a:bodyPr/>
+                    <a:lstStyle/>
+                    <a:p>
+                      <a:pPr algn="l"/>
+                      <a:r>
+                        <a:rPr sz="1100" b="1" i="0">
+                          <a:solidFill>
+                            <a:srgbClr val="2B2B2B"/>
+                          </a:solidFill>
+                          <a:latin typeface="Calibri"/>
+                        </a:rPr>
+                        <a:t>Sesión 03</a:t>
+                      </a:r>
+                      <a:r>
+                        <a:rPr sz="1100" b="0" i="0">
+                          <a:solidFill>
+                            <a:srgbClr val="2B2B2B"/>
+                          </a:solidFill>
+                          <a:latin typeface="Calibri"/>
+                        </a:rPr>
+                        <a:t> · pendiente</a:t>
+                      </a:r>
+                    </a:p>
+                  </a:txBody>
+                  <a:tcPr anchor="ctr" marL="109728" marR="91440" marT="36576" marB="36576">
+                    <a:solidFill>
+                      <a:srgbClr val="F2F2F2"/>
+                    </a:solidFill>
+                  </a:tcPr>
+                </a:tc>
+                <a:tc>
+                  <a:txBody>
+                    <a:bodyPr/>
+                    <a:lstStyle/>
+                    <a:p>
+                      <a:pPr algn="l"/>
+                      <a:r>
+                        <a:rPr sz="1100" b="1" i="0">
+                          <a:solidFill>
+                            <a:srgbClr val="2B2B2B"/>
+                          </a:solidFill>
+                          <a:latin typeface="Calibri"/>
+                        </a:rPr>
+                        <a:t>Parcial 1</a:t>
+                      </a:r>
+                      <a:r>
+                        <a:rPr sz="1100" b="0" i="0">
+                          <a:solidFill>
+                            <a:srgbClr val="2B2B2B"/>
+                          </a:solidFill>
+                          <a:latin typeface="Calibri"/>
+                        </a:rPr>
+                        <a:t> · Cuestionario · 24%</a:t>
+                      </a:r>
+                    </a:p>
+                  </a:txBody>
+                  <a:tcPr anchor="ctr" marL="109728" marR="91440" marT="36576" marB="36576">
+                    <a:solidFill>
+                      <a:srgbClr val="F2F2F2"/>
+                    </a:solidFill>
+                  </a:tcPr>
+                </a:tc>
+                <a:tc>
+                  <a:txBody>
+                    <a:bodyPr/>
+                    <a:lstStyle/>
+                    <a:p>
+                      <a:pPr algn="l"/>
+                      <a:r>
+                        <a:rPr sz="1100" b="0" i="0">
+                          <a:solidFill>
+                            <a:srgbClr val="2B2B2B"/>
+                          </a:solidFill>
+                          <a:latin typeface="Calibri"/>
+                        </a:rPr>
+                        <a:t>Domina </a:t>
+                      </a:r>
+                      <a:r>
+                        <a:rPr sz="1100" b="1" i="0">
+                          <a:solidFill>
+                            <a:srgbClr val="2B2B2B"/>
+                          </a:solidFill>
+                          <a:latin typeface="Calibri"/>
+                        </a:rPr>
+                        <a:t>Design Thinking</a:t>
+                      </a:r>
+                      <a:r>
+                        <a:rPr sz="1100" b="0" i="0">
+                          <a:solidFill>
+                            <a:srgbClr val="2B2B2B"/>
+                          </a:solidFill>
+                          <a:latin typeface="Calibri"/>
+                        </a:rPr>
+                        <a:t>, dos técnicas de ideación, bloqueadores y ensanchadores.</a:t>
+                      </a:r>
+                    </a:p>
+                  </a:txBody>
+                  <a:tcPr anchor="ctr" marL="109728" marR="91440" marT="36576" marB="36576">
+                    <a:solidFill>
+                      <a:srgbClr val="F2F2F2"/>
+                    </a:solidFill>
+                  </a:tcPr>
+                </a:tc>
+              </a:tr>
+              <a:tr h="477520">
+                <a:tc>
+                  <a:txBody>
+                    <a:bodyPr/>
+                    <a:lstStyle/>
+                    <a:p>
+                      <a:pPr algn="l"/>
+                      <a:r>
+                        <a:rPr sz="1100" b="1" i="0">
+                          <a:solidFill>
+                            <a:srgbClr val="2B2B2B"/>
+                          </a:solidFill>
+                          <a:latin typeface="Calibri"/>
+                        </a:rPr>
+                        <a:t>Sesión 04</a:t>
+                      </a:r>
+                      <a:r>
+                        <a:rPr sz="1100" b="0" i="0">
+                          <a:solidFill>
+                            <a:srgbClr val="2B2B2B"/>
+                          </a:solidFill>
+                          <a:latin typeface="Calibri"/>
+                        </a:rPr>
+                        <a:t> · pendiente</a:t>
+                      </a:r>
+                    </a:p>
+                  </a:txBody>
+                  <a:tcPr anchor="ctr" marL="109728" marR="91440" marT="36576" marB="36576">
+                    <a:solidFill>
+                      <a:srgbClr val="FFFFFF"/>
+                    </a:solidFill>
+                  </a:tcPr>
+                </a:tc>
+                <a:tc>
+                  <a:txBody>
+                    <a:bodyPr/>
+                    <a:lstStyle/>
+                    <a:p>
+                      <a:pPr algn="l"/>
+                      <a:r>
+                        <a:rPr sz="1100" b="1" i="0">
+                          <a:solidFill>
+                            <a:srgbClr val="2B2B2B"/>
+                          </a:solidFill>
+                          <a:latin typeface="Calibri"/>
+                        </a:rPr>
+                        <a:t>Quiz 2</a:t>
+                      </a:r>
+                      <a:r>
+                        <a:rPr sz="1100" b="0" i="0">
+                          <a:solidFill>
+                            <a:srgbClr val="2B2B2B"/>
+                          </a:solidFill>
+                          <a:latin typeface="Calibri"/>
+                        </a:rPr>
+                        <a:t> · Cuestionario · 9%</a:t>
+                      </a:r>
+                    </a:p>
+                  </a:txBody>
+                  <a:tcPr anchor="ctr" marL="109728" marR="91440" marT="36576" marB="36576">
+                    <a:solidFill>
+                      <a:srgbClr val="FFFFFF"/>
+                    </a:solidFill>
+                  </a:tcPr>
+                </a:tc>
+                <a:tc>
+                  <a:txBody>
+                    <a:bodyPr/>
+                    <a:lstStyle/>
+                    <a:p>
+                      <a:pPr algn="l"/>
+                      <a:r>
+                        <a:rPr sz="1100" b="0" i="0">
+                          <a:solidFill>
+                            <a:srgbClr val="2B2B2B"/>
+                          </a:solidFill>
+                          <a:latin typeface="Calibri"/>
+                        </a:rPr>
+                        <a:t>Suma el </a:t>
+                      </a:r>
+                      <a:r>
+                        <a:rPr sz="1100" b="1" i="0">
+                          <a:solidFill>
+                            <a:srgbClr val="2B2B2B"/>
+                          </a:solidFill>
+                          <a:latin typeface="Calibri"/>
+                        </a:rPr>
+                        <a:t>Manual de Oslo</a:t>
+                      </a:r>
+                      <a:r>
+                        <a:rPr sz="1100" b="0" i="0">
+                          <a:solidFill>
+                            <a:srgbClr val="2B2B2B"/>
+                          </a:solidFill>
+                          <a:latin typeface="Calibri"/>
+                        </a:rPr>
+                        <a:t>: qué cuenta como innovación y cómo se gestiona; el curso acumula.</a:t>
+                      </a:r>
+                    </a:p>
+                  </a:txBody>
+                  <a:tcPr anchor="ctr" marL="109728" marR="91440" marT="36576" marB="36576">
+                    <a:solidFill>
+                      <a:srgbClr val="FFFFFF"/>
+                    </a:solidFill>
+                  </a:tcPr>
+                </a:tc>
+              </a:tr>
+              <a:tr h="477520">
+                <a:tc>
+                  <a:txBody>
+                    <a:bodyPr/>
+                    <a:lstStyle/>
+                    <a:p>
+                      <a:pPr algn="l"/>
+                      <a:r>
+                        <a:rPr sz="1100" b="1" i="0">
+                          <a:solidFill>
+                            <a:srgbClr val="2B2B2B"/>
+                          </a:solidFill>
+                          <a:latin typeface="Calibri"/>
+                        </a:rPr>
+                        <a:t>Sesión 05</a:t>
+                      </a:r>
+                      <a:r>
+                        <a:rPr sz="1100" b="0" i="0">
+                          <a:solidFill>
+                            <a:srgbClr val="2B2B2B"/>
+                          </a:solidFill>
+                          <a:latin typeface="Calibri"/>
+                        </a:rPr>
+                        <a:t> · pendiente</a:t>
+                      </a:r>
+                    </a:p>
+                  </a:txBody>
+                  <a:tcPr anchor="ctr" marL="109728" marR="91440" marT="36576" marB="36576">
+                    <a:solidFill>
+                      <a:srgbClr val="F2F2F2"/>
+                    </a:solidFill>
+                  </a:tcPr>
+                </a:tc>
+                <a:tc>
+                  <a:txBody>
+                    <a:bodyPr/>
+                    <a:lstStyle/>
+                    <a:p>
+                      <a:pPr algn="l"/>
+                      <a:r>
+                        <a:rPr sz="1100" b="1" i="0">
+                          <a:solidFill>
+                            <a:srgbClr val="2B2B2B"/>
+                          </a:solidFill>
+                          <a:latin typeface="Calibri"/>
+                        </a:rPr>
+                        <a:t>Parcial 2</a:t>
+                      </a:r>
+                      <a:r>
+                        <a:rPr sz="1100" b="0" i="0">
+                          <a:solidFill>
+                            <a:srgbClr val="2B2B2B"/>
+                          </a:solidFill>
+                          <a:latin typeface="Calibri"/>
+                        </a:rPr>
+                        <a:t> · Cuestionario · 21%</a:t>
+                      </a:r>
+                    </a:p>
+                  </a:txBody>
+                  <a:tcPr anchor="ctr" marL="109728" marR="91440" marT="36576" marB="36576">
+                    <a:solidFill>
+                      <a:srgbClr val="F2F2F2"/>
+                    </a:solidFill>
+                  </a:tcPr>
+                </a:tc>
+                <a:tc>
+                  <a:txBody>
+                    <a:bodyPr/>
+                    <a:lstStyle/>
+                    <a:p>
+                      <a:pPr algn="l"/>
+                      <a:r>
+                        <a:rPr sz="1100" b="0" i="0">
+                          <a:solidFill>
+                            <a:srgbClr val="2B2B2B"/>
+                          </a:solidFill>
+                          <a:latin typeface="Calibri"/>
+                        </a:rPr>
+                        <a:t>Tipifica tu innovación (producto, proceso, organización, marketing, social) y </a:t>
+                      </a:r>
+                      <a:r>
+                        <a:rPr sz="1100" b="1" i="0">
+                          <a:solidFill>
+                            <a:srgbClr val="2B2B2B"/>
+                          </a:solidFill>
+                          <a:latin typeface="Calibri"/>
+                        </a:rPr>
+                        <a:t>justifícala</a:t>
+                      </a:r>
+                      <a:r>
+                        <a:rPr sz="1100" b="0" i="0">
+                          <a:solidFill>
+                            <a:srgbClr val="2B2B2B"/>
+                          </a:solidFill>
+                          <a:latin typeface="Calibri"/>
+                        </a:rPr>
+                        <a:t>.</a:t>
+                      </a:r>
+                    </a:p>
+                  </a:txBody>
+                  <a:tcPr anchor="ctr" marL="109728" marR="91440" marT="36576" marB="36576">
+                    <a:solidFill>
+                      <a:srgbClr val="F2F2F2"/>
+                    </a:solidFill>
+                  </a:tcPr>
+                </a:tc>
+              </a:tr>
+              <a:tr h="477520">
+                <a:tc>
+                  <a:txBody>
+                    <a:bodyPr/>
+                    <a:lstStyle/>
+                    <a:p>
+                      <a:pPr algn="l"/>
+                      <a:r>
+                        <a:rPr sz="1100" b="1" i="0">
+                          <a:solidFill>
+                            <a:srgbClr val="2B2B2B"/>
+                          </a:solidFill>
+                          <a:latin typeface="Calibri"/>
+                        </a:rPr>
+                        <a:t>Sesión 06</a:t>
+                      </a:r>
+                      <a:r>
+                        <a:rPr sz="1100" b="0" i="0">
+                          <a:solidFill>
+                            <a:srgbClr val="2B2B2B"/>
+                          </a:solidFill>
+                          <a:latin typeface="Calibri"/>
+                        </a:rPr>
+                        <a:t> · pendiente</a:t>
+                      </a:r>
+                    </a:p>
+                  </a:txBody>
+                  <a:tcPr anchor="ctr" marL="109728" marR="91440" marT="36576" marB="36576">
+                    <a:solidFill>
+                      <a:srgbClr val="FFFFFF"/>
+                    </a:solidFill>
+                  </a:tcPr>
+                </a:tc>
+                <a:tc>
+                  <a:txBody>
+                    <a:bodyPr/>
+                    <a:lstStyle/>
+                    <a:p>
+                      <a:pPr algn="l"/>
+                      <a:r>
+                        <a:rPr sz="1100" b="1" i="0">
+                          <a:solidFill>
+                            <a:srgbClr val="2B2B2B"/>
+                          </a:solidFill>
+                          <a:latin typeface="Calibri"/>
+                        </a:rPr>
+                        <a:t>ACA Final</a:t>
+                      </a:r>
+                      <a:r>
+                        <a:rPr sz="1100" b="0" i="0">
+                          <a:solidFill>
+                            <a:srgbClr val="2B2B2B"/>
+                          </a:solidFill>
+                          <a:latin typeface="Calibri"/>
+                        </a:rPr>
+                        <a:t> · Tarea · 32,8%</a:t>
+                      </a:r>
+                    </a:p>
+                  </a:txBody>
+                  <a:tcPr anchor="ctr" marL="109728" marR="91440" marT="36576" marB="36576">
+                    <a:solidFill>
+                      <a:srgbClr val="FFFFFF"/>
+                    </a:solidFill>
+                  </a:tcPr>
+                </a:tc>
+                <a:tc>
+                  <a:txBody>
+                    <a:bodyPr/>
+                    <a:lstStyle/>
+                    <a:p>
+                      <a:pPr algn="l"/>
+                      <a:r>
+                        <a:rPr sz="1100" b="0" i="0">
+                          <a:solidFill>
+                            <a:srgbClr val="2B2B2B"/>
+                          </a:solidFill>
+                          <a:latin typeface="Calibri"/>
+                        </a:rPr>
+                        <a:t>Sube la </a:t>
+                      </a:r>
+                      <a:r>
+                        <a:rPr sz="1100" b="1" i="0">
+                          <a:solidFill>
+                            <a:srgbClr val="2B2B2B"/>
+                          </a:solidFill>
+                          <a:latin typeface="Calibri"/>
+                        </a:rPr>
+                        <a:t>propuesta consolidada</a:t>
+                      </a:r>
+                      <a:r>
+                        <a:rPr sz="1100" b="0" i="0">
+                          <a:solidFill>
+                            <a:srgbClr val="2B2B2B"/>
+                          </a:solidFill>
+                          <a:latin typeface="Calibri"/>
+                        </a:rPr>
+                        <a:t>: problema, tipo Oslo, FODA, Canvas, MVP, vigilancia y pitch.</a:t>
+                      </a:r>
+                    </a:p>
+                  </a:txBody>
+                  <a:tcPr anchor="ctr" marL="109728" marR="91440" marT="36576" marB="36576">
+                    <a:solidFill>
+                      <a:srgbClr val="FFFFFF"/>
+                    </a:solidFill>
+                  </a:tcPr>
+                </a:tc>
+              </a:tr>
+              <a:tr h="477520">
+                <a:tc>
+                  <a:txBody>
+                    <a:bodyPr/>
+                    <a:lstStyle/>
+                    <a:p>
+                      <a:pPr algn="l"/>
+                      <a:r>
+                        <a:rPr sz="1100" b="1" i="0">
+                          <a:solidFill>
+                            <a:srgbClr val="2B2B2B"/>
+                          </a:solidFill>
+                          <a:latin typeface="Calibri"/>
+                        </a:rPr>
+                        <a:t>Sesión 06</a:t>
+                      </a:r>
+                      <a:r>
+                        <a:rPr sz="1100" b="0" i="0">
+                          <a:solidFill>
+                            <a:srgbClr val="2B2B2B"/>
+                          </a:solidFill>
+                          <a:latin typeface="Calibri"/>
+                        </a:rPr>
+                        <a:t> · pendiente</a:t>
+                      </a:r>
+                    </a:p>
+                  </a:txBody>
+                  <a:tcPr anchor="ctr" marL="109728" marR="91440" marT="36576" marB="36576">
+                    <a:solidFill>
+                      <a:srgbClr val="F2F2F2"/>
+                    </a:solidFill>
+                  </a:tcPr>
+                </a:tc>
+                <a:tc>
+                  <a:txBody>
+                    <a:bodyPr/>
+                    <a:lstStyle/>
+                    <a:p>
+                      <a:pPr algn="l"/>
+                      <a:r>
+                        <a:rPr sz="1100" b="1" i="0">
+                          <a:solidFill>
+                            <a:srgbClr val="2B2B2B"/>
+                          </a:solidFill>
+                          <a:latin typeface="Calibri"/>
+                        </a:rPr>
+                        <a:t>Quiz 3</a:t>
+                      </a:r>
+                      <a:r>
+                        <a:rPr sz="1100" b="0" i="0">
+                          <a:solidFill>
+                            <a:srgbClr val="2B2B2B"/>
+                          </a:solidFill>
+                          <a:latin typeface="Calibri"/>
+                        </a:rPr>
+                        <a:t> · Cuestionario · 4%</a:t>
+                      </a:r>
+                    </a:p>
+                  </a:txBody>
+                  <a:tcPr anchor="ctr" marL="109728" marR="91440" marT="36576" marB="36576">
+                    <a:solidFill>
+                      <a:srgbClr val="F2F2F2"/>
+                    </a:solidFill>
+                  </a:tcPr>
+                </a:tc>
+                <a:tc>
+                  <a:txBody>
+                    <a:bodyPr/>
+                    <a:lstStyle/>
+                    <a:p>
+                      <a:pPr algn="l"/>
+                      <a:r>
+                        <a:rPr sz="1100" b="0" i="0">
+                          <a:solidFill>
+                            <a:srgbClr val="2B2B2B"/>
+                          </a:solidFill>
+                          <a:latin typeface="Calibri"/>
+                        </a:rPr>
+                        <a:t>Ten claros </a:t>
+                      </a:r>
+                      <a:r>
+                        <a:rPr sz="1100" b="1" i="0">
+                          <a:solidFill>
+                            <a:srgbClr val="2B2B2B"/>
+                          </a:solidFill>
+                          <a:latin typeface="Calibri"/>
+                        </a:rPr>
+                        <a:t>FODA, Canvas y MVP</a:t>
+                      </a:r>
+                      <a:r>
+                        <a:rPr sz="1100" b="0" i="0">
+                          <a:solidFill>
+                            <a:srgbClr val="2B2B2B"/>
+                          </a:solidFill>
+                          <a:latin typeface="Calibri"/>
+                        </a:rPr>
+                        <a:t> (verificable) y para qué sirve la vigilancia tecnológica.</a:t>
+                      </a:r>
+                    </a:p>
+                  </a:txBody>
+                  <a:tcPr anchor="ctr" marL="109728" marR="91440" marT="36576" marB="36576">
+                    <a:solidFill>
+                      <a:srgbClr val="F2F2F2"/>
+                    </a:solidFill>
+                  </a:tcPr>
+                </a:tc>
+              </a:tr>
+              <a:tr h="477520">
+                <a:tc>
+                  <a:txBody>
+                    <a:bodyPr/>
+                    <a:lstStyle/>
+                    <a:p>
+                      <a:pPr algn="l"/>
+                      <a:r>
+                        <a:rPr sz="1100" b="1" i="0">
+                          <a:solidFill>
+                            <a:srgbClr val="2B2B2B"/>
+                          </a:solidFill>
+                          <a:latin typeface="Calibri"/>
+                        </a:rPr>
+                        <a:t>Sesión 07</a:t>
+                      </a:r>
+                      <a:r>
+                        <a:rPr sz="1100" b="0" i="0">
+                          <a:solidFill>
+                            <a:srgbClr val="2B2B2B"/>
+                          </a:solidFill>
+                          <a:latin typeface="Calibri"/>
+                        </a:rPr>
+                        <a:t> · pendiente</a:t>
+                      </a:r>
+                    </a:p>
+                  </a:txBody>
+                  <a:tcPr anchor="ctr" marL="109728" marR="91440" marT="36576" marB="36576">
+                    <a:solidFill>
+                      <a:srgbClr val="FFFFFF"/>
+                    </a:solidFill>
+                  </a:tcPr>
+                </a:tc>
+                <a:tc>
+                  <a:txBody>
+                    <a:bodyPr/>
+                    <a:lstStyle/>
+                    <a:p>
+                      <a:pPr algn="l"/>
+                      <a:r>
+                        <a:rPr sz="1100" b="1" i="0">
+                          <a:solidFill>
+                            <a:srgbClr val="2B2B2B"/>
+                          </a:solidFill>
+                          <a:latin typeface="Calibri"/>
+                        </a:rPr>
+                        <a:t>Autoevaluación</a:t>
+                      </a:r>
+                      <a:r>
+                        <a:rPr sz="1100" b="0" i="0">
+                          <a:solidFill>
+                            <a:srgbClr val="2B2B2B"/>
+                          </a:solidFill>
+                          <a:latin typeface="Calibri"/>
+                        </a:rPr>
+                        <a:t> · Cuestionario · 1,6%</a:t>
+                      </a:r>
+                    </a:p>
+                  </a:txBody>
+                  <a:tcPr anchor="ctr" marL="109728" marR="91440" marT="36576" marB="36576">
+                    <a:solidFill>
+                      <a:srgbClr val="FFFFFF"/>
+                    </a:solidFill>
+                  </a:tcPr>
+                </a:tc>
+                <a:tc>
+                  <a:txBody>
+                    <a:bodyPr/>
+                    <a:lstStyle/>
+                    <a:p>
+                      <a:pPr algn="l"/>
+                      <a:r>
+                        <a:rPr sz="1100" b="0" i="0">
+                          <a:solidFill>
+                            <a:srgbClr val="2B2B2B"/>
+                          </a:solidFill>
+                          <a:latin typeface="Calibri"/>
+                        </a:rPr>
+                        <a:t>Diligénciala tú, y solo tú, </a:t>
+                      </a:r>
+                      <a:r>
+                        <a:rPr sz="1100" b="1" i="0">
+                          <a:solidFill>
+                            <a:srgbClr val="2B2B2B"/>
+                          </a:solidFill>
+                          <a:latin typeface="Calibri"/>
+                        </a:rPr>
+                        <a:t>con honestidad</a:t>
+                      </a:r>
+                      <a:r>
+                        <a:rPr sz="1100" b="0" i="0">
+                          <a:solidFill>
+                            <a:srgbClr val="2B2B2B"/>
+                          </a:solidFill>
+                          <a:latin typeface="Calibri"/>
+                        </a:rPr>
+                        <a:t> sobre tu participación real.</a:t>
+                      </a:r>
+                    </a:p>
+                  </a:txBody>
+                  <a:tcPr anchor="ctr" marL="109728" marR="91440" marT="36576" marB="36576">
+                    <a:solidFill>
+                      <a:srgbClr val="FFFFFF"/>
+                    </a:solidFill>
+                  </a:tcPr>
+                </a:tc>
+              </a:tr>
+              <a:tr h="477520">
+                <a:tc>
+                  <a:txBody>
+                    <a:bodyPr/>
+                    <a:lstStyle/>
+                    <a:p>
+                      <a:pPr algn="l"/>
+                      <a:r>
+                        <a:rPr sz="1100" b="1" i="0">
+                          <a:solidFill>
+                            <a:srgbClr val="2B2B2B"/>
+                          </a:solidFill>
+                          <a:latin typeface="Calibri"/>
+                        </a:rPr>
+                        <a:t>Sesión 07</a:t>
+                      </a:r>
+                      <a:r>
+                        <a:rPr sz="1100" b="0" i="0">
+                          <a:solidFill>
+                            <a:srgbClr val="2B2B2B"/>
+                          </a:solidFill>
+                          <a:latin typeface="Calibri"/>
+                        </a:rPr>
+                        <a:t> · pendiente</a:t>
+                      </a:r>
+                    </a:p>
+                  </a:txBody>
+                  <a:tcPr anchor="ctr" marL="109728" marR="91440" marT="36576" marB="36576">
+                    <a:solidFill>
+                      <a:srgbClr val="F2F2F2"/>
+                    </a:solidFill>
+                  </a:tcPr>
+                </a:tc>
+                <a:tc>
+                  <a:txBody>
+                    <a:bodyPr/>
+                    <a:lstStyle/>
+                    <a:p>
+                      <a:pPr algn="l"/>
+                      <a:r>
+                        <a:rPr sz="1100" b="1" i="0">
+                          <a:solidFill>
+                            <a:srgbClr val="2B2B2B"/>
+                          </a:solidFill>
+                          <a:latin typeface="Calibri"/>
+                        </a:rPr>
+                        <a:t>Coevaluación</a:t>
+                      </a:r>
+                      <a:r>
+                        <a:rPr sz="1100" b="0" i="0">
+                          <a:solidFill>
+                            <a:srgbClr val="2B2B2B"/>
+                          </a:solidFill>
+                          <a:latin typeface="Calibri"/>
+                        </a:rPr>
+                        <a:t> · Foro · 1,6%</a:t>
+                      </a:r>
+                    </a:p>
+                  </a:txBody>
+                  <a:tcPr anchor="ctr" marL="109728" marR="91440" marT="36576" marB="36576">
+                    <a:solidFill>
+                      <a:srgbClr val="F2F2F2"/>
+                    </a:solidFill>
+                  </a:tcPr>
+                </a:tc>
+                <a:tc>
+                  <a:txBody>
+                    <a:bodyPr/>
+                    <a:lstStyle/>
+                    <a:p>
+                      <a:pPr algn="l"/>
+                      <a:r>
+                        <a:rPr sz="1100" b="1" i="0">
+                          <a:solidFill>
+                            <a:srgbClr val="2B2B2B"/>
+                          </a:solidFill>
+                          <a:latin typeface="Calibri"/>
+                        </a:rPr>
+                        <a:t>Publica</a:t>
+                      </a:r>
+                      <a:r>
+                        <a:rPr sz="1100" b="0" i="0">
+                          <a:solidFill>
+                            <a:srgbClr val="2B2B2B"/>
+                          </a:solidFill>
+                          <a:latin typeface="Calibri"/>
+                        </a:rPr>
+                        <a:t> tu aporte: valora hechos del trabajo en equipo, no a las personas.</a:t>
+                      </a:r>
+                    </a:p>
+                  </a:txBody>
+                  <a:tcPr anchor="ctr" marL="109728" marR="91440" marT="36576" marB="36576">
+                    <a:solidFill>
+                      <a:srgbClr val="F2F2F2"/>
+                    </a:solidFill>
+                  </a:tcPr>
+                </a:tc>
+              </a:tr>
+            </a:tbl>
+          </a:graphicData>
+        </a:graphic>
+      </p:graphicFrame>
+      <p:sp>
+        <p:nvSpPr>
+          <p:cNvPr id="6" name="TextBox 5"/>
+          <p:cNvSpPr txBox="1"/>
+          <p:nvPr/>
+        </p:nvSpPr>
+        <p:spPr>
+          <a:xfrm>
+            <a:off x="640080" y="6080760"/>
+            <a:ext cx="10911535" cy="548640"/>
+          </a:xfrm>
+          <a:prstGeom prst="rect">
+            <a:avLst/>
+          </a:prstGeom>
+          <a:noFill/>
+        </p:spPr>
+        <p:txBody>
+          <a:bodyPr wrap="square" anchor="t" lIns="0" rIns="0" tIns="0" bIns="0">
+            <a:spAutoFit/>
+          </a:bodyPr>
+          <a:lstStyle/>
+          <a:p>
+            <a:r>
+              <a:rPr sz="1200" b="0" i="1">
+                <a:solidFill>
+                  <a:srgbClr val="2B2B2B"/>
+                </a:solidFill>
+                <a:latin typeface="Calibri"/>
+              </a:rPr>
+              <a:t>Esta misma tabla va al final de todas las sesiones. La </a:t>
+            </a:r>
+            <a:r>
+              <a:rPr sz="1200" b="1" i="1">
+                <a:solidFill>
+                  <a:srgbClr val="2B2B2B"/>
+                </a:solidFill>
+                <a:latin typeface="Calibri"/>
+              </a:rPr>
+              <a:t>fecha</a:t>
+            </a:r>
+            <a:r>
+              <a:rPr sz="1200" b="0" i="1">
+                <a:solidFill>
+                  <a:srgbClr val="2B2B2B"/>
+                </a:solidFill>
+                <a:latin typeface="Calibri"/>
+              </a:rPr>
+              <a:t> de cada ventana está en el enunciado del ítem (`Clases/Recursos/ACAs/`) y en el aula: si el aula y cualquier otro material se contradicen, </a:t>
+            </a:r>
+            <a:r>
+              <a:rPr sz="1200" b="1" i="1">
+                <a:solidFill>
+                  <a:srgbClr val="2B2B2B"/>
+                </a:solidFill>
+                <a:latin typeface="Calibri"/>
+              </a:rPr>
+              <a:t>manda el aula</a:t>
+            </a:r>
+            <a:r>
+              <a:rPr sz="1200" b="0" i="1">
+                <a:solidFill>
+                  <a:srgbClr val="2B2B2B"/>
+                </a:solidFill>
+                <a:latin typeface="Calibri"/>
+              </a:rPr>
+              <a:t>.</a:t>
+            </a:r>
+          </a:p>
+        </p:txBody>
+      </p:sp>
+      <p:sp>
+        <p:nvSpPr>
+          <p:cNvPr id="7" name="TextBox 6"/>
+          <p:cNvSpPr txBox="1"/>
+          <p:nvPr/>
+        </p:nvSpPr>
+        <p:spPr>
+          <a:xfrm>
+            <a:off x="11094415" y="6446520"/>
+            <a:ext cx="548640" cy="274320"/>
+          </a:xfrm>
+          <a:prstGeom prst="rect">
+            <a:avLst/>
+          </a:prstGeom>
+          <a:noFill/>
+        </p:spPr>
+        <p:txBody>
+          <a:bodyPr wrap="square" anchor="t" lIns="0" rIns="0" tIns="0" bIns="0">
+            <a:spAutoFit/>
+          </a:bodyPr>
+          <a:lstStyle/>
+          <a:p>
+            <a:pPr algn="r"/>
+            <a:r>
+              <a:rPr sz="1000" b="1" i="0">
+                <a:solidFill>
+                  <a:srgbClr val="8F989D"/>
+                </a:solidFill>
+                <a:latin typeface="Calibri"/>
+              </a:rPr>
+              <a:t>23</a:t>
+            </a:r>
+          </a:p>
+        </p:txBody>
+      </p:sp>
+    </p:spTree>
+  </p:cSld>
+  <p:clrMapOvr>
+    <a:masterClrMapping/>
+  </p:clrMapOvr>
+</p:sld>
+</file>
+
+<file path=ppt/slides/slide24.xml><?xml version="1.0" encoding="utf-8"?>
 <p:sld xmlns:a="http://schemas.openxmlformats.org/drawingml/2006/main" xmlns:p="http://schemas.openxmlformats.org/presentationml/2006/main" xmlns:r="http://schemas.openxmlformats.org/officeDocument/2006/relationships">
   <p:cSld>
     <p:bg>
